--- a/submission/final/SecureMailScope-SIH26159-Zero-Day.pptx
+++ b/submission/final/SecureMailScope-SIH26159-Zero-Day.pptx
@@ -5715,11 +5715,11 @@
             <a:r>
               <a:rPr sz="1300" b="0">
                 <a:solidFill>
-                  <a:srgbClr val="C01A1A"/>
+                  <a:srgbClr val="111B2A"/>
                 </a:solidFill>
                 <a:latin typeface="Calibri"/>
               </a:rPr>
-              <a:t>Theme – [UNRESOLVED: theme]</a:t>
+              <a:t>Theme – Blockchain &amp; Cybersecurity</a:t>
             </a:r>
           </a:p>
           <a:p>
@@ -5753,11 +5753,11 @@
             <a:r>
               <a:rPr sz="1300" b="0">
                 <a:solidFill>
-                  <a:srgbClr val="C01A1A"/>
+                  <a:srgbClr val="111B2A"/>
                 </a:solidFill>
                 <a:latin typeface="Calibri"/>
               </a:rPr>
-              <a:t>Team ID – [UNRESOLVED: team id]</a:t>
+              <a:t>Team ID – 146876</a:t>
             </a:r>
           </a:p>
           <a:p>
@@ -6770,7 +6770,7 @@
       </p:sp>
       <p:pic>
         <p:nvPicPr>
-          <p:cNvPr id="15374" name="Picture 15373" descr="02-investigation-overview.png"/>
+          <p:cNvPr id="15374" name="Picture 15373" descr="02-overview.png"/>
           <p:cNvPicPr>
             <a:picLocks noChangeAspect="1"/>
           </p:cNvPicPr>
@@ -6873,7 +6873,7 @@
                 </a:solidFill>
                 <a:latin typeface="Calibri"/>
               </a:rPr>
-              <a:t>The investigation overview, on seven synthetic captures. Actual product output.</a:t>
+              <a:t>The investigation overview, on 9 synthetic captures. Actual product output.</a:t>
             </a:r>
           </a:p>
         </p:txBody>
@@ -8373,7 +8373,7 @@
       </p:sp>
       <p:pic>
         <p:nvPicPr>
-          <p:cNvPr id="17426" name="Picture 17425" descr="05-evidence-chain.png"/>
+          <p:cNvPr id="17426" name="Picture 17425" descr="06-evidence-provenance.png"/>
           <p:cNvPicPr>
             <a:picLocks noChangeAspect="1"/>
           </p:cNvPicPr>
@@ -8483,7 +8483,7 @@
       </p:sp>
       <p:pic>
         <p:nvPicPr>
-          <p:cNvPr id="17429" name="Picture 17428" descr="07-cryptographic-intelligence.png"/>
+          <p:cNvPr id="17429" name="Picture 17428" descr="07-crypto-intelligence.png"/>
           <p:cNvPicPr>
             <a:picLocks noChangeAspect="1"/>
           </p:cNvPicPr>
@@ -9420,7 +9420,7 @@
                 </a:solidFill>
                 <a:latin typeface="Calibri"/>
               </a:rPr>
-              <a:t>1,354 backend tests pass; 1,364 with the TShark cross-check enabled</a:t>
+              <a:t>1,357 backend tests pass; 1,367 with the TShark cross-check enabled</a:t>
             </a:r>
           </a:p>
           <a:p>
@@ -9458,7 +9458,7 @@
                 </a:solidFill>
                 <a:latin typeface="Calibri"/>
               </a:rPr>
-              <a:t>88 frontend tests · 5 browser end-to-end specs against the real backend, nothing mocked</a:t>
+              <a:t>89 frontend tests · 5 browser end-to-end specs against the real backend, nothing mocked</a:t>
             </a:r>
           </a:p>
           <a:p>
@@ -9477,7 +9477,7 @@
                 </a:solidFill>
                 <a:latin typeface="Calibri"/>
               </a:rPr>
-              <a:t>ruff and mypy clean over 153 files</a:t>
+              <a:t>ruff and mypy clean over 156 files</a:t>
             </a:r>
           </a:p>
           <a:p>
@@ -9522,7 +9522,7 @@
       </p:sp>
       <p:pic>
         <p:nvPicPr>
-          <p:cNvPr id="17413" name="Picture 17412" descr="08-drift-before-after.png"/>
+          <p:cNvPr id="17413" name="Picture 17412" descr="08-drift.png"/>
           <p:cNvPicPr>
             <a:picLocks noChangeAspect="1"/>
           </p:cNvPicPr>
@@ -9625,7 +9625,7 @@
                 </a:solidFill>
                 <a:latin typeface="Calibri"/>
               </a:rPr>
-              <a:t>Cryptographic drift across two captures. Actual product output.</a:t>
+              <a:t>Cryptographic drift between captures of one endpoint. Actual product output.</a:t>
             </a:r>
           </a:p>
         </p:txBody>
@@ -10524,7 +10524,7 @@
       </p:sp>
       <p:pic>
         <p:nvPicPr>
-          <p:cNvPr id="17415" name="Picture 17414" descr="04-finding-evidence-detail.png"/>
+          <p:cNvPr id="17415" name="Picture 17414" descr="04-finding-evidence.png"/>
           <p:cNvPicPr>
             <a:picLocks noChangeAspect="1"/>
           </p:cNvPicPr>
@@ -10634,7 +10634,7 @@
       </p:sp>
       <p:pic>
         <p:nvPicPr>
-          <p:cNvPr id="17418" name="Picture 17417" descr="08-drift-before-after.png"/>
+          <p:cNvPr id="17418" name="Picture 17417" descr="08-drift.png"/>
           <p:cNvPicPr>
             <a:picLocks noChangeAspect="1"/>
           </p:cNvPicPr>
@@ -10737,7 +10737,7 @@
                 </a:solidFill>
                 <a:latin typeface="Calibri"/>
               </a:rPr>
-              <a:t>Configuration drift between two captures.</a:t>
+              <a:t>Configuration drift between captures of one endpoint.</a:t>
             </a:r>
           </a:p>
         </p:txBody>
@@ -12021,7 +12021,7 @@
       </p:sp>
       <p:pic>
         <p:nvPicPr>
-          <p:cNvPr id="17414" name="Picture 17413" descr="03-findings-workspace.png"/>
+          <p:cNvPr id="17414" name="Picture 17413" descr="03-findings.png"/>
           <p:cNvPicPr>
             <a:picLocks noChangeAspect="1"/>
           </p:cNvPicPr>
@@ -12035,8 +12035,8 @@
         </p:blipFill>
         <p:spPr>
           <a:xfrm>
-            <a:off x="384048" y="4553712"/>
-            <a:ext cx="2944368" cy="1656207"/>
+            <a:off x="384048" y="4389120"/>
+            <a:ext cx="2743200" cy="1543050"/>
           </a:xfrm>
           <a:prstGeom prst="rect">
             <a:avLst/>
@@ -12051,8 +12051,8 @@
         </p:nvSpPr>
         <p:spPr>
           <a:xfrm>
-            <a:off x="384048" y="4553712"/>
-            <a:ext cx="2944368" cy="1656207"/>
+            <a:off x="384048" y="4389120"/>
+            <a:ext cx="2743200" cy="1543050"/>
           </a:xfrm>
           <a:prstGeom prst="rect">
             <a:avLst/>
@@ -12095,8 +12095,8 @@
         </p:nvSpPr>
         <p:spPr>
           <a:xfrm>
-            <a:off x="384048" y="6228207"/>
-            <a:ext cx="2944368" cy="219456"/>
+            <a:off x="384048" y="5950457"/>
+            <a:ext cx="2743200" cy="219456"/>
           </a:xfrm>
           <a:prstGeom prst="rect">
             <a:avLst/>
@@ -12131,7 +12131,7 @@
       </p:sp>
       <p:pic>
         <p:nvPicPr>
-          <p:cNvPr id="17417" name="Picture 17416" descr="06-session-detail.png"/>
+          <p:cNvPr id="17417" name="Picture 17416" descr="05-session.png"/>
           <p:cNvPicPr>
             <a:picLocks noChangeAspect="1"/>
           </p:cNvPicPr>
@@ -12145,8 +12145,8 @@
         </p:blipFill>
         <p:spPr>
           <a:xfrm>
-            <a:off x="3456432" y="4553712"/>
-            <a:ext cx="2944368" cy="1656207"/>
+            <a:off x="3255264" y="4389120"/>
+            <a:ext cx="2743200" cy="1543050"/>
           </a:xfrm>
           <a:prstGeom prst="rect">
             <a:avLst/>
@@ -12161,8 +12161,8 @@
         </p:nvSpPr>
         <p:spPr>
           <a:xfrm>
-            <a:off x="3456432" y="4553712"/>
-            <a:ext cx="2944368" cy="1656207"/>
+            <a:off x="3255264" y="4389120"/>
+            <a:ext cx="2743200" cy="1543050"/>
           </a:xfrm>
           <a:prstGeom prst="rect">
             <a:avLst/>
@@ -12205,8 +12205,8 @@
         </p:nvSpPr>
         <p:spPr>
           <a:xfrm>
-            <a:off x="3456432" y="6228207"/>
-            <a:ext cx="2944368" cy="219456"/>
+            <a:off x="3255264" y="5950457"/>
+            <a:ext cx="2743200" cy="219456"/>
           </a:xfrm>
           <a:prstGeom prst="rect">
             <a:avLst/>
@@ -12234,7 +12234,7 @@
                 </a:solidFill>
                 <a:latin typeface="Calibri"/>
               </a:rPr>
-              <a:t>Session inventory</a:t>
+              <a:t>Session negotiation</a:t>
             </a:r>
           </a:p>
         </p:txBody>
@@ -12354,6 +12354,63 @@
                 <a:latin typeface="Calibri"/>
               </a:rPr>
               <a:t>REQUIREMENT-COVERAGE.md — all 35 SIH26159 capabilities with status and evidence</a:t>
+            </a:r>
+          </a:p>
+          <a:p>
+            <a:pPr>
+              <a:lnSpc>
+                <a:spcPct val="88000"/>
+              </a:lnSpc>
+              <a:spcAft>
+                <a:spcPts val="200"/>
+              </a:spcAft>
+            </a:pPr>
+            <a:r>
+              <a:rPr sz="800" b="1">
+                <a:solidFill>
+                  <a:srgbClr val="111B2A"/>
+                </a:solidFill>
+                <a:latin typeface="Calibri"/>
+              </a:rPr>
+              <a:t>Repository  </a:t>
+            </a:r>
+            <a:r>
+              <a:rPr sz="800" u="sng">
+                <a:solidFill>
+                  <a:srgbClr val="0B5FA5"/>
+                </a:solidFill>
+                <a:latin typeface="Calibri"/>
+                <a:hlinkClick r:id="rId6"/>
+              </a:rPr>
+              <a:t>https://github.com/sgtsujith141-wq/securemailscope</a:t>
+            </a:r>
+          </a:p>
+          <a:p>
+            <a:pPr>
+              <a:lnSpc>
+                <a:spcPct val="88000"/>
+              </a:lnSpc>
+              <a:spcAft>
+                <a:spcPts val="200"/>
+              </a:spcAft>
+            </a:pPr>
+            <a:r>
+              <a:rPr sz="800" b="1">
+                <a:solidFill>
+                  <a:srgbClr val="111B2A"/>
+                </a:solidFill>
+                <a:latin typeface="Calibri"/>
+              </a:rPr>
+              <a:t>Demonstration video  </a:t>
+            </a:r>
+            <a:r>
+              <a:rPr sz="800" i="1">
+                <a:solidFill>
+                  <a:srgbClr val="4A5A70"/>
+                </a:solidFill>
+                <a:latin typeface="Calibri"/>
+              </a:rPr>
+              <a:t>included in the submission package — public URL reserved, not yet issued</a:t>
             </a:r>
           </a:p>
         </p:txBody>

--- a/submission/final/SecureMailScope-SIH26159-Zero-Day.pptx
+++ b/submission/final/SecureMailScope-SIH26159-Zero-Day.pptx
@@ -5979,7 +5979,7 @@
                 <a:spcPts val="300"/>
               </a:spcAft>
               <a:buFont typeface="Wingdings" panose="05000000000000000000" pitchFamily="2" charset="2"/>
-              <a:buChar char="v"/>
+              <a:buNone/>
             </a:pPr>
             <a:r>
               <a:rPr sz="1500" b="1">
@@ -6006,6 +6006,7 @@
               <a:spcAft>
                 <a:spcPts val="300"/>
               </a:spcAft>
+              <a:buNone/>
             </a:pPr>
             <a:r>
               <a:rPr sz="1050" b="0">
@@ -7247,8 +7248,8 @@
         </p:nvSpPr>
         <p:spPr bwMode="auto">
           <a:xfrm>
-            <a:off x="384048" y="1024128"/>
-            <a:ext cx="11430000" cy="365760"/>
+            <a:off x="384048" y="969264"/>
+            <a:ext cx="11430000" cy="310896"/>
           </a:xfrm>
           <a:prstGeom prst="rect">
             <a:avLst/>
@@ -7275,7 +7276,7 @@
                 <a:spcPts val="300"/>
               </a:spcAft>
               <a:buFont typeface="Arial" panose="020B0604020202020204" pitchFamily="34" charset="0"/>
-              <a:buChar char="•"/>
+              <a:buNone/>
             </a:pPr>
             <a:r>
               <a:rPr sz="1000" b="0">
@@ -7284,7 +7285,7 @@
                 </a:solidFill>
                 <a:latin typeface="Calibri"/>
               </a:rPr>
-              <a:t>Each stage reads only what the previous one produced. Line counts are actual.</a:t>
+              <a:t>One direction of flow. Each stage reads only what the previous one produced, and attaches the packets it read it from.</a:t>
             </a:r>
           </a:p>
         </p:txBody>
@@ -7449,8 +7450,260 @@
         </p:nvSpPr>
         <p:spPr>
           <a:xfrm>
-            <a:off x="384048" y="1426464"/>
-            <a:ext cx="5532120" cy="365760"/>
+            <a:off x="384048" y="1371600"/>
+            <a:ext cx="1901952" cy="2487168"/>
+          </a:xfrm>
+          <a:prstGeom prst="roundRect">
+            <a:avLst/>
+          </a:prstGeom>
+          <a:solidFill>
+            <a:srgbClr val="F7FAFD"/>
+          </a:solidFill>
+          <a:ln w="9525">
+            <a:solidFill>
+              <a:srgbClr val="DCE6F2"/>
+            </a:solidFill>
+          </a:ln>
+          <a:effectLst/>
+        </p:spPr>
+        <p:style>
+          <a:lnRef idx="1">
+            <a:schemeClr val="accent1"/>
+          </a:lnRef>
+          <a:fillRef idx="3">
+            <a:schemeClr val="accent1"/>
+          </a:fillRef>
+          <a:effectRef idx="2">
+            <a:schemeClr val="accent1"/>
+          </a:effectRef>
+          <a:fontRef idx="minor">
+            <a:schemeClr val="lt1"/>
+          </a:fontRef>
+        </p:style>
+        <p:txBody>
+          <a:bodyPr rtlCol="0" anchor="t" wrap="square" lIns="73152" tIns="27432"/>
+          <a:lstStyle/>
+          <a:p>
+            <a:pPr algn="ctr">
+              <a:lnSpc>
+                <a:spcPct val="100000"/>
+              </a:lnSpc>
+              <a:spcAft>
+                <a:spcPts val="300"/>
+              </a:spcAft>
+              <a:buNone/>
+            </a:pPr>
+            <a:r>
+              <a:rPr sz="750" b="1">
+                <a:solidFill>
+                  <a:srgbClr val="8A9BB0"/>
+                </a:solidFill>
+                <a:latin typeface="Calibri"/>
+              </a:rPr>
+              <a:t>INPUT</a:t>
+            </a:r>
+          </a:p>
+        </p:txBody>
+      </p:sp>
+      <p:sp>
+        <p:nvSpPr>
+          <p:cNvPr id="17412" name="Rounded Rectangle 17411"/>
+          <p:cNvSpPr/>
+          <p:nvPr/>
+        </p:nvSpPr>
+        <p:spPr>
+          <a:xfrm>
+            <a:off x="2505456" y="1371600"/>
+            <a:ext cx="3950208" cy="2487168"/>
+          </a:xfrm>
+          <a:prstGeom prst="roundRect">
+            <a:avLst/>
+          </a:prstGeom>
+          <a:solidFill>
+            <a:srgbClr val="F7FAFD"/>
+          </a:solidFill>
+          <a:ln w="9525">
+            <a:solidFill>
+              <a:srgbClr val="DCE6F2"/>
+            </a:solidFill>
+          </a:ln>
+          <a:effectLst/>
+        </p:spPr>
+        <p:style>
+          <a:lnRef idx="1">
+            <a:schemeClr val="accent1"/>
+          </a:lnRef>
+          <a:fillRef idx="3">
+            <a:schemeClr val="accent1"/>
+          </a:fillRef>
+          <a:effectRef idx="2">
+            <a:schemeClr val="accent1"/>
+          </a:effectRef>
+          <a:fontRef idx="minor">
+            <a:schemeClr val="lt1"/>
+          </a:fontRef>
+        </p:style>
+        <p:txBody>
+          <a:bodyPr rtlCol="0" anchor="t" wrap="square" lIns="73152" tIns="27432"/>
+          <a:lstStyle/>
+          <a:p>
+            <a:pPr algn="ctr">
+              <a:lnSpc>
+                <a:spcPct val="100000"/>
+              </a:lnSpc>
+              <a:spcAft>
+                <a:spcPts val="300"/>
+              </a:spcAft>
+              <a:buNone/>
+            </a:pPr>
+            <a:r>
+              <a:rPr sz="750" b="1">
+                <a:solidFill>
+                  <a:srgbClr val="8A9BB0"/>
+                </a:solidFill>
+                <a:latin typeface="Calibri"/>
+              </a:rPr>
+              <a:t>RECONSTRUCTION</a:t>
+            </a:r>
+          </a:p>
+        </p:txBody>
+      </p:sp>
+      <p:sp>
+        <p:nvSpPr>
+          <p:cNvPr id="17413" name="Rounded Rectangle 17412"/>
+          <p:cNvSpPr/>
+          <p:nvPr/>
+        </p:nvSpPr>
+        <p:spPr>
+          <a:xfrm>
+            <a:off x="6675120" y="1371600"/>
+            <a:ext cx="2615184" cy="2487168"/>
+          </a:xfrm>
+          <a:prstGeom prst="roundRect">
+            <a:avLst/>
+          </a:prstGeom>
+          <a:solidFill>
+            <a:srgbClr val="F7FAFD"/>
+          </a:solidFill>
+          <a:ln w="9525">
+            <a:solidFill>
+              <a:srgbClr val="DCE6F2"/>
+            </a:solidFill>
+          </a:ln>
+          <a:effectLst/>
+        </p:spPr>
+        <p:style>
+          <a:lnRef idx="1">
+            <a:schemeClr val="accent1"/>
+          </a:lnRef>
+          <a:fillRef idx="3">
+            <a:schemeClr val="accent1"/>
+          </a:fillRef>
+          <a:effectRef idx="2">
+            <a:schemeClr val="accent1"/>
+          </a:effectRef>
+          <a:fontRef idx="minor">
+            <a:schemeClr val="lt1"/>
+          </a:fontRef>
+        </p:style>
+        <p:txBody>
+          <a:bodyPr rtlCol="0" anchor="t" wrap="square" lIns="73152" tIns="27432"/>
+          <a:lstStyle/>
+          <a:p>
+            <a:pPr algn="ctr">
+              <a:lnSpc>
+                <a:spcPct val="100000"/>
+              </a:lnSpc>
+              <a:spcAft>
+                <a:spcPts val="300"/>
+              </a:spcAft>
+              <a:buNone/>
+            </a:pPr>
+            <a:r>
+              <a:rPr sz="750" b="1">
+                <a:solidFill>
+                  <a:srgbClr val="8A9BB0"/>
+                </a:solidFill>
+                <a:latin typeface="Calibri"/>
+              </a:rPr>
+              <a:t>ASSESSMENT</a:t>
+            </a:r>
+          </a:p>
+        </p:txBody>
+      </p:sp>
+      <p:sp>
+        <p:nvSpPr>
+          <p:cNvPr id="17414" name="Rounded Rectangle 17413"/>
+          <p:cNvSpPr/>
+          <p:nvPr/>
+        </p:nvSpPr>
+        <p:spPr>
+          <a:xfrm>
+            <a:off x="9509760" y="1371600"/>
+            <a:ext cx="2304288" cy="2487168"/>
+          </a:xfrm>
+          <a:prstGeom prst="roundRect">
+            <a:avLst/>
+          </a:prstGeom>
+          <a:solidFill>
+            <a:srgbClr val="F7FAFD"/>
+          </a:solidFill>
+          <a:ln w="9525">
+            <a:solidFill>
+              <a:srgbClr val="DCE6F2"/>
+            </a:solidFill>
+          </a:ln>
+          <a:effectLst/>
+        </p:spPr>
+        <p:style>
+          <a:lnRef idx="1">
+            <a:schemeClr val="accent1"/>
+          </a:lnRef>
+          <a:fillRef idx="3">
+            <a:schemeClr val="accent1"/>
+          </a:fillRef>
+          <a:effectRef idx="2">
+            <a:schemeClr val="accent1"/>
+          </a:effectRef>
+          <a:fontRef idx="minor">
+            <a:schemeClr val="lt1"/>
+          </a:fontRef>
+        </p:style>
+        <p:txBody>
+          <a:bodyPr rtlCol="0" anchor="t" wrap="square" lIns="73152" tIns="27432"/>
+          <a:lstStyle/>
+          <a:p>
+            <a:pPr algn="ctr">
+              <a:lnSpc>
+                <a:spcPct val="100000"/>
+              </a:lnSpc>
+              <a:spcAft>
+                <a:spcPts val="300"/>
+              </a:spcAft>
+              <a:buNone/>
+            </a:pPr>
+            <a:r>
+              <a:rPr sz="750" b="1">
+                <a:solidFill>
+                  <a:srgbClr val="8A9BB0"/>
+                </a:solidFill>
+                <a:latin typeface="Calibri"/>
+              </a:rPr>
+              <a:t>OUTPUT</a:t>
+            </a:r>
+          </a:p>
+        </p:txBody>
+      </p:sp>
+      <p:sp>
+        <p:nvSpPr>
+          <p:cNvPr id="17415" name="Rounded Rectangle 17414"/>
+          <p:cNvSpPr/>
+          <p:nvPr/>
+        </p:nvSpPr>
+        <p:spPr>
+          <a:xfrm>
+            <a:off x="512064" y="1645920"/>
+            <a:ext cx="1645920" cy="512064"/>
           </a:xfrm>
           <a:prstGeom prst="roundRect">
             <a:avLst/>
@@ -7480,7 +7733,7 @@
           </a:fontRef>
         </p:style>
         <p:txBody>
-          <a:bodyPr rtlCol="0" anchor="t" wrap="square" tIns="54864" bIns="54864"/>
+          <a:bodyPr rtlCol="0" anchor="ctr" wrap="square" tIns="54864" bIns="54864"/>
           <a:lstStyle/>
           <a:p>
             <a:pPr algn="ctr">
@@ -7488,31 +7741,96 @@
                 <a:spcPct val="88000"/>
               </a:lnSpc>
               <a:spcAft>
-                <a:spcPts val="300"/>
-              </a:spcAft>
-            </a:pPr>
-            <a:r>
-              <a:rPr sz="850" b="0">
-                <a:solidFill>
-                  <a:srgbClr val="1F2C3F"/>
+                <a:spcPts val="100"/>
+              </a:spcAft>
+              <a:buNone/>
+            </a:pPr>
+            <a:r>
+              <a:rPr sz="850" b="1">
+                <a:solidFill>
+                  <a:srgbClr val="111B2A"/>
                 </a:solidFill>
                 <a:latin typeface="Calibri"/>
               </a:rPr>
-              <a:t>PCAP / PCAPNG   —   untrusted input, 8 hard limits</a:t>
-            </a:r>
-          </a:p>
-        </p:txBody>
-      </p:sp>
-      <p:sp>
-        <p:nvSpPr>
-          <p:cNvPr id="17412" name="Rounded Rectangle 17411"/>
+              <a:t>PCAP / PCAPNG</a:t>
+            </a:r>
+          </a:p>
+          <a:p>
+            <a:pPr algn="ctr">
+              <a:lnSpc>
+                <a:spcPct val="88000"/>
+              </a:lnSpc>
+              <a:spcAft>
+                <a:spcPts val="100"/>
+              </a:spcAft>
+              <a:buNone/>
+            </a:pPr>
+            <a:r>
+              <a:rPr sz="750" b="0">
+                <a:solidFill>
+                  <a:srgbClr val="4A5A70"/>
+                </a:solidFill>
+                <a:latin typeface="Calibri"/>
+              </a:rPr>
+              <a:t>untrusted file</a:t>
+            </a:r>
+          </a:p>
+        </p:txBody>
+      </p:sp>
+      <p:sp>
+        <p:nvSpPr>
+          <p:cNvPr id="17416" name="Down Arrow 17415"/>
           <p:cNvSpPr/>
           <p:nvPr/>
         </p:nvSpPr>
         <p:spPr>
           <a:xfrm>
-            <a:off x="384048" y="1824228"/>
-            <a:ext cx="5532120" cy="365760"/>
+            <a:off x="1252728" y="2212848"/>
+            <a:ext cx="164592" cy="182880"/>
+          </a:xfrm>
+          <a:prstGeom prst="downArrow">
+            <a:avLst/>
+          </a:prstGeom>
+          <a:solidFill>
+            <a:srgbClr val="4A5A70"/>
+          </a:solidFill>
+          <a:ln>
+            <a:noFill/>
+          </a:ln>
+          <a:effectLst/>
+        </p:spPr>
+        <p:style>
+          <a:lnRef idx="1">
+            <a:schemeClr val="accent1"/>
+          </a:lnRef>
+          <a:fillRef idx="3">
+            <a:schemeClr val="accent1"/>
+          </a:fillRef>
+          <a:effectRef idx="2">
+            <a:schemeClr val="accent1"/>
+          </a:effectRef>
+          <a:fontRef idx="minor">
+            <a:schemeClr val="lt1"/>
+          </a:fontRef>
+        </p:style>
+        <p:txBody>
+          <a:bodyPr rtlCol="0" anchor="ctr"/>
+          <a:lstStyle/>
+          <a:p>
+            <a:pPr algn="ctr"/>
+          </a:p>
+        </p:txBody>
+      </p:sp>
+      <p:sp>
+        <p:nvSpPr>
+          <p:cNvPr id="17417" name="Rounded Rectangle 17416"/>
+          <p:cNvSpPr/>
+          <p:nvPr/>
+        </p:nvSpPr>
+        <p:spPr>
+          <a:xfrm>
+            <a:off x="512064" y="2432304"/>
+            <a:ext cx="1645920" cy="566928"/>
           </a:xfrm>
           <a:prstGeom prst="roundRect">
             <a:avLst/>
@@ -7542,7 +7860,7 @@
           </a:fontRef>
         </p:style>
         <p:txBody>
-          <a:bodyPr rtlCol="0" anchor="t" wrap="square" tIns="54864" bIns="54864"/>
+          <a:bodyPr rtlCol="0" anchor="ctr" wrap="square" tIns="54864" bIns="54864"/>
           <a:lstStyle/>
           <a:p>
             <a:pPr algn="ctr">
@@ -7550,31 +7868,116 @@
                 <a:spcPct val="88000"/>
               </a:lnSpc>
               <a:spcAft>
-                <a:spcPts val="300"/>
-              </a:spcAft>
-            </a:pPr>
-            <a:r>
-              <a:rPr sz="850" b="0">
-                <a:solidFill>
-                  <a:srgbClr val="1F2C3F"/>
+                <a:spcPts val="100"/>
+              </a:spcAft>
+              <a:buNone/>
+            </a:pPr>
+            <a:r>
+              <a:rPr sz="850" b="1">
+                <a:solidFill>
+                  <a:srgbClr val="111B2A"/>
                 </a:solidFill>
                 <a:latin typeface="Calibri"/>
               </a:rPr>
-              <a:t>Safe ingestion — 1,166 loc   —   format from content, never the extension</a:t>
-            </a:r>
-          </a:p>
-        </p:txBody>
-      </p:sp>
-      <p:sp>
-        <p:nvSpPr>
-          <p:cNvPr id="17413" name="Rounded Rectangle 17412"/>
+              <a:t>Safe ingestion</a:t>
+            </a:r>
+          </a:p>
+          <a:p>
+            <a:pPr algn="ctr">
+              <a:lnSpc>
+                <a:spcPct val="88000"/>
+              </a:lnSpc>
+              <a:spcAft>
+                <a:spcPts val="100"/>
+              </a:spcAft>
+              <a:buNone/>
+            </a:pPr>
+            <a:r>
+              <a:rPr sz="750" b="0">
+                <a:solidFill>
+                  <a:srgbClr val="4A5A70"/>
+                </a:solidFill>
+                <a:latin typeface="Calibri"/>
+              </a:rPr>
+              <a:t>format from the bytes</a:t>
+            </a:r>
+          </a:p>
+          <a:p>
+            <a:pPr algn="ctr">
+              <a:lnSpc>
+                <a:spcPct val="88000"/>
+              </a:lnSpc>
+              <a:spcAft>
+                <a:spcPts val="100"/>
+              </a:spcAft>
+              <a:buNone/>
+            </a:pPr>
+            <a:r>
+              <a:rPr sz="750" b="0">
+                <a:solidFill>
+                  <a:srgbClr val="4A5A70"/>
+                </a:solidFill>
+                <a:latin typeface="Calibri"/>
+              </a:rPr>
+              <a:t>8 hard limits</a:t>
+            </a:r>
+          </a:p>
+        </p:txBody>
+      </p:sp>
+      <p:sp>
+        <p:nvSpPr>
+          <p:cNvPr id="17418" name="Down Arrow 17417"/>
           <p:cNvSpPr/>
           <p:nvPr/>
         </p:nvSpPr>
         <p:spPr>
           <a:xfrm>
-            <a:off x="384048" y="2221992"/>
-            <a:ext cx="5532120" cy="365760"/>
+            <a:off x="1252728" y="2999232"/>
+            <a:ext cx="164592" cy="201168"/>
+          </a:xfrm>
+          <a:prstGeom prst="downArrow">
+            <a:avLst/>
+          </a:prstGeom>
+          <a:solidFill>
+            <a:srgbClr val="4A5A70"/>
+          </a:solidFill>
+          <a:ln>
+            <a:noFill/>
+          </a:ln>
+          <a:effectLst/>
+        </p:spPr>
+        <p:style>
+          <a:lnRef idx="1">
+            <a:schemeClr val="accent1"/>
+          </a:lnRef>
+          <a:fillRef idx="3">
+            <a:schemeClr val="accent1"/>
+          </a:fillRef>
+          <a:effectRef idx="2">
+            <a:schemeClr val="accent1"/>
+          </a:effectRef>
+          <a:fontRef idx="minor">
+            <a:schemeClr val="lt1"/>
+          </a:fontRef>
+        </p:style>
+        <p:txBody>
+          <a:bodyPr rtlCol="0" anchor="ctr"/>
+          <a:lstStyle/>
+          <a:p>
+            <a:pPr algn="ctr"/>
+          </a:p>
+        </p:txBody>
+      </p:sp>
+      <p:sp>
+        <p:nvSpPr>
+          <p:cNvPr id="17419" name="Rounded Rectangle 17418"/>
+          <p:cNvSpPr/>
+          <p:nvPr/>
+        </p:nvSpPr>
+        <p:spPr>
+          <a:xfrm>
+            <a:off x="512064" y="3236976"/>
+            <a:ext cx="1645920" cy="438912"/>
           </a:xfrm>
           <a:prstGeom prst="roundRect">
             <a:avLst/>
@@ -7604,7 +8007,7 @@
           </a:fontRef>
         </p:style>
         <p:txBody>
-          <a:bodyPr rtlCol="0" anchor="t" wrap="square" tIns="54864" bIns="54864"/>
+          <a:bodyPr rtlCol="0" anchor="ctr" wrap="square" tIns="54864" bIns="54864"/>
           <a:lstStyle/>
           <a:p>
             <a:pPr algn="ctr">
@@ -7612,31 +8015,76 @@
                 <a:spcPct val="88000"/>
               </a:lnSpc>
               <a:spcAft>
-                <a:spcPts val="300"/>
-              </a:spcAft>
-            </a:pPr>
-            <a:r>
-              <a:rPr sz="850" b="0">
-                <a:solidFill>
-                  <a:srgbClr val="1F2C3F"/>
+                <a:spcPts val="100"/>
+              </a:spcAft>
+              <a:buNone/>
+            </a:pPr>
+            <a:r>
+              <a:rPr sz="850" b="1">
+                <a:solidFill>
+                  <a:srgbClr val="111B2A"/>
                 </a:solidFill>
                 <a:latin typeface="Calibri"/>
               </a:rPr>
-              <a:t>TCP reconstruction — ~900 loc   —   reorder · retransmit · gaps · overlap conflicts</a:t>
-            </a:r>
-          </a:p>
-        </p:txBody>
-      </p:sp>
-      <p:sp>
-        <p:nvSpPr>
-          <p:cNvPr id="17414" name="Rounded Rectangle 17413"/>
+              <a:t>Packet decode</a:t>
+            </a:r>
+          </a:p>
+        </p:txBody>
+      </p:sp>
+      <p:sp>
+        <p:nvSpPr>
+          <p:cNvPr id="17420" name="Right Arrow 17419"/>
           <p:cNvSpPr/>
           <p:nvPr/>
         </p:nvSpPr>
         <p:spPr>
           <a:xfrm>
-            <a:off x="384048" y="2619756"/>
-            <a:ext cx="5532120" cy="365760"/>
+            <a:off x="2231136" y="2084832"/>
+            <a:ext cx="219456" cy="164592"/>
+          </a:xfrm>
+          <a:prstGeom prst="rightArrow">
+            <a:avLst/>
+          </a:prstGeom>
+          <a:solidFill>
+            <a:srgbClr val="4A5A70"/>
+          </a:solidFill>
+          <a:ln>
+            <a:noFill/>
+          </a:ln>
+          <a:effectLst/>
+        </p:spPr>
+        <p:style>
+          <a:lnRef idx="1">
+            <a:schemeClr val="accent1"/>
+          </a:lnRef>
+          <a:fillRef idx="3">
+            <a:schemeClr val="accent1"/>
+          </a:fillRef>
+          <a:effectRef idx="2">
+            <a:schemeClr val="accent1"/>
+          </a:effectRef>
+          <a:fontRef idx="minor">
+            <a:schemeClr val="lt1"/>
+          </a:fontRef>
+        </p:style>
+        <p:txBody>
+          <a:bodyPr rtlCol="0" anchor="ctr"/>
+          <a:lstStyle/>
+          <a:p>
+            <a:pPr algn="ctr"/>
+          </a:p>
+        </p:txBody>
+      </p:sp>
+      <p:sp>
+        <p:nvSpPr>
+          <p:cNvPr id="17421" name="Rounded Rectangle 17420"/>
+          <p:cNvSpPr/>
+          <p:nvPr/>
+        </p:nvSpPr>
+        <p:spPr>
+          <a:xfrm>
+            <a:off x="2633472" y="1645920"/>
+            <a:ext cx="1847088" cy="512064"/>
           </a:xfrm>
           <a:prstGeom prst="roundRect">
             <a:avLst/>
@@ -7666,7 +8114,7 @@
           </a:fontRef>
         </p:style>
         <p:txBody>
-          <a:bodyPr rtlCol="0" anchor="t" wrap="square" tIns="54864" bIns="54864"/>
+          <a:bodyPr rtlCol="0" anchor="ctr" wrap="square" tIns="54864" bIns="54864"/>
           <a:lstStyle/>
           <a:p>
             <a:pPr algn="ctr">
@@ -7674,31 +8122,52 @@
                 <a:spcPct val="88000"/>
               </a:lnSpc>
               <a:spcAft>
-                <a:spcPts val="300"/>
-              </a:spcAft>
-            </a:pPr>
-            <a:r>
-              <a:rPr sz="850" b="0">
-                <a:solidFill>
-                  <a:srgbClr val="1F2C3F"/>
+                <a:spcPts val="100"/>
+              </a:spcAft>
+              <a:buNone/>
+            </a:pPr>
+            <a:r>
+              <a:rPr sz="850" b="1">
+                <a:solidFill>
+                  <a:srgbClr val="111B2A"/>
                 </a:solidFill>
                 <a:latin typeface="Calibri"/>
               </a:rPr>
-              <a:t>SMTP / IMAP / POP3 — 3,406 loc   —   real state machines; port is only a hint</a:t>
-            </a:r>
-          </a:p>
-        </p:txBody>
-      </p:sp>
-      <p:sp>
-        <p:nvSpPr>
-          <p:cNvPr id="17415" name="Rounded Rectangle 17414"/>
+              <a:t>TCP reassembly</a:t>
+            </a:r>
+          </a:p>
+          <a:p>
+            <a:pPr algn="ctr">
+              <a:lnSpc>
+                <a:spcPct val="88000"/>
+              </a:lnSpc>
+              <a:spcAft>
+                <a:spcPts val="100"/>
+              </a:spcAft>
+              <a:buNone/>
+            </a:pPr>
+            <a:r>
+              <a:rPr sz="750" b="0">
+                <a:solidFill>
+                  <a:srgbClr val="4A5A70"/>
+                </a:solidFill>
+                <a:latin typeface="Calibri"/>
+              </a:rPr>
+              <a:t>reorder · retransmit · gaps</a:t>
+            </a:r>
+          </a:p>
+        </p:txBody>
+      </p:sp>
+      <p:sp>
+        <p:nvSpPr>
+          <p:cNvPr id="17422" name="Rounded Rectangle 17421"/>
           <p:cNvSpPr/>
           <p:nvPr/>
         </p:nvSpPr>
         <p:spPr>
           <a:xfrm>
-            <a:off x="384048" y="3017520"/>
-            <a:ext cx="5532120" cy="365760"/>
+            <a:off x="4572000" y="1645920"/>
+            <a:ext cx="1773936" cy="512064"/>
           </a:xfrm>
           <a:prstGeom prst="roundRect">
             <a:avLst/>
@@ -7728,7 +8197,7 @@
           </a:fontRef>
         </p:style>
         <p:txBody>
-          <a:bodyPr rtlCol="0" anchor="t" wrap="square" tIns="54864" bIns="54864"/>
+          <a:bodyPr rtlCol="0" anchor="ctr" wrap="square" tIns="54864" bIns="54864"/>
           <a:lstStyle/>
           <a:p>
             <a:pPr algn="ctr">
@@ -7736,31 +8205,140 @@
                 <a:spcPct val="88000"/>
               </a:lnSpc>
               <a:spcAft>
-                <a:spcPts val="300"/>
-              </a:spcAft>
-            </a:pPr>
-            <a:r>
-              <a:rPr sz="850" b="0">
-                <a:solidFill>
-                  <a:srgbClr val="1F2C3F"/>
+                <a:spcPts val="100"/>
+              </a:spcAft>
+              <a:buNone/>
+            </a:pPr>
+            <a:r>
+              <a:rPr sz="850" b="1">
+                <a:solidFill>
+                  <a:srgbClr val="111B2A"/>
                 </a:solidFill>
                 <a:latin typeface="Calibri"/>
               </a:rPr>
-              <a:t>STARTTLS / STLS   —   advertised · requested · outcome · exact upgrade packet</a:t>
-            </a:r>
-          </a:p>
-        </p:txBody>
-      </p:sp>
-      <p:sp>
-        <p:nvSpPr>
-          <p:cNvPr id="17416" name="Rounded Rectangle 17415"/>
+              <a:t>SMTP · IMAP · POP3</a:t>
+            </a:r>
+          </a:p>
+          <a:p>
+            <a:pPr algn="ctr">
+              <a:lnSpc>
+                <a:spcPct val="88000"/>
+              </a:lnSpc>
+              <a:spcAft>
+                <a:spcPts val="100"/>
+              </a:spcAft>
+              <a:buNone/>
+            </a:pPr>
+            <a:r>
+              <a:rPr sz="750" b="0">
+                <a:solidFill>
+                  <a:srgbClr val="4A5A70"/>
+                </a:solidFill>
+                <a:latin typeface="Calibri"/>
+              </a:rPr>
+              <a:t>state machines, not ports</a:t>
+            </a:r>
+          </a:p>
+        </p:txBody>
+      </p:sp>
+      <p:sp>
+        <p:nvSpPr>
+          <p:cNvPr id="17423" name="Down Arrow 17422"/>
           <p:cNvSpPr/>
           <p:nvPr/>
         </p:nvSpPr>
         <p:spPr>
           <a:xfrm>
-            <a:off x="384048" y="3415284"/>
-            <a:ext cx="5532120" cy="365760"/>
+            <a:off x="3474720" y="2212848"/>
+            <a:ext cx="164592" cy="182880"/>
+          </a:xfrm>
+          <a:prstGeom prst="downArrow">
+            <a:avLst/>
+          </a:prstGeom>
+          <a:solidFill>
+            <a:srgbClr val="4A5A70"/>
+          </a:solidFill>
+          <a:ln>
+            <a:noFill/>
+          </a:ln>
+          <a:effectLst/>
+        </p:spPr>
+        <p:style>
+          <a:lnRef idx="1">
+            <a:schemeClr val="accent1"/>
+          </a:lnRef>
+          <a:fillRef idx="3">
+            <a:schemeClr val="accent1"/>
+          </a:fillRef>
+          <a:effectRef idx="2">
+            <a:schemeClr val="accent1"/>
+          </a:effectRef>
+          <a:fontRef idx="minor">
+            <a:schemeClr val="lt1"/>
+          </a:fontRef>
+        </p:style>
+        <p:txBody>
+          <a:bodyPr rtlCol="0" anchor="ctr"/>
+          <a:lstStyle/>
+          <a:p>
+            <a:pPr algn="ctr"/>
+          </a:p>
+        </p:txBody>
+      </p:sp>
+      <p:sp>
+        <p:nvSpPr>
+          <p:cNvPr id="17424" name="Down Arrow 17423"/>
+          <p:cNvSpPr/>
+          <p:nvPr/>
+        </p:nvSpPr>
+        <p:spPr>
+          <a:xfrm>
+            <a:off x="5376672" y="2212848"/>
+            <a:ext cx="164592" cy="182880"/>
+          </a:xfrm>
+          <a:prstGeom prst="downArrow">
+            <a:avLst/>
+          </a:prstGeom>
+          <a:solidFill>
+            <a:srgbClr val="4A5A70"/>
+          </a:solidFill>
+          <a:ln>
+            <a:noFill/>
+          </a:ln>
+          <a:effectLst/>
+        </p:spPr>
+        <p:style>
+          <a:lnRef idx="1">
+            <a:schemeClr val="accent1"/>
+          </a:lnRef>
+          <a:fillRef idx="3">
+            <a:schemeClr val="accent1"/>
+          </a:fillRef>
+          <a:effectRef idx="2">
+            <a:schemeClr val="accent1"/>
+          </a:effectRef>
+          <a:fontRef idx="minor">
+            <a:schemeClr val="lt1"/>
+          </a:fontRef>
+        </p:style>
+        <p:txBody>
+          <a:bodyPr rtlCol="0" anchor="ctr"/>
+          <a:lstStyle/>
+          <a:p>
+            <a:pPr algn="ctr"/>
+          </a:p>
+        </p:txBody>
+      </p:sp>
+      <p:sp>
+        <p:nvSpPr>
+          <p:cNvPr id="17425" name="Rounded Rectangle 17424"/>
+          <p:cNvSpPr/>
+          <p:nvPr/>
+        </p:nvSpPr>
+        <p:spPr>
+          <a:xfrm>
+            <a:off x="2633472" y="2432304"/>
+            <a:ext cx="1847088" cy="512064"/>
           </a:xfrm>
           <a:prstGeom prst="roundRect">
             <a:avLst/>
@@ -7790,7 +8368,7 @@
           </a:fontRef>
         </p:style>
         <p:txBody>
-          <a:bodyPr rtlCol="0" anchor="t" wrap="square" tIns="54864" bIns="54864"/>
+          <a:bodyPr rtlCol="0" anchor="ctr" wrap="square" tIns="54864" bIns="54864"/>
           <a:lstStyle/>
           <a:p>
             <a:pPr algn="ctr">
@@ -7798,31 +8376,52 @@
                 <a:spcPct val="88000"/>
               </a:lnSpc>
               <a:spcAft>
-                <a:spcPts val="300"/>
-              </a:spcAft>
-            </a:pPr>
-            <a:r>
-              <a:rPr sz="850" b="0">
-                <a:solidFill>
-                  <a:srgbClr val="1F2C3F"/>
+                <a:spcPts val="100"/>
+              </a:spcAft>
+              <a:buNone/>
+            </a:pPr>
+            <a:r>
+              <a:rPr sz="850" b="1">
+                <a:solidFill>
+                  <a:srgbClr val="111B2A"/>
                 </a:solidFill>
                 <a:latin typeface="Calibri"/>
               </a:rPr>
-              <a:t>TLS handshake + crypto — 3,042 loc   —   version from supported_versions, KX from key_share</a:t>
-            </a:r>
-          </a:p>
-        </p:txBody>
-      </p:sp>
-      <p:sp>
-        <p:nvSpPr>
-          <p:cNvPr id="17417" name="Rounded Rectangle 17416"/>
+              <a:t>STARTTLS / STLS</a:t>
+            </a:r>
+          </a:p>
+          <a:p>
+            <a:pPr algn="ctr">
+              <a:lnSpc>
+                <a:spcPct val="88000"/>
+              </a:lnSpc>
+              <a:spcAft>
+                <a:spcPts val="100"/>
+              </a:spcAft>
+              <a:buNone/>
+            </a:pPr>
+            <a:r>
+              <a:rPr sz="750" b="0">
+                <a:solidFill>
+                  <a:srgbClr val="4A5A70"/>
+                </a:solidFill>
+                <a:latin typeface="Calibri"/>
+              </a:rPr>
+              <a:t>advertised · requested · outcome</a:t>
+            </a:r>
+          </a:p>
+        </p:txBody>
+      </p:sp>
+      <p:sp>
+        <p:nvSpPr>
+          <p:cNvPr id="17426" name="Rounded Rectangle 17425"/>
           <p:cNvSpPr/>
           <p:nvPr/>
         </p:nvSpPr>
         <p:spPr>
           <a:xfrm>
-            <a:off x="384048" y="3813048"/>
-            <a:ext cx="5532120" cy="365760"/>
+            <a:off x="4572000" y="2432304"/>
+            <a:ext cx="1773936" cy="512064"/>
           </a:xfrm>
           <a:prstGeom prst="roundRect">
             <a:avLst/>
@@ -7852,7 +8451,7 @@
           </a:fontRef>
         </p:style>
         <p:txBody>
-          <a:bodyPr rtlCol="0" anchor="t" wrap="square" tIns="54864" bIns="54864"/>
+          <a:bodyPr rtlCol="0" anchor="ctr" wrap="square" tIns="54864" bIns="54864"/>
           <a:lstStyle/>
           <a:p>
             <a:pPr algn="ctr">
@@ -7860,31 +8459,96 @@
                 <a:spcPct val="88000"/>
               </a:lnSpc>
               <a:spcAft>
-                <a:spcPts val="300"/>
-              </a:spcAft>
-            </a:pPr>
-            <a:r>
-              <a:rPr sz="850" b="0">
-                <a:solidFill>
-                  <a:srgbClr val="1F2C3F"/>
+                <a:spcPts val="100"/>
+              </a:spcAft>
+              <a:buNone/>
+            </a:pPr>
+            <a:r>
+              <a:rPr sz="850" b="1">
+                <a:solidFill>
+                  <a:srgbClr val="111B2A"/>
                 </a:solidFill>
                 <a:latin typeface="Calibri"/>
               </a:rPr>
-              <a:t>X.509 intelligence — 861 loc   —   RFC 5280 path, dates, hostname, key, signature</a:t>
-            </a:r>
-          </a:p>
-        </p:txBody>
-      </p:sp>
-      <p:sp>
-        <p:nvSpPr>
-          <p:cNvPr id="17418" name="Rounded Rectangle 17417"/>
+              <a:t>TLS handshake</a:t>
+            </a:r>
+          </a:p>
+          <a:p>
+            <a:pPr algn="ctr">
+              <a:lnSpc>
+                <a:spcPct val="88000"/>
+              </a:lnSpc>
+              <a:spcAft>
+                <a:spcPts val="100"/>
+              </a:spcAft>
+              <a:buNone/>
+            </a:pPr>
+            <a:r>
+              <a:rPr sz="750" b="0">
+                <a:solidFill>
+                  <a:srgbClr val="4A5A70"/>
+                </a:solidFill>
+                <a:latin typeface="Calibri"/>
+              </a:rPr>
+              <a:t>version, suite, key exchange</a:t>
+            </a:r>
+          </a:p>
+        </p:txBody>
+      </p:sp>
+      <p:sp>
+        <p:nvSpPr>
+          <p:cNvPr id="17427" name="Down Arrow 17426"/>
           <p:cNvSpPr/>
           <p:nvPr/>
         </p:nvSpPr>
         <p:spPr>
           <a:xfrm>
-            <a:off x="384048" y="4210812"/>
-            <a:ext cx="5532120" cy="365760"/>
+            <a:off x="4425696" y="2999232"/>
+            <a:ext cx="164592" cy="201168"/>
+          </a:xfrm>
+          <a:prstGeom prst="downArrow">
+            <a:avLst/>
+          </a:prstGeom>
+          <a:solidFill>
+            <a:srgbClr val="4A5A70"/>
+          </a:solidFill>
+          <a:ln>
+            <a:noFill/>
+          </a:ln>
+          <a:effectLst/>
+        </p:spPr>
+        <p:style>
+          <a:lnRef idx="1">
+            <a:schemeClr val="accent1"/>
+          </a:lnRef>
+          <a:fillRef idx="3">
+            <a:schemeClr val="accent1"/>
+          </a:fillRef>
+          <a:effectRef idx="2">
+            <a:schemeClr val="accent1"/>
+          </a:effectRef>
+          <a:fontRef idx="minor">
+            <a:schemeClr val="lt1"/>
+          </a:fontRef>
+        </p:style>
+        <p:txBody>
+          <a:bodyPr rtlCol="0" anchor="ctr"/>
+          <a:lstStyle/>
+          <a:p>
+            <a:pPr algn="ctr"/>
+          </a:p>
+        </p:txBody>
+      </p:sp>
+      <p:sp>
+        <p:nvSpPr>
+          <p:cNvPr id="17428" name="Rounded Rectangle 17427"/>
+          <p:cNvSpPr/>
+          <p:nvPr/>
+        </p:nvSpPr>
+        <p:spPr>
+          <a:xfrm>
+            <a:off x="2633472" y="3236976"/>
+            <a:ext cx="3712463" cy="438912"/>
           </a:xfrm>
           <a:prstGeom prst="roundRect">
             <a:avLst/>
@@ -7914,7 +8578,7 @@
           </a:fontRef>
         </p:style>
         <p:txBody>
-          <a:bodyPr rtlCol="0" anchor="t" wrap="square" tIns="54864" bIns="54864"/>
+          <a:bodyPr rtlCol="0" anchor="ctr" wrap="square" tIns="54864" bIns="54864"/>
           <a:lstStyle/>
           <a:p>
             <a:pPr algn="ctr">
@@ -7922,31 +8586,76 @@
                 <a:spcPct val="88000"/>
               </a:lnSpc>
               <a:spcAft>
-                <a:spcPts val="300"/>
-              </a:spcAft>
-            </a:pPr>
-            <a:r>
-              <a:rPr sz="850" b="0">
-                <a:solidFill>
-                  <a:srgbClr val="1F2C3F"/>
+                <a:spcPts val="100"/>
+              </a:spcAft>
+              <a:buNone/>
+            </a:pPr>
+            <a:r>
+              <a:rPr sz="850" b="1">
+                <a:solidFill>
+                  <a:srgbClr val="111B2A"/>
                 </a:solidFill>
                 <a:latin typeface="Calibri"/>
               </a:rPr>
-              <a:t>Security rules + scoring — 3,416 loc   —   25 rules · versioned policy · explainable score</a:t>
-            </a:r>
-          </a:p>
-        </p:txBody>
-      </p:sp>
-      <p:sp>
-        <p:nvSpPr>
-          <p:cNvPr id="17419" name="Rounded Rectangle 17418"/>
+              <a:t>X.509 certificate analysis  —  chain, dates, identity, key, signature</a:t>
+            </a:r>
+          </a:p>
+        </p:txBody>
+      </p:sp>
+      <p:sp>
+        <p:nvSpPr>
+          <p:cNvPr id="17429" name="Right Arrow 17428"/>
           <p:cNvSpPr/>
           <p:nvPr/>
         </p:nvSpPr>
         <p:spPr>
           <a:xfrm>
-            <a:off x="384048" y="4608575"/>
-            <a:ext cx="5532120" cy="365760"/>
+            <a:off x="6400800" y="2084832"/>
+            <a:ext cx="219456" cy="164592"/>
+          </a:xfrm>
+          <a:prstGeom prst="rightArrow">
+            <a:avLst/>
+          </a:prstGeom>
+          <a:solidFill>
+            <a:srgbClr val="4A5A70"/>
+          </a:solidFill>
+          <a:ln>
+            <a:noFill/>
+          </a:ln>
+          <a:effectLst/>
+        </p:spPr>
+        <p:style>
+          <a:lnRef idx="1">
+            <a:schemeClr val="accent1"/>
+          </a:lnRef>
+          <a:fillRef idx="3">
+            <a:schemeClr val="accent1"/>
+          </a:fillRef>
+          <a:effectRef idx="2">
+            <a:schemeClr val="accent1"/>
+          </a:effectRef>
+          <a:fontRef idx="minor">
+            <a:schemeClr val="lt1"/>
+          </a:fontRef>
+        </p:style>
+        <p:txBody>
+          <a:bodyPr rtlCol="0" anchor="ctr"/>
+          <a:lstStyle/>
+          <a:p>
+            <a:pPr algn="ctr"/>
+          </a:p>
+        </p:txBody>
+      </p:sp>
+      <p:sp>
+        <p:nvSpPr>
+          <p:cNvPr id="17430" name="Rounded Rectangle 17429"/>
+          <p:cNvSpPr/>
+          <p:nvPr/>
+        </p:nvSpPr>
+        <p:spPr>
+          <a:xfrm>
+            <a:off x="6803136" y="1645920"/>
+            <a:ext cx="2359152" cy="512064"/>
           </a:xfrm>
           <a:prstGeom prst="roundRect">
             <a:avLst/>
@@ -7976,7 +8685,7 @@
           </a:fontRef>
         </p:style>
         <p:txBody>
-          <a:bodyPr rtlCol="0" anchor="t" wrap="square" tIns="54864" bIns="54864"/>
+          <a:bodyPr rtlCol="0" anchor="ctr" wrap="square" tIns="54864" bIns="54864"/>
           <a:lstStyle/>
           <a:p>
             <a:pPr algn="ctr">
@@ -7984,31 +8693,96 @@
                 <a:spcPct val="88000"/>
               </a:lnSpc>
               <a:spcAft>
-                <a:spcPts val="300"/>
-              </a:spcAft>
-            </a:pPr>
-            <a:r>
-              <a:rPr sz="850" b="0">
-                <a:solidFill>
-                  <a:srgbClr val="1F2C3F"/>
+                <a:spcPts val="100"/>
+              </a:spcAft>
+              <a:buNone/>
+            </a:pPr>
+            <a:r>
+              <a:rPr sz="850" b="1">
+                <a:solidFill>
+                  <a:srgbClr val="111B2A"/>
                 </a:solidFill>
                 <a:latin typeface="Calibri"/>
               </a:rPr>
-              <a:t>Correlation · drift · anomaly — 5,471 loc   —   fingerprints · entities · blast radius · ML</a:t>
-            </a:r>
-          </a:p>
-        </p:txBody>
-      </p:sp>
-      <p:sp>
-        <p:nvSpPr>
-          <p:cNvPr id="17420" name="Rounded Rectangle 17419"/>
+              <a:t>25 policy rules</a:t>
+            </a:r>
+          </a:p>
+          <a:p>
+            <a:pPr algn="ctr">
+              <a:lnSpc>
+                <a:spcPct val="88000"/>
+              </a:lnSpc>
+              <a:spcAft>
+                <a:spcPts val="100"/>
+              </a:spcAft>
+              <a:buNone/>
+            </a:pPr>
+            <a:r>
+              <a:rPr sz="750" b="0">
+                <a:solidFill>
+                  <a:srgbClr val="4A5A70"/>
+                </a:solidFill>
+                <a:latin typeface="Calibri"/>
+              </a:rPr>
+              <a:t>versioned, fingerprinted</a:t>
+            </a:r>
+          </a:p>
+        </p:txBody>
+      </p:sp>
+      <p:sp>
+        <p:nvSpPr>
+          <p:cNvPr id="17431" name="Down Arrow 17430"/>
           <p:cNvSpPr/>
           <p:nvPr/>
         </p:nvSpPr>
         <p:spPr>
           <a:xfrm>
-            <a:off x="384048" y="5006339"/>
-            <a:ext cx="5532120" cy="365760"/>
+            <a:off x="7900416" y="2212848"/>
+            <a:ext cx="164592" cy="182880"/>
+          </a:xfrm>
+          <a:prstGeom prst="downArrow">
+            <a:avLst/>
+          </a:prstGeom>
+          <a:solidFill>
+            <a:srgbClr val="4A5A70"/>
+          </a:solidFill>
+          <a:ln>
+            <a:noFill/>
+          </a:ln>
+          <a:effectLst/>
+        </p:spPr>
+        <p:style>
+          <a:lnRef idx="1">
+            <a:schemeClr val="accent1"/>
+          </a:lnRef>
+          <a:fillRef idx="3">
+            <a:schemeClr val="accent1"/>
+          </a:fillRef>
+          <a:effectRef idx="2">
+            <a:schemeClr val="accent1"/>
+          </a:effectRef>
+          <a:fontRef idx="minor">
+            <a:schemeClr val="lt1"/>
+          </a:fontRef>
+        </p:style>
+        <p:txBody>
+          <a:bodyPr rtlCol="0" anchor="ctr"/>
+          <a:lstStyle/>
+          <a:p>
+            <a:pPr algn="ctr"/>
+          </a:p>
+        </p:txBody>
+      </p:sp>
+      <p:sp>
+        <p:nvSpPr>
+          <p:cNvPr id="17432" name="Rounded Rectangle 17431"/>
+          <p:cNvSpPr/>
+          <p:nvPr/>
+        </p:nvSpPr>
+        <p:spPr>
+          <a:xfrm>
+            <a:off x="6803136" y="2432304"/>
+            <a:ext cx="2359152" cy="512064"/>
           </a:xfrm>
           <a:prstGeom prst="roundRect">
             <a:avLst/>
@@ -8038,7 +8812,7 @@
           </a:fontRef>
         </p:style>
         <p:txBody>
-          <a:bodyPr rtlCol="0" anchor="t" wrap="square" tIns="54864" bIns="54864"/>
+          <a:bodyPr rtlCol="0" anchor="ctr" wrap="square" tIns="54864" bIns="54864"/>
           <a:lstStyle/>
           <a:p>
             <a:pPr algn="ctr">
@@ -8046,31 +8820,96 @@
                 <a:spcPct val="88000"/>
               </a:lnSpc>
               <a:spcAft>
-                <a:spcPts val="300"/>
-              </a:spcAft>
-            </a:pPr>
-            <a:r>
-              <a:rPr sz="850" b="0">
-                <a:solidFill>
-                  <a:srgbClr val="1F2C3F"/>
+                <a:spcPts val="100"/>
+              </a:spcAft>
+              <a:buNone/>
+            </a:pPr>
+            <a:r>
+              <a:rPr sz="850" b="1">
+                <a:solidFill>
+                  <a:srgbClr val="111B2A"/>
                 </a:solidFill>
                 <a:latin typeface="Calibri"/>
               </a:rPr>
-              <a:t>FastAPI + SQLite — 2,756 loc   —   loopback only · token · 3 explicit migrations</a:t>
-            </a:r>
-          </a:p>
-        </p:txBody>
-      </p:sp>
-      <p:sp>
-        <p:nvSpPr>
-          <p:cNvPr id="17421" name="Rounded Rectangle 17420"/>
+              <a:t>Score · coverage · priority</a:t>
+            </a:r>
+          </a:p>
+          <a:p>
+            <a:pPr algn="ctr">
+              <a:lnSpc>
+                <a:spcPct val="88000"/>
+              </a:lnSpc>
+              <a:spcAft>
+                <a:spcPts val="100"/>
+              </a:spcAft>
+              <a:buNone/>
+            </a:pPr>
+            <a:r>
+              <a:rPr sz="750" b="0">
+                <a:solidFill>
+                  <a:srgbClr val="4A5A70"/>
+                </a:solidFill>
+                <a:latin typeface="Calibri"/>
+              </a:rPr>
+              <a:t>arithmetic shown, not asserted</a:t>
+            </a:r>
+          </a:p>
+        </p:txBody>
+      </p:sp>
+      <p:sp>
+        <p:nvSpPr>
+          <p:cNvPr id="17433" name="Down Arrow 17432"/>
           <p:cNvSpPr/>
           <p:nvPr/>
         </p:nvSpPr>
         <p:spPr>
           <a:xfrm>
-            <a:off x="384048" y="5404103"/>
-            <a:ext cx="5532120" cy="365760"/>
+            <a:off x="7900416" y="2999232"/>
+            <a:ext cx="164592" cy="201168"/>
+          </a:xfrm>
+          <a:prstGeom prst="downArrow">
+            <a:avLst/>
+          </a:prstGeom>
+          <a:solidFill>
+            <a:srgbClr val="4A5A70"/>
+          </a:solidFill>
+          <a:ln>
+            <a:noFill/>
+          </a:ln>
+          <a:effectLst/>
+        </p:spPr>
+        <p:style>
+          <a:lnRef idx="1">
+            <a:schemeClr val="accent1"/>
+          </a:lnRef>
+          <a:fillRef idx="3">
+            <a:schemeClr val="accent1"/>
+          </a:fillRef>
+          <a:effectRef idx="2">
+            <a:schemeClr val="accent1"/>
+          </a:effectRef>
+          <a:fontRef idx="minor">
+            <a:schemeClr val="lt1"/>
+          </a:fontRef>
+        </p:style>
+        <p:txBody>
+          <a:bodyPr rtlCol="0" anchor="ctr"/>
+          <a:lstStyle/>
+          <a:p>
+            <a:pPr algn="ctr"/>
+          </a:p>
+        </p:txBody>
+      </p:sp>
+      <p:sp>
+        <p:nvSpPr>
+          <p:cNvPr id="17434" name="Rounded Rectangle 17433"/>
+          <p:cNvSpPr/>
+          <p:nvPr/>
+        </p:nvSpPr>
+        <p:spPr>
+          <a:xfrm>
+            <a:off x="6803136" y="3236976"/>
+            <a:ext cx="2359152" cy="438912"/>
           </a:xfrm>
           <a:prstGeom prst="roundRect">
             <a:avLst/>
@@ -8100,7 +8939,7 @@
           </a:fontRef>
         </p:style>
         <p:txBody>
-          <a:bodyPr rtlCol="0" anchor="t" wrap="square" tIns="54864" bIns="54864"/>
+          <a:bodyPr rtlCol="0" anchor="ctr" wrap="square" tIns="54864" bIns="54864"/>
           <a:lstStyle/>
           <a:p>
             <a:pPr algn="ctr">
@@ -8108,31 +8947,76 @@
                 <a:spcPct val="88000"/>
               </a:lnSpc>
               <a:spcAft>
-                <a:spcPts val="300"/>
-              </a:spcAft>
-            </a:pPr>
-            <a:r>
-              <a:rPr sz="850" b="0">
-                <a:solidFill>
-                  <a:srgbClr val="1F2C3F"/>
+                <a:spcPts val="100"/>
+              </a:spcAft>
+              <a:buNone/>
+            </a:pPr>
+            <a:r>
+              <a:rPr sz="800" b="1">
+                <a:solidFill>
+                  <a:srgbClr val="111B2A"/>
                 </a:solidFill>
                 <a:latin typeface="Calibri"/>
               </a:rPr>
-              <a:t>React forensic dashboard — 4,400 loc   —   TypeScript strict · evidence-linked throughout</a:t>
-            </a:r>
-          </a:p>
-        </p:txBody>
-      </p:sp>
-      <p:sp>
-        <p:nvSpPr>
-          <p:cNvPr id="17422" name="Rounded Rectangle 17421"/>
+              <a:t>Fingerprints · drift · correlation · ML (advisory)</a:t>
+            </a:r>
+          </a:p>
+        </p:txBody>
+      </p:sp>
+      <p:sp>
+        <p:nvSpPr>
+          <p:cNvPr id="17435" name="Right Arrow 17434"/>
           <p:cNvSpPr/>
           <p:nvPr/>
         </p:nvSpPr>
         <p:spPr>
           <a:xfrm>
-            <a:off x="384048" y="5801867"/>
-            <a:ext cx="5532120" cy="365760"/>
+            <a:off x="9235440" y="2084832"/>
+            <a:ext cx="219456" cy="164592"/>
+          </a:xfrm>
+          <a:prstGeom prst="rightArrow">
+            <a:avLst/>
+          </a:prstGeom>
+          <a:solidFill>
+            <a:srgbClr val="4A5A70"/>
+          </a:solidFill>
+          <a:ln>
+            <a:noFill/>
+          </a:ln>
+          <a:effectLst/>
+        </p:spPr>
+        <p:style>
+          <a:lnRef idx="1">
+            <a:schemeClr val="accent1"/>
+          </a:lnRef>
+          <a:fillRef idx="3">
+            <a:schemeClr val="accent1"/>
+          </a:fillRef>
+          <a:effectRef idx="2">
+            <a:schemeClr val="accent1"/>
+          </a:effectRef>
+          <a:fontRef idx="minor">
+            <a:schemeClr val="lt1"/>
+          </a:fontRef>
+        </p:style>
+        <p:txBody>
+          <a:bodyPr rtlCol="0" anchor="ctr"/>
+          <a:lstStyle/>
+          <a:p>
+            <a:pPr algn="ctr"/>
+          </a:p>
+        </p:txBody>
+      </p:sp>
+      <p:sp>
+        <p:nvSpPr>
+          <p:cNvPr id="17436" name="Rounded Rectangle 17435"/>
+          <p:cNvSpPr/>
+          <p:nvPr/>
+        </p:nvSpPr>
+        <p:spPr>
+          <a:xfrm>
+            <a:off x="9637776" y="1645920"/>
+            <a:ext cx="2048256" cy="512064"/>
           </a:xfrm>
           <a:prstGeom prst="roundRect">
             <a:avLst/>
@@ -8162,7 +9046,7 @@
           </a:fontRef>
         </p:style>
         <p:txBody>
-          <a:bodyPr rtlCol="0" anchor="t" wrap="square" tIns="54864" bIns="54864"/>
+          <a:bodyPr rtlCol="0" anchor="ctr" wrap="square" tIns="54864" bIns="54864"/>
           <a:lstStyle/>
           <a:p>
             <a:pPr algn="ctr">
@@ -8170,42 +9054,61 @@
                 <a:spcPct val="88000"/>
               </a:lnSpc>
               <a:spcAft>
-                <a:spcPts val="300"/>
-              </a:spcAft>
-            </a:pPr>
-            <a:r>
-              <a:rPr sz="850" b="0">
-                <a:solidFill>
-                  <a:srgbClr val="1F2C3F"/>
+                <a:spcPts val="100"/>
+              </a:spcAft>
+              <a:buNone/>
+            </a:pPr>
+            <a:r>
+              <a:rPr sz="850" b="1">
+                <a:solidFill>
+                  <a:srgbClr val="111B2A"/>
                 </a:solidFill>
                 <a:latin typeface="Calibri"/>
               </a:rPr>
-              <a:t>JSON · HTML · PDF — 1,582 loc   —   one canonical model, parity-tested</a:t>
-            </a:r>
-          </a:p>
-        </p:txBody>
-      </p:sp>
-      <p:sp>
-        <p:nvSpPr>
-          <p:cNvPr id="17423" name="Rounded Rectangle 17422"/>
+              <a:t>One canonical report model</a:t>
+            </a:r>
+          </a:p>
+          <a:p>
+            <a:pPr algn="ctr">
+              <a:lnSpc>
+                <a:spcPct val="88000"/>
+              </a:lnSpc>
+              <a:spcAft>
+                <a:spcPts val="100"/>
+              </a:spcAft>
+              <a:buNone/>
+            </a:pPr>
+            <a:r>
+              <a:rPr sz="750" b="0">
+                <a:solidFill>
+                  <a:srgbClr val="4A5A70"/>
+                </a:solidFill>
+                <a:latin typeface="Calibri"/>
+              </a:rPr>
+              <a:t>schema 1.4.0</a:t>
+            </a:r>
+          </a:p>
+        </p:txBody>
+      </p:sp>
+      <p:sp>
+        <p:nvSpPr>
+          <p:cNvPr id="17437" name="Down Arrow 17436"/>
           <p:cNvSpPr/>
           <p:nvPr/>
         </p:nvSpPr>
         <p:spPr>
           <a:xfrm>
-            <a:off x="6144768" y="1426464"/>
-            <a:ext cx="1847088" cy="310896"/>
-          </a:xfrm>
-          <a:prstGeom prst="roundRect">
+            <a:off x="10579608" y="2212848"/>
+            <a:ext cx="164592" cy="182880"/>
+          </a:xfrm>
+          <a:prstGeom prst="downArrow">
             <a:avLst/>
           </a:prstGeom>
           <a:solidFill>
-            <a:srgbClr val="F2F6FB"/>
+            <a:srgbClr val="4A5A70"/>
           </a:solidFill>
-          <a:ln w="9525">
-            <a:solidFill>
-              <a:srgbClr val="C2D4E6"/>
-            </a:solidFill>
+          <a:ln>
+            <a:noFill/>
           </a:ln>
           <a:effectLst/>
         </p:spPr>
@@ -8224,383 +9127,23 @@
           </a:fontRef>
         </p:style>
         <p:txBody>
-          <a:bodyPr rtlCol="0" anchor="t" wrap="square" tIns="54864" bIns="54864"/>
+          <a:bodyPr rtlCol="0" anchor="ctr"/>
           <a:lstStyle/>
           <a:p>
-            <a:pPr algn="ctr">
-              <a:lnSpc>
-                <a:spcPct val="100000"/>
-              </a:lnSpc>
-              <a:spcAft>
-                <a:spcPts val="300"/>
-              </a:spcAft>
-            </a:pPr>
-            <a:r>
-              <a:rPr sz="900" b="1">
-                <a:solidFill>
-                  <a:srgbClr val="1B6B3A"/>
-                </a:solidFill>
-                <a:latin typeface="Calibri"/>
-              </a:rPr>
-              <a:t>PASSIVE ONLY</a:t>
-            </a:r>
-          </a:p>
-        </p:txBody>
-      </p:sp>
-      <p:sp>
-        <p:nvSpPr>
-          <p:cNvPr id="17424" name="Rounded Rectangle 17423"/>
+            <a:pPr algn="ctr"/>
+          </a:p>
+        </p:txBody>
+      </p:sp>
+      <p:sp>
+        <p:nvSpPr>
+          <p:cNvPr id="17438" name="Rounded Rectangle 17437"/>
           <p:cNvSpPr/>
           <p:nvPr/>
         </p:nvSpPr>
         <p:spPr>
           <a:xfrm>
-            <a:off x="8083296" y="1426464"/>
-            <a:ext cx="1847088" cy="310896"/>
-          </a:xfrm>
-          <a:prstGeom prst="roundRect">
-            <a:avLst/>
-          </a:prstGeom>
-          <a:solidFill>
-            <a:srgbClr val="F2F6FB"/>
-          </a:solidFill>
-          <a:ln w="9525">
-            <a:solidFill>
-              <a:srgbClr val="C2D4E6"/>
-            </a:solidFill>
-          </a:ln>
-          <a:effectLst/>
-        </p:spPr>
-        <p:style>
-          <a:lnRef idx="1">
-            <a:schemeClr val="accent1"/>
-          </a:lnRef>
-          <a:fillRef idx="3">
-            <a:schemeClr val="accent1"/>
-          </a:fillRef>
-          <a:effectRef idx="2">
-            <a:schemeClr val="accent1"/>
-          </a:effectRef>
-          <a:fontRef idx="minor">
-            <a:schemeClr val="lt1"/>
-          </a:fontRef>
-        </p:style>
-        <p:txBody>
-          <a:bodyPr rtlCol="0" anchor="t" wrap="square" tIns="54864" bIns="54864"/>
-          <a:lstStyle/>
-          <a:p>
-            <a:pPr algn="ctr">
-              <a:lnSpc>
-                <a:spcPct val="100000"/>
-              </a:lnSpc>
-              <a:spcAft>
-                <a:spcPts val="300"/>
-              </a:spcAft>
-            </a:pPr>
-            <a:r>
-              <a:rPr sz="900" b="1">
-                <a:solidFill>
-                  <a:srgbClr val="0B5FA5"/>
-                </a:solidFill>
-                <a:latin typeface="Calibri"/>
-              </a:rPr>
-              <a:t>LOCAL FIRST</a:t>
-            </a:r>
-          </a:p>
-        </p:txBody>
-      </p:sp>
-      <p:sp>
-        <p:nvSpPr>
-          <p:cNvPr id="17425" name="Rounded Rectangle 17424"/>
-          <p:cNvSpPr/>
-          <p:nvPr/>
-        </p:nvSpPr>
-        <p:spPr>
-          <a:xfrm>
-            <a:off x="10021824" y="1426464"/>
-            <a:ext cx="1847088" cy="310896"/>
-          </a:xfrm>
-          <a:prstGeom prst="roundRect">
-            <a:avLst/>
-          </a:prstGeom>
-          <a:solidFill>
-            <a:srgbClr val="F2F6FB"/>
-          </a:solidFill>
-          <a:ln w="9525">
-            <a:solidFill>
-              <a:srgbClr val="C2D4E6"/>
-            </a:solidFill>
-          </a:ln>
-          <a:effectLst/>
-        </p:spPr>
-        <p:style>
-          <a:lnRef idx="1">
-            <a:schemeClr val="accent1"/>
-          </a:lnRef>
-          <a:fillRef idx="3">
-            <a:schemeClr val="accent1"/>
-          </a:fillRef>
-          <a:effectRef idx="2">
-            <a:schemeClr val="accent1"/>
-          </a:effectRef>
-          <a:fontRef idx="minor">
-            <a:schemeClr val="lt1"/>
-          </a:fontRef>
-        </p:style>
-        <p:txBody>
-          <a:bodyPr rtlCol="0" anchor="t" wrap="square" tIns="54864" bIns="54864"/>
-          <a:lstStyle/>
-          <a:p>
-            <a:pPr algn="ctr">
-              <a:lnSpc>
-                <a:spcPct val="100000"/>
-              </a:lnSpc>
-              <a:spcAft>
-                <a:spcPts val="300"/>
-              </a:spcAft>
-            </a:pPr>
-            <a:r>
-              <a:rPr sz="900" b="1">
-                <a:solidFill>
-                  <a:srgbClr val="A83A1E"/>
-                </a:solidFill>
-                <a:latin typeface="Calibri"/>
-              </a:rPr>
-              <a:t>EVIDENCE LINKED</a:t>
-            </a:r>
-          </a:p>
-        </p:txBody>
-      </p:sp>
-      <p:pic>
-        <p:nvPicPr>
-          <p:cNvPr id="17426" name="Picture 17425" descr="06-evidence-provenance.png"/>
-          <p:cNvPicPr>
-            <a:picLocks noChangeAspect="1"/>
-          </p:cNvPicPr>
-          <p:nvPr/>
-        </p:nvPicPr>
-        <p:blipFill>
-          <a:blip r:embed="rId4"/>
-          <a:stretch>
-            <a:fillRect/>
-          </a:stretch>
-        </p:blipFill>
-        <p:spPr>
-          <a:xfrm>
-            <a:off x="6144768" y="1847088"/>
-            <a:ext cx="2761488" cy="1553337"/>
-          </a:xfrm>
-          <a:prstGeom prst="rect">
-            <a:avLst/>
-          </a:prstGeom>
-        </p:spPr>
-      </p:pic>
-      <p:sp>
-        <p:nvSpPr>
-          <p:cNvPr id="17427" name="Rectangle 17426"/>
-          <p:cNvSpPr/>
-          <p:nvPr/>
-        </p:nvSpPr>
-        <p:spPr>
-          <a:xfrm>
-            <a:off x="6144768" y="1847088"/>
-            <a:ext cx="2761488" cy="1553337"/>
-          </a:xfrm>
-          <a:prstGeom prst="rect">
-            <a:avLst/>
-          </a:prstGeom>
-          <a:noFill/>
-          <a:ln w="9525">
-            <a:solidFill>
-              <a:srgbClr val="C2D4E6"/>
-            </a:solidFill>
-          </a:ln>
-          <a:effectLst/>
-        </p:spPr>
-        <p:style>
-          <a:lnRef idx="1">
-            <a:schemeClr val="accent1"/>
-          </a:lnRef>
-          <a:fillRef idx="3">
-            <a:schemeClr val="accent1"/>
-          </a:fillRef>
-          <a:effectRef idx="2">
-            <a:schemeClr val="accent1"/>
-          </a:effectRef>
-          <a:fontRef idx="minor">
-            <a:schemeClr val="lt1"/>
-          </a:fontRef>
-        </p:style>
-        <p:txBody>
-          <a:bodyPr rtlCol="0" anchor="ctr"/>
-          <a:lstStyle/>
-          <a:p>
-            <a:pPr algn="ctr"/>
-          </a:p>
-        </p:txBody>
-      </p:sp>
-      <p:sp>
-        <p:nvSpPr>
-          <p:cNvPr id="17428" name="TextBox 17427"/>
-          <p:cNvSpPr txBox="1"/>
-          <p:nvPr/>
-        </p:nvSpPr>
-        <p:spPr>
-          <a:xfrm>
-            <a:off x="6144768" y="3418713"/>
-            <a:ext cx="2761488" cy="219456"/>
-          </a:xfrm>
-          <a:prstGeom prst="rect">
-            <a:avLst/>
-          </a:prstGeom>
-          <a:noFill/>
-        </p:spPr>
-        <p:txBody>
-          <a:bodyPr wrap="square">
-            <a:spAutoFit/>
-          </a:bodyPr>
-          <a:lstStyle/>
-          <a:p>
-            <a:pPr algn="ctr">
-              <a:lnSpc>
-                <a:spcPct val="100000"/>
-              </a:lnSpc>
-              <a:spcAft>
-                <a:spcPts val="300"/>
-              </a:spcAft>
-            </a:pPr>
-            <a:r>
-              <a:rPr sz="800" b="0">
-                <a:solidFill>
-                  <a:srgbClr val="4A5A70"/>
-                </a:solidFill>
-                <a:latin typeface="Calibri"/>
-              </a:rPr>
-              <a:t>Finding → packets</a:t>
-            </a:r>
-          </a:p>
-        </p:txBody>
-      </p:sp>
-      <p:pic>
-        <p:nvPicPr>
-          <p:cNvPr id="17429" name="Picture 17428" descr="07-crypto-intelligence.png"/>
-          <p:cNvPicPr>
-            <a:picLocks noChangeAspect="1"/>
-          </p:cNvPicPr>
-          <p:nvPr/>
-        </p:nvPicPr>
-        <p:blipFill>
-          <a:blip r:embed="rId5"/>
-          <a:stretch>
-            <a:fillRect/>
-          </a:stretch>
-        </p:blipFill>
-        <p:spPr>
-          <a:xfrm>
-            <a:off x="9052560" y="1847088"/>
-            <a:ext cx="2761488" cy="1553337"/>
-          </a:xfrm>
-          <a:prstGeom prst="rect">
-            <a:avLst/>
-          </a:prstGeom>
-        </p:spPr>
-      </p:pic>
-      <p:sp>
-        <p:nvSpPr>
-          <p:cNvPr id="17430" name="Rectangle 17429"/>
-          <p:cNvSpPr/>
-          <p:nvPr/>
-        </p:nvSpPr>
-        <p:spPr>
-          <a:xfrm>
-            <a:off x="9052560" y="1847088"/>
-            <a:ext cx="2761488" cy="1553337"/>
-          </a:xfrm>
-          <a:prstGeom prst="rect">
-            <a:avLst/>
-          </a:prstGeom>
-          <a:noFill/>
-          <a:ln w="9525">
-            <a:solidFill>
-              <a:srgbClr val="C2D4E6"/>
-            </a:solidFill>
-          </a:ln>
-          <a:effectLst/>
-        </p:spPr>
-        <p:style>
-          <a:lnRef idx="1">
-            <a:schemeClr val="accent1"/>
-          </a:lnRef>
-          <a:fillRef idx="3">
-            <a:schemeClr val="accent1"/>
-          </a:fillRef>
-          <a:effectRef idx="2">
-            <a:schemeClr val="accent1"/>
-          </a:effectRef>
-          <a:fontRef idx="minor">
-            <a:schemeClr val="lt1"/>
-          </a:fontRef>
-        </p:style>
-        <p:txBody>
-          <a:bodyPr rtlCol="0" anchor="ctr"/>
-          <a:lstStyle/>
-          <a:p>
-            <a:pPr algn="ctr"/>
-          </a:p>
-        </p:txBody>
-      </p:sp>
-      <p:sp>
-        <p:nvSpPr>
-          <p:cNvPr id="17431" name="TextBox 17430"/>
-          <p:cNvSpPr txBox="1"/>
-          <p:nvPr/>
-        </p:nvSpPr>
-        <p:spPr>
-          <a:xfrm>
-            <a:off x="9052560" y="3418713"/>
-            <a:ext cx="2761488" cy="219456"/>
-          </a:xfrm>
-          <a:prstGeom prst="rect">
-            <a:avLst/>
-          </a:prstGeom>
-          <a:noFill/>
-        </p:spPr>
-        <p:txBody>
-          <a:bodyPr wrap="square">
-            <a:spAutoFit/>
-          </a:bodyPr>
-          <a:lstStyle/>
-          <a:p>
-            <a:pPr algn="ctr">
-              <a:lnSpc>
-                <a:spcPct val="100000"/>
-              </a:lnSpc>
-              <a:spcAft>
-                <a:spcPts val="300"/>
-              </a:spcAft>
-            </a:pPr>
-            <a:r>
-              <a:rPr sz="800" b="0">
-                <a:solidFill>
-                  <a:srgbClr val="4A5A70"/>
-                </a:solidFill>
-                <a:latin typeface="Calibri"/>
-              </a:rPr>
-              <a:t>Cryptographic DNA</a:t>
-            </a:r>
-          </a:p>
-        </p:txBody>
-      </p:sp>
-      <p:sp>
-        <p:nvSpPr>
-          <p:cNvPr id="17432" name="Rounded Rectangle 17431"/>
-          <p:cNvSpPr/>
-          <p:nvPr/>
-        </p:nvSpPr>
-        <p:spPr>
-          <a:xfrm>
-            <a:off x="6144768" y="3675887"/>
-            <a:ext cx="5669280" cy="1188720"/>
+            <a:off x="9637776" y="2432304"/>
+            <a:ext cx="2048256" cy="512064"/>
           </a:xfrm>
           <a:prstGeom prst="roundRect">
             <a:avLst/>
@@ -8630,6 +9173,322 @@
           </a:fontRef>
         </p:style>
         <p:txBody>
+          <a:bodyPr rtlCol="0" anchor="ctr" wrap="square" tIns="54864" bIns="54864"/>
+          <a:lstStyle/>
+          <a:p>
+            <a:pPr algn="ctr">
+              <a:lnSpc>
+                <a:spcPct val="88000"/>
+              </a:lnSpc>
+              <a:spcAft>
+                <a:spcPts val="100"/>
+              </a:spcAft>
+              <a:buNone/>
+            </a:pPr>
+            <a:r>
+              <a:rPr sz="850" b="1">
+                <a:solidFill>
+                  <a:srgbClr val="111B2A"/>
+                </a:solidFill>
+                <a:latin typeface="Calibri"/>
+              </a:rPr>
+              <a:t>JSON · offline HTML · PDF</a:t>
+            </a:r>
+          </a:p>
+          <a:p>
+            <a:pPr algn="ctr">
+              <a:lnSpc>
+                <a:spcPct val="88000"/>
+              </a:lnSpc>
+              <a:spcAft>
+                <a:spcPts val="100"/>
+              </a:spcAft>
+              <a:buNone/>
+            </a:pPr>
+            <a:r>
+              <a:rPr sz="750" b="0">
+                <a:solidFill>
+                  <a:srgbClr val="4A5A70"/>
+                </a:solidFill>
+                <a:latin typeface="Calibri"/>
+              </a:rPr>
+              <a:t>parity-tested against each other</a:t>
+            </a:r>
+          </a:p>
+        </p:txBody>
+      </p:sp>
+      <p:sp>
+        <p:nvSpPr>
+          <p:cNvPr id="17439" name="Down Arrow 17438"/>
+          <p:cNvSpPr/>
+          <p:nvPr/>
+        </p:nvSpPr>
+        <p:spPr>
+          <a:xfrm>
+            <a:off x="10579608" y="2999232"/>
+            <a:ext cx="164592" cy="201168"/>
+          </a:xfrm>
+          <a:prstGeom prst="downArrow">
+            <a:avLst/>
+          </a:prstGeom>
+          <a:solidFill>
+            <a:srgbClr val="4A5A70"/>
+          </a:solidFill>
+          <a:ln>
+            <a:noFill/>
+          </a:ln>
+          <a:effectLst/>
+        </p:spPr>
+        <p:style>
+          <a:lnRef idx="1">
+            <a:schemeClr val="accent1"/>
+          </a:lnRef>
+          <a:fillRef idx="3">
+            <a:schemeClr val="accent1"/>
+          </a:fillRef>
+          <a:effectRef idx="2">
+            <a:schemeClr val="accent1"/>
+          </a:effectRef>
+          <a:fontRef idx="minor">
+            <a:schemeClr val="lt1"/>
+          </a:fontRef>
+        </p:style>
+        <p:txBody>
+          <a:bodyPr rtlCol="0" anchor="ctr"/>
+          <a:lstStyle/>
+          <a:p>
+            <a:pPr algn="ctr"/>
+          </a:p>
+        </p:txBody>
+      </p:sp>
+      <p:sp>
+        <p:nvSpPr>
+          <p:cNvPr id="17440" name="Rounded Rectangle 17439"/>
+          <p:cNvSpPr/>
+          <p:nvPr/>
+        </p:nvSpPr>
+        <p:spPr>
+          <a:xfrm>
+            <a:off x="9637776" y="3236976"/>
+            <a:ext cx="2048256" cy="438912"/>
+          </a:xfrm>
+          <a:prstGeom prst="roundRect">
+            <a:avLst/>
+          </a:prstGeom>
+          <a:solidFill>
+            <a:srgbClr val="EEF3F9"/>
+          </a:solidFill>
+          <a:ln w="9525">
+            <a:solidFill>
+              <a:srgbClr val="C2D4E6"/>
+            </a:solidFill>
+          </a:ln>
+          <a:effectLst/>
+        </p:spPr>
+        <p:style>
+          <a:lnRef idx="1">
+            <a:schemeClr val="accent1"/>
+          </a:lnRef>
+          <a:fillRef idx="3">
+            <a:schemeClr val="accent1"/>
+          </a:fillRef>
+          <a:effectRef idx="2">
+            <a:schemeClr val="accent1"/>
+          </a:effectRef>
+          <a:fontRef idx="minor">
+            <a:schemeClr val="lt1"/>
+          </a:fontRef>
+        </p:style>
+        <p:txBody>
+          <a:bodyPr rtlCol="0" anchor="ctr" wrap="square" tIns="54864" bIns="54864"/>
+          <a:lstStyle/>
+          <a:p>
+            <a:pPr algn="ctr">
+              <a:lnSpc>
+                <a:spcPct val="88000"/>
+              </a:lnSpc>
+              <a:spcAft>
+                <a:spcPts val="100"/>
+              </a:spcAft>
+              <a:buNone/>
+            </a:pPr>
+            <a:r>
+              <a:rPr sz="850" b="1">
+                <a:solidFill>
+                  <a:srgbClr val="111B2A"/>
+                </a:solidFill>
+                <a:latin typeface="Calibri"/>
+              </a:rPr>
+              <a:t>Local API → React dashboard</a:t>
+            </a:r>
+          </a:p>
+        </p:txBody>
+      </p:sp>
+      <p:sp>
+        <p:nvSpPr>
+          <p:cNvPr id="17441" name="Rounded Rectangle 17440"/>
+          <p:cNvSpPr/>
+          <p:nvPr/>
+        </p:nvSpPr>
+        <p:spPr>
+          <a:xfrm>
+            <a:off x="384048" y="3968496"/>
+            <a:ext cx="11430000" cy="420624"/>
+          </a:xfrm>
+          <a:prstGeom prst="roundRect">
+            <a:avLst/>
+          </a:prstGeom>
+          <a:solidFill>
+            <a:srgbClr val="ECF4FA"/>
+          </a:solidFill>
+          <a:ln w="9525">
+            <a:solidFill>
+              <a:srgbClr val="C8DDEE"/>
+            </a:solidFill>
+          </a:ln>
+          <a:effectLst/>
+        </p:spPr>
+        <p:style>
+          <a:lnRef idx="1">
+            <a:schemeClr val="accent1"/>
+          </a:lnRef>
+          <a:fillRef idx="3">
+            <a:schemeClr val="accent1"/>
+          </a:fillRef>
+          <a:effectRef idx="2">
+            <a:schemeClr val="accent1"/>
+          </a:effectRef>
+          <a:fontRef idx="minor">
+            <a:schemeClr val="lt1"/>
+          </a:fontRef>
+        </p:style>
+        <p:txBody>
+          <a:bodyPr rtlCol="0" anchor="ctr" wrap="square" tIns="54864" bIns="54864"/>
+          <a:lstStyle/>
+          <a:p>
+            <a:pPr algn="ctr">
+              <a:lnSpc>
+                <a:spcPct val="100000"/>
+              </a:lnSpc>
+              <a:spcAft>
+                <a:spcPts val="300"/>
+              </a:spcAft>
+              <a:buNone/>
+            </a:pPr>
+            <a:r>
+              <a:rPr sz="900" b="1">
+                <a:solidFill>
+                  <a:srgbClr val="0B5FA5"/>
+                </a:solidFill>
+                <a:latin typeface="Calibri"/>
+              </a:rPr>
+              <a:t>EVIDENCE PROVENANCE  —  every stage attaches the capture, session, packet number, timestamp and stream offset it read from, and marks each value OBSERVED, INFERRED, UNKNOWN or NOT AVAILABLE</a:t>
+            </a:r>
+          </a:p>
+        </p:txBody>
+      </p:sp>
+      <p:sp>
+        <p:nvSpPr>
+          <p:cNvPr id="17442" name="Rounded Rectangle 17441"/>
+          <p:cNvSpPr/>
+          <p:nvPr/>
+        </p:nvSpPr>
+        <p:spPr>
+          <a:xfrm>
+            <a:off x="384048" y="4480560"/>
+            <a:ext cx="11430000" cy="420624"/>
+          </a:xfrm>
+          <a:prstGeom prst="roundRect">
+            <a:avLst/>
+          </a:prstGeom>
+          <a:solidFill>
+            <a:srgbClr val="E4EEE6"/>
+          </a:solidFill>
+          <a:ln w="9525">
+            <a:solidFill>
+              <a:srgbClr val="BED8C6"/>
+            </a:solidFill>
+          </a:ln>
+          <a:effectLst/>
+        </p:spPr>
+        <p:style>
+          <a:lnRef idx="1">
+            <a:schemeClr val="accent1"/>
+          </a:lnRef>
+          <a:fillRef idx="3">
+            <a:schemeClr val="accent1"/>
+          </a:fillRef>
+          <a:effectRef idx="2">
+            <a:schemeClr val="accent1"/>
+          </a:effectRef>
+          <a:fontRef idx="minor">
+            <a:schemeClr val="lt1"/>
+          </a:fontRef>
+        </p:style>
+        <p:txBody>
+          <a:bodyPr rtlCol="0" anchor="ctr" wrap="square" tIns="54864" bIns="54864"/>
+          <a:lstStyle/>
+          <a:p>
+            <a:pPr algn="ctr">
+              <a:lnSpc>
+                <a:spcPct val="100000"/>
+              </a:lnSpc>
+              <a:spcAft>
+                <a:spcPts val="300"/>
+              </a:spcAft>
+              <a:buNone/>
+            </a:pPr>
+            <a:r>
+              <a:rPr sz="900" b="1">
+                <a:solidFill>
+                  <a:srgbClr val="1B6B3A"/>
+                </a:solidFill>
+                <a:latin typeface="Calibri"/>
+              </a:rPr>
+              <a:t>PASSIVE BY CONSTRUCTION  —  no stage opens a socket. Scapy's neighbour resolver is replaced with one that raises, and the whole pipeline is run through stubbed socket constructors by the test suite</a:t>
+            </a:r>
+          </a:p>
+        </p:txBody>
+      </p:sp>
+      <p:sp>
+        <p:nvSpPr>
+          <p:cNvPr id="17443" name="Rounded Rectangle 17442"/>
+          <p:cNvSpPr/>
+          <p:nvPr/>
+        </p:nvSpPr>
+        <p:spPr>
+          <a:xfrm>
+            <a:off x="384048" y="5010912"/>
+            <a:ext cx="3749039" cy="969264"/>
+          </a:xfrm>
+          <a:prstGeom prst="roundRect">
+            <a:avLst/>
+          </a:prstGeom>
+          <a:solidFill>
+            <a:srgbClr val="EEF3F9"/>
+          </a:solidFill>
+          <a:ln w="9525">
+            <a:solidFill>
+              <a:srgbClr val="C2D4E6"/>
+            </a:solidFill>
+          </a:ln>
+          <a:effectLst/>
+        </p:spPr>
+        <p:style>
+          <a:lnRef idx="1">
+            <a:schemeClr val="accent1"/>
+          </a:lnRef>
+          <a:fillRef idx="3">
+            <a:schemeClr val="accent1"/>
+          </a:fillRef>
+          <a:effectRef idx="2">
+            <a:schemeClr val="accent1"/>
+          </a:effectRef>
+          <a:fontRef idx="minor">
+            <a:schemeClr val="lt1"/>
+          </a:fontRef>
+        </p:style>
+        <p:txBody>
           <a:bodyPr rtlCol="0" anchor="t" wrap="square" tIns="54864" bIns="54864"/>
           <a:lstStyle/>
           <a:p>
@@ -8640,15 +9499,16 @@
               <a:spcAft>
                 <a:spcPts val="300"/>
               </a:spcAft>
-            </a:pPr>
-            <a:r>
-              <a:rPr sz="1000" b="1">
+              <a:buNone/>
+            </a:pPr>
+            <a:r>
+              <a:rPr sz="950" b="1">
                 <a:solidFill>
                   <a:srgbClr val="0B5FA5"/>
                 </a:solidFill>
                 <a:latin typeface="Calibri"/>
               </a:rPr>
-              <a:t>Technologies</a:t>
+              <a:t>Engine</a:t>
             </a:r>
           </a:p>
           <a:p>
@@ -8659,15 +9519,79 @@
               <a:spcAft>
                 <a:spcPts val="300"/>
               </a:spcAft>
-            </a:pPr>
-            <a:r>
-              <a:rPr sz="850" b="0">
+              <a:buNone/>
+            </a:pPr>
+            <a:r>
+              <a:rPr sz="800" b="0">
                 <a:solidFill>
                   <a:srgbClr val="1F2C3F"/>
                 </a:solidFill>
                 <a:latin typeface="Calibri"/>
               </a:rPr>
-              <a:t>Python 3.12 · Scapy 2.7 (dissection only) · cryptography 50 · Pydantic 2.9 · FastAPI · SQLite · SQLAlchemy</a:t>
+              <a:t>Python 3.12 · Scapy (dissection only) · cryptography · Pydantic · scikit-learn</a:t>
+            </a:r>
+          </a:p>
+        </p:txBody>
+      </p:sp>
+      <p:sp>
+        <p:nvSpPr>
+          <p:cNvPr id="17444" name="Rounded Rectangle 17443"/>
+          <p:cNvSpPr/>
+          <p:nvPr/>
+        </p:nvSpPr>
+        <p:spPr>
+          <a:xfrm>
+            <a:off x="4224528" y="5010912"/>
+            <a:ext cx="3749039" cy="969264"/>
+          </a:xfrm>
+          <a:prstGeom prst="roundRect">
+            <a:avLst/>
+          </a:prstGeom>
+          <a:solidFill>
+            <a:srgbClr val="EEF3F9"/>
+          </a:solidFill>
+          <a:ln w="9525">
+            <a:solidFill>
+              <a:srgbClr val="C2D4E6"/>
+            </a:solidFill>
+          </a:ln>
+          <a:effectLst/>
+        </p:spPr>
+        <p:style>
+          <a:lnRef idx="1">
+            <a:schemeClr val="accent1"/>
+          </a:lnRef>
+          <a:fillRef idx="3">
+            <a:schemeClr val="accent1"/>
+          </a:fillRef>
+          <a:effectRef idx="2">
+            <a:schemeClr val="accent1"/>
+          </a:effectRef>
+          <a:fontRef idx="minor">
+            <a:schemeClr val="lt1"/>
+          </a:fontRef>
+        </p:style>
+        <p:txBody>
+          <a:bodyPr rtlCol="0" anchor="t" wrap="square" tIns="54864" bIns="54864"/>
+          <a:lstStyle/>
+          <a:p>
+            <a:pPr algn="ctr">
+              <a:lnSpc>
+                <a:spcPct val="90000"/>
+              </a:lnSpc>
+              <a:spcAft>
+                <a:spcPts val="300"/>
+              </a:spcAft>
+              <a:buNone/>
+            </a:pPr>
+            <a:r>
+              <a:rPr sz="950" b="1">
+                <a:solidFill>
+                  <a:srgbClr val="0B5FA5"/>
+                </a:solidFill>
+                <a:latin typeface="Calibri"/>
+              </a:rPr>
+              <a:t>Interface and API</a:t>
             </a:r>
           </a:p>
           <a:p>
@@ -8678,15 +9602,79 @@
               <a:spcAft>
                 <a:spcPts val="300"/>
               </a:spcAft>
-            </a:pPr>
-            <a:r>
-              <a:rPr sz="850" b="0">
+              <a:buNone/>
+            </a:pPr>
+            <a:r>
+              <a:rPr sz="800" b="0">
                 <a:solidFill>
                   <a:srgbClr val="1F2C3F"/>
                 </a:solidFill>
                 <a:latin typeface="Calibri"/>
               </a:rPr>
-              <a:t>React 18 · TypeScript strict · Vite 8 · Tailwind · scikit-learn 1.5 · ReportLab · Jinja2</a:t>
+              <a:t>FastAPI · SQLite · SQLAlchemy · React 18 · TypeScript strict · Vite · Tailwind</a:t>
+            </a:r>
+          </a:p>
+        </p:txBody>
+      </p:sp>
+      <p:sp>
+        <p:nvSpPr>
+          <p:cNvPr id="17445" name="Rounded Rectangle 17444"/>
+          <p:cNvSpPr/>
+          <p:nvPr/>
+        </p:nvSpPr>
+        <p:spPr>
+          <a:xfrm>
+            <a:off x="8065008" y="5010912"/>
+            <a:ext cx="3749039" cy="969264"/>
+          </a:xfrm>
+          <a:prstGeom prst="roundRect">
+            <a:avLst/>
+          </a:prstGeom>
+          <a:solidFill>
+            <a:srgbClr val="EEF3F9"/>
+          </a:solidFill>
+          <a:ln w="9525">
+            <a:solidFill>
+              <a:srgbClr val="C2D4E6"/>
+            </a:solidFill>
+          </a:ln>
+          <a:effectLst/>
+        </p:spPr>
+        <p:style>
+          <a:lnRef idx="1">
+            <a:schemeClr val="accent1"/>
+          </a:lnRef>
+          <a:fillRef idx="3">
+            <a:schemeClr val="accent1"/>
+          </a:fillRef>
+          <a:effectRef idx="2">
+            <a:schemeClr val="accent1"/>
+          </a:effectRef>
+          <a:fontRef idx="minor">
+            <a:schemeClr val="lt1"/>
+          </a:fontRef>
+        </p:style>
+        <p:txBody>
+          <a:bodyPr rtlCol="0" anchor="t" wrap="square" tIns="54864" bIns="54864"/>
+          <a:lstStyle/>
+          <a:p>
+            <a:pPr algn="ctr">
+              <a:lnSpc>
+                <a:spcPct val="90000"/>
+              </a:lnSpc>
+              <a:spcAft>
+                <a:spcPts val="300"/>
+              </a:spcAft>
+              <a:buNone/>
+            </a:pPr>
+            <a:r>
+              <a:rPr sz="950" b="1">
+                <a:solidFill>
+                  <a:srgbClr val="0B5FA5"/>
+                </a:solidFill>
+                <a:latin typeface="Calibri"/>
+              </a:rPr>
+              <a:t>Verification</a:t>
             </a:r>
           </a:p>
           <a:p>
@@ -8697,15 +9685,16 @@
               <a:spcAft>
                 <a:spcPts val="300"/>
               </a:spcAft>
-            </a:pPr>
-            <a:r>
-              <a:rPr sz="850" b="0">
+              <a:buNone/>
+            </a:pPr>
+            <a:r>
+              <a:rPr sz="800" b="0">
                 <a:solidFill>
                   <a:srgbClr val="1F2C3F"/>
                 </a:solidFill>
                 <a:latin typeface="Calibri"/>
               </a:rPr>
-              <a:t>Verification: pytest · hypothesis · Playwright · Vitest · TShark used as an independent dissector</a:t>
+              <a:t>pytest · hypothesis · Vitest · Playwright · TShark as an independent dissector</a:t>
             </a:r>
           </a:p>
         </p:txBody>
@@ -8851,8 +9840,8 @@
         </p:nvSpPr>
         <p:spPr bwMode="auto">
           <a:xfrm>
-            <a:off x="384048" y="1024128"/>
-            <a:ext cx="11430000" cy="365760"/>
+            <a:off x="384048" y="969264"/>
+            <a:ext cx="11430000" cy="310896"/>
           </a:xfrm>
           <a:prstGeom prst="rect">
             <a:avLst/>
@@ -8884,9 +9873,9 @@
               <a:buClrTx/>
               <a:buSzTx/>
               <a:buFont typeface="Arial" panose="020B0604020202020204" pitchFamily="34" charset="0"/>
-              <a:buChar char="•"/>
               <a:tabLst/>
               <a:defRPr/>
+              <a:buNone/>
             </a:pPr>
             <a:r>
               <a:rPr sz="1000" b="0">
@@ -8895,7 +9884,7 @@
                 </a:solidFill>
                 <a:latin typeface="Calibri"/>
               </a:rPr>
-              <a:t>Feasible because it is built and measured. Every figure is from the release commit, re-run — not an estimate.</a:t>
+              <a:t>Feasible because it is built and measured. Every figure below is from the release commit, re-run — not an estimate.</a:t>
             </a:r>
             <a:endParaRPr kumimoji="0" lang="en-US" sz="2800" b="0" i="0" u="none" strike="noStrike" kern="1200" cap="none" spc="0" normalizeH="0" baseline="0" noProof="0" dirty="0">
               <a:ln>
@@ -9157,8 +10146,8 @@
         </p:nvSpPr>
         <p:spPr>
           <a:xfrm>
-            <a:off x="384048" y="1426464"/>
-            <a:ext cx="3675887" cy="2377440"/>
+            <a:off x="384048" y="1316736"/>
+            <a:ext cx="1847088" cy="786384"/>
           </a:xfrm>
           <a:prstGeom prst="roundRect">
             <a:avLst/>
@@ -9188,158 +10177,46 @@
           </a:fontRef>
         </p:style>
         <p:txBody>
-          <a:bodyPr rtlCol="0" anchor="t" wrap="square" tIns="54864" bIns="54864"/>
+          <a:bodyPr rtlCol="0" anchor="ctr" wrap="square" tIns="54864" bIns="54864"/>
           <a:lstStyle/>
           <a:p>
             <a:pPr algn="ctr">
               <a:lnSpc>
-                <a:spcPct val="90000"/>
-              </a:lnSpc>
-              <a:spcAft>
-                <a:spcPts val="300"/>
-              </a:spcAft>
-            </a:pPr>
-            <a:r>
-              <a:rPr sz="1050" b="1">
-                <a:solidFill>
-                  <a:srgbClr val="1B6B3A"/>
+                <a:spcPct val="84000"/>
+              </a:lnSpc>
+              <a:spcAft>
+                <a:spcPts val="0"/>
+              </a:spcAft>
+              <a:buNone/>
+            </a:pPr>
+            <a:r>
+              <a:rPr sz="2200" b="1">
+                <a:solidFill>
+                  <a:srgbClr val="0B5FA5"/>
                 </a:solidFill>
                 <a:latin typeface="Calibri"/>
               </a:rPr>
-              <a:t>Implemented and verified</a:t>
-            </a:r>
-          </a:p>
-          <a:p>
-            <a:pPr>
-              <a:lnSpc>
-                <a:spcPct val="90000"/>
-              </a:lnSpc>
-              <a:spcAft>
-                <a:spcPts val="300"/>
-              </a:spcAft>
-            </a:pPr>
-            <a:r>
-              <a:rPr sz="850" b="0">
-                <a:solidFill>
-                  <a:srgbClr val="1F2C3F"/>
+              <a:t>1,357</a:t>
+            </a:r>
+          </a:p>
+          <a:p>
+            <a:pPr algn="ctr">
+              <a:lnSpc>
+                <a:spcPct val="84000"/>
+              </a:lnSpc>
+              <a:spcAft>
+                <a:spcPts val="0"/>
+              </a:spcAft>
+              <a:buNone/>
+            </a:pPr>
+            <a:r>
+              <a:rPr sz="750" b="0">
+                <a:solidFill>
+                  <a:srgbClr val="4A5A70"/>
                 </a:solidFill>
                 <a:latin typeface="Calibri"/>
               </a:rPr>
-              <a:t>Full PCAP → report workflow, end to end</a:t>
-            </a:r>
-          </a:p>
-          <a:p>
-            <a:pPr>
-              <a:lnSpc>
-                <a:spcPct val="90000"/>
-              </a:lnSpc>
-              <a:spcAft>
-                <a:spcPts val="300"/>
-              </a:spcAft>
-            </a:pPr>
-            <a:r>
-              <a:rPr sz="850" b="0">
-                <a:solidFill>
-                  <a:srgbClr val="1F2C3F"/>
-                </a:solidFill>
-                <a:latin typeface="Calibri"/>
-              </a:rPr>
-              <a:t>TCP reconstruction handles reordering, retransmission, gaps, overlap conflicts and tuple reuse</a:t>
-            </a:r>
-          </a:p>
-          <a:p>
-            <a:pPr>
-              <a:lnSpc>
-                <a:spcPct val="90000"/>
-              </a:lnSpc>
-              <a:spcAft>
-                <a:spcPts val="300"/>
-              </a:spcAft>
-            </a:pPr>
-            <a:r>
-              <a:rPr sz="850" b="0">
-                <a:solidFill>
-                  <a:srgbClr val="1F2C3F"/>
-                </a:solidFill>
-                <a:latin typeface="Calibri"/>
-              </a:rPr>
-              <a:t>SMTP / IMAP / POP3 state machines with STARTTLS and STLS; protocol from the dialogue, not the port</a:t>
-            </a:r>
-          </a:p>
-          <a:p>
-            <a:pPr>
-              <a:lnSpc>
-                <a:spcPct val="90000"/>
-              </a:lnSpc>
-              <a:spcAft>
-                <a:spcPts val="300"/>
-              </a:spcAft>
-            </a:pPr>
-            <a:r>
-              <a:rPr sz="850" b="0">
-                <a:solidFill>
-                  <a:srgbClr val="1F2C3F"/>
-                </a:solidFill>
-                <a:latin typeface="Calibri"/>
-              </a:rPr>
-              <a:t>TLS 1.2 and TLS 1.3 handled with separate semantics</a:t>
-            </a:r>
-          </a:p>
-          <a:p>
-            <a:pPr>
-              <a:lnSpc>
-                <a:spcPct val="90000"/>
-              </a:lnSpc>
-              <a:spcAft>
-                <a:spcPts val="300"/>
-              </a:spcAft>
-            </a:pPr>
-            <a:r>
-              <a:rPr sz="850" b="0">
-                <a:solidFill>
-                  <a:srgbClr val="1F2C3F"/>
-                </a:solidFill>
-                <a:latin typeface="Calibri"/>
-              </a:rPr>
-              <a:t>X.509 analysis wherever the evidence permits</a:t>
-            </a:r>
-          </a:p>
-          <a:p>
-            <a:pPr>
-              <a:lnSpc>
-                <a:spcPct val="90000"/>
-              </a:lnSpc>
-              <a:spcAft>
-                <a:spcPts val="300"/>
-              </a:spcAft>
-            </a:pPr>
-            <a:r>
-              <a:rPr sz="850" b="0">
-                <a:solidFill>
-                  <a:srgbClr val="1F2C3F"/>
-                </a:solidFill>
-                <a:latin typeface="Calibri"/>
-              </a:rPr>
-              <a:t>25 deterministic rules, versioned policy, explainable score</a:t>
-            </a:r>
-          </a:p>
-          <a:p>
-            <a:pPr>
-              <a:lnSpc>
-                <a:spcPct val="90000"/>
-              </a:lnSpc>
-              <a:spcAft>
-                <a:spcPts val="300"/>
-              </a:spcAft>
-            </a:pPr>
-            <a:r>
-              <a:rPr sz="850" b="0">
-                <a:solidFill>
-                  <a:srgbClr val="1F2C3F"/>
-                </a:solidFill>
-                <a:latin typeface="Calibri"/>
-              </a:rPr>
-              <a:t>Cross-capture drift and correlation</a:t>
+              <a:t>backend tests pass</a:t>
             </a:r>
           </a:p>
         </p:txBody>
@@ -9352,8 +10229,8 @@
         </p:nvSpPr>
         <p:spPr>
           <a:xfrm>
-            <a:off x="4206240" y="1426464"/>
-            <a:ext cx="3675887" cy="2377440"/>
+            <a:off x="2322576" y="1316736"/>
+            <a:ext cx="1847088" cy="786384"/>
           </a:xfrm>
           <a:prstGeom prst="roundRect">
             <a:avLst/>
@@ -9383,146 +10260,548 @@
           </a:fontRef>
         </p:style>
         <p:txBody>
+          <a:bodyPr rtlCol="0" anchor="ctr" wrap="square" tIns="54864" bIns="54864"/>
+          <a:lstStyle/>
+          <a:p>
+            <a:pPr algn="ctr">
+              <a:lnSpc>
+                <a:spcPct val="84000"/>
+              </a:lnSpc>
+              <a:spcAft>
+                <a:spcPts val="0"/>
+              </a:spcAft>
+              <a:buNone/>
+            </a:pPr>
+            <a:r>
+              <a:rPr sz="2200" b="1">
+                <a:solidFill>
+                  <a:srgbClr val="0B5FA5"/>
+                </a:solidFill>
+                <a:latin typeface="Calibri"/>
+              </a:rPr>
+              <a:t>1,367</a:t>
+            </a:r>
+          </a:p>
+          <a:p>
+            <a:pPr algn="ctr">
+              <a:lnSpc>
+                <a:spcPct val="84000"/>
+              </a:lnSpc>
+              <a:spcAft>
+                <a:spcPts val="0"/>
+              </a:spcAft>
+              <a:buNone/>
+            </a:pPr>
+            <a:r>
+              <a:rPr sz="750" b="0">
+                <a:solidFill>
+                  <a:srgbClr val="4A5A70"/>
+                </a:solidFill>
+                <a:latin typeface="Calibri"/>
+              </a:rPr>
+              <a:t>with the TShark cross-check</a:t>
+            </a:r>
+          </a:p>
+        </p:txBody>
+      </p:sp>
+      <p:sp>
+        <p:nvSpPr>
+          <p:cNvPr id="17413" name="Rounded Rectangle 17412"/>
+          <p:cNvSpPr/>
+          <p:nvPr/>
+        </p:nvSpPr>
+        <p:spPr>
+          <a:xfrm>
+            <a:off x="4261104" y="1316736"/>
+            <a:ext cx="1847088" cy="786384"/>
+          </a:xfrm>
+          <a:prstGeom prst="roundRect">
+            <a:avLst/>
+          </a:prstGeom>
+          <a:solidFill>
+            <a:srgbClr val="EEF3F9"/>
+          </a:solidFill>
+          <a:ln w="9525">
+            <a:solidFill>
+              <a:srgbClr val="C2D4E6"/>
+            </a:solidFill>
+          </a:ln>
+          <a:effectLst/>
+        </p:spPr>
+        <p:style>
+          <a:lnRef idx="1">
+            <a:schemeClr val="accent1"/>
+          </a:lnRef>
+          <a:fillRef idx="3">
+            <a:schemeClr val="accent1"/>
+          </a:fillRef>
+          <a:effectRef idx="2">
+            <a:schemeClr val="accent1"/>
+          </a:effectRef>
+          <a:fontRef idx="minor">
+            <a:schemeClr val="lt1"/>
+          </a:fontRef>
+        </p:style>
+        <p:txBody>
+          <a:bodyPr rtlCol="0" anchor="ctr" wrap="square" tIns="54864" bIns="54864"/>
+          <a:lstStyle/>
+          <a:p>
+            <a:pPr algn="ctr">
+              <a:lnSpc>
+                <a:spcPct val="84000"/>
+              </a:lnSpc>
+              <a:spcAft>
+                <a:spcPts val="0"/>
+              </a:spcAft>
+              <a:buNone/>
+            </a:pPr>
+            <a:r>
+              <a:rPr sz="2200" b="1">
+                <a:solidFill>
+                  <a:srgbClr val="0B5FA5"/>
+                </a:solidFill>
+                <a:latin typeface="Calibri"/>
+              </a:rPr>
+              <a:t>89</a:t>
+            </a:r>
+          </a:p>
+          <a:p>
+            <a:pPr algn="ctr">
+              <a:lnSpc>
+                <a:spcPct val="84000"/>
+              </a:lnSpc>
+              <a:spcAft>
+                <a:spcPts val="0"/>
+              </a:spcAft>
+              <a:buNone/>
+            </a:pPr>
+            <a:r>
+              <a:rPr sz="750" b="0">
+                <a:solidFill>
+                  <a:srgbClr val="4A5A70"/>
+                </a:solidFill>
+                <a:latin typeface="Calibri"/>
+              </a:rPr>
+              <a:t>frontend tests</a:t>
+            </a:r>
+          </a:p>
+        </p:txBody>
+      </p:sp>
+      <p:sp>
+        <p:nvSpPr>
+          <p:cNvPr id="17414" name="Rounded Rectangle 17413"/>
+          <p:cNvSpPr/>
+          <p:nvPr/>
+        </p:nvSpPr>
+        <p:spPr>
+          <a:xfrm>
+            <a:off x="6199632" y="1316736"/>
+            <a:ext cx="1847088" cy="786384"/>
+          </a:xfrm>
+          <a:prstGeom prst="roundRect">
+            <a:avLst/>
+          </a:prstGeom>
+          <a:solidFill>
+            <a:srgbClr val="EEF3F9"/>
+          </a:solidFill>
+          <a:ln w="9525">
+            <a:solidFill>
+              <a:srgbClr val="C2D4E6"/>
+            </a:solidFill>
+          </a:ln>
+          <a:effectLst/>
+        </p:spPr>
+        <p:style>
+          <a:lnRef idx="1">
+            <a:schemeClr val="accent1"/>
+          </a:lnRef>
+          <a:fillRef idx="3">
+            <a:schemeClr val="accent1"/>
+          </a:fillRef>
+          <a:effectRef idx="2">
+            <a:schemeClr val="accent1"/>
+          </a:effectRef>
+          <a:fontRef idx="minor">
+            <a:schemeClr val="lt1"/>
+          </a:fontRef>
+        </p:style>
+        <p:txBody>
+          <a:bodyPr rtlCol="0" anchor="ctr" wrap="square" tIns="54864" bIns="54864"/>
+          <a:lstStyle/>
+          <a:p>
+            <a:pPr algn="ctr">
+              <a:lnSpc>
+                <a:spcPct val="84000"/>
+              </a:lnSpc>
+              <a:spcAft>
+                <a:spcPts val="0"/>
+              </a:spcAft>
+              <a:buNone/>
+            </a:pPr>
+            <a:r>
+              <a:rPr sz="2200" b="1">
+                <a:solidFill>
+                  <a:srgbClr val="0B5FA5"/>
+                </a:solidFill>
+                <a:latin typeface="Calibri"/>
+              </a:rPr>
+              <a:t>5</a:t>
+            </a:r>
+          </a:p>
+          <a:p>
+            <a:pPr algn="ctr">
+              <a:lnSpc>
+                <a:spcPct val="84000"/>
+              </a:lnSpc>
+              <a:spcAft>
+                <a:spcPts val="0"/>
+              </a:spcAft>
+              <a:buNone/>
+            </a:pPr>
+            <a:r>
+              <a:rPr sz="750" b="0">
+                <a:solidFill>
+                  <a:srgbClr val="4A5A70"/>
+                </a:solidFill>
+                <a:latin typeface="Calibri"/>
+              </a:rPr>
+              <a:t>browser end-to-end specs</a:t>
+            </a:r>
+          </a:p>
+        </p:txBody>
+      </p:sp>
+      <p:sp>
+        <p:nvSpPr>
+          <p:cNvPr id="17415" name="Rounded Rectangle 17414"/>
+          <p:cNvSpPr/>
+          <p:nvPr/>
+        </p:nvSpPr>
+        <p:spPr>
+          <a:xfrm>
+            <a:off x="8138160" y="1316736"/>
+            <a:ext cx="1847088" cy="786384"/>
+          </a:xfrm>
+          <a:prstGeom prst="roundRect">
+            <a:avLst/>
+          </a:prstGeom>
+          <a:solidFill>
+            <a:srgbClr val="EEF3F9"/>
+          </a:solidFill>
+          <a:ln w="9525">
+            <a:solidFill>
+              <a:srgbClr val="C2D4E6"/>
+            </a:solidFill>
+          </a:ln>
+          <a:effectLst/>
+        </p:spPr>
+        <p:style>
+          <a:lnRef idx="1">
+            <a:schemeClr val="accent1"/>
+          </a:lnRef>
+          <a:fillRef idx="3">
+            <a:schemeClr val="accent1"/>
+          </a:fillRef>
+          <a:effectRef idx="2">
+            <a:schemeClr val="accent1"/>
+          </a:effectRef>
+          <a:fontRef idx="minor">
+            <a:schemeClr val="lt1"/>
+          </a:fontRef>
+        </p:style>
+        <p:txBody>
+          <a:bodyPr rtlCol="0" anchor="ctr" wrap="square" tIns="54864" bIns="54864"/>
+          <a:lstStyle/>
+          <a:p>
+            <a:pPr algn="ctr">
+              <a:lnSpc>
+                <a:spcPct val="84000"/>
+              </a:lnSpc>
+              <a:spcAft>
+                <a:spcPts val="0"/>
+              </a:spcAft>
+              <a:buNone/>
+            </a:pPr>
+            <a:r>
+              <a:rPr sz="2200" b="1">
+                <a:solidFill>
+                  <a:srgbClr val="0B5FA5"/>
+                </a:solidFill>
+                <a:latin typeface="Calibri"/>
+              </a:rPr>
+              <a:t>156</a:t>
+            </a:r>
+          </a:p>
+          <a:p>
+            <a:pPr algn="ctr">
+              <a:lnSpc>
+                <a:spcPct val="84000"/>
+              </a:lnSpc>
+              <a:spcAft>
+                <a:spcPts val="0"/>
+              </a:spcAft>
+              <a:buNone/>
+            </a:pPr>
+            <a:r>
+              <a:rPr sz="750" b="0">
+                <a:solidFill>
+                  <a:srgbClr val="4A5A70"/>
+                </a:solidFill>
+                <a:latin typeface="Calibri"/>
+              </a:rPr>
+              <a:t>files ruff + mypy clean</a:t>
+            </a:r>
+          </a:p>
+        </p:txBody>
+      </p:sp>
+      <p:sp>
+        <p:nvSpPr>
+          <p:cNvPr id="17416" name="Rounded Rectangle 17415"/>
+          <p:cNvSpPr/>
+          <p:nvPr/>
+        </p:nvSpPr>
+        <p:spPr>
+          <a:xfrm>
+            <a:off x="10076688" y="1316736"/>
+            <a:ext cx="1847088" cy="786384"/>
+          </a:xfrm>
+          <a:prstGeom prst="roundRect">
+            <a:avLst/>
+          </a:prstGeom>
+          <a:solidFill>
+            <a:srgbClr val="EEF3F9"/>
+          </a:solidFill>
+          <a:ln w="9525">
+            <a:solidFill>
+              <a:srgbClr val="C2D4E6"/>
+            </a:solidFill>
+          </a:ln>
+          <a:effectLst/>
+        </p:spPr>
+        <p:style>
+          <a:lnRef idx="1">
+            <a:schemeClr val="accent1"/>
+          </a:lnRef>
+          <a:fillRef idx="3">
+            <a:schemeClr val="accent1"/>
+          </a:fillRef>
+          <a:effectRef idx="2">
+            <a:schemeClr val="accent1"/>
+          </a:effectRef>
+          <a:fontRef idx="minor">
+            <a:schemeClr val="lt1"/>
+          </a:fontRef>
+        </p:style>
+        <p:txBody>
+          <a:bodyPr rtlCol="0" anchor="ctr" wrap="square" tIns="54864" bIns="54864"/>
+          <a:lstStyle/>
+          <a:p>
+            <a:pPr algn="ctr">
+              <a:lnSpc>
+                <a:spcPct val="84000"/>
+              </a:lnSpc>
+              <a:spcAft>
+                <a:spcPts val="0"/>
+              </a:spcAft>
+              <a:buNone/>
+            </a:pPr>
+            <a:r>
+              <a:rPr sz="2200" b="1">
+                <a:solidFill>
+                  <a:srgbClr val="1B6B3A"/>
+                </a:solidFill>
+                <a:latin typeface="Calibri"/>
+              </a:rPr>
+              <a:t>0</a:t>
+            </a:r>
+          </a:p>
+          <a:p>
+            <a:pPr algn="ctr">
+              <a:lnSpc>
+                <a:spcPct val="84000"/>
+              </a:lnSpc>
+              <a:spcAft>
+                <a:spcPts val="0"/>
+              </a:spcAft>
+              <a:buNone/>
+            </a:pPr>
+            <a:r>
+              <a:rPr sz="750" b="0">
+                <a:solidFill>
+                  <a:srgbClr val="4A5A70"/>
+                </a:solidFill>
+                <a:latin typeface="Calibri"/>
+              </a:rPr>
+              <a:t>known dependency vulnerabilities</a:t>
+            </a:r>
+          </a:p>
+        </p:txBody>
+      </p:sp>
+      <p:sp>
+        <p:nvSpPr>
+          <p:cNvPr id="17417" name="Rounded Rectangle 17416"/>
+          <p:cNvSpPr/>
+          <p:nvPr/>
+        </p:nvSpPr>
+        <p:spPr>
+          <a:xfrm>
+            <a:off x="384048" y="2212848"/>
+            <a:ext cx="5669280" cy="2496312"/>
+          </a:xfrm>
+          <a:prstGeom prst="roundRect">
+            <a:avLst/>
+          </a:prstGeom>
+          <a:solidFill>
+            <a:srgbClr val="EEF3F9"/>
+          </a:solidFill>
+          <a:ln w="9525">
+            <a:solidFill>
+              <a:srgbClr val="C2D4E6"/>
+            </a:solidFill>
+          </a:ln>
+          <a:effectLst/>
+        </p:spPr>
+        <p:style>
+          <a:lnRef idx="1">
+            <a:schemeClr val="accent1"/>
+          </a:lnRef>
+          <a:fillRef idx="3">
+            <a:schemeClr val="accent1"/>
+          </a:fillRef>
+          <a:effectRef idx="2">
+            <a:schemeClr val="accent1"/>
+          </a:effectRef>
+          <a:fontRef idx="minor">
+            <a:schemeClr val="lt1"/>
+          </a:fontRef>
+        </p:style>
+        <p:txBody>
           <a:bodyPr rtlCol="0" anchor="t" wrap="square" tIns="54864" bIns="54864"/>
           <a:lstStyle/>
           <a:p>
             <a:pPr algn="ctr">
               <a:lnSpc>
-                <a:spcPct val="90000"/>
+                <a:spcPct val="92000"/>
               </a:lnSpc>
               <a:spcAft>
                 <a:spcPts val="300"/>
               </a:spcAft>
+              <a:buNone/>
             </a:pPr>
             <a:r>
               <a:rPr sz="1050" b="1">
                 <a:solidFill>
-                  <a:srgbClr val="111B2A"/>
+                  <a:srgbClr val="1B6B3A"/>
                 </a:solidFill>
                 <a:latin typeface="Calibri"/>
               </a:rPr>
-              <a:t>Verification</a:t>
+              <a:t>How a finding is proved</a:t>
             </a:r>
           </a:p>
           <a:p>
             <a:pPr>
               <a:lnSpc>
-                <a:spcPct val="90000"/>
+                <a:spcPct val="92000"/>
               </a:lnSpc>
               <a:spcAft>
                 <a:spcPts val="300"/>
               </a:spcAft>
+              <a:buNone/>
+            </a:pPr>
+            <a:r>
+              <a:rPr sz="900" b="0">
+                <a:solidFill>
+                  <a:srgbClr val="1F2C3F"/>
+                </a:solidFill>
+                <a:latin typeface="Calibri"/>
+              </a:rPr>
+              <a:t>1.  A rule fails on a reconstructed observation — here, static RSA key exchange, so no forward secrecy.</a:t>
+            </a:r>
+          </a:p>
+          <a:p>
+            <a:pPr>
+              <a:lnSpc>
+                <a:spcPct val="92000"/>
+              </a:lnSpc>
+              <a:spcAft>
+                <a:spcPts val="300"/>
+              </a:spcAft>
+              <a:buNone/>
+            </a:pPr>
+            <a:r>
+              <a:rPr sz="900" b="0">
+                <a:solidFill>
+                  <a:srgbClr val="1F2C3F"/>
+                </a:solidFill>
+                <a:latin typeface="Calibri"/>
+              </a:rPr>
+              <a:t>2.  The engine attaches the packets it evaluated: #4 and #5, with their capture timestamps and stream offsets.</a:t>
+            </a:r>
+          </a:p>
+          <a:p>
+            <a:pPr>
+              <a:lnSpc>
+                <a:spcPct val="92000"/>
+              </a:lnSpc>
+              <a:spcAft>
+                <a:spcPts val="300"/>
+              </a:spcAft>
+              <a:buNone/>
+            </a:pPr>
+            <a:r>
+              <a:rPr sz="900" b="0">
+                <a:solidFill>
+                  <a:srgbClr val="1F2C3F"/>
+                </a:solidFill>
+                <a:latin typeface="Calibri"/>
+              </a:rPr>
+              <a:t>3.  The capture and session ids are printed beside them, so an analyst can open the same packets in Wireshark and check.</a:t>
+            </a:r>
+          </a:p>
+          <a:p>
+            <a:pPr>
+              <a:lnSpc>
+                <a:spcPct val="92000"/>
+              </a:lnSpc>
+              <a:spcAft>
+                <a:spcPts val="300"/>
+              </a:spcAft>
+              <a:buNone/>
+            </a:pPr>
+            <a:r>
+              <a:rPr sz="900" b="0">
+                <a:solidFill>
+                  <a:srgbClr val="1F2C3F"/>
+                </a:solidFill>
+                <a:latin typeface="Calibri"/>
+              </a:rPr>
+              <a:t>4.  Packet metadata only. Reconstructed payload bytes are never included in a report or shown in the interface.</a:t>
+            </a:r>
+          </a:p>
+          <a:p>
+            <a:pPr>
+              <a:lnSpc>
+                <a:spcPct val="92000"/>
+              </a:lnSpc>
+              <a:spcAft>
+                <a:spcPts val="300"/>
+              </a:spcAft>
+              <a:buNone/>
             </a:pPr>
             <a:r>
               <a:rPr sz="850" b="0">
                 <a:solidFill>
-                  <a:srgbClr val="1F2C3F"/>
+                  <a:srgbClr val="4A5A70"/>
                 </a:solidFill>
                 <a:latin typeface="Calibri"/>
               </a:rPr>
-              <a:t>1,357 backend tests pass; 1,367 with the TShark cross-check enabled</a:t>
-            </a:r>
-          </a:p>
-          <a:p>
-            <a:pPr>
-              <a:lnSpc>
-                <a:spcPct val="90000"/>
-              </a:lnSpc>
-              <a:spcAft>
-                <a:spcPts val="300"/>
-              </a:spcAft>
-            </a:pPr>
-            <a:r>
-              <a:rPr sz="850" b="0">
-                <a:solidFill>
-                  <a:srgbClr val="1F2C3F"/>
-                </a:solidFill>
-                <a:latin typeface="Calibri"/>
-              </a:rPr>
-              <a:t>Ten cross-checks compare our dissection against Wireshark's, so a bug in our own parser cannot validate itself</a:t>
-            </a:r>
-          </a:p>
-          <a:p>
-            <a:pPr>
-              <a:lnSpc>
-                <a:spcPct val="90000"/>
-              </a:lnSpc>
-              <a:spcAft>
-                <a:spcPts val="300"/>
-              </a:spcAft>
-            </a:pPr>
-            <a:r>
-              <a:rPr sz="850" b="0">
-                <a:solidFill>
-                  <a:srgbClr val="1F2C3F"/>
-                </a:solidFill>
-                <a:latin typeface="Calibri"/>
-              </a:rPr>
-              <a:t>89 frontend tests · 5 browser end-to-end specs against the real backend, nothing mocked</a:t>
-            </a:r>
-          </a:p>
-          <a:p>
-            <a:pPr>
-              <a:lnSpc>
-                <a:spcPct val="90000"/>
-              </a:lnSpc>
-              <a:spcAft>
-                <a:spcPts val="300"/>
-              </a:spcAft>
-            </a:pPr>
-            <a:r>
-              <a:rPr sz="850" b="0">
-                <a:solidFill>
-                  <a:srgbClr val="1F2C3F"/>
-                </a:solidFill>
-                <a:latin typeface="Calibri"/>
-              </a:rPr>
-              <a:t>ruff and mypy clean over 156 files</a:t>
-            </a:r>
-          </a:p>
-          <a:p>
-            <a:pPr>
-              <a:lnSpc>
-                <a:spcPct val="90000"/>
-              </a:lnSpc>
-              <a:spcAft>
-                <a:spcPts val="300"/>
-              </a:spcAft>
-            </a:pPr>
-            <a:r>
-              <a:rPr sz="850" b="0">
-                <a:solidFill>
-                  <a:srgbClr val="1F2C3F"/>
-                </a:solidFill>
-                <a:latin typeface="Calibri"/>
-              </a:rPr>
-              <a:t>Expectations are hand-derived and committed as manifests; the captures are generated, so a test cannot confirm itself</a:t>
-            </a:r>
-          </a:p>
-          <a:p>
-            <a:pPr>
-              <a:lnSpc>
-                <a:spcPct val="90000"/>
-              </a:lnSpc>
-              <a:spcAft>
-                <a:spcPts val="300"/>
-              </a:spcAft>
-            </a:pPr>
-            <a:r>
-              <a:rPr sz="850" b="0">
-                <a:solidFill>
-                  <a:srgbClr val="1B6B3A"/>
-                </a:solidFill>
-                <a:latin typeface="Calibri"/>
-              </a:rPr>
-              <a:t>0 known dependency vulnerabilities (pip-audit, npm audit); hash-pinned lock; CycloneDX SBOM</a:t>
+              <a:t>Expectations are hand-derived and committed as manifests while the captures are generated, so a test cannot confirm its own output; ten TShark cross-checks compare our dissection against Wireshark's, so a bug in our parser cannot validate itself.</a:t>
             </a:r>
           </a:p>
         </p:txBody>
       </p:sp>
       <p:pic>
         <p:nvPicPr>
-          <p:cNvPr id="17413" name="Picture 17412" descr="08-drift.png"/>
+          <p:cNvPr id="17418" name="Picture 17417" descr="06-evidence-provenance.png"/>
           <p:cNvPicPr>
             <a:picLocks noChangeAspect="1"/>
           </p:cNvPicPr>
@@ -9536,8 +10815,8 @@
         </p:blipFill>
         <p:spPr>
           <a:xfrm>
-            <a:off x="8028431" y="1426464"/>
-            <a:ext cx="3785615" cy="2129408"/>
+            <a:off x="6199632" y="2212848"/>
+            <a:ext cx="5614416" cy="2494321"/>
           </a:xfrm>
           <a:prstGeom prst="rect">
             <a:avLst/>
@@ -9546,14 +10825,14 @@
       </p:pic>
       <p:sp>
         <p:nvSpPr>
-          <p:cNvPr id="17414" name="Rectangle 17413"/>
+          <p:cNvPr id="17419" name="Rectangle 17418"/>
           <p:cNvSpPr/>
           <p:nvPr/>
         </p:nvSpPr>
         <p:spPr>
           <a:xfrm>
-            <a:off x="8028431" y="1426464"/>
-            <a:ext cx="3785615" cy="2129408"/>
+            <a:off x="6199632" y="2212848"/>
+            <a:ext cx="5614416" cy="2494321"/>
           </a:xfrm>
           <a:prstGeom prst="rect">
             <a:avLst/>
@@ -9590,14 +10869,14 @@
       </p:sp>
       <p:sp>
         <p:nvSpPr>
-          <p:cNvPr id="17415" name="TextBox 17414"/>
+          <p:cNvPr id="17420" name="TextBox 17419"/>
           <p:cNvSpPr txBox="1"/>
           <p:nvPr/>
         </p:nvSpPr>
         <p:spPr>
           <a:xfrm>
-            <a:off x="8028431" y="3574160"/>
-            <a:ext cx="3785615" cy="219456"/>
+            <a:off x="6199632" y="4725457"/>
+            <a:ext cx="5614416" cy="219456"/>
           </a:xfrm>
           <a:prstGeom prst="rect">
             <a:avLst/>
@@ -9625,21 +10904,21 @@
                 </a:solidFill>
                 <a:latin typeface="Calibri"/>
               </a:rPr>
-              <a:t>Cryptographic drift between captures of one endpoint. Actual product output.</a:t>
-            </a:r>
-          </a:p>
-        </p:txBody>
-      </p:sp>
-      <p:sp>
-        <p:nvSpPr>
-          <p:cNvPr id="17416" name="Rounded Rectangle 17415"/>
+              <a:t>The finding, and the packets it was evaluated against. Actual product output.</a:t>
+            </a:r>
+          </a:p>
+        </p:txBody>
+      </p:sp>
+      <p:sp>
+        <p:nvSpPr>
+          <p:cNvPr id="17421" name="Rounded Rectangle 17420"/>
           <p:cNvSpPr/>
           <p:nvPr/>
         </p:nvSpPr>
         <p:spPr>
           <a:xfrm>
-            <a:off x="384048" y="3950208"/>
-            <a:ext cx="11430000" cy="2231136"/>
+            <a:off x="384048" y="4992624"/>
+            <a:ext cx="11430000" cy="1042415"/>
           </a:xfrm>
           <a:prstGeom prst="roundRect">
             <a:avLst/>
@@ -9674,11 +10953,12 @@
           <a:p>
             <a:pPr algn="ctr">
               <a:lnSpc>
-                <a:spcPct val="88000"/>
+                <a:spcPct val="90000"/>
               </a:lnSpc>
               <a:spcAft>
                 <a:spcPts val="300"/>
               </a:spcAft>
+              <a:buNone/>
             </a:pPr>
             <a:r>
               <a:rPr sz="1050" b="1">
@@ -9687,17 +10967,18 @@
                 </a:solidFill>
                 <a:latin typeface="Calibri"/>
               </a:rPr>
-              <a:t>Challenges and limits — stated, not hidden</a:t>
+              <a:t>Limits, stated not hidden</a:t>
             </a:r>
           </a:p>
           <a:p>
             <a:pPr>
               <a:lnSpc>
-                <a:spcPct val="88000"/>
+                <a:spcPct val="90000"/>
               </a:lnSpc>
               <a:spcAft>
                 <a:spcPts val="300"/>
               </a:spcAft>
+              <a:buNone/>
             </a:pPr>
             <a:r>
               <a:rPr sz="900" b="0">
@@ -9706,17 +10987,18 @@
                 </a:solidFill>
                 <a:latin typeface="Calibri"/>
               </a:rPr>
-              <a:t>TLS 1.3 encrypts the Certificate message.  A passive capture without decryption material cannot expose what is not on the wire. Reported NOT_AVAILABLE with the reason, never blank and never guessed. TLS 1.2 certificates are read and verified in full: dates, chain, hostname, key size, signature algorithm.</a:t>
+              <a:t>TLS 1.3 encrypts the Certificate message, so a passive capture cannot expose it — reported NOT_AVAILABLE with the reason, never blank and never guessed. TLS 1.2 chains are read and verified in full.</a:t>
             </a:r>
           </a:p>
           <a:p>
             <a:pPr>
               <a:lnSpc>
-                <a:spcPct val="88000"/>
+                <a:spcPct val="90000"/>
               </a:lnSpc>
               <a:spcAft>
                 <a:spcPts val="300"/>
               </a:spcAft>
+              <a:buNone/>
             </a:pPr>
             <a:r>
               <a:rPr sz="900" b="0">
@@ -9725,45 +11007,7 @@
                 </a:solidFill>
                 <a:latin typeface="Calibri"/>
               </a:rPr>
-              <a:t>The supervised classifier is NOT VALIDATED for real-world deployment.  It is trained and measured on controlled synthetic servers (macro-F1 0.5624). Synthetic evaluation does not establish real-world accuracy, the interface says so on screen, and the classifier drives no finding and no score. The anomaly detector actually in use is a deterministic rarity baseline, not a machine-learning model — a trained Isolation Forest was measured, lost, and is shipped labelled as experimental.</a:t>
-            </a:r>
-          </a:p>
-          <a:p>
-            <a:pPr>
-              <a:lnSpc>
-                <a:spcPct val="88000"/>
-              </a:lnSpc>
-              <a:spcAft>
-                <a:spcPts val="300"/>
-              </a:spcAft>
-            </a:pPr>
-            <a:r>
-              <a:rPr sz="900" b="0">
-                <a:solidFill>
-                  <a:srgbClr val="1F2C3F"/>
-                </a:solidFill>
-                <a:latin typeface="Calibri"/>
-              </a:rPr>
-              <a:t>Handshake completion is not verifiable and revocation is never checked.  A capture carries no traffic keys, and an OCSP or CRL request would break the passive rule. Three constants are asserted false or zero in every report by the test suite.</a:t>
-            </a:r>
-          </a:p>
-          <a:p>
-            <a:pPr>
-              <a:lnSpc>
-                <a:spcPct val="88000"/>
-              </a:lnSpc>
-              <a:spcAft>
-                <a:spcPts val="300"/>
-              </a:spcAft>
-            </a:pPr>
-            <a:r>
-              <a:rPr sz="900" b="0">
-                <a:solidFill>
-                  <a:srgbClr val="1F2C3F"/>
-                </a:solidFill>
-                <a:latin typeface="Calibri"/>
-              </a:rPr>
-              <a:t>Deployment.  Memory binds before speed — about 76 KB peak resident per packet — and no benchmark has been run on the assumed 4-core/8 GB minimum, which is recorded NOT VERIFIED. Analysis cannot be cancelled, and a test asserts the absence so it cannot be mistaken for a broken control.</a:t>
+              <a:t>The supervised classifier is NOT VALIDATED for real-world use: it was measured on synthetic servers only, it drives no finding and no score, and the interface says so on screen.</a:t>
             </a:r>
           </a:p>
         </p:txBody>
@@ -9914,8 +11158,8 @@
         </p:nvSpPr>
         <p:spPr bwMode="auto">
           <a:xfrm>
-            <a:off x="384048" y="1024128"/>
-            <a:ext cx="11430000" cy="365760"/>
+            <a:off x="384048" y="969264"/>
+            <a:ext cx="11430000" cy="310896"/>
           </a:xfrm>
           <a:prstGeom prst="rect">
             <a:avLst/>
@@ -9947,9 +11191,9 @@
               <a:buClrTx/>
               <a:buSzTx/>
               <a:buFont typeface="Arial" panose="020B0604020202020204" pitchFamily="34" charset="0"/>
-              <a:buChar char="•"/>
               <a:tabLst/>
               <a:defRPr/>
+              <a:buNone/>
             </a:pPr>
             <a:r>
               <a:rPr sz="1000" b="0">
@@ -9958,7 +11202,7 @@
                 </a:solidFill>
                 <a:latin typeface="Calibri"/>
               </a:rPr>
-              <a:t>For authorised email-security investigation. These are potential benefits: the tool is demonstrated on synthetic captures and has no deployments, no users and no measured real-world outcomes.</a:t>
+              <a:t>For authorised email-security investigation. Each visual below is the product output that supports the benefit beside it.</a:t>
             </a:r>
           </a:p>
         </p:txBody>
@@ -10206,8 +11450,8 @@
         </p:nvSpPr>
         <p:spPr>
           <a:xfrm>
-            <a:off x="384048" y="1426464"/>
-            <a:ext cx="2798064" cy="1572768"/>
+            <a:off x="512064" y="1572768"/>
+            <a:ext cx="2139696" cy="1316736"/>
           </a:xfrm>
           <a:prstGeom prst="roundRect">
             <a:avLst/>
@@ -10242,11 +11486,12 @@
           <a:p>
             <a:pPr algn="ctr">
               <a:lnSpc>
-                <a:spcPct val="92000"/>
+                <a:spcPct val="90000"/>
               </a:lnSpc>
               <a:spcAft>
                 <a:spcPts val="300"/>
               </a:spcAft>
+              <a:buNone/>
             </a:pPr>
             <a:r>
               <a:rPr sz="1100" b="1">
@@ -10261,20 +11506,21 @@
           <a:p>
             <a:pPr>
               <a:lnSpc>
-                <a:spcPct val="92000"/>
+                <a:spcPct val="90000"/>
               </a:lnSpc>
               <a:spcAft>
                 <a:spcPts val="300"/>
               </a:spcAft>
-            </a:pPr>
-            <a:r>
-              <a:rPr sz="850" b="0">
+              <a:buNone/>
+            </a:pPr>
+            <a:r>
+              <a:rPr sz="800" b="0">
                 <a:solidFill>
                   <a:srgbClr val="1F2C3F"/>
                 </a:solidFill>
                 <a:latin typeface="Calibri"/>
               </a:rPr>
-              <a:t>Identify the cryptographic configurations actually negotiated — versions, cipher suites, key exchanges and certificates — from traffic the organisation already holds, without touching the host.</a:t>
+              <a:t>The cryptographic configuration actually negotiated — version, cipher suite, key exchange, certificate — read from traffic the organisation already holds, without touching the host.</a:t>
             </a:r>
           </a:p>
         </p:txBody>
@@ -10287,8 +11533,8 @@
         </p:nvSpPr>
         <p:spPr>
           <a:xfrm>
-            <a:off x="3291840" y="1426464"/>
-            <a:ext cx="2798064" cy="1572768"/>
+            <a:off x="2724912" y="1572768"/>
+            <a:ext cx="2139696" cy="1316736"/>
           </a:xfrm>
           <a:prstGeom prst="roundRect">
             <a:avLst/>
@@ -10323,11 +11569,12 @@
           <a:p>
             <a:pPr algn="ctr">
               <a:lnSpc>
-                <a:spcPct val="92000"/>
+                <a:spcPct val="90000"/>
               </a:lnSpc>
               <a:spcAft>
                 <a:spcPts val="300"/>
               </a:spcAft>
+              <a:buNone/>
             </a:pPr>
             <a:r>
               <a:rPr sz="1100" b="1">
@@ -10342,20 +11589,21 @@
           <a:p>
             <a:pPr>
               <a:lnSpc>
-                <a:spcPct val="92000"/>
+                <a:spcPct val="90000"/>
               </a:lnSpc>
               <a:spcAft>
                 <a:spcPts val="300"/>
               </a:spcAft>
-            </a:pPr>
-            <a:r>
-              <a:rPr sz="850" b="0">
+              <a:buNone/>
+            </a:pPr>
+            <a:r>
+              <a:rPr sz="800" b="0">
                 <a:solidFill>
                   <a:srgbClr val="1F2C3F"/>
                 </a:solidFill>
                 <a:latin typeface="Calibri"/>
               </a:rPr>
-              <a:t>Link every finding to the packets that establish it, with the RFC it applies and the limitation it carries. An analyst can open the same packet in Wireshark and check.</a:t>
+              <a:t>Every finding names the rule it failed, the RFC clause it applies and the packets that establish it, so the conclusion can be checked rather than believed.</a:t>
             </a:r>
           </a:p>
         </p:txBody>
@@ -10368,8 +11616,8 @@
         </p:nvSpPr>
         <p:spPr>
           <a:xfrm>
-            <a:off x="6199632" y="1426464"/>
-            <a:ext cx="2798064" cy="1572768"/>
+            <a:off x="4937760" y="1572768"/>
+            <a:ext cx="2139696" cy="1316736"/>
           </a:xfrm>
           <a:prstGeom prst="roundRect">
             <a:avLst/>
@@ -10404,11 +11652,12 @@
           <a:p>
             <a:pPr algn="ctr">
               <a:lnSpc>
-                <a:spcPct val="92000"/>
+                <a:spcPct val="90000"/>
               </a:lnSpc>
               <a:spcAft>
                 <a:spcPts val="300"/>
               </a:spcAft>
+              <a:buNone/>
             </a:pPr>
             <a:r>
               <a:rPr sz="1100" b="1">
@@ -10423,34 +11672,145 @@
           <a:p>
             <a:pPr>
               <a:lnSpc>
-                <a:spcPct val="92000"/>
+                <a:spcPct val="90000"/>
               </a:lnSpc>
               <a:spcAft>
                 <a:spcPts val="300"/>
               </a:spcAft>
-            </a:pPr>
-            <a:r>
-              <a:rPr sz="850" b="0">
+              <a:buNone/>
+            </a:pPr>
+            <a:r>
+              <a:rPr sz="800" b="0">
                 <a:solidFill>
                   <a:srgbClr val="1F2C3F"/>
                 </a:solidFill>
                 <a:latin typeface="Calibri"/>
               </a:rPr>
-              <a:t>Rank weaknesses by a severity and confidence matrix, each with a named remediation and its expected security effect, so 'what do I fix first' has an answer with a reason.</a:t>
-            </a:r>
-          </a:p>
-        </p:txBody>
-      </p:sp>
-      <p:sp>
-        <p:nvSpPr>
-          <p:cNvPr id="17414" name="Rounded Rectangle 17413"/>
+              <a:t>Severity and confidence produce a ranked priority with a named remediation, so 'what do I fix first' has an answer and a reason.</a:t>
+            </a:r>
+          </a:p>
+        </p:txBody>
+      </p:sp>
+      <p:pic>
+        <p:nvPicPr>
+          <p:cNvPr id="17414" name="Picture 17413" descr="04-finding-evidence.png"/>
+          <p:cNvPicPr>
+            <a:picLocks noChangeAspect="1"/>
+          </p:cNvPicPr>
+          <p:nvPr/>
+        </p:nvPicPr>
+        <p:blipFill>
+          <a:blip r:embed="rId4"/>
+          <a:stretch>
+            <a:fillRect/>
+          </a:stretch>
+        </p:blipFill>
+        <p:spPr>
+          <a:xfrm>
+            <a:off x="512064" y="3017520"/>
+            <a:ext cx="6455664" cy="2481396"/>
+          </a:xfrm>
+          <a:prstGeom prst="rect">
+            <a:avLst/>
+          </a:prstGeom>
+        </p:spPr>
+      </p:pic>
+      <p:sp>
+        <p:nvSpPr>
+          <p:cNvPr id="17415" name="Rectangle 17414"/>
           <p:cNvSpPr/>
           <p:nvPr/>
         </p:nvSpPr>
         <p:spPr>
           <a:xfrm>
-            <a:off x="9107424" y="1426464"/>
-            <a:ext cx="2798064" cy="1572768"/>
+            <a:off x="512064" y="3017520"/>
+            <a:ext cx="6455664" cy="2481396"/>
+          </a:xfrm>
+          <a:prstGeom prst="rect">
+            <a:avLst/>
+          </a:prstGeom>
+          <a:noFill/>
+          <a:ln w="9525">
+            <a:solidFill>
+              <a:srgbClr val="C2D4E6"/>
+            </a:solidFill>
+          </a:ln>
+          <a:effectLst/>
+        </p:spPr>
+        <p:style>
+          <a:lnRef idx="1">
+            <a:schemeClr val="accent1"/>
+          </a:lnRef>
+          <a:fillRef idx="3">
+            <a:schemeClr val="accent1"/>
+          </a:fillRef>
+          <a:effectRef idx="2">
+            <a:schemeClr val="accent1"/>
+          </a:effectRef>
+          <a:fontRef idx="minor">
+            <a:schemeClr val="lt1"/>
+          </a:fontRef>
+        </p:style>
+        <p:txBody>
+          <a:bodyPr rtlCol="0" anchor="ctr"/>
+          <a:lstStyle/>
+          <a:p>
+            <a:pPr algn="ctr"/>
+          </a:p>
+        </p:txBody>
+      </p:sp>
+      <p:sp>
+        <p:nvSpPr>
+          <p:cNvPr id="17416" name="TextBox 17415"/>
+          <p:cNvSpPr txBox="1"/>
+          <p:nvPr/>
+        </p:nvSpPr>
+        <p:spPr>
+          <a:xfrm>
+            <a:off x="512064" y="5517204"/>
+            <a:ext cx="6455664" cy="219456"/>
+          </a:xfrm>
+          <a:prstGeom prst="rect">
+            <a:avLst/>
+          </a:prstGeom>
+          <a:noFill/>
+        </p:spPr>
+        <p:txBody>
+          <a:bodyPr wrap="square">
+            <a:spAutoFit/>
+          </a:bodyPr>
+          <a:lstStyle/>
+          <a:p>
+            <a:pPr algn="ctr">
+              <a:lnSpc>
+                <a:spcPct val="100000"/>
+              </a:lnSpc>
+              <a:spcAft>
+                <a:spcPts val="300"/>
+              </a:spcAft>
+            </a:pPr>
+            <a:r>
+              <a:rPr sz="800" b="0">
+                <a:solidFill>
+                  <a:srgbClr val="4A5A70"/>
+                </a:solidFill>
+                <a:latin typeface="Calibri"/>
+              </a:rPr>
+              <a:t>One finding, its rule, its remediation and the packets behind it.</a:t>
+            </a:r>
+          </a:p>
+        </p:txBody>
+      </p:sp>
+      <p:sp>
+        <p:nvSpPr>
+          <p:cNvPr id="17417" name="Rounded Rectangle 17416"/>
+          <p:cNvSpPr/>
+          <p:nvPr/>
+        </p:nvSpPr>
+        <p:spPr>
+          <a:xfrm>
+            <a:off x="7242048" y="1280160"/>
+            <a:ext cx="4572000" cy="877824"/>
           </a:xfrm>
           <a:prstGeom prst="roundRect">
             <a:avLst/>
@@ -10485,11 +11845,12 @@
           <a:p>
             <a:pPr algn="ctr">
               <a:lnSpc>
-                <a:spcPct val="92000"/>
+                <a:spcPct val="90000"/>
               </a:lnSpc>
               <a:spcAft>
                 <a:spcPts val="300"/>
               </a:spcAft>
+              <a:buNone/>
             </a:pPr>
             <a:r>
               <a:rPr sz="1100" b="1">
@@ -10504,130 +11865,21 @@
           <a:p>
             <a:pPr>
               <a:lnSpc>
-                <a:spcPct val="92000"/>
+                <a:spcPct val="90000"/>
               </a:lnSpc>
               <a:spcAft>
                 <a:spcPts val="300"/>
               </a:spcAft>
-            </a:pPr>
-            <a:r>
-              <a:rPr sz="850" b="0">
+              <a:buNone/>
+            </a:pPr>
+            <a:r>
+              <a:rPr sz="800" b="0">
                 <a:solidFill>
                   <a:srgbClr val="1F2C3F"/>
                 </a:solidFill>
                 <a:latin typeface="Calibri"/>
               </a:rPr>
-              <a:t>Detect cryptographic drift across captures: when the same observed service changes what it negotiates, and whether the change is attributable to the server or merely to a different client.</a:t>
-            </a:r>
-          </a:p>
-        </p:txBody>
-      </p:sp>
-      <p:pic>
-        <p:nvPicPr>
-          <p:cNvPr id="17415" name="Picture 17414" descr="04-finding-evidence.png"/>
-          <p:cNvPicPr>
-            <a:picLocks noChangeAspect="1"/>
-          </p:cNvPicPr>
-          <p:nvPr/>
-        </p:nvPicPr>
-        <p:blipFill>
-          <a:blip r:embed="rId4"/>
-          <a:stretch>
-            <a:fillRect/>
-          </a:stretch>
-        </p:blipFill>
-        <p:spPr>
-          <a:xfrm>
-            <a:off x="384048" y="3163824"/>
-            <a:ext cx="3675887" cy="2067686"/>
-          </a:xfrm>
-          <a:prstGeom prst="rect">
-            <a:avLst/>
-          </a:prstGeom>
-        </p:spPr>
-      </p:pic>
-      <p:sp>
-        <p:nvSpPr>
-          <p:cNvPr id="17416" name="Rectangle 17415"/>
-          <p:cNvSpPr/>
-          <p:nvPr/>
-        </p:nvSpPr>
-        <p:spPr>
-          <a:xfrm>
-            <a:off x="384048" y="3163824"/>
-            <a:ext cx="3675887" cy="2067686"/>
-          </a:xfrm>
-          <a:prstGeom prst="rect">
-            <a:avLst/>
-          </a:prstGeom>
-          <a:noFill/>
-          <a:ln w="9525">
-            <a:solidFill>
-              <a:srgbClr val="C2D4E6"/>
-            </a:solidFill>
-          </a:ln>
-          <a:effectLst/>
-        </p:spPr>
-        <p:style>
-          <a:lnRef idx="1">
-            <a:schemeClr val="accent1"/>
-          </a:lnRef>
-          <a:fillRef idx="3">
-            <a:schemeClr val="accent1"/>
-          </a:fillRef>
-          <a:effectRef idx="2">
-            <a:schemeClr val="accent1"/>
-          </a:effectRef>
-          <a:fontRef idx="minor">
-            <a:schemeClr val="lt1"/>
-          </a:fontRef>
-        </p:style>
-        <p:txBody>
-          <a:bodyPr rtlCol="0" anchor="ctr"/>
-          <a:lstStyle/>
-          <a:p>
-            <a:pPr algn="ctr"/>
-          </a:p>
-        </p:txBody>
-      </p:sp>
-      <p:sp>
-        <p:nvSpPr>
-          <p:cNvPr id="17417" name="TextBox 17416"/>
-          <p:cNvSpPr txBox="1"/>
-          <p:nvPr/>
-        </p:nvSpPr>
-        <p:spPr>
-          <a:xfrm>
-            <a:off x="384048" y="5249798"/>
-            <a:ext cx="3675887" cy="219456"/>
-          </a:xfrm>
-          <a:prstGeom prst="rect">
-            <a:avLst/>
-          </a:prstGeom>
-          <a:noFill/>
-        </p:spPr>
-        <p:txBody>
-          <a:bodyPr wrap="square">
-            <a:spAutoFit/>
-          </a:bodyPr>
-          <a:lstStyle/>
-          <a:p>
-            <a:pPr algn="ctr">
-              <a:lnSpc>
-                <a:spcPct val="100000"/>
-              </a:lnSpc>
-              <a:spcAft>
-                <a:spcPts val="300"/>
-              </a:spcAft>
-            </a:pPr>
-            <a:r>
-              <a:rPr sz="800" b="0">
-                <a:solidFill>
-                  <a:srgbClr val="4A5A70"/>
-                </a:solidFill>
-                <a:latin typeface="Calibri"/>
-              </a:rPr>
-              <a:t>A finding, with its rule, severity and remediation.</a:t>
+              <a:t>Drift compares one endpoint across captures. Where the clients asked different questions the comparison is reported INCONCLUSIVE rather than blamed on the server.</a:t>
             </a:r>
           </a:p>
         </p:txBody>
@@ -10648,8 +11900,8 @@
         </p:blipFill>
         <p:spPr>
           <a:xfrm>
-            <a:off x="4261104" y="3163824"/>
-            <a:ext cx="3675887" cy="2067686"/>
+            <a:off x="7242048" y="2267712"/>
+            <a:ext cx="4572000" cy="1757362"/>
           </a:xfrm>
           <a:prstGeom prst="rect">
             <a:avLst/>
@@ -10664,8 +11916,8 @@
         </p:nvSpPr>
         <p:spPr>
           <a:xfrm>
-            <a:off x="4261104" y="3163824"/>
-            <a:ext cx="3675887" cy="2067686"/>
+            <a:off x="7242048" y="2267712"/>
+            <a:ext cx="4572000" cy="1757362"/>
           </a:xfrm>
           <a:prstGeom prst="rect">
             <a:avLst/>
@@ -10708,8 +11960,8 @@
         </p:nvSpPr>
         <p:spPr>
           <a:xfrm>
-            <a:off x="4261104" y="5249798"/>
-            <a:ext cx="3675887" cy="219456"/>
+            <a:off x="7242048" y="4043361"/>
+            <a:ext cx="4572000" cy="219456"/>
           </a:xfrm>
           <a:prstGeom prst="rect">
             <a:avLst/>
@@ -10737,14 +11989,97 @@
                 </a:solidFill>
                 <a:latin typeface="Calibri"/>
               </a:rPr>
-              <a:t>Configuration drift between captures of one endpoint.</a:t>
+              <a:t>Configuration drift, before and after.</a:t>
+            </a:r>
+          </a:p>
+        </p:txBody>
+      </p:sp>
+      <p:sp>
+        <p:nvSpPr>
+          <p:cNvPr id="17421" name="Rounded Rectangle 17420"/>
+          <p:cNvSpPr/>
+          <p:nvPr/>
+        </p:nvSpPr>
+        <p:spPr>
+          <a:xfrm>
+            <a:off x="7242048" y="4443984"/>
+            <a:ext cx="2212848" cy="1426464"/>
+          </a:xfrm>
+          <a:prstGeom prst="roundRect">
+            <a:avLst/>
+          </a:prstGeom>
+          <a:solidFill>
+            <a:srgbClr val="EEF3F9"/>
+          </a:solidFill>
+          <a:ln w="9525">
+            <a:solidFill>
+              <a:srgbClr val="C2D4E6"/>
+            </a:solidFill>
+          </a:ln>
+          <a:effectLst/>
+        </p:spPr>
+        <p:style>
+          <a:lnRef idx="1">
+            <a:schemeClr val="accent1"/>
+          </a:lnRef>
+          <a:fillRef idx="3">
+            <a:schemeClr val="accent1"/>
+          </a:fillRef>
+          <a:effectRef idx="2">
+            <a:schemeClr val="accent1"/>
+          </a:effectRef>
+          <a:fontRef idx="minor">
+            <a:schemeClr val="lt1"/>
+          </a:fontRef>
+        </p:style>
+        <p:txBody>
+          <a:bodyPr rtlCol="0" anchor="t" wrap="square" tIns="54864" bIns="54864"/>
+          <a:lstStyle/>
+          <a:p>
+            <a:pPr algn="ctr">
+              <a:lnSpc>
+                <a:spcPct val="90000"/>
+              </a:lnSpc>
+              <a:spcAft>
+                <a:spcPts val="300"/>
+              </a:spcAft>
+              <a:buNone/>
+            </a:pPr>
+            <a:r>
+              <a:rPr sz="1100" b="1">
+                <a:solidFill>
+                  <a:srgbClr val="0B5FA5"/>
+                </a:solidFill>
+                <a:latin typeface="Calibri"/>
+              </a:rPr>
+              <a:t>REPORT</a:t>
+            </a:r>
+          </a:p>
+          <a:p>
+            <a:pPr>
+              <a:lnSpc>
+                <a:spcPct val="90000"/>
+              </a:lnSpc>
+              <a:spcAft>
+                <a:spcPts val="300"/>
+              </a:spcAft>
+              <a:buNone/>
+            </a:pPr>
+            <a:r>
+              <a:rPr sz="800" b="0">
+                <a:solidFill>
+                  <a:srgbClr val="1F2C3F"/>
+                </a:solidFill>
+                <a:latin typeface="Calibri"/>
+              </a:rPr>
+              <a:t>One canonical model produces JSON, a self-contained offline HTML document and a PDF, so their facts cannot disagree.</a:t>
             </a:r>
           </a:p>
         </p:txBody>
       </p:sp>
       <p:pic>
         <p:nvPicPr>
-          <p:cNvPr id="17421" name="Picture 17420" descr="11-reports.png"/>
+          <p:cNvPr id="17422" name="Picture 17421" descr="11-reports.png"/>
           <p:cNvPicPr>
             <a:picLocks noChangeAspect="1"/>
           </p:cNvPicPr>
@@ -10758,8 +12093,8 @@
         </p:blipFill>
         <p:spPr>
           <a:xfrm>
-            <a:off x="8138160" y="3163824"/>
-            <a:ext cx="3675887" cy="2067686"/>
+            <a:off x="9601200" y="4443984"/>
+            <a:ext cx="2212848" cy="1244727"/>
           </a:xfrm>
           <a:prstGeom prst="rect">
             <a:avLst/>
@@ -10768,14 +12103,14 @@
       </p:pic>
       <p:sp>
         <p:nvSpPr>
-          <p:cNvPr id="17422" name="Rectangle 17421"/>
+          <p:cNvPr id="17423" name="Rectangle 17422"/>
           <p:cNvSpPr/>
           <p:nvPr/>
         </p:nvSpPr>
         <p:spPr>
           <a:xfrm>
-            <a:off x="8138160" y="3163824"/>
-            <a:ext cx="3675887" cy="2067686"/>
+            <a:off x="9601200" y="4443984"/>
+            <a:ext cx="2212848" cy="1244727"/>
           </a:xfrm>
           <a:prstGeom prst="rect">
             <a:avLst/>
@@ -10812,14 +12147,14 @@
       </p:sp>
       <p:sp>
         <p:nvSpPr>
-          <p:cNvPr id="17423" name="TextBox 17422"/>
+          <p:cNvPr id="17424" name="TextBox 17423"/>
           <p:cNvSpPr txBox="1"/>
           <p:nvPr/>
         </p:nvSpPr>
         <p:spPr>
           <a:xfrm>
-            <a:off x="8138160" y="5249798"/>
-            <a:ext cx="3675887" cy="219456"/>
+            <a:off x="9601200" y="5706999"/>
+            <a:ext cx="2212848" cy="219456"/>
           </a:xfrm>
           <a:prstGeom prst="rect">
             <a:avLst/>
@@ -10847,21 +12182,21 @@
                 </a:solidFill>
                 <a:latin typeface="Calibri"/>
               </a:rPr>
-              <a:t>JSON, offline HTML and PDF export.</a:t>
-            </a:r>
-          </a:p>
-        </p:txBody>
-      </p:sp>
-      <p:sp>
-        <p:nvSpPr>
-          <p:cNvPr id="17424" name="Rounded Rectangle 17423"/>
+              <a:t>Export, in three formats.</a:t>
+            </a:r>
+          </a:p>
+        </p:txBody>
+      </p:sp>
+      <p:sp>
+        <p:nvSpPr>
+          <p:cNvPr id="17425" name="Rounded Rectangle 17424"/>
           <p:cNvSpPr/>
           <p:nvPr/>
         </p:nvSpPr>
         <p:spPr>
           <a:xfrm>
-            <a:off x="384048" y="5760720"/>
-            <a:ext cx="11430000" cy="420624"/>
+            <a:off x="384048" y="5943600"/>
+            <a:ext cx="6711696" cy="329184"/>
           </a:xfrm>
           <a:prstGeom prst="roundRect">
             <a:avLst/>
@@ -10891,7 +12226,7 @@
           </a:fontRef>
         </p:style>
         <p:txBody>
-          <a:bodyPr rtlCol="0" anchor="t" wrap="square" tIns="54864" bIns="54864"/>
+          <a:bodyPr rtlCol="0" anchor="ctr" wrap="square" tIns="54864" bIns="54864"/>
           <a:lstStyle/>
           <a:p>
             <a:pPr algn="ctr">
@@ -10901,15 +12236,16 @@
               <a:spcAft>
                 <a:spcPts val="300"/>
               </a:spcAft>
-            </a:pPr>
-            <a:r>
-              <a:rPr sz="900" b="1">
+              <a:buNone/>
+            </a:pPr>
+            <a:r>
+              <a:rPr sz="850" b="1">
                 <a:solidFill>
                   <a:srgbClr val="1F2C3F"/>
                 </a:solidFill>
                 <a:latin typeface="Calibri"/>
               </a:rPr>
-              <a:t>Captured enterprise traffic stays local by default — nothing is uploaded, and no host in a capture is ever contacted.   ·   No financial saving, adoption figure, deployment or real-world detection rate is claimed: none has been measured.</a:t>
+              <a:t>Benefits are demonstrated on synthetic captures. No deployment, adoption figure or real-world detection rate is claimed.</a:t>
             </a:r>
           </a:p>
         </p:txBody>
@@ -11060,8 +12396,8 @@
         </p:nvSpPr>
         <p:spPr bwMode="auto">
           <a:xfrm>
-            <a:off x="384048" y="1024128"/>
-            <a:ext cx="11430000" cy="365760"/>
+            <a:off x="384048" y="969264"/>
+            <a:ext cx="11430000" cy="310896"/>
           </a:xfrm>
           <a:prstGeom prst="rect">
             <a:avLst/>
@@ -11093,9 +12429,9 @@
               <a:buClrTx/>
               <a:buSzTx/>
               <a:buFont typeface="Arial" panose="020B0604020202020204" pitchFamily="34" charset="0"/>
-              <a:buChar char="•"/>
               <a:tabLst/>
               <a:defRPr/>
+              <a:buNone/>
             </a:pPr>
             <a:r>
               <a:rPr sz="1000" b="0">
@@ -11104,7 +12440,7 @@
                 </a:solidFill>
                 <a:latin typeface="Calibri"/>
               </a:rPr>
-              <a:t>Standards the rules cite and the parsers implement. Every rule names the clause it applies.</a:t>
+              <a:t>The standards the rules cite and the parsers implement, and how every claim in this deck is checked.</a:t>
             </a:r>
             <a:endParaRPr kumimoji="0" lang="en-US" sz="2800" b="0" i="0" u="none" strike="noStrike" kern="1200" cap="none" spc="0" normalizeH="0" baseline="0" noProof="0" dirty="0">
               <a:ln>
@@ -11366,8 +12702,8 @@
         </p:nvSpPr>
         <p:spPr>
           <a:xfrm>
-            <a:off x="384048" y="1426464"/>
-            <a:ext cx="3675887" cy="3017520"/>
+            <a:off x="384048" y="1316736"/>
+            <a:ext cx="3749039" cy="1792224"/>
           </a:xfrm>
           <a:prstGeom prst="roundRect">
             <a:avLst/>
@@ -11402,210 +12738,201 @@
           <a:p>
             <a:pPr algn="ctr">
               <a:lnSpc>
-                <a:spcPct val="92000"/>
+                <a:spcPct val="88000"/>
               </a:lnSpc>
               <a:spcAft>
                 <a:spcPts val="300"/>
               </a:spcAft>
-            </a:pPr>
-            <a:r>
-              <a:rPr sz="1050" b="1">
-                <a:solidFill>
-                  <a:srgbClr val="111B2A"/>
+              <a:buNone/>
+            </a:pPr>
+            <a:r>
+              <a:rPr sz="1000" b="1">
+                <a:solidFill>
+                  <a:srgbClr val="0B5FA5"/>
                 </a:solidFill>
                 <a:latin typeface="Calibri"/>
               </a:rPr>
-              <a:t>TLS and certificates</a:t>
+              <a:t>Core TLS and PKI</a:t>
             </a:r>
           </a:p>
           <a:p>
             <a:pPr>
               <a:lnSpc>
-                <a:spcPct val="92000"/>
+                <a:spcPct val="88000"/>
               </a:lnSpc>
               <a:spcAft>
                 <a:spcPts val="300"/>
               </a:spcAft>
-            </a:pPr>
-            <a:r>
-              <a:rPr sz="850" b="0">
+              <a:buNone/>
+            </a:pPr>
+            <a:r>
+              <a:rPr sz="800" b="0">
                 <a:solidFill>
                   <a:srgbClr val="1F2C3F"/>
                 </a:solidFill>
                 <a:latin typeface="Calibri"/>
               </a:rPr>
-              <a:t>[1]  RFC 8446 — TLS 1.3</a:t>
+              <a:t>RFC 8446 — TLS 1.3</a:t>
             </a:r>
           </a:p>
           <a:p>
             <a:pPr>
               <a:lnSpc>
-                <a:spcPct val="92000"/>
+                <a:spcPct val="88000"/>
               </a:lnSpc>
               <a:spcAft>
                 <a:spcPts val="300"/>
               </a:spcAft>
-            </a:pPr>
-            <a:r>
-              <a:rPr sz="850" b="0">
+              <a:buNone/>
+            </a:pPr>
+            <a:r>
+              <a:rPr sz="800" b="0">
                 <a:solidFill>
                   <a:srgbClr val="1F2C3F"/>
                 </a:solidFill>
                 <a:latin typeface="Calibri"/>
               </a:rPr>
-              <a:t>[2]  RFC 5246 — TLS 1.2</a:t>
+              <a:t>RFC 5246 — TLS 1.2</a:t>
             </a:r>
           </a:p>
           <a:p>
             <a:pPr>
               <a:lnSpc>
-                <a:spcPct val="92000"/>
+                <a:spcPct val="88000"/>
               </a:lnSpc>
               <a:spcAft>
                 <a:spcPts val="300"/>
               </a:spcAft>
-            </a:pPr>
-            <a:r>
-              <a:rPr sz="850" b="0">
+              <a:buNone/>
+            </a:pPr>
+            <a:r>
+              <a:rPr sz="800" b="0">
                 <a:solidFill>
                   <a:srgbClr val="1F2C3F"/>
                 </a:solidFill>
                 <a:latin typeface="Calibri"/>
               </a:rPr>
-              <a:t>[3]  RFC 9325 — Recommendations for secure use of TLS (2022)</a:t>
+              <a:t>RFC 9325 — secure use of TLS (2022)</a:t>
             </a:r>
           </a:p>
           <a:p>
             <a:pPr>
               <a:lnSpc>
-                <a:spcPct val="92000"/>
+                <a:spcPct val="88000"/>
               </a:lnSpc>
               <a:spcAft>
                 <a:spcPts val="300"/>
               </a:spcAft>
-            </a:pPr>
-            <a:r>
-              <a:rPr sz="850" b="0">
+              <a:buNone/>
+            </a:pPr>
+            <a:r>
+              <a:rPr sz="800" b="0">
                 <a:solidFill>
                   <a:srgbClr val="1F2C3F"/>
                 </a:solidFill>
                 <a:latin typeface="Calibri"/>
               </a:rPr>
-              <a:t>[4]  RFC 8996 — Deprecating TLS 1.0 and 1.1</a:t>
+              <a:t>RFC 8996 — deprecating TLS 1.0 and 1.1</a:t>
             </a:r>
           </a:p>
           <a:p>
             <a:pPr>
               <a:lnSpc>
-                <a:spcPct val="92000"/>
+                <a:spcPct val="88000"/>
               </a:lnSpc>
               <a:spcAft>
                 <a:spcPts val="300"/>
               </a:spcAft>
-            </a:pPr>
-            <a:r>
-              <a:rPr sz="850" b="0">
+              <a:buNone/>
+            </a:pPr>
+            <a:r>
+              <a:rPr sz="800" b="0">
                 <a:solidFill>
                   <a:srgbClr val="1F2C3F"/>
                 </a:solidFill>
                 <a:latin typeface="Calibri"/>
               </a:rPr>
-              <a:t>[5]  RFC 7457 — Known attacks on TLS and DTLS</a:t>
+              <a:t>RFC 7457 — known attacks on TLS</a:t>
             </a:r>
           </a:p>
           <a:p>
             <a:pPr>
               <a:lnSpc>
-                <a:spcPct val="92000"/>
+                <a:spcPct val="88000"/>
               </a:lnSpc>
               <a:spcAft>
                 <a:spcPts val="300"/>
               </a:spcAft>
-            </a:pPr>
-            <a:r>
-              <a:rPr sz="850" b="0">
+              <a:buNone/>
+            </a:pPr>
+            <a:r>
+              <a:rPr sz="800" b="0">
                 <a:solidFill>
                   <a:srgbClr val="1F2C3F"/>
                 </a:solidFill>
                 <a:latin typeface="Calibri"/>
               </a:rPr>
-              <a:t>[6]  RFC 4492 — ECC cipher suites for TLS</a:t>
+              <a:t>RFC 4492 — ECC cipher suites</a:t>
             </a:r>
           </a:p>
           <a:p>
             <a:pPr>
               <a:lnSpc>
-                <a:spcPct val="92000"/>
+                <a:spcPct val="88000"/>
               </a:lnSpc>
               <a:spcAft>
                 <a:spcPts val="300"/>
               </a:spcAft>
-            </a:pPr>
-            <a:r>
-              <a:rPr sz="850" b="0">
+              <a:buNone/>
+            </a:pPr>
+            <a:r>
+              <a:rPr sz="800" b="0">
                 <a:solidFill>
                   <a:srgbClr val="1F2C3F"/>
                 </a:solidFill>
                 <a:latin typeface="Calibri"/>
               </a:rPr>
-              <a:t>[7]  RFC 5280 — X.509 certificate and CRL profile</a:t>
+              <a:t>RFC 5280 — X.509 certificate and CRL profile</a:t>
             </a:r>
           </a:p>
           <a:p>
             <a:pPr>
               <a:lnSpc>
-                <a:spcPct val="92000"/>
+                <a:spcPct val="88000"/>
               </a:lnSpc>
               <a:spcAft>
                 <a:spcPts val="300"/>
               </a:spcAft>
-            </a:pPr>
-            <a:r>
-              <a:rPr sz="850" b="0">
+              <a:buNone/>
+            </a:pPr>
+            <a:r>
+              <a:rPr sz="800" b="0">
                 <a:solidFill>
                   <a:srgbClr val="1F2C3F"/>
                 </a:solidFill>
                 <a:latin typeface="Calibri"/>
               </a:rPr>
-              <a:t>[8]  RFC 6125 — Verifying application service identity</a:t>
+              <a:t>RFC 6125 — service identity verification</a:t>
             </a:r>
           </a:p>
           <a:p>
             <a:pPr>
               <a:lnSpc>
-                <a:spcPct val="92000"/>
+                <a:spcPct val="88000"/>
               </a:lnSpc>
               <a:spcAft>
                 <a:spcPts val="300"/>
               </a:spcAft>
-            </a:pPr>
-            <a:r>
-              <a:rPr sz="850" b="0">
+              <a:buNone/>
+            </a:pPr>
+            <a:r>
+              <a:rPr sz="800" b="0">
                 <a:solidFill>
                   <a:srgbClr val="1F2C3F"/>
                 </a:solidFill>
                 <a:latin typeface="Calibri"/>
               </a:rPr>
-              <a:t>[9]  NIST SP 800-52 Rev. 2 — TLS implementation guidelines</a:t>
-            </a:r>
-          </a:p>
-          <a:p>
-            <a:pPr>
-              <a:lnSpc>
-                <a:spcPct val="92000"/>
-              </a:lnSpc>
-              <a:spcAft>
-                <a:spcPts val="300"/>
-              </a:spcAft>
-            </a:pPr>
-            <a:r>
-              <a:rPr sz="850" b="0">
-                <a:solidFill>
-                  <a:srgbClr val="1F2C3F"/>
-                </a:solidFill>
-                <a:latin typeface="Calibri"/>
-              </a:rPr>
-              <a:t>[10] IANA TLS Parameters registry</a:t>
+              <a:t>NIST SP 800-52 Rev. 2 · IANA TLS registry</a:t>
             </a:r>
           </a:p>
         </p:txBody>
@@ -11618,8 +12945,8 @@
         </p:nvSpPr>
         <p:spPr>
           <a:xfrm>
-            <a:off x="4206240" y="1426464"/>
-            <a:ext cx="3675887" cy="3017520"/>
+            <a:off x="4224528" y="1316736"/>
+            <a:ext cx="3749039" cy="1792224"/>
           </a:xfrm>
           <a:prstGeom prst="roundRect">
             <a:avLst/>
@@ -11654,210 +12981,141 @@
           <a:p>
             <a:pPr algn="ctr">
               <a:lnSpc>
-                <a:spcPct val="92000"/>
+                <a:spcPct val="88000"/>
               </a:lnSpc>
               <a:spcAft>
                 <a:spcPts val="300"/>
               </a:spcAft>
-            </a:pPr>
-            <a:r>
-              <a:rPr sz="1050" b="1">
-                <a:solidFill>
-                  <a:srgbClr val="111B2A"/>
+              <a:buNone/>
+            </a:pPr>
+            <a:r>
+              <a:rPr sz="1000" b="1">
+                <a:solidFill>
+                  <a:srgbClr val="0B5FA5"/>
                 </a:solidFill>
                 <a:latin typeface="Calibri"/>
               </a:rPr>
-              <a:t>Email transport</a:t>
+              <a:t>Email protocols</a:t>
             </a:r>
           </a:p>
           <a:p>
             <a:pPr>
               <a:lnSpc>
-                <a:spcPct val="92000"/>
+                <a:spcPct val="88000"/>
               </a:lnSpc>
               <a:spcAft>
                 <a:spcPts val="300"/>
               </a:spcAft>
-            </a:pPr>
-            <a:r>
-              <a:rPr sz="850" b="0">
+              <a:buNone/>
+            </a:pPr>
+            <a:r>
+              <a:rPr sz="800" b="0">
                 <a:solidFill>
                   <a:srgbClr val="1F2C3F"/>
                 </a:solidFill>
                 <a:latin typeface="Calibri"/>
               </a:rPr>
-              <a:t>[11] RFC 5321 — Simple Mail Transfer Protocol</a:t>
+              <a:t>RFC 5321 — SMTP</a:t>
             </a:r>
           </a:p>
           <a:p>
             <a:pPr>
               <a:lnSpc>
-                <a:spcPct val="92000"/>
+                <a:spcPct val="88000"/>
               </a:lnSpc>
               <a:spcAft>
                 <a:spcPts val="300"/>
               </a:spcAft>
-            </a:pPr>
-            <a:r>
-              <a:rPr sz="850" b="0">
+              <a:buNone/>
+            </a:pPr>
+            <a:r>
+              <a:rPr sz="800" b="0">
                 <a:solidFill>
                   <a:srgbClr val="1F2C3F"/>
                 </a:solidFill>
                 <a:latin typeface="Calibri"/>
               </a:rPr>
-              <a:t>[12] RFC 3207 — SMTP over TLS (STARTTLS)</a:t>
+              <a:t>RFC 3207 — SMTP over TLS (STARTTLS)</a:t>
             </a:r>
           </a:p>
           <a:p>
             <a:pPr>
               <a:lnSpc>
-                <a:spcPct val="92000"/>
+                <a:spcPct val="88000"/>
               </a:lnSpc>
               <a:spcAft>
                 <a:spcPts val="300"/>
               </a:spcAft>
-            </a:pPr>
-            <a:r>
-              <a:rPr sz="850" b="0">
+              <a:buNone/>
+            </a:pPr>
+            <a:r>
+              <a:rPr sz="800" b="0">
                 <a:solidFill>
                   <a:srgbClr val="1F2C3F"/>
                 </a:solidFill>
                 <a:latin typeface="Calibri"/>
               </a:rPr>
-              <a:t>[13] RFC 9051 — IMAP version 4rev2</a:t>
+              <a:t>RFC 9051 — IMAP 4rev2</a:t>
             </a:r>
           </a:p>
           <a:p>
             <a:pPr>
               <a:lnSpc>
-                <a:spcPct val="92000"/>
+                <a:spcPct val="88000"/>
               </a:lnSpc>
               <a:spcAft>
                 <a:spcPts val="300"/>
               </a:spcAft>
-            </a:pPr>
-            <a:r>
-              <a:rPr sz="850" b="0">
+              <a:buNone/>
+            </a:pPr>
+            <a:r>
+              <a:rPr sz="800" b="0">
                 <a:solidFill>
                   <a:srgbClr val="1F2C3F"/>
                 </a:solidFill>
                 <a:latin typeface="Calibri"/>
               </a:rPr>
-              <a:t>[14] RFC 1939 — Post Office Protocol version 3</a:t>
+              <a:t>RFC 1939 — POP3</a:t>
             </a:r>
           </a:p>
           <a:p>
             <a:pPr>
               <a:lnSpc>
-                <a:spcPct val="92000"/>
+                <a:spcPct val="88000"/>
               </a:lnSpc>
               <a:spcAft>
                 <a:spcPts val="300"/>
               </a:spcAft>
-            </a:pPr>
-            <a:r>
-              <a:rPr sz="850" b="0">
+              <a:buNone/>
+            </a:pPr>
+            <a:r>
+              <a:rPr sz="800" b="0">
                 <a:solidFill>
                   <a:srgbClr val="1F2C3F"/>
                 </a:solidFill>
                 <a:latin typeface="Calibri"/>
               </a:rPr>
-              <a:t>[15] RFC 2595 — Using TLS with IMAP, POP3 and ACAP</a:t>
+              <a:t>RFC 2595 — TLS with IMAP, POP3 and ACAP</a:t>
             </a:r>
           </a:p>
           <a:p>
             <a:pPr>
               <a:lnSpc>
-                <a:spcPct val="92000"/>
+                <a:spcPct val="88000"/>
               </a:lnSpc>
               <a:spcAft>
                 <a:spcPts val="300"/>
               </a:spcAft>
-            </a:pPr>
-            <a:r>
-              <a:rPr sz="850" b="0">
+              <a:buNone/>
+            </a:pPr>
+            <a:r>
+              <a:rPr sz="800" b="0">
                 <a:solidFill>
                   <a:srgbClr val="1F2C3F"/>
                 </a:solidFill>
                 <a:latin typeface="Calibri"/>
               </a:rPr>
-              <a:t>[16] RFC 2606 — Reserved DNS names (.invalid, used by every synthetic fixture)</a:t>
-            </a:r>
-          </a:p>
-          <a:p>
-            <a:pPr>
-              <a:lnSpc>
-                <a:spcPct val="92000"/>
-              </a:lnSpc>
-              <a:spcAft>
-                <a:spcPts val="300"/>
-              </a:spcAft>
-            </a:pPr>
-            <a:r>
-              <a:rPr sz="500" b="0">
-                <a:solidFill>
-                  <a:srgbClr val="111B2A"/>
-                </a:solidFill>
-                <a:latin typeface="Calibri"/>
-              </a:rPr>
-              <a:t/>
-            </a:r>
-          </a:p>
-          <a:p>
-            <a:pPr>
-              <a:lnSpc>
-                <a:spcPct val="92000"/>
-              </a:lnSpc>
-              <a:spcAft>
-                <a:spcPts val="300"/>
-              </a:spcAft>
-            </a:pPr>
-            <a:r>
-              <a:rPr sz="1050" b="1">
-                <a:solidFill>
-                  <a:srgbClr val="111B2A"/>
-                </a:solidFill>
-                <a:latin typeface="Calibri"/>
-              </a:rPr>
-              <a:t>Libraries</a:t>
-            </a:r>
-          </a:p>
-          <a:p>
-            <a:pPr>
-              <a:lnSpc>
-                <a:spcPct val="92000"/>
-              </a:lnSpc>
-              <a:spcAft>
-                <a:spcPts val="300"/>
-              </a:spcAft>
-            </a:pPr>
-            <a:r>
-              <a:rPr sz="850" b="0">
-                <a:solidFill>
-                  <a:srgbClr val="1F2C3F"/>
-                </a:solidFill>
-                <a:latin typeface="Calibri"/>
-              </a:rPr>
-              <a:t>[17] Scapy · [18] python-cryptography · [19] FastAPI</a:t>
-            </a:r>
-          </a:p>
-          <a:p>
-            <a:pPr>
-              <a:lnSpc>
-                <a:spcPct val="92000"/>
-              </a:lnSpc>
-              <a:spcAft>
-                <a:spcPts val="300"/>
-              </a:spcAft>
-            </a:pPr>
-            <a:r>
-              <a:rPr sz="850" b="0">
-                <a:solidFill>
-                  <a:srgbClr val="1F2C3F"/>
-                </a:solidFill>
-                <a:latin typeface="Calibri"/>
-              </a:rPr>
-              <a:t>[20] scikit-learn · [21] React · [22] Wireshark / TShark</a:t>
+              <a:t>RFC 2606 — reserved names (.invalid, used by every fixture)</a:t>
             </a:r>
           </a:p>
         </p:txBody>
@@ -11870,385 +13128,8 @@
         </p:nvSpPr>
         <p:spPr>
           <a:xfrm>
-            <a:off x="8028431" y="1426464"/>
-            <a:ext cx="3785615" cy="3017520"/>
-          </a:xfrm>
-          <a:prstGeom prst="roundRect">
-            <a:avLst/>
-          </a:prstGeom>
-          <a:solidFill>
-            <a:srgbClr val="F2F6FB"/>
-          </a:solidFill>
-          <a:ln w="9525">
-            <a:solidFill>
-              <a:srgbClr val="C2D4E6"/>
-            </a:solidFill>
-          </a:ln>
-          <a:effectLst/>
-        </p:spPr>
-        <p:style>
-          <a:lnRef idx="1">
-            <a:schemeClr val="accent1"/>
-          </a:lnRef>
-          <a:fillRef idx="3">
-            <a:schemeClr val="accent1"/>
-          </a:fillRef>
-          <a:effectRef idx="2">
-            <a:schemeClr val="accent1"/>
-          </a:effectRef>
-          <a:fontRef idx="minor">
-            <a:schemeClr val="lt1"/>
-          </a:fontRef>
-        </p:style>
-        <p:txBody>
-          <a:bodyPr rtlCol="0" anchor="t" wrap="square" tIns="54864" bIns="54864"/>
-          <a:lstStyle/>
-          <a:p>
-            <a:pPr algn="ctr">
-              <a:lnSpc>
-                <a:spcPct val="90000"/>
-              </a:lnSpc>
-              <a:spcAft>
-                <a:spcPts val="300"/>
-              </a:spcAft>
-            </a:pPr>
-            <a:r>
-              <a:rPr sz="1050" b="1">
-                <a:solidFill>
-                  <a:srgbClr val="0B5FA5"/>
-                </a:solidFill>
-                <a:latin typeface="Calibri"/>
-              </a:rPr>
-              <a:t>Verification methodology</a:t>
-            </a:r>
-          </a:p>
-          <a:p>
-            <a:pPr>
-              <a:lnSpc>
-                <a:spcPct val="90000"/>
-              </a:lnSpc>
-              <a:spcAft>
-                <a:spcPts val="300"/>
-              </a:spcAft>
-            </a:pPr>
-            <a:r>
-              <a:rPr sz="850" b="0">
-                <a:solidFill>
-                  <a:srgbClr val="1F2C3F"/>
-                </a:solidFill>
-                <a:latin typeface="Calibri"/>
-              </a:rPr>
-              <a:t>Deterministic synthetic fixtures.  Every capture is generated from a fixed seed, so the same bytes are produced on every machine and in CI.</a:t>
-            </a:r>
-          </a:p>
-          <a:p>
-            <a:pPr>
-              <a:lnSpc>
-                <a:spcPct val="90000"/>
-              </a:lnSpc>
-              <a:spcAft>
-                <a:spcPts val="300"/>
-              </a:spcAft>
-            </a:pPr>
-            <a:r>
-              <a:rPr sz="850" b="0">
-                <a:solidFill>
-                  <a:srgbClr val="1F2C3F"/>
-                </a:solidFill>
-                <a:latin typeface="Calibri"/>
-              </a:rPr>
-              <a:t>Known-answer manifests.  Expectations are hand-derived and committed; the captures themselves are gitignored. A test cannot confirm its own output.</a:t>
-            </a:r>
-          </a:p>
-          <a:p>
-            <a:pPr>
-              <a:lnSpc>
-                <a:spcPct val="90000"/>
-              </a:lnSpc>
-              <a:spcAft>
-                <a:spcPts val="300"/>
-              </a:spcAft>
-            </a:pPr>
-            <a:r>
-              <a:rPr sz="850" b="0">
-                <a:solidFill>
-                  <a:srgbClr val="1F2C3F"/>
-                </a:solidFill>
-                <a:latin typeface="Calibri"/>
-              </a:rPr>
-              <a:t>Independent TShark cross-checks.  Ten comparisons against Wireshark's dissector, so a shared bug in our parser cannot validate itself.</a:t>
-            </a:r>
-          </a:p>
-          <a:p>
-            <a:pPr>
-              <a:lnSpc>
-                <a:spcPct val="90000"/>
-              </a:lnSpc>
-              <a:spcAft>
-                <a:spcPts val="300"/>
-              </a:spcAft>
-            </a:pPr>
-            <a:r>
-              <a:rPr sz="850" b="0">
-                <a:solidFill>
-                  <a:srgbClr val="1F2C3F"/>
-                </a:solidFill>
-                <a:latin typeface="Calibri"/>
-              </a:rPr>
-              <a:t>Browser end-to-end tests.  Five Playwright specs drive the real backend over the real engine, including a restart to prove persistence.</a:t>
-            </a:r>
-          </a:p>
-          <a:p>
-            <a:pPr>
-              <a:lnSpc>
-                <a:spcPct val="90000"/>
-              </a:lnSpc>
-              <a:spcAft>
-                <a:spcPts val="300"/>
-              </a:spcAft>
-            </a:pPr>
-            <a:r>
-              <a:rPr sz="850" b="0">
-                <a:solidFill>
-                  <a:srgbClr val="1F2C3F"/>
-                </a:solidFill>
-                <a:latin typeface="Calibri"/>
-              </a:rPr>
-              <a:t>Report-parity verification.  One canonical model feeds JSON, HTML and PDF, and their facts are asserted equal.</a:t>
-            </a:r>
-          </a:p>
-        </p:txBody>
-      </p:sp>
-      <p:pic>
-        <p:nvPicPr>
-          <p:cNvPr id="17414" name="Picture 17413" descr="03-findings.png"/>
-          <p:cNvPicPr>
-            <a:picLocks noChangeAspect="1"/>
-          </p:cNvPicPr>
-          <p:nvPr/>
-        </p:nvPicPr>
-        <p:blipFill>
-          <a:blip r:embed="rId4"/>
-          <a:stretch>
-            <a:fillRect/>
-          </a:stretch>
-        </p:blipFill>
-        <p:spPr>
-          <a:xfrm>
-            <a:off x="384048" y="4389120"/>
-            <a:ext cx="2743200" cy="1543050"/>
-          </a:xfrm>
-          <a:prstGeom prst="rect">
-            <a:avLst/>
-          </a:prstGeom>
-        </p:spPr>
-      </p:pic>
-      <p:sp>
-        <p:nvSpPr>
-          <p:cNvPr id="17415" name="Rectangle 17414"/>
-          <p:cNvSpPr/>
-          <p:nvPr/>
-        </p:nvSpPr>
-        <p:spPr>
-          <a:xfrm>
-            <a:off x="384048" y="4389120"/>
-            <a:ext cx="2743200" cy="1543050"/>
-          </a:xfrm>
-          <a:prstGeom prst="rect">
-            <a:avLst/>
-          </a:prstGeom>
-          <a:noFill/>
-          <a:ln w="9525">
-            <a:solidFill>
-              <a:srgbClr val="C2D4E6"/>
-            </a:solidFill>
-          </a:ln>
-          <a:effectLst/>
-        </p:spPr>
-        <p:style>
-          <a:lnRef idx="1">
-            <a:schemeClr val="accent1"/>
-          </a:lnRef>
-          <a:fillRef idx="3">
-            <a:schemeClr val="accent1"/>
-          </a:fillRef>
-          <a:effectRef idx="2">
-            <a:schemeClr val="accent1"/>
-          </a:effectRef>
-          <a:fontRef idx="minor">
-            <a:schemeClr val="lt1"/>
-          </a:fontRef>
-        </p:style>
-        <p:txBody>
-          <a:bodyPr rtlCol="0" anchor="ctr"/>
-          <a:lstStyle/>
-          <a:p>
-            <a:pPr algn="ctr"/>
-          </a:p>
-        </p:txBody>
-      </p:sp>
-      <p:sp>
-        <p:nvSpPr>
-          <p:cNvPr id="17416" name="TextBox 17415"/>
-          <p:cNvSpPr txBox="1"/>
-          <p:nvPr/>
-        </p:nvSpPr>
-        <p:spPr>
-          <a:xfrm>
-            <a:off x="384048" y="5950457"/>
-            <a:ext cx="2743200" cy="219456"/>
-          </a:xfrm>
-          <a:prstGeom prst="rect">
-            <a:avLst/>
-          </a:prstGeom>
-          <a:noFill/>
-        </p:spPr>
-        <p:txBody>
-          <a:bodyPr wrap="square">
-            <a:spAutoFit/>
-          </a:bodyPr>
-          <a:lstStyle/>
-          <a:p>
-            <a:pPr algn="ctr">
-              <a:lnSpc>
-                <a:spcPct val="100000"/>
-              </a:lnSpc>
-              <a:spcAft>
-                <a:spcPts val="300"/>
-              </a:spcAft>
-            </a:pPr>
-            <a:r>
-              <a:rPr sz="800" b="0">
-                <a:solidFill>
-                  <a:srgbClr val="4A5A70"/>
-                </a:solidFill>
-                <a:latin typeface="Calibri"/>
-              </a:rPr>
-              <a:t>Findings triage</a:t>
-            </a:r>
-          </a:p>
-        </p:txBody>
-      </p:sp>
-      <p:pic>
-        <p:nvPicPr>
-          <p:cNvPr id="17417" name="Picture 17416" descr="05-session.png"/>
-          <p:cNvPicPr>
-            <a:picLocks noChangeAspect="1"/>
-          </p:cNvPicPr>
-          <p:nvPr/>
-        </p:nvPicPr>
-        <p:blipFill>
-          <a:blip r:embed="rId5"/>
-          <a:stretch>
-            <a:fillRect/>
-          </a:stretch>
-        </p:blipFill>
-        <p:spPr>
-          <a:xfrm>
-            <a:off x="3255264" y="4389120"/>
-            <a:ext cx="2743200" cy="1543050"/>
-          </a:xfrm>
-          <a:prstGeom prst="rect">
-            <a:avLst/>
-          </a:prstGeom>
-        </p:spPr>
-      </p:pic>
-      <p:sp>
-        <p:nvSpPr>
-          <p:cNvPr id="17418" name="Rectangle 17417"/>
-          <p:cNvSpPr/>
-          <p:nvPr/>
-        </p:nvSpPr>
-        <p:spPr>
-          <a:xfrm>
-            <a:off x="3255264" y="4389120"/>
-            <a:ext cx="2743200" cy="1543050"/>
-          </a:xfrm>
-          <a:prstGeom prst="rect">
-            <a:avLst/>
-          </a:prstGeom>
-          <a:noFill/>
-          <a:ln w="9525">
-            <a:solidFill>
-              <a:srgbClr val="C2D4E6"/>
-            </a:solidFill>
-          </a:ln>
-          <a:effectLst/>
-        </p:spPr>
-        <p:style>
-          <a:lnRef idx="1">
-            <a:schemeClr val="accent1"/>
-          </a:lnRef>
-          <a:fillRef idx="3">
-            <a:schemeClr val="accent1"/>
-          </a:fillRef>
-          <a:effectRef idx="2">
-            <a:schemeClr val="accent1"/>
-          </a:effectRef>
-          <a:fontRef idx="minor">
-            <a:schemeClr val="lt1"/>
-          </a:fontRef>
-        </p:style>
-        <p:txBody>
-          <a:bodyPr rtlCol="0" anchor="ctr"/>
-          <a:lstStyle/>
-          <a:p>
-            <a:pPr algn="ctr"/>
-          </a:p>
-        </p:txBody>
-      </p:sp>
-      <p:sp>
-        <p:nvSpPr>
-          <p:cNvPr id="17419" name="TextBox 17418"/>
-          <p:cNvSpPr txBox="1"/>
-          <p:nvPr/>
-        </p:nvSpPr>
-        <p:spPr>
-          <a:xfrm>
-            <a:off x="3255264" y="5950457"/>
-            <a:ext cx="2743200" cy="219456"/>
-          </a:xfrm>
-          <a:prstGeom prst="rect">
-            <a:avLst/>
-          </a:prstGeom>
-          <a:noFill/>
-        </p:spPr>
-        <p:txBody>
-          <a:bodyPr wrap="square">
-            <a:spAutoFit/>
-          </a:bodyPr>
-          <a:lstStyle/>
-          <a:p>
-            <a:pPr algn="ctr">
-              <a:lnSpc>
-                <a:spcPct val="100000"/>
-              </a:lnSpc>
-              <a:spcAft>
-                <a:spcPts val="300"/>
-              </a:spcAft>
-            </a:pPr>
-            <a:r>
-              <a:rPr sz="800" b="0">
-                <a:solidFill>
-                  <a:srgbClr val="4A5A70"/>
-                </a:solidFill>
-                <a:latin typeface="Calibri"/>
-              </a:rPr>
-              <a:t>Session negotiation</a:t>
-            </a:r>
-          </a:p>
-        </p:txBody>
-      </p:sp>
-      <p:sp>
-        <p:nvSpPr>
-          <p:cNvPr id="17420" name="Rounded Rectangle 17419"/>
-          <p:cNvSpPr/>
-          <p:nvPr/>
-        </p:nvSpPr>
-        <p:spPr>
-          <a:xfrm>
-            <a:off x="6528816" y="4553712"/>
-            <a:ext cx="5285232" cy="1572768"/>
+            <a:off x="8065008" y="1316736"/>
+            <a:ext cx="3749039" cy="1792224"/>
           </a:xfrm>
           <a:prstGeom prst="roundRect">
             <a:avLst/>
@@ -12288,6 +13169,7 @@
               <a:spcAft>
                 <a:spcPts val="300"/>
               </a:spcAft>
+              <a:buNone/>
             </a:pPr>
             <a:r>
               <a:rPr sz="1000" b="1">
@@ -12296,7 +13178,7 @@
                 </a:solidFill>
                 <a:latin typeface="Calibri"/>
               </a:rPr>
-              <a:t>Project research</a:t>
+              <a:t>Validation tools</a:t>
             </a:r>
           </a:p>
           <a:p>
@@ -12307,6 +13189,7 @@
               <a:spcAft>
                 <a:spcPts val="300"/>
               </a:spcAft>
+              <a:buNone/>
             </a:pPr>
             <a:r>
               <a:rPr sz="800" b="0">
@@ -12315,7 +13198,7 @@
                 </a:solidFill>
                 <a:latin typeface="Calibri"/>
               </a:rPr>
-              <a:t>evidence-model · scoring-methodology · limitations · threat-model · security-audit</a:t>
+              <a:t>Wireshark / TShark — independent dissection</a:t>
             </a:r>
           </a:p>
           <a:p>
@@ -12326,6 +13209,7 @@
               <a:spcAft>
                 <a:spcPts val="300"/>
               </a:spcAft>
+              <a:buNone/>
             </a:pPr>
             <a:r>
               <a:rPr sz="800" b="0">
@@ -12334,7 +13218,7 @@
                 </a:solidFill>
                 <a:latin typeface="Calibri"/>
               </a:rPr>
-              <a:t>ml-methodology · ml-evaluation · ml-model-card · performance-benchmarks</a:t>
+              <a:t>pytest · hypothesis — property and regression tests</a:t>
             </a:r>
           </a:p>
           <a:p>
@@ -12345,6 +13229,7 @@
               <a:spcAft>
                 <a:spcPts val="300"/>
               </a:spcAft>
+              <a:buNone/>
             </a:pPr>
             <a:r>
               <a:rPr sz="800" b="0">
@@ -12353,7 +13238,7 @@
                 </a:solidFill>
                 <a:latin typeface="Calibri"/>
               </a:rPr>
-              <a:t>REQUIREMENT-COVERAGE.md — all 35 SIH26159 capabilities with status and evidence</a:t>
+              <a:t>Playwright · Vitest — browser and unit tests</a:t>
             </a:r>
           </a:p>
           <a:p>
@@ -12362,11 +13247,895 @@
                 <a:spcPct val="88000"/>
               </a:lnSpc>
               <a:spcAft>
+                <a:spcPts val="300"/>
+              </a:spcAft>
+              <a:buNone/>
+            </a:pPr>
+            <a:r>
+              <a:rPr sz="800" b="0">
+                <a:solidFill>
+                  <a:srgbClr val="1F2C3F"/>
+                </a:solidFill>
+                <a:latin typeface="Calibri"/>
+              </a:rPr>
+              <a:t>pip-audit · npm audit · CycloneDX — supply chain</a:t>
+            </a:r>
+          </a:p>
+          <a:p>
+            <a:pPr>
+              <a:lnSpc>
+                <a:spcPct val="88000"/>
+              </a:lnSpc>
+              <a:spcAft>
+                <a:spcPts val="300"/>
+              </a:spcAft>
+              <a:buNone/>
+            </a:pPr>
+            <a:r>
+              <a:rPr sz="800" b="0">
+                <a:solidFill>
+                  <a:srgbClr val="1F2C3F"/>
+                </a:solidFill>
+                <a:latin typeface="Calibri"/>
+              </a:rPr>
+              <a:t>ruff · mypy — lint and strict typing</a:t>
+            </a:r>
+          </a:p>
+        </p:txBody>
+      </p:sp>
+      <p:sp>
+        <p:nvSpPr>
+          <p:cNvPr id="17414" name="Rounded Rectangle 17413"/>
+          <p:cNvSpPr/>
+          <p:nvPr/>
+        </p:nvSpPr>
+        <p:spPr>
+          <a:xfrm>
+            <a:off x="384048" y="3291840"/>
+            <a:ext cx="11430000" cy="1591056"/>
+          </a:xfrm>
+          <a:prstGeom prst="roundRect">
+            <a:avLst/>
+          </a:prstGeom>
+          <a:solidFill>
+            <a:srgbClr val="F7FAFD"/>
+          </a:solidFill>
+          <a:ln w="9525">
+            <a:solidFill>
+              <a:srgbClr val="DCE6F2"/>
+            </a:solidFill>
+          </a:ln>
+          <a:effectLst/>
+        </p:spPr>
+        <p:style>
+          <a:lnRef idx="1">
+            <a:schemeClr val="accent1"/>
+          </a:lnRef>
+          <a:fillRef idx="3">
+            <a:schemeClr val="accent1"/>
+          </a:fillRef>
+          <a:effectRef idx="2">
+            <a:schemeClr val="accent1"/>
+          </a:effectRef>
+          <a:fontRef idx="minor">
+            <a:schemeClr val="lt1"/>
+          </a:fontRef>
+        </p:style>
+        <p:txBody>
+          <a:bodyPr rtlCol="0" anchor="t" wrap="square" lIns="73152" tIns="27432"/>
+          <a:lstStyle/>
+          <a:p>
+            <a:pPr algn="ctr">
+              <a:lnSpc>
+                <a:spcPct val="100000"/>
+              </a:lnSpc>
+              <a:spcAft>
+                <a:spcPts val="300"/>
+              </a:spcAft>
+              <a:buNone/>
+            </a:pPr>
+            <a:r>
+              <a:rPr sz="750" b="1">
+                <a:solidFill>
+                  <a:srgbClr val="8A9BB0"/>
+                </a:solidFill>
+                <a:latin typeface="Calibri"/>
+              </a:rPr>
+              <a:t>HOW EVERY CLAIM IN THIS DECK IS CHECKED</a:t>
+            </a:r>
+          </a:p>
+        </p:txBody>
+      </p:sp>
+      <p:sp>
+        <p:nvSpPr>
+          <p:cNvPr id="17415" name="Rounded Rectangle 17414"/>
+          <p:cNvSpPr/>
+          <p:nvPr/>
+        </p:nvSpPr>
+        <p:spPr>
+          <a:xfrm>
+            <a:off x="530352" y="3639312"/>
+            <a:ext cx="1664208" cy="1078992"/>
+          </a:xfrm>
+          <a:prstGeom prst="roundRect">
+            <a:avLst/>
+          </a:prstGeom>
+          <a:solidFill>
+            <a:srgbClr val="EEF3F9"/>
+          </a:solidFill>
+          <a:ln w="9525">
+            <a:solidFill>
+              <a:srgbClr val="C2D4E6"/>
+            </a:solidFill>
+          </a:ln>
+          <a:effectLst/>
+        </p:spPr>
+        <p:style>
+          <a:lnRef idx="1">
+            <a:schemeClr val="accent1"/>
+          </a:lnRef>
+          <a:fillRef idx="3">
+            <a:schemeClr val="accent1"/>
+          </a:fillRef>
+          <a:effectRef idx="2">
+            <a:schemeClr val="accent1"/>
+          </a:effectRef>
+          <a:fontRef idx="minor">
+            <a:schemeClr val="lt1"/>
+          </a:fontRef>
+        </p:style>
+        <p:txBody>
+          <a:bodyPr rtlCol="0" anchor="ctr" wrap="square" tIns="54864" bIns="54864"/>
+          <a:lstStyle/>
+          <a:p>
+            <a:pPr algn="ctr">
+              <a:lnSpc>
+                <a:spcPct val="88000"/>
+              </a:lnSpc>
+              <a:spcAft>
+                <a:spcPts val="100"/>
+              </a:spcAft>
+              <a:buNone/>
+            </a:pPr>
+            <a:r>
+              <a:rPr sz="850" b="1">
+                <a:solidFill>
+                  <a:srgbClr val="111B2A"/>
+                </a:solidFill>
+                <a:latin typeface="Calibri"/>
+              </a:rPr>
+              <a:t>Deterministic fixtures</a:t>
+            </a:r>
+          </a:p>
+          <a:p>
+            <a:pPr algn="ctr">
+              <a:lnSpc>
+                <a:spcPct val="88000"/>
+              </a:lnSpc>
+              <a:spcAft>
+                <a:spcPts val="100"/>
+              </a:spcAft>
+              <a:buNone/>
+            </a:pPr>
+            <a:r>
+              <a:rPr sz="700" b="0">
+                <a:solidFill>
+                  <a:srgbClr val="4A5A70"/>
+                </a:solidFill>
+                <a:latin typeface="Calibri"/>
+              </a:rPr>
+              <a:t>generated from a fixed seed; identical bytes on every machine</a:t>
+            </a:r>
+          </a:p>
+        </p:txBody>
+      </p:sp>
+      <p:sp>
+        <p:nvSpPr>
+          <p:cNvPr id="17416" name="Right Arrow 17415"/>
+          <p:cNvSpPr/>
+          <p:nvPr/>
+        </p:nvSpPr>
+        <p:spPr>
+          <a:xfrm>
+            <a:off x="2231136" y="4096512"/>
+            <a:ext cx="182880" cy="164592"/>
+          </a:xfrm>
+          <a:prstGeom prst="rightArrow">
+            <a:avLst/>
+          </a:prstGeom>
+          <a:solidFill>
+            <a:srgbClr val="4A5A70"/>
+          </a:solidFill>
+          <a:ln>
+            <a:noFill/>
+          </a:ln>
+          <a:effectLst/>
+        </p:spPr>
+        <p:style>
+          <a:lnRef idx="1">
+            <a:schemeClr val="accent1"/>
+          </a:lnRef>
+          <a:fillRef idx="3">
+            <a:schemeClr val="accent1"/>
+          </a:fillRef>
+          <a:effectRef idx="2">
+            <a:schemeClr val="accent1"/>
+          </a:effectRef>
+          <a:fontRef idx="minor">
+            <a:schemeClr val="lt1"/>
+          </a:fontRef>
+        </p:style>
+        <p:txBody>
+          <a:bodyPr rtlCol="0" anchor="ctr"/>
+          <a:lstStyle/>
+          <a:p>
+            <a:pPr algn="ctr"/>
+          </a:p>
+        </p:txBody>
+      </p:sp>
+      <p:sp>
+        <p:nvSpPr>
+          <p:cNvPr id="17417" name="Rounded Rectangle 17416"/>
+          <p:cNvSpPr/>
+          <p:nvPr/>
+        </p:nvSpPr>
+        <p:spPr>
+          <a:xfrm>
+            <a:off x="2432304" y="3639312"/>
+            <a:ext cx="1664208" cy="1078992"/>
+          </a:xfrm>
+          <a:prstGeom prst="roundRect">
+            <a:avLst/>
+          </a:prstGeom>
+          <a:solidFill>
+            <a:srgbClr val="EEF3F9"/>
+          </a:solidFill>
+          <a:ln w="9525">
+            <a:solidFill>
+              <a:srgbClr val="C2D4E6"/>
+            </a:solidFill>
+          </a:ln>
+          <a:effectLst/>
+        </p:spPr>
+        <p:style>
+          <a:lnRef idx="1">
+            <a:schemeClr val="accent1"/>
+          </a:lnRef>
+          <a:fillRef idx="3">
+            <a:schemeClr val="accent1"/>
+          </a:fillRef>
+          <a:effectRef idx="2">
+            <a:schemeClr val="accent1"/>
+          </a:effectRef>
+          <a:fontRef idx="minor">
+            <a:schemeClr val="lt1"/>
+          </a:fontRef>
+        </p:style>
+        <p:txBody>
+          <a:bodyPr rtlCol="0" anchor="ctr" wrap="square" tIns="54864" bIns="54864"/>
+          <a:lstStyle/>
+          <a:p>
+            <a:pPr algn="ctr">
+              <a:lnSpc>
+                <a:spcPct val="88000"/>
+              </a:lnSpc>
+              <a:spcAft>
+                <a:spcPts val="100"/>
+              </a:spcAft>
+              <a:buNone/>
+            </a:pPr>
+            <a:r>
+              <a:rPr sz="850" b="1">
+                <a:solidFill>
+                  <a:srgbClr val="111B2A"/>
+                </a:solidFill>
+                <a:latin typeface="Calibri"/>
+              </a:rPr>
+              <a:t>Hand-derived manifests</a:t>
+            </a:r>
+          </a:p>
+          <a:p>
+            <a:pPr algn="ctr">
+              <a:lnSpc>
+                <a:spcPct val="88000"/>
+              </a:lnSpc>
+              <a:spcAft>
+                <a:spcPts val="100"/>
+              </a:spcAft>
+              <a:buNone/>
+            </a:pPr>
+            <a:r>
+              <a:rPr sz="700" b="0">
+                <a:solidFill>
+                  <a:srgbClr val="4A5A70"/>
+                </a:solidFill>
+                <a:latin typeface="Calibri"/>
+              </a:rPr>
+              <a:t>expectations written by hand and committed, not read back</a:t>
+            </a:r>
+          </a:p>
+        </p:txBody>
+      </p:sp>
+      <p:sp>
+        <p:nvSpPr>
+          <p:cNvPr id="17418" name="Right Arrow 17417"/>
+          <p:cNvSpPr/>
+          <p:nvPr/>
+        </p:nvSpPr>
+        <p:spPr>
+          <a:xfrm>
+            <a:off x="4133088" y="4096512"/>
+            <a:ext cx="182880" cy="164592"/>
+          </a:xfrm>
+          <a:prstGeom prst="rightArrow">
+            <a:avLst/>
+          </a:prstGeom>
+          <a:solidFill>
+            <a:srgbClr val="4A5A70"/>
+          </a:solidFill>
+          <a:ln>
+            <a:noFill/>
+          </a:ln>
+          <a:effectLst/>
+        </p:spPr>
+        <p:style>
+          <a:lnRef idx="1">
+            <a:schemeClr val="accent1"/>
+          </a:lnRef>
+          <a:fillRef idx="3">
+            <a:schemeClr val="accent1"/>
+          </a:fillRef>
+          <a:effectRef idx="2">
+            <a:schemeClr val="accent1"/>
+          </a:effectRef>
+          <a:fontRef idx="minor">
+            <a:schemeClr val="lt1"/>
+          </a:fontRef>
+        </p:style>
+        <p:txBody>
+          <a:bodyPr rtlCol="0" anchor="ctr"/>
+          <a:lstStyle/>
+          <a:p>
+            <a:pPr algn="ctr"/>
+          </a:p>
+        </p:txBody>
+      </p:sp>
+      <p:sp>
+        <p:nvSpPr>
+          <p:cNvPr id="17419" name="Rounded Rectangle 17418"/>
+          <p:cNvSpPr/>
+          <p:nvPr/>
+        </p:nvSpPr>
+        <p:spPr>
+          <a:xfrm>
+            <a:off x="4334256" y="3639312"/>
+            <a:ext cx="1664208" cy="1078992"/>
+          </a:xfrm>
+          <a:prstGeom prst="roundRect">
+            <a:avLst/>
+          </a:prstGeom>
+          <a:solidFill>
+            <a:srgbClr val="EEF3F9"/>
+          </a:solidFill>
+          <a:ln w="9525">
+            <a:solidFill>
+              <a:srgbClr val="C2D4E6"/>
+            </a:solidFill>
+          </a:ln>
+          <a:effectLst/>
+        </p:spPr>
+        <p:style>
+          <a:lnRef idx="1">
+            <a:schemeClr val="accent1"/>
+          </a:lnRef>
+          <a:fillRef idx="3">
+            <a:schemeClr val="accent1"/>
+          </a:fillRef>
+          <a:effectRef idx="2">
+            <a:schemeClr val="accent1"/>
+          </a:effectRef>
+          <a:fontRef idx="minor">
+            <a:schemeClr val="lt1"/>
+          </a:fontRef>
+        </p:style>
+        <p:txBody>
+          <a:bodyPr rtlCol="0" anchor="ctr" wrap="square" tIns="54864" bIns="54864"/>
+          <a:lstStyle/>
+          <a:p>
+            <a:pPr algn="ctr">
+              <a:lnSpc>
+                <a:spcPct val="88000"/>
+              </a:lnSpc>
+              <a:spcAft>
+                <a:spcPts val="100"/>
+              </a:spcAft>
+              <a:buNone/>
+            </a:pPr>
+            <a:r>
+              <a:rPr sz="850" b="1">
+                <a:solidFill>
+                  <a:srgbClr val="111B2A"/>
+                </a:solidFill>
+                <a:latin typeface="Calibri"/>
+              </a:rPr>
+              <a:t>Engine under test</a:t>
+            </a:r>
+          </a:p>
+          <a:p>
+            <a:pPr algn="ctr">
+              <a:lnSpc>
+                <a:spcPct val="88000"/>
+              </a:lnSpc>
+              <a:spcAft>
+                <a:spcPts val="100"/>
+              </a:spcAft>
+              <a:buNone/>
+            </a:pPr>
+            <a:r>
+              <a:rPr sz="700" b="0">
+                <a:solidFill>
+                  <a:srgbClr val="4A5A70"/>
+                </a:solidFill>
+                <a:latin typeface="Calibri"/>
+              </a:rPr>
+              <a:t>1,357 tests; the captures themselves stay out of git</a:t>
+            </a:r>
+          </a:p>
+        </p:txBody>
+      </p:sp>
+      <p:sp>
+        <p:nvSpPr>
+          <p:cNvPr id="17420" name="Right Arrow 17419"/>
+          <p:cNvSpPr/>
+          <p:nvPr/>
+        </p:nvSpPr>
+        <p:spPr>
+          <a:xfrm>
+            <a:off x="6035040" y="4096512"/>
+            <a:ext cx="182880" cy="164592"/>
+          </a:xfrm>
+          <a:prstGeom prst="rightArrow">
+            <a:avLst/>
+          </a:prstGeom>
+          <a:solidFill>
+            <a:srgbClr val="4A5A70"/>
+          </a:solidFill>
+          <a:ln>
+            <a:noFill/>
+          </a:ln>
+          <a:effectLst/>
+        </p:spPr>
+        <p:style>
+          <a:lnRef idx="1">
+            <a:schemeClr val="accent1"/>
+          </a:lnRef>
+          <a:fillRef idx="3">
+            <a:schemeClr val="accent1"/>
+          </a:fillRef>
+          <a:effectRef idx="2">
+            <a:schemeClr val="accent1"/>
+          </a:effectRef>
+          <a:fontRef idx="minor">
+            <a:schemeClr val="lt1"/>
+          </a:fontRef>
+        </p:style>
+        <p:txBody>
+          <a:bodyPr rtlCol="0" anchor="ctr"/>
+          <a:lstStyle/>
+          <a:p>
+            <a:pPr algn="ctr"/>
+          </a:p>
+        </p:txBody>
+      </p:sp>
+      <p:sp>
+        <p:nvSpPr>
+          <p:cNvPr id="17421" name="Rounded Rectangle 17420"/>
+          <p:cNvSpPr/>
+          <p:nvPr/>
+        </p:nvSpPr>
+        <p:spPr>
+          <a:xfrm>
+            <a:off x="6236208" y="3639312"/>
+            <a:ext cx="1664208" cy="1078992"/>
+          </a:xfrm>
+          <a:prstGeom prst="roundRect">
+            <a:avLst/>
+          </a:prstGeom>
+          <a:solidFill>
+            <a:srgbClr val="EEF3F9"/>
+          </a:solidFill>
+          <a:ln w="9525">
+            <a:solidFill>
+              <a:srgbClr val="C2D4E6"/>
+            </a:solidFill>
+          </a:ln>
+          <a:effectLst/>
+        </p:spPr>
+        <p:style>
+          <a:lnRef idx="1">
+            <a:schemeClr val="accent1"/>
+          </a:lnRef>
+          <a:fillRef idx="3">
+            <a:schemeClr val="accent1"/>
+          </a:fillRef>
+          <a:effectRef idx="2">
+            <a:schemeClr val="accent1"/>
+          </a:effectRef>
+          <a:fontRef idx="minor">
+            <a:schemeClr val="lt1"/>
+          </a:fontRef>
+        </p:style>
+        <p:txBody>
+          <a:bodyPr rtlCol="0" anchor="ctr" wrap="square" tIns="54864" bIns="54864"/>
+          <a:lstStyle/>
+          <a:p>
+            <a:pPr algn="ctr">
+              <a:lnSpc>
+                <a:spcPct val="88000"/>
+              </a:lnSpc>
+              <a:spcAft>
+                <a:spcPts val="100"/>
+              </a:spcAft>
+              <a:buNone/>
+            </a:pPr>
+            <a:r>
+              <a:rPr sz="850" b="1">
+                <a:solidFill>
+                  <a:srgbClr val="111B2A"/>
+                </a:solidFill>
+                <a:latin typeface="Calibri"/>
+              </a:rPr>
+              <a:t>Independent dissector</a:t>
+            </a:r>
+          </a:p>
+          <a:p>
+            <a:pPr algn="ctr">
+              <a:lnSpc>
+                <a:spcPct val="88000"/>
+              </a:lnSpc>
+              <a:spcAft>
+                <a:spcPts val="100"/>
+              </a:spcAft>
+              <a:buNone/>
+            </a:pPr>
+            <a:r>
+              <a:rPr sz="700" b="0">
+                <a:solidFill>
+                  <a:srgbClr val="4A5A70"/>
+                </a:solidFill>
+                <a:latin typeface="Calibri"/>
+              </a:rPr>
+              <a:t>ten TShark cross-checks against Wireshark's own parse</a:t>
+            </a:r>
+          </a:p>
+        </p:txBody>
+      </p:sp>
+      <p:sp>
+        <p:nvSpPr>
+          <p:cNvPr id="17422" name="Right Arrow 17421"/>
+          <p:cNvSpPr/>
+          <p:nvPr/>
+        </p:nvSpPr>
+        <p:spPr>
+          <a:xfrm>
+            <a:off x="7936992" y="4096512"/>
+            <a:ext cx="182880" cy="164592"/>
+          </a:xfrm>
+          <a:prstGeom prst="rightArrow">
+            <a:avLst/>
+          </a:prstGeom>
+          <a:solidFill>
+            <a:srgbClr val="4A5A70"/>
+          </a:solidFill>
+          <a:ln>
+            <a:noFill/>
+          </a:ln>
+          <a:effectLst/>
+        </p:spPr>
+        <p:style>
+          <a:lnRef idx="1">
+            <a:schemeClr val="accent1"/>
+          </a:lnRef>
+          <a:fillRef idx="3">
+            <a:schemeClr val="accent1"/>
+          </a:fillRef>
+          <a:effectRef idx="2">
+            <a:schemeClr val="accent1"/>
+          </a:effectRef>
+          <a:fontRef idx="minor">
+            <a:schemeClr val="lt1"/>
+          </a:fontRef>
+        </p:style>
+        <p:txBody>
+          <a:bodyPr rtlCol="0" anchor="ctr"/>
+          <a:lstStyle/>
+          <a:p>
+            <a:pPr algn="ctr"/>
+          </a:p>
+        </p:txBody>
+      </p:sp>
+      <p:sp>
+        <p:nvSpPr>
+          <p:cNvPr id="17423" name="Rounded Rectangle 17422"/>
+          <p:cNvSpPr/>
+          <p:nvPr/>
+        </p:nvSpPr>
+        <p:spPr>
+          <a:xfrm>
+            <a:off x="8138160" y="3639312"/>
+            <a:ext cx="1664208" cy="1078992"/>
+          </a:xfrm>
+          <a:prstGeom prst="roundRect">
+            <a:avLst/>
+          </a:prstGeom>
+          <a:solidFill>
+            <a:srgbClr val="EEF3F9"/>
+          </a:solidFill>
+          <a:ln w="9525">
+            <a:solidFill>
+              <a:srgbClr val="C2D4E6"/>
+            </a:solidFill>
+          </a:ln>
+          <a:effectLst/>
+        </p:spPr>
+        <p:style>
+          <a:lnRef idx="1">
+            <a:schemeClr val="accent1"/>
+          </a:lnRef>
+          <a:fillRef idx="3">
+            <a:schemeClr val="accent1"/>
+          </a:fillRef>
+          <a:effectRef idx="2">
+            <a:schemeClr val="accent1"/>
+          </a:effectRef>
+          <a:fontRef idx="minor">
+            <a:schemeClr val="lt1"/>
+          </a:fontRef>
+        </p:style>
+        <p:txBody>
+          <a:bodyPr rtlCol="0" anchor="ctr" wrap="square" tIns="54864" bIns="54864"/>
+          <a:lstStyle/>
+          <a:p>
+            <a:pPr algn="ctr">
+              <a:lnSpc>
+                <a:spcPct val="88000"/>
+              </a:lnSpc>
+              <a:spcAft>
+                <a:spcPts val="100"/>
+              </a:spcAft>
+              <a:buNone/>
+            </a:pPr>
+            <a:r>
+              <a:rPr sz="850" b="1">
+                <a:solidFill>
+                  <a:srgbClr val="111B2A"/>
+                </a:solidFill>
+                <a:latin typeface="Calibri"/>
+              </a:rPr>
+              <a:t>Real browser, real backend</a:t>
+            </a:r>
+          </a:p>
+          <a:p>
+            <a:pPr algn="ctr">
+              <a:lnSpc>
+                <a:spcPct val="88000"/>
+              </a:lnSpc>
+              <a:spcAft>
+                <a:spcPts val="100"/>
+              </a:spcAft>
+              <a:buNone/>
+            </a:pPr>
+            <a:r>
+              <a:rPr sz="700" b="0">
+                <a:solidFill>
+                  <a:srgbClr val="4A5A70"/>
+                </a:solidFill>
+                <a:latin typeface="Calibri"/>
+              </a:rPr>
+              <a:t>five Playwright specs, including a restart for persistence</a:t>
+            </a:r>
+          </a:p>
+        </p:txBody>
+      </p:sp>
+      <p:sp>
+        <p:nvSpPr>
+          <p:cNvPr id="17424" name="Right Arrow 17423"/>
+          <p:cNvSpPr/>
+          <p:nvPr/>
+        </p:nvSpPr>
+        <p:spPr>
+          <a:xfrm>
+            <a:off x="9838944" y="4096512"/>
+            <a:ext cx="182880" cy="164592"/>
+          </a:xfrm>
+          <a:prstGeom prst="rightArrow">
+            <a:avLst/>
+          </a:prstGeom>
+          <a:solidFill>
+            <a:srgbClr val="4A5A70"/>
+          </a:solidFill>
+          <a:ln>
+            <a:noFill/>
+          </a:ln>
+          <a:effectLst/>
+        </p:spPr>
+        <p:style>
+          <a:lnRef idx="1">
+            <a:schemeClr val="accent1"/>
+          </a:lnRef>
+          <a:fillRef idx="3">
+            <a:schemeClr val="accent1"/>
+          </a:fillRef>
+          <a:effectRef idx="2">
+            <a:schemeClr val="accent1"/>
+          </a:effectRef>
+          <a:fontRef idx="minor">
+            <a:schemeClr val="lt1"/>
+          </a:fontRef>
+        </p:style>
+        <p:txBody>
+          <a:bodyPr rtlCol="0" anchor="ctr"/>
+          <a:lstStyle/>
+          <a:p>
+            <a:pPr algn="ctr"/>
+          </a:p>
+        </p:txBody>
+      </p:sp>
+      <p:sp>
+        <p:nvSpPr>
+          <p:cNvPr id="17425" name="Rounded Rectangle 17424"/>
+          <p:cNvSpPr/>
+          <p:nvPr/>
+        </p:nvSpPr>
+        <p:spPr>
+          <a:xfrm>
+            <a:off x="10040112" y="3639312"/>
+            <a:ext cx="1664208" cy="1078992"/>
+          </a:xfrm>
+          <a:prstGeom prst="roundRect">
+            <a:avLst/>
+          </a:prstGeom>
+          <a:solidFill>
+            <a:srgbClr val="EEF3F9"/>
+          </a:solidFill>
+          <a:ln w="9525">
+            <a:solidFill>
+              <a:srgbClr val="C2D4E6"/>
+            </a:solidFill>
+          </a:ln>
+          <a:effectLst/>
+        </p:spPr>
+        <p:style>
+          <a:lnRef idx="1">
+            <a:schemeClr val="accent1"/>
+          </a:lnRef>
+          <a:fillRef idx="3">
+            <a:schemeClr val="accent1"/>
+          </a:fillRef>
+          <a:effectRef idx="2">
+            <a:schemeClr val="accent1"/>
+          </a:effectRef>
+          <a:fontRef idx="minor">
+            <a:schemeClr val="lt1"/>
+          </a:fontRef>
+        </p:style>
+        <p:txBody>
+          <a:bodyPr rtlCol="0" anchor="ctr" wrap="square" tIns="54864" bIns="54864"/>
+          <a:lstStyle/>
+          <a:p>
+            <a:pPr algn="ctr">
+              <a:lnSpc>
+                <a:spcPct val="88000"/>
+              </a:lnSpc>
+              <a:spcAft>
+                <a:spcPts val="100"/>
+              </a:spcAft>
+              <a:buNone/>
+            </a:pPr>
+            <a:r>
+              <a:rPr sz="850" b="1">
+                <a:solidFill>
+                  <a:srgbClr val="111B2A"/>
+                </a:solidFill>
+                <a:latin typeface="Calibri"/>
+              </a:rPr>
+              <a:t>Report parity</a:t>
+            </a:r>
+          </a:p>
+          <a:p>
+            <a:pPr algn="ctr">
+              <a:lnSpc>
+                <a:spcPct val="88000"/>
+              </a:lnSpc>
+              <a:spcAft>
+                <a:spcPts val="100"/>
+              </a:spcAft>
+              <a:buNone/>
+            </a:pPr>
+            <a:r>
+              <a:rPr sz="700" b="0">
+                <a:solidFill>
+                  <a:srgbClr val="4A5A70"/>
+                </a:solidFill>
+                <a:latin typeface="Calibri"/>
+              </a:rPr>
+              <a:t>JSON, HTML and PDF asserted to agree, field by field</a:t>
+            </a:r>
+          </a:p>
+        </p:txBody>
+      </p:sp>
+      <p:sp>
+        <p:nvSpPr>
+          <p:cNvPr id="17426" name="Rounded Rectangle 17425"/>
+          <p:cNvSpPr/>
+          <p:nvPr/>
+        </p:nvSpPr>
+        <p:spPr>
+          <a:xfrm>
+            <a:off x="384048" y="5047488"/>
+            <a:ext cx="11430000" cy="731520"/>
+          </a:xfrm>
+          <a:prstGeom prst="roundRect">
+            <a:avLst/>
+          </a:prstGeom>
+          <a:solidFill>
+            <a:srgbClr val="EEF3F9"/>
+          </a:solidFill>
+          <a:ln w="9525">
+            <a:solidFill>
+              <a:srgbClr val="C2D4E6"/>
+            </a:solidFill>
+          </a:ln>
+          <a:effectLst/>
+        </p:spPr>
+        <p:style>
+          <a:lnRef idx="1">
+            <a:schemeClr val="accent1"/>
+          </a:lnRef>
+          <a:fillRef idx="3">
+            <a:schemeClr val="accent1"/>
+          </a:fillRef>
+          <a:effectRef idx="2">
+            <a:schemeClr val="accent1"/>
+          </a:effectRef>
+          <a:fontRef idx="minor">
+            <a:schemeClr val="lt1"/>
+          </a:fontRef>
+        </p:style>
+        <p:txBody>
+          <a:bodyPr rtlCol="0" anchor="t" wrap="square" tIns="54864" bIns="54864"/>
+          <a:lstStyle/>
+          <a:p>
+            <a:pPr algn="ctr">
+              <a:lnSpc>
+                <a:spcPct val="100000"/>
+              </a:lnSpc>
+              <a:spcAft>
+                <a:spcPts val="300"/>
+              </a:spcAft>
+              <a:buNone/>
+            </a:pPr>
+            <a:r>
+              <a:rPr sz="1000" b="1">
+                <a:solidFill>
+                  <a:srgbClr val="0B5FA5"/>
+                </a:solidFill>
+                <a:latin typeface="Calibri"/>
+              </a:rPr>
+              <a:t>Repository and demonstration</a:t>
+            </a:r>
+          </a:p>
+          <a:p>
+            <a:pPr>
+              <a:lnSpc>
+                <a:spcPct val="88000"/>
+              </a:lnSpc>
+              <a:spcAft>
                 <a:spcPts val="200"/>
               </a:spcAft>
             </a:pPr>
             <a:r>
-              <a:rPr sz="800" b="1">
+              <a:rPr sz="900" b="1">
                 <a:solidFill>
                   <a:srgbClr val="111B2A"/>
                 </a:solidFill>
@@ -12375,12 +14144,12 @@
               <a:t>Repository  </a:t>
             </a:r>
             <a:r>
-              <a:rPr sz="800" u="sng">
+              <a:rPr sz="900" u="sng">
                 <a:solidFill>
                   <a:srgbClr val="0B5FA5"/>
                 </a:solidFill>
                 <a:latin typeface="Calibri"/>
-                <a:hlinkClick r:id="rId6"/>
+                <a:hlinkClick r:id="rId4"/>
               </a:rPr>
               <a:t>https://github.com/sgtsujith141-wq/securemailscope</a:t>
             </a:r>
@@ -12395,22 +14164,22 @@
               </a:spcAft>
             </a:pPr>
             <a:r>
-              <a:rPr sz="800" b="1">
+              <a:rPr sz="900" b="1">
                 <a:solidFill>
                   <a:srgbClr val="111B2A"/>
                 </a:solidFill>
                 <a:latin typeface="Calibri"/>
               </a:rPr>
-              <a:t>Demonstration video  </a:t>
-            </a:r>
-            <a:r>
-              <a:rPr sz="800" i="1">
+              <a:t>Demonstration  </a:t>
+            </a:r>
+            <a:r>
+              <a:rPr sz="900" i="1">
                 <a:solidFill>
                   <a:srgbClr val="4A5A70"/>
                 </a:solidFill>
                 <a:latin typeface="Calibri"/>
               </a:rPr>
-              <a:t>included in the submission package — public URL reserved, not yet issued</a:t>
+              <a:t>Demo video included in submission package.</a:t>
             </a:r>
           </a:p>
         </p:txBody>

--- a/submission/final/SecureMailScope-SIH26159-Zero-Day.pptx
+++ b/submission/final/SecureMailScope-SIH26159-Zero-Day.pptx
@@ -5632,8 +5632,8 @@
         </p:nvSpPr>
         <p:spPr>
           <a:xfrm>
-            <a:off x="331286" y="2076450"/>
-            <a:ext cx="5924550" cy="4703019"/>
+            <a:off x="566928" y="3163824"/>
+            <a:ext cx="6766560" cy="2834640"/>
           </a:xfrm>
           <a:prstGeom prst="rect">
             <a:avLst/>
@@ -5648,14 +5648,15 @@
           <a:p>
             <a:pPr>
               <a:lnSpc>
-                <a:spcPct val="122000"/>
+                <a:spcPct val="130000"/>
               </a:lnSpc>
               <a:spcAft>
                 <a:spcPts val="300"/>
               </a:spcAft>
-            </a:pPr>
-            <a:r>
-              <a:rPr sz="1300" b="0">
+              <a:buNone/>
+            </a:pPr>
+            <a:r>
+              <a:rPr sz="1500" b="0">
                 <a:solidFill>
                   <a:srgbClr val="111B2A"/>
                 </a:solidFill>
@@ -5668,14 +5669,15 @@
           <a:p>
             <a:pPr>
               <a:lnSpc>
-                <a:spcPct val="122000"/>
+                <a:spcPct val="130000"/>
               </a:lnSpc>
               <a:spcAft>
                 <a:spcPts val="300"/>
               </a:spcAft>
-            </a:pPr>
-            <a:r>
-              <a:rPr sz="1300" b="0">
+              <a:buNone/>
+            </a:pPr>
+            <a:r>
+              <a:rPr sz="1500" b="0">
                 <a:solidFill>
                   <a:srgbClr val="111B2A"/>
                 </a:solidFill>
@@ -5687,14 +5689,15 @@
           <a:p>
             <a:pPr>
               <a:lnSpc>
-                <a:spcPct val="122000"/>
+                <a:spcPct val="130000"/>
               </a:lnSpc>
               <a:spcAft>
                 <a:spcPts val="300"/>
               </a:spcAft>
-            </a:pPr>
-            <a:r>
-              <a:rPr sz="1300" b="0">
+              <a:buNone/>
+            </a:pPr>
+            <a:r>
+              <a:rPr sz="1500" b="0">
                 <a:solidFill>
                   <a:srgbClr val="111B2A"/>
                 </a:solidFill>
@@ -5706,14 +5709,15 @@
           <a:p>
             <a:pPr>
               <a:lnSpc>
-                <a:spcPct val="122000"/>
+                <a:spcPct val="130000"/>
               </a:lnSpc>
               <a:spcAft>
                 <a:spcPts val="300"/>
               </a:spcAft>
-            </a:pPr>
-            <a:r>
-              <a:rPr sz="1300" b="0">
+              <a:buNone/>
+            </a:pPr>
+            <a:r>
+              <a:rPr sz="1500" b="0">
                 <a:solidFill>
                   <a:srgbClr val="111B2A"/>
                 </a:solidFill>
@@ -5725,14 +5729,15 @@
           <a:p>
             <a:pPr>
               <a:lnSpc>
-                <a:spcPct val="122000"/>
+                <a:spcPct val="130000"/>
               </a:lnSpc>
               <a:spcAft>
                 <a:spcPts val="300"/>
               </a:spcAft>
-            </a:pPr>
-            <a:r>
-              <a:rPr sz="1300" b="0">
+              <a:buNone/>
+            </a:pPr>
+            <a:r>
+              <a:rPr sz="1500" b="0">
                 <a:solidFill>
                   <a:srgbClr val="111B2A"/>
                 </a:solidFill>
@@ -5744,14 +5749,15 @@
           <a:p>
             <a:pPr>
               <a:lnSpc>
-                <a:spcPct val="122000"/>
+                <a:spcPct val="130000"/>
               </a:lnSpc>
               <a:spcAft>
                 <a:spcPts val="300"/>
               </a:spcAft>
-            </a:pPr>
-            <a:r>
-              <a:rPr sz="1300" b="0">
+              <a:buNone/>
+            </a:pPr>
+            <a:r>
+              <a:rPr sz="1500" b="0">
                 <a:solidFill>
                   <a:srgbClr val="111B2A"/>
                 </a:solidFill>
@@ -5763,14 +5769,15 @@
           <a:p>
             <a:pPr>
               <a:lnSpc>
-                <a:spcPct val="122000"/>
+                <a:spcPct val="130000"/>
               </a:lnSpc>
               <a:spcAft>
                 <a:spcPts val="300"/>
               </a:spcAft>
-            </a:pPr>
-            <a:r>
-              <a:rPr sz="1300" b="0">
+              <a:buNone/>
+            </a:pPr>
+            <a:r>
+              <a:rPr sz="1500" b="0">
                 <a:solidFill>
                   <a:srgbClr val="111B2A"/>
                 </a:solidFill>
@@ -5811,6 +5818,113 @@
           </a:prstGeom>
         </p:spPr>
       </p:pic>
+      <p:sp>
+        <p:nvSpPr>
+          <p:cNvPr id="38" name="TextBox 37"/>
+          <p:cNvSpPr txBox="1"/>
+          <p:nvPr/>
+        </p:nvSpPr>
+        <p:spPr>
+          <a:xfrm>
+            <a:off x="566928" y="1938528"/>
+            <a:ext cx="6766560" cy="1005840"/>
+          </a:xfrm>
+          <a:prstGeom prst="rect">
+            <a:avLst/>
+          </a:prstGeom>
+          <a:noFill/>
+        </p:spPr>
+        <p:txBody>
+          <a:bodyPr wrap="square">
+            <a:spAutoFit/>
+          </a:bodyPr>
+          <a:lstStyle/>
+          <a:p>
+            <a:pPr>
+              <a:lnSpc>
+                <a:spcPct val="104000"/>
+              </a:lnSpc>
+              <a:spcAft>
+                <a:spcPts val="300"/>
+              </a:spcAft>
+              <a:buNone/>
+            </a:pPr>
+            <a:r>
+              <a:rPr sz="4000" b="1">
+                <a:solidFill>
+                  <a:srgbClr val="0B5FA5"/>
+                </a:solidFill>
+                <a:latin typeface="Calibri"/>
+              </a:rPr>
+              <a:t>SecureMailScope</a:t>
+            </a:r>
+          </a:p>
+          <a:p>
+            <a:pPr>
+              <a:lnSpc>
+                <a:spcPct val="104000"/>
+              </a:lnSpc>
+              <a:spcAft>
+                <a:spcPts val="300"/>
+              </a:spcAft>
+              <a:buNone/>
+            </a:pPr>
+            <a:r>
+              <a:rPr sz="1400" b="0">
+                <a:solidFill>
+                  <a:srgbClr val="1F2C3F"/>
+                </a:solidFill>
+                <a:latin typeface="Calibri"/>
+              </a:rPr>
+              <a:t>AI-Assisted Cryptographic Security Posture Assessment for Secure Email Communications</a:t>
+            </a:r>
+          </a:p>
+        </p:txBody>
+      </p:sp>
+      <p:sp>
+        <p:nvSpPr>
+          <p:cNvPr id="39" name="Rectangle 38"/>
+          <p:cNvSpPr/>
+          <p:nvPr/>
+        </p:nvSpPr>
+        <p:spPr>
+          <a:xfrm>
+            <a:off x="566928" y="1847088"/>
+            <a:ext cx="1188720" cy="45720"/>
+          </a:xfrm>
+          <a:prstGeom prst="rect">
+            <a:avLst/>
+          </a:prstGeom>
+          <a:solidFill>
+            <a:srgbClr val="0B5FA5"/>
+          </a:solidFill>
+          <a:ln>
+            <a:noFill/>
+          </a:ln>
+          <a:effectLst/>
+        </p:spPr>
+        <p:style>
+          <a:lnRef idx="1">
+            <a:schemeClr val="accent1"/>
+          </a:lnRef>
+          <a:fillRef idx="3">
+            <a:schemeClr val="accent1"/>
+          </a:fillRef>
+          <a:effectRef idx="2">
+            <a:schemeClr val="accent1"/>
+          </a:effectRef>
+          <a:fontRef idx="minor">
+            <a:schemeClr val="lt1"/>
+          </a:fontRef>
+        </p:style>
+        <p:txBody>
+          <a:bodyPr rtlCol="0" anchor="ctr"/>
+          <a:lstStyle/>
+          <a:p>
+            <a:pPr algn="ctr"/>
+          </a:p>
+        </p:txBody>
+      </p:sp>
     </p:spTree>
   </p:cSld>
   <p:clrMapOvr>
@@ -5951,8 +6065,8 @@
         </p:nvSpPr>
         <p:spPr bwMode="auto">
           <a:xfrm>
-            <a:off x="384048" y="1060704"/>
-            <a:ext cx="11430000" cy="658368"/>
+            <a:off x="384048" y="969264"/>
+            <a:ext cx="11430000" cy="566928"/>
           </a:xfrm>
           <a:prstGeom prst="rect">
             <a:avLst/>
@@ -5982,7 +6096,7 @@
               <a:buNone/>
             </a:pPr>
             <a:r>
-              <a:rPr sz="1500" b="1">
+              <a:rPr sz="2000" b="1">
                 <a:solidFill>
                   <a:srgbClr val="0B5FA5"/>
                 </a:solidFill>
@@ -5997,26 +6111,6 @@
               <a:latin typeface="Arial" pitchFamily="34" charset="0"/>
               <a:cs typeface="Arial" pitchFamily="34" charset="0"/>
             </a:endParaRPr>
-          </a:p>
-          <a:p>
-            <a:pPr>
-              <a:lnSpc>
-                <a:spcPct val="100000"/>
-              </a:lnSpc>
-              <a:spcAft>
-                <a:spcPts val="300"/>
-              </a:spcAft>
-              <a:buNone/>
-            </a:pPr>
-            <a:r>
-              <a:rPr sz="1050" b="0">
-                <a:solidFill>
-                  <a:srgbClr val="4A5A70"/>
-                </a:solidFill>
-                <a:latin typeface="Calibri"/>
-              </a:rPr>
-              <a:t>Every conclusion is traceable to the packets that establish it — and where a capture cannot show something, it says so.</a:t>
-            </a:r>
           </a:p>
         </p:txBody>
       </p:sp>
@@ -6180,8 +6274,8 @@
         </p:nvSpPr>
         <p:spPr>
           <a:xfrm>
-            <a:off x="384048" y="1792224"/>
-            <a:ext cx="1700784" cy="530352"/>
+            <a:off x="384048" y="1664208"/>
+            <a:ext cx="1700784" cy="713232"/>
           </a:xfrm>
           <a:prstGeom prst="roundRect">
             <a:avLst/>
@@ -6211,7 +6305,7 @@
           </a:fontRef>
         </p:style>
         <p:txBody>
-          <a:bodyPr rtlCol="0" anchor="t" wrap="square" tIns="54864" bIns="54864"/>
+          <a:bodyPr rtlCol="0" anchor="ctr" wrap="square" tIns="54864" bIns="54864"/>
           <a:lstStyle/>
           <a:p>
             <a:pPr algn="ctr">
@@ -6219,17 +6313,38 @@
                 <a:spcPct val="88000"/>
               </a:lnSpc>
               <a:spcAft>
-                <a:spcPts val="300"/>
-              </a:spcAft>
-            </a:pPr>
-            <a:r>
-              <a:rPr sz="950" b="1">
+                <a:spcPts val="100"/>
+              </a:spcAft>
+              <a:buNone/>
+            </a:pPr>
+            <a:r>
+              <a:rPr sz="1100" b="1">
                 <a:solidFill>
                   <a:srgbClr val="111B2A"/>
                 </a:solidFill>
                 <a:latin typeface="Calibri"/>
               </a:rPr>
-              <a:t>PCAP</a:t>
+              <a:t>PCAP / PCAPNG</a:t>
+            </a:r>
+          </a:p>
+          <a:p>
+            <a:pPr algn="ctr">
+              <a:lnSpc>
+                <a:spcPct val="88000"/>
+              </a:lnSpc>
+              <a:spcAft>
+                <a:spcPts val="100"/>
+              </a:spcAft>
+              <a:buNone/>
+            </a:pPr>
+            <a:r>
+              <a:rPr sz="850" b="0">
+                <a:solidFill>
+                  <a:srgbClr val="4A5A70"/>
+                </a:solidFill>
+                <a:latin typeface="Calibri"/>
+              </a:rPr>
+              <a:t>authorised capture</a:t>
             </a:r>
           </a:p>
         </p:txBody>
@@ -6242,8 +6357,8 @@
         </p:nvSpPr>
         <p:spPr>
           <a:xfrm>
-            <a:off x="2103120" y="1975104"/>
-            <a:ext cx="201168" cy="164592"/>
+            <a:off x="2103120" y="1938528"/>
+            <a:ext cx="182880" cy="164592"/>
           </a:xfrm>
           <a:prstGeom prst="rightArrow">
             <a:avLst/>
@@ -6286,8 +6401,8 @@
         </p:nvSpPr>
         <p:spPr>
           <a:xfrm>
-            <a:off x="2340864" y="1792224"/>
-            <a:ext cx="1700784" cy="530352"/>
+            <a:off x="2313432" y="1664208"/>
+            <a:ext cx="1700784" cy="713232"/>
           </a:xfrm>
           <a:prstGeom prst="roundRect">
             <a:avLst/>
@@ -6317,7 +6432,7 @@
           </a:fontRef>
         </p:style>
         <p:txBody>
-          <a:bodyPr rtlCol="0" anchor="t" wrap="square" tIns="54864" bIns="54864"/>
+          <a:bodyPr rtlCol="0" anchor="ctr" wrap="square" tIns="54864" bIns="54864"/>
           <a:lstStyle/>
           <a:p>
             <a:pPr algn="ctr">
@@ -6325,18 +6440,38 @@
                 <a:spcPct val="88000"/>
               </a:lnSpc>
               <a:spcAft>
-                <a:spcPts val="300"/>
-              </a:spcAft>
-            </a:pPr>
-            <a:r>
-              <a:rPr sz="950" b="1">
+                <a:spcPts val="100"/>
+              </a:spcAft>
+              <a:buNone/>
+            </a:pPr>
+            <a:r>
+              <a:rPr sz="1100" b="1">
                 <a:solidFill>
                   <a:srgbClr val="111B2A"/>
                 </a:solidFill>
                 <a:latin typeface="Calibri"/>
               </a:rPr>
-              <a:t>TCP
-reconstruction</a:t>
+              <a:t>TCP RECONSTRUCTION</a:t>
+            </a:r>
+          </a:p>
+          <a:p>
+            <a:pPr algn="ctr">
+              <a:lnSpc>
+                <a:spcPct val="88000"/>
+              </a:lnSpc>
+              <a:spcAft>
+                <a:spcPts val="100"/>
+              </a:spcAft>
+              <a:buNone/>
+            </a:pPr>
+            <a:r>
+              <a:rPr sz="850" b="0">
+                <a:solidFill>
+                  <a:srgbClr val="4A5A70"/>
+                </a:solidFill>
+                <a:latin typeface="Calibri"/>
+              </a:rPr>
+              <a:t>sessions rebuilt</a:t>
             </a:r>
           </a:p>
         </p:txBody>
@@ -6349,8 +6484,8 @@
         </p:nvSpPr>
         <p:spPr>
           <a:xfrm>
-            <a:off x="4059936" y="1975104"/>
-            <a:ext cx="201168" cy="164592"/>
+            <a:off x="4032504" y="1938528"/>
+            <a:ext cx="182880" cy="164592"/>
           </a:xfrm>
           <a:prstGeom prst="rightArrow">
             <a:avLst/>
@@ -6393,8 +6528,8 @@
         </p:nvSpPr>
         <p:spPr>
           <a:xfrm>
-            <a:off x="4297680" y="1792224"/>
-            <a:ext cx="1700784" cy="530352"/>
+            <a:off x="4242816" y="1664208"/>
+            <a:ext cx="1700784" cy="713232"/>
           </a:xfrm>
           <a:prstGeom prst="roundRect">
             <a:avLst/>
@@ -6424,7 +6559,7 @@
           </a:fontRef>
         </p:style>
         <p:txBody>
-          <a:bodyPr rtlCol="0" anchor="t" wrap="square" tIns="54864" bIns="54864"/>
+          <a:bodyPr rtlCol="0" anchor="ctr" wrap="square" tIns="54864" bIns="54864"/>
           <a:lstStyle/>
           <a:p>
             <a:pPr algn="ctr">
@@ -6432,18 +6567,38 @@
                 <a:spcPct val="88000"/>
               </a:lnSpc>
               <a:spcAft>
-                <a:spcPts val="300"/>
-              </a:spcAft>
-            </a:pPr>
-            <a:r>
-              <a:rPr sz="950" b="1">
+                <a:spcPts val="100"/>
+              </a:spcAft>
+              <a:buNone/>
+            </a:pPr>
+            <a:r>
+              <a:rPr sz="1100" b="1">
                 <a:solidFill>
                   <a:srgbClr val="111B2A"/>
                 </a:solidFill>
                 <a:latin typeface="Calibri"/>
               </a:rPr>
-              <a:t>SMTP / IMAP
-POP3</a:t>
+              <a:t>SMTP · IMAP · POP3</a:t>
+            </a:r>
+          </a:p>
+          <a:p>
+            <a:pPr algn="ctr">
+              <a:lnSpc>
+                <a:spcPct val="88000"/>
+              </a:lnSpc>
+              <a:spcAft>
+                <a:spcPts val="100"/>
+              </a:spcAft>
+              <a:buNone/>
+            </a:pPr>
+            <a:r>
+              <a:rPr sz="850" b="0">
+                <a:solidFill>
+                  <a:srgbClr val="4A5A70"/>
+                </a:solidFill>
+                <a:latin typeface="Calibri"/>
+              </a:rPr>
+              <a:t>from the dialogue</a:t>
             </a:r>
           </a:p>
         </p:txBody>
@@ -6456,8 +6611,8 @@
         </p:nvSpPr>
         <p:spPr>
           <a:xfrm>
-            <a:off x="6016752" y="1975104"/>
-            <a:ext cx="201168" cy="164592"/>
+            <a:off x="5961888" y="1938528"/>
+            <a:ext cx="182880" cy="164592"/>
           </a:xfrm>
           <a:prstGeom prst="rightArrow">
             <a:avLst/>
@@ -6500,8 +6655,8 @@
         </p:nvSpPr>
         <p:spPr>
           <a:xfrm>
-            <a:off x="6254496" y="1792224"/>
-            <a:ext cx="1700784" cy="530352"/>
+            <a:off x="6172200" y="1664208"/>
+            <a:ext cx="1700784" cy="713232"/>
           </a:xfrm>
           <a:prstGeom prst="roundRect">
             <a:avLst/>
@@ -6531,7 +6686,7 @@
           </a:fontRef>
         </p:style>
         <p:txBody>
-          <a:bodyPr rtlCol="0" anchor="t" wrap="square" tIns="54864" bIns="54864"/>
+          <a:bodyPr rtlCol="0" anchor="ctr" wrap="square" tIns="54864" bIns="54864"/>
           <a:lstStyle/>
           <a:p>
             <a:pPr algn="ctr">
@@ -6539,18 +6694,38 @@
                 <a:spcPct val="88000"/>
               </a:lnSpc>
               <a:spcAft>
-                <a:spcPts val="300"/>
-              </a:spcAft>
-            </a:pPr>
-            <a:r>
-              <a:rPr sz="950" b="1">
+                <a:spcPts val="100"/>
+              </a:spcAft>
+              <a:buNone/>
+            </a:pPr>
+            <a:r>
+              <a:rPr sz="1100" b="1">
                 <a:solidFill>
                   <a:srgbClr val="111B2A"/>
                 </a:solidFill>
                 <a:latin typeface="Calibri"/>
               </a:rPr>
-              <a:t>STARTTLS
-TLS</a:t>
+              <a:t>STARTTLS / TLS</a:t>
+            </a:r>
+          </a:p>
+          <a:p>
+            <a:pPr algn="ctr">
+              <a:lnSpc>
+                <a:spcPct val="88000"/>
+              </a:lnSpc>
+              <a:spcAft>
+                <a:spcPts val="100"/>
+              </a:spcAft>
+              <a:buNone/>
+            </a:pPr>
+            <a:r>
+              <a:rPr sz="850" b="0">
+                <a:solidFill>
+                  <a:srgbClr val="4A5A70"/>
+                </a:solidFill>
+                <a:latin typeface="Calibri"/>
+              </a:rPr>
+              <a:t>upgrade and handshake</a:t>
             </a:r>
           </a:p>
         </p:txBody>
@@ -6563,8 +6738,8 @@
         </p:nvSpPr>
         <p:spPr>
           <a:xfrm>
-            <a:off x="7973568" y="1975104"/>
-            <a:ext cx="201168" cy="164592"/>
+            <a:off x="7891272" y="1938528"/>
+            <a:ext cx="182880" cy="164592"/>
           </a:xfrm>
           <a:prstGeom prst="rightArrow">
             <a:avLst/>
@@ -6607,8 +6782,8 @@
         </p:nvSpPr>
         <p:spPr>
           <a:xfrm>
-            <a:off x="8211312" y="1792224"/>
-            <a:ext cx="1700784" cy="530352"/>
+            <a:off x="8101584" y="1664208"/>
+            <a:ext cx="1700784" cy="713232"/>
           </a:xfrm>
           <a:prstGeom prst="roundRect">
             <a:avLst/>
@@ -6638,7 +6813,7 @@
           </a:fontRef>
         </p:style>
         <p:txBody>
-          <a:bodyPr rtlCol="0" anchor="t" wrap="square" tIns="54864" bIns="54864"/>
+          <a:bodyPr rtlCol="0" anchor="ctr" wrap="square" tIns="54864" bIns="54864"/>
           <a:lstStyle/>
           <a:p>
             <a:pPr algn="ctr">
@@ -6646,18 +6821,38 @@
                 <a:spcPct val="88000"/>
               </a:lnSpc>
               <a:spcAft>
-                <a:spcPts val="300"/>
-              </a:spcAft>
-            </a:pPr>
-            <a:r>
-              <a:rPr sz="950" b="1">
+                <a:spcPts val="100"/>
+              </a:spcAft>
+              <a:buNone/>
+            </a:pPr>
+            <a:r>
+              <a:rPr sz="1100" b="1">
                 <a:solidFill>
                   <a:srgbClr val="111B2A"/>
                 </a:solidFill>
                 <a:latin typeface="Calibri"/>
               </a:rPr>
-              <a:t>Cryptographic
-evidence</a:t>
+              <a:t>CRYPTOGRAPHIC EVIDENCE</a:t>
+            </a:r>
+          </a:p>
+          <a:p>
+            <a:pPr algn="ctr">
+              <a:lnSpc>
+                <a:spcPct val="88000"/>
+              </a:lnSpc>
+              <a:spcAft>
+                <a:spcPts val="100"/>
+              </a:spcAft>
+              <a:buNone/>
+            </a:pPr>
+            <a:r>
+              <a:rPr sz="850" b="0">
+                <a:solidFill>
+                  <a:srgbClr val="4A5A70"/>
+                </a:solidFill>
+                <a:latin typeface="Calibri"/>
+              </a:rPr>
+              <a:t>versions, suites, certificates</a:t>
             </a:r>
           </a:p>
         </p:txBody>
@@ -6670,8 +6865,8 @@
         </p:nvSpPr>
         <p:spPr>
           <a:xfrm>
-            <a:off x="9930384" y="1975104"/>
-            <a:ext cx="201168" cy="164592"/>
+            <a:off x="9820656" y="1938528"/>
+            <a:ext cx="182880" cy="164592"/>
           </a:xfrm>
           <a:prstGeom prst="rightArrow">
             <a:avLst/>
@@ -6714,8 +6909,8 @@
         </p:nvSpPr>
         <p:spPr>
           <a:xfrm>
-            <a:off x="10168128" y="1792224"/>
-            <a:ext cx="1700784" cy="530352"/>
+            <a:off x="10030968" y="1664208"/>
+            <a:ext cx="1700784" cy="713232"/>
           </a:xfrm>
           <a:prstGeom prst="roundRect">
             <a:avLst/>
@@ -6745,7 +6940,7 @@
           </a:fontRef>
         </p:style>
         <p:txBody>
-          <a:bodyPr rtlCol="0" anchor="t" wrap="square" tIns="54864" bIns="54864"/>
+          <a:bodyPr rtlCol="0" anchor="ctr" wrap="square" tIns="54864" bIns="54864"/>
           <a:lstStyle/>
           <a:p>
             <a:pPr algn="ctr">
@@ -6753,25 +6948,45 @@
                 <a:spcPct val="88000"/>
               </a:lnSpc>
               <a:spcAft>
-                <a:spcPts val="300"/>
-              </a:spcAft>
-            </a:pPr>
-            <a:r>
-              <a:rPr sz="950" b="1">
+                <a:spcPts val="100"/>
+              </a:spcAft>
+              <a:buNone/>
+            </a:pPr>
+            <a:r>
+              <a:rPr sz="1100" b="1">
                 <a:solidFill>
                   <a:srgbClr val="111B2A"/>
                 </a:solidFill>
                 <a:latin typeface="Calibri"/>
               </a:rPr>
-              <a:t>Risk +
-remediation</a:t>
+              <a:t>RISK + REMEDIATION</a:t>
+            </a:r>
+          </a:p>
+          <a:p>
+            <a:pPr algn="ctr">
+              <a:lnSpc>
+                <a:spcPct val="88000"/>
+              </a:lnSpc>
+              <a:spcAft>
+                <a:spcPts val="100"/>
+              </a:spcAft>
+              <a:buNone/>
+            </a:pPr>
+            <a:r>
+              <a:rPr sz="850" b="0">
+                <a:solidFill>
+                  <a:srgbClr val="4A5A70"/>
+                </a:solidFill>
+                <a:latin typeface="Calibri"/>
+              </a:rPr>
+              <a:t>ranked, with the fix</a:t>
             </a:r>
           </a:p>
         </p:txBody>
       </p:sp>
       <p:pic>
         <p:nvPicPr>
-          <p:cNvPr id="15374" name="Picture 15373" descr="02-overview.png"/>
+          <p:cNvPr id="15374" name="Picture 15373" descr="crop-0.11-0.022-1.0-0.2-02-overview.png"/>
           <p:cNvPicPr>
             <a:picLocks noChangeAspect="1"/>
           </p:cNvPicPr>
@@ -6785,8 +7000,8 @@
         </p:blipFill>
         <p:spPr>
           <a:xfrm>
-            <a:off x="384048" y="2523744"/>
-            <a:ext cx="5989320" cy="3368992"/>
+            <a:off x="384048" y="2615184"/>
+            <a:ext cx="7461504" cy="2589041"/>
           </a:xfrm>
           <a:prstGeom prst="rect">
             <a:avLst/>
@@ -6801,8 +7016,8 @@
         </p:nvSpPr>
         <p:spPr>
           <a:xfrm>
-            <a:off x="384048" y="2523744"/>
-            <a:ext cx="5989320" cy="3368992"/>
+            <a:off x="384048" y="2615184"/>
+            <a:ext cx="7461504" cy="2589041"/>
           </a:xfrm>
           <a:prstGeom prst="rect">
             <a:avLst/>
@@ -6845,8 +7060,8 @@
         </p:nvSpPr>
         <p:spPr>
           <a:xfrm>
-            <a:off x="384048" y="5911024"/>
-            <a:ext cx="5989320" cy="219456"/>
+            <a:off x="384048" y="5240801"/>
+            <a:ext cx="7461504" cy="256032"/>
           </a:xfrm>
           <a:prstGeom prst="rect">
             <a:avLst/>
@@ -6866,15 +7081,16 @@
               <a:spcAft>
                 <a:spcPts val="300"/>
               </a:spcAft>
-            </a:pPr>
-            <a:r>
-              <a:rPr sz="800" b="0">
+              <a:buNone/>
+            </a:pPr>
+            <a:r>
+              <a:rPr sz="1100" b="0">
                 <a:solidFill>
                   <a:srgbClr val="4A5A70"/>
                 </a:solidFill>
                 <a:latin typeface="Calibri"/>
               </a:rPr>
-              <a:t>The investigation overview, on 9 synthetic captures. Actual product output.</a:t>
+              <a:t>The investigation opens on its conclusion. Actual product output.</a:t>
             </a:r>
           </a:p>
         </p:txBody>
@@ -6887,8 +7103,8 @@
         </p:nvSpPr>
         <p:spPr>
           <a:xfrm>
-            <a:off x="6601968" y="2523744"/>
-            <a:ext cx="5212080" cy="1115568"/>
+            <a:off x="8065008" y="2615184"/>
+            <a:ext cx="3749039" cy="932688"/>
           </a:xfrm>
           <a:prstGeom prst="roundRect">
             <a:avLst/>
@@ -6923,39 +7139,41 @@
           <a:p>
             <a:pPr algn="ctr">
               <a:lnSpc>
-                <a:spcPct val="92000"/>
+                <a:spcPct val="98000"/>
               </a:lnSpc>
               <a:spcAft>
                 <a:spcPts val="300"/>
               </a:spcAft>
-            </a:pPr>
-            <a:r>
-              <a:rPr sz="1050" b="1">
+              <a:buNone/>
+            </a:pPr>
+            <a:r>
+              <a:rPr sz="1250" b="1">
                 <a:solidFill>
                   <a:srgbClr val="0B5FA5"/>
                 </a:solidFill>
                 <a:latin typeface="Calibri"/>
               </a:rPr>
-              <a:t>What it does</a:t>
+              <a:t>PASSIVE BY DESIGN</a:t>
             </a:r>
           </a:p>
           <a:p>
             <a:pPr>
               <a:lnSpc>
-                <a:spcPct val="92000"/>
+                <a:spcPct val="98000"/>
               </a:lnSpc>
               <a:spcAft>
                 <a:spcPts val="300"/>
               </a:spcAft>
-            </a:pPr>
-            <a:r>
-              <a:rPr sz="900" b="0">
+              <a:buNone/>
+            </a:pPr>
+            <a:r>
+              <a:rPr sz="1100" b="0">
                 <a:solidFill>
                   <a:srgbClr val="1F2C3F"/>
                 </a:solidFill>
                 <a:latin typeface="Calibri"/>
               </a:rPr>
-              <a:t>Reads authorized PCAP/PCAPNG, reconstructs TCP sessions, identifies the email protocol from the dialogue rather than the port, reconstructs the TLS handshake, extracts certificate evidence where it is observable, applies 25 policy rules and scores the result.</a:t>
+              <a:t>Existing captures only. No live probe, no connection back to the mail server, nothing leaves the machine.</a:t>
             </a:r>
           </a:p>
         </p:txBody>
@@ -6968,8 +7186,8 @@
         </p:nvSpPr>
         <p:spPr>
           <a:xfrm>
-            <a:off x="6601968" y="3730752"/>
-            <a:ext cx="5212080" cy="1115568"/>
+            <a:off x="8065008" y="3639312"/>
+            <a:ext cx="3749039" cy="932688"/>
           </a:xfrm>
           <a:prstGeom prst="roundRect">
             <a:avLst/>
@@ -7004,39 +7222,41 @@
           <a:p>
             <a:pPr algn="ctr">
               <a:lnSpc>
-                <a:spcPct val="92000"/>
+                <a:spcPct val="98000"/>
               </a:lnSpc>
               <a:spcAft>
                 <a:spcPts val="300"/>
               </a:spcAft>
-            </a:pPr>
-            <a:r>
-              <a:rPr sz="1050" b="1">
+              <a:buNone/>
+            </a:pPr>
+            <a:r>
+              <a:rPr sz="1250" b="1">
                 <a:solidFill>
                   <a:srgbClr val="0B5FA5"/>
                 </a:solidFill>
                 <a:latin typeface="Calibri"/>
               </a:rPr>
-              <a:t>How it addresses SIH26159</a:t>
+              <a:t>EVIDENCE-FIRST</a:t>
             </a:r>
           </a:p>
           <a:p>
             <a:pPr>
               <a:lnSpc>
-                <a:spcPct val="92000"/>
+                <a:spcPct val="98000"/>
               </a:lnSpc>
               <a:spcAft>
                 <a:spcPts val="300"/>
               </a:spcAft>
-            </a:pPr>
-            <a:r>
-              <a:rPr sz="900" b="0">
+              <a:buNone/>
+            </a:pPr>
+            <a:r>
+              <a:rPr sz="1100" b="0">
                 <a:solidFill>
                   <a:srgbClr val="1F2C3F"/>
                 </a:solidFill>
                 <a:latin typeface="Calibri"/>
               </a:rPr>
-              <a:t>The organisation already holds the captures. No probe, no scan, no credential and no change to a production mail server — which also means an authorised investigator with no access to the host can still assess how it protected traffic.</a:t>
+              <a:t>Every finding traces back to the packets that establish it — number, timestamp and stream offset.</a:t>
             </a:r>
           </a:p>
         </p:txBody>
@@ -7049,8 +7269,8 @@
         </p:nvSpPr>
         <p:spPr>
           <a:xfrm>
-            <a:off x="6601968" y="4937760"/>
-            <a:ext cx="5212080" cy="1115568"/>
+            <a:off x="8065008" y="4663440"/>
+            <a:ext cx="3749039" cy="932688"/>
           </a:xfrm>
           <a:prstGeom prst="roundRect">
             <a:avLst/>
@@ -7085,39 +7305,41 @@
           <a:p>
             <a:pPr algn="ctr">
               <a:lnSpc>
-                <a:spcPct val="92000"/>
+                <a:spcPct val="98000"/>
               </a:lnSpc>
               <a:spcAft>
                 <a:spcPts val="300"/>
               </a:spcAft>
-            </a:pPr>
-            <a:r>
-              <a:rPr sz="1050" b="1">
+              <a:buNone/>
+            </a:pPr>
+            <a:r>
+              <a:rPr sz="1250" b="1">
                 <a:solidFill>
                   <a:srgbClr val="0B5FA5"/>
                 </a:solidFill>
                 <a:latin typeface="Calibri"/>
               </a:rPr>
-              <a:t>What makes it different</a:t>
+              <a:t>CROSS-CAPTURE INTELLIGENCE</a:t>
             </a:r>
           </a:p>
           <a:p>
             <a:pPr>
               <a:lnSpc>
-                <a:spcPct val="92000"/>
+                <a:spcPct val="98000"/>
               </a:lnSpc>
               <a:spcAft>
                 <a:spcPts val="300"/>
               </a:spcAft>
-            </a:pPr>
-            <a:r>
-              <a:rPr sz="900" b="0">
+              <a:buNone/>
+            </a:pPr>
+            <a:r>
+              <a:rPr sz="1100" b="0">
                 <a:solidFill>
                   <a:srgbClr val="1F2C3F"/>
                 </a:solidFill>
                 <a:latin typeface="Calibri"/>
               </a:rPr>
-              <a:t>Packet-level provenance on every finding · cryptographic DNA and drift across captures · cross-session correlation · explainable scoring with the arithmetic shown · fully local and offline · stated limits instead of silent gaps</a:t>
+              <a:t>Cryptographic fingerprints, configuration drift and correlation across captures of the same service.</a:t>
             </a:r>
           </a:p>
         </p:txBody>
@@ -7248,8 +7470,8 @@
         </p:nvSpPr>
         <p:spPr bwMode="auto">
           <a:xfrm>
-            <a:off x="384048" y="969264"/>
-            <a:ext cx="11430000" cy="310896"/>
+            <a:off x="384048" y="950976"/>
+            <a:ext cx="11430000" cy="329184"/>
           </a:xfrm>
           <a:prstGeom prst="rect">
             <a:avLst/>
@@ -7279,13 +7501,13 @@
               <a:buNone/>
             </a:pPr>
             <a:r>
-              <a:rPr sz="1000" b="0">
+              <a:rPr sz="1300" b="0">
                 <a:solidFill>
                   <a:srgbClr val="4A5A70"/>
                 </a:solidFill>
                 <a:latin typeface="Calibri"/>
               </a:rPr>
-              <a:t>One direction of flow. Each stage reads only what the previous one produced, and attaches the packets it read it from.</a:t>
+              <a:t>One direction of flow. Each stage reads only what the previous one produced, and records the packets it read it from.</a:t>
             </a:r>
           </a:p>
         </p:txBody>
@@ -7450,8 +7672,8 @@
         </p:nvSpPr>
         <p:spPr>
           <a:xfrm>
-            <a:off x="384048" y="1371600"/>
-            <a:ext cx="1901952" cy="2487168"/>
+            <a:off x="384048" y="1335024"/>
+            <a:ext cx="2103120" cy="2761488"/>
           </a:xfrm>
           <a:prstGeom prst="roundRect">
             <a:avLst/>
@@ -7513,8 +7735,8 @@
         </p:nvSpPr>
         <p:spPr>
           <a:xfrm>
-            <a:off x="2505456" y="1371600"/>
-            <a:ext cx="3950208" cy="2487168"/>
+            <a:off x="2688336" y="1335024"/>
+            <a:ext cx="3291840" cy="2761488"/>
           </a:xfrm>
           <a:prstGeom prst="roundRect">
             <a:avLst/>
@@ -7576,8 +7798,8 @@
         </p:nvSpPr>
         <p:spPr>
           <a:xfrm>
-            <a:off x="6675120" y="1371600"/>
-            <a:ext cx="2615184" cy="2487168"/>
+            <a:off x="6181344" y="1335024"/>
+            <a:ext cx="2980944" cy="2761488"/>
           </a:xfrm>
           <a:prstGeom prst="roundRect">
             <a:avLst/>
@@ -7626,7 +7848,7 @@
                 </a:solidFill>
                 <a:latin typeface="Calibri"/>
               </a:rPr>
-              <a:t>ASSESSMENT</a:t>
+              <a:t>CRYPTOGRAPHIC ASSESSMENT</a:t>
             </a:r>
           </a:p>
         </p:txBody>
@@ -7639,8 +7861,8 @@
         </p:nvSpPr>
         <p:spPr>
           <a:xfrm>
-            <a:off x="9509760" y="1371600"/>
-            <a:ext cx="2304288" cy="2487168"/>
+            <a:off x="9363456" y="1335024"/>
+            <a:ext cx="2450592" cy="2761488"/>
           </a:xfrm>
           <a:prstGeom prst="roundRect">
             <a:avLst/>
@@ -7702,8 +7924,8 @@
         </p:nvSpPr>
         <p:spPr>
           <a:xfrm>
-            <a:off x="512064" y="1645920"/>
-            <a:ext cx="1645920" cy="512064"/>
+            <a:off x="530352" y="1645920"/>
+            <a:ext cx="1810512" cy="457200"/>
           </a:xfrm>
           <a:prstGeom prst="roundRect">
             <a:avLst/>
@@ -7746,7 +7968,7 @@
               <a:buNone/>
             </a:pPr>
             <a:r>
-              <a:rPr sz="850" b="1">
+              <a:rPr sz="1050" b="1">
                 <a:solidFill>
                   <a:srgbClr val="111B2A"/>
                 </a:solidFill>
@@ -7766,13 +7988,13 @@
               <a:buNone/>
             </a:pPr>
             <a:r>
-              <a:rPr sz="750" b="0">
+              <a:rPr sz="850" b="0">
                 <a:solidFill>
                   <a:srgbClr val="4A5A70"/>
                 </a:solidFill>
                 <a:latin typeface="Calibri"/>
               </a:rPr>
-              <a:t>untrusted file</a:t>
+              <a:t>authorised capture</a:t>
             </a:r>
           </a:p>
         </p:txBody>
@@ -7785,8 +8007,8 @@
         </p:nvSpPr>
         <p:spPr>
           <a:xfrm>
-            <a:off x="1252728" y="2212848"/>
-            <a:ext cx="164592" cy="182880"/>
+            <a:off x="1353311" y="2121408"/>
+            <a:ext cx="164592" cy="146304"/>
           </a:xfrm>
           <a:prstGeom prst="downArrow">
             <a:avLst/>
@@ -7829,8 +8051,8 @@
         </p:nvSpPr>
         <p:spPr>
           <a:xfrm>
-            <a:off x="512064" y="2432304"/>
-            <a:ext cx="1645920" cy="566928"/>
+            <a:off x="530352" y="2304288"/>
+            <a:ext cx="1810512" cy="457200"/>
           </a:xfrm>
           <a:prstGeom prst="roundRect">
             <a:avLst/>
@@ -7873,7 +8095,7 @@
               <a:buNone/>
             </a:pPr>
             <a:r>
-              <a:rPr sz="850" b="1">
+              <a:rPr sz="1050" b="1">
                 <a:solidFill>
                   <a:srgbClr val="111B2A"/>
                 </a:solidFill>
@@ -7893,91 +8115,27 @@
               <a:buNone/>
             </a:pPr>
             <a:r>
-              <a:rPr sz="750" b="0">
+              <a:rPr sz="850" b="0">
                 <a:solidFill>
                   <a:srgbClr val="4A5A70"/>
                 </a:solidFill>
                 <a:latin typeface="Calibri"/>
               </a:rPr>
-              <a:t>format from the bytes</a:t>
-            </a:r>
-          </a:p>
-          <a:p>
-            <a:pPr algn="ctr">
-              <a:lnSpc>
-                <a:spcPct val="88000"/>
-              </a:lnSpc>
-              <a:spcAft>
-                <a:spcPts val="100"/>
-              </a:spcAft>
-              <a:buNone/>
-            </a:pPr>
-            <a:r>
-              <a:rPr sz="750" b="0">
-                <a:solidFill>
-                  <a:srgbClr val="4A5A70"/>
-                </a:solidFill>
-                <a:latin typeface="Calibri"/>
-              </a:rPr>
-              <a:t>8 hard limits</a:t>
-            </a:r>
-          </a:p>
-        </p:txBody>
-      </p:sp>
-      <p:sp>
-        <p:nvSpPr>
-          <p:cNvPr id="17418" name="Down Arrow 17417"/>
+              <a:t>format from the bytes, 8 limits</a:t>
+            </a:r>
+          </a:p>
+        </p:txBody>
+      </p:sp>
+      <p:sp>
+        <p:nvSpPr>
+          <p:cNvPr id="17418" name="Rounded Rectangle 17417"/>
           <p:cNvSpPr/>
           <p:nvPr/>
         </p:nvSpPr>
         <p:spPr>
           <a:xfrm>
-            <a:off x="1252728" y="2999232"/>
-            <a:ext cx="164592" cy="201168"/>
-          </a:xfrm>
-          <a:prstGeom prst="downArrow">
-            <a:avLst/>
-          </a:prstGeom>
-          <a:solidFill>
-            <a:srgbClr val="4A5A70"/>
-          </a:solidFill>
-          <a:ln>
-            <a:noFill/>
-          </a:ln>
-          <a:effectLst/>
-        </p:spPr>
-        <p:style>
-          <a:lnRef idx="1">
-            <a:schemeClr val="accent1"/>
-          </a:lnRef>
-          <a:fillRef idx="3">
-            <a:schemeClr val="accent1"/>
-          </a:fillRef>
-          <a:effectRef idx="2">
-            <a:schemeClr val="accent1"/>
-          </a:effectRef>
-          <a:fontRef idx="minor">
-            <a:schemeClr val="lt1"/>
-          </a:fontRef>
-        </p:style>
-        <p:txBody>
-          <a:bodyPr rtlCol="0" anchor="ctr"/>
-          <a:lstStyle/>
-          <a:p>
-            <a:pPr algn="ctr"/>
-          </a:p>
-        </p:txBody>
-      </p:sp>
-      <p:sp>
-        <p:nvSpPr>
-          <p:cNvPr id="17419" name="Rounded Rectangle 17418"/>
-          <p:cNvSpPr/>
-          <p:nvPr/>
-        </p:nvSpPr>
-        <p:spPr>
-          <a:xfrm>
-            <a:off x="512064" y="3236976"/>
-            <a:ext cx="1645920" cy="438912"/>
+            <a:off x="2834640" y="1645920"/>
+            <a:ext cx="2999232" cy="365760"/>
           </a:xfrm>
           <a:prstGeom prst="roundRect">
             <a:avLst/>
@@ -8020,7 +8178,7 @@
               <a:buNone/>
             </a:pPr>
             <a:r>
-              <a:rPr sz="850" b="1">
+              <a:rPr sz="1050" b="1">
                 <a:solidFill>
                   <a:srgbClr val="111B2A"/>
                 </a:solidFill>
@@ -8033,16 +8191,16 @@
       </p:sp>
       <p:sp>
         <p:nvSpPr>
-          <p:cNvPr id="17420" name="Right Arrow 17419"/>
+          <p:cNvPr id="17419" name="Down Arrow 17418"/>
           <p:cNvSpPr/>
           <p:nvPr/>
         </p:nvSpPr>
         <p:spPr>
           <a:xfrm>
-            <a:off x="2231136" y="2084832"/>
-            <a:ext cx="219456" cy="164592"/>
-          </a:xfrm>
-          <a:prstGeom prst="rightArrow">
+            <a:off x="4251960" y="2029968"/>
+            <a:ext cx="164592" cy="146304"/>
+          </a:xfrm>
+          <a:prstGeom prst="downArrow">
             <a:avLst/>
           </a:prstGeom>
           <a:solidFill>
@@ -8077,14 +8235,14 @@
       </p:sp>
       <p:sp>
         <p:nvSpPr>
-          <p:cNvPr id="17421" name="Rounded Rectangle 17420"/>
+          <p:cNvPr id="17420" name="Rounded Rectangle 17419"/>
           <p:cNvSpPr/>
           <p:nvPr/>
         </p:nvSpPr>
         <p:spPr>
           <a:xfrm>
-            <a:off x="2633472" y="1645920"/>
-            <a:ext cx="1847088" cy="512064"/>
+            <a:off x="2834640" y="2212848"/>
+            <a:ext cx="2999232" cy="457200"/>
           </a:xfrm>
           <a:prstGeom prst="roundRect">
             <a:avLst/>
@@ -8127,7 +8285,7 @@
               <a:buNone/>
             </a:pPr>
             <a:r>
-              <a:rPr sz="850" b="1">
+              <a:rPr sz="1050" b="1">
                 <a:solidFill>
                   <a:srgbClr val="111B2A"/>
                 </a:solidFill>
@@ -8147,7 +8305,7 @@
               <a:buNone/>
             </a:pPr>
             <a:r>
-              <a:rPr sz="750" b="0">
+              <a:rPr sz="850" b="0">
                 <a:solidFill>
                   <a:srgbClr val="4A5A70"/>
                 </a:solidFill>
@@ -8155,6 +8313,50 @@
               </a:rPr>
               <a:t>reorder · retransmit · gaps</a:t>
             </a:r>
+          </a:p>
+        </p:txBody>
+      </p:sp>
+      <p:sp>
+        <p:nvSpPr>
+          <p:cNvPr id="17421" name="Down Arrow 17420"/>
+          <p:cNvSpPr/>
+          <p:nvPr/>
+        </p:nvSpPr>
+        <p:spPr>
+          <a:xfrm>
+            <a:off x="4251960" y="2688336"/>
+            <a:ext cx="164592" cy="146304"/>
+          </a:xfrm>
+          <a:prstGeom prst="downArrow">
+            <a:avLst/>
+          </a:prstGeom>
+          <a:solidFill>
+            <a:srgbClr val="4A5A70"/>
+          </a:solidFill>
+          <a:ln>
+            <a:noFill/>
+          </a:ln>
+          <a:effectLst/>
+        </p:spPr>
+        <p:style>
+          <a:lnRef idx="1">
+            <a:schemeClr val="accent1"/>
+          </a:lnRef>
+          <a:fillRef idx="3">
+            <a:schemeClr val="accent1"/>
+          </a:fillRef>
+          <a:effectRef idx="2">
+            <a:schemeClr val="accent1"/>
+          </a:effectRef>
+          <a:fontRef idx="minor">
+            <a:schemeClr val="lt1"/>
+          </a:fontRef>
+        </p:style>
+        <p:txBody>
+          <a:bodyPr rtlCol="0" anchor="ctr"/>
+          <a:lstStyle/>
+          <a:p>
+            <a:pPr algn="ctr"/>
           </a:p>
         </p:txBody>
       </p:sp>
@@ -8166,8 +8368,8 @@
         </p:nvSpPr>
         <p:spPr>
           <a:xfrm>
-            <a:off x="4572000" y="1645920"/>
-            <a:ext cx="1773936" cy="512064"/>
+            <a:off x="2834640" y="2871216"/>
+            <a:ext cx="2999232" cy="457200"/>
           </a:xfrm>
           <a:prstGeom prst="roundRect">
             <a:avLst/>
@@ -8210,7 +8412,7 @@
               <a:buNone/>
             </a:pPr>
             <a:r>
-              <a:rPr sz="850" b="1">
+              <a:rPr sz="1050" b="1">
                 <a:solidFill>
                   <a:srgbClr val="111B2A"/>
                 </a:solidFill>
@@ -8230,7 +8432,7 @@
               <a:buNone/>
             </a:pPr>
             <a:r>
-              <a:rPr sz="750" b="0">
+              <a:rPr sz="850" b="0">
                 <a:solidFill>
                   <a:srgbClr val="4A5A70"/>
                 </a:solidFill>
@@ -8249,8 +8451,8 @@
         </p:nvSpPr>
         <p:spPr>
           <a:xfrm>
-            <a:off x="3474720" y="2212848"/>
-            <a:ext cx="164592" cy="182880"/>
+            <a:off x="4251960" y="3346704"/>
+            <a:ext cx="164592" cy="146304"/>
           </a:xfrm>
           <a:prstGeom prst="downArrow">
             <a:avLst/>
@@ -8287,58 +8489,14 @@
       </p:sp>
       <p:sp>
         <p:nvSpPr>
-          <p:cNvPr id="17424" name="Down Arrow 17423"/>
+          <p:cNvPr id="17424" name="Rounded Rectangle 17423"/>
           <p:cNvSpPr/>
           <p:nvPr/>
         </p:nvSpPr>
         <p:spPr>
           <a:xfrm>
-            <a:off x="5376672" y="2212848"/>
-            <a:ext cx="164592" cy="182880"/>
-          </a:xfrm>
-          <a:prstGeom prst="downArrow">
-            <a:avLst/>
-          </a:prstGeom>
-          <a:solidFill>
-            <a:srgbClr val="4A5A70"/>
-          </a:solidFill>
-          <a:ln>
-            <a:noFill/>
-          </a:ln>
-          <a:effectLst/>
-        </p:spPr>
-        <p:style>
-          <a:lnRef idx="1">
-            <a:schemeClr val="accent1"/>
-          </a:lnRef>
-          <a:fillRef idx="3">
-            <a:schemeClr val="accent1"/>
-          </a:fillRef>
-          <a:effectRef idx="2">
-            <a:schemeClr val="accent1"/>
-          </a:effectRef>
-          <a:fontRef idx="minor">
-            <a:schemeClr val="lt1"/>
-          </a:fontRef>
-        </p:style>
-        <p:txBody>
-          <a:bodyPr rtlCol="0" anchor="ctr"/>
-          <a:lstStyle/>
-          <a:p>
-            <a:pPr algn="ctr"/>
-          </a:p>
-        </p:txBody>
-      </p:sp>
-      <p:sp>
-        <p:nvSpPr>
-          <p:cNvPr id="17425" name="Rounded Rectangle 17424"/>
-          <p:cNvSpPr/>
-          <p:nvPr/>
-        </p:nvSpPr>
-        <p:spPr>
-          <a:xfrm>
-            <a:off x="2633472" y="2432304"/>
-            <a:ext cx="1847088" cy="512064"/>
+            <a:off x="2834640" y="3529584"/>
+            <a:ext cx="2999232" cy="457200"/>
           </a:xfrm>
           <a:prstGeom prst="roundRect">
             <a:avLst/>
@@ -8381,7 +8539,7 @@
               <a:buNone/>
             </a:pPr>
             <a:r>
-              <a:rPr sz="850" b="1">
+              <a:rPr sz="1050" b="1">
                 <a:solidFill>
                   <a:srgbClr val="111B2A"/>
                 </a:solidFill>
@@ -8401,7 +8559,7 @@
               <a:buNone/>
             </a:pPr>
             <a:r>
-              <a:rPr sz="750" b="0">
+              <a:rPr sz="850" b="0">
                 <a:solidFill>
                   <a:srgbClr val="4A5A70"/>
                 </a:solidFill>
@@ -8414,14 +8572,14 @@
       </p:sp>
       <p:sp>
         <p:nvSpPr>
-          <p:cNvPr id="17426" name="Rounded Rectangle 17425"/>
+          <p:cNvPr id="17425" name="Rounded Rectangle 17424"/>
           <p:cNvSpPr/>
           <p:nvPr/>
         </p:nvSpPr>
         <p:spPr>
           <a:xfrm>
-            <a:off x="4572000" y="2432304"/>
-            <a:ext cx="1773936" cy="512064"/>
+            <a:off x="6327648" y="1645920"/>
+            <a:ext cx="2688336" cy="457200"/>
           </a:xfrm>
           <a:prstGeom prst="roundRect">
             <a:avLst/>
@@ -8464,13 +8622,13 @@
               <a:buNone/>
             </a:pPr>
             <a:r>
-              <a:rPr sz="850" b="1">
+              <a:rPr sz="1050" b="1">
                 <a:solidFill>
                   <a:srgbClr val="111B2A"/>
                 </a:solidFill>
                 <a:latin typeface="Calibri"/>
               </a:rPr>
-              <a:t>TLS handshake</a:t>
+              <a:t>TLS handshake → X.509</a:t>
             </a:r>
           </a:p>
           <a:p>
@@ -8484,27 +8642,27 @@
               <a:buNone/>
             </a:pPr>
             <a:r>
-              <a:rPr sz="750" b="0">
+              <a:rPr sz="850" b="0">
                 <a:solidFill>
                   <a:srgbClr val="4A5A70"/>
                 </a:solidFill>
                 <a:latin typeface="Calibri"/>
               </a:rPr>
-              <a:t>version, suite, key exchange</a:t>
-            </a:r>
-          </a:p>
-        </p:txBody>
-      </p:sp>
-      <p:sp>
-        <p:nvSpPr>
-          <p:cNvPr id="17427" name="Down Arrow 17426"/>
+              <a:t>version, suite, key exchange, chain</a:t>
+            </a:r>
+          </a:p>
+        </p:txBody>
+      </p:sp>
+      <p:sp>
+        <p:nvSpPr>
+          <p:cNvPr id="17426" name="Down Arrow 17425"/>
           <p:cNvSpPr/>
           <p:nvPr/>
         </p:nvSpPr>
         <p:spPr>
           <a:xfrm>
-            <a:off x="4425696" y="2999232"/>
-            <a:ext cx="164592" cy="201168"/>
+            <a:off x="7589520" y="2121408"/>
+            <a:ext cx="164592" cy="146304"/>
           </a:xfrm>
           <a:prstGeom prst="downArrow">
             <a:avLst/>
@@ -8541,14 +8699,14 @@
       </p:sp>
       <p:sp>
         <p:nvSpPr>
-          <p:cNvPr id="17428" name="Rounded Rectangle 17427"/>
+          <p:cNvPr id="17427" name="Rounded Rectangle 17426"/>
           <p:cNvSpPr/>
           <p:nvPr/>
         </p:nvSpPr>
         <p:spPr>
           <a:xfrm>
-            <a:off x="2633472" y="3236976"/>
-            <a:ext cx="3712463" cy="438912"/>
+            <a:off x="6327648" y="2304288"/>
+            <a:ext cx="2688336" cy="457200"/>
           </a:xfrm>
           <a:prstGeom prst="roundRect">
             <a:avLst/>
@@ -8591,29 +8749,49 @@
               <a:buNone/>
             </a:pPr>
             <a:r>
-              <a:rPr sz="850" b="1">
+              <a:rPr sz="1050" b="1">
                 <a:solidFill>
                   <a:srgbClr val="111B2A"/>
                 </a:solidFill>
                 <a:latin typeface="Calibri"/>
               </a:rPr>
-              <a:t>X.509 certificate analysis  —  chain, dates, identity, key, signature</a:t>
-            </a:r>
-          </a:p>
-        </p:txBody>
-      </p:sp>
-      <p:sp>
-        <p:nvSpPr>
-          <p:cNvPr id="17429" name="Right Arrow 17428"/>
+              <a:t>25 policy rules</a:t>
+            </a:r>
+          </a:p>
+          <a:p>
+            <a:pPr algn="ctr">
+              <a:lnSpc>
+                <a:spcPct val="88000"/>
+              </a:lnSpc>
+              <a:spcAft>
+                <a:spcPts val="100"/>
+              </a:spcAft>
+              <a:buNone/>
+            </a:pPr>
+            <a:r>
+              <a:rPr sz="850" b="0">
+                <a:solidFill>
+                  <a:srgbClr val="4A5A70"/>
+                </a:solidFill>
+                <a:latin typeface="Calibri"/>
+              </a:rPr>
+              <a:t>versioned and fingerprinted</a:t>
+            </a:r>
+          </a:p>
+        </p:txBody>
+      </p:sp>
+      <p:sp>
+        <p:nvSpPr>
+          <p:cNvPr id="17428" name="Down Arrow 17427"/>
           <p:cNvSpPr/>
           <p:nvPr/>
         </p:nvSpPr>
         <p:spPr>
           <a:xfrm>
-            <a:off x="6400800" y="2084832"/>
-            <a:ext cx="219456" cy="164592"/>
-          </a:xfrm>
-          <a:prstGeom prst="rightArrow">
+            <a:off x="7589520" y="2779776"/>
+            <a:ext cx="164592" cy="146304"/>
+          </a:xfrm>
+          <a:prstGeom prst="downArrow">
             <a:avLst/>
           </a:prstGeom>
           <a:solidFill>
@@ -8648,14 +8826,14 @@
       </p:sp>
       <p:sp>
         <p:nvSpPr>
-          <p:cNvPr id="17430" name="Rounded Rectangle 17429"/>
+          <p:cNvPr id="17429" name="Rounded Rectangle 17428"/>
           <p:cNvSpPr/>
           <p:nvPr/>
         </p:nvSpPr>
         <p:spPr>
           <a:xfrm>
-            <a:off x="6803136" y="1645920"/>
-            <a:ext cx="2359152" cy="512064"/>
+            <a:off x="6327648" y="2962656"/>
+            <a:ext cx="2688336" cy="457200"/>
           </a:xfrm>
           <a:prstGeom prst="roundRect">
             <a:avLst/>
@@ -8698,13 +8876,13 @@
               <a:buNone/>
             </a:pPr>
             <a:r>
-              <a:rPr sz="850" b="1">
+              <a:rPr sz="1050" b="1">
                 <a:solidFill>
                   <a:srgbClr val="111B2A"/>
                 </a:solidFill>
                 <a:latin typeface="Calibri"/>
               </a:rPr>
-              <a:t>25 policy rules</a:t>
+              <a:t>Score · coverage · priority</a:t>
             </a:r>
           </a:p>
           <a:p>
@@ -8718,27 +8896,27 @@
               <a:buNone/>
             </a:pPr>
             <a:r>
-              <a:rPr sz="750" b="0">
+              <a:rPr sz="850" b="0">
                 <a:solidFill>
                   <a:srgbClr val="4A5A70"/>
                 </a:solidFill>
                 <a:latin typeface="Calibri"/>
               </a:rPr>
-              <a:t>versioned, fingerprinted</a:t>
-            </a:r>
-          </a:p>
-        </p:txBody>
-      </p:sp>
-      <p:sp>
-        <p:nvSpPr>
-          <p:cNvPr id="17431" name="Down Arrow 17430"/>
+              <a:t>arithmetic shown, not asserted</a:t>
+            </a:r>
+          </a:p>
+        </p:txBody>
+      </p:sp>
+      <p:sp>
+        <p:nvSpPr>
+          <p:cNvPr id="17430" name="Down Arrow 17429"/>
           <p:cNvSpPr/>
           <p:nvPr/>
         </p:nvSpPr>
         <p:spPr>
           <a:xfrm>
-            <a:off x="7900416" y="2212848"/>
-            <a:ext cx="164592" cy="182880"/>
+            <a:off x="7589520" y="3438144"/>
+            <a:ext cx="164592" cy="146304"/>
           </a:xfrm>
           <a:prstGeom prst="downArrow">
             <a:avLst/>
@@ -8775,14 +8953,14 @@
       </p:sp>
       <p:sp>
         <p:nvSpPr>
-          <p:cNvPr id="17432" name="Rounded Rectangle 17431"/>
+          <p:cNvPr id="17431" name="Rounded Rectangle 17430"/>
           <p:cNvSpPr/>
           <p:nvPr/>
         </p:nvSpPr>
         <p:spPr>
           <a:xfrm>
-            <a:off x="6803136" y="2432304"/>
-            <a:ext cx="2359152" cy="512064"/>
+            <a:off x="6327648" y="3621024"/>
+            <a:ext cx="2688336" cy="457200"/>
           </a:xfrm>
           <a:prstGeom prst="roundRect">
             <a:avLst/>
@@ -8825,13 +9003,13 @@
               <a:buNone/>
             </a:pPr>
             <a:r>
-              <a:rPr sz="850" b="1">
+              <a:rPr sz="1050" b="1">
                 <a:solidFill>
                   <a:srgbClr val="111B2A"/>
                 </a:solidFill>
                 <a:latin typeface="Calibri"/>
               </a:rPr>
-              <a:t>Score · coverage · priority</a:t>
+              <a:t>Fingerprint · drift · ML</a:t>
             </a:r>
           </a:p>
           <a:p>
@@ -8845,71 +9023,27 @@
               <a:buNone/>
             </a:pPr>
             <a:r>
-              <a:rPr sz="750" b="0">
+              <a:rPr sz="850" b="0">
                 <a:solidFill>
                   <a:srgbClr val="4A5A70"/>
                 </a:solidFill>
                 <a:latin typeface="Calibri"/>
               </a:rPr>
-              <a:t>arithmetic shown, not asserted</a:t>
-            </a:r>
-          </a:p>
-        </p:txBody>
-      </p:sp>
-      <p:sp>
-        <p:nvSpPr>
-          <p:cNvPr id="17433" name="Down Arrow 17432"/>
+              <a:t>ML is advisory only</a:t>
+            </a:r>
+          </a:p>
+        </p:txBody>
+      </p:sp>
+      <p:sp>
+        <p:nvSpPr>
+          <p:cNvPr id="17432" name="Rounded Rectangle 17431"/>
           <p:cNvSpPr/>
           <p:nvPr/>
         </p:nvSpPr>
         <p:spPr>
           <a:xfrm>
-            <a:off x="7900416" y="2999232"/>
-            <a:ext cx="164592" cy="201168"/>
-          </a:xfrm>
-          <a:prstGeom prst="downArrow">
-            <a:avLst/>
-          </a:prstGeom>
-          <a:solidFill>
-            <a:srgbClr val="4A5A70"/>
-          </a:solidFill>
-          <a:ln>
-            <a:noFill/>
-          </a:ln>
-          <a:effectLst/>
-        </p:spPr>
-        <p:style>
-          <a:lnRef idx="1">
-            <a:schemeClr val="accent1"/>
-          </a:lnRef>
-          <a:fillRef idx="3">
-            <a:schemeClr val="accent1"/>
-          </a:fillRef>
-          <a:effectRef idx="2">
-            <a:schemeClr val="accent1"/>
-          </a:effectRef>
-          <a:fontRef idx="minor">
-            <a:schemeClr val="lt1"/>
-          </a:fontRef>
-        </p:style>
-        <p:txBody>
-          <a:bodyPr rtlCol="0" anchor="ctr"/>
-          <a:lstStyle/>
-          <a:p>
-            <a:pPr algn="ctr"/>
-          </a:p>
-        </p:txBody>
-      </p:sp>
-      <p:sp>
-        <p:nvSpPr>
-          <p:cNvPr id="17434" name="Rounded Rectangle 17433"/>
-          <p:cNvSpPr/>
-          <p:nvPr/>
-        </p:nvSpPr>
-        <p:spPr>
-          <a:xfrm>
-            <a:off x="6803136" y="3236976"/>
-            <a:ext cx="2359152" cy="438912"/>
+            <a:off x="9509760" y="1645920"/>
+            <a:ext cx="2157984" cy="457200"/>
           </a:xfrm>
           <a:prstGeom prst="roundRect">
             <a:avLst/>
@@ -8952,29 +9086,49 @@
               <a:buNone/>
             </a:pPr>
             <a:r>
-              <a:rPr sz="800" b="1">
+              <a:rPr sz="1050" b="1">
                 <a:solidFill>
                   <a:srgbClr val="111B2A"/>
                 </a:solidFill>
                 <a:latin typeface="Calibri"/>
               </a:rPr>
-              <a:t>Fingerprints · drift · correlation · ML (advisory)</a:t>
-            </a:r>
-          </a:p>
-        </p:txBody>
-      </p:sp>
-      <p:sp>
-        <p:nvSpPr>
-          <p:cNvPr id="17435" name="Right Arrow 17434"/>
+              <a:t>Canonical report model</a:t>
+            </a:r>
+          </a:p>
+          <a:p>
+            <a:pPr algn="ctr">
+              <a:lnSpc>
+                <a:spcPct val="88000"/>
+              </a:lnSpc>
+              <a:spcAft>
+                <a:spcPts val="100"/>
+              </a:spcAft>
+              <a:buNone/>
+            </a:pPr>
+            <a:r>
+              <a:rPr sz="850" b="0">
+                <a:solidFill>
+                  <a:srgbClr val="4A5A70"/>
+                </a:solidFill>
+                <a:latin typeface="Calibri"/>
+              </a:rPr>
+              <a:t>schema 1.4.0</a:t>
+            </a:r>
+          </a:p>
+        </p:txBody>
+      </p:sp>
+      <p:sp>
+        <p:nvSpPr>
+          <p:cNvPr id="17433" name="Down Arrow 17432"/>
           <p:cNvSpPr/>
           <p:nvPr/>
         </p:nvSpPr>
         <p:spPr>
           <a:xfrm>
-            <a:off x="9235440" y="2084832"/>
-            <a:ext cx="219456" cy="164592"/>
-          </a:xfrm>
-          <a:prstGeom prst="rightArrow">
+            <a:off x="10506456" y="2121408"/>
+            <a:ext cx="164592" cy="146304"/>
+          </a:xfrm>
+          <a:prstGeom prst="downArrow">
             <a:avLst/>
           </a:prstGeom>
           <a:solidFill>
@@ -9009,14 +9163,14 @@
       </p:sp>
       <p:sp>
         <p:nvSpPr>
-          <p:cNvPr id="17436" name="Rounded Rectangle 17435"/>
+          <p:cNvPr id="17434" name="Rounded Rectangle 17433"/>
           <p:cNvSpPr/>
           <p:nvPr/>
         </p:nvSpPr>
         <p:spPr>
           <a:xfrm>
-            <a:off x="9637776" y="1645920"/>
-            <a:ext cx="2048256" cy="512064"/>
+            <a:off x="9509760" y="2304288"/>
+            <a:ext cx="2157984" cy="457200"/>
           </a:xfrm>
           <a:prstGeom prst="roundRect">
             <a:avLst/>
@@ -9059,13 +9213,13 @@
               <a:buNone/>
             </a:pPr>
             <a:r>
-              <a:rPr sz="850" b="1">
+              <a:rPr sz="1050" b="1">
                 <a:solidFill>
                   <a:srgbClr val="111B2A"/>
                 </a:solidFill>
                 <a:latin typeface="Calibri"/>
               </a:rPr>
-              <a:t>One canonical report model</a:t>
+              <a:t>FastAPI + SQLite</a:t>
             </a:r>
           </a:p>
           <a:p>
@@ -9079,27 +9233,27 @@
               <a:buNone/>
             </a:pPr>
             <a:r>
-              <a:rPr sz="750" b="0">
+              <a:rPr sz="850" b="0">
                 <a:solidFill>
                   <a:srgbClr val="4A5A70"/>
                 </a:solidFill>
                 <a:latin typeface="Calibri"/>
               </a:rPr>
-              <a:t>schema 1.4.0</a:t>
-            </a:r>
-          </a:p>
-        </p:txBody>
-      </p:sp>
-      <p:sp>
-        <p:nvSpPr>
-          <p:cNvPr id="17437" name="Down Arrow 17436"/>
+              <a:t>loopback only, token</a:t>
+            </a:r>
+          </a:p>
+        </p:txBody>
+      </p:sp>
+      <p:sp>
+        <p:nvSpPr>
+          <p:cNvPr id="17435" name="Down Arrow 17434"/>
           <p:cNvSpPr/>
           <p:nvPr/>
         </p:nvSpPr>
         <p:spPr>
           <a:xfrm>
-            <a:off x="10579608" y="2212848"/>
-            <a:ext cx="164592" cy="182880"/>
+            <a:off x="10506456" y="2779776"/>
+            <a:ext cx="164592" cy="146304"/>
           </a:xfrm>
           <a:prstGeom prst="downArrow">
             <a:avLst/>
@@ -9136,14 +9290,14 @@
       </p:sp>
       <p:sp>
         <p:nvSpPr>
-          <p:cNvPr id="17438" name="Rounded Rectangle 17437"/>
+          <p:cNvPr id="17436" name="Rounded Rectangle 17435"/>
           <p:cNvSpPr/>
           <p:nvPr/>
         </p:nvSpPr>
         <p:spPr>
           <a:xfrm>
-            <a:off x="9637776" y="2432304"/>
-            <a:ext cx="2048256" cy="512064"/>
+            <a:off x="9509760" y="2962656"/>
+            <a:ext cx="2157984" cy="457200"/>
           </a:xfrm>
           <a:prstGeom prst="roundRect">
             <a:avLst/>
@@ -9186,13 +9340,13 @@
               <a:buNone/>
             </a:pPr>
             <a:r>
-              <a:rPr sz="850" b="1">
+              <a:rPr sz="1050" b="1">
                 <a:solidFill>
                   <a:srgbClr val="111B2A"/>
                 </a:solidFill>
                 <a:latin typeface="Calibri"/>
               </a:rPr>
-              <a:t>JSON · offline HTML · PDF</a:t>
+              <a:t>React workspace</a:t>
             </a:r>
           </a:p>
           <a:p>
@@ -9206,27 +9360,27 @@
               <a:buNone/>
             </a:pPr>
             <a:r>
-              <a:rPr sz="750" b="0">
+              <a:rPr sz="850" b="0">
                 <a:solidFill>
                   <a:srgbClr val="4A5A70"/>
                 </a:solidFill>
                 <a:latin typeface="Calibri"/>
               </a:rPr>
-              <a:t>parity-tested against each other</a:t>
-            </a:r>
-          </a:p>
-        </p:txBody>
-      </p:sp>
-      <p:sp>
-        <p:nvSpPr>
-          <p:cNvPr id="17439" name="Down Arrow 17438"/>
+              <a:t>evidence-linked throughout</a:t>
+            </a:r>
+          </a:p>
+        </p:txBody>
+      </p:sp>
+      <p:sp>
+        <p:nvSpPr>
+          <p:cNvPr id="17437" name="Down Arrow 17436"/>
           <p:cNvSpPr/>
           <p:nvPr/>
         </p:nvSpPr>
         <p:spPr>
           <a:xfrm>
-            <a:off x="10579608" y="2999232"/>
-            <a:ext cx="164592" cy="201168"/>
+            <a:off x="10506456" y="3438144"/>
+            <a:ext cx="164592" cy="146304"/>
           </a:xfrm>
           <a:prstGeom prst="downArrow">
             <a:avLst/>
@@ -9263,14 +9417,14 @@
       </p:sp>
       <p:sp>
         <p:nvSpPr>
-          <p:cNvPr id="17440" name="Rounded Rectangle 17439"/>
+          <p:cNvPr id="17438" name="Rounded Rectangle 17437"/>
           <p:cNvSpPr/>
           <p:nvPr/>
         </p:nvSpPr>
         <p:spPr>
           <a:xfrm>
-            <a:off x="9637776" y="3236976"/>
-            <a:ext cx="2048256" cy="438912"/>
+            <a:off x="9509760" y="3621024"/>
+            <a:ext cx="2157984" cy="457200"/>
           </a:xfrm>
           <a:prstGeom prst="roundRect">
             <a:avLst/>
@@ -9313,38 +9467,56 @@
               <a:buNone/>
             </a:pPr>
             <a:r>
-              <a:rPr sz="850" b="1">
+              <a:rPr sz="1050" b="1">
                 <a:solidFill>
                   <a:srgbClr val="111B2A"/>
                 </a:solidFill>
                 <a:latin typeface="Calibri"/>
               </a:rPr>
-              <a:t>Local API → React dashboard</a:t>
-            </a:r>
-          </a:p>
-        </p:txBody>
-      </p:sp>
-      <p:sp>
-        <p:nvSpPr>
-          <p:cNvPr id="17441" name="Rounded Rectangle 17440"/>
+              <a:t>JSON · HTML · PDF</a:t>
+            </a:r>
+          </a:p>
+          <a:p>
+            <a:pPr algn="ctr">
+              <a:lnSpc>
+                <a:spcPct val="88000"/>
+              </a:lnSpc>
+              <a:spcAft>
+                <a:spcPts val="100"/>
+              </a:spcAft>
+              <a:buNone/>
+            </a:pPr>
+            <a:r>
+              <a:rPr sz="850" b="0">
+                <a:solidFill>
+                  <a:srgbClr val="4A5A70"/>
+                </a:solidFill>
+                <a:latin typeface="Calibri"/>
+              </a:rPr>
+              <a:t>parity-tested</a:t>
+            </a:r>
+          </a:p>
+        </p:txBody>
+      </p:sp>
+      <p:sp>
+        <p:nvSpPr>
+          <p:cNvPr id="17439" name="Right Arrow 17438"/>
           <p:cNvSpPr/>
           <p:nvPr/>
         </p:nvSpPr>
         <p:spPr>
           <a:xfrm>
-            <a:off x="384048" y="3968496"/>
-            <a:ext cx="11430000" cy="420624"/>
-          </a:xfrm>
-          <a:prstGeom prst="roundRect">
+            <a:off x="2505456" y="1810512"/>
+            <a:ext cx="201168" cy="164592"/>
+          </a:xfrm>
+          <a:prstGeom prst="rightArrow">
             <a:avLst/>
           </a:prstGeom>
           <a:solidFill>
-            <a:srgbClr val="ECF4FA"/>
+            <a:srgbClr val="4A5A70"/>
           </a:solidFill>
-          <a:ln w="9525">
-            <a:solidFill>
-              <a:srgbClr val="C8DDEE"/>
-            </a:solidFill>
+          <a:ln>
+            <a:noFill/>
           </a:ln>
           <a:effectLst/>
         </p:spPr>
@@ -9363,51 +9535,32 @@
           </a:fontRef>
         </p:style>
         <p:txBody>
-          <a:bodyPr rtlCol="0" anchor="ctr" wrap="square" tIns="54864" bIns="54864"/>
-          <a:lstStyle/>
-          <a:p>
-            <a:pPr algn="ctr">
-              <a:lnSpc>
-                <a:spcPct val="100000"/>
-              </a:lnSpc>
-              <a:spcAft>
-                <a:spcPts val="300"/>
-              </a:spcAft>
-              <a:buNone/>
-            </a:pPr>
-            <a:r>
-              <a:rPr sz="900" b="1">
-                <a:solidFill>
-                  <a:srgbClr val="0B5FA5"/>
-                </a:solidFill>
-                <a:latin typeface="Calibri"/>
-              </a:rPr>
-              <a:t>EVIDENCE PROVENANCE  —  every stage attaches the capture, session, packet number, timestamp and stream offset it read from, and marks each value OBSERVED, INFERRED, UNKNOWN or NOT AVAILABLE</a:t>
-            </a:r>
-          </a:p>
-        </p:txBody>
-      </p:sp>
-      <p:sp>
-        <p:nvSpPr>
-          <p:cNvPr id="17442" name="Rounded Rectangle 17441"/>
+          <a:bodyPr rtlCol="0" anchor="ctr"/>
+          <a:lstStyle/>
+          <a:p>
+            <a:pPr algn="ctr"/>
+          </a:p>
+        </p:txBody>
+      </p:sp>
+      <p:sp>
+        <p:nvSpPr>
+          <p:cNvPr id="17440" name="Right Arrow 17439"/>
           <p:cNvSpPr/>
           <p:nvPr/>
         </p:nvSpPr>
         <p:spPr>
           <a:xfrm>
-            <a:off x="384048" y="4480560"/>
-            <a:ext cx="11430000" cy="420624"/>
-          </a:xfrm>
-          <a:prstGeom prst="roundRect">
+            <a:off x="5998464" y="1810512"/>
+            <a:ext cx="201168" cy="164592"/>
+          </a:xfrm>
+          <a:prstGeom prst="rightArrow">
             <a:avLst/>
           </a:prstGeom>
           <a:solidFill>
-            <a:srgbClr val="E4EEE6"/>
+            <a:srgbClr val="4A5A70"/>
           </a:solidFill>
-          <a:ln w="9525">
-            <a:solidFill>
-              <a:srgbClr val="BED8C6"/>
-            </a:solidFill>
+          <a:ln>
+            <a:noFill/>
           </a:ln>
           <a:effectLst/>
         </p:spPr>
@@ -9426,7 +9579,97 @@
           </a:fontRef>
         </p:style>
         <p:txBody>
-          <a:bodyPr rtlCol="0" anchor="ctr" wrap="square" tIns="54864" bIns="54864"/>
+          <a:bodyPr rtlCol="0" anchor="ctr"/>
+          <a:lstStyle/>
+          <a:p>
+            <a:pPr algn="ctr"/>
+          </a:p>
+        </p:txBody>
+      </p:sp>
+      <p:sp>
+        <p:nvSpPr>
+          <p:cNvPr id="17441" name="Right Arrow 17440"/>
+          <p:cNvSpPr/>
+          <p:nvPr/>
+        </p:nvSpPr>
+        <p:spPr>
+          <a:xfrm>
+            <a:off x="9180576" y="1810512"/>
+            <a:ext cx="201168" cy="164592"/>
+          </a:xfrm>
+          <a:prstGeom prst="rightArrow">
+            <a:avLst/>
+          </a:prstGeom>
+          <a:solidFill>
+            <a:srgbClr val="4A5A70"/>
+          </a:solidFill>
+          <a:ln>
+            <a:noFill/>
+          </a:ln>
+          <a:effectLst/>
+        </p:spPr>
+        <p:style>
+          <a:lnRef idx="1">
+            <a:schemeClr val="accent1"/>
+          </a:lnRef>
+          <a:fillRef idx="3">
+            <a:schemeClr val="accent1"/>
+          </a:fillRef>
+          <a:effectRef idx="2">
+            <a:schemeClr val="accent1"/>
+          </a:effectRef>
+          <a:fontRef idx="minor">
+            <a:schemeClr val="lt1"/>
+          </a:fontRef>
+        </p:style>
+        <p:txBody>
+          <a:bodyPr rtlCol="0" anchor="ctr"/>
+          <a:lstStyle/>
+          <a:p>
+            <a:pPr algn="ctr"/>
+          </a:p>
+        </p:txBody>
+      </p:sp>
+      <p:sp>
+        <p:nvSpPr>
+          <p:cNvPr id="17442" name="Rounded Rectangle 17441"/>
+          <p:cNvSpPr/>
+          <p:nvPr/>
+        </p:nvSpPr>
+        <p:spPr>
+          <a:xfrm>
+            <a:off x="384048" y="4242816"/>
+            <a:ext cx="11430000" cy="786384"/>
+          </a:xfrm>
+          <a:prstGeom prst="roundRect">
+            <a:avLst/>
+          </a:prstGeom>
+          <a:solidFill>
+            <a:srgbClr val="F7FAFD"/>
+          </a:solidFill>
+          <a:ln w="9525">
+            <a:solidFill>
+              <a:srgbClr val="DCE6F2"/>
+            </a:solidFill>
+          </a:ln>
+          <a:effectLst/>
+        </p:spPr>
+        <p:style>
+          <a:lnRef idx="1">
+            <a:schemeClr val="accent1"/>
+          </a:lnRef>
+          <a:fillRef idx="3">
+            <a:schemeClr val="accent1"/>
+          </a:fillRef>
+          <a:effectRef idx="2">
+            <a:schemeClr val="accent1"/>
+          </a:effectRef>
+          <a:fontRef idx="minor">
+            <a:schemeClr val="lt1"/>
+          </a:fontRef>
+        </p:style>
+        <p:txBody>
+          <a:bodyPr rtlCol="0" anchor="t" wrap="square" lIns="73152" tIns="27432"/>
           <a:lstStyle/>
           <a:p>
             <a:pPr algn="ctr">
@@ -9439,13 +9682,13 @@
               <a:buNone/>
             </a:pPr>
             <a:r>
-              <a:rPr sz="900" b="1">
-                <a:solidFill>
-                  <a:srgbClr val="1B6B3A"/>
+              <a:rPr sz="750" b="1">
+                <a:solidFill>
+                  <a:srgbClr val="8A9BB0"/>
                 </a:solidFill>
                 <a:latin typeface="Calibri"/>
               </a:rPr>
-              <a:t>PASSIVE BY CONSTRUCTION  —  no stage opens a socket. Scapy's neighbour resolver is replaced with one that raises, and the whole pipeline is run through stubbed socket constructors by the test suite</a:t>
+              <a:t>EVIDENCE RAIL — WHAT EVERY FINDING CARRIES</a:t>
             </a:r>
           </a:p>
         </p:txBody>
@@ -9458,8 +9701,606 @@
         </p:nvSpPr>
         <p:spPr>
           <a:xfrm>
-            <a:off x="384048" y="5010912"/>
-            <a:ext cx="3749039" cy="969264"/>
+            <a:off x="603504" y="4535424"/>
+            <a:ext cx="1645920" cy="384048"/>
+          </a:xfrm>
+          <a:prstGeom prst="roundRect">
+            <a:avLst/>
+          </a:prstGeom>
+          <a:solidFill>
+            <a:srgbClr val="FFFFFF"/>
+          </a:solidFill>
+          <a:ln w="9525">
+            <a:solidFill>
+              <a:srgbClr val="C2D4E6"/>
+            </a:solidFill>
+          </a:ln>
+          <a:effectLst/>
+        </p:spPr>
+        <p:style>
+          <a:lnRef idx="1">
+            <a:schemeClr val="accent1"/>
+          </a:lnRef>
+          <a:fillRef idx="3">
+            <a:schemeClr val="accent1"/>
+          </a:fillRef>
+          <a:effectRef idx="2">
+            <a:schemeClr val="accent1"/>
+          </a:effectRef>
+          <a:fontRef idx="minor">
+            <a:schemeClr val="lt1"/>
+          </a:fontRef>
+        </p:style>
+        <p:txBody>
+          <a:bodyPr rtlCol="0" anchor="ctr" wrap="square" tIns="54864" bIns="54864"/>
+          <a:lstStyle/>
+          <a:p>
+            <a:pPr algn="ctr">
+              <a:lnSpc>
+                <a:spcPct val="88000"/>
+              </a:lnSpc>
+              <a:spcAft>
+                <a:spcPts val="100"/>
+              </a:spcAft>
+              <a:buNone/>
+            </a:pPr>
+            <a:r>
+              <a:rPr sz="1050" b="1">
+                <a:solidFill>
+                  <a:srgbClr val="0B5FA5"/>
+                </a:solidFill>
+                <a:latin typeface="Calibri"/>
+              </a:rPr>
+              <a:t>PACKET</a:t>
+            </a:r>
+          </a:p>
+        </p:txBody>
+      </p:sp>
+      <p:sp>
+        <p:nvSpPr>
+          <p:cNvPr id="17444" name="Right Arrow 17443"/>
+          <p:cNvSpPr/>
+          <p:nvPr/>
+        </p:nvSpPr>
+        <p:spPr>
+          <a:xfrm>
+            <a:off x="2276856" y="4663440"/>
+            <a:ext cx="164592" cy="164592"/>
+          </a:xfrm>
+          <a:prstGeom prst="rightArrow">
+            <a:avLst/>
+          </a:prstGeom>
+          <a:solidFill>
+            <a:srgbClr val="4A5A70"/>
+          </a:solidFill>
+          <a:ln>
+            <a:noFill/>
+          </a:ln>
+          <a:effectLst/>
+        </p:spPr>
+        <p:style>
+          <a:lnRef idx="1">
+            <a:schemeClr val="accent1"/>
+          </a:lnRef>
+          <a:fillRef idx="3">
+            <a:schemeClr val="accent1"/>
+          </a:fillRef>
+          <a:effectRef idx="2">
+            <a:schemeClr val="accent1"/>
+          </a:effectRef>
+          <a:fontRef idx="minor">
+            <a:schemeClr val="lt1"/>
+          </a:fontRef>
+        </p:style>
+        <p:txBody>
+          <a:bodyPr rtlCol="0" anchor="ctr"/>
+          <a:lstStyle/>
+          <a:p>
+            <a:pPr algn="ctr"/>
+          </a:p>
+        </p:txBody>
+      </p:sp>
+      <p:sp>
+        <p:nvSpPr>
+          <p:cNvPr id="17445" name="Rounded Rectangle 17444"/>
+          <p:cNvSpPr/>
+          <p:nvPr/>
+        </p:nvSpPr>
+        <p:spPr>
+          <a:xfrm>
+            <a:off x="2487168" y="4535424"/>
+            <a:ext cx="1645920" cy="384048"/>
+          </a:xfrm>
+          <a:prstGeom prst="roundRect">
+            <a:avLst/>
+          </a:prstGeom>
+          <a:solidFill>
+            <a:srgbClr val="FFFFFF"/>
+          </a:solidFill>
+          <a:ln w="9525">
+            <a:solidFill>
+              <a:srgbClr val="C2D4E6"/>
+            </a:solidFill>
+          </a:ln>
+          <a:effectLst/>
+        </p:spPr>
+        <p:style>
+          <a:lnRef idx="1">
+            <a:schemeClr val="accent1"/>
+          </a:lnRef>
+          <a:fillRef idx="3">
+            <a:schemeClr val="accent1"/>
+          </a:fillRef>
+          <a:effectRef idx="2">
+            <a:schemeClr val="accent1"/>
+          </a:effectRef>
+          <a:fontRef idx="minor">
+            <a:schemeClr val="lt1"/>
+          </a:fontRef>
+        </p:style>
+        <p:txBody>
+          <a:bodyPr rtlCol="0" anchor="ctr" wrap="square" tIns="54864" bIns="54864"/>
+          <a:lstStyle/>
+          <a:p>
+            <a:pPr algn="ctr">
+              <a:lnSpc>
+                <a:spcPct val="88000"/>
+              </a:lnSpc>
+              <a:spcAft>
+                <a:spcPts val="100"/>
+              </a:spcAft>
+              <a:buNone/>
+            </a:pPr>
+            <a:r>
+              <a:rPr sz="1050" b="1">
+                <a:solidFill>
+                  <a:srgbClr val="0B5FA5"/>
+                </a:solidFill>
+                <a:latin typeface="Calibri"/>
+              </a:rPr>
+              <a:t>OBSERVATION</a:t>
+            </a:r>
+          </a:p>
+        </p:txBody>
+      </p:sp>
+      <p:sp>
+        <p:nvSpPr>
+          <p:cNvPr id="17446" name="Right Arrow 17445"/>
+          <p:cNvSpPr/>
+          <p:nvPr/>
+        </p:nvSpPr>
+        <p:spPr>
+          <a:xfrm>
+            <a:off x="4160520" y="4663440"/>
+            <a:ext cx="164592" cy="164592"/>
+          </a:xfrm>
+          <a:prstGeom prst="rightArrow">
+            <a:avLst/>
+          </a:prstGeom>
+          <a:solidFill>
+            <a:srgbClr val="4A5A70"/>
+          </a:solidFill>
+          <a:ln>
+            <a:noFill/>
+          </a:ln>
+          <a:effectLst/>
+        </p:spPr>
+        <p:style>
+          <a:lnRef idx="1">
+            <a:schemeClr val="accent1"/>
+          </a:lnRef>
+          <a:fillRef idx="3">
+            <a:schemeClr val="accent1"/>
+          </a:fillRef>
+          <a:effectRef idx="2">
+            <a:schemeClr val="accent1"/>
+          </a:effectRef>
+          <a:fontRef idx="minor">
+            <a:schemeClr val="lt1"/>
+          </a:fontRef>
+        </p:style>
+        <p:txBody>
+          <a:bodyPr rtlCol="0" anchor="ctr"/>
+          <a:lstStyle/>
+          <a:p>
+            <a:pPr algn="ctr"/>
+          </a:p>
+        </p:txBody>
+      </p:sp>
+      <p:sp>
+        <p:nvSpPr>
+          <p:cNvPr id="17447" name="Rounded Rectangle 17446"/>
+          <p:cNvSpPr/>
+          <p:nvPr/>
+        </p:nvSpPr>
+        <p:spPr>
+          <a:xfrm>
+            <a:off x="4370831" y="4535424"/>
+            <a:ext cx="1645920" cy="384048"/>
+          </a:xfrm>
+          <a:prstGeom prst="roundRect">
+            <a:avLst/>
+          </a:prstGeom>
+          <a:solidFill>
+            <a:srgbClr val="FFFFFF"/>
+          </a:solidFill>
+          <a:ln w="9525">
+            <a:solidFill>
+              <a:srgbClr val="C2D4E6"/>
+            </a:solidFill>
+          </a:ln>
+          <a:effectLst/>
+        </p:spPr>
+        <p:style>
+          <a:lnRef idx="1">
+            <a:schemeClr val="accent1"/>
+          </a:lnRef>
+          <a:fillRef idx="3">
+            <a:schemeClr val="accent1"/>
+          </a:fillRef>
+          <a:effectRef idx="2">
+            <a:schemeClr val="accent1"/>
+          </a:effectRef>
+          <a:fontRef idx="minor">
+            <a:schemeClr val="lt1"/>
+          </a:fontRef>
+        </p:style>
+        <p:txBody>
+          <a:bodyPr rtlCol="0" anchor="ctr" wrap="square" tIns="54864" bIns="54864"/>
+          <a:lstStyle/>
+          <a:p>
+            <a:pPr algn="ctr">
+              <a:lnSpc>
+                <a:spcPct val="88000"/>
+              </a:lnSpc>
+              <a:spcAft>
+                <a:spcPts val="100"/>
+              </a:spcAft>
+              <a:buNone/>
+            </a:pPr>
+            <a:r>
+              <a:rPr sz="1050" b="1">
+                <a:solidFill>
+                  <a:srgbClr val="0B5FA5"/>
+                </a:solidFill>
+                <a:latin typeface="Calibri"/>
+              </a:rPr>
+              <a:t>CRYPTO FACT</a:t>
+            </a:r>
+          </a:p>
+        </p:txBody>
+      </p:sp>
+      <p:sp>
+        <p:nvSpPr>
+          <p:cNvPr id="17448" name="Right Arrow 17447"/>
+          <p:cNvSpPr/>
+          <p:nvPr/>
+        </p:nvSpPr>
+        <p:spPr>
+          <a:xfrm>
+            <a:off x="6044183" y="4663440"/>
+            <a:ext cx="164592" cy="164592"/>
+          </a:xfrm>
+          <a:prstGeom prst="rightArrow">
+            <a:avLst/>
+          </a:prstGeom>
+          <a:solidFill>
+            <a:srgbClr val="4A5A70"/>
+          </a:solidFill>
+          <a:ln>
+            <a:noFill/>
+          </a:ln>
+          <a:effectLst/>
+        </p:spPr>
+        <p:style>
+          <a:lnRef idx="1">
+            <a:schemeClr val="accent1"/>
+          </a:lnRef>
+          <a:fillRef idx="3">
+            <a:schemeClr val="accent1"/>
+          </a:fillRef>
+          <a:effectRef idx="2">
+            <a:schemeClr val="accent1"/>
+          </a:effectRef>
+          <a:fontRef idx="minor">
+            <a:schemeClr val="lt1"/>
+          </a:fontRef>
+        </p:style>
+        <p:txBody>
+          <a:bodyPr rtlCol="0" anchor="ctr"/>
+          <a:lstStyle/>
+          <a:p>
+            <a:pPr algn="ctr"/>
+          </a:p>
+        </p:txBody>
+      </p:sp>
+      <p:sp>
+        <p:nvSpPr>
+          <p:cNvPr id="17449" name="Rounded Rectangle 17448"/>
+          <p:cNvSpPr/>
+          <p:nvPr/>
+        </p:nvSpPr>
+        <p:spPr>
+          <a:xfrm>
+            <a:off x="6254495" y="4535424"/>
+            <a:ext cx="1645920" cy="384048"/>
+          </a:xfrm>
+          <a:prstGeom prst="roundRect">
+            <a:avLst/>
+          </a:prstGeom>
+          <a:solidFill>
+            <a:srgbClr val="FFFFFF"/>
+          </a:solidFill>
+          <a:ln w="9525">
+            <a:solidFill>
+              <a:srgbClr val="C2D4E6"/>
+            </a:solidFill>
+          </a:ln>
+          <a:effectLst/>
+        </p:spPr>
+        <p:style>
+          <a:lnRef idx="1">
+            <a:schemeClr val="accent1"/>
+          </a:lnRef>
+          <a:fillRef idx="3">
+            <a:schemeClr val="accent1"/>
+          </a:fillRef>
+          <a:effectRef idx="2">
+            <a:schemeClr val="accent1"/>
+          </a:effectRef>
+          <a:fontRef idx="minor">
+            <a:schemeClr val="lt1"/>
+          </a:fontRef>
+        </p:style>
+        <p:txBody>
+          <a:bodyPr rtlCol="0" anchor="ctr" wrap="square" tIns="54864" bIns="54864"/>
+          <a:lstStyle/>
+          <a:p>
+            <a:pPr algn="ctr">
+              <a:lnSpc>
+                <a:spcPct val="88000"/>
+              </a:lnSpc>
+              <a:spcAft>
+                <a:spcPts val="100"/>
+              </a:spcAft>
+              <a:buNone/>
+            </a:pPr>
+            <a:r>
+              <a:rPr sz="1050" b="1">
+                <a:solidFill>
+                  <a:srgbClr val="0B5FA5"/>
+                </a:solidFill>
+                <a:latin typeface="Calibri"/>
+              </a:rPr>
+              <a:t>RULE</a:t>
+            </a:r>
+          </a:p>
+        </p:txBody>
+      </p:sp>
+      <p:sp>
+        <p:nvSpPr>
+          <p:cNvPr id="17450" name="Right Arrow 17449"/>
+          <p:cNvSpPr/>
+          <p:nvPr/>
+        </p:nvSpPr>
+        <p:spPr>
+          <a:xfrm>
+            <a:off x="7927847" y="4663440"/>
+            <a:ext cx="164592" cy="164592"/>
+          </a:xfrm>
+          <a:prstGeom prst="rightArrow">
+            <a:avLst/>
+          </a:prstGeom>
+          <a:solidFill>
+            <a:srgbClr val="4A5A70"/>
+          </a:solidFill>
+          <a:ln>
+            <a:noFill/>
+          </a:ln>
+          <a:effectLst/>
+        </p:spPr>
+        <p:style>
+          <a:lnRef idx="1">
+            <a:schemeClr val="accent1"/>
+          </a:lnRef>
+          <a:fillRef idx="3">
+            <a:schemeClr val="accent1"/>
+          </a:fillRef>
+          <a:effectRef idx="2">
+            <a:schemeClr val="accent1"/>
+          </a:effectRef>
+          <a:fontRef idx="minor">
+            <a:schemeClr val="lt1"/>
+          </a:fontRef>
+        </p:style>
+        <p:txBody>
+          <a:bodyPr rtlCol="0" anchor="ctr"/>
+          <a:lstStyle/>
+          <a:p>
+            <a:pPr algn="ctr"/>
+          </a:p>
+        </p:txBody>
+      </p:sp>
+      <p:sp>
+        <p:nvSpPr>
+          <p:cNvPr id="17451" name="Rounded Rectangle 17450"/>
+          <p:cNvSpPr/>
+          <p:nvPr/>
+        </p:nvSpPr>
+        <p:spPr>
+          <a:xfrm>
+            <a:off x="8138159" y="4535424"/>
+            <a:ext cx="1645920" cy="384048"/>
+          </a:xfrm>
+          <a:prstGeom prst="roundRect">
+            <a:avLst/>
+          </a:prstGeom>
+          <a:solidFill>
+            <a:srgbClr val="FFFFFF"/>
+          </a:solidFill>
+          <a:ln w="9525">
+            <a:solidFill>
+              <a:srgbClr val="C2D4E6"/>
+            </a:solidFill>
+          </a:ln>
+          <a:effectLst/>
+        </p:spPr>
+        <p:style>
+          <a:lnRef idx="1">
+            <a:schemeClr val="accent1"/>
+          </a:lnRef>
+          <a:fillRef idx="3">
+            <a:schemeClr val="accent1"/>
+          </a:fillRef>
+          <a:effectRef idx="2">
+            <a:schemeClr val="accent1"/>
+          </a:effectRef>
+          <a:fontRef idx="minor">
+            <a:schemeClr val="lt1"/>
+          </a:fontRef>
+        </p:style>
+        <p:txBody>
+          <a:bodyPr rtlCol="0" anchor="ctr" wrap="square" tIns="54864" bIns="54864"/>
+          <a:lstStyle/>
+          <a:p>
+            <a:pPr algn="ctr">
+              <a:lnSpc>
+                <a:spcPct val="88000"/>
+              </a:lnSpc>
+              <a:spcAft>
+                <a:spcPts val="100"/>
+              </a:spcAft>
+              <a:buNone/>
+            </a:pPr>
+            <a:r>
+              <a:rPr sz="1050" b="1">
+                <a:solidFill>
+                  <a:srgbClr val="0B5FA5"/>
+                </a:solidFill>
+                <a:latin typeface="Calibri"/>
+              </a:rPr>
+              <a:t>FINDING</a:t>
+            </a:r>
+          </a:p>
+        </p:txBody>
+      </p:sp>
+      <p:sp>
+        <p:nvSpPr>
+          <p:cNvPr id="17452" name="Right Arrow 17451"/>
+          <p:cNvSpPr/>
+          <p:nvPr/>
+        </p:nvSpPr>
+        <p:spPr>
+          <a:xfrm>
+            <a:off x="9811511" y="4663440"/>
+            <a:ext cx="164592" cy="164592"/>
+          </a:xfrm>
+          <a:prstGeom prst="rightArrow">
+            <a:avLst/>
+          </a:prstGeom>
+          <a:solidFill>
+            <a:srgbClr val="4A5A70"/>
+          </a:solidFill>
+          <a:ln>
+            <a:noFill/>
+          </a:ln>
+          <a:effectLst/>
+        </p:spPr>
+        <p:style>
+          <a:lnRef idx="1">
+            <a:schemeClr val="accent1"/>
+          </a:lnRef>
+          <a:fillRef idx="3">
+            <a:schemeClr val="accent1"/>
+          </a:fillRef>
+          <a:effectRef idx="2">
+            <a:schemeClr val="accent1"/>
+          </a:effectRef>
+          <a:fontRef idx="minor">
+            <a:schemeClr val="lt1"/>
+          </a:fontRef>
+        </p:style>
+        <p:txBody>
+          <a:bodyPr rtlCol="0" anchor="ctr"/>
+          <a:lstStyle/>
+          <a:p>
+            <a:pPr algn="ctr"/>
+          </a:p>
+        </p:txBody>
+      </p:sp>
+      <p:sp>
+        <p:nvSpPr>
+          <p:cNvPr id="17453" name="Rounded Rectangle 17452"/>
+          <p:cNvSpPr/>
+          <p:nvPr/>
+        </p:nvSpPr>
+        <p:spPr>
+          <a:xfrm>
+            <a:off x="10021824" y="4535424"/>
+            <a:ext cx="1645920" cy="384048"/>
+          </a:xfrm>
+          <a:prstGeom prst="roundRect">
+            <a:avLst/>
+          </a:prstGeom>
+          <a:solidFill>
+            <a:srgbClr val="FFFFFF"/>
+          </a:solidFill>
+          <a:ln w="9525">
+            <a:solidFill>
+              <a:srgbClr val="C2D4E6"/>
+            </a:solidFill>
+          </a:ln>
+          <a:effectLst/>
+        </p:spPr>
+        <p:style>
+          <a:lnRef idx="1">
+            <a:schemeClr val="accent1"/>
+          </a:lnRef>
+          <a:fillRef idx="3">
+            <a:schemeClr val="accent1"/>
+          </a:fillRef>
+          <a:effectRef idx="2">
+            <a:schemeClr val="accent1"/>
+          </a:effectRef>
+          <a:fontRef idx="minor">
+            <a:schemeClr val="lt1"/>
+          </a:fontRef>
+        </p:style>
+        <p:txBody>
+          <a:bodyPr rtlCol="0" anchor="ctr" wrap="square" tIns="54864" bIns="54864"/>
+          <a:lstStyle/>
+          <a:p>
+            <a:pPr algn="ctr">
+              <a:lnSpc>
+                <a:spcPct val="88000"/>
+              </a:lnSpc>
+              <a:spcAft>
+                <a:spcPts val="100"/>
+              </a:spcAft>
+              <a:buNone/>
+            </a:pPr>
+            <a:r>
+              <a:rPr sz="1050" b="1">
+                <a:solidFill>
+                  <a:srgbClr val="0B5FA5"/>
+                </a:solidFill>
+                <a:latin typeface="Calibri"/>
+              </a:rPr>
+              <a:t>REMEDIATION</a:t>
+            </a:r>
+          </a:p>
+        </p:txBody>
+      </p:sp>
+      <p:sp>
+        <p:nvSpPr>
+          <p:cNvPr id="17454" name="Rounded Rectangle 17453"/>
+          <p:cNvSpPr/>
+          <p:nvPr/>
+        </p:nvSpPr>
+        <p:spPr>
+          <a:xfrm>
+            <a:off x="384048" y="5175504"/>
+            <a:ext cx="2103120" cy="676656"/>
           </a:xfrm>
           <a:prstGeom prst="roundRect">
             <a:avLst/>
@@ -9494,7 +10335,7 @@
           <a:p>
             <a:pPr algn="ctr">
               <a:lnSpc>
-                <a:spcPct val="90000"/>
+                <a:spcPct val="94000"/>
               </a:lnSpc>
               <a:spcAft>
                 <a:spcPts val="300"/>
@@ -9502,19 +10343,19 @@
               <a:buNone/>
             </a:pPr>
             <a:r>
-              <a:rPr sz="950" b="1">
+              <a:rPr sz="1050" b="1">
                 <a:solidFill>
                   <a:srgbClr val="0B5FA5"/>
                 </a:solidFill>
                 <a:latin typeface="Calibri"/>
               </a:rPr>
-              <a:t>Engine</a:t>
+              <a:t>ENGINE</a:t>
             </a:r>
           </a:p>
           <a:p>
             <a:pPr>
               <a:lnSpc>
-                <a:spcPct val="90000"/>
+                <a:spcPct val="94000"/>
               </a:lnSpc>
               <a:spcAft>
                 <a:spcPts val="300"/>
@@ -9522,27 +10363,27 @@
               <a:buNone/>
             </a:pPr>
             <a:r>
-              <a:rPr sz="800" b="0">
+              <a:rPr sz="950" b="0">
                 <a:solidFill>
                   <a:srgbClr val="1F2C3F"/>
                 </a:solidFill>
                 <a:latin typeface="Calibri"/>
               </a:rPr>
-              <a:t>Python 3.12 · Scapy (dissection only) · cryptography · Pydantic · scikit-learn</a:t>
-            </a:r>
-          </a:p>
-        </p:txBody>
-      </p:sp>
-      <p:sp>
-        <p:nvSpPr>
-          <p:cNvPr id="17444" name="Rounded Rectangle 17443"/>
+              <a:t>Python · Scapy · cryptography</a:t>
+            </a:r>
+          </a:p>
+        </p:txBody>
+      </p:sp>
+      <p:sp>
+        <p:nvSpPr>
+          <p:cNvPr id="17455" name="Rounded Rectangle 17454"/>
           <p:cNvSpPr/>
           <p:nvPr/>
         </p:nvSpPr>
         <p:spPr>
           <a:xfrm>
-            <a:off x="4224528" y="5010912"/>
-            <a:ext cx="3749039" cy="969264"/>
+            <a:off x="2578608" y="5175504"/>
+            <a:ext cx="2103120" cy="676656"/>
           </a:xfrm>
           <a:prstGeom prst="roundRect">
             <a:avLst/>
@@ -9577,7 +10418,7 @@
           <a:p>
             <a:pPr algn="ctr">
               <a:lnSpc>
-                <a:spcPct val="90000"/>
+                <a:spcPct val="94000"/>
               </a:lnSpc>
               <a:spcAft>
                 <a:spcPts val="300"/>
@@ -9585,19 +10426,19 @@
               <a:buNone/>
             </a:pPr>
             <a:r>
-              <a:rPr sz="950" b="1">
+              <a:rPr sz="1050" b="1">
                 <a:solidFill>
                   <a:srgbClr val="0B5FA5"/>
                 </a:solidFill>
                 <a:latin typeface="Calibri"/>
               </a:rPr>
-              <a:t>Interface and API</a:t>
+              <a:t>APPLICATION</a:t>
             </a:r>
           </a:p>
           <a:p>
             <a:pPr>
               <a:lnSpc>
-                <a:spcPct val="90000"/>
+                <a:spcPct val="94000"/>
               </a:lnSpc>
               <a:spcAft>
                 <a:spcPts val="300"/>
@@ -9605,27 +10446,27 @@
               <a:buNone/>
             </a:pPr>
             <a:r>
-              <a:rPr sz="800" b="0">
+              <a:rPr sz="950" b="0">
                 <a:solidFill>
                   <a:srgbClr val="1F2C3F"/>
                 </a:solidFill>
                 <a:latin typeface="Calibri"/>
               </a:rPr>
-              <a:t>FastAPI · SQLite · SQLAlchemy · React 18 · TypeScript strict · Vite · Tailwind</a:t>
-            </a:r>
-          </a:p>
-        </p:txBody>
-      </p:sp>
-      <p:sp>
-        <p:nvSpPr>
-          <p:cNvPr id="17445" name="Rounded Rectangle 17444"/>
+              <a:t>FastAPI · SQLite · React · TypeScript</a:t>
+            </a:r>
+          </a:p>
+        </p:txBody>
+      </p:sp>
+      <p:sp>
+        <p:nvSpPr>
+          <p:cNvPr id="17456" name="Rounded Rectangle 17455"/>
           <p:cNvSpPr/>
           <p:nvPr/>
         </p:nvSpPr>
         <p:spPr>
           <a:xfrm>
-            <a:off x="8065008" y="5010912"/>
-            <a:ext cx="3749039" cy="969264"/>
+            <a:off x="4773168" y="5175504"/>
+            <a:ext cx="2103120" cy="676656"/>
           </a:xfrm>
           <a:prstGeom prst="roundRect">
             <a:avLst/>
@@ -9660,7 +10501,7 @@
           <a:p>
             <a:pPr algn="ctr">
               <a:lnSpc>
-                <a:spcPct val="90000"/>
+                <a:spcPct val="94000"/>
               </a:lnSpc>
               <a:spcAft>
                 <a:spcPts val="300"/>
@@ -9668,19 +10509,19 @@
               <a:buNone/>
             </a:pPr>
             <a:r>
-              <a:rPr sz="950" b="1">
+              <a:rPr sz="1050" b="1">
                 <a:solidFill>
                   <a:srgbClr val="0B5FA5"/>
                 </a:solidFill>
                 <a:latin typeface="Calibri"/>
               </a:rPr>
-              <a:t>Verification</a:t>
+              <a:t>ANALYTICS</a:t>
             </a:r>
           </a:p>
           <a:p>
             <a:pPr>
               <a:lnSpc>
-                <a:spcPct val="90000"/>
+                <a:spcPct val="94000"/>
               </a:lnSpc>
               <a:spcAft>
                 <a:spcPts val="300"/>
@@ -9688,13 +10529,285 @@
               <a:buNone/>
             </a:pPr>
             <a:r>
-              <a:rPr sz="800" b="0">
+              <a:rPr sz="950" b="0">
                 <a:solidFill>
                   <a:srgbClr val="1F2C3F"/>
                 </a:solidFill>
                 <a:latin typeface="Calibri"/>
               </a:rPr>
-              <a:t>pytest · hypothesis · Vitest · Playwright · TShark as an independent dissector</a:t>
+              <a:t>scikit-learn</a:t>
+            </a:r>
+          </a:p>
+        </p:txBody>
+      </p:sp>
+      <p:sp>
+        <p:nvSpPr>
+          <p:cNvPr id="17457" name="Rounded Rectangle 17456"/>
+          <p:cNvSpPr/>
+          <p:nvPr/>
+        </p:nvSpPr>
+        <p:spPr>
+          <a:xfrm>
+            <a:off x="6967727" y="5175504"/>
+            <a:ext cx="2103120" cy="676656"/>
+          </a:xfrm>
+          <a:prstGeom prst="roundRect">
+            <a:avLst/>
+          </a:prstGeom>
+          <a:solidFill>
+            <a:srgbClr val="EEF3F9"/>
+          </a:solidFill>
+          <a:ln w="9525">
+            <a:solidFill>
+              <a:srgbClr val="C2D4E6"/>
+            </a:solidFill>
+          </a:ln>
+          <a:effectLst/>
+        </p:spPr>
+        <p:style>
+          <a:lnRef idx="1">
+            <a:schemeClr val="accent1"/>
+          </a:lnRef>
+          <a:fillRef idx="3">
+            <a:schemeClr val="accent1"/>
+          </a:fillRef>
+          <a:effectRef idx="2">
+            <a:schemeClr val="accent1"/>
+          </a:effectRef>
+          <a:fontRef idx="minor">
+            <a:schemeClr val="lt1"/>
+          </a:fontRef>
+        </p:style>
+        <p:txBody>
+          <a:bodyPr rtlCol="0" anchor="t" wrap="square" tIns="54864" bIns="54864"/>
+          <a:lstStyle/>
+          <a:p>
+            <a:pPr algn="ctr">
+              <a:lnSpc>
+                <a:spcPct val="94000"/>
+              </a:lnSpc>
+              <a:spcAft>
+                <a:spcPts val="300"/>
+              </a:spcAft>
+              <a:buNone/>
+            </a:pPr>
+            <a:r>
+              <a:rPr sz="1050" b="1">
+                <a:solidFill>
+                  <a:srgbClr val="0B5FA5"/>
+                </a:solidFill>
+                <a:latin typeface="Calibri"/>
+              </a:rPr>
+              <a:t>VALIDATION</a:t>
+            </a:r>
+          </a:p>
+          <a:p>
+            <a:pPr>
+              <a:lnSpc>
+                <a:spcPct val="94000"/>
+              </a:lnSpc>
+              <a:spcAft>
+                <a:spcPts val="300"/>
+              </a:spcAft>
+              <a:buNone/>
+            </a:pPr>
+            <a:r>
+              <a:rPr sz="950" b="0">
+                <a:solidFill>
+                  <a:srgbClr val="1F2C3F"/>
+                </a:solidFill>
+                <a:latin typeface="Calibri"/>
+              </a:rPr>
+              <a:t>pytest · Playwright · TShark</a:t>
+            </a:r>
+          </a:p>
+        </p:txBody>
+      </p:sp>
+      <p:sp>
+        <p:nvSpPr>
+          <p:cNvPr id="17458" name="Rounded Rectangle 17457"/>
+          <p:cNvSpPr/>
+          <p:nvPr/>
+        </p:nvSpPr>
+        <p:spPr>
+          <a:xfrm>
+            <a:off x="9162288" y="5175504"/>
+            <a:ext cx="932688" cy="676656"/>
+          </a:xfrm>
+          <a:prstGeom prst="roundRect">
+            <a:avLst/>
+          </a:prstGeom>
+          <a:solidFill>
+            <a:srgbClr val="FFFFFF"/>
+          </a:solidFill>
+          <a:ln w="9525">
+            <a:solidFill>
+              <a:srgbClr val="C2D4E6"/>
+            </a:solidFill>
+          </a:ln>
+          <a:effectLst/>
+        </p:spPr>
+        <p:style>
+          <a:lnRef idx="1">
+            <a:schemeClr val="accent1"/>
+          </a:lnRef>
+          <a:fillRef idx="3">
+            <a:schemeClr val="accent1"/>
+          </a:fillRef>
+          <a:effectRef idx="2">
+            <a:schemeClr val="accent1"/>
+          </a:effectRef>
+          <a:fontRef idx="minor">
+            <a:schemeClr val="lt1"/>
+          </a:fontRef>
+        </p:style>
+        <p:txBody>
+          <a:bodyPr rtlCol="0" anchor="ctr" wrap="square" tIns="54864" bIns="54864"/>
+          <a:lstStyle/>
+          <a:p>
+            <a:pPr algn="ctr">
+              <a:lnSpc>
+                <a:spcPct val="88000"/>
+              </a:lnSpc>
+              <a:spcAft>
+                <a:spcPts val="100"/>
+              </a:spcAft>
+              <a:buNone/>
+            </a:pPr>
+            <a:r>
+              <a:rPr sz="900" b="1">
+                <a:solidFill>
+                  <a:srgbClr val="1B6B3A"/>
+                </a:solidFill>
+                <a:latin typeface="Calibri"/>
+              </a:rPr>
+              <a:t>PASSIVE</a:t>
+            </a:r>
+          </a:p>
+        </p:txBody>
+      </p:sp>
+      <p:sp>
+        <p:nvSpPr>
+          <p:cNvPr id="17459" name="Rounded Rectangle 17458"/>
+          <p:cNvSpPr/>
+          <p:nvPr/>
+        </p:nvSpPr>
+        <p:spPr>
+          <a:xfrm>
+            <a:off x="10149840" y="5175504"/>
+            <a:ext cx="932688" cy="676656"/>
+          </a:xfrm>
+          <a:prstGeom prst="roundRect">
+            <a:avLst/>
+          </a:prstGeom>
+          <a:solidFill>
+            <a:srgbClr val="FFFFFF"/>
+          </a:solidFill>
+          <a:ln w="9525">
+            <a:solidFill>
+              <a:srgbClr val="C2D4E6"/>
+            </a:solidFill>
+          </a:ln>
+          <a:effectLst/>
+        </p:spPr>
+        <p:style>
+          <a:lnRef idx="1">
+            <a:schemeClr val="accent1"/>
+          </a:lnRef>
+          <a:fillRef idx="3">
+            <a:schemeClr val="accent1"/>
+          </a:fillRef>
+          <a:effectRef idx="2">
+            <a:schemeClr val="accent1"/>
+          </a:effectRef>
+          <a:fontRef idx="minor">
+            <a:schemeClr val="lt1"/>
+          </a:fontRef>
+        </p:style>
+        <p:txBody>
+          <a:bodyPr rtlCol="0" anchor="ctr" wrap="square" tIns="54864" bIns="54864"/>
+          <a:lstStyle/>
+          <a:p>
+            <a:pPr algn="ctr">
+              <a:lnSpc>
+                <a:spcPct val="88000"/>
+              </a:lnSpc>
+              <a:spcAft>
+                <a:spcPts val="100"/>
+              </a:spcAft>
+              <a:buNone/>
+            </a:pPr>
+            <a:r>
+              <a:rPr sz="900" b="1">
+                <a:solidFill>
+                  <a:srgbClr val="0B5FA5"/>
+                </a:solidFill>
+                <a:latin typeface="Calibri"/>
+              </a:rPr>
+              <a:t>LOCAL-FIRST</a:t>
+            </a:r>
+          </a:p>
+        </p:txBody>
+      </p:sp>
+      <p:sp>
+        <p:nvSpPr>
+          <p:cNvPr id="17460" name="Rounded Rectangle 17459"/>
+          <p:cNvSpPr/>
+          <p:nvPr/>
+        </p:nvSpPr>
+        <p:spPr>
+          <a:xfrm>
+            <a:off x="11137392" y="5175504"/>
+            <a:ext cx="932688" cy="676656"/>
+          </a:xfrm>
+          <a:prstGeom prst="roundRect">
+            <a:avLst/>
+          </a:prstGeom>
+          <a:solidFill>
+            <a:srgbClr val="FFFFFF"/>
+          </a:solidFill>
+          <a:ln w="9525">
+            <a:solidFill>
+              <a:srgbClr val="C2D4E6"/>
+            </a:solidFill>
+          </a:ln>
+          <a:effectLst/>
+        </p:spPr>
+        <p:style>
+          <a:lnRef idx="1">
+            <a:schemeClr val="accent1"/>
+          </a:lnRef>
+          <a:fillRef idx="3">
+            <a:schemeClr val="accent1"/>
+          </a:fillRef>
+          <a:effectRef idx="2">
+            <a:schemeClr val="accent1"/>
+          </a:effectRef>
+          <a:fontRef idx="minor">
+            <a:schemeClr val="lt1"/>
+          </a:fontRef>
+        </p:style>
+        <p:txBody>
+          <a:bodyPr rtlCol="0" anchor="ctr" wrap="square" tIns="54864" bIns="54864"/>
+          <a:lstStyle/>
+          <a:p>
+            <a:pPr algn="ctr">
+              <a:lnSpc>
+                <a:spcPct val="88000"/>
+              </a:lnSpc>
+              <a:spcAft>
+                <a:spcPts val="100"/>
+              </a:spcAft>
+              <a:buNone/>
+            </a:pPr>
+            <a:r>
+              <a:rPr sz="900" b="1">
+                <a:solidFill>
+                  <a:srgbClr val="A83A1E"/>
+                </a:solidFill>
+                <a:latin typeface="Calibri"/>
+              </a:rPr>
+              <a:t>EVIDENCE-LINKED</a:t>
             </a:r>
           </a:p>
         </p:txBody>
@@ -9840,8 +10953,8 @@
         </p:nvSpPr>
         <p:spPr bwMode="auto">
           <a:xfrm>
-            <a:off x="384048" y="969264"/>
-            <a:ext cx="11430000" cy="310896"/>
+            <a:off x="384048" y="950976"/>
+            <a:ext cx="11430000" cy="329184"/>
           </a:xfrm>
           <a:prstGeom prst="rect">
             <a:avLst/>
@@ -9878,13 +10991,13 @@
               <a:buNone/>
             </a:pPr>
             <a:r>
-              <a:rPr sz="1000" b="0">
+              <a:rPr sz="1300" b="0">
                 <a:solidFill>
                   <a:srgbClr val="4A5A70"/>
                 </a:solidFill>
                 <a:latin typeface="Calibri"/>
               </a:rPr>
-              <a:t>Feasible because it is built and measured. Every figure below is from the release commit, re-run — not an estimate.</a:t>
+              <a:t>Feasible because it is built and measured. Every figure below was re-run on the release commit.</a:t>
             </a:r>
             <a:endParaRPr kumimoji="0" lang="en-US" sz="2800" b="0" i="0" u="none" strike="noStrike" kern="1200" cap="none" spc="0" normalizeH="0" baseline="0" noProof="0" dirty="0">
               <a:ln>
@@ -10147,7 +11260,7 @@
         <p:spPr>
           <a:xfrm>
             <a:off x="384048" y="1316736"/>
-            <a:ext cx="1847088" cy="786384"/>
+            <a:ext cx="1847088" cy="969264"/>
           </a:xfrm>
           <a:prstGeom prst="roundRect">
             <a:avLst/>
@@ -10182,7 +11295,7 @@
           <a:p>
             <a:pPr algn="ctr">
               <a:lnSpc>
-                <a:spcPct val="84000"/>
+                <a:spcPct val="86000"/>
               </a:lnSpc>
               <a:spcAft>
                 <a:spcPts val="0"/>
@@ -10190,7 +11303,7 @@
               <a:buNone/>
             </a:pPr>
             <a:r>
-              <a:rPr sz="2200" b="1">
+              <a:rPr sz="3200" b="1">
                 <a:solidFill>
                   <a:srgbClr val="0B5FA5"/>
                 </a:solidFill>
@@ -10202,7 +11315,7 @@
           <a:p>
             <a:pPr algn="ctr">
               <a:lnSpc>
-                <a:spcPct val="84000"/>
+                <a:spcPct val="86000"/>
               </a:lnSpc>
               <a:spcAft>
                 <a:spcPts val="0"/>
@@ -10210,7 +11323,7 @@
               <a:buNone/>
             </a:pPr>
             <a:r>
-              <a:rPr sz="750" b="0">
+              <a:rPr sz="950" b="0">
                 <a:solidFill>
                   <a:srgbClr val="4A5A70"/>
                 </a:solidFill>
@@ -10230,7 +11343,7 @@
         <p:spPr>
           <a:xfrm>
             <a:off x="2322576" y="1316736"/>
-            <a:ext cx="1847088" cy="786384"/>
+            <a:ext cx="1847088" cy="969264"/>
           </a:xfrm>
           <a:prstGeom prst="roundRect">
             <a:avLst/>
@@ -10265,7 +11378,7 @@
           <a:p>
             <a:pPr algn="ctr">
               <a:lnSpc>
-                <a:spcPct val="84000"/>
+                <a:spcPct val="86000"/>
               </a:lnSpc>
               <a:spcAft>
                 <a:spcPts val="0"/>
@@ -10273,7 +11386,7 @@
               <a:buNone/>
             </a:pPr>
             <a:r>
-              <a:rPr sz="2200" b="1">
+              <a:rPr sz="3200" b="1">
                 <a:solidFill>
                   <a:srgbClr val="0B5FA5"/>
                 </a:solidFill>
@@ -10285,7 +11398,7 @@
           <a:p>
             <a:pPr algn="ctr">
               <a:lnSpc>
-                <a:spcPct val="84000"/>
+                <a:spcPct val="86000"/>
               </a:lnSpc>
               <a:spcAft>
                 <a:spcPts val="0"/>
@@ -10293,7 +11406,7 @@
               <a:buNone/>
             </a:pPr>
             <a:r>
-              <a:rPr sz="750" b="0">
+              <a:rPr sz="950" b="0">
                 <a:solidFill>
                   <a:srgbClr val="4A5A70"/>
                 </a:solidFill>
@@ -10313,7 +11426,7 @@
         <p:spPr>
           <a:xfrm>
             <a:off x="4261104" y="1316736"/>
-            <a:ext cx="1847088" cy="786384"/>
+            <a:ext cx="1847088" cy="969264"/>
           </a:xfrm>
           <a:prstGeom prst="roundRect">
             <a:avLst/>
@@ -10348,7 +11461,7 @@
           <a:p>
             <a:pPr algn="ctr">
               <a:lnSpc>
-                <a:spcPct val="84000"/>
+                <a:spcPct val="86000"/>
               </a:lnSpc>
               <a:spcAft>
                 <a:spcPts val="0"/>
@@ -10356,7 +11469,7 @@
               <a:buNone/>
             </a:pPr>
             <a:r>
-              <a:rPr sz="2200" b="1">
+              <a:rPr sz="3200" b="1">
                 <a:solidFill>
                   <a:srgbClr val="0B5FA5"/>
                 </a:solidFill>
@@ -10368,7 +11481,7 @@
           <a:p>
             <a:pPr algn="ctr">
               <a:lnSpc>
-                <a:spcPct val="84000"/>
+                <a:spcPct val="86000"/>
               </a:lnSpc>
               <a:spcAft>
                 <a:spcPts val="0"/>
@@ -10376,7 +11489,7 @@
               <a:buNone/>
             </a:pPr>
             <a:r>
-              <a:rPr sz="750" b="0">
+              <a:rPr sz="950" b="0">
                 <a:solidFill>
                   <a:srgbClr val="4A5A70"/>
                 </a:solidFill>
@@ -10396,7 +11509,7 @@
         <p:spPr>
           <a:xfrm>
             <a:off x="6199632" y="1316736"/>
-            <a:ext cx="1847088" cy="786384"/>
+            <a:ext cx="1847088" cy="969264"/>
           </a:xfrm>
           <a:prstGeom prst="roundRect">
             <a:avLst/>
@@ -10431,7 +11544,7 @@
           <a:p>
             <a:pPr algn="ctr">
               <a:lnSpc>
-                <a:spcPct val="84000"/>
+                <a:spcPct val="86000"/>
               </a:lnSpc>
               <a:spcAft>
                 <a:spcPts val="0"/>
@@ -10439,7 +11552,7 @@
               <a:buNone/>
             </a:pPr>
             <a:r>
-              <a:rPr sz="2200" b="1">
+              <a:rPr sz="3200" b="1">
                 <a:solidFill>
                   <a:srgbClr val="0B5FA5"/>
                 </a:solidFill>
@@ -10451,7 +11564,7 @@
           <a:p>
             <a:pPr algn="ctr">
               <a:lnSpc>
-                <a:spcPct val="84000"/>
+                <a:spcPct val="86000"/>
               </a:lnSpc>
               <a:spcAft>
                 <a:spcPts val="0"/>
@@ -10459,13 +11572,13 @@
               <a:buNone/>
             </a:pPr>
             <a:r>
-              <a:rPr sz="750" b="0">
+              <a:rPr sz="950" b="0">
                 <a:solidFill>
                   <a:srgbClr val="4A5A70"/>
                 </a:solidFill>
                 <a:latin typeface="Calibri"/>
               </a:rPr>
-              <a:t>browser end-to-end specs</a:t>
+              <a:t>real-backend E2E specs</a:t>
             </a:r>
           </a:p>
         </p:txBody>
@@ -10479,7 +11592,7 @@
         <p:spPr>
           <a:xfrm>
             <a:off x="8138160" y="1316736"/>
-            <a:ext cx="1847088" cy="786384"/>
+            <a:ext cx="1847088" cy="969264"/>
           </a:xfrm>
           <a:prstGeom prst="roundRect">
             <a:avLst/>
@@ -10514,7 +11627,7 @@
           <a:p>
             <a:pPr algn="ctr">
               <a:lnSpc>
-                <a:spcPct val="84000"/>
+                <a:spcPct val="86000"/>
               </a:lnSpc>
               <a:spcAft>
                 <a:spcPts val="0"/>
@@ -10522,7 +11635,7 @@
               <a:buNone/>
             </a:pPr>
             <a:r>
-              <a:rPr sz="2200" b="1">
+              <a:rPr sz="3200" b="1">
                 <a:solidFill>
                   <a:srgbClr val="0B5FA5"/>
                 </a:solidFill>
@@ -10534,7 +11647,7 @@
           <a:p>
             <a:pPr algn="ctr">
               <a:lnSpc>
-                <a:spcPct val="84000"/>
+                <a:spcPct val="86000"/>
               </a:lnSpc>
               <a:spcAft>
                 <a:spcPts val="0"/>
@@ -10542,7 +11655,7 @@
               <a:buNone/>
             </a:pPr>
             <a:r>
-              <a:rPr sz="750" b="0">
+              <a:rPr sz="950" b="0">
                 <a:solidFill>
                   <a:srgbClr val="4A5A70"/>
                 </a:solidFill>
@@ -10562,7 +11675,7 @@
         <p:spPr>
           <a:xfrm>
             <a:off x="10076688" y="1316736"/>
-            <a:ext cx="1847088" cy="786384"/>
+            <a:ext cx="1847088" cy="969264"/>
           </a:xfrm>
           <a:prstGeom prst="roundRect">
             <a:avLst/>
@@ -10597,7 +11710,7 @@
           <a:p>
             <a:pPr algn="ctr">
               <a:lnSpc>
-                <a:spcPct val="84000"/>
+                <a:spcPct val="86000"/>
               </a:lnSpc>
               <a:spcAft>
                 <a:spcPts val="0"/>
@@ -10605,7 +11718,7 @@
               <a:buNone/>
             </a:pPr>
             <a:r>
-              <a:rPr sz="2200" b="1">
+              <a:rPr sz="3200" b="1">
                 <a:solidFill>
                   <a:srgbClr val="1B6B3A"/>
                 </a:solidFill>
@@ -10617,7 +11730,7 @@
           <a:p>
             <a:pPr algn="ctr">
               <a:lnSpc>
-                <a:spcPct val="84000"/>
+                <a:spcPct val="86000"/>
               </a:lnSpc>
               <a:spcAft>
                 <a:spcPts val="0"/>
@@ -10625,27 +11738,138 @@
               <a:buNone/>
             </a:pPr>
             <a:r>
-              <a:rPr sz="750" b="0">
+              <a:rPr sz="950" b="0">
                 <a:solidFill>
                   <a:srgbClr val="4A5A70"/>
                 </a:solidFill>
                 <a:latin typeface="Calibri"/>
               </a:rPr>
-              <a:t>known dependency vulnerabilities</a:t>
-            </a:r>
-          </a:p>
-        </p:txBody>
-      </p:sp>
-      <p:sp>
-        <p:nvSpPr>
-          <p:cNvPr id="17417" name="Rounded Rectangle 17416"/>
+              <a:t>known advisories at audit</a:t>
+            </a:r>
+          </a:p>
+        </p:txBody>
+      </p:sp>
+      <p:pic>
+        <p:nvPicPr>
+          <p:cNvPr id="17417" name="Picture 17416" descr="crop-0.36-0.285-1.0-0.795-06-evidence-provenance.png"/>
+          <p:cNvPicPr>
+            <a:picLocks noChangeAspect="1"/>
+          </p:cNvPicPr>
+          <p:nvPr/>
+        </p:nvPicPr>
+        <p:blipFill>
+          <a:blip r:embed="rId4"/>
+          <a:stretch>
+            <a:fillRect/>
+          </a:stretch>
+        </p:blipFill>
+        <p:spPr>
+          <a:xfrm>
+            <a:off x="384048" y="2432304"/>
+            <a:ext cx="6492240" cy="2910679"/>
+          </a:xfrm>
+          <a:prstGeom prst="rect">
+            <a:avLst/>
+          </a:prstGeom>
+        </p:spPr>
+      </p:pic>
+      <p:sp>
+        <p:nvSpPr>
+          <p:cNvPr id="17418" name="Rectangle 17417"/>
           <p:cNvSpPr/>
           <p:nvPr/>
         </p:nvSpPr>
         <p:spPr>
           <a:xfrm>
-            <a:off x="384048" y="2212848"/>
-            <a:ext cx="5669280" cy="2496312"/>
+            <a:off x="384048" y="2432304"/>
+            <a:ext cx="6492240" cy="2910679"/>
+          </a:xfrm>
+          <a:prstGeom prst="rect">
+            <a:avLst/>
+          </a:prstGeom>
+          <a:noFill/>
+          <a:ln w="9525">
+            <a:solidFill>
+              <a:srgbClr val="C2D4E6"/>
+            </a:solidFill>
+          </a:ln>
+          <a:effectLst/>
+        </p:spPr>
+        <p:style>
+          <a:lnRef idx="1">
+            <a:schemeClr val="accent1"/>
+          </a:lnRef>
+          <a:fillRef idx="3">
+            <a:schemeClr val="accent1"/>
+          </a:fillRef>
+          <a:effectRef idx="2">
+            <a:schemeClr val="accent1"/>
+          </a:effectRef>
+          <a:fontRef idx="minor">
+            <a:schemeClr val="lt1"/>
+          </a:fontRef>
+        </p:style>
+        <p:txBody>
+          <a:bodyPr rtlCol="0" anchor="ctr"/>
+          <a:lstStyle/>
+          <a:p>
+            <a:pPr algn="ctr"/>
+          </a:p>
+        </p:txBody>
+      </p:sp>
+      <p:sp>
+        <p:nvSpPr>
+          <p:cNvPr id="17419" name="TextBox 17418"/>
+          <p:cNvSpPr txBox="1"/>
+          <p:nvPr/>
+        </p:nvSpPr>
+        <p:spPr>
+          <a:xfrm>
+            <a:off x="384048" y="5379559"/>
+            <a:ext cx="6492240" cy="256032"/>
+          </a:xfrm>
+          <a:prstGeom prst="rect">
+            <a:avLst/>
+          </a:prstGeom>
+          <a:noFill/>
+        </p:spPr>
+        <p:txBody>
+          <a:bodyPr wrap="square">
+            <a:spAutoFit/>
+          </a:bodyPr>
+          <a:lstStyle/>
+          <a:p>
+            <a:pPr algn="ctr">
+              <a:lnSpc>
+                <a:spcPct val="100000"/>
+              </a:lnSpc>
+              <a:spcAft>
+                <a:spcPts val="300"/>
+              </a:spcAft>
+              <a:buNone/>
+            </a:pPr>
+            <a:r>
+              <a:rPr sz="1100" b="0">
+                <a:solidFill>
+                  <a:srgbClr val="4A5A70"/>
+                </a:solidFill>
+                <a:latin typeface="Calibri"/>
+              </a:rPr>
+              <a:t>TLS-KEX-001, HIGH — and the packets it was evaluated against. Actual product output.</a:t>
+            </a:r>
+          </a:p>
+        </p:txBody>
+      </p:sp>
+      <p:sp>
+        <p:nvSpPr>
+          <p:cNvPr id="17420" name="Rounded Rectangle 17419"/>
+          <p:cNvSpPr/>
+          <p:nvPr/>
+        </p:nvSpPr>
+        <p:spPr>
+          <a:xfrm>
+            <a:off x="7552944" y="2432304"/>
+            <a:ext cx="4261104" cy="658368"/>
           </a:xfrm>
           <a:prstGeom prst="roundRect">
             <a:avLst/>
@@ -10680,7 +11904,7 @@
           <a:p>
             <a:pPr algn="ctr">
               <a:lnSpc>
-                <a:spcPct val="92000"/>
+                <a:spcPct val="96000"/>
               </a:lnSpc>
               <a:spcAft>
                 <a:spcPts val="300"/>
@@ -10688,19 +11912,19 @@
               <a:buNone/>
             </a:pPr>
             <a:r>
-              <a:rPr sz="1050" b="1">
-                <a:solidFill>
-                  <a:srgbClr val="1B6B3A"/>
+              <a:rPr sz="1250" b="1">
+                <a:solidFill>
+                  <a:srgbClr val="0B5FA5"/>
                 </a:solidFill>
                 <a:latin typeface="Calibri"/>
               </a:rPr>
-              <a:t>How a finding is proved</a:t>
+              <a:t>OBSERVE</a:t>
             </a:r>
           </a:p>
           <a:p>
             <a:pPr>
               <a:lnSpc>
-                <a:spcPct val="92000"/>
+                <a:spcPct val="96000"/>
               </a:lnSpc>
               <a:spcAft>
                 <a:spcPts val="300"/>
@@ -10708,136 +11932,78 @@
               <a:buNone/>
             </a:pPr>
             <a:r>
-              <a:rPr sz="900" b="0">
+              <a:rPr sz="1100" b="0">
                 <a:solidFill>
                   <a:srgbClr val="1F2C3F"/>
                 </a:solidFill>
                 <a:latin typeface="Calibri"/>
               </a:rPr>
-              <a:t>1.  A rule fails on a reconstructed observation — here, static RSA key exchange, so no forward secrecy.</a:t>
-            </a:r>
-          </a:p>
-          <a:p>
-            <a:pPr>
-              <a:lnSpc>
-                <a:spcPct val="92000"/>
-              </a:lnSpc>
-              <a:spcAft>
-                <a:spcPts val="300"/>
-              </a:spcAft>
-              <a:buNone/>
-            </a:pPr>
-            <a:r>
-              <a:rPr sz="900" b="0">
-                <a:solidFill>
-                  <a:srgbClr val="1F2C3F"/>
-                </a:solidFill>
-                <a:latin typeface="Calibri"/>
-              </a:rPr>
-              <a:t>2.  The engine attaches the packets it evaluated: #4 and #5, with their capture timestamps and stream offsets.</a:t>
-            </a:r>
-          </a:p>
-          <a:p>
-            <a:pPr>
-              <a:lnSpc>
-                <a:spcPct val="92000"/>
-              </a:lnSpc>
-              <a:spcAft>
-                <a:spcPts val="300"/>
-              </a:spcAft>
-              <a:buNone/>
-            </a:pPr>
-            <a:r>
-              <a:rPr sz="900" b="0">
-                <a:solidFill>
-                  <a:srgbClr val="1F2C3F"/>
-                </a:solidFill>
-                <a:latin typeface="Calibri"/>
-              </a:rPr>
-              <a:t>3.  The capture and session ids are printed beside them, so an analyst can open the same packets in Wireshark and check.</a:t>
-            </a:r>
-          </a:p>
-          <a:p>
-            <a:pPr>
-              <a:lnSpc>
-                <a:spcPct val="92000"/>
-              </a:lnSpc>
-              <a:spcAft>
-                <a:spcPts val="300"/>
-              </a:spcAft>
-              <a:buNone/>
-            </a:pPr>
-            <a:r>
-              <a:rPr sz="900" b="0">
-                <a:solidFill>
-                  <a:srgbClr val="1F2C3F"/>
-                </a:solidFill>
-                <a:latin typeface="Calibri"/>
-              </a:rPr>
-              <a:t>4.  Packet metadata only. Reconstructed payload bytes are never included in a report or shown in the interface.</a:t>
-            </a:r>
-          </a:p>
-          <a:p>
-            <a:pPr>
-              <a:lnSpc>
-                <a:spcPct val="92000"/>
-              </a:lnSpc>
-              <a:spcAft>
-                <a:spcPts val="300"/>
-              </a:spcAft>
-              <a:buNone/>
-            </a:pPr>
-            <a:r>
-              <a:rPr sz="850" b="0">
-                <a:solidFill>
-                  <a:srgbClr val="4A5A70"/>
-                </a:solidFill>
-                <a:latin typeface="Calibri"/>
-              </a:rPr>
-              <a:t>Expectations are hand-derived and committed as manifests while the captures are generated, so a test cannot confirm its own output; ten TShark cross-checks compare our dissection against Wireshark's, so a bug in our parser cannot validate itself.</a:t>
-            </a:r>
-          </a:p>
-        </p:txBody>
-      </p:sp>
-      <p:pic>
-        <p:nvPicPr>
-          <p:cNvPr id="17418" name="Picture 17417" descr="06-evidence-provenance.png"/>
-          <p:cNvPicPr>
-            <a:picLocks noChangeAspect="1"/>
-          </p:cNvPicPr>
+              <a:t>Static RSA key exchange negotiated</a:t>
+            </a:r>
+          </a:p>
+        </p:txBody>
+      </p:sp>
+      <p:sp>
+        <p:nvSpPr>
+          <p:cNvPr id="17421" name="Down Arrow 17420"/>
+          <p:cNvSpPr/>
           <p:nvPr/>
-        </p:nvPicPr>
-        <p:blipFill>
-          <a:blip r:embed="rId4"/>
-          <a:stretch>
-            <a:fillRect/>
-          </a:stretch>
-        </p:blipFill>
-        <p:spPr>
-          <a:xfrm>
-            <a:off x="6199632" y="2212848"/>
-            <a:ext cx="5614416" cy="2494321"/>
-          </a:xfrm>
-          <a:prstGeom prst="rect">
+        </p:nvSpPr>
+        <p:spPr>
+          <a:xfrm>
+            <a:off x="9601200" y="3108960"/>
+            <a:ext cx="164592" cy="146304"/>
+          </a:xfrm>
+          <a:prstGeom prst="downArrow">
             <a:avLst/>
           </a:prstGeom>
-        </p:spPr>
-      </p:pic>
-      <p:sp>
-        <p:nvSpPr>
-          <p:cNvPr id="17419" name="Rectangle 17418"/>
+          <a:solidFill>
+            <a:srgbClr val="4A5A70"/>
+          </a:solidFill>
+          <a:ln>
+            <a:noFill/>
+          </a:ln>
+          <a:effectLst/>
+        </p:spPr>
+        <p:style>
+          <a:lnRef idx="1">
+            <a:schemeClr val="accent1"/>
+          </a:lnRef>
+          <a:fillRef idx="3">
+            <a:schemeClr val="accent1"/>
+          </a:fillRef>
+          <a:effectRef idx="2">
+            <a:schemeClr val="accent1"/>
+          </a:effectRef>
+          <a:fontRef idx="minor">
+            <a:schemeClr val="lt1"/>
+          </a:fontRef>
+        </p:style>
+        <p:txBody>
+          <a:bodyPr rtlCol="0" anchor="ctr"/>
+          <a:lstStyle/>
+          <a:p>
+            <a:pPr algn="ctr"/>
+          </a:p>
+        </p:txBody>
+      </p:sp>
+      <p:sp>
+        <p:nvSpPr>
+          <p:cNvPr id="17422" name="Rounded Rectangle 17421"/>
           <p:cNvSpPr/>
           <p:nvPr/>
         </p:nvSpPr>
         <p:spPr>
           <a:xfrm>
-            <a:off x="6199632" y="2212848"/>
-            <a:ext cx="5614416" cy="2494321"/>
-          </a:xfrm>
-          <a:prstGeom prst="rect">
+            <a:off x="7552944" y="3273552"/>
+            <a:ext cx="4261104" cy="658368"/>
+          </a:xfrm>
+          <a:prstGeom prst="roundRect">
             <a:avLst/>
           </a:prstGeom>
-          <a:noFill/>
+          <a:solidFill>
+            <a:srgbClr val="EEF3F9"/>
+          </a:solidFill>
           <a:ln w="9525">
             <a:solidFill>
               <a:srgbClr val="C2D4E6"/>
@@ -10860,65 +12026,314 @@
           </a:fontRef>
         </p:style>
         <p:txBody>
-          <a:bodyPr rtlCol="0" anchor="ctr"/>
-          <a:lstStyle/>
-          <a:p>
-            <a:pPr algn="ctr"/>
-          </a:p>
-        </p:txBody>
-      </p:sp>
-      <p:sp>
-        <p:nvSpPr>
-          <p:cNvPr id="17420" name="TextBox 17419"/>
-          <p:cNvSpPr txBox="1"/>
+          <a:bodyPr rtlCol="0" anchor="t" wrap="square" tIns="54864" bIns="54864"/>
+          <a:lstStyle/>
+          <a:p>
+            <a:pPr algn="ctr">
+              <a:lnSpc>
+                <a:spcPct val="96000"/>
+              </a:lnSpc>
+              <a:spcAft>
+                <a:spcPts val="300"/>
+              </a:spcAft>
+              <a:buNone/>
+            </a:pPr>
+            <a:r>
+              <a:rPr sz="1250" b="1">
+                <a:solidFill>
+                  <a:srgbClr val="0B5FA5"/>
+                </a:solidFill>
+                <a:latin typeface="Calibri"/>
+              </a:rPr>
+              <a:t>TRACE</a:t>
+            </a:r>
+          </a:p>
+          <a:p>
+            <a:pPr>
+              <a:lnSpc>
+                <a:spcPct val="96000"/>
+              </a:lnSpc>
+              <a:spcAft>
+                <a:spcPts val="300"/>
+              </a:spcAft>
+              <a:buNone/>
+            </a:pPr>
+            <a:r>
+              <a:rPr sz="1100" b="0">
+                <a:solidFill>
+                  <a:srgbClr val="1F2C3F"/>
+                </a:solidFill>
+                <a:latin typeface="Calibri"/>
+              </a:rPr>
+              <a:t>Packets #4 and #5, with timestamps</a:t>
+            </a:r>
+          </a:p>
+        </p:txBody>
+      </p:sp>
+      <p:sp>
+        <p:nvSpPr>
+          <p:cNvPr id="17423" name="Down Arrow 17422"/>
+          <p:cNvSpPr/>
           <p:nvPr/>
         </p:nvSpPr>
         <p:spPr>
           <a:xfrm>
-            <a:off x="6199632" y="4725457"/>
-            <a:ext cx="5614416" cy="219456"/>
-          </a:xfrm>
-          <a:prstGeom prst="rect">
+            <a:off x="9601200" y="3950207"/>
+            <a:ext cx="164592" cy="146304"/>
+          </a:xfrm>
+          <a:prstGeom prst="downArrow">
             <a:avLst/>
           </a:prstGeom>
-          <a:noFill/>
-        </p:spPr>
-        <p:txBody>
-          <a:bodyPr wrap="square">
-            <a:spAutoFit/>
-          </a:bodyPr>
-          <a:lstStyle/>
-          <a:p>
-            <a:pPr algn="ctr">
-              <a:lnSpc>
-                <a:spcPct val="100000"/>
-              </a:lnSpc>
-              <a:spcAft>
-                <a:spcPts val="300"/>
-              </a:spcAft>
-            </a:pPr>
-            <a:r>
-              <a:rPr sz="800" b="0">
-                <a:solidFill>
-                  <a:srgbClr val="4A5A70"/>
-                </a:solidFill>
-                <a:latin typeface="Calibri"/>
-              </a:rPr>
-              <a:t>The finding, and the packets it was evaluated against. Actual product output.</a:t>
-            </a:r>
-          </a:p>
-        </p:txBody>
-      </p:sp>
-      <p:sp>
-        <p:nvSpPr>
-          <p:cNvPr id="17421" name="Rounded Rectangle 17420"/>
+          <a:solidFill>
+            <a:srgbClr val="4A5A70"/>
+          </a:solidFill>
+          <a:ln>
+            <a:noFill/>
+          </a:ln>
+          <a:effectLst/>
+        </p:spPr>
+        <p:style>
+          <a:lnRef idx="1">
+            <a:schemeClr val="accent1"/>
+          </a:lnRef>
+          <a:fillRef idx="3">
+            <a:schemeClr val="accent1"/>
+          </a:fillRef>
+          <a:effectRef idx="2">
+            <a:schemeClr val="accent1"/>
+          </a:effectRef>
+          <a:fontRef idx="minor">
+            <a:schemeClr val="lt1"/>
+          </a:fontRef>
+        </p:style>
+        <p:txBody>
+          <a:bodyPr rtlCol="0" anchor="ctr"/>
+          <a:lstStyle/>
+          <a:p>
+            <a:pPr algn="ctr"/>
+          </a:p>
+        </p:txBody>
+      </p:sp>
+      <p:sp>
+        <p:nvSpPr>
+          <p:cNvPr id="17424" name="Rounded Rectangle 17423"/>
           <p:cNvSpPr/>
           <p:nvPr/>
         </p:nvSpPr>
         <p:spPr>
           <a:xfrm>
-            <a:off x="384048" y="4992624"/>
-            <a:ext cx="11430000" cy="1042415"/>
+            <a:off x="7552944" y="4114800"/>
+            <a:ext cx="4261104" cy="658368"/>
+          </a:xfrm>
+          <a:prstGeom prst="roundRect">
+            <a:avLst/>
+          </a:prstGeom>
+          <a:solidFill>
+            <a:srgbClr val="EEF3F9"/>
+          </a:solidFill>
+          <a:ln w="9525">
+            <a:solidFill>
+              <a:srgbClr val="C2D4E6"/>
+            </a:solidFill>
+          </a:ln>
+          <a:effectLst/>
+        </p:spPr>
+        <p:style>
+          <a:lnRef idx="1">
+            <a:schemeClr val="accent1"/>
+          </a:lnRef>
+          <a:fillRef idx="3">
+            <a:schemeClr val="accent1"/>
+          </a:fillRef>
+          <a:effectRef idx="2">
+            <a:schemeClr val="accent1"/>
+          </a:effectRef>
+          <a:fontRef idx="minor">
+            <a:schemeClr val="lt1"/>
+          </a:fontRef>
+        </p:style>
+        <p:txBody>
+          <a:bodyPr rtlCol="0" anchor="t" wrap="square" tIns="54864" bIns="54864"/>
+          <a:lstStyle/>
+          <a:p>
+            <a:pPr algn="ctr">
+              <a:lnSpc>
+                <a:spcPct val="96000"/>
+              </a:lnSpc>
+              <a:spcAft>
+                <a:spcPts val="300"/>
+              </a:spcAft>
+              <a:buNone/>
+            </a:pPr>
+            <a:r>
+              <a:rPr sz="1250" b="1">
+                <a:solidFill>
+                  <a:srgbClr val="0B5FA5"/>
+                </a:solidFill>
+                <a:latin typeface="Calibri"/>
+              </a:rPr>
+              <a:t>ASSESS</a:t>
+            </a:r>
+          </a:p>
+          <a:p>
+            <a:pPr>
+              <a:lnSpc>
+                <a:spcPct val="96000"/>
+              </a:lnSpc>
+              <a:spcAft>
+                <a:spcPts val="300"/>
+              </a:spcAft>
+              <a:buNone/>
+            </a:pPr>
+            <a:r>
+              <a:rPr sz="1100" b="0">
+                <a:solidFill>
+                  <a:srgbClr val="1F2C3F"/>
+                </a:solidFill>
+                <a:latin typeface="Calibri"/>
+              </a:rPr>
+              <a:t>TLS-KEX-001 · HIGH · no forward secrecy</a:t>
+            </a:r>
+          </a:p>
+        </p:txBody>
+      </p:sp>
+      <p:sp>
+        <p:nvSpPr>
+          <p:cNvPr id="17425" name="Down Arrow 17424"/>
+          <p:cNvSpPr/>
+          <p:nvPr/>
+        </p:nvSpPr>
+        <p:spPr>
+          <a:xfrm>
+            <a:off x="9601200" y="4791455"/>
+            <a:ext cx="164592" cy="146304"/>
+          </a:xfrm>
+          <a:prstGeom prst="downArrow">
+            <a:avLst/>
+          </a:prstGeom>
+          <a:solidFill>
+            <a:srgbClr val="4A5A70"/>
+          </a:solidFill>
+          <a:ln>
+            <a:noFill/>
+          </a:ln>
+          <a:effectLst/>
+        </p:spPr>
+        <p:style>
+          <a:lnRef idx="1">
+            <a:schemeClr val="accent1"/>
+          </a:lnRef>
+          <a:fillRef idx="3">
+            <a:schemeClr val="accent1"/>
+          </a:fillRef>
+          <a:effectRef idx="2">
+            <a:schemeClr val="accent1"/>
+          </a:effectRef>
+          <a:fontRef idx="minor">
+            <a:schemeClr val="lt1"/>
+          </a:fontRef>
+        </p:style>
+        <p:txBody>
+          <a:bodyPr rtlCol="0" anchor="ctr"/>
+          <a:lstStyle/>
+          <a:p>
+            <a:pPr algn="ctr"/>
+          </a:p>
+        </p:txBody>
+      </p:sp>
+      <p:sp>
+        <p:nvSpPr>
+          <p:cNvPr id="17426" name="Rounded Rectangle 17425"/>
+          <p:cNvSpPr/>
+          <p:nvPr/>
+        </p:nvSpPr>
+        <p:spPr>
+          <a:xfrm>
+            <a:off x="7552944" y="4956048"/>
+            <a:ext cx="4261104" cy="658368"/>
+          </a:xfrm>
+          <a:prstGeom prst="roundRect">
+            <a:avLst/>
+          </a:prstGeom>
+          <a:solidFill>
+            <a:srgbClr val="EEF3F9"/>
+          </a:solidFill>
+          <a:ln w="9525">
+            <a:solidFill>
+              <a:srgbClr val="C2D4E6"/>
+            </a:solidFill>
+          </a:ln>
+          <a:effectLst/>
+        </p:spPr>
+        <p:style>
+          <a:lnRef idx="1">
+            <a:schemeClr val="accent1"/>
+          </a:lnRef>
+          <a:fillRef idx="3">
+            <a:schemeClr val="accent1"/>
+          </a:fillRef>
+          <a:effectRef idx="2">
+            <a:schemeClr val="accent1"/>
+          </a:effectRef>
+          <a:fontRef idx="minor">
+            <a:schemeClr val="lt1"/>
+          </a:fontRef>
+        </p:style>
+        <p:txBody>
+          <a:bodyPr rtlCol="0" anchor="t" wrap="square" tIns="54864" bIns="54864"/>
+          <a:lstStyle/>
+          <a:p>
+            <a:pPr algn="ctr">
+              <a:lnSpc>
+                <a:spcPct val="96000"/>
+              </a:lnSpc>
+              <a:spcAft>
+                <a:spcPts val="300"/>
+              </a:spcAft>
+              <a:buNone/>
+            </a:pPr>
+            <a:r>
+              <a:rPr sz="1250" b="1">
+                <a:solidFill>
+                  <a:srgbClr val="0B5FA5"/>
+                </a:solidFill>
+                <a:latin typeface="Calibri"/>
+              </a:rPr>
+              <a:t>REMEDIATE</a:t>
+            </a:r>
+          </a:p>
+          <a:p>
+            <a:pPr>
+              <a:lnSpc>
+                <a:spcPct val="96000"/>
+              </a:lnSpc>
+              <a:spcAft>
+                <a:spcPts val="300"/>
+              </a:spcAft>
+              <a:buNone/>
+            </a:pPr>
+            <a:r>
+              <a:rPr sz="1100" b="0">
+                <a:solidFill>
+                  <a:srgbClr val="1F2C3F"/>
+                </a:solidFill>
+                <a:latin typeface="Calibri"/>
+              </a:rPr>
+              <a:t>Move to ephemeral key exchange</a:t>
+            </a:r>
+          </a:p>
+        </p:txBody>
+      </p:sp>
+      <p:sp>
+        <p:nvSpPr>
+          <p:cNvPr id="17427" name="Rounded Rectangle 17426"/>
+          <p:cNvSpPr/>
+          <p:nvPr/>
+        </p:nvSpPr>
+        <p:spPr>
+          <a:xfrm>
+            <a:off x="384048" y="5650992"/>
+            <a:ext cx="11430000" cy="694944"/>
           </a:xfrm>
           <a:prstGeom prst="roundRect">
             <a:avLst/>
@@ -10953,7 +12368,7 @@
           <a:p>
             <a:pPr algn="ctr">
               <a:lnSpc>
-                <a:spcPct val="90000"/>
+                <a:spcPct val="96000"/>
               </a:lnSpc>
               <a:spcAft>
                 <a:spcPts val="300"/>
@@ -10961,19 +12376,19 @@
               <a:buNone/>
             </a:pPr>
             <a:r>
-              <a:rPr sz="1050" b="1">
+              <a:rPr sz="1100" b="1">
                 <a:solidFill>
                   <a:srgbClr val="A83A1E"/>
                 </a:solidFill>
                 <a:latin typeface="Calibri"/>
               </a:rPr>
-              <a:t>Limits, stated not hidden</a:t>
+              <a:t>KNOWN BOUNDARIES</a:t>
             </a:r>
           </a:p>
           <a:p>
             <a:pPr>
               <a:lnSpc>
-                <a:spcPct val="90000"/>
+                <a:spcPct val="96000"/>
               </a:lnSpc>
               <a:spcAft>
                 <a:spcPts val="300"/>
@@ -10981,19 +12396,19 @@
               <a:buNone/>
             </a:pPr>
             <a:r>
-              <a:rPr sz="900" b="0">
+              <a:rPr sz="1100" b="0">
                 <a:solidFill>
                   <a:srgbClr val="1F2C3F"/>
                 </a:solidFill>
                 <a:latin typeface="Calibri"/>
               </a:rPr>
-              <a:t>TLS 1.3 encrypts the Certificate message, so a passive capture cannot expose it — reported NOT_AVAILABLE with the reason, never blank and never guessed. TLS 1.2 chains are read and verified in full.</a:t>
+              <a:t>TLS 1.3 may encrypt certificate evidence a passive capture cannot recover; it is reported NOT AVAILABLE with the reason, never guessed.</a:t>
             </a:r>
           </a:p>
           <a:p>
             <a:pPr>
               <a:lnSpc>
-                <a:spcPct val="90000"/>
+                <a:spcPct val="96000"/>
               </a:lnSpc>
               <a:spcAft>
                 <a:spcPts val="300"/>
@@ -11001,13 +12416,13 @@
               <a:buNone/>
             </a:pPr>
             <a:r>
-              <a:rPr sz="900" b="0">
+              <a:rPr sz="1100" b="0">
                 <a:solidFill>
                   <a:srgbClr val="1F2C3F"/>
                 </a:solidFill>
                 <a:latin typeface="Calibri"/>
               </a:rPr>
-              <a:t>The supervised classifier is NOT VALIDATED for real-world use: it was measured on synthetic servers only, it drives no finding and no score, and the interface says so on screen.</a:t>
+              <a:t>The supervised classifier is experimental and never overrides a deterministic finding.</a:t>
             </a:r>
           </a:p>
         </p:txBody>
@@ -11158,8 +12573,8 @@
         </p:nvSpPr>
         <p:spPr bwMode="auto">
           <a:xfrm>
-            <a:off x="384048" y="969264"/>
-            <a:ext cx="11430000" cy="310896"/>
+            <a:off x="384048" y="950976"/>
+            <a:ext cx="11430000" cy="329184"/>
           </a:xfrm>
           <a:prstGeom prst="rect">
             <a:avLst/>
@@ -11196,13 +12611,13 @@
               <a:buNone/>
             </a:pPr>
             <a:r>
-              <a:rPr sz="1000" b="0">
+              <a:rPr sz="1300" b="0">
                 <a:solidFill>
                   <a:srgbClr val="4A5A70"/>
                 </a:solidFill>
                 <a:latin typeface="Calibri"/>
               </a:rPr>
-              <a:t>For authorised email-security investigation. Each visual below is the product output that supports the benefit beside it.</a:t>
+              <a:t>For authorised email-security investigation — and every claim below is what the product already outputs.</a:t>
             </a:r>
           </a:p>
         </p:txBody>
@@ -11450,8 +12865,8 @@
         </p:nvSpPr>
         <p:spPr>
           <a:xfrm>
-            <a:off x="512064" y="1572768"/>
-            <a:ext cx="2139696" cy="1316736"/>
+            <a:off x="384048" y="1316736"/>
+            <a:ext cx="2194560" cy="768096"/>
           </a:xfrm>
           <a:prstGeom prst="roundRect">
             <a:avLst/>
@@ -11481,20 +12896,20 @@
           </a:fontRef>
         </p:style>
         <p:txBody>
-          <a:bodyPr rtlCol="0" anchor="t" wrap="square" tIns="54864" bIns="54864"/>
+          <a:bodyPr rtlCol="0" anchor="ctr" wrap="square" tIns="54864" bIns="54864"/>
           <a:lstStyle/>
           <a:p>
             <a:pPr algn="ctr">
               <a:lnSpc>
-                <a:spcPct val="90000"/>
-              </a:lnSpc>
-              <a:spcAft>
-                <a:spcPts val="300"/>
-              </a:spcAft>
-              <a:buNone/>
-            </a:pPr>
-            <a:r>
-              <a:rPr sz="1100" b="1">
+                <a:spcPct val="94000"/>
+              </a:lnSpc>
+              <a:spcAft>
+                <a:spcPts val="100"/>
+              </a:spcAft>
+              <a:buNone/>
+            </a:pPr>
+            <a:r>
+              <a:rPr sz="1400" b="1">
                 <a:solidFill>
                   <a:srgbClr val="0B5FA5"/>
                 </a:solidFill>
@@ -11504,23 +12919,23 @@
             </a:r>
           </a:p>
           <a:p>
-            <a:pPr>
-              <a:lnSpc>
-                <a:spcPct val="90000"/>
-              </a:lnSpc>
-              <a:spcAft>
-                <a:spcPts val="300"/>
-              </a:spcAft>
-              <a:buNone/>
-            </a:pPr>
-            <a:r>
-              <a:rPr sz="800" b="0">
+            <a:pPr algn="ctr">
+              <a:lnSpc>
+                <a:spcPct val="94000"/>
+              </a:lnSpc>
+              <a:spcAft>
+                <a:spcPts val="100"/>
+              </a:spcAft>
+              <a:buNone/>
+            </a:pPr>
+            <a:r>
+              <a:rPr sz="1050" b="0">
                 <a:solidFill>
                   <a:srgbClr val="1F2C3F"/>
                 </a:solidFill>
                 <a:latin typeface="Calibri"/>
               </a:rPr>
-              <a:t>The cryptographic configuration actually negotiated — version, cipher suite, key exchange, certificate — read from traffic the organisation already holds, without touching the host.</a:t>
+              <a:t>Observable weak cryptography</a:t>
             </a:r>
           </a:p>
         </p:txBody>
@@ -11533,8 +12948,8 @@
         </p:nvSpPr>
         <p:spPr>
           <a:xfrm>
-            <a:off x="2724912" y="1572768"/>
-            <a:ext cx="2139696" cy="1316736"/>
+            <a:off x="2670048" y="1316736"/>
+            <a:ext cx="2194560" cy="768096"/>
           </a:xfrm>
           <a:prstGeom prst="roundRect">
             <a:avLst/>
@@ -11564,20 +12979,20 @@
           </a:fontRef>
         </p:style>
         <p:txBody>
-          <a:bodyPr rtlCol="0" anchor="t" wrap="square" tIns="54864" bIns="54864"/>
+          <a:bodyPr rtlCol="0" anchor="ctr" wrap="square" tIns="54864" bIns="54864"/>
           <a:lstStyle/>
           <a:p>
             <a:pPr algn="ctr">
               <a:lnSpc>
-                <a:spcPct val="90000"/>
-              </a:lnSpc>
-              <a:spcAft>
-                <a:spcPts val="300"/>
-              </a:spcAft>
-              <a:buNone/>
-            </a:pPr>
-            <a:r>
-              <a:rPr sz="1100" b="1">
+                <a:spcPct val="94000"/>
+              </a:lnSpc>
+              <a:spcAft>
+                <a:spcPts val="100"/>
+              </a:spcAft>
+              <a:buNone/>
+            </a:pPr>
+            <a:r>
+              <a:rPr sz="1400" b="1">
                 <a:solidFill>
                   <a:srgbClr val="0B5FA5"/>
                 </a:solidFill>
@@ -11587,23 +13002,23 @@
             </a:r>
           </a:p>
           <a:p>
-            <a:pPr>
-              <a:lnSpc>
-                <a:spcPct val="90000"/>
-              </a:lnSpc>
-              <a:spcAft>
-                <a:spcPts val="300"/>
-              </a:spcAft>
-              <a:buNone/>
-            </a:pPr>
-            <a:r>
-              <a:rPr sz="800" b="0">
+            <a:pPr algn="ctr">
+              <a:lnSpc>
+                <a:spcPct val="94000"/>
+              </a:lnSpc>
+              <a:spcAft>
+                <a:spcPts val="100"/>
+              </a:spcAft>
+              <a:buNone/>
+            </a:pPr>
+            <a:r>
+              <a:rPr sz="1050" b="0">
                 <a:solidFill>
                   <a:srgbClr val="1F2C3F"/>
                 </a:solidFill>
                 <a:latin typeface="Calibri"/>
               </a:rPr>
-              <a:t>Every finding names the rule it failed, the RFC clause it applies and the packets that establish it, so the conclusion can be checked rather than believed.</a:t>
+              <a:t>Packet-backed evidence</a:t>
             </a:r>
           </a:p>
         </p:txBody>
@@ -11616,8 +13031,8 @@
         </p:nvSpPr>
         <p:spPr>
           <a:xfrm>
-            <a:off x="4937760" y="1572768"/>
-            <a:ext cx="2139696" cy="1316736"/>
+            <a:off x="4956048" y="1316736"/>
+            <a:ext cx="2194560" cy="768096"/>
           </a:xfrm>
           <a:prstGeom prst="roundRect">
             <a:avLst/>
@@ -11647,20 +13062,20 @@
           </a:fontRef>
         </p:style>
         <p:txBody>
-          <a:bodyPr rtlCol="0" anchor="t" wrap="square" tIns="54864" bIns="54864"/>
+          <a:bodyPr rtlCol="0" anchor="ctr" wrap="square" tIns="54864" bIns="54864"/>
           <a:lstStyle/>
           <a:p>
             <a:pPr algn="ctr">
               <a:lnSpc>
-                <a:spcPct val="90000"/>
-              </a:lnSpc>
-              <a:spcAft>
-                <a:spcPts val="300"/>
-              </a:spcAft>
-              <a:buNone/>
-            </a:pPr>
-            <a:r>
-              <a:rPr sz="1100" b="1">
+                <a:spcPct val="94000"/>
+              </a:lnSpc>
+              <a:spcAft>
+                <a:spcPts val="100"/>
+              </a:spcAft>
+              <a:buNone/>
+            </a:pPr>
+            <a:r>
+              <a:rPr sz="1400" b="1">
                 <a:solidFill>
                   <a:srgbClr val="0B5FA5"/>
                 </a:solidFill>
@@ -11670,147 +13085,37 @@
             </a:r>
           </a:p>
           <a:p>
-            <a:pPr>
-              <a:lnSpc>
-                <a:spcPct val="90000"/>
-              </a:lnSpc>
-              <a:spcAft>
-                <a:spcPts val="300"/>
-              </a:spcAft>
-              <a:buNone/>
-            </a:pPr>
-            <a:r>
-              <a:rPr sz="800" b="0">
+            <a:pPr algn="ctr">
+              <a:lnSpc>
+                <a:spcPct val="94000"/>
+              </a:lnSpc>
+              <a:spcAft>
+                <a:spcPts val="100"/>
+              </a:spcAft>
+              <a:buNone/>
+            </a:pPr>
+            <a:r>
+              <a:rPr sz="1050" b="0">
                 <a:solidFill>
                   <a:srgbClr val="1F2C3F"/>
                 </a:solidFill>
                 <a:latin typeface="Calibri"/>
               </a:rPr>
-              <a:t>Severity and confidence produce a ranked priority with a named remediation, so 'what do I fix first' has an answer and a reason.</a:t>
-            </a:r>
-          </a:p>
-        </p:txBody>
-      </p:sp>
-      <p:pic>
-        <p:nvPicPr>
-          <p:cNvPr id="17414" name="Picture 17413" descr="04-finding-evidence.png"/>
-          <p:cNvPicPr>
-            <a:picLocks noChangeAspect="1"/>
-          </p:cNvPicPr>
-          <p:nvPr/>
-        </p:nvPicPr>
-        <p:blipFill>
-          <a:blip r:embed="rId4"/>
-          <a:stretch>
-            <a:fillRect/>
-          </a:stretch>
-        </p:blipFill>
-        <p:spPr>
-          <a:xfrm>
-            <a:off x="512064" y="3017520"/>
-            <a:ext cx="6455664" cy="2481396"/>
-          </a:xfrm>
-          <a:prstGeom prst="rect">
-            <a:avLst/>
-          </a:prstGeom>
-        </p:spPr>
-      </p:pic>
-      <p:sp>
-        <p:nvSpPr>
-          <p:cNvPr id="17415" name="Rectangle 17414"/>
+              <a:t>What to fix first</a:t>
+            </a:r>
+          </a:p>
+        </p:txBody>
+      </p:sp>
+      <p:sp>
+        <p:nvSpPr>
+          <p:cNvPr id="17414" name="Rounded Rectangle 17413"/>
           <p:cNvSpPr/>
           <p:nvPr/>
         </p:nvSpPr>
         <p:spPr>
           <a:xfrm>
-            <a:off x="512064" y="3017520"/>
-            <a:ext cx="6455664" cy="2481396"/>
-          </a:xfrm>
-          <a:prstGeom prst="rect">
-            <a:avLst/>
-          </a:prstGeom>
-          <a:noFill/>
-          <a:ln w="9525">
-            <a:solidFill>
-              <a:srgbClr val="C2D4E6"/>
-            </a:solidFill>
-          </a:ln>
-          <a:effectLst/>
-        </p:spPr>
-        <p:style>
-          <a:lnRef idx="1">
-            <a:schemeClr val="accent1"/>
-          </a:lnRef>
-          <a:fillRef idx="3">
-            <a:schemeClr val="accent1"/>
-          </a:fillRef>
-          <a:effectRef idx="2">
-            <a:schemeClr val="accent1"/>
-          </a:effectRef>
-          <a:fontRef idx="minor">
-            <a:schemeClr val="lt1"/>
-          </a:fontRef>
-        </p:style>
-        <p:txBody>
-          <a:bodyPr rtlCol="0" anchor="ctr"/>
-          <a:lstStyle/>
-          <a:p>
-            <a:pPr algn="ctr"/>
-          </a:p>
-        </p:txBody>
-      </p:sp>
-      <p:sp>
-        <p:nvSpPr>
-          <p:cNvPr id="17416" name="TextBox 17415"/>
-          <p:cNvSpPr txBox="1"/>
-          <p:nvPr/>
-        </p:nvSpPr>
-        <p:spPr>
-          <a:xfrm>
-            <a:off x="512064" y="5517204"/>
-            <a:ext cx="6455664" cy="219456"/>
-          </a:xfrm>
-          <a:prstGeom prst="rect">
-            <a:avLst/>
-          </a:prstGeom>
-          <a:noFill/>
-        </p:spPr>
-        <p:txBody>
-          <a:bodyPr wrap="square">
-            <a:spAutoFit/>
-          </a:bodyPr>
-          <a:lstStyle/>
-          <a:p>
-            <a:pPr algn="ctr">
-              <a:lnSpc>
-                <a:spcPct val="100000"/>
-              </a:lnSpc>
-              <a:spcAft>
-                <a:spcPts val="300"/>
-              </a:spcAft>
-            </a:pPr>
-            <a:r>
-              <a:rPr sz="800" b="0">
-                <a:solidFill>
-                  <a:srgbClr val="4A5A70"/>
-                </a:solidFill>
-                <a:latin typeface="Calibri"/>
-              </a:rPr>
-              <a:t>One finding, its rule, its remediation and the packets behind it.</a:t>
-            </a:r>
-          </a:p>
-        </p:txBody>
-      </p:sp>
-      <p:sp>
-        <p:nvSpPr>
-          <p:cNvPr id="17417" name="Rounded Rectangle 17416"/>
-          <p:cNvSpPr/>
-          <p:nvPr/>
-        </p:nvSpPr>
-        <p:spPr>
-          <a:xfrm>
-            <a:off x="7242048" y="1280160"/>
-            <a:ext cx="4572000" cy="877824"/>
+            <a:off x="7242048" y="1316736"/>
+            <a:ext cx="2194560" cy="768096"/>
           </a:xfrm>
           <a:prstGeom prst="roundRect">
             <a:avLst/>
@@ -11840,20 +13145,20 @@
           </a:fontRef>
         </p:style>
         <p:txBody>
-          <a:bodyPr rtlCol="0" anchor="t" wrap="square" tIns="54864" bIns="54864"/>
+          <a:bodyPr rtlCol="0" anchor="ctr" wrap="square" tIns="54864" bIns="54864"/>
           <a:lstStyle/>
           <a:p>
             <a:pPr algn="ctr">
               <a:lnSpc>
-                <a:spcPct val="90000"/>
-              </a:lnSpc>
-              <a:spcAft>
-                <a:spcPts val="300"/>
-              </a:spcAft>
-              <a:buNone/>
-            </a:pPr>
-            <a:r>
-              <a:rPr sz="1100" b="1">
+                <a:spcPct val="94000"/>
+              </a:lnSpc>
+              <a:spcAft>
+                <a:spcPts val="100"/>
+              </a:spcAft>
+              <a:buNone/>
+            </a:pPr>
+            <a:r>
+              <a:rPr sz="1400" b="1">
                 <a:solidFill>
                   <a:srgbClr val="0B5FA5"/>
                 </a:solidFill>
@@ -11863,147 +13168,37 @@
             </a:r>
           </a:p>
           <a:p>
-            <a:pPr>
-              <a:lnSpc>
-                <a:spcPct val="90000"/>
-              </a:lnSpc>
-              <a:spcAft>
-                <a:spcPts val="300"/>
-              </a:spcAft>
-              <a:buNone/>
-            </a:pPr>
-            <a:r>
-              <a:rPr sz="800" b="0">
+            <a:pPr algn="ctr">
+              <a:lnSpc>
+                <a:spcPct val="94000"/>
+              </a:lnSpc>
+              <a:spcAft>
+                <a:spcPts val="100"/>
+              </a:spcAft>
+              <a:buNone/>
+            </a:pPr>
+            <a:r>
+              <a:rPr sz="1050" b="0">
                 <a:solidFill>
                   <a:srgbClr val="1F2C3F"/>
                 </a:solidFill>
                 <a:latin typeface="Calibri"/>
               </a:rPr>
-              <a:t>Drift compares one endpoint across captures. Where the clients asked different questions the comparison is reported INCONCLUSIVE rather than blamed on the server.</a:t>
-            </a:r>
-          </a:p>
-        </p:txBody>
-      </p:sp>
-      <p:pic>
-        <p:nvPicPr>
-          <p:cNvPr id="17418" name="Picture 17417" descr="08-drift.png"/>
-          <p:cNvPicPr>
-            <a:picLocks noChangeAspect="1"/>
-          </p:cNvPicPr>
-          <p:nvPr/>
-        </p:nvPicPr>
-        <p:blipFill>
-          <a:blip r:embed="rId5"/>
-          <a:stretch>
-            <a:fillRect/>
-          </a:stretch>
-        </p:blipFill>
-        <p:spPr>
-          <a:xfrm>
-            <a:off x="7242048" y="2267712"/>
-            <a:ext cx="4572000" cy="1757362"/>
-          </a:xfrm>
-          <a:prstGeom prst="rect">
-            <a:avLst/>
-          </a:prstGeom>
-        </p:spPr>
-      </p:pic>
-      <p:sp>
-        <p:nvSpPr>
-          <p:cNvPr id="17419" name="Rectangle 17418"/>
+              <a:t>Cryptographic drift</a:t>
+            </a:r>
+          </a:p>
+        </p:txBody>
+      </p:sp>
+      <p:sp>
+        <p:nvSpPr>
+          <p:cNvPr id="17415" name="Rounded Rectangle 17414"/>
           <p:cNvSpPr/>
           <p:nvPr/>
         </p:nvSpPr>
         <p:spPr>
           <a:xfrm>
-            <a:off x="7242048" y="2267712"/>
-            <a:ext cx="4572000" cy="1757362"/>
-          </a:xfrm>
-          <a:prstGeom prst="rect">
-            <a:avLst/>
-          </a:prstGeom>
-          <a:noFill/>
-          <a:ln w="9525">
-            <a:solidFill>
-              <a:srgbClr val="C2D4E6"/>
-            </a:solidFill>
-          </a:ln>
-          <a:effectLst/>
-        </p:spPr>
-        <p:style>
-          <a:lnRef idx="1">
-            <a:schemeClr val="accent1"/>
-          </a:lnRef>
-          <a:fillRef idx="3">
-            <a:schemeClr val="accent1"/>
-          </a:fillRef>
-          <a:effectRef idx="2">
-            <a:schemeClr val="accent1"/>
-          </a:effectRef>
-          <a:fontRef idx="minor">
-            <a:schemeClr val="lt1"/>
-          </a:fontRef>
-        </p:style>
-        <p:txBody>
-          <a:bodyPr rtlCol="0" anchor="ctr"/>
-          <a:lstStyle/>
-          <a:p>
-            <a:pPr algn="ctr"/>
-          </a:p>
-        </p:txBody>
-      </p:sp>
-      <p:sp>
-        <p:nvSpPr>
-          <p:cNvPr id="17420" name="TextBox 17419"/>
-          <p:cNvSpPr txBox="1"/>
-          <p:nvPr/>
-        </p:nvSpPr>
-        <p:spPr>
-          <a:xfrm>
-            <a:off x="7242048" y="4043361"/>
-            <a:ext cx="4572000" cy="219456"/>
-          </a:xfrm>
-          <a:prstGeom prst="rect">
-            <a:avLst/>
-          </a:prstGeom>
-          <a:noFill/>
-        </p:spPr>
-        <p:txBody>
-          <a:bodyPr wrap="square">
-            <a:spAutoFit/>
-          </a:bodyPr>
-          <a:lstStyle/>
-          <a:p>
-            <a:pPr algn="ctr">
-              <a:lnSpc>
-                <a:spcPct val="100000"/>
-              </a:lnSpc>
-              <a:spcAft>
-                <a:spcPts val="300"/>
-              </a:spcAft>
-            </a:pPr>
-            <a:r>
-              <a:rPr sz="800" b="0">
-                <a:solidFill>
-                  <a:srgbClr val="4A5A70"/>
-                </a:solidFill>
-                <a:latin typeface="Calibri"/>
-              </a:rPr>
-              <a:t>Configuration drift, before and after.</a:t>
-            </a:r>
-          </a:p>
-        </p:txBody>
-      </p:sp>
-      <p:sp>
-        <p:nvSpPr>
-          <p:cNvPr id="17421" name="Rounded Rectangle 17420"/>
-          <p:cNvSpPr/>
-          <p:nvPr/>
-        </p:nvSpPr>
-        <p:spPr>
-          <a:xfrm>
-            <a:off x="7242048" y="4443984"/>
-            <a:ext cx="2212848" cy="1426464"/>
+            <a:off x="9528048" y="1316736"/>
+            <a:ext cx="2194560" cy="768096"/>
           </a:xfrm>
           <a:prstGeom prst="roundRect">
             <a:avLst/>
@@ -12033,20 +13228,20 @@
           </a:fontRef>
         </p:style>
         <p:txBody>
-          <a:bodyPr rtlCol="0" anchor="t" wrap="square" tIns="54864" bIns="54864"/>
+          <a:bodyPr rtlCol="0" anchor="ctr" wrap="square" tIns="54864" bIns="54864"/>
           <a:lstStyle/>
           <a:p>
             <a:pPr algn="ctr">
               <a:lnSpc>
-                <a:spcPct val="90000"/>
-              </a:lnSpc>
-              <a:spcAft>
-                <a:spcPts val="300"/>
-              </a:spcAft>
-              <a:buNone/>
-            </a:pPr>
-            <a:r>
-              <a:rPr sz="1100" b="1">
+                <a:spcPct val="94000"/>
+              </a:lnSpc>
+              <a:spcAft>
+                <a:spcPts val="100"/>
+              </a:spcAft>
+              <a:buNone/>
+            </a:pPr>
+            <a:r>
+              <a:rPr sz="1400" b="1">
                 <a:solidFill>
                   <a:srgbClr val="0B5FA5"/>
                 </a:solidFill>
@@ -12056,30 +13251,315 @@
             </a:r>
           </a:p>
           <a:p>
-            <a:pPr>
-              <a:lnSpc>
-                <a:spcPct val="90000"/>
-              </a:lnSpc>
-              <a:spcAft>
-                <a:spcPts val="300"/>
-              </a:spcAft>
-              <a:buNone/>
-            </a:pPr>
-            <a:r>
-              <a:rPr sz="800" b="0">
+            <a:pPr algn="ctr">
+              <a:lnSpc>
+                <a:spcPct val="94000"/>
+              </a:lnSpc>
+              <a:spcAft>
+                <a:spcPts val="100"/>
+              </a:spcAft>
+              <a:buNone/>
+            </a:pPr>
+            <a:r>
+              <a:rPr sz="1050" b="0">
                 <a:solidFill>
                   <a:srgbClr val="1F2C3F"/>
                 </a:solidFill>
                 <a:latin typeface="Calibri"/>
               </a:rPr>
-              <a:t>One canonical model produces JSON, a self-contained offline HTML document and a PDF, so their facts cannot disagree.</a:t>
+              <a:t>Portable forensic output</a:t>
             </a:r>
           </a:p>
         </p:txBody>
       </p:sp>
       <p:pic>
         <p:nvPicPr>
-          <p:cNvPr id="17422" name="Picture 17421" descr="11-reports.png"/>
+          <p:cNvPr id="17416" name="Picture 17415" descr="crop-0.11-0.15-1.0-0.735-04-finding-evidence.png"/>
+          <p:cNvPicPr>
+            <a:picLocks noChangeAspect="1"/>
+          </p:cNvPicPr>
+          <p:nvPr/>
+        </p:nvPicPr>
+        <p:blipFill>
+          <a:blip r:embed="rId4"/>
+          <a:stretch>
+            <a:fillRect/>
+          </a:stretch>
+        </p:blipFill>
+        <p:spPr>
+          <a:xfrm>
+            <a:off x="384048" y="2231136"/>
+            <a:ext cx="6510528" cy="2647640"/>
+          </a:xfrm>
+          <a:prstGeom prst="rect">
+            <a:avLst/>
+          </a:prstGeom>
+        </p:spPr>
+      </p:pic>
+      <p:sp>
+        <p:nvSpPr>
+          <p:cNvPr id="17417" name="Rectangle 17416"/>
+          <p:cNvSpPr/>
+          <p:nvPr/>
+        </p:nvSpPr>
+        <p:spPr>
+          <a:xfrm>
+            <a:off x="384048" y="2231136"/>
+            <a:ext cx="6510528" cy="2647640"/>
+          </a:xfrm>
+          <a:prstGeom prst="rect">
+            <a:avLst/>
+          </a:prstGeom>
+          <a:noFill/>
+          <a:ln w="9525">
+            <a:solidFill>
+              <a:srgbClr val="C2D4E6"/>
+            </a:solidFill>
+          </a:ln>
+          <a:effectLst/>
+        </p:spPr>
+        <p:style>
+          <a:lnRef idx="1">
+            <a:schemeClr val="accent1"/>
+          </a:lnRef>
+          <a:fillRef idx="3">
+            <a:schemeClr val="accent1"/>
+          </a:fillRef>
+          <a:effectRef idx="2">
+            <a:schemeClr val="accent1"/>
+          </a:effectRef>
+          <a:fontRef idx="minor">
+            <a:schemeClr val="lt1"/>
+          </a:fontRef>
+        </p:style>
+        <p:txBody>
+          <a:bodyPr rtlCol="0" anchor="ctr"/>
+          <a:lstStyle/>
+          <a:p>
+            <a:pPr algn="ctr"/>
+          </a:p>
+        </p:txBody>
+      </p:sp>
+      <p:sp>
+        <p:nvSpPr>
+          <p:cNvPr id="17418" name="TextBox 17417"/>
+          <p:cNvSpPr txBox="1"/>
+          <p:nvPr/>
+        </p:nvSpPr>
+        <p:spPr>
+          <a:xfrm>
+            <a:off x="384048" y="4915352"/>
+            <a:ext cx="6510528" cy="256032"/>
+          </a:xfrm>
+          <a:prstGeom prst="rect">
+            <a:avLst/>
+          </a:prstGeom>
+          <a:noFill/>
+        </p:spPr>
+        <p:txBody>
+          <a:bodyPr wrap="square">
+            <a:spAutoFit/>
+          </a:bodyPr>
+          <a:lstStyle/>
+          <a:p>
+            <a:pPr algn="ctr">
+              <a:lnSpc>
+                <a:spcPct val="100000"/>
+              </a:lnSpc>
+              <a:spcAft>
+                <a:spcPts val="300"/>
+              </a:spcAft>
+              <a:buNone/>
+            </a:pPr>
+            <a:r>
+              <a:rPr sz="1100" b="0">
+                <a:solidFill>
+                  <a:srgbClr val="4A5A70"/>
+                </a:solidFill>
+                <a:latin typeface="Calibri"/>
+              </a:rPr>
+              <a:t>DISCOVER · EXPLAIN · PRIORITIZE — one finding, its rule, its severity and its remediation.</a:t>
+            </a:r>
+          </a:p>
+        </p:txBody>
+      </p:sp>
+      <p:pic>
+        <p:nvPicPr>
+          <p:cNvPr id="17419" name="Picture 17418" descr="crop-0.155-0.15-0.99-0.262-13-drift-version.png"/>
+          <p:cNvPicPr>
+            <a:picLocks noChangeAspect="1"/>
+          </p:cNvPicPr>
+          <p:nvPr/>
+        </p:nvPicPr>
+        <p:blipFill>
+          <a:blip r:embed="rId5"/>
+          <a:stretch>
+            <a:fillRect/>
+          </a:stretch>
+        </p:blipFill>
+        <p:spPr>
+          <a:xfrm>
+            <a:off x="7059168" y="2231136"/>
+            <a:ext cx="4754880" cy="669100"/>
+          </a:xfrm>
+          <a:prstGeom prst="rect">
+            <a:avLst/>
+          </a:prstGeom>
+        </p:spPr>
+      </p:pic>
+      <p:sp>
+        <p:nvSpPr>
+          <p:cNvPr id="17420" name="Rectangle 17419"/>
+          <p:cNvSpPr/>
+          <p:nvPr/>
+        </p:nvSpPr>
+        <p:spPr>
+          <a:xfrm>
+            <a:off x="7059168" y="2231136"/>
+            <a:ext cx="4754880" cy="669100"/>
+          </a:xfrm>
+          <a:prstGeom prst="rect">
+            <a:avLst/>
+          </a:prstGeom>
+          <a:noFill/>
+          <a:ln w="9525">
+            <a:solidFill>
+              <a:srgbClr val="C2D4E6"/>
+            </a:solidFill>
+          </a:ln>
+          <a:effectLst/>
+        </p:spPr>
+        <p:style>
+          <a:lnRef idx="1">
+            <a:schemeClr val="accent1"/>
+          </a:lnRef>
+          <a:fillRef idx="3">
+            <a:schemeClr val="accent1"/>
+          </a:fillRef>
+          <a:effectRef idx="2">
+            <a:schemeClr val="accent1"/>
+          </a:effectRef>
+          <a:fontRef idx="minor">
+            <a:schemeClr val="lt1"/>
+          </a:fontRef>
+        </p:style>
+        <p:txBody>
+          <a:bodyPr rtlCol="0" anchor="ctr"/>
+          <a:lstStyle/>
+          <a:p>
+            <a:pPr algn="ctr"/>
+          </a:p>
+        </p:txBody>
+      </p:sp>
+      <p:sp>
+        <p:nvSpPr>
+          <p:cNvPr id="17421" name="TextBox 17420"/>
+          <p:cNvSpPr txBox="1"/>
+          <p:nvPr/>
+        </p:nvSpPr>
+        <p:spPr>
+          <a:xfrm>
+            <a:off x="7059168" y="2936812"/>
+            <a:ext cx="4754880" cy="256032"/>
+          </a:xfrm>
+          <a:prstGeom prst="rect">
+            <a:avLst/>
+          </a:prstGeom>
+          <a:noFill/>
+        </p:spPr>
+        <p:txBody>
+          <a:bodyPr wrap="square">
+            <a:spAutoFit/>
+          </a:bodyPr>
+          <a:lstStyle/>
+          <a:p>
+            <a:pPr algn="ctr">
+              <a:lnSpc>
+                <a:spcPct val="100000"/>
+              </a:lnSpc>
+              <a:spcAft>
+                <a:spcPts val="300"/>
+              </a:spcAft>
+              <a:buNone/>
+            </a:pPr>
+            <a:r>
+              <a:rPr sz="1100" b="0">
+                <a:solidFill>
+                  <a:srgbClr val="4A5A70"/>
+                </a:solidFill>
+                <a:latin typeface="Calibri"/>
+              </a:rPr>
+              <a:t>TRACK — the same observed service, two captures.</a:t>
+            </a:r>
+          </a:p>
+        </p:txBody>
+      </p:sp>
+      <p:sp>
+        <p:nvSpPr>
+          <p:cNvPr id="17422" name="Rounded Rectangle 17421"/>
+          <p:cNvSpPr/>
+          <p:nvPr/>
+        </p:nvSpPr>
+        <p:spPr>
+          <a:xfrm>
+            <a:off x="7059168" y="3675887"/>
+            <a:ext cx="4754880" cy="566928"/>
+          </a:xfrm>
+          <a:prstGeom prst="roundRect">
+            <a:avLst/>
+          </a:prstGeom>
+          <a:solidFill>
+            <a:srgbClr val="FFFFFF"/>
+          </a:solidFill>
+          <a:ln w="9525">
+            <a:solidFill>
+              <a:srgbClr val="C2D4E6"/>
+            </a:solidFill>
+          </a:ln>
+          <a:effectLst/>
+        </p:spPr>
+        <p:style>
+          <a:lnRef idx="1">
+            <a:schemeClr val="accent1"/>
+          </a:lnRef>
+          <a:fillRef idx="3">
+            <a:schemeClr val="accent1"/>
+          </a:fillRef>
+          <a:effectRef idx="2">
+            <a:schemeClr val="accent1"/>
+          </a:effectRef>
+          <a:fontRef idx="minor">
+            <a:schemeClr val="lt1"/>
+          </a:fontRef>
+        </p:style>
+        <p:txBody>
+          <a:bodyPr rtlCol="0" anchor="ctr" wrap="square" tIns="54864" bIns="54864"/>
+          <a:lstStyle/>
+          <a:p>
+            <a:pPr algn="ctr">
+              <a:lnSpc>
+                <a:spcPct val="100000"/>
+              </a:lnSpc>
+              <a:spcAft>
+                <a:spcPts val="300"/>
+              </a:spcAft>
+              <a:buNone/>
+            </a:pPr>
+            <a:r>
+              <a:rPr sz="1300" b="1">
+                <a:solidFill>
+                  <a:srgbClr val="A83A1E"/>
+                </a:solidFill>
+                <a:latin typeface="Calibri"/>
+              </a:rPr>
+              <a:t>EARLIER  TLS 1.2      →  OBSERVED_CHANGE  →      LATER  TLS 1.0</a:t>
+            </a:r>
+          </a:p>
+        </p:txBody>
+      </p:sp>
+      <p:pic>
+        <p:nvPicPr>
+          <p:cNvPr id="17423" name="Picture 17422" descr="crop-0.0-0.0-1.0-0.44-12-pdf.png"/>
           <p:cNvPicPr>
             <a:picLocks noChangeAspect="1"/>
           </p:cNvPicPr>
@@ -12093,8 +13573,8 @@
         </p:blipFill>
         <p:spPr>
           <a:xfrm>
-            <a:off x="9601200" y="4443984"/>
-            <a:ext cx="2212848" cy="1244727"/>
+            <a:off x="7059168" y="4389120"/>
+            <a:ext cx="2139696" cy="1332713"/>
           </a:xfrm>
           <a:prstGeom prst="rect">
             <a:avLst/>
@@ -12103,14 +13583,14 @@
       </p:pic>
       <p:sp>
         <p:nvSpPr>
-          <p:cNvPr id="17423" name="Rectangle 17422"/>
+          <p:cNvPr id="17424" name="Rectangle 17423"/>
           <p:cNvSpPr/>
           <p:nvPr/>
         </p:nvSpPr>
         <p:spPr>
           <a:xfrm>
-            <a:off x="9601200" y="4443984"/>
-            <a:ext cx="2212848" cy="1244727"/>
+            <a:off x="7059168" y="4389120"/>
+            <a:ext cx="2139696" cy="1332713"/>
           </a:xfrm>
           <a:prstGeom prst="rect">
             <a:avLst/>
@@ -12147,14 +13627,14 @@
       </p:sp>
       <p:sp>
         <p:nvSpPr>
-          <p:cNvPr id="17424" name="TextBox 17423"/>
+          <p:cNvPr id="17425" name="TextBox 17424"/>
           <p:cNvSpPr txBox="1"/>
           <p:nvPr/>
         </p:nvSpPr>
         <p:spPr>
           <a:xfrm>
-            <a:off x="9601200" y="5706999"/>
-            <a:ext cx="2212848" cy="219456"/>
+            <a:off x="7059168" y="5758409"/>
+            <a:ext cx="2139696" cy="256032"/>
           </a:xfrm>
           <a:prstGeom prst="rect">
             <a:avLst/>
@@ -12174,29 +13654,133 @@
               <a:spcAft>
                 <a:spcPts val="300"/>
               </a:spcAft>
-            </a:pPr>
-            <a:r>
-              <a:rPr sz="800" b="0">
+              <a:buNone/>
+            </a:pPr>
+            <a:r>
+              <a:rPr sz="1100" b="0">
                 <a:solidFill>
                   <a:srgbClr val="4A5A70"/>
                 </a:solidFill>
                 <a:latin typeface="Calibri"/>
               </a:rPr>
-              <a:t>Export, in three formats.</a:t>
-            </a:r>
-          </a:p>
-        </p:txBody>
-      </p:sp>
-      <p:sp>
-        <p:nvSpPr>
-          <p:cNvPr id="17425" name="Rounded Rectangle 17424"/>
+              <a:t>REPORT — the exported PDF.</a:t>
+            </a:r>
+          </a:p>
+        </p:txBody>
+      </p:sp>
+      <p:sp>
+        <p:nvSpPr>
+          <p:cNvPr id="17426" name="Rounded Rectangle 17425"/>
           <p:cNvSpPr/>
           <p:nvPr/>
         </p:nvSpPr>
         <p:spPr>
           <a:xfrm>
-            <a:off x="384048" y="5943600"/>
-            <a:ext cx="6711696" cy="329184"/>
+            <a:off x="9363456" y="4389120"/>
+            <a:ext cx="2450592" cy="1298448"/>
+          </a:xfrm>
+          <a:prstGeom prst="roundRect">
+            <a:avLst/>
+          </a:prstGeom>
+          <a:solidFill>
+            <a:srgbClr val="EEF3F9"/>
+          </a:solidFill>
+          <a:ln w="9525">
+            <a:solidFill>
+              <a:srgbClr val="C2D4E6"/>
+            </a:solidFill>
+          </a:ln>
+          <a:effectLst/>
+        </p:spPr>
+        <p:style>
+          <a:lnRef idx="1">
+            <a:schemeClr val="accent1"/>
+          </a:lnRef>
+          <a:fillRef idx="3">
+            <a:schemeClr val="accent1"/>
+          </a:fillRef>
+          <a:effectRef idx="2">
+            <a:schemeClr val="accent1"/>
+          </a:effectRef>
+          <a:fontRef idx="minor">
+            <a:schemeClr val="lt1"/>
+          </a:fontRef>
+        </p:style>
+        <p:txBody>
+          <a:bodyPr rtlCol="0" anchor="t" wrap="square" tIns="54864" bIns="54864"/>
+          <a:lstStyle/>
+          <a:p>
+            <a:pPr algn="ctr">
+              <a:lnSpc>
+                <a:spcPct val="98000"/>
+              </a:lnSpc>
+              <a:spcAft>
+                <a:spcPts val="300"/>
+              </a:spcAft>
+              <a:buNone/>
+            </a:pPr>
+            <a:r>
+              <a:rPr sz="1150" b="1">
+                <a:solidFill>
+                  <a:srgbClr val="0B5FA5"/>
+                </a:solidFill>
+                <a:latin typeface="Calibri"/>
+              </a:rPr>
+              <a:t>The report carries</a:t>
+            </a:r>
+          </a:p>
+          <a:p>
+            <a:pPr>
+              <a:lnSpc>
+                <a:spcPct val="98000"/>
+              </a:lnSpc>
+              <a:spcAft>
+                <a:spcPts val="300"/>
+              </a:spcAft>
+              <a:buNone/>
+            </a:pPr>
+            <a:r>
+              <a:rPr sz="1100" b="0">
+                <a:solidFill>
+                  <a:srgbClr val="1F2C3F"/>
+                </a:solidFill>
+                <a:latin typeface="Calibri"/>
+              </a:rPr>
+              <a:t>findings · packet references · remediation</a:t>
+            </a:r>
+          </a:p>
+          <a:p>
+            <a:pPr>
+              <a:lnSpc>
+                <a:spcPct val="98000"/>
+              </a:lnSpc>
+              <a:spcAft>
+                <a:spcPts val="300"/>
+              </a:spcAft>
+              <a:buNone/>
+            </a:pPr>
+            <a:r>
+              <a:rPr sz="1100" b="0">
+                <a:solidFill>
+                  <a:srgbClr val="1F2C3F"/>
+                </a:solidFill>
+                <a:latin typeface="Calibri"/>
+              </a:rPr>
+              <a:t>JSON · standalone HTML · PDF</a:t>
+            </a:r>
+          </a:p>
+        </p:txBody>
+      </p:sp>
+      <p:sp>
+        <p:nvSpPr>
+          <p:cNvPr id="17427" name="Rounded Rectangle 17426"/>
+          <p:cNvSpPr/>
+          <p:nvPr/>
+        </p:nvSpPr>
+        <p:spPr>
+          <a:xfrm>
+            <a:off x="384048" y="5797296"/>
+            <a:ext cx="6510528" cy="384048"/>
           </a:xfrm>
           <a:prstGeom prst="roundRect">
             <a:avLst/>
@@ -12239,13 +13823,13 @@
               <a:buNone/>
             </a:pPr>
             <a:r>
-              <a:rPr sz="850" b="1">
+              <a:rPr sz="1100" b="1">
                 <a:solidFill>
                   <a:srgbClr val="1F2C3F"/>
                 </a:solidFill>
                 <a:latin typeface="Calibri"/>
               </a:rPr>
-              <a:t>Benefits are demonstrated on synthetic captures. No deployment, adoption figure or real-world detection rate is claimed.</a:t>
+              <a:t>Demonstrated on controlled synthetic captures; no production deployment claim.</a:t>
             </a:r>
           </a:p>
         </p:txBody>
@@ -12396,8 +13980,8 @@
         </p:nvSpPr>
         <p:spPr bwMode="auto">
           <a:xfrm>
-            <a:off x="384048" y="969264"/>
-            <a:ext cx="11430000" cy="310896"/>
+            <a:off x="384048" y="950976"/>
+            <a:ext cx="11430000" cy="329184"/>
           </a:xfrm>
           <a:prstGeom prst="rect">
             <a:avLst/>
@@ -12434,13 +14018,13 @@
               <a:buNone/>
             </a:pPr>
             <a:r>
-              <a:rPr sz="1000" b="0">
+              <a:rPr sz="1300" b="0">
                 <a:solidFill>
                   <a:srgbClr val="4A5A70"/>
                 </a:solidFill>
                 <a:latin typeface="Calibri"/>
               </a:rPr>
-              <a:t>The standards the rules cite and the parsers implement, and how every claim in this deck is checked.</a:t>
+              <a:t>The standards the rules cite, and the pipeline every claim in this deck is checked by.</a:t>
             </a:r>
             <a:endParaRPr kumimoji="0" lang="en-US" sz="2800" b="0" i="0" u="none" strike="noStrike" kern="1200" cap="none" spc="0" normalizeH="0" baseline="0" noProof="0" dirty="0">
               <a:ln>
@@ -12703,7 +14287,7 @@
         <p:spPr>
           <a:xfrm>
             <a:off x="384048" y="1316736"/>
-            <a:ext cx="3749039" cy="1792224"/>
+            <a:ext cx="3749039" cy="1426464"/>
           </a:xfrm>
           <a:prstGeom prst="roundRect">
             <a:avLst/>
@@ -12738,7 +14322,7 @@
           <a:p>
             <a:pPr algn="ctr">
               <a:lnSpc>
-                <a:spcPct val="88000"/>
+                <a:spcPct val="100000"/>
               </a:lnSpc>
               <a:spcAft>
                 <a:spcPts val="300"/>
@@ -12746,19 +14330,19 @@
               <a:buNone/>
             </a:pPr>
             <a:r>
-              <a:rPr sz="1000" b="1">
+              <a:rPr sz="1250" b="1">
                 <a:solidFill>
                   <a:srgbClr val="0B5FA5"/>
                 </a:solidFill>
                 <a:latin typeface="Calibri"/>
               </a:rPr>
-              <a:t>Core TLS and PKI</a:t>
+              <a:t>CORE TLS / PKI</a:t>
             </a:r>
           </a:p>
           <a:p>
             <a:pPr>
               <a:lnSpc>
-                <a:spcPct val="88000"/>
+                <a:spcPct val="100000"/>
               </a:lnSpc>
               <a:spcAft>
                 <a:spcPts val="300"/>
@@ -12766,7 +14350,7 @@
               <a:buNone/>
             </a:pPr>
             <a:r>
-              <a:rPr sz="800" b="0">
+              <a:rPr sz="1100" b="0">
                 <a:solidFill>
                   <a:srgbClr val="1F2C3F"/>
                 </a:solidFill>
@@ -12778,7 +14362,7 @@
           <a:p>
             <a:pPr>
               <a:lnSpc>
-                <a:spcPct val="88000"/>
+                <a:spcPct val="100000"/>
               </a:lnSpc>
               <a:spcAft>
                 <a:spcPts val="300"/>
@@ -12786,19 +14370,19 @@
               <a:buNone/>
             </a:pPr>
             <a:r>
-              <a:rPr sz="800" b="0">
+              <a:rPr sz="1100" b="0">
                 <a:solidFill>
                   <a:srgbClr val="1F2C3F"/>
                 </a:solidFill>
                 <a:latin typeface="Calibri"/>
               </a:rPr>
-              <a:t>RFC 5246 — TLS 1.2</a:t>
+              <a:t>RFC 9325 — secure use of TLS</a:t>
             </a:r>
           </a:p>
           <a:p>
             <a:pPr>
               <a:lnSpc>
-                <a:spcPct val="88000"/>
+                <a:spcPct val="100000"/>
               </a:lnSpc>
               <a:spcAft>
                 <a:spcPts val="300"/>
@@ -12806,19 +14390,19 @@
               <a:buNone/>
             </a:pPr>
             <a:r>
-              <a:rPr sz="800" b="0">
+              <a:rPr sz="1100" b="0">
                 <a:solidFill>
                   <a:srgbClr val="1F2C3F"/>
                 </a:solidFill>
                 <a:latin typeface="Calibri"/>
               </a:rPr>
-              <a:t>RFC 9325 — secure use of TLS (2022)</a:t>
+              <a:t>RFC 5280 — X.509 and CRL profile</a:t>
             </a:r>
           </a:p>
           <a:p>
             <a:pPr>
               <a:lnSpc>
-                <a:spcPct val="88000"/>
+                <a:spcPct val="100000"/>
               </a:lnSpc>
               <a:spcAft>
                 <a:spcPts val="300"/>
@@ -12826,113 +14410,13 @@
               <a:buNone/>
             </a:pPr>
             <a:r>
-              <a:rPr sz="800" b="0">
+              <a:rPr sz="1100" b="0">
                 <a:solidFill>
                   <a:srgbClr val="1F2C3F"/>
                 </a:solidFill>
                 <a:latin typeface="Calibri"/>
               </a:rPr>
-              <a:t>RFC 8996 — deprecating TLS 1.0 and 1.1</a:t>
-            </a:r>
-          </a:p>
-          <a:p>
-            <a:pPr>
-              <a:lnSpc>
-                <a:spcPct val="88000"/>
-              </a:lnSpc>
-              <a:spcAft>
-                <a:spcPts val="300"/>
-              </a:spcAft>
-              <a:buNone/>
-            </a:pPr>
-            <a:r>
-              <a:rPr sz="800" b="0">
-                <a:solidFill>
-                  <a:srgbClr val="1F2C3F"/>
-                </a:solidFill>
-                <a:latin typeface="Calibri"/>
-              </a:rPr>
-              <a:t>RFC 7457 — known attacks on TLS</a:t>
-            </a:r>
-          </a:p>
-          <a:p>
-            <a:pPr>
-              <a:lnSpc>
-                <a:spcPct val="88000"/>
-              </a:lnSpc>
-              <a:spcAft>
-                <a:spcPts val="300"/>
-              </a:spcAft>
-              <a:buNone/>
-            </a:pPr>
-            <a:r>
-              <a:rPr sz="800" b="0">
-                <a:solidFill>
-                  <a:srgbClr val="1F2C3F"/>
-                </a:solidFill>
-                <a:latin typeface="Calibri"/>
-              </a:rPr>
-              <a:t>RFC 4492 — ECC cipher suites</a:t>
-            </a:r>
-          </a:p>
-          <a:p>
-            <a:pPr>
-              <a:lnSpc>
-                <a:spcPct val="88000"/>
-              </a:lnSpc>
-              <a:spcAft>
-                <a:spcPts val="300"/>
-              </a:spcAft>
-              <a:buNone/>
-            </a:pPr>
-            <a:r>
-              <a:rPr sz="800" b="0">
-                <a:solidFill>
-                  <a:srgbClr val="1F2C3F"/>
-                </a:solidFill>
-                <a:latin typeface="Calibri"/>
-              </a:rPr>
-              <a:t>RFC 5280 — X.509 certificate and CRL profile</a:t>
-            </a:r>
-          </a:p>
-          <a:p>
-            <a:pPr>
-              <a:lnSpc>
-                <a:spcPct val="88000"/>
-              </a:lnSpc>
-              <a:spcAft>
-                <a:spcPts val="300"/>
-              </a:spcAft>
-              <a:buNone/>
-            </a:pPr>
-            <a:r>
-              <a:rPr sz="800" b="0">
-                <a:solidFill>
-                  <a:srgbClr val="1F2C3F"/>
-                </a:solidFill>
-                <a:latin typeface="Calibri"/>
-              </a:rPr>
-              <a:t>RFC 6125 — service identity verification</a:t>
-            </a:r>
-          </a:p>
-          <a:p>
-            <a:pPr>
-              <a:lnSpc>
-                <a:spcPct val="88000"/>
-              </a:lnSpc>
-              <a:spcAft>
-                <a:spcPts val="300"/>
-              </a:spcAft>
-              <a:buNone/>
-            </a:pPr>
-            <a:r>
-              <a:rPr sz="800" b="0">
-                <a:solidFill>
-                  <a:srgbClr val="1F2C3F"/>
-                </a:solidFill>
-                <a:latin typeface="Calibri"/>
-              </a:rPr>
-              <a:t>NIST SP 800-52 Rev. 2 · IANA TLS registry</a:t>
+              <a:t>NIST SP 800-52 Rev. 2</a:t>
             </a:r>
           </a:p>
         </p:txBody>
@@ -12946,7 +14430,7 @@
         <p:spPr>
           <a:xfrm>
             <a:off x="4224528" y="1316736"/>
-            <a:ext cx="3749039" cy="1792224"/>
+            <a:ext cx="3749039" cy="1426464"/>
           </a:xfrm>
           <a:prstGeom prst="roundRect">
             <a:avLst/>
@@ -12981,7 +14465,7 @@
           <a:p>
             <a:pPr algn="ctr">
               <a:lnSpc>
-                <a:spcPct val="88000"/>
+                <a:spcPct val="100000"/>
               </a:lnSpc>
               <a:spcAft>
                 <a:spcPts val="300"/>
@@ -12989,19 +14473,19 @@
               <a:buNone/>
             </a:pPr>
             <a:r>
-              <a:rPr sz="1000" b="1">
+              <a:rPr sz="1250" b="1">
                 <a:solidFill>
                   <a:srgbClr val="0B5FA5"/>
                 </a:solidFill>
                 <a:latin typeface="Calibri"/>
               </a:rPr>
-              <a:t>Email protocols</a:t>
+              <a:t>EMAIL SECURITY</a:t>
             </a:r>
           </a:p>
           <a:p>
             <a:pPr>
               <a:lnSpc>
-                <a:spcPct val="88000"/>
+                <a:spcPct val="100000"/>
               </a:lnSpc>
               <a:spcAft>
                 <a:spcPts val="300"/>
@@ -13009,7 +14493,7 @@
               <a:buNone/>
             </a:pPr>
             <a:r>
-              <a:rPr sz="800" b="0">
+              <a:rPr sz="1100" b="0">
                 <a:solidFill>
                   <a:srgbClr val="1F2C3F"/>
                 </a:solidFill>
@@ -13021,7 +14505,7 @@
           <a:p>
             <a:pPr>
               <a:lnSpc>
-                <a:spcPct val="88000"/>
+                <a:spcPct val="100000"/>
               </a:lnSpc>
               <a:spcAft>
                 <a:spcPts val="300"/>
@@ -13029,19 +14513,19 @@
               <a:buNone/>
             </a:pPr>
             <a:r>
-              <a:rPr sz="800" b="0">
+              <a:rPr sz="1100" b="0">
                 <a:solidFill>
                   <a:srgbClr val="1F2C3F"/>
                 </a:solidFill>
                 <a:latin typeface="Calibri"/>
               </a:rPr>
-              <a:t>RFC 3207 — SMTP over TLS (STARTTLS)</a:t>
+              <a:t>RFC 3207 — STARTTLS</a:t>
             </a:r>
           </a:p>
           <a:p>
             <a:pPr>
               <a:lnSpc>
-                <a:spcPct val="88000"/>
+                <a:spcPct val="100000"/>
               </a:lnSpc>
               <a:spcAft>
                 <a:spcPts val="300"/>
@@ -13049,7 +14533,7 @@
               <a:buNone/>
             </a:pPr>
             <a:r>
-              <a:rPr sz="800" b="0">
+              <a:rPr sz="1100" b="0">
                 <a:solidFill>
                   <a:srgbClr val="1F2C3F"/>
                 </a:solidFill>
@@ -13061,7 +14545,7 @@
           <a:p>
             <a:pPr>
               <a:lnSpc>
-                <a:spcPct val="88000"/>
+                <a:spcPct val="100000"/>
               </a:lnSpc>
               <a:spcAft>
                 <a:spcPts val="300"/>
@@ -13069,53 +14553,13 @@
               <a:buNone/>
             </a:pPr>
             <a:r>
-              <a:rPr sz="800" b="0">
+              <a:rPr sz="1100" b="0">
                 <a:solidFill>
                   <a:srgbClr val="1F2C3F"/>
                 </a:solidFill>
                 <a:latin typeface="Calibri"/>
               </a:rPr>
-              <a:t>RFC 1939 — POP3</a:t>
-            </a:r>
-          </a:p>
-          <a:p>
-            <a:pPr>
-              <a:lnSpc>
-                <a:spcPct val="88000"/>
-              </a:lnSpc>
-              <a:spcAft>
-                <a:spcPts val="300"/>
-              </a:spcAft>
-              <a:buNone/>
-            </a:pPr>
-            <a:r>
-              <a:rPr sz="800" b="0">
-                <a:solidFill>
-                  <a:srgbClr val="1F2C3F"/>
-                </a:solidFill>
-                <a:latin typeface="Calibri"/>
-              </a:rPr>
-              <a:t>RFC 2595 — TLS with IMAP, POP3 and ACAP</a:t>
-            </a:r>
-          </a:p>
-          <a:p>
-            <a:pPr>
-              <a:lnSpc>
-                <a:spcPct val="88000"/>
-              </a:lnSpc>
-              <a:spcAft>
-                <a:spcPts val="300"/>
-              </a:spcAft>
-              <a:buNone/>
-            </a:pPr>
-            <a:r>
-              <a:rPr sz="800" b="0">
-                <a:solidFill>
-                  <a:srgbClr val="1F2C3F"/>
-                </a:solidFill>
-                <a:latin typeface="Calibri"/>
-              </a:rPr>
-              <a:t>RFC 2606 — reserved names (.invalid, used by every fixture)</a:t>
+              <a:t>RFC 1939 / RFC 2595 — POP3 and TLS</a:t>
             </a:r>
           </a:p>
         </p:txBody>
@@ -13129,7 +14573,7 @@
         <p:spPr>
           <a:xfrm>
             <a:off x="8065008" y="1316736"/>
-            <a:ext cx="3749039" cy="1792224"/>
+            <a:ext cx="3749039" cy="1426464"/>
           </a:xfrm>
           <a:prstGeom prst="roundRect">
             <a:avLst/>
@@ -13164,7 +14608,7 @@
           <a:p>
             <a:pPr algn="ctr">
               <a:lnSpc>
-                <a:spcPct val="88000"/>
+                <a:spcPct val="100000"/>
               </a:lnSpc>
               <a:spcAft>
                 <a:spcPts val="300"/>
@@ -13172,19 +14616,19 @@
               <a:buNone/>
             </a:pPr>
             <a:r>
-              <a:rPr sz="1000" b="1">
+              <a:rPr sz="1250" b="1">
                 <a:solidFill>
                   <a:srgbClr val="0B5FA5"/>
                 </a:solidFill>
                 <a:latin typeface="Calibri"/>
               </a:rPr>
-              <a:t>Validation tools</a:t>
+              <a:t>VALIDATION / TOOLING</a:t>
             </a:r>
           </a:p>
           <a:p>
             <a:pPr>
               <a:lnSpc>
-                <a:spcPct val="88000"/>
+                <a:spcPct val="100000"/>
               </a:lnSpc>
               <a:spcAft>
                 <a:spcPts val="300"/>
@@ -13192,19 +14636,19 @@
               <a:buNone/>
             </a:pPr>
             <a:r>
-              <a:rPr sz="800" b="0">
+              <a:rPr sz="1100" b="0">
                 <a:solidFill>
                   <a:srgbClr val="1F2C3F"/>
                 </a:solidFill>
                 <a:latin typeface="Calibri"/>
               </a:rPr>
-              <a:t>Wireshark / TShark — independent dissection</a:t>
+              <a:t>Wireshark / TShark</a:t>
             </a:r>
           </a:p>
           <a:p>
             <a:pPr>
               <a:lnSpc>
-                <a:spcPct val="88000"/>
+                <a:spcPct val="100000"/>
               </a:lnSpc>
               <a:spcAft>
                 <a:spcPts val="300"/>
@@ -13212,19 +14656,19 @@
               <a:buNone/>
             </a:pPr>
             <a:r>
-              <a:rPr sz="800" b="0">
+              <a:rPr sz="1100" b="0">
                 <a:solidFill>
                   <a:srgbClr val="1F2C3F"/>
                 </a:solidFill>
                 <a:latin typeface="Calibri"/>
               </a:rPr>
-              <a:t>pytest · hypothesis — property and regression tests</a:t>
+              <a:t>Scapy</a:t>
             </a:r>
           </a:p>
           <a:p>
             <a:pPr>
               <a:lnSpc>
-                <a:spcPct val="88000"/>
+                <a:spcPct val="100000"/>
               </a:lnSpc>
               <a:spcAft>
                 <a:spcPts val="300"/>
@@ -13232,19 +14676,19 @@
               <a:buNone/>
             </a:pPr>
             <a:r>
-              <a:rPr sz="800" b="0">
+              <a:rPr sz="1100" b="0">
                 <a:solidFill>
                   <a:srgbClr val="1F2C3F"/>
                 </a:solidFill>
                 <a:latin typeface="Calibri"/>
               </a:rPr>
-              <a:t>Playwright · Vitest — browser and unit tests</a:t>
+              <a:t>cryptography</a:t>
             </a:r>
           </a:p>
           <a:p>
             <a:pPr>
               <a:lnSpc>
-                <a:spcPct val="88000"/>
+                <a:spcPct val="100000"/>
               </a:lnSpc>
               <a:spcAft>
                 <a:spcPts val="300"/>
@@ -13252,33 +14696,13 @@
               <a:buNone/>
             </a:pPr>
             <a:r>
-              <a:rPr sz="800" b="0">
+              <a:rPr sz="1100" b="0">
                 <a:solidFill>
                   <a:srgbClr val="1F2C3F"/>
                 </a:solidFill>
                 <a:latin typeface="Calibri"/>
               </a:rPr>
-              <a:t>pip-audit · npm audit · CycloneDX — supply chain</a:t>
-            </a:r>
-          </a:p>
-          <a:p>
-            <a:pPr>
-              <a:lnSpc>
-                <a:spcPct val="88000"/>
-              </a:lnSpc>
-              <a:spcAft>
-                <a:spcPts val="300"/>
-              </a:spcAft>
-              <a:buNone/>
-            </a:pPr>
-            <a:r>
-              <a:rPr sz="800" b="0">
-                <a:solidFill>
-                  <a:srgbClr val="1F2C3F"/>
-                </a:solidFill>
-                <a:latin typeface="Calibri"/>
-              </a:rPr>
-              <a:t>ruff · mypy — lint and strict typing</a:t>
+              <a:t>pytest · Playwright</a:t>
             </a:r>
           </a:p>
         </p:txBody>
@@ -13291,8 +14715,8 @@
         </p:nvSpPr>
         <p:spPr>
           <a:xfrm>
-            <a:off x="384048" y="3291840"/>
-            <a:ext cx="11430000" cy="1591056"/>
+            <a:off x="384048" y="2926080"/>
+            <a:ext cx="11430000" cy="1627632"/>
           </a:xfrm>
           <a:prstGeom prst="roundRect">
             <a:avLst/>
@@ -13341,7 +14765,7 @@
                 </a:solidFill>
                 <a:latin typeface="Calibri"/>
               </a:rPr>
-              <a:t>HOW EVERY CLAIM IN THIS DECK IS CHECKED</a:t>
+              <a:t>HOW EVERY CLAIM IS CHECKED</a:t>
             </a:r>
           </a:p>
         </p:txBody>
@@ -13354,8 +14778,8 @@
         </p:nvSpPr>
         <p:spPr>
           <a:xfrm>
-            <a:off x="530352" y="3639312"/>
-            <a:ext cx="1664208" cy="1078992"/>
+            <a:off x="548640" y="3273552"/>
+            <a:ext cx="1682496" cy="1115568"/>
           </a:xfrm>
           <a:prstGeom prst="roundRect">
             <a:avLst/>
@@ -13398,13 +14822,13 @@
               <a:buNone/>
             </a:pPr>
             <a:r>
-              <a:rPr sz="850" b="1">
+              <a:rPr sz="950" b="1">
                 <a:solidFill>
                   <a:srgbClr val="111B2A"/>
                 </a:solidFill>
                 <a:latin typeface="Calibri"/>
               </a:rPr>
-              <a:t>Deterministic fixtures</a:t>
+              <a:t>CONTROLLED FIXTURES</a:t>
             </a:r>
           </a:p>
           <a:p>
@@ -13418,13 +14842,13 @@
               <a:buNone/>
             </a:pPr>
             <a:r>
-              <a:rPr sz="700" b="0">
+              <a:rPr sz="850" b="0">
                 <a:solidFill>
                   <a:srgbClr val="4A5A70"/>
                 </a:solidFill>
                 <a:latin typeface="Calibri"/>
               </a:rPr>
-              <a:t>generated from a fixed seed; identical bytes on every machine</a:t>
+              <a:t>one fixed seed, identical bytes everywhere</a:t>
             </a:r>
           </a:p>
         </p:txBody>
@@ -13437,8 +14861,8 @@
         </p:nvSpPr>
         <p:spPr>
           <a:xfrm>
-            <a:off x="2231136" y="4096512"/>
-            <a:ext cx="182880" cy="164592"/>
+            <a:off x="2258568" y="3767328"/>
+            <a:ext cx="164592" cy="164592"/>
           </a:xfrm>
           <a:prstGeom prst="rightArrow">
             <a:avLst/>
@@ -13481,8 +14905,8 @@
         </p:nvSpPr>
         <p:spPr>
           <a:xfrm>
-            <a:off x="2432304" y="3639312"/>
-            <a:ext cx="1664208" cy="1078992"/>
+            <a:off x="2450591" y="3273552"/>
+            <a:ext cx="1682496" cy="1115568"/>
           </a:xfrm>
           <a:prstGeom prst="roundRect">
             <a:avLst/>
@@ -13525,13 +14949,13 @@
               <a:buNone/>
             </a:pPr>
             <a:r>
-              <a:rPr sz="850" b="1">
+              <a:rPr sz="950" b="1">
                 <a:solidFill>
                   <a:srgbClr val="111B2A"/>
                 </a:solidFill>
                 <a:latin typeface="Calibri"/>
               </a:rPr>
-              <a:t>Hand-derived manifests</a:t>
+              <a:t>HAND-DERIVED EXPECTATIONS</a:t>
             </a:r>
           </a:p>
           <a:p>
@@ -13545,13 +14969,13 @@
               <a:buNone/>
             </a:pPr>
             <a:r>
-              <a:rPr sz="700" b="0">
+              <a:rPr sz="850" b="0">
                 <a:solidFill>
                   <a:srgbClr val="4A5A70"/>
                 </a:solidFill>
                 <a:latin typeface="Calibri"/>
               </a:rPr>
-              <a:t>expectations written by hand and committed, not read back</a:t>
+              <a:t>written by hand, committed, not read back</a:t>
             </a:r>
           </a:p>
         </p:txBody>
@@ -13564,8 +14988,8 @@
         </p:nvSpPr>
         <p:spPr>
           <a:xfrm>
-            <a:off x="4133088" y="4096512"/>
-            <a:ext cx="182880" cy="164592"/>
+            <a:off x="4160520" y="3767328"/>
+            <a:ext cx="164592" cy="164592"/>
           </a:xfrm>
           <a:prstGeom prst="rightArrow">
             <a:avLst/>
@@ -13608,8 +15032,8 @@
         </p:nvSpPr>
         <p:spPr>
           <a:xfrm>
-            <a:off x="4334256" y="3639312"/>
-            <a:ext cx="1664208" cy="1078992"/>
+            <a:off x="4352544" y="3273552"/>
+            <a:ext cx="1682496" cy="1115568"/>
           </a:xfrm>
           <a:prstGeom prst="roundRect">
             <a:avLst/>
@@ -13652,13 +15076,13 @@
               <a:buNone/>
             </a:pPr>
             <a:r>
-              <a:rPr sz="850" b="1">
+              <a:rPr sz="950" b="1">
                 <a:solidFill>
                   <a:srgbClr val="111B2A"/>
                 </a:solidFill>
                 <a:latin typeface="Calibri"/>
               </a:rPr>
-              <a:t>Engine under test</a:t>
+              <a:t>ENGINE UNDER TEST</a:t>
             </a:r>
           </a:p>
           <a:p>
@@ -13672,13 +15096,13 @@
               <a:buNone/>
             </a:pPr>
             <a:r>
-              <a:rPr sz="700" b="0">
+              <a:rPr sz="850" b="0">
                 <a:solidFill>
                   <a:srgbClr val="4A5A70"/>
                 </a:solidFill>
                 <a:latin typeface="Calibri"/>
               </a:rPr>
-              <a:t>1,357 tests; the captures themselves stay out of git</a:t>
+              <a:t>1,357 tests; captures stay out of git</a:t>
             </a:r>
           </a:p>
         </p:txBody>
@@ -13691,8 +15115,8 @@
         </p:nvSpPr>
         <p:spPr>
           <a:xfrm>
-            <a:off x="6035040" y="4096512"/>
-            <a:ext cx="182880" cy="164592"/>
+            <a:off x="6062472" y="3767328"/>
+            <a:ext cx="164592" cy="164592"/>
           </a:xfrm>
           <a:prstGeom prst="rightArrow">
             <a:avLst/>
@@ -13735,8 +15159,8 @@
         </p:nvSpPr>
         <p:spPr>
           <a:xfrm>
-            <a:off x="6236208" y="3639312"/>
-            <a:ext cx="1664208" cy="1078992"/>
+            <a:off x="6254496" y="3273552"/>
+            <a:ext cx="1682496" cy="1115568"/>
           </a:xfrm>
           <a:prstGeom prst="roundRect">
             <a:avLst/>
@@ -13779,13 +15203,13 @@
               <a:buNone/>
             </a:pPr>
             <a:r>
-              <a:rPr sz="850" b="1">
+              <a:rPr sz="950" b="1">
                 <a:solidFill>
                   <a:srgbClr val="111B2A"/>
                 </a:solidFill>
                 <a:latin typeface="Calibri"/>
               </a:rPr>
-              <a:t>Independent dissector</a:t>
+              <a:t>INDEPENDENT TSHARK CROSS-CHECK</a:t>
             </a:r>
           </a:p>
           <a:p>
@@ -13799,13 +15223,13 @@
               <a:buNone/>
             </a:pPr>
             <a:r>
-              <a:rPr sz="700" b="0">
+              <a:rPr sz="850" b="0">
                 <a:solidFill>
                   <a:srgbClr val="4A5A70"/>
                 </a:solidFill>
                 <a:latin typeface="Calibri"/>
               </a:rPr>
-              <a:t>ten TShark cross-checks against Wireshark's own parse</a:t>
+              <a:t>against Wireshark's own dissector</a:t>
             </a:r>
           </a:p>
         </p:txBody>
@@ -13818,8 +15242,8 @@
         </p:nvSpPr>
         <p:spPr>
           <a:xfrm>
-            <a:off x="7936992" y="4096512"/>
-            <a:ext cx="182880" cy="164592"/>
+            <a:off x="7964423" y="3767328"/>
+            <a:ext cx="164592" cy="164592"/>
           </a:xfrm>
           <a:prstGeom prst="rightArrow">
             <a:avLst/>
@@ -13862,8 +15286,8 @@
         </p:nvSpPr>
         <p:spPr>
           <a:xfrm>
-            <a:off x="8138160" y="3639312"/>
-            <a:ext cx="1664208" cy="1078992"/>
+            <a:off x="8156448" y="3273552"/>
+            <a:ext cx="1682496" cy="1115568"/>
           </a:xfrm>
           <a:prstGeom prst="roundRect">
             <a:avLst/>
@@ -13906,13 +15330,13 @@
               <a:buNone/>
             </a:pPr>
             <a:r>
-              <a:rPr sz="850" b="1">
+              <a:rPr sz="950" b="1">
                 <a:solidFill>
                   <a:srgbClr val="111B2A"/>
                 </a:solidFill>
                 <a:latin typeface="Calibri"/>
               </a:rPr>
-              <a:t>Real browser, real backend</a:t>
+              <a:t>REAL-BACKEND PLAYWRIGHT</a:t>
             </a:r>
           </a:p>
           <a:p>
@@ -13926,13 +15350,13 @@
               <a:buNone/>
             </a:pPr>
             <a:r>
-              <a:rPr sz="700" b="0">
+              <a:rPr sz="850" b="0">
                 <a:solidFill>
                   <a:srgbClr val="4A5A70"/>
                 </a:solidFill>
                 <a:latin typeface="Calibri"/>
               </a:rPr>
-              <a:t>five Playwright specs, including a restart for persistence</a:t>
+              <a:t>five browser specs, including a restart</a:t>
             </a:r>
           </a:p>
         </p:txBody>
@@ -13945,8 +15369,8 @@
         </p:nvSpPr>
         <p:spPr>
           <a:xfrm>
-            <a:off x="9838944" y="4096512"/>
-            <a:ext cx="182880" cy="164592"/>
+            <a:off x="9866376" y="3767328"/>
+            <a:ext cx="164592" cy="164592"/>
           </a:xfrm>
           <a:prstGeom prst="rightArrow">
             <a:avLst/>
@@ -13989,8 +15413,8 @@
         </p:nvSpPr>
         <p:spPr>
           <a:xfrm>
-            <a:off x="10040112" y="3639312"/>
-            <a:ext cx="1664208" cy="1078992"/>
+            <a:off x="10058400" y="3273552"/>
+            <a:ext cx="1682496" cy="1115568"/>
           </a:xfrm>
           <a:prstGeom prst="roundRect">
             <a:avLst/>
@@ -14033,13 +15457,13 @@
               <a:buNone/>
             </a:pPr>
             <a:r>
-              <a:rPr sz="850" b="1">
+              <a:rPr sz="950" b="1">
                 <a:solidFill>
                   <a:srgbClr val="111B2A"/>
                 </a:solidFill>
                 <a:latin typeface="Calibri"/>
               </a:rPr>
-              <a:t>Report parity</a:t>
+              <a:t>REPORT PARITY</a:t>
             </a:r>
           </a:p>
           <a:p>
@@ -14053,13 +15477,13 @@
               <a:buNone/>
             </a:pPr>
             <a:r>
-              <a:rPr sz="700" b="0">
+              <a:rPr sz="850" b="0">
                 <a:solidFill>
                   <a:srgbClr val="4A5A70"/>
                 </a:solidFill>
                 <a:latin typeface="Calibri"/>
               </a:rPr>
-              <a:t>JSON, HTML and PDF asserted to agree, field by field</a:t>
+              <a:t>JSON, HTML and PDF asserted to agree</a:t>
             </a:r>
           </a:p>
         </p:txBody>
@@ -14072,8 +15496,8 @@
         </p:nvSpPr>
         <p:spPr>
           <a:xfrm>
-            <a:off x="384048" y="5047488"/>
-            <a:ext cx="11430000" cy="731520"/>
+            <a:off x="384048" y="4736592"/>
+            <a:ext cx="8284464" cy="1024128"/>
           </a:xfrm>
           <a:prstGeom prst="roundRect">
             <a:avLst/>
@@ -14116,13 +15540,13 @@
               <a:buNone/>
             </a:pPr>
             <a:r>
-              <a:rPr sz="1000" b="1">
+              <a:rPr sz="1250" b="1">
                 <a:solidFill>
                   <a:srgbClr val="0B5FA5"/>
                 </a:solidFill>
                 <a:latin typeface="Calibri"/>
               </a:rPr>
-              <a:t>Repository and demonstration</a:t>
+              <a:t>PROJECT</a:t>
             </a:r>
           </a:p>
           <a:p>
@@ -14135,16 +15559,16 @@
               </a:spcAft>
             </a:pPr>
             <a:r>
-              <a:rPr sz="900" b="1">
+              <a:rPr sz="1200" b="1">
                 <a:solidFill>
                   <a:srgbClr val="111B2A"/>
                 </a:solidFill>
                 <a:latin typeface="Calibri"/>
               </a:rPr>
-              <a:t>Repository  </a:t>
-            </a:r>
-            <a:r>
-              <a:rPr sz="900" u="sng">
+              <a:t>GitHub repository  </a:t>
+            </a:r>
+            <a:r>
+              <a:rPr sz="1200" u="sng">
                 <a:solidFill>
                   <a:srgbClr val="0B5FA5"/>
                 </a:solidFill>
@@ -14164,7 +15588,7 @@
               </a:spcAft>
             </a:pPr>
             <a:r>
-              <a:rPr sz="900" b="1">
+              <a:rPr sz="1200" b="1">
                 <a:solidFill>
                   <a:srgbClr val="111B2A"/>
                 </a:solidFill>
@@ -14173,13 +15597,163 @@
               <a:t>Demonstration  </a:t>
             </a:r>
             <a:r>
-              <a:rPr sz="900" i="1">
+              <a:rPr sz="1200" i="1">
                 <a:solidFill>
                   <a:srgbClr val="4A5A70"/>
                 </a:solidFill>
                 <a:latin typeface="Calibri"/>
               </a:rPr>
               <a:t>Demo video included in submission package.</a:t>
+            </a:r>
+          </a:p>
+        </p:txBody>
+      </p:sp>
+      <p:sp>
+        <p:nvSpPr>
+          <p:cNvPr id="17427" name="Rounded Rectangle 17426"/>
+          <p:cNvSpPr/>
+          <p:nvPr/>
+        </p:nvSpPr>
+        <p:spPr>
+          <a:xfrm>
+            <a:off x="8833104" y="4736592"/>
+            <a:ext cx="2980944" cy="1024128"/>
+          </a:xfrm>
+          <a:prstGeom prst="roundRect">
+            <a:avLst/>
+          </a:prstGeom>
+          <a:solidFill>
+            <a:srgbClr val="EEF3F9"/>
+          </a:solidFill>
+          <a:ln w="9525">
+            <a:solidFill>
+              <a:srgbClr val="C2D4E6"/>
+            </a:solidFill>
+          </a:ln>
+          <a:effectLst/>
+        </p:spPr>
+        <p:style>
+          <a:lnRef idx="1">
+            <a:schemeClr val="accent1"/>
+          </a:lnRef>
+          <a:fillRef idx="3">
+            <a:schemeClr val="accent1"/>
+          </a:fillRef>
+          <a:effectRef idx="2">
+            <a:schemeClr val="accent1"/>
+          </a:effectRef>
+          <a:fontRef idx="minor">
+            <a:schemeClr val="lt1"/>
+          </a:fontRef>
+        </p:style>
+        <p:txBody>
+          <a:bodyPr rtlCol="0" anchor="t" wrap="square" tIns="54864" bIns="54864"/>
+          <a:lstStyle/>
+          <a:p>
+            <a:pPr algn="ctr">
+              <a:lnSpc>
+                <a:spcPct val="100000"/>
+              </a:lnSpc>
+              <a:spcAft>
+                <a:spcPts val="300"/>
+              </a:spcAft>
+              <a:buNone/>
+            </a:pPr>
+            <a:r>
+              <a:rPr sz="400" b="0">
+                <a:solidFill>
+                  <a:srgbClr val="4A5A70"/>
+                </a:solidFill>
+                <a:latin typeface="Calibri"/>
+              </a:rPr>
+              <a:t/>
+            </a:r>
+          </a:p>
+        </p:txBody>
+      </p:sp>
+      <p:pic>
+        <p:nvPicPr>
+          <p:cNvPr id="17428" name="Picture 17427" descr="qr.png"/>
+          <p:cNvPicPr>
+            <a:picLocks noChangeAspect="1"/>
+          </p:cNvPicPr>
+          <p:nvPr/>
+        </p:nvPicPr>
+        <p:blipFill>
+          <a:blip r:embed="rId5"/>
+          <a:stretch>
+            <a:fillRect/>
+          </a:stretch>
+        </p:blipFill>
+        <p:spPr>
+          <a:xfrm>
+            <a:off x="8961120" y="4846320"/>
+            <a:ext cx="804672" cy="804672"/>
+          </a:xfrm>
+          <a:prstGeom prst="rect">
+            <a:avLst/>
+          </a:prstGeom>
+        </p:spPr>
+      </p:pic>
+      <p:sp>
+        <p:nvSpPr>
+          <p:cNvPr id="17429" name="TextBox 17428"/>
+          <p:cNvSpPr txBox="1"/>
+          <p:nvPr/>
+        </p:nvSpPr>
+        <p:spPr>
+          <a:xfrm>
+            <a:off x="9875520" y="4882896"/>
+            <a:ext cx="1847088" cy="731520"/>
+          </a:xfrm>
+          <a:prstGeom prst="rect">
+            <a:avLst/>
+          </a:prstGeom>
+          <a:noFill/>
+        </p:spPr>
+        <p:txBody>
+          <a:bodyPr wrap="square">
+            <a:spAutoFit/>
+          </a:bodyPr>
+          <a:lstStyle/>
+          <a:p>
+            <a:pPr>
+              <a:lnSpc>
+                <a:spcPct val="98000"/>
+              </a:lnSpc>
+              <a:spcAft>
+                <a:spcPts val="300"/>
+              </a:spcAft>
+              <a:buNone/>
+            </a:pPr>
+            <a:r>
+              <a:rPr sz="1000" b="1">
+                <a:solidFill>
+                  <a:srgbClr val="0B5FA5"/>
+                </a:solidFill>
+                <a:latin typeface="Calibri"/>
+              </a:rPr>
+              <a:t>SCAN FOR THE REPOSITORY</a:t>
+            </a:r>
+          </a:p>
+          <a:p>
+            <a:pPr>
+              <a:lnSpc>
+                <a:spcPct val="98000"/>
+              </a:lnSpc>
+              <a:spcAft>
+                <a:spcPts val="300"/>
+              </a:spcAft>
+              <a:buNone/>
+            </a:pPr>
+            <a:r>
+              <a:rPr sz="950" b="0">
+                <a:solidFill>
+                  <a:srgbClr val="4A5A70"/>
+                </a:solidFill>
+                <a:latin typeface="Calibri"/>
+              </a:rPr>
+              <a:t>Private until the team publishes it.</a:t>
             </a:r>
           </a:p>
         </p:txBody>

--- a/submission/final/SecureMailScope-SIH26159-Zero-Day.pptx
+++ b/submission/final/SecureMailScope-SIH26159-Zero-Day.pptx
@@ -6705,7 +6705,7 @@
                 </a:solidFill>
                 <a:latin typeface="Calibri"/>
               </a:rPr>
-              <a:t>STARTTLS / TLS</a:t>
+              <a:t>STARTTLS · STLS · TLS</a:t>
             </a:r>
           </a:p>
           <a:p>
@@ -7507,7 +7507,7 @@
                 </a:solidFill>
                 <a:latin typeface="Calibri"/>
               </a:rPr>
-              <a:t>One direction of flow. Each stage reads only what the previous one produced, and records the packets it read it from.</a:t>
+              <a:t>Each stage consumes the previous stage’s evidence and preserves packet-level provenance.</a:t>
             </a:r>
           </a:p>
         </p:txBody>
@@ -11641,7 +11641,7 @@
                 </a:solidFill>
                 <a:latin typeface="Calibri"/>
               </a:rPr>
-              <a:t>156</a:t>
+              <a:t>158</a:t>
             </a:r>
           </a:p>
           <a:p>
@@ -15594,7 +15594,7 @@
                 </a:solidFill>
                 <a:latin typeface="Calibri"/>
               </a:rPr>
-              <a:t>Demonstration  </a:t>
+              <a:t>Demonstration video  </a:t>
             </a:r>
             <a:r>
               <a:rPr sz="1200" i="1">
@@ -15603,7 +15603,7 @@
                 </a:solidFill>
                 <a:latin typeface="Calibri"/>
               </a:rPr>
-              <a:t>Demo video included in submission package.</a:t>
+              <a:t>Included in the submission package.</a:t>
             </a:r>
           </a:p>
         </p:txBody>
@@ -15753,7 +15753,7 @@
                 </a:solidFill>
                 <a:latin typeface="Calibri"/>
               </a:rPr>
-              <a:t>Private until the team publishes it.</a:t>
+              <a:t>Public repository — source, tests and submission package.</a:t>
             </a:r>
           </a:p>
         </p:txBody>

--- a/submission/final/SecureMailScope-SIH26159-Zero-Day.pptx
+++ b/submission/final/SecureMailScope-SIH26159-Zero-Day.pptx
@@ -5633,7 +5633,7 @@
         <p:spPr>
           <a:xfrm>
             <a:off x="566928" y="3163824"/>
-            <a:ext cx="6766560" cy="2834640"/>
+            <a:ext cx="6949440" cy="2834640"/>
           </a:xfrm>
           <a:prstGeom prst="rect">
             <a:avLst/>
@@ -5656,7 +5656,7 @@
               <a:buNone/>
             </a:pPr>
             <a:r>
-              <a:rPr sz="1500" b="0">
+              <a:rPr sz="1400" b="0">
                 <a:solidFill>
                   <a:srgbClr val="111B2A"/>
                 </a:solidFill>
@@ -5667,6 +5667,26 @@
             <a:endParaRPr lang="en-US" dirty="0"/>
           </a:p>
           <a:p>
+            <a:pPr marL="219456" indent="-219456">
+              <a:lnSpc>
+                <a:spcPct val="130000"/>
+              </a:lnSpc>
+              <a:spcAft>
+                <a:spcPts val="300"/>
+              </a:spcAft>
+              <a:buNone/>
+            </a:pPr>
+            <a:r>
+              <a:rPr sz="1400" b="0">
+                <a:solidFill>
+                  <a:srgbClr val="111B2A"/>
+                </a:solidFill>
+                <a:latin typeface="Calibri"/>
+              </a:rPr>
+              <a:t>Problem Statement Title – SecureMailScope: AI-Assisted Cryptographic Security Posture Assessment for Secure Email Communications</a:t>
+            </a:r>
+          </a:p>
+          <a:p>
             <a:pPr>
               <a:lnSpc>
                 <a:spcPct val="130000"/>
@@ -5677,13 +5697,13 @@
               <a:buNone/>
             </a:pPr>
             <a:r>
-              <a:rPr sz="1500" b="0">
+              <a:rPr sz="1400" b="0">
                 <a:solidFill>
                   <a:srgbClr val="111B2A"/>
                 </a:solidFill>
                 <a:latin typeface="Calibri"/>
               </a:rPr>
-              <a:t>Problem Statement Title – SecureMailScope: AI-Assisted Cryptographic Security Posture Assessment for Secure Email Communications</a:t>
+              <a:t>Organisation – National Technical Research Organisation (NTRO)</a:t>
             </a:r>
           </a:p>
           <a:p>
@@ -5697,13 +5717,13 @@
               <a:buNone/>
             </a:pPr>
             <a:r>
-              <a:rPr sz="1500" b="0">
+              <a:rPr sz="1400" b="0">
                 <a:solidFill>
                   <a:srgbClr val="111B2A"/>
                 </a:solidFill>
                 <a:latin typeface="Calibri"/>
               </a:rPr>
-              <a:t>Organisation – National Technical Research Organisation (NTRO)</a:t>
+              <a:t>Theme – Blockchain &amp; Cybersecurity</a:t>
             </a:r>
           </a:p>
           <a:p>
@@ -5717,13 +5737,13 @@
               <a:buNone/>
             </a:pPr>
             <a:r>
-              <a:rPr sz="1500" b="0">
+              <a:rPr sz="1400" b="0">
                 <a:solidFill>
                   <a:srgbClr val="111B2A"/>
                 </a:solidFill>
                 <a:latin typeface="Calibri"/>
               </a:rPr>
-              <a:t>Theme – Blockchain &amp; Cybersecurity</a:t>
+              <a:t>PS Category – Software</a:t>
             </a:r>
           </a:p>
           <a:p>
@@ -5737,13 +5757,13 @@
               <a:buNone/>
             </a:pPr>
             <a:r>
-              <a:rPr sz="1500" b="0">
+              <a:rPr sz="1400" b="0">
                 <a:solidFill>
                   <a:srgbClr val="111B2A"/>
                 </a:solidFill>
                 <a:latin typeface="Calibri"/>
               </a:rPr>
-              <a:t>PS Category – Software</a:t>
+              <a:t>Team ID – 146876</a:t>
             </a:r>
           </a:p>
           <a:p>
@@ -5757,27 +5777,7 @@
               <a:buNone/>
             </a:pPr>
             <a:r>
-              <a:rPr sz="1500" b="0">
-                <a:solidFill>
-                  <a:srgbClr val="111B2A"/>
-                </a:solidFill>
-                <a:latin typeface="Calibri"/>
-              </a:rPr>
-              <a:t>Team ID – 146876</a:t>
-            </a:r>
-          </a:p>
-          <a:p>
-            <a:pPr>
-              <a:lnSpc>
-                <a:spcPct val="130000"/>
-              </a:lnSpc>
-              <a:spcAft>
-                <a:spcPts val="300"/>
-              </a:spcAft>
-              <a:buNone/>
-            </a:pPr>
-            <a:r>
-              <a:rPr sz="1500" b="0">
+              <a:rPr sz="1400" b="0">
                 <a:solidFill>
                   <a:srgbClr val="111B2A"/>
                 </a:solidFill>
@@ -6065,8 +6065,8 @@
         </p:nvSpPr>
         <p:spPr bwMode="auto">
           <a:xfrm>
-            <a:off x="384048" y="969264"/>
-            <a:ext cx="11430000" cy="566928"/>
+            <a:off x="384048" y="1097280"/>
+            <a:ext cx="11420856" cy="475488"/>
           </a:xfrm>
           <a:prstGeom prst="rect">
             <a:avLst/>
@@ -6096,7 +6096,7 @@
               <a:buNone/>
             </a:pPr>
             <a:r>
-              <a:rPr sz="2000" b="1">
+              <a:rPr sz="1800" b="1">
                 <a:solidFill>
                   <a:srgbClr val="0B5FA5"/>
                 </a:solidFill>
@@ -6274,8 +6274,8 @@
         </p:nvSpPr>
         <p:spPr>
           <a:xfrm>
-            <a:off x="384048" y="1664208"/>
-            <a:ext cx="1700784" cy="713232"/>
+            <a:off x="384048" y="1700784"/>
+            <a:ext cx="1644396" cy="713232"/>
           </a:xfrm>
           <a:prstGeom prst="roundRect">
             <a:avLst/>
@@ -6318,7 +6318,7 @@
               <a:buNone/>
             </a:pPr>
             <a:r>
-              <a:rPr sz="1100" b="1">
+              <a:rPr sz="1050" b="1">
                 <a:solidFill>
                   <a:srgbClr val="111B2A"/>
                 </a:solidFill>
@@ -6351,58 +6351,14 @@
       </p:sp>
       <p:sp>
         <p:nvSpPr>
-          <p:cNvPr id="15364" name="Right Arrow 15363"/>
+          <p:cNvPr id="15364" name="Rounded Rectangle 15363"/>
           <p:cNvSpPr/>
           <p:nvPr/>
         </p:nvSpPr>
         <p:spPr>
           <a:xfrm>
-            <a:off x="2103120" y="1938528"/>
-            <a:ext cx="182880" cy="164592"/>
-          </a:xfrm>
-          <a:prstGeom prst="rightArrow">
-            <a:avLst/>
-          </a:prstGeom>
-          <a:solidFill>
-            <a:srgbClr val="4A5A70"/>
-          </a:solidFill>
-          <a:ln>
-            <a:noFill/>
-          </a:ln>
-          <a:effectLst/>
-        </p:spPr>
-        <p:style>
-          <a:lnRef idx="1">
-            <a:schemeClr val="accent1"/>
-          </a:lnRef>
-          <a:fillRef idx="3">
-            <a:schemeClr val="accent1"/>
-          </a:fillRef>
-          <a:effectRef idx="2">
-            <a:schemeClr val="accent1"/>
-          </a:effectRef>
-          <a:fontRef idx="minor">
-            <a:schemeClr val="lt1"/>
-          </a:fontRef>
-        </p:style>
-        <p:txBody>
-          <a:bodyPr rtlCol="0" anchor="ctr"/>
-          <a:lstStyle/>
-          <a:p>
-            <a:pPr algn="ctr"/>
-          </a:p>
-        </p:txBody>
-      </p:sp>
-      <p:sp>
-        <p:nvSpPr>
-          <p:cNvPr id="15365" name="Rounded Rectangle 15364"/>
-          <p:cNvSpPr/>
-          <p:nvPr/>
-        </p:nvSpPr>
-        <p:spPr>
-          <a:xfrm>
-            <a:off x="2313432" y="1664208"/>
-            <a:ext cx="1700784" cy="713232"/>
+            <a:off x="2339340" y="1700784"/>
+            <a:ext cx="1644396" cy="713232"/>
           </a:xfrm>
           <a:prstGeom prst="roundRect">
             <a:avLst/>
@@ -6445,7 +6401,7 @@
               <a:buNone/>
             </a:pPr>
             <a:r>
-              <a:rPr sz="1100" b="1">
+              <a:rPr sz="1050" b="1">
                 <a:solidFill>
                   <a:srgbClr val="111B2A"/>
                 </a:solidFill>
@@ -6478,58 +6434,14 @@
       </p:sp>
       <p:sp>
         <p:nvSpPr>
-          <p:cNvPr id="15366" name="Right Arrow 15365"/>
+          <p:cNvPr id="15365" name="Rounded Rectangle 15364"/>
           <p:cNvSpPr/>
           <p:nvPr/>
         </p:nvSpPr>
         <p:spPr>
           <a:xfrm>
-            <a:off x="4032504" y="1938528"/>
-            <a:ext cx="182880" cy="164592"/>
-          </a:xfrm>
-          <a:prstGeom prst="rightArrow">
-            <a:avLst/>
-          </a:prstGeom>
-          <a:solidFill>
-            <a:srgbClr val="4A5A70"/>
-          </a:solidFill>
-          <a:ln>
-            <a:noFill/>
-          </a:ln>
-          <a:effectLst/>
-        </p:spPr>
-        <p:style>
-          <a:lnRef idx="1">
-            <a:schemeClr val="accent1"/>
-          </a:lnRef>
-          <a:fillRef idx="3">
-            <a:schemeClr val="accent1"/>
-          </a:fillRef>
-          <a:effectRef idx="2">
-            <a:schemeClr val="accent1"/>
-          </a:effectRef>
-          <a:fontRef idx="minor">
-            <a:schemeClr val="lt1"/>
-          </a:fontRef>
-        </p:style>
-        <p:txBody>
-          <a:bodyPr rtlCol="0" anchor="ctr"/>
-          <a:lstStyle/>
-          <a:p>
-            <a:pPr algn="ctr"/>
-          </a:p>
-        </p:txBody>
-      </p:sp>
-      <p:sp>
-        <p:nvSpPr>
-          <p:cNvPr id="15367" name="Rounded Rectangle 15366"/>
-          <p:cNvSpPr/>
-          <p:nvPr/>
-        </p:nvSpPr>
-        <p:spPr>
-          <a:xfrm>
-            <a:off x="4242816" y="1664208"/>
-            <a:ext cx="1700784" cy="713232"/>
+            <a:off x="4294632" y="1700784"/>
+            <a:ext cx="1644396" cy="713232"/>
           </a:xfrm>
           <a:prstGeom prst="roundRect">
             <a:avLst/>
@@ -6572,7 +6484,7 @@
               <a:buNone/>
             </a:pPr>
             <a:r>
-              <a:rPr sz="1100" b="1">
+              <a:rPr sz="1050" b="1">
                 <a:solidFill>
                   <a:srgbClr val="111B2A"/>
                 </a:solidFill>
@@ -6605,58 +6517,14 @@
       </p:sp>
       <p:sp>
         <p:nvSpPr>
-          <p:cNvPr id="15368" name="Right Arrow 15367"/>
+          <p:cNvPr id="15366" name="Rounded Rectangle 15365"/>
           <p:cNvSpPr/>
           <p:nvPr/>
         </p:nvSpPr>
         <p:spPr>
           <a:xfrm>
-            <a:off x="5961888" y="1938528"/>
-            <a:ext cx="182880" cy="164592"/>
-          </a:xfrm>
-          <a:prstGeom prst="rightArrow">
-            <a:avLst/>
-          </a:prstGeom>
-          <a:solidFill>
-            <a:srgbClr val="4A5A70"/>
-          </a:solidFill>
-          <a:ln>
-            <a:noFill/>
-          </a:ln>
-          <a:effectLst/>
-        </p:spPr>
-        <p:style>
-          <a:lnRef idx="1">
-            <a:schemeClr val="accent1"/>
-          </a:lnRef>
-          <a:fillRef idx="3">
-            <a:schemeClr val="accent1"/>
-          </a:fillRef>
-          <a:effectRef idx="2">
-            <a:schemeClr val="accent1"/>
-          </a:effectRef>
-          <a:fontRef idx="minor">
-            <a:schemeClr val="lt1"/>
-          </a:fontRef>
-        </p:style>
-        <p:txBody>
-          <a:bodyPr rtlCol="0" anchor="ctr"/>
-          <a:lstStyle/>
-          <a:p>
-            <a:pPr algn="ctr"/>
-          </a:p>
-        </p:txBody>
-      </p:sp>
-      <p:sp>
-        <p:nvSpPr>
-          <p:cNvPr id="15369" name="Rounded Rectangle 15368"/>
-          <p:cNvSpPr/>
-          <p:nvPr/>
-        </p:nvSpPr>
-        <p:spPr>
-          <a:xfrm>
-            <a:off x="6172200" y="1664208"/>
-            <a:ext cx="1700784" cy="713232"/>
+            <a:off x="6249924" y="1700784"/>
+            <a:ext cx="1644396" cy="713232"/>
           </a:xfrm>
           <a:prstGeom prst="roundRect">
             <a:avLst/>
@@ -6699,7 +6567,7 @@
               <a:buNone/>
             </a:pPr>
             <a:r>
-              <a:rPr sz="1100" b="1">
+              <a:rPr sz="1050" b="1">
                 <a:solidFill>
                   <a:srgbClr val="111B2A"/>
                 </a:solidFill>
@@ -6732,58 +6600,14 @@
       </p:sp>
       <p:sp>
         <p:nvSpPr>
-          <p:cNvPr id="15370" name="Right Arrow 15369"/>
+          <p:cNvPr id="15367" name="Rounded Rectangle 15366"/>
           <p:cNvSpPr/>
           <p:nvPr/>
         </p:nvSpPr>
         <p:spPr>
           <a:xfrm>
-            <a:off x="7891272" y="1938528"/>
-            <a:ext cx="182880" cy="164592"/>
-          </a:xfrm>
-          <a:prstGeom prst="rightArrow">
-            <a:avLst/>
-          </a:prstGeom>
-          <a:solidFill>
-            <a:srgbClr val="4A5A70"/>
-          </a:solidFill>
-          <a:ln>
-            <a:noFill/>
-          </a:ln>
-          <a:effectLst/>
-        </p:spPr>
-        <p:style>
-          <a:lnRef idx="1">
-            <a:schemeClr val="accent1"/>
-          </a:lnRef>
-          <a:fillRef idx="3">
-            <a:schemeClr val="accent1"/>
-          </a:fillRef>
-          <a:effectRef idx="2">
-            <a:schemeClr val="accent1"/>
-          </a:effectRef>
-          <a:fontRef idx="minor">
-            <a:schemeClr val="lt1"/>
-          </a:fontRef>
-        </p:style>
-        <p:txBody>
-          <a:bodyPr rtlCol="0" anchor="ctr"/>
-          <a:lstStyle/>
-          <a:p>
-            <a:pPr algn="ctr"/>
-          </a:p>
-        </p:txBody>
-      </p:sp>
-      <p:sp>
-        <p:nvSpPr>
-          <p:cNvPr id="15371" name="Rounded Rectangle 15370"/>
-          <p:cNvSpPr/>
-          <p:nvPr/>
-        </p:nvSpPr>
-        <p:spPr>
-          <a:xfrm>
-            <a:off x="8101584" y="1664208"/>
-            <a:ext cx="1700784" cy="713232"/>
+            <a:off x="8205216" y="1700784"/>
+            <a:ext cx="1644396" cy="713232"/>
           </a:xfrm>
           <a:prstGeom prst="roundRect">
             <a:avLst/>
@@ -6826,7 +6650,7 @@
               <a:buNone/>
             </a:pPr>
             <a:r>
-              <a:rPr sz="1100" b="1">
+              <a:rPr sz="1050" b="1">
                 <a:solidFill>
                   <a:srgbClr val="111B2A"/>
                 </a:solidFill>
@@ -6859,58 +6683,14 @@
       </p:sp>
       <p:sp>
         <p:nvSpPr>
-          <p:cNvPr id="15372" name="Right Arrow 15371"/>
+          <p:cNvPr id="15368" name="Rounded Rectangle 15367"/>
           <p:cNvSpPr/>
           <p:nvPr/>
         </p:nvSpPr>
         <p:spPr>
           <a:xfrm>
-            <a:off x="9820656" y="1938528"/>
-            <a:ext cx="182880" cy="164592"/>
-          </a:xfrm>
-          <a:prstGeom prst="rightArrow">
-            <a:avLst/>
-          </a:prstGeom>
-          <a:solidFill>
-            <a:srgbClr val="4A5A70"/>
-          </a:solidFill>
-          <a:ln>
-            <a:noFill/>
-          </a:ln>
-          <a:effectLst/>
-        </p:spPr>
-        <p:style>
-          <a:lnRef idx="1">
-            <a:schemeClr val="accent1"/>
-          </a:lnRef>
-          <a:fillRef idx="3">
-            <a:schemeClr val="accent1"/>
-          </a:fillRef>
-          <a:effectRef idx="2">
-            <a:schemeClr val="accent1"/>
-          </a:effectRef>
-          <a:fontRef idx="minor">
-            <a:schemeClr val="lt1"/>
-          </a:fontRef>
-        </p:style>
-        <p:txBody>
-          <a:bodyPr rtlCol="0" anchor="ctr"/>
-          <a:lstStyle/>
-          <a:p>
-            <a:pPr algn="ctr"/>
-          </a:p>
-        </p:txBody>
-      </p:sp>
-      <p:sp>
-        <p:nvSpPr>
-          <p:cNvPr id="15373" name="Rounded Rectangle 15372"/>
-          <p:cNvSpPr/>
-          <p:nvPr/>
-        </p:nvSpPr>
-        <p:spPr>
-          <a:xfrm>
-            <a:off x="10030968" y="1664208"/>
-            <a:ext cx="1700784" cy="713232"/>
+            <a:off x="10160508" y="1700784"/>
+            <a:ext cx="1644396" cy="713232"/>
           </a:xfrm>
           <a:prstGeom prst="roundRect">
             <a:avLst/>
@@ -6953,7 +6733,7 @@
               <a:buNone/>
             </a:pPr>
             <a:r>
-              <a:rPr sz="1100" b="1">
+              <a:rPr sz="1050" b="1">
                 <a:solidFill>
                   <a:srgbClr val="111B2A"/>
                 </a:solidFill>
@@ -6981,12 +6761,232 @@
               </a:rPr>
               <a:t>ranked, with the fix</a:t>
             </a:r>
+          </a:p>
+        </p:txBody>
+      </p:sp>
+      <p:sp>
+        <p:nvSpPr>
+          <p:cNvPr id="15369" name="Right Arrow 15368"/>
+          <p:cNvSpPr/>
+          <p:nvPr/>
+        </p:nvSpPr>
+        <p:spPr>
+          <a:xfrm>
+            <a:off x="2083308" y="1975104"/>
+            <a:ext cx="201168" cy="164592"/>
+          </a:xfrm>
+          <a:prstGeom prst="rightArrow">
+            <a:avLst/>
+          </a:prstGeom>
+          <a:solidFill>
+            <a:srgbClr val="4A5A70"/>
+          </a:solidFill>
+          <a:ln>
+            <a:noFill/>
+          </a:ln>
+          <a:effectLst/>
+        </p:spPr>
+        <p:style>
+          <a:lnRef idx="1">
+            <a:schemeClr val="accent1"/>
+          </a:lnRef>
+          <a:fillRef idx="3">
+            <a:schemeClr val="accent1"/>
+          </a:fillRef>
+          <a:effectRef idx="2">
+            <a:schemeClr val="accent1"/>
+          </a:effectRef>
+          <a:fontRef idx="minor">
+            <a:schemeClr val="lt1"/>
+          </a:fontRef>
+        </p:style>
+        <p:txBody>
+          <a:bodyPr rtlCol="0" anchor="ctr"/>
+          <a:lstStyle/>
+          <a:p>
+            <a:pPr algn="ctr"/>
+          </a:p>
+        </p:txBody>
+      </p:sp>
+      <p:sp>
+        <p:nvSpPr>
+          <p:cNvPr id="15370" name="Right Arrow 15369"/>
+          <p:cNvSpPr/>
+          <p:nvPr/>
+        </p:nvSpPr>
+        <p:spPr>
+          <a:xfrm>
+            <a:off x="4038600" y="1975104"/>
+            <a:ext cx="201168" cy="164592"/>
+          </a:xfrm>
+          <a:prstGeom prst="rightArrow">
+            <a:avLst/>
+          </a:prstGeom>
+          <a:solidFill>
+            <a:srgbClr val="4A5A70"/>
+          </a:solidFill>
+          <a:ln>
+            <a:noFill/>
+          </a:ln>
+          <a:effectLst/>
+        </p:spPr>
+        <p:style>
+          <a:lnRef idx="1">
+            <a:schemeClr val="accent1"/>
+          </a:lnRef>
+          <a:fillRef idx="3">
+            <a:schemeClr val="accent1"/>
+          </a:fillRef>
+          <a:effectRef idx="2">
+            <a:schemeClr val="accent1"/>
+          </a:effectRef>
+          <a:fontRef idx="minor">
+            <a:schemeClr val="lt1"/>
+          </a:fontRef>
+        </p:style>
+        <p:txBody>
+          <a:bodyPr rtlCol="0" anchor="ctr"/>
+          <a:lstStyle/>
+          <a:p>
+            <a:pPr algn="ctr"/>
+          </a:p>
+        </p:txBody>
+      </p:sp>
+      <p:sp>
+        <p:nvSpPr>
+          <p:cNvPr id="15371" name="Right Arrow 15370"/>
+          <p:cNvSpPr/>
+          <p:nvPr/>
+        </p:nvSpPr>
+        <p:spPr>
+          <a:xfrm>
+            <a:off x="5993892" y="1975104"/>
+            <a:ext cx="201168" cy="164592"/>
+          </a:xfrm>
+          <a:prstGeom prst="rightArrow">
+            <a:avLst/>
+          </a:prstGeom>
+          <a:solidFill>
+            <a:srgbClr val="4A5A70"/>
+          </a:solidFill>
+          <a:ln>
+            <a:noFill/>
+          </a:ln>
+          <a:effectLst/>
+        </p:spPr>
+        <p:style>
+          <a:lnRef idx="1">
+            <a:schemeClr val="accent1"/>
+          </a:lnRef>
+          <a:fillRef idx="3">
+            <a:schemeClr val="accent1"/>
+          </a:fillRef>
+          <a:effectRef idx="2">
+            <a:schemeClr val="accent1"/>
+          </a:effectRef>
+          <a:fontRef idx="minor">
+            <a:schemeClr val="lt1"/>
+          </a:fontRef>
+        </p:style>
+        <p:txBody>
+          <a:bodyPr rtlCol="0" anchor="ctr"/>
+          <a:lstStyle/>
+          <a:p>
+            <a:pPr algn="ctr"/>
+          </a:p>
+        </p:txBody>
+      </p:sp>
+      <p:sp>
+        <p:nvSpPr>
+          <p:cNvPr id="15372" name="Right Arrow 15371"/>
+          <p:cNvSpPr/>
+          <p:nvPr/>
+        </p:nvSpPr>
+        <p:spPr>
+          <a:xfrm>
+            <a:off x="7949184" y="1975104"/>
+            <a:ext cx="201168" cy="164592"/>
+          </a:xfrm>
+          <a:prstGeom prst="rightArrow">
+            <a:avLst/>
+          </a:prstGeom>
+          <a:solidFill>
+            <a:srgbClr val="4A5A70"/>
+          </a:solidFill>
+          <a:ln>
+            <a:noFill/>
+          </a:ln>
+          <a:effectLst/>
+        </p:spPr>
+        <p:style>
+          <a:lnRef idx="1">
+            <a:schemeClr val="accent1"/>
+          </a:lnRef>
+          <a:fillRef idx="3">
+            <a:schemeClr val="accent1"/>
+          </a:fillRef>
+          <a:effectRef idx="2">
+            <a:schemeClr val="accent1"/>
+          </a:effectRef>
+          <a:fontRef idx="minor">
+            <a:schemeClr val="lt1"/>
+          </a:fontRef>
+        </p:style>
+        <p:txBody>
+          <a:bodyPr rtlCol="0" anchor="ctr"/>
+          <a:lstStyle/>
+          <a:p>
+            <a:pPr algn="ctr"/>
+          </a:p>
+        </p:txBody>
+      </p:sp>
+      <p:sp>
+        <p:nvSpPr>
+          <p:cNvPr id="15373" name="Right Arrow 15372"/>
+          <p:cNvSpPr/>
+          <p:nvPr/>
+        </p:nvSpPr>
+        <p:spPr>
+          <a:xfrm>
+            <a:off x="9904476" y="1975104"/>
+            <a:ext cx="201168" cy="164592"/>
+          </a:xfrm>
+          <a:prstGeom prst="rightArrow">
+            <a:avLst/>
+          </a:prstGeom>
+          <a:solidFill>
+            <a:srgbClr val="4A5A70"/>
+          </a:solidFill>
+          <a:ln>
+            <a:noFill/>
+          </a:ln>
+          <a:effectLst/>
+        </p:spPr>
+        <p:style>
+          <a:lnRef idx="1">
+            <a:schemeClr val="accent1"/>
+          </a:lnRef>
+          <a:fillRef idx="3">
+            <a:schemeClr val="accent1"/>
+          </a:fillRef>
+          <a:effectRef idx="2">
+            <a:schemeClr val="accent1"/>
+          </a:effectRef>
+          <a:fontRef idx="minor">
+            <a:schemeClr val="lt1"/>
+          </a:fontRef>
+        </p:style>
+        <p:txBody>
+          <a:bodyPr rtlCol="0" anchor="ctr"/>
+          <a:lstStyle/>
+          <a:p>
+            <a:pPr algn="ctr"/>
           </a:p>
         </p:txBody>
       </p:sp>
       <p:pic>
         <p:nvPicPr>
-          <p:cNvPr id="15374" name="Picture 15373" descr="crop-0.11-0.022-1.0-0.2-02-overview.png"/>
+          <p:cNvPr id="15374" name="Picture 15373" descr="crop-0.11-0.022-1.0-0.243-02-overview.png"/>
           <p:cNvPicPr>
             <a:picLocks noChangeAspect="1"/>
           </p:cNvPicPr>
@@ -7000,8 +7000,8 @@
         </p:blipFill>
         <p:spPr>
           <a:xfrm>
-            <a:off x="384048" y="2615184"/>
-            <a:ext cx="7461504" cy="2589041"/>
+            <a:off x="384048" y="2578608"/>
+            <a:ext cx="7315200" cy="3150373"/>
           </a:xfrm>
           <a:prstGeom prst="rect">
             <a:avLst/>
@@ -7016,8 +7016,8 @@
         </p:nvSpPr>
         <p:spPr>
           <a:xfrm>
-            <a:off x="384048" y="2615184"/>
-            <a:ext cx="7461504" cy="2589041"/>
+            <a:off x="384048" y="2578608"/>
+            <a:ext cx="7315200" cy="3150373"/>
           </a:xfrm>
           <a:prstGeom prst="rect">
             <a:avLst/>
@@ -7060,8 +7060,8 @@
         </p:nvSpPr>
         <p:spPr>
           <a:xfrm>
-            <a:off x="384048" y="5240801"/>
-            <a:ext cx="7461504" cy="256032"/>
+            <a:off x="384048" y="5765557"/>
+            <a:ext cx="7315200" cy="256032"/>
           </a:xfrm>
           <a:prstGeom prst="rect">
             <a:avLst/>
@@ -7103,8 +7103,8 @@
         </p:nvSpPr>
         <p:spPr>
           <a:xfrm>
-            <a:off x="8065008" y="2615184"/>
-            <a:ext cx="3749039" cy="932688"/>
+            <a:off x="7845552" y="2578608"/>
+            <a:ext cx="3959352" cy="1050124"/>
           </a:xfrm>
           <a:prstGeom prst="roundRect">
             <a:avLst/>
@@ -7147,7 +7147,7 @@
               <a:buNone/>
             </a:pPr>
             <a:r>
-              <a:rPr sz="1250" b="1">
+              <a:rPr sz="1200" b="1">
                 <a:solidFill>
                   <a:srgbClr val="0B5FA5"/>
                 </a:solidFill>
@@ -7167,7 +7167,7 @@
               <a:buNone/>
             </a:pPr>
             <a:r>
-              <a:rPr sz="1100" b="0">
+              <a:rPr sz="1050" b="0">
                 <a:solidFill>
                   <a:srgbClr val="1F2C3F"/>
                 </a:solidFill>
@@ -7186,8 +7186,8 @@
         </p:nvSpPr>
         <p:spPr>
           <a:xfrm>
-            <a:off x="8065008" y="3639312"/>
-            <a:ext cx="3749039" cy="932688"/>
+            <a:off x="7845552" y="3775036"/>
+            <a:ext cx="3959352" cy="1050124"/>
           </a:xfrm>
           <a:prstGeom prst="roundRect">
             <a:avLst/>
@@ -7230,7 +7230,7 @@
               <a:buNone/>
             </a:pPr>
             <a:r>
-              <a:rPr sz="1250" b="1">
+              <a:rPr sz="1200" b="1">
                 <a:solidFill>
                   <a:srgbClr val="0B5FA5"/>
                 </a:solidFill>
@@ -7250,13 +7250,13 @@
               <a:buNone/>
             </a:pPr>
             <a:r>
-              <a:rPr sz="1100" b="0">
+              <a:rPr sz="1050" b="0">
                 <a:solidFill>
                   <a:srgbClr val="1F2C3F"/>
                 </a:solidFill>
                 <a:latin typeface="Calibri"/>
               </a:rPr>
-              <a:t>Every finding traces back to the packets that establish it — number, timestamp and stream offset.</a:t>
+              <a:t>Every finding traces back to the packet-level observations that establish it — number, timestamp and stream offset.</a:t>
             </a:r>
           </a:p>
         </p:txBody>
@@ -7269,8 +7269,8 @@
         </p:nvSpPr>
         <p:spPr>
           <a:xfrm>
-            <a:off x="8065008" y="4663440"/>
-            <a:ext cx="3749039" cy="932688"/>
+            <a:off x="7845552" y="4971464"/>
+            <a:ext cx="3959352" cy="1050124"/>
           </a:xfrm>
           <a:prstGeom prst="roundRect">
             <a:avLst/>
@@ -7313,13 +7313,13 @@
               <a:buNone/>
             </a:pPr>
             <a:r>
-              <a:rPr sz="1250" b="1">
+              <a:rPr sz="1200" b="1">
                 <a:solidFill>
                   <a:srgbClr val="0B5FA5"/>
                 </a:solidFill>
                 <a:latin typeface="Calibri"/>
               </a:rPr>
-              <a:t>CROSS-CAPTURE INTELLIGENCE</a:t>
+              <a:t>AI + CROSS-CAPTURE INTELLIGENCE</a:t>
             </a:r>
           </a:p>
           <a:p>
@@ -7333,13 +7333,13 @@
               <a:buNone/>
             </a:pPr>
             <a:r>
-              <a:rPr sz="1100" b="0">
+              <a:rPr sz="1050" b="0">
                 <a:solidFill>
                   <a:srgbClr val="1F2C3F"/>
                 </a:solidFill>
                 <a:latin typeface="Calibri"/>
               </a:rPr>
-              <a:t>Cryptographic fingerprints, configuration drift and correlation across captures of the same service.</a:t>
+              <a:t>ML-assisted risk triage alongside cryptographic fingerprints, configuration drift and correlation.</a:t>
             </a:r>
           </a:p>
         </p:txBody>
@@ -7470,8 +7470,8 @@
         </p:nvSpPr>
         <p:spPr bwMode="auto">
           <a:xfrm>
-            <a:off x="384048" y="950976"/>
-            <a:ext cx="11430000" cy="329184"/>
+            <a:off x="384048" y="932688"/>
+            <a:ext cx="11420856" cy="347472"/>
           </a:xfrm>
           <a:prstGeom prst="rect">
             <a:avLst/>
@@ -7673,7 +7673,7 @@
         <p:spPr>
           <a:xfrm>
             <a:off x="384048" y="1335024"/>
-            <a:ext cx="2103120" cy="2761488"/>
+            <a:ext cx="1793737" cy="2743200"/>
           </a:xfrm>
           <a:prstGeom prst="roundRect">
             <a:avLst/>
@@ -7735,8 +7735,218 @@
         </p:nvSpPr>
         <p:spPr>
           <a:xfrm>
-            <a:off x="2688336" y="1335024"/>
-            <a:ext cx="3291840" cy="2761488"/>
+            <a:off x="475488" y="2039111"/>
+            <a:ext cx="1610857" cy="676656"/>
+          </a:xfrm>
+          <a:prstGeom prst="roundRect">
+            <a:avLst/>
+          </a:prstGeom>
+          <a:solidFill>
+            <a:srgbClr val="EEF3F9"/>
+          </a:solidFill>
+          <a:ln w="9525">
+            <a:solidFill>
+              <a:srgbClr val="C2D4E6"/>
+            </a:solidFill>
+          </a:ln>
+          <a:effectLst/>
+        </p:spPr>
+        <p:style>
+          <a:lnRef idx="1">
+            <a:schemeClr val="accent1"/>
+          </a:lnRef>
+          <a:fillRef idx="3">
+            <a:schemeClr val="accent1"/>
+          </a:fillRef>
+          <a:effectRef idx="2">
+            <a:schemeClr val="accent1"/>
+          </a:effectRef>
+          <a:fontRef idx="minor">
+            <a:schemeClr val="lt1"/>
+          </a:fontRef>
+        </p:style>
+        <p:txBody>
+          <a:bodyPr rtlCol="0" anchor="ctr" wrap="square" tIns="54864" bIns="54864"/>
+          <a:lstStyle/>
+          <a:p>
+            <a:pPr algn="ctr">
+              <a:lnSpc>
+                <a:spcPct val="88000"/>
+              </a:lnSpc>
+              <a:spcAft>
+                <a:spcPts val="100"/>
+              </a:spcAft>
+              <a:buNone/>
+            </a:pPr>
+            <a:r>
+              <a:rPr sz="950" b="1">
+                <a:solidFill>
+                  <a:srgbClr val="111B2A"/>
+                </a:solidFill>
+                <a:latin typeface="Calibri"/>
+              </a:rPr>
+              <a:t>PCAP / PCAPNG</a:t>
+            </a:r>
+          </a:p>
+          <a:p>
+            <a:pPr algn="ctr">
+              <a:lnSpc>
+                <a:spcPct val="88000"/>
+              </a:lnSpc>
+              <a:spcAft>
+                <a:spcPts val="100"/>
+              </a:spcAft>
+              <a:buNone/>
+            </a:pPr>
+            <a:r>
+              <a:rPr sz="750" b="0">
+                <a:solidFill>
+                  <a:srgbClr val="4A5A70"/>
+                </a:solidFill>
+                <a:latin typeface="Calibri"/>
+              </a:rPr>
+              <a:t>authorised capture</a:t>
+            </a:r>
+          </a:p>
+        </p:txBody>
+      </p:sp>
+      <p:sp>
+        <p:nvSpPr>
+          <p:cNvPr id="17413" name="Down Arrow 17412"/>
+          <p:cNvSpPr/>
+          <p:nvPr/>
+        </p:nvSpPr>
+        <p:spPr>
+          <a:xfrm>
+            <a:off x="1198620" y="2724911"/>
+            <a:ext cx="164592" cy="109728"/>
+          </a:xfrm>
+          <a:prstGeom prst="downArrow">
+            <a:avLst/>
+          </a:prstGeom>
+          <a:solidFill>
+            <a:srgbClr val="4A5A70"/>
+          </a:solidFill>
+          <a:ln>
+            <a:noFill/>
+          </a:ln>
+          <a:effectLst/>
+        </p:spPr>
+        <p:style>
+          <a:lnRef idx="1">
+            <a:schemeClr val="accent1"/>
+          </a:lnRef>
+          <a:fillRef idx="3">
+            <a:schemeClr val="accent1"/>
+          </a:fillRef>
+          <a:effectRef idx="2">
+            <a:schemeClr val="accent1"/>
+          </a:effectRef>
+          <a:fontRef idx="minor">
+            <a:schemeClr val="lt1"/>
+          </a:fontRef>
+        </p:style>
+        <p:txBody>
+          <a:bodyPr rtlCol="0" anchor="ctr"/>
+          <a:lstStyle/>
+          <a:p>
+            <a:pPr algn="ctr"/>
+          </a:p>
+        </p:txBody>
+      </p:sp>
+      <p:sp>
+        <p:nvSpPr>
+          <p:cNvPr id="17414" name="Rounded Rectangle 17413"/>
+          <p:cNvSpPr/>
+          <p:nvPr/>
+        </p:nvSpPr>
+        <p:spPr>
+          <a:xfrm>
+            <a:off x="475488" y="2843784"/>
+            <a:ext cx="1610857" cy="676656"/>
+          </a:xfrm>
+          <a:prstGeom prst="roundRect">
+            <a:avLst/>
+          </a:prstGeom>
+          <a:solidFill>
+            <a:srgbClr val="EEF3F9"/>
+          </a:solidFill>
+          <a:ln w="9525">
+            <a:solidFill>
+              <a:srgbClr val="C2D4E6"/>
+            </a:solidFill>
+          </a:ln>
+          <a:effectLst/>
+        </p:spPr>
+        <p:style>
+          <a:lnRef idx="1">
+            <a:schemeClr val="accent1"/>
+          </a:lnRef>
+          <a:fillRef idx="3">
+            <a:schemeClr val="accent1"/>
+          </a:fillRef>
+          <a:effectRef idx="2">
+            <a:schemeClr val="accent1"/>
+          </a:effectRef>
+          <a:fontRef idx="minor">
+            <a:schemeClr val="lt1"/>
+          </a:fontRef>
+        </p:style>
+        <p:txBody>
+          <a:bodyPr rtlCol="0" anchor="ctr" wrap="square" tIns="54864" bIns="54864"/>
+          <a:lstStyle/>
+          <a:p>
+            <a:pPr algn="ctr">
+              <a:lnSpc>
+                <a:spcPct val="88000"/>
+              </a:lnSpc>
+              <a:spcAft>
+                <a:spcPts val="100"/>
+              </a:spcAft>
+              <a:buNone/>
+            </a:pPr>
+            <a:r>
+              <a:rPr sz="950" b="1">
+                <a:solidFill>
+                  <a:srgbClr val="111B2A"/>
+                </a:solidFill>
+                <a:latin typeface="Calibri"/>
+              </a:rPr>
+              <a:t>Safe ingestion</a:t>
+            </a:r>
+          </a:p>
+          <a:p>
+            <a:pPr algn="ctr">
+              <a:lnSpc>
+                <a:spcPct val="88000"/>
+              </a:lnSpc>
+              <a:spcAft>
+                <a:spcPts val="100"/>
+              </a:spcAft>
+              <a:buNone/>
+            </a:pPr>
+            <a:r>
+              <a:rPr sz="750" b="0">
+                <a:solidFill>
+                  <a:srgbClr val="4A5A70"/>
+                </a:solidFill>
+                <a:latin typeface="Calibri"/>
+              </a:rPr>
+              <a:t>format from the bytes, 8 limits</a:t>
+            </a:r>
+          </a:p>
+        </p:txBody>
+      </p:sp>
+      <p:sp>
+        <p:nvSpPr>
+          <p:cNvPr id="17415" name="Rounded Rectangle 17414"/>
+          <p:cNvSpPr/>
+          <p:nvPr/>
+        </p:nvSpPr>
+        <p:spPr>
+          <a:xfrm>
+            <a:off x="2324089" y="1335024"/>
+            <a:ext cx="2196413" cy="2743200"/>
           </a:xfrm>
           <a:prstGeom prst="roundRect">
             <a:avLst/>
@@ -7792,14 +8002,458 @@
       </p:sp>
       <p:sp>
         <p:nvSpPr>
-          <p:cNvPr id="17413" name="Rounded Rectangle 17412"/>
+          <p:cNvPr id="17416" name="Rounded Rectangle 17415"/>
           <p:cNvSpPr/>
           <p:nvPr/>
         </p:nvSpPr>
         <p:spPr>
           <a:xfrm>
-            <a:off x="6181344" y="1335024"/>
-            <a:ext cx="2980944" cy="2761488"/>
+            <a:off x="2415529" y="1636775"/>
+            <a:ext cx="2013533" cy="475488"/>
+          </a:xfrm>
+          <a:prstGeom prst="roundRect">
+            <a:avLst/>
+          </a:prstGeom>
+          <a:solidFill>
+            <a:srgbClr val="EEF3F9"/>
+          </a:solidFill>
+          <a:ln w="9525">
+            <a:solidFill>
+              <a:srgbClr val="C2D4E6"/>
+            </a:solidFill>
+          </a:ln>
+          <a:effectLst/>
+        </p:spPr>
+        <p:style>
+          <a:lnRef idx="1">
+            <a:schemeClr val="accent1"/>
+          </a:lnRef>
+          <a:fillRef idx="3">
+            <a:schemeClr val="accent1"/>
+          </a:fillRef>
+          <a:effectRef idx="2">
+            <a:schemeClr val="accent1"/>
+          </a:effectRef>
+          <a:fontRef idx="minor">
+            <a:schemeClr val="lt1"/>
+          </a:fontRef>
+        </p:style>
+        <p:txBody>
+          <a:bodyPr rtlCol="0" anchor="ctr" wrap="square" tIns="54864" bIns="54864"/>
+          <a:lstStyle/>
+          <a:p>
+            <a:pPr algn="ctr">
+              <a:lnSpc>
+                <a:spcPct val="88000"/>
+              </a:lnSpc>
+              <a:spcAft>
+                <a:spcPts val="100"/>
+              </a:spcAft>
+              <a:buNone/>
+            </a:pPr>
+            <a:r>
+              <a:rPr sz="950" b="1">
+                <a:solidFill>
+                  <a:srgbClr val="111B2A"/>
+                </a:solidFill>
+                <a:latin typeface="Calibri"/>
+              </a:rPr>
+              <a:t>Packet decode</a:t>
+            </a:r>
+          </a:p>
+        </p:txBody>
+      </p:sp>
+      <p:sp>
+        <p:nvSpPr>
+          <p:cNvPr id="17417" name="Down Arrow 17416"/>
+          <p:cNvSpPr/>
+          <p:nvPr/>
+        </p:nvSpPr>
+        <p:spPr>
+          <a:xfrm>
+            <a:off x="3340000" y="2121407"/>
+            <a:ext cx="164592" cy="109728"/>
+          </a:xfrm>
+          <a:prstGeom prst="downArrow">
+            <a:avLst/>
+          </a:prstGeom>
+          <a:solidFill>
+            <a:srgbClr val="4A5A70"/>
+          </a:solidFill>
+          <a:ln>
+            <a:noFill/>
+          </a:ln>
+          <a:effectLst/>
+        </p:spPr>
+        <p:style>
+          <a:lnRef idx="1">
+            <a:schemeClr val="accent1"/>
+          </a:lnRef>
+          <a:fillRef idx="3">
+            <a:schemeClr val="accent1"/>
+          </a:fillRef>
+          <a:effectRef idx="2">
+            <a:schemeClr val="accent1"/>
+          </a:effectRef>
+          <a:fontRef idx="minor">
+            <a:schemeClr val="lt1"/>
+          </a:fontRef>
+        </p:style>
+        <p:txBody>
+          <a:bodyPr rtlCol="0" anchor="ctr"/>
+          <a:lstStyle/>
+          <a:p>
+            <a:pPr algn="ctr"/>
+          </a:p>
+        </p:txBody>
+      </p:sp>
+      <p:sp>
+        <p:nvSpPr>
+          <p:cNvPr id="17418" name="Rounded Rectangle 17417"/>
+          <p:cNvSpPr/>
+          <p:nvPr/>
+        </p:nvSpPr>
+        <p:spPr>
+          <a:xfrm>
+            <a:off x="2415529" y="2240279"/>
+            <a:ext cx="2013533" cy="475488"/>
+          </a:xfrm>
+          <a:prstGeom prst="roundRect">
+            <a:avLst/>
+          </a:prstGeom>
+          <a:solidFill>
+            <a:srgbClr val="EEF3F9"/>
+          </a:solidFill>
+          <a:ln w="9525">
+            <a:solidFill>
+              <a:srgbClr val="C2D4E6"/>
+            </a:solidFill>
+          </a:ln>
+          <a:effectLst/>
+        </p:spPr>
+        <p:style>
+          <a:lnRef idx="1">
+            <a:schemeClr val="accent1"/>
+          </a:lnRef>
+          <a:fillRef idx="3">
+            <a:schemeClr val="accent1"/>
+          </a:fillRef>
+          <a:effectRef idx="2">
+            <a:schemeClr val="accent1"/>
+          </a:effectRef>
+          <a:fontRef idx="minor">
+            <a:schemeClr val="lt1"/>
+          </a:fontRef>
+        </p:style>
+        <p:txBody>
+          <a:bodyPr rtlCol="0" anchor="ctr" wrap="square" tIns="54864" bIns="54864"/>
+          <a:lstStyle/>
+          <a:p>
+            <a:pPr algn="ctr">
+              <a:lnSpc>
+                <a:spcPct val="88000"/>
+              </a:lnSpc>
+              <a:spcAft>
+                <a:spcPts val="100"/>
+              </a:spcAft>
+              <a:buNone/>
+            </a:pPr>
+            <a:r>
+              <a:rPr sz="950" b="1">
+                <a:solidFill>
+                  <a:srgbClr val="111B2A"/>
+                </a:solidFill>
+                <a:latin typeface="Calibri"/>
+              </a:rPr>
+              <a:t>TCP reassembly</a:t>
+            </a:r>
+          </a:p>
+          <a:p>
+            <a:pPr algn="ctr">
+              <a:lnSpc>
+                <a:spcPct val="88000"/>
+              </a:lnSpc>
+              <a:spcAft>
+                <a:spcPts val="100"/>
+              </a:spcAft>
+              <a:buNone/>
+            </a:pPr>
+            <a:r>
+              <a:rPr sz="750" b="0">
+                <a:solidFill>
+                  <a:srgbClr val="4A5A70"/>
+                </a:solidFill>
+                <a:latin typeface="Calibri"/>
+              </a:rPr>
+              <a:t>reorder · retransmit · gaps</a:t>
+            </a:r>
+          </a:p>
+        </p:txBody>
+      </p:sp>
+      <p:sp>
+        <p:nvSpPr>
+          <p:cNvPr id="17419" name="Down Arrow 17418"/>
+          <p:cNvSpPr/>
+          <p:nvPr/>
+        </p:nvSpPr>
+        <p:spPr>
+          <a:xfrm>
+            <a:off x="3340000" y="2724911"/>
+            <a:ext cx="164592" cy="109728"/>
+          </a:xfrm>
+          <a:prstGeom prst="downArrow">
+            <a:avLst/>
+          </a:prstGeom>
+          <a:solidFill>
+            <a:srgbClr val="4A5A70"/>
+          </a:solidFill>
+          <a:ln>
+            <a:noFill/>
+          </a:ln>
+          <a:effectLst/>
+        </p:spPr>
+        <p:style>
+          <a:lnRef idx="1">
+            <a:schemeClr val="accent1"/>
+          </a:lnRef>
+          <a:fillRef idx="3">
+            <a:schemeClr val="accent1"/>
+          </a:fillRef>
+          <a:effectRef idx="2">
+            <a:schemeClr val="accent1"/>
+          </a:effectRef>
+          <a:fontRef idx="minor">
+            <a:schemeClr val="lt1"/>
+          </a:fontRef>
+        </p:style>
+        <p:txBody>
+          <a:bodyPr rtlCol="0" anchor="ctr"/>
+          <a:lstStyle/>
+          <a:p>
+            <a:pPr algn="ctr"/>
+          </a:p>
+        </p:txBody>
+      </p:sp>
+      <p:sp>
+        <p:nvSpPr>
+          <p:cNvPr id="17420" name="Rounded Rectangle 17419"/>
+          <p:cNvSpPr/>
+          <p:nvPr/>
+        </p:nvSpPr>
+        <p:spPr>
+          <a:xfrm>
+            <a:off x="2415529" y="2843784"/>
+            <a:ext cx="2013533" cy="475488"/>
+          </a:xfrm>
+          <a:prstGeom prst="roundRect">
+            <a:avLst/>
+          </a:prstGeom>
+          <a:solidFill>
+            <a:srgbClr val="EEF3F9"/>
+          </a:solidFill>
+          <a:ln w="9525">
+            <a:solidFill>
+              <a:srgbClr val="C2D4E6"/>
+            </a:solidFill>
+          </a:ln>
+          <a:effectLst/>
+        </p:spPr>
+        <p:style>
+          <a:lnRef idx="1">
+            <a:schemeClr val="accent1"/>
+          </a:lnRef>
+          <a:fillRef idx="3">
+            <a:schemeClr val="accent1"/>
+          </a:fillRef>
+          <a:effectRef idx="2">
+            <a:schemeClr val="accent1"/>
+          </a:effectRef>
+          <a:fontRef idx="minor">
+            <a:schemeClr val="lt1"/>
+          </a:fontRef>
+        </p:style>
+        <p:txBody>
+          <a:bodyPr rtlCol="0" anchor="ctr" wrap="square" tIns="54864" bIns="54864"/>
+          <a:lstStyle/>
+          <a:p>
+            <a:pPr algn="ctr">
+              <a:lnSpc>
+                <a:spcPct val="88000"/>
+              </a:lnSpc>
+              <a:spcAft>
+                <a:spcPts val="100"/>
+              </a:spcAft>
+              <a:buNone/>
+            </a:pPr>
+            <a:r>
+              <a:rPr sz="950" b="1">
+                <a:solidFill>
+                  <a:srgbClr val="111B2A"/>
+                </a:solidFill>
+                <a:latin typeface="Calibri"/>
+              </a:rPr>
+              <a:t>SMTP · IMAP · POP3</a:t>
+            </a:r>
+          </a:p>
+          <a:p>
+            <a:pPr algn="ctr">
+              <a:lnSpc>
+                <a:spcPct val="88000"/>
+              </a:lnSpc>
+              <a:spcAft>
+                <a:spcPts val="100"/>
+              </a:spcAft>
+              <a:buNone/>
+            </a:pPr>
+            <a:r>
+              <a:rPr sz="750" b="0">
+                <a:solidFill>
+                  <a:srgbClr val="4A5A70"/>
+                </a:solidFill>
+                <a:latin typeface="Calibri"/>
+              </a:rPr>
+              <a:t>state machines, not ports</a:t>
+            </a:r>
+          </a:p>
+        </p:txBody>
+      </p:sp>
+      <p:sp>
+        <p:nvSpPr>
+          <p:cNvPr id="17421" name="Down Arrow 17420"/>
+          <p:cNvSpPr/>
+          <p:nvPr/>
+        </p:nvSpPr>
+        <p:spPr>
+          <a:xfrm>
+            <a:off x="3340000" y="3328415"/>
+            <a:ext cx="164592" cy="109728"/>
+          </a:xfrm>
+          <a:prstGeom prst="downArrow">
+            <a:avLst/>
+          </a:prstGeom>
+          <a:solidFill>
+            <a:srgbClr val="4A5A70"/>
+          </a:solidFill>
+          <a:ln>
+            <a:noFill/>
+          </a:ln>
+          <a:effectLst/>
+        </p:spPr>
+        <p:style>
+          <a:lnRef idx="1">
+            <a:schemeClr val="accent1"/>
+          </a:lnRef>
+          <a:fillRef idx="3">
+            <a:schemeClr val="accent1"/>
+          </a:fillRef>
+          <a:effectRef idx="2">
+            <a:schemeClr val="accent1"/>
+          </a:effectRef>
+          <a:fontRef idx="minor">
+            <a:schemeClr val="lt1"/>
+          </a:fontRef>
+        </p:style>
+        <p:txBody>
+          <a:bodyPr rtlCol="0" anchor="ctr"/>
+          <a:lstStyle/>
+          <a:p>
+            <a:pPr algn="ctr"/>
+          </a:p>
+        </p:txBody>
+      </p:sp>
+      <p:sp>
+        <p:nvSpPr>
+          <p:cNvPr id="17422" name="Rounded Rectangle 17421"/>
+          <p:cNvSpPr/>
+          <p:nvPr/>
+        </p:nvSpPr>
+        <p:spPr>
+          <a:xfrm>
+            <a:off x="2415529" y="3447288"/>
+            <a:ext cx="2013533" cy="475488"/>
+          </a:xfrm>
+          <a:prstGeom prst="roundRect">
+            <a:avLst/>
+          </a:prstGeom>
+          <a:solidFill>
+            <a:srgbClr val="EEF3F9"/>
+          </a:solidFill>
+          <a:ln w="9525">
+            <a:solidFill>
+              <a:srgbClr val="C2D4E6"/>
+            </a:solidFill>
+          </a:ln>
+          <a:effectLst/>
+        </p:spPr>
+        <p:style>
+          <a:lnRef idx="1">
+            <a:schemeClr val="accent1"/>
+          </a:lnRef>
+          <a:fillRef idx="3">
+            <a:schemeClr val="accent1"/>
+          </a:fillRef>
+          <a:effectRef idx="2">
+            <a:schemeClr val="accent1"/>
+          </a:effectRef>
+          <a:fontRef idx="minor">
+            <a:schemeClr val="lt1"/>
+          </a:fontRef>
+        </p:style>
+        <p:txBody>
+          <a:bodyPr rtlCol="0" anchor="ctr" wrap="square" tIns="54864" bIns="54864"/>
+          <a:lstStyle/>
+          <a:p>
+            <a:pPr algn="ctr">
+              <a:lnSpc>
+                <a:spcPct val="88000"/>
+              </a:lnSpc>
+              <a:spcAft>
+                <a:spcPts val="100"/>
+              </a:spcAft>
+              <a:buNone/>
+            </a:pPr>
+            <a:r>
+              <a:rPr sz="950" b="1">
+                <a:solidFill>
+                  <a:srgbClr val="111B2A"/>
+                </a:solidFill>
+                <a:latin typeface="Calibri"/>
+              </a:rPr>
+              <a:t>STARTTLS · STLS</a:t>
+            </a:r>
+          </a:p>
+          <a:p>
+            <a:pPr algn="ctr">
+              <a:lnSpc>
+                <a:spcPct val="88000"/>
+              </a:lnSpc>
+              <a:spcAft>
+                <a:spcPts val="100"/>
+              </a:spcAft>
+              <a:buNone/>
+            </a:pPr>
+            <a:r>
+              <a:rPr sz="750" b="0">
+                <a:solidFill>
+                  <a:srgbClr val="4A5A70"/>
+                </a:solidFill>
+                <a:latin typeface="Calibri"/>
+              </a:rPr>
+              <a:t>advertised · requested · outcome</a:t>
+            </a:r>
+          </a:p>
+        </p:txBody>
+      </p:sp>
+      <p:sp>
+        <p:nvSpPr>
+          <p:cNvPr id="17423" name="Rounded Rectangle 17422"/>
+          <p:cNvSpPr/>
+          <p:nvPr/>
+        </p:nvSpPr>
+        <p:spPr>
+          <a:xfrm>
+            <a:off x="4666807" y="1335024"/>
+            <a:ext cx="2269627" cy="2743200"/>
           </a:xfrm>
           <a:prstGeom prst="roundRect">
             <a:avLst/>
@@ -7855,14 +8509,478 @@
       </p:sp>
       <p:sp>
         <p:nvSpPr>
-          <p:cNvPr id="17414" name="Rounded Rectangle 17413"/>
+          <p:cNvPr id="17424" name="Rounded Rectangle 17423"/>
           <p:cNvSpPr/>
           <p:nvPr/>
         </p:nvSpPr>
         <p:spPr>
           <a:xfrm>
-            <a:off x="9363456" y="1335024"/>
-            <a:ext cx="2450592" cy="2761488"/>
+            <a:off x="4758247" y="1636775"/>
+            <a:ext cx="2086747" cy="475488"/>
+          </a:xfrm>
+          <a:prstGeom prst="roundRect">
+            <a:avLst/>
+          </a:prstGeom>
+          <a:solidFill>
+            <a:srgbClr val="EEF3F9"/>
+          </a:solidFill>
+          <a:ln w="9525">
+            <a:solidFill>
+              <a:srgbClr val="C2D4E6"/>
+            </a:solidFill>
+          </a:ln>
+          <a:effectLst/>
+        </p:spPr>
+        <p:style>
+          <a:lnRef idx="1">
+            <a:schemeClr val="accent1"/>
+          </a:lnRef>
+          <a:fillRef idx="3">
+            <a:schemeClr val="accent1"/>
+          </a:fillRef>
+          <a:effectRef idx="2">
+            <a:schemeClr val="accent1"/>
+          </a:effectRef>
+          <a:fontRef idx="minor">
+            <a:schemeClr val="lt1"/>
+          </a:fontRef>
+        </p:style>
+        <p:txBody>
+          <a:bodyPr rtlCol="0" anchor="ctr" wrap="square" tIns="54864" bIns="54864"/>
+          <a:lstStyle/>
+          <a:p>
+            <a:pPr algn="ctr">
+              <a:lnSpc>
+                <a:spcPct val="88000"/>
+              </a:lnSpc>
+              <a:spcAft>
+                <a:spcPts val="100"/>
+              </a:spcAft>
+              <a:buNone/>
+            </a:pPr>
+            <a:r>
+              <a:rPr sz="950" b="1">
+                <a:solidFill>
+                  <a:srgbClr val="111B2A"/>
+                </a:solidFill>
+                <a:latin typeface="Calibri"/>
+              </a:rPr>
+              <a:t>TLS handshake → X.509</a:t>
+            </a:r>
+          </a:p>
+          <a:p>
+            <a:pPr algn="ctr">
+              <a:lnSpc>
+                <a:spcPct val="88000"/>
+              </a:lnSpc>
+              <a:spcAft>
+                <a:spcPts val="100"/>
+              </a:spcAft>
+              <a:buNone/>
+            </a:pPr>
+            <a:r>
+              <a:rPr sz="750" b="0">
+                <a:solidFill>
+                  <a:srgbClr val="4A5A70"/>
+                </a:solidFill>
+                <a:latin typeface="Calibri"/>
+              </a:rPr>
+              <a:t>version · suite · key exchange</a:t>
+            </a:r>
+          </a:p>
+        </p:txBody>
+      </p:sp>
+      <p:sp>
+        <p:nvSpPr>
+          <p:cNvPr id="17425" name="Down Arrow 17424"/>
+          <p:cNvSpPr/>
+          <p:nvPr/>
+        </p:nvSpPr>
+        <p:spPr>
+          <a:xfrm>
+            <a:off x="5719324" y="2121407"/>
+            <a:ext cx="164592" cy="109728"/>
+          </a:xfrm>
+          <a:prstGeom prst="downArrow">
+            <a:avLst/>
+          </a:prstGeom>
+          <a:solidFill>
+            <a:srgbClr val="4A5A70"/>
+          </a:solidFill>
+          <a:ln>
+            <a:noFill/>
+          </a:ln>
+          <a:effectLst/>
+        </p:spPr>
+        <p:style>
+          <a:lnRef idx="1">
+            <a:schemeClr val="accent1"/>
+          </a:lnRef>
+          <a:fillRef idx="3">
+            <a:schemeClr val="accent1"/>
+          </a:fillRef>
+          <a:effectRef idx="2">
+            <a:schemeClr val="accent1"/>
+          </a:effectRef>
+          <a:fontRef idx="minor">
+            <a:schemeClr val="lt1"/>
+          </a:fontRef>
+        </p:style>
+        <p:txBody>
+          <a:bodyPr rtlCol="0" anchor="ctr"/>
+          <a:lstStyle/>
+          <a:p>
+            <a:pPr algn="ctr"/>
+          </a:p>
+        </p:txBody>
+      </p:sp>
+      <p:sp>
+        <p:nvSpPr>
+          <p:cNvPr id="17426" name="Rounded Rectangle 17425"/>
+          <p:cNvSpPr/>
+          <p:nvPr/>
+        </p:nvSpPr>
+        <p:spPr>
+          <a:xfrm>
+            <a:off x="4758247" y="2240279"/>
+            <a:ext cx="2086747" cy="475488"/>
+          </a:xfrm>
+          <a:prstGeom prst="roundRect">
+            <a:avLst/>
+          </a:prstGeom>
+          <a:solidFill>
+            <a:srgbClr val="EEF3F9"/>
+          </a:solidFill>
+          <a:ln w="9525">
+            <a:solidFill>
+              <a:srgbClr val="C2D4E6"/>
+            </a:solidFill>
+          </a:ln>
+          <a:effectLst/>
+        </p:spPr>
+        <p:style>
+          <a:lnRef idx="1">
+            <a:schemeClr val="accent1"/>
+          </a:lnRef>
+          <a:fillRef idx="3">
+            <a:schemeClr val="accent1"/>
+          </a:fillRef>
+          <a:effectRef idx="2">
+            <a:schemeClr val="accent1"/>
+          </a:effectRef>
+          <a:fontRef idx="minor">
+            <a:schemeClr val="lt1"/>
+          </a:fontRef>
+        </p:style>
+        <p:txBody>
+          <a:bodyPr rtlCol="0" anchor="ctr" wrap="square" tIns="54864" bIns="54864"/>
+          <a:lstStyle/>
+          <a:p>
+            <a:pPr algn="ctr">
+              <a:lnSpc>
+                <a:spcPct val="88000"/>
+              </a:lnSpc>
+              <a:spcAft>
+                <a:spcPts val="100"/>
+              </a:spcAft>
+              <a:buNone/>
+            </a:pPr>
+            <a:r>
+              <a:rPr sz="950" b="1">
+                <a:solidFill>
+                  <a:srgbClr val="111B2A"/>
+                </a:solidFill>
+                <a:latin typeface="Calibri"/>
+              </a:rPr>
+              <a:t>Certificate analysis</a:t>
+            </a:r>
+          </a:p>
+          <a:p>
+            <a:pPr algn="ctr">
+              <a:lnSpc>
+                <a:spcPct val="88000"/>
+              </a:lnSpc>
+              <a:spcAft>
+                <a:spcPts val="100"/>
+              </a:spcAft>
+              <a:buNone/>
+            </a:pPr>
+            <a:r>
+              <a:rPr sz="750" b="0">
+                <a:solidFill>
+                  <a:srgbClr val="4A5A70"/>
+                </a:solidFill>
+                <a:latin typeface="Calibri"/>
+              </a:rPr>
+              <a:t>where passively observable</a:t>
+            </a:r>
+          </a:p>
+        </p:txBody>
+      </p:sp>
+      <p:sp>
+        <p:nvSpPr>
+          <p:cNvPr id="17427" name="Down Arrow 17426"/>
+          <p:cNvSpPr/>
+          <p:nvPr/>
+        </p:nvSpPr>
+        <p:spPr>
+          <a:xfrm>
+            <a:off x="5719324" y="2724911"/>
+            <a:ext cx="164592" cy="109728"/>
+          </a:xfrm>
+          <a:prstGeom prst="downArrow">
+            <a:avLst/>
+          </a:prstGeom>
+          <a:solidFill>
+            <a:srgbClr val="4A5A70"/>
+          </a:solidFill>
+          <a:ln>
+            <a:noFill/>
+          </a:ln>
+          <a:effectLst/>
+        </p:spPr>
+        <p:style>
+          <a:lnRef idx="1">
+            <a:schemeClr val="accent1"/>
+          </a:lnRef>
+          <a:fillRef idx="3">
+            <a:schemeClr val="accent1"/>
+          </a:fillRef>
+          <a:effectRef idx="2">
+            <a:schemeClr val="accent1"/>
+          </a:effectRef>
+          <a:fontRef idx="minor">
+            <a:schemeClr val="lt1"/>
+          </a:fontRef>
+        </p:style>
+        <p:txBody>
+          <a:bodyPr rtlCol="0" anchor="ctr"/>
+          <a:lstStyle/>
+          <a:p>
+            <a:pPr algn="ctr"/>
+          </a:p>
+        </p:txBody>
+      </p:sp>
+      <p:sp>
+        <p:nvSpPr>
+          <p:cNvPr id="17428" name="Rounded Rectangle 17427"/>
+          <p:cNvSpPr/>
+          <p:nvPr/>
+        </p:nvSpPr>
+        <p:spPr>
+          <a:xfrm>
+            <a:off x="4758247" y="2843784"/>
+            <a:ext cx="2086747" cy="475488"/>
+          </a:xfrm>
+          <a:prstGeom prst="roundRect">
+            <a:avLst/>
+          </a:prstGeom>
+          <a:solidFill>
+            <a:srgbClr val="EEF3F9"/>
+          </a:solidFill>
+          <a:ln w="9525">
+            <a:solidFill>
+              <a:srgbClr val="C2D4E6"/>
+            </a:solidFill>
+          </a:ln>
+          <a:effectLst/>
+        </p:spPr>
+        <p:style>
+          <a:lnRef idx="1">
+            <a:schemeClr val="accent1"/>
+          </a:lnRef>
+          <a:fillRef idx="3">
+            <a:schemeClr val="accent1"/>
+          </a:fillRef>
+          <a:effectRef idx="2">
+            <a:schemeClr val="accent1"/>
+          </a:effectRef>
+          <a:fontRef idx="minor">
+            <a:schemeClr val="lt1"/>
+          </a:fontRef>
+        </p:style>
+        <p:txBody>
+          <a:bodyPr rtlCol="0" anchor="ctr" wrap="square" tIns="54864" bIns="54864"/>
+          <a:lstStyle/>
+          <a:p>
+            <a:pPr algn="ctr">
+              <a:lnSpc>
+                <a:spcPct val="88000"/>
+              </a:lnSpc>
+              <a:spcAft>
+                <a:spcPts val="100"/>
+              </a:spcAft>
+              <a:buNone/>
+            </a:pPr>
+            <a:r>
+              <a:rPr sz="950" b="1">
+                <a:solidFill>
+                  <a:srgbClr val="111B2A"/>
+                </a:solidFill>
+                <a:latin typeface="Calibri"/>
+              </a:rPr>
+              <a:t>25 deterministic rules</a:t>
+            </a:r>
+          </a:p>
+          <a:p>
+            <a:pPr algn="ctr">
+              <a:lnSpc>
+                <a:spcPct val="88000"/>
+              </a:lnSpc>
+              <a:spcAft>
+                <a:spcPts val="100"/>
+              </a:spcAft>
+              <a:buNone/>
+            </a:pPr>
+            <a:r>
+              <a:rPr sz="750" b="0">
+                <a:solidFill>
+                  <a:srgbClr val="4A5A70"/>
+                </a:solidFill>
+                <a:latin typeface="Calibri"/>
+              </a:rPr>
+              <a:t>versioned and fingerprinted</a:t>
+            </a:r>
+          </a:p>
+        </p:txBody>
+      </p:sp>
+      <p:sp>
+        <p:nvSpPr>
+          <p:cNvPr id="17429" name="Down Arrow 17428"/>
+          <p:cNvSpPr/>
+          <p:nvPr/>
+        </p:nvSpPr>
+        <p:spPr>
+          <a:xfrm>
+            <a:off x="5719324" y="3328415"/>
+            <a:ext cx="164592" cy="109728"/>
+          </a:xfrm>
+          <a:prstGeom prst="downArrow">
+            <a:avLst/>
+          </a:prstGeom>
+          <a:solidFill>
+            <a:srgbClr val="4A5A70"/>
+          </a:solidFill>
+          <a:ln>
+            <a:noFill/>
+          </a:ln>
+          <a:effectLst/>
+        </p:spPr>
+        <p:style>
+          <a:lnRef idx="1">
+            <a:schemeClr val="accent1"/>
+          </a:lnRef>
+          <a:fillRef idx="3">
+            <a:schemeClr val="accent1"/>
+          </a:fillRef>
+          <a:effectRef idx="2">
+            <a:schemeClr val="accent1"/>
+          </a:effectRef>
+          <a:fontRef idx="minor">
+            <a:schemeClr val="lt1"/>
+          </a:fontRef>
+        </p:style>
+        <p:txBody>
+          <a:bodyPr rtlCol="0" anchor="ctr"/>
+          <a:lstStyle/>
+          <a:p>
+            <a:pPr algn="ctr"/>
+          </a:p>
+        </p:txBody>
+      </p:sp>
+      <p:sp>
+        <p:nvSpPr>
+          <p:cNvPr id="17430" name="Rounded Rectangle 17429"/>
+          <p:cNvSpPr/>
+          <p:nvPr/>
+        </p:nvSpPr>
+        <p:spPr>
+          <a:xfrm>
+            <a:off x="4758247" y="3447288"/>
+            <a:ext cx="2086747" cy="475488"/>
+          </a:xfrm>
+          <a:prstGeom prst="roundRect">
+            <a:avLst/>
+          </a:prstGeom>
+          <a:solidFill>
+            <a:srgbClr val="EEF3F9"/>
+          </a:solidFill>
+          <a:ln w="9525">
+            <a:solidFill>
+              <a:srgbClr val="C2D4E6"/>
+            </a:solidFill>
+          </a:ln>
+          <a:effectLst/>
+        </p:spPr>
+        <p:style>
+          <a:lnRef idx="1">
+            <a:schemeClr val="accent1"/>
+          </a:lnRef>
+          <a:fillRef idx="3">
+            <a:schemeClr val="accent1"/>
+          </a:fillRef>
+          <a:effectRef idx="2">
+            <a:schemeClr val="accent1"/>
+          </a:effectRef>
+          <a:fontRef idx="minor">
+            <a:schemeClr val="lt1"/>
+          </a:fontRef>
+        </p:style>
+        <p:txBody>
+          <a:bodyPr rtlCol="0" anchor="ctr" wrap="square" tIns="54864" bIns="54864"/>
+          <a:lstStyle/>
+          <a:p>
+            <a:pPr algn="ctr">
+              <a:lnSpc>
+                <a:spcPct val="88000"/>
+              </a:lnSpc>
+              <a:spcAft>
+                <a:spcPts val="100"/>
+              </a:spcAft>
+              <a:buNone/>
+            </a:pPr>
+            <a:r>
+              <a:rPr sz="950" b="1">
+                <a:solidFill>
+                  <a:srgbClr val="111B2A"/>
+                </a:solidFill>
+                <a:latin typeface="Calibri"/>
+              </a:rPr>
+              <a:t>Score · coverage · priority</a:t>
+            </a:r>
+          </a:p>
+          <a:p>
+            <a:pPr algn="ctr">
+              <a:lnSpc>
+                <a:spcPct val="88000"/>
+              </a:lnSpc>
+              <a:spcAft>
+                <a:spcPts val="100"/>
+              </a:spcAft>
+              <a:buNone/>
+            </a:pPr>
+            <a:r>
+              <a:rPr sz="750" b="0">
+                <a:solidFill>
+                  <a:srgbClr val="4A5A70"/>
+                </a:solidFill>
+                <a:latin typeface="Calibri"/>
+              </a:rPr>
+              <a:t>arithmetic shown, not asserted</a:t>
+            </a:r>
+          </a:p>
+        </p:txBody>
+      </p:sp>
+      <p:sp>
+        <p:nvSpPr>
+          <p:cNvPr id="17431" name="Rounded Rectangle 17430"/>
+          <p:cNvSpPr/>
+          <p:nvPr/>
+        </p:nvSpPr>
+        <p:spPr>
+          <a:xfrm>
+            <a:off x="7082738" y="1335024"/>
+            <a:ext cx="2489268" cy="1115568"/>
           </a:xfrm>
           <a:prstGeom prst="roundRect">
             <a:avLst/>
@@ -7911,21 +9029,21 @@
                 </a:solidFill>
                 <a:latin typeface="Calibri"/>
               </a:rPr>
-              <a:t>OUTPUT</a:t>
-            </a:r>
-          </a:p>
-        </p:txBody>
-      </p:sp>
-      <p:sp>
-        <p:nvSpPr>
-          <p:cNvPr id="17415" name="Rounded Rectangle 17414"/>
+              <a:t>DETERMINISTIC INTELLIGENCE</a:t>
+            </a:r>
+          </a:p>
+        </p:txBody>
+      </p:sp>
+      <p:sp>
+        <p:nvSpPr>
+          <p:cNvPr id="17432" name="Rounded Rectangle 17431"/>
           <p:cNvSpPr/>
           <p:nvPr/>
         </p:nvSpPr>
         <p:spPr>
           <a:xfrm>
-            <a:off x="530352" y="1645920"/>
-            <a:ext cx="1810512" cy="457200"/>
+            <a:off x="7174178" y="1545336"/>
+            <a:ext cx="2306388" cy="237744"/>
           </a:xfrm>
           <a:prstGeom prst="roundRect">
             <a:avLst/>
@@ -7968,47 +9086,27 @@
               <a:buNone/>
             </a:pPr>
             <a:r>
-              <a:rPr sz="1050" b="1">
+              <a:rPr sz="950" b="1">
                 <a:solidFill>
                   <a:srgbClr val="111B2A"/>
                 </a:solidFill>
                 <a:latin typeface="Calibri"/>
               </a:rPr>
-              <a:t>PCAP / PCAPNG</a:t>
-            </a:r>
-          </a:p>
-          <a:p>
-            <a:pPr algn="ctr">
-              <a:lnSpc>
-                <a:spcPct val="88000"/>
-              </a:lnSpc>
-              <a:spcAft>
-                <a:spcPts val="100"/>
-              </a:spcAft>
-              <a:buNone/>
-            </a:pPr>
-            <a:r>
-              <a:rPr sz="850" b="0">
-                <a:solidFill>
-                  <a:srgbClr val="4A5A70"/>
-                </a:solidFill>
-                <a:latin typeface="Calibri"/>
-              </a:rPr>
-              <a:t>authorised capture</a:t>
-            </a:r>
-          </a:p>
-        </p:txBody>
-      </p:sp>
-      <p:sp>
-        <p:nvSpPr>
-          <p:cNvPr id="17416" name="Down Arrow 17415"/>
+              <a:t>Cryptographic fingerprint</a:t>
+            </a:r>
+          </a:p>
+        </p:txBody>
+      </p:sp>
+      <p:sp>
+        <p:nvSpPr>
+          <p:cNvPr id="17433" name="Down Arrow 17432"/>
           <p:cNvSpPr/>
           <p:nvPr/>
         </p:nvSpPr>
         <p:spPr>
           <a:xfrm>
-            <a:off x="1353311" y="2121408"/>
-            <a:ext cx="164592" cy="146304"/>
+            <a:off x="8245076" y="1792224"/>
+            <a:ext cx="164592" cy="54864"/>
           </a:xfrm>
           <a:prstGeom prst="downArrow">
             <a:avLst/>
@@ -8045,14 +9143,14 @@
       </p:sp>
       <p:sp>
         <p:nvSpPr>
-          <p:cNvPr id="17417" name="Rounded Rectangle 17416"/>
+          <p:cNvPr id="17434" name="Rounded Rectangle 17433"/>
           <p:cNvSpPr/>
           <p:nvPr/>
         </p:nvSpPr>
         <p:spPr>
           <a:xfrm>
-            <a:off x="530352" y="2304288"/>
-            <a:ext cx="1810512" cy="457200"/>
+            <a:off x="7174178" y="1856231"/>
+            <a:ext cx="2306388" cy="237744"/>
           </a:xfrm>
           <a:prstGeom prst="roundRect">
             <a:avLst/>
@@ -8095,47 +9193,71 @@
               <a:buNone/>
             </a:pPr>
             <a:r>
-              <a:rPr sz="1050" b="1">
+              <a:rPr sz="950" b="1">
                 <a:solidFill>
                   <a:srgbClr val="111B2A"/>
                 </a:solidFill>
                 <a:latin typeface="Calibri"/>
               </a:rPr>
-              <a:t>Safe ingestion</a:t>
-            </a:r>
-          </a:p>
-          <a:p>
-            <a:pPr algn="ctr">
-              <a:lnSpc>
-                <a:spcPct val="88000"/>
-              </a:lnSpc>
-              <a:spcAft>
-                <a:spcPts val="100"/>
-              </a:spcAft>
-              <a:buNone/>
-            </a:pPr>
-            <a:r>
-              <a:rPr sz="850" b="0">
-                <a:solidFill>
-                  <a:srgbClr val="4A5A70"/>
-                </a:solidFill>
-                <a:latin typeface="Calibri"/>
-              </a:rPr>
-              <a:t>format from the bytes, 8 limits</a:t>
-            </a:r>
-          </a:p>
-        </p:txBody>
-      </p:sp>
-      <p:sp>
-        <p:nvSpPr>
-          <p:cNvPr id="17418" name="Rounded Rectangle 17417"/>
+              <a:t>Cross-session correlation</a:t>
+            </a:r>
+          </a:p>
+        </p:txBody>
+      </p:sp>
+      <p:sp>
+        <p:nvSpPr>
+          <p:cNvPr id="17435" name="Down Arrow 17434"/>
           <p:cNvSpPr/>
           <p:nvPr/>
         </p:nvSpPr>
         <p:spPr>
           <a:xfrm>
-            <a:off x="2834640" y="1645920"/>
-            <a:ext cx="2999232" cy="365760"/>
+            <a:off x="8245076" y="2103120"/>
+            <a:ext cx="164592" cy="54864"/>
+          </a:xfrm>
+          <a:prstGeom prst="downArrow">
+            <a:avLst/>
+          </a:prstGeom>
+          <a:solidFill>
+            <a:srgbClr val="4A5A70"/>
+          </a:solidFill>
+          <a:ln>
+            <a:noFill/>
+          </a:ln>
+          <a:effectLst/>
+        </p:spPr>
+        <p:style>
+          <a:lnRef idx="1">
+            <a:schemeClr val="accent1"/>
+          </a:lnRef>
+          <a:fillRef idx="3">
+            <a:schemeClr val="accent1"/>
+          </a:fillRef>
+          <a:effectRef idx="2">
+            <a:schemeClr val="accent1"/>
+          </a:effectRef>
+          <a:fontRef idx="minor">
+            <a:schemeClr val="lt1"/>
+          </a:fontRef>
+        </p:style>
+        <p:txBody>
+          <a:bodyPr rtlCol="0" anchor="ctr"/>
+          <a:lstStyle/>
+          <a:p>
+            <a:pPr algn="ctr"/>
+          </a:p>
+        </p:txBody>
+      </p:sp>
+      <p:sp>
+        <p:nvSpPr>
+          <p:cNvPr id="17436" name="Rounded Rectangle 17435"/>
+          <p:cNvSpPr/>
+          <p:nvPr/>
+        </p:nvSpPr>
+        <p:spPr>
+          <a:xfrm>
+            <a:off x="7174178" y="2167128"/>
+            <a:ext cx="2306388" cy="237744"/>
           </a:xfrm>
           <a:prstGeom prst="roundRect">
             <a:avLst/>
@@ -8178,27 +9300,173 @@
               <a:buNone/>
             </a:pPr>
             <a:r>
-              <a:rPr sz="1050" b="1">
+              <a:rPr sz="950" b="1">
                 <a:solidFill>
                   <a:srgbClr val="111B2A"/>
                 </a:solidFill>
                 <a:latin typeface="Calibri"/>
               </a:rPr>
-              <a:t>Packet decode</a:t>
-            </a:r>
-          </a:p>
-        </p:txBody>
-      </p:sp>
-      <p:sp>
-        <p:nvSpPr>
-          <p:cNvPr id="17419" name="Down Arrow 17418"/>
+              <a:t>Configuration drift</a:t>
+            </a:r>
+          </a:p>
+        </p:txBody>
+      </p:sp>
+      <p:sp>
+        <p:nvSpPr>
+          <p:cNvPr id="17437" name="Rounded Rectangle 17436"/>
           <p:cNvSpPr/>
           <p:nvPr/>
         </p:nvSpPr>
         <p:spPr>
           <a:xfrm>
-            <a:off x="4251960" y="2029968"/>
-            <a:ext cx="164592" cy="146304"/>
+            <a:off x="7082738" y="2542032"/>
+            <a:ext cx="2489268" cy="1536192"/>
+          </a:xfrm>
+          <a:prstGeom prst="roundRect">
+            <a:avLst/>
+          </a:prstGeom>
+          <a:solidFill>
+            <a:srgbClr val="FDF5E7"/>
+          </a:solidFill>
+          <a:ln w="15875">
+            <a:solidFill>
+              <a:srgbClr val="DCB877"/>
+            </a:solidFill>
+          </a:ln>
+          <a:effectLst/>
+        </p:spPr>
+        <p:style>
+          <a:lnRef idx="1">
+            <a:schemeClr val="accent1"/>
+          </a:lnRef>
+          <a:fillRef idx="3">
+            <a:schemeClr val="accent1"/>
+          </a:fillRef>
+          <a:effectRef idx="2">
+            <a:schemeClr val="accent1"/>
+          </a:effectRef>
+          <a:fontRef idx="minor">
+            <a:schemeClr val="lt1"/>
+          </a:fontRef>
+        </p:style>
+        <p:txBody>
+          <a:bodyPr rtlCol="0" anchor="t" wrap="square" lIns="73152" tIns="27432"/>
+          <a:lstStyle/>
+          <a:p>
+            <a:pPr algn="ctr">
+              <a:lnSpc>
+                <a:spcPct val="100000"/>
+              </a:lnSpc>
+              <a:spcAft>
+                <a:spcPts val="300"/>
+              </a:spcAft>
+              <a:buNone/>
+            </a:pPr>
+            <a:r>
+              <a:rPr sz="800" b="1">
+                <a:solidFill>
+                  <a:srgbClr val="A83A1E"/>
+                </a:solidFill>
+                <a:latin typeface="Calibri"/>
+              </a:rPr>
+              <a:t>AI-ASSISTED TRIAGE</a:t>
+            </a:r>
+          </a:p>
+        </p:txBody>
+      </p:sp>
+      <p:sp>
+        <p:nvSpPr>
+          <p:cNvPr id="17438" name="Rounded Rectangle 17437"/>
+          <p:cNvSpPr/>
+          <p:nvPr/>
+        </p:nvSpPr>
+        <p:spPr>
+          <a:xfrm>
+            <a:off x="7174178" y="2779775"/>
+            <a:ext cx="2306388" cy="274320"/>
+          </a:xfrm>
+          <a:prstGeom prst="roundRect">
+            <a:avLst/>
+          </a:prstGeom>
+          <a:solidFill>
+            <a:srgbClr val="FFFDF8"/>
+          </a:solidFill>
+          <a:ln w="9525">
+            <a:solidFill>
+              <a:srgbClr val="DCB877"/>
+            </a:solidFill>
+          </a:ln>
+          <a:effectLst/>
+        </p:spPr>
+        <p:style>
+          <a:lnRef idx="1">
+            <a:schemeClr val="accent1"/>
+          </a:lnRef>
+          <a:fillRef idx="3">
+            <a:schemeClr val="accent1"/>
+          </a:fillRef>
+          <a:effectRef idx="2">
+            <a:schemeClr val="accent1"/>
+          </a:effectRef>
+          <a:fontRef idx="minor">
+            <a:schemeClr val="lt1"/>
+          </a:fontRef>
+        </p:style>
+        <p:txBody>
+          <a:bodyPr rtlCol="0" anchor="ctr" wrap="square" tIns="54864" bIns="54864"/>
+          <a:lstStyle/>
+          <a:p>
+            <a:pPr algn="ctr">
+              <a:lnSpc>
+                <a:spcPct val="88000"/>
+              </a:lnSpc>
+              <a:spcAft>
+                <a:spcPts val="100"/>
+              </a:spcAft>
+              <a:buNone/>
+            </a:pPr>
+            <a:r>
+              <a:rPr sz="950" b="1">
+                <a:solidFill>
+                  <a:srgbClr val="111B2A"/>
+                </a:solidFill>
+                <a:latin typeface="Calibri"/>
+              </a:rPr>
+              <a:t>93-feature vector</a:t>
+            </a:r>
+          </a:p>
+          <a:p>
+            <a:pPr algn="ctr">
+              <a:lnSpc>
+                <a:spcPct val="88000"/>
+              </a:lnSpc>
+              <a:spcAft>
+                <a:spcPts val="100"/>
+              </a:spcAft>
+              <a:buNone/>
+            </a:pPr>
+            <a:r>
+              <a:rPr sz="750" b="0">
+                <a:solidFill>
+                  <a:srgbClr val="4A5A70"/>
+                </a:solidFill>
+                <a:latin typeface="Calibri"/>
+              </a:rPr>
+              <a:t>cryptographic · session · evidence</a:t>
+            </a:r>
+          </a:p>
+        </p:txBody>
+      </p:sp>
+      <p:sp>
+        <p:nvSpPr>
+          <p:cNvPr id="17439" name="Down Arrow 17438"/>
+          <p:cNvSpPr/>
+          <p:nvPr/>
+        </p:nvSpPr>
+        <p:spPr>
+          <a:xfrm>
+            <a:off x="8245076" y="3063239"/>
+            <a:ext cx="164592" cy="54864"/>
           </a:xfrm>
           <a:prstGeom prst="downArrow">
             <a:avLst/>
@@ -8235,14 +9503,330 @@
       </p:sp>
       <p:sp>
         <p:nvSpPr>
-          <p:cNvPr id="17420" name="Rounded Rectangle 17419"/>
+          <p:cNvPr id="17440" name="Rounded Rectangle 17439"/>
           <p:cNvSpPr/>
           <p:nvPr/>
         </p:nvSpPr>
         <p:spPr>
           <a:xfrm>
-            <a:off x="2834640" y="2212848"/>
-            <a:ext cx="2999232" cy="457200"/>
+            <a:off x="7174178" y="3127247"/>
+            <a:ext cx="2306388" cy="274320"/>
+          </a:xfrm>
+          <a:prstGeom prst="roundRect">
+            <a:avLst/>
+          </a:prstGeom>
+          <a:solidFill>
+            <a:srgbClr val="FFFDF8"/>
+          </a:solidFill>
+          <a:ln w="9525">
+            <a:solidFill>
+              <a:srgbClr val="DCB877"/>
+            </a:solidFill>
+          </a:ln>
+          <a:effectLst/>
+        </p:spPr>
+        <p:style>
+          <a:lnRef idx="1">
+            <a:schemeClr val="accent1"/>
+          </a:lnRef>
+          <a:fillRef idx="3">
+            <a:schemeClr val="accent1"/>
+          </a:fillRef>
+          <a:effectRef idx="2">
+            <a:schemeClr val="accent1"/>
+          </a:effectRef>
+          <a:fontRef idx="minor">
+            <a:schemeClr val="lt1"/>
+          </a:fontRef>
+        </p:style>
+        <p:txBody>
+          <a:bodyPr rtlCol="0" anchor="ctr" wrap="square" tIns="54864" bIns="54864"/>
+          <a:lstStyle/>
+          <a:p>
+            <a:pPr algn="ctr">
+              <a:lnSpc>
+                <a:spcPct val="88000"/>
+              </a:lnSpc>
+              <a:spcAft>
+                <a:spcPts val="100"/>
+              </a:spcAft>
+              <a:buNone/>
+            </a:pPr>
+            <a:r>
+              <a:rPr sz="950" b="1">
+                <a:solidFill>
+                  <a:srgbClr val="111B2A"/>
+                </a:solidFill>
+                <a:latin typeface="Calibri"/>
+              </a:rPr>
+              <a:t>Supervised classifier</a:t>
+            </a:r>
+          </a:p>
+          <a:p>
+            <a:pPr algn="ctr">
+              <a:lnSpc>
+                <a:spcPct val="88000"/>
+              </a:lnSpc>
+              <a:spcAft>
+                <a:spcPts val="100"/>
+              </a:spcAft>
+              <a:buNone/>
+            </a:pPr>
+            <a:r>
+              <a:rPr sz="750" b="0">
+                <a:solidFill>
+                  <a:srgbClr val="4A5A70"/>
+                </a:solidFill>
+                <a:latin typeface="Calibri"/>
+              </a:rPr>
+              <a:t>logistic regression</a:t>
+            </a:r>
+          </a:p>
+        </p:txBody>
+      </p:sp>
+      <p:sp>
+        <p:nvSpPr>
+          <p:cNvPr id="17441" name="Down Arrow 17440"/>
+          <p:cNvSpPr/>
+          <p:nvPr/>
+        </p:nvSpPr>
+        <p:spPr>
+          <a:xfrm>
+            <a:off x="8245076" y="3410711"/>
+            <a:ext cx="164592" cy="54864"/>
+          </a:xfrm>
+          <a:prstGeom prst="downArrow">
+            <a:avLst/>
+          </a:prstGeom>
+          <a:solidFill>
+            <a:srgbClr val="4A5A70"/>
+          </a:solidFill>
+          <a:ln>
+            <a:noFill/>
+          </a:ln>
+          <a:effectLst/>
+        </p:spPr>
+        <p:style>
+          <a:lnRef idx="1">
+            <a:schemeClr val="accent1"/>
+          </a:lnRef>
+          <a:fillRef idx="3">
+            <a:schemeClr val="accent1"/>
+          </a:fillRef>
+          <a:effectRef idx="2">
+            <a:schemeClr val="accent1"/>
+          </a:effectRef>
+          <a:fontRef idx="minor">
+            <a:schemeClr val="lt1"/>
+          </a:fontRef>
+        </p:style>
+        <p:txBody>
+          <a:bodyPr rtlCol="0" anchor="ctr"/>
+          <a:lstStyle/>
+          <a:p>
+            <a:pPr algn="ctr"/>
+          </a:p>
+        </p:txBody>
+      </p:sp>
+      <p:sp>
+        <p:nvSpPr>
+          <p:cNvPr id="17442" name="Rounded Rectangle 17441"/>
+          <p:cNvSpPr/>
+          <p:nvPr/>
+        </p:nvSpPr>
+        <p:spPr>
+          <a:xfrm>
+            <a:off x="7174178" y="3474719"/>
+            <a:ext cx="2306388" cy="274320"/>
+          </a:xfrm>
+          <a:prstGeom prst="roundRect">
+            <a:avLst/>
+          </a:prstGeom>
+          <a:solidFill>
+            <a:srgbClr val="FFFDF8"/>
+          </a:solidFill>
+          <a:ln w="9525">
+            <a:solidFill>
+              <a:srgbClr val="DCB877"/>
+            </a:solidFill>
+          </a:ln>
+          <a:effectLst/>
+        </p:spPr>
+        <p:style>
+          <a:lnRef idx="1">
+            <a:schemeClr val="accent1"/>
+          </a:lnRef>
+          <a:fillRef idx="3">
+            <a:schemeClr val="accent1"/>
+          </a:fillRef>
+          <a:effectRef idx="2">
+            <a:schemeClr val="accent1"/>
+          </a:effectRef>
+          <a:fontRef idx="minor">
+            <a:schemeClr val="lt1"/>
+          </a:fontRef>
+        </p:style>
+        <p:txBody>
+          <a:bodyPr rtlCol="0" anchor="ctr" wrap="square" tIns="54864" bIns="54864"/>
+          <a:lstStyle/>
+          <a:p>
+            <a:pPr algn="ctr">
+              <a:lnSpc>
+                <a:spcPct val="88000"/>
+              </a:lnSpc>
+              <a:spcAft>
+                <a:spcPts val="100"/>
+              </a:spcAft>
+              <a:buNone/>
+            </a:pPr>
+            <a:r>
+              <a:rPr sz="950" b="1">
+                <a:solidFill>
+                  <a:srgbClr val="111B2A"/>
+                </a:solidFill>
+                <a:latin typeface="Calibri"/>
+              </a:rPr>
+              <a:t>Advisory risk class</a:t>
+            </a:r>
+          </a:p>
+          <a:p>
+            <a:pPr algn="ctr">
+              <a:lnSpc>
+                <a:spcPct val="88000"/>
+              </a:lnSpc>
+              <a:spcAft>
+                <a:spcPts val="100"/>
+              </a:spcAft>
+              <a:buNone/>
+            </a:pPr>
+            <a:r>
+              <a:rPr sz="750" b="0">
+                <a:solidFill>
+                  <a:srgbClr val="4A5A70"/>
+                </a:solidFill>
+                <a:latin typeface="Calibri"/>
+              </a:rPr>
+              <a:t>CRITICAL · HIGH · MODERATE · LOW</a:t>
+            </a:r>
+          </a:p>
+        </p:txBody>
+      </p:sp>
+      <p:sp>
+        <p:nvSpPr>
+          <p:cNvPr id="17443" name="TextBox 17442"/>
+          <p:cNvSpPr txBox="1"/>
+          <p:nvPr/>
+        </p:nvSpPr>
+        <p:spPr>
+          <a:xfrm>
+            <a:off x="7174178" y="3803904"/>
+            <a:ext cx="2306388" cy="274320"/>
+          </a:xfrm>
+          <a:prstGeom prst="rect">
+            <a:avLst/>
+          </a:prstGeom>
+          <a:noFill/>
+        </p:spPr>
+        <p:txBody>
+          <a:bodyPr wrap="square" anchor="ctr">
+            <a:spAutoFit/>
+          </a:bodyPr>
+          <a:lstStyle/>
+          <a:p>
+            <a:pPr algn="ctr">
+              <a:lnSpc>
+                <a:spcPct val="90000"/>
+              </a:lnSpc>
+              <a:spcAft>
+                <a:spcPts val="300"/>
+              </a:spcAft>
+              <a:buNone/>
+            </a:pPr>
+            <a:r>
+              <a:rPr sz="850" b="1">
+                <a:solidFill>
+                  <a:srgbClr val="A83A1E"/>
+                </a:solidFill>
+                <a:latin typeface="Calibri"/>
+              </a:rPr>
+              <a:t>Advisory only — never overrides deterministic evidence or scoring.</a:t>
+            </a:r>
+          </a:p>
+        </p:txBody>
+      </p:sp>
+      <p:sp>
+        <p:nvSpPr>
+          <p:cNvPr id="17444" name="Rounded Rectangle 17443"/>
+          <p:cNvSpPr/>
+          <p:nvPr/>
+        </p:nvSpPr>
+        <p:spPr>
+          <a:xfrm>
+            <a:off x="9718311" y="1335024"/>
+            <a:ext cx="2086592" cy="2743200"/>
+          </a:xfrm>
+          <a:prstGeom prst="roundRect">
+            <a:avLst/>
+          </a:prstGeom>
+          <a:solidFill>
+            <a:srgbClr val="F7FAFD"/>
+          </a:solidFill>
+          <a:ln w="9525">
+            <a:solidFill>
+              <a:srgbClr val="DCE6F2"/>
+            </a:solidFill>
+          </a:ln>
+          <a:effectLst/>
+        </p:spPr>
+        <p:style>
+          <a:lnRef idx="1">
+            <a:schemeClr val="accent1"/>
+          </a:lnRef>
+          <a:fillRef idx="3">
+            <a:schemeClr val="accent1"/>
+          </a:fillRef>
+          <a:effectRef idx="2">
+            <a:schemeClr val="accent1"/>
+          </a:effectRef>
+          <a:fontRef idx="minor">
+            <a:schemeClr val="lt1"/>
+          </a:fontRef>
+        </p:style>
+        <p:txBody>
+          <a:bodyPr rtlCol="0" anchor="t" wrap="square" lIns="73152" tIns="27432"/>
+          <a:lstStyle/>
+          <a:p>
+            <a:pPr algn="ctr">
+              <a:lnSpc>
+                <a:spcPct val="100000"/>
+              </a:lnSpc>
+              <a:spcAft>
+                <a:spcPts val="300"/>
+              </a:spcAft>
+              <a:buNone/>
+            </a:pPr>
+            <a:r>
+              <a:rPr sz="750" b="1">
+                <a:solidFill>
+                  <a:srgbClr val="8A9BB0"/>
+                </a:solidFill>
+                <a:latin typeface="Calibri"/>
+              </a:rPr>
+              <a:t>OUTPUT</a:t>
+            </a:r>
+          </a:p>
+        </p:txBody>
+      </p:sp>
+      <p:sp>
+        <p:nvSpPr>
+          <p:cNvPr id="17445" name="Rounded Rectangle 17444"/>
+          <p:cNvSpPr/>
+          <p:nvPr/>
+        </p:nvSpPr>
+        <p:spPr>
+          <a:xfrm>
+            <a:off x="9809751" y="1636775"/>
+            <a:ext cx="1903712" cy="475488"/>
           </a:xfrm>
           <a:prstGeom prst="roundRect">
             <a:avLst/>
@@ -8285,13 +9869,13 @@
               <a:buNone/>
             </a:pPr>
             <a:r>
-              <a:rPr sz="1050" b="1">
+              <a:rPr sz="950" b="1">
                 <a:solidFill>
                   <a:srgbClr val="111B2A"/>
                 </a:solidFill>
                 <a:latin typeface="Calibri"/>
               </a:rPr>
-              <a:t>TCP reassembly</a:t>
+              <a:t>Canonical report model</a:t>
             </a:r>
           </a:p>
           <a:p>
@@ -8305,27 +9889,27 @@
               <a:buNone/>
             </a:pPr>
             <a:r>
-              <a:rPr sz="850" b="0">
+              <a:rPr sz="750" b="0">
                 <a:solidFill>
                   <a:srgbClr val="4A5A70"/>
                 </a:solidFill>
                 <a:latin typeface="Calibri"/>
               </a:rPr>
-              <a:t>reorder · retransmit · gaps</a:t>
-            </a:r>
-          </a:p>
-        </p:txBody>
-      </p:sp>
-      <p:sp>
-        <p:nvSpPr>
-          <p:cNvPr id="17421" name="Down Arrow 17420"/>
+              <a:t>schema 1.4.0</a:t>
+            </a:r>
+          </a:p>
+        </p:txBody>
+      </p:sp>
+      <p:sp>
+        <p:nvSpPr>
+          <p:cNvPr id="17446" name="Down Arrow 17445"/>
           <p:cNvSpPr/>
           <p:nvPr/>
         </p:nvSpPr>
         <p:spPr>
           <a:xfrm>
-            <a:off x="4251960" y="2688336"/>
-            <a:ext cx="164592" cy="146304"/>
+            <a:off x="10679311" y="2121407"/>
+            <a:ext cx="164592" cy="109728"/>
           </a:xfrm>
           <a:prstGeom prst="downArrow">
             <a:avLst/>
@@ -8362,14 +9946,14 @@
       </p:sp>
       <p:sp>
         <p:nvSpPr>
-          <p:cNvPr id="17422" name="Rounded Rectangle 17421"/>
+          <p:cNvPr id="17447" name="Rounded Rectangle 17446"/>
           <p:cNvSpPr/>
           <p:nvPr/>
         </p:nvSpPr>
         <p:spPr>
           <a:xfrm>
-            <a:off x="2834640" y="2871216"/>
-            <a:ext cx="2999232" cy="457200"/>
+            <a:off x="9809751" y="2240279"/>
+            <a:ext cx="1903712" cy="475488"/>
           </a:xfrm>
           <a:prstGeom prst="roundRect">
             <a:avLst/>
@@ -8412,13 +9996,13 @@
               <a:buNone/>
             </a:pPr>
             <a:r>
-              <a:rPr sz="1050" b="1">
+              <a:rPr sz="950" b="1">
                 <a:solidFill>
                   <a:srgbClr val="111B2A"/>
                 </a:solidFill>
                 <a:latin typeface="Calibri"/>
               </a:rPr>
-              <a:t>SMTP · IMAP · POP3</a:t>
+              <a:t>FastAPI + SQLite</a:t>
             </a:r>
           </a:p>
           <a:p>
@@ -8432,27 +10016,27 @@
               <a:buNone/>
             </a:pPr>
             <a:r>
-              <a:rPr sz="850" b="0">
+              <a:rPr sz="750" b="0">
                 <a:solidFill>
                   <a:srgbClr val="4A5A70"/>
                 </a:solidFill>
                 <a:latin typeface="Calibri"/>
               </a:rPr>
-              <a:t>state machines, not ports</a:t>
-            </a:r>
-          </a:p>
-        </p:txBody>
-      </p:sp>
-      <p:sp>
-        <p:nvSpPr>
-          <p:cNvPr id="17423" name="Down Arrow 17422"/>
+              <a:t>loopback only, token</a:t>
+            </a:r>
+          </a:p>
+        </p:txBody>
+      </p:sp>
+      <p:sp>
+        <p:nvSpPr>
+          <p:cNvPr id="17448" name="Down Arrow 17447"/>
           <p:cNvSpPr/>
           <p:nvPr/>
         </p:nvSpPr>
         <p:spPr>
           <a:xfrm>
-            <a:off x="4251960" y="3346704"/>
-            <a:ext cx="164592" cy="146304"/>
+            <a:off x="10679311" y="2724911"/>
+            <a:ext cx="164592" cy="109728"/>
           </a:xfrm>
           <a:prstGeom prst="downArrow">
             <a:avLst/>
@@ -8489,14 +10073,14 @@
       </p:sp>
       <p:sp>
         <p:nvSpPr>
-          <p:cNvPr id="17424" name="Rounded Rectangle 17423"/>
+          <p:cNvPr id="17449" name="Rounded Rectangle 17448"/>
           <p:cNvSpPr/>
           <p:nvPr/>
         </p:nvSpPr>
         <p:spPr>
           <a:xfrm>
-            <a:off x="2834640" y="3529584"/>
-            <a:ext cx="2999232" cy="457200"/>
+            <a:off x="9809751" y="2843784"/>
+            <a:ext cx="1903712" cy="475488"/>
           </a:xfrm>
           <a:prstGeom prst="roundRect">
             <a:avLst/>
@@ -8539,13 +10123,13 @@
               <a:buNone/>
             </a:pPr>
             <a:r>
-              <a:rPr sz="1050" b="1">
+              <a:rPr sz="950" b="1">
                 <a:solidFill>
                   <a:srgbClr val="111B2A"/>
                 </a:solidFill>
                 <a:latin typeface="Calibri"/>
               </a:rPr>
-              <a:t>STARTTLS / STLS</a:t>
+              <a:t>React workspace</a:t>
             </a:r>
           </a:p>
           <a:p>
@@ -8559,27 +10143,71 @@
               <a:buNone/>
             </a:pPr>
             <a:r>
-              <a:rPr sz="850" b="0">
+              <a:rPr sz="750" b="0">
                 <a:solidFill>
                   <a:srgbClr val="4A5A70"/>
                 </a:solidFill>
                 <a:latin typeface="Calibri"/>
               </a:rPr>
-              <a:t>advertised · requested · outcome</a:t>
-            </a:r>
-          </a:p>
-        </p:txBody>
-      </p:sp>
-      <p:sp>
-        <p:nvSpPr>
-          <p:cNvPr id="17425" name="Rounded Rectangle 17424"/>
+              <a:t>evidence-linked throughout</a:t>
+            </a:r>
+          </a:p>
+        </p:txBody>
+      </p:sp>
+      <p:sp>
+        <p:nvSpPr>
+          <p:cNvPr id="17450" name="Down Arrow 17449"/>
           <p:cNvSpPr/>
           <p:nvPr/>
         </p:nvSpPr>
         <p:spPr>
           <a:xfrm>
-            <a:off x="6327648" y="1645920"/>
-            <a:ext cx="2688336" cy="457200"/>
+            <a:off x="10679311" y="3328415"/>
+            <a:ext cx="164592" cy="109728"/>
+          </a:xfrm>
+          <a:prstGeom prst="downArrow">
+            <a:avLst/>
+          </a:prstGeom>
+          <a:solidFill>
+            <a:srgbClr val="4A5A70"/>
+          </a:solidFill>
+          <a:ln>
+            <a:noFill/>
+          </a:ln>
+          <a:effectLst/>
+        </p:spPr>
+        <p:style>
+          <a:lnRef idx="1">
+            <a:schemeClr val="accent1"/>
+          </a:lnRef>
+          <a:fillRef idx="3">
+            <a:schemeClr val="accent1"/>
+          </a:fillRef>
+          <a:effectRef idx="2">
+            <a:schemeClr val="accent1"/>
+          </a:effectRef>
+          <a:fontRef idx="minor">
+            <a:schemeClr val="lt1"/>
+          </a:fontRef>
+        </p:style>
+        <p:txBody>
+          <a:bodyPr rtlCol="0" anchor="ctr"/>
+          <a:lstStyle/>
+          <a:p>
+            <a:pPr algn="ctr"/>
+          </a:p>
+        </p:txBody>
+      </p:sp>
+      <p:sp>
+        <p:nvSpPr>
+          <p:cNvPr id="17451" name="Rounded Rectangle 17450"/>
+          <p:cNvSpPr/>
+          <p:nvPr/>
+        </p:nvSpPr>
+        <p:spPr>
+          <a:xfrm>
+            <a:off x="9809751" y="3447288"/>
+            <a:ext cx="1903712" cy="475488"/>
           </a:xfrm>
           <a:prstGeom prst="roundRect">
             <a:avLst/>
@@ -8622,13 +10250,13 @@
               <a:buNone/>
             </a:pPr>
             <a:r>
-              <a:rPr sz="1050" b="1">
+              <a:rPr sz="950" b="1">
                 <a:solidFill>
                   <a:srgbClr val="111B2A"/>
                 </a:solidFill>
                 <a:latin typeface="Calibri"/>
               </a:rPr>
-              <a:t>TLS handshake → X.509</a:t>
+              <a:t>JSON · HTML · PDF</a:t>
             </a:r>
           </a:p>
           <a:p>
@@ -8642,29 +10270,470 @@
               <a:buNone/>
             </a:pPr>
             <a:r>
-              <a:rPr sz="850" b="0">
+              <a:rPr sz="750" b="0">
                 <a:solidFill>
                   <a:srgbClr val="4A5A70"/>
                 </a:solidFill>
                 <a:latin typeface="Calibri"/>
               </a:rPr>
-              <a:t>version, suite, key exchange, chain</a:t>
-            </a:r>
-          </a:p>
-        </p:txBody>
-      </p:sp>
-      <p:sp>
-        <p:nvSpPr>
-          <p:cNvPr id="17426" name="Down Arrow 17425"/>
+              <a:t>parity-tested</a:t>
+            </a:r>
+          </a:p>
+        </p:txBody>
+      </p:sp>
+      <p:sp>
+        <p:nvSpPr>
+          <p:cNvPr id="17452" name="Rounded Rectangle 17451"/>
           <p:cNvSpPr/>
           <p:nvPr/>
         </p:nvSpPr>
         <p:spPr>
           <a:xfrm>
-            <a:off x="7589520" y="2121408"/>
-            <a:ext cx="164592" cy="146304"/>
-          </a:xfrm>
-          <a:prstGeom prst="downArrow">
+            <a:off x="384048" y="4169663"/>
+            <a:ext cx="11420856" cy="658368"/>
+          </a:xfrm>
+          <a:prstGeom prst="roundRect">
+            <a:avLst/>
+          </a:prstGeom>
+          <a:solidFill>
+            <a:srgbClr val="F7FAFD"/>
+          </a:solidFill>
+          <a:ln w="9525">
+            <a:solidFill>
+              <a:srgbClr val="DCE6F2"/>
+            </a:solidFill>
+          </a:ln>
+          <a:effectLst/>
+        </p:spPr>
+        <p:style>
+          <a:lnRef idx="1">
+            <a:schemeClr val="accent1"/>
+          </a:lnRef>
+          <a:fillRef idx="3">
+            <a:schemeClr val="accent1"/>
+          </a:fillRef>
+          <a:effectRef idx="2">
+            <a:schemeClr val="accent1"/>
+          </a:effectRef>
+          <a:fontRef idx="minor">
+            <a:schemeClr val="lt1"/>
+          </a:fontRef>
+        </p:style>
+        <p:txBody>
+          <a:bodyPr rtlCol="0" anchor="t" wrap="square" lIns="73152" tIns="27432"/>
+          <a:lstStyle/>
+          <a:p>
+            <a:pPr algn="ctr">
+              <a:lnSpc>
+                <a:spcPct val="100000"/>
+              </a:lnSpc>
+              <a:spcAft>
+                <a:spcPts val="300"/>
+              </a:spcAft>
+              <a:buNone/>
+            </a:pPr>
+            <a:r>
+              <a:rPr sz="750" b="1">
+                <a:solidFill>
+                  <a:srgbClr val="8A9BB0"/>
+                </a:solidFill>
+                <a:latin typeface="Calibri"/>
+              </a:rPr>
+              <a:t>EVIDENCE RAIL — WHAT EVERY FINDING CARRIES</a:t>
+            </a:r>
+          </a:p>
+        </p:txBody>
+      </p:sp>
+      <p:sp>
+        <p:nvSpPr>
+          <p:cNvPr id="17453" name="Rounded Rectangle 17452"/>
+          <p:cNvSpPr/>
+          <p:nvPr/>
+        </p:nvSpPr>
+        <p:spPr>
+          <a:xfrm>
+            <a:off x="512064" y="4407407"/>
+            <a:ext cx="1601724" cy="347472"/>
+          </a:xfrm>
+          <a:prstGeom prst="roundRect">
+            <a:avLst/>
+          </a:prstGeom>
+          <a:solidFill>
+            <a:srgbClr val="FFFFFF"/>
+          </a:solidFill>
+          <a:ln w="9525">
+            <a:solidFill>
+              <a:srgbClr val="C2D4E6"/>
+            </a:solidFill>
+          </a:ln>
+          <a:effectLst/>
+        </p:spPr>
+        <p:style>
+          <a:lnRef idx="1">
+            <a:schemeClr val="accent1"/>
+          </a:lnRef>
+          <a:fillRef idx="3">
+            <a:schemeClr val="accent1"/>
+          </a:fillRef>
+          <a:effectRef idx="2">
+            <a:schemeClr val="accent1"/>
+          </a:effectRef>
+          <a:fontRef idx="minor">
+            <a:schemeClr val="lt1"/>
+          </a:fontRef>
+        </p:style>
+        <p:txBody>
+          <a:bodyPr rtlCol="0" anchor="ctr" wrap="square" tIns="54864" bIns="54864"/>
+          <a:lstStyle/>
+          <a:p>
+            <a:pPr algn="ctr">
+              <a:lnSpc>
+                <a:spcPct val="88000"/>
+              </a:lnSpc>
+              <a:spcAft>
+                <a:spcPts val="100"/>
+              </a:spcAft>
+              <a:buNone/>
+            </a:pPr>
+            <a:r>
+              <a:rPr sz="1000" b="1">
+                <a:solidFill>
+                  <a:srgbClr val="0B5FA5"/>
+                </a:solidFill>
+                <a:latin typeface="Calibri"/>
+              </a:rPr>
+              <a:t>PACKET</a:t>
+            </a:r>
+          </a:p>
+        </p:txBody>
+      </p:sp>
+      <p:sp>
+        <p:nvSpPr>
+          <p:cNvPr id="17454" name="Rounded Rectangle 17453"/>
+          <p:cNvSpPr/>
+          <p:nvPr/>
+        </p:nvSpPr>
+        <p:spPr>
+          <a:xfrm>
+            <a:off x="2424683" y="4407407"/>
+            <a:ext cx="1601724" cy="347472"/>
+          </a:xfrm>
+          <a:prstGeom prst="roundRect">
+            <a:avLst/>
+          </a:prstGeom>
+          <a:solidFill>
+            <a:srgbClr val="FFFFFF"/>
+          </a:solidFill>
+          <a:ln w="9525">
+            <a:solidFill>
+              <a:srgbClr val="C2D4E6"/>
+            </a:solidFill>
+          </a:ln>
+          <a:effectLst/>
+        </p:spPr>
+        <p:style>
+          <a:lnRef idx="1">
+            <a:schemeClr val="accent1"/>
+          </a:lnRef>
+          <a:fillRef idx="3">
+            <a:schemeClr val="accent1"/>
+          </a:fillRef>
+          <a:effectRef idx="2">
+            <a:schemeClr val="accent1"/>
+          </a:effectRef>
+          <a:fontRef idx="minor">
+            <a:schemeClr val="lt1"/>
+          </a:fontRef>
+        </p:style>
+        <p:txBody>
+          <a:bodyPr rtlCol="0" anchor="ctr" wrap="square" tIns="54864" bIns="54864"/>
+          <a:lstStyle/>
+          <a:p>
+            <a:pPr algn="ctr">
+              <a:lnSpc>
+                <a:spcPct val="88000"/>
+              </a:lnSpc>
+              <a:spcAft>
+                <a:spcPts val="100"/>
+              </a:spcAft>
+              <a:buNone/>
+            </a:pPr>
+            <a:r>
+              <a:rPr sz="1000" b="1">
+                <a:solidFill>
+                  <a:srgbClr val="0B5FA5"/>
+                </a:solidFill>
+                <a:latin typeface="Calibri"/>
+              </a:rPr>
+              <a:t>OBSERVATION</a:t>
+            </a:r>
+          </a:p>
+        </p:txBody>
+      </p:sp>
+      <p:sp>
+        <p:nvSpPr>
+          <p:cNvPr id="17455" name="Rounded Rectangle 17454"/>
+          <p:cNvSpPr/>
+          <p:nvPr/>
+        </p:nvSpPr>
+        <p:spPr>
+          <a:xfrm>
+            <a:off x="4337304" y="4407407"/>
+            <a:ext cx="1601724" cy="347472"/>
+          </a:xfrm>
+          <a:prstGeom prst="roundRect">
+            <a:avLst/>
+          </a:prstGeom>
+          <a:solidFill>
+            <a:srgbClr val="FFFFFF"/>
+          </a:solidFill>
+          <a:ln w="9525">
+            <a:solidFill>
+              <a:srgbClr val="C2D4E6"/>
+            </a:solidFill>
+          </a:ln>
+          <a:effectLst/>
+        </p:spPr>
+        <p:style>
+          <a:lnRef idx="1">
+            <a:schemeClr val="accent1"/>
+          </a:lnRef>
+          <a:fillRef idx="3">
+            <a:schemeClr val="accent1"/>
+          </a:fillRef>
+          <a:effectRef idx="2">
+            <a:schemeClr val="accent1"/>
+          </a:effectRef>
+          <a:fontRef idx="minor">
+            <a:schemeClr val="lt1"/>
+          </a:fontRef>
+        </p:style>
+        <p:txBody>
+          <a:bodyPr rtlCol="0" anchor="ctr" wrap="square" tIns="54864" bIns="54864"/>
+          <a:lstStyle/>
+          <a:p>
+            <a:pPr algn="ctr">
+              <a:lnSpc>
+                <a:spcPct val="88000"/>
+              </a:lnSpc>
+              <a:spcAft>
+                <a:spcPts val="100"/>
+              </a:spcAft>
+              <a:buNone/>
+            </a:pPr>
+            <a:r>
+              <a:rPr sz="1000" b="1">
+                <a:solidFill>
+                  <a:srgbClr val="0B5FA5"/>
+                </a:solidFill>
+                <a:latin typeface="Calibri"/>
+              </a:rPr>
+              <a:t>CRYPTO FACT</a:t>
+            </a:r>
+          </a:p>
+        </p:txBody>
+      </p:sp>
+      <p:sp>
+        <p:nvSpPr>
+          <p:cNvPr id="17456" name="Rounded Rectangle 17455"/>
+          <p:cNvSpPr/>
+          <p:nvPr/>
+        </p:nvSpPr>
+        <p:spPr>
+          <a:xfrm>
+            <a:off x="6249924" y="4407407"/>
+            <a:ext cx="1601724" cy="347472"/>
+          </a:xfrm>
+          <a:prstGeom prst="roundRect">
+            <a:avLst/>
+          </a:prstGeom>
+          <a:solidFill>
+            <a:srgbClr val="FFFFFF"/>
+          </a:solidFill>
+          <a:ln w="9525">
+            <a:solidFill>
+              <a:srgbClr val="C2D4E6"/>
+            </a:solidFill>
+          </a:ln>
+          <a:effectLst/>
+        </p:spPr>
+        <p:style>
+          <a:lnRef idx="1">
+            <a:schemeClr val="accent1"/>
+          </a:lnRef>
+          <a:fillRef idx="3">
+            <a:schemeClr val="accent1"/>
+          </a:fillRef>
+          <a:effectRef idx="2">
+            <a:schemeClr val="accent1"/>
+          </a:effectRef>
+          <a:fontRef idx="minor">
+            <a:schemeClr val="lt1"/>
+          </a:fontRef>
+        </p:style>
+        <p:txBody>
+          <a:bodyPr rtlCol="0" anchor="ctr" wrap="square" tIns="54864" bIns="54864"/>
+          <a:lstStyle/>
+          <a:p>
+            <a:pPr algn="ctr">
+              <a:lnSpc>
+                <a:spcPct val="88000"/>
+              </a:lnSpc>
+              <a:spcAft>
+                <a:spcPts val="100"/>
+              </a:spcAft>
+              <a:buNone/>
+            </a:pPr>
+            <a:r>
+              <a:rPr sz="1000" b="1">
+                <a:solidFill>
+                  <a:srgbClr val="0B5FA5"/>
+                </a:solidFill>
+                <a:latin typeface="Calibri"/>
+              </a:rPr>
+              <a:t>RULE</a:t>
+            </a:r>
+          </a:p>
+        </p:txBody>
+      </p:sp>
+      <p:sp>
+        <p:nvSpPr>
+          <p:cNvPr id="17457" name="Rounded Rectangle 17456"/>
+          <p:cNvSpPr/>
+          <p:nvPr/>
+        </p:nvSpPr>
+        <p:spPr>
+          <a:xfrm>
+            <a:off x="8162543" y="4407407"/>
+            <a:ext cx="1601724" cy="347472"/>
+          </a:xfrm>
+          <a:prstGeom prst="roundRect">
+            <a:avLst/>
+          </a:prstGeom>
+          <a:solidFill>
+            <a:srgbClr val="FFFFFF"/>
+          </a:solidFill>
+          <a:ln w="9525">
+            <a:solidFill>
+              <a:srgbClr val="C2D4E6"/>
+            </a:solidFill>
+          </a:ln>
+          <a:effectLst/>
+        </p:spPr>
+        <p:style>
+          <a:lnRef idx="1">
+            <a:schemeClr val="accent1"/>
+          </a:lnRef>
+          <a:fillRef idx="3">
+            <a:schemeClr val="accent1"/>
+          </a:fillRef>
+          <a:effectRef idx="2">
+            <a:schemeClr val="accent1"/>
+          </a:effectRef>
+          <a:fontRef idx="minor">
+            <a:schemeClr val="lt1"/>
+          </a:fontRef>
+        </p:style>
+        <p:txBody>
+          <a:bodyPr rtlCol="0" anchor="ctr" wrap="square" tIns="54864" bIns="54864"/>
+          <a:lstStyle/>
+          <a:p>
+            <a:pPr algn="ctr">
+              <a:lnSpc>
+                <a:spcPct val="88000"/>
+              </a:lnSpc>
+              <a:spcAft>
+                <a:spcPts val="100"/>
+              </a:spcAft>
+              <a:buNone/>
+            </a:pPr>
+            <a:r>
+              <a:rPr sz="1000" b="1">
+                <a:solidFill>
+                  <a:srgbClr val="0B5FA5"/>
+                </a:solidFill>
+                <a:latin typeface="Calibri"/>
+              </a:rPr>
+              <a:t>FINDING</a:t>
+            </a:r>
+          </a:p>
+        </p:txBody>
+      </p:sp>
+      <p:sp>
+        <p:nvSpPr>
+          <p:cNvPr id="17458" name="Rounded Rectangle 17457"/>
+          <p:cNvSpPr/>
+          <p:nvPr/>
+        </p:nvSpPr>
+        <p:spPr>
+          <a:xfrm>
+            <a:off x="10075164" y="4407407"/>
+            <a:ext cx="1601724" cy="347472"/>
+          </a:xfrm>
+          <a:prstGeom prst="roundRect">
+            <a:avLst/>
+          </a:prstGeom>
+          <a:solidFill>
+            <a:srgbClr val="FFFFFF"/>
+          </a:solidFill>
+          <a:ln w="9525">
+            <a:solidFill>
+              <a:srgbClr val="C2D4E6"/>
+            </a:solidFill>
+          </a:ln>
+          <a:effectLst/>
+        </p:spPr>
+        <p:style>
+          <a:lnRef idx="1">
+            <a:schemeClr val="accent1"/>
+          </a:lnRef>
+          <a:fillRef idx="3">
+            <a:schemeClr val="accent1"/>
+          </a:fillRef>
+          <a:effectRef idx="2">
+            <a:schemeClr val="accent1"/>
+          </a:effectRef>
+          <a:fontRef idx="minor">
+            <a:schemeClr val="lt1"/>
+          </a:fontRef>
+        </p:style>
+        <p:txBody>
+          <a:bodyPr rtlCol="0" anchor="ctr" wrap="square" tIns="54864" bIns="54864"/>
+          <a:lstStyle/>
+          <a:p>
+            <a:pPr algn="ctr">
+              <a:lnSpc>
+                <a:spcPct val="88000"/>
+              </a:lnSpc>
+              <a:spcAft>
+                <a:spcPts val="100"/>
+              </a:spcAft>
+              <a:buNone/>
+            </a:pPr>
+            <a:r>
+              <a:rPr sz="1000" b="1">
+                <a:solidFill>
+                  <a:srgbClr val="0B5FA5"/>
+                </a:solidFill>
+                <a:latin typeface="Calibri"/>
+              </a:rPr>
+              <a:t>REMEDIATION</a:t>
+            </a:r>
+          </a:p>
+        </p:txBody>
+      </p:sp>
+      <p:sp>
+        <p:nvSpPr>
+          <p:cNvPr id="17459" name="Right Arrow 17458"/>
+          <p:cNvSpPr/>
+          <p:nvPr/>
+        </p:nvSpPr>
+        <p:spPr>
+          <a:xfrm>
+            <a:off x="2168652" y="4498847"/>
+            <a:ext cx="201168" cy="164592"/>
+          </a:xfrm>
+          <a:prstGeom prst="rightArrow">
             <a:avLst/>
           </a:prstGeom>
           <a:solidFill>
@@ -8699,14 +10768,190 @@
       </p:sp>
       <p:sp>
         <p:nvSpPr>
-          <p:cNvPr id="17427" name="Rounded Rectangle 17426"/>
+          <p:cNvPr id="17460" name="Right Arrow 17459"/>
           <p:cNvSpPr/>
           <p:nvPr/>
         </p:nvSpPr>
         <p:spPr>
           <a:xfrm>
-            <a:off x="6327648" y="2304288"/>
-            <a:ext cx="2688336" cy="457200"/>
+            <a:off x="4081271" y="4498847"/>
+            <a:ext cx="201168" cy="164592"/>
+          </a:xfrm>
+          <a:prstGeom prst="rightArrow">
+            <a:avLst/>
+          </a:prstGeom>
+          <a:solidFill>
+            <a:srgbClr val="4A5A70"/>
+          </a:solidFill>
+          <a:ln>
+            <a:noFill/>
+          </a:ln>
+          <a:effectLst/>
+        </p:spPr>
+        <p:style>
+          <a:lnRef idx="1">
+            <a:schemeClr val="accent1"/>
+          </a:lnRef>
+          <a:fillRef idx="3">
+            <a:schemeClr val="accent1"/>
+          </a:fillRef>
+          <a:effectRef idx="2">
+            <a:schemeClr val="accent1"/>
+          </a:effectRef>
+          <a:fontRef idx="minor">
+            <a:schemeClr val="lt1"/>
+          </a:fontRef>
+        </p:style>
+        <p:txBody>
+          <a:bodyPr rtlCol="0" anchor="ctr"/>
+          <a:lstStyle/>
+          <a:p>
+            <a:pPr algn="ctr"/>
+          </a:p>
+        </p:txBody>
+      </p:sp>
+      <p:sp>
+        <p:nvSpPr>
+          <p:cNvPr id="17461" name="Right Arrow 17460"/>
+          <p:cNvSpPr/>
+          <p:nvPr/>
+        </p:nvSpPr>
+        <p:spPr>
+          <a:xfrm>
+            <a:off x="5993892" y="4498847"/>
+            <a:ext cx="201168" cy="164592"/>
+          </a:xfrm>
+          <a:prstGeom prst="rightArrow">
+            <a:avLst/>
+          </a:prstGeom>
+          <a:solidFill>
+            <a:srgbClr val="4A5A70"/>
+          </a:solidFill>
+          <a:ln>
+            <a:noFill/>
+          </a:ln>
+          <a:effectLst/>
+        </p:spPr>
+        <p:style>
+          <a:lnRef idx="1">
+            <a:schemeClr val="accent1"/>
+          </a:lnRef>
+          <a:fillRef idx="3">
+            <a:schemeClr val="accent1"/>
+          </a:fillRef>
+          <a:effectRef idx="2">
+            <a:schemeClr val="accent1"/>
+          </a:effectRef>
+          <a:fontRef idx="minor">
+            <a:schemeClr val="lt1"/>
+          </a:fontRef>
+        </p:style>
+        <p:txBody>
+          <a:bodyPr rtlCol="0" anchor="ctr"/>
+          <a:lstStyle/>
+          <a:p>
+            <a:pPr algn="ctr"/>
+          </a:p>
+        </p:txBody>
+      </p:sp>
+      <p:sp>
+        <p:nvSpPr>
+          <p:cNvPr id="17462" name="Right Arrow 17461"/>
+          <p:cNvSpPr/>
+          <p:nvPr/>
+        </p:nvSpPr>
+        <p:spPr>
+          <a:xfrm>
+            <a:off x="7906512" y="4498847"/>
+            <a:ext cx="201168" cy="164592"/>
+          </a:xfrm>
+          <a:prstGeom prst="rightArrow">
+            <a:avLst/>
+          </a:prstGeom>
+          <a:solidFill>
+            <a:srgbClr val="4A5A70"/>
+          </a:solidFill>
+          <a:ln>
+            <a:noFill/>
+          </a:ln>
+          <a:effectLst/>
+        </p:spPr>
+        <p:style>
+          <a:lnRef idx="1">
+            <a:schemeClr val="accent1"/>
+          </a:lnRef>
+          <a:fillRef idx="3">
+            <a:schemeClr val="accent1"/>
+          </a:fillRef>
+          <a:effectRef idx="2">
+            <a:schemeClr val="accent1"/>
+          </a:effectRef>
+          <a:fontRef idx="minor">
+            <a:schemeClr val="lt1"/>
+          </a:fontRef>
+        </p:style>
+        <p:txBody>
+          <a:bodyPr rtlCol="0" anchor="ctr"/>
+          <a:lstStyle/>
+          <a:p>
+            <a:pPr algn="ctr"/>
+          </a:p>
+        </p:txBody>
+      </p:sp>
+      <p:sp>
+        <p:nvSpPr>
+          <p:cNvPr id="17463" name="Right Arrow 17462"/>
+          <p:cNvSpPr/>
+          <p:nvPr/>
+        </p:nvSpPr>
+        <p:spPr>
+          <a:xfrm>
+            <a:off x="9819132" y="4498847"/>
+            <a:ext cx="201168" cy="164592"/>
+          </a:xfrm>
+          <a:prstGeom prst="rightArrow">
+            <a:avLst/>
+          </a:prstGeom>
+          <a:solidFill>
+            <a:srgbClr val="4A5A70"/>
+          </a:solidFill>
+          <a:ln>
+            <a:noFill/>
+          </a:ln>
+          <a:effectLst/>
+        </p:spPr>
+        <p:style>
+          <a:lnRef idx="1">
+            <a:schemeClr val="accent1"/>
+          </a:lnRef>
+          <a:fillRef idx="3">
+            <a:schemeClr val="accent1"/>
+          </a:fillRef>
+          <a:effectRef idx="2">
+            <a:schemeClr val="accent1"/>
+          </a:effectRef>
+          <a:fontRef idx="minor">
+            <a:schemeClr val="lt1"/>
+          </a:fontRef>
+        </p:style>
+        <p:txBody>
+          <a:bodyPr rtlCol="0" anchor="ctr"/>
+          <a:lstStyle/>
+          <a:p>
+            <a:pPr algn="ctr"/>
+          </a:p>
+        </p:txBody>
+      </p:sp>
+      <p:sp>
+        <p:nvSpPr>
+          <p:cNvPr id="17464" name="Rounded Rectangle 17463"/>
+          <p:cNvSpPr/>
+          <p:nvPr/>
+        </p:nvSpPr>
+        <p:spPr>
+          <a:xfrm>
+            <a:off x="384048" y="4919472"/>
+            <a:ext cx="2167128" cy="694944"/>
           </a:xfrm>
           <a:prstGeom prst="roundRect">
             <a:avLst/>
@@ -8751,11 +10996,11 @@
             <a:r>
               <a:rPr sz="1050" b="1">
                 <a:solidFill>
-                  <a:srgbClr val="111B2A"/>
-                </a:solidFill>
-                <a:latin typeface="Calibri"/>
-              </a:rPr>
-              <a:t>25 policy rules</a:t>
+                  <a:srgbClr val="0B5FA5"/>
+                </a:solidFill>
+                <a:latin typeface="Calibri"/>
+              </a:rPr>
+              <a:t>ENGINE</a:t>
             </a:r>
           </a:p>
           <a:p>
@@ -8769,71 +11014,27 @@
               <a:buNone/>
             </a:pPr>
             <a:r>
-              <a:rPr sz="850" b="0">
-                <a:solidFill>
-                  <a:srgbClr val="4A5A70"/>
-                </a:solidFill>
-                <a:latin typeface="Calibri"/>
-              </a:rPr>
-              <a:t>versioned and fingerprinted</a:t>
-            </a:r>
-          </a:p>
-        </p:txBody>
-      </p:sp>
-      <p:sp>
-        <p:nvSpPr>
-          <p:cNvPr id="17428" name="Down Arrow 17427"/>
+              <a:rPr sz="900" b="0">
+                <a:solidFill>
+                  <a:srgbClr val="1F2C3F"/>
+                </a:solidFill>
+                <a:latin typeface="Calibri"/>
+              </a:rPr>
+              <a:t>Python · Scapy · cryptography</a:t>
+            </a:r>
+          </a:p>
+        </p:txBody>
+      </p:sp>
+      <p:sp>
+        <p:nvSpPr>
+          <p:cNvPr id="17465" name="Rounded Rectangle 17464"/>
           <p:cNvSpPr/>
           <p:nvPr/>
         </p:nvSpPr>
         <p:spPr>
           <a:xfrm>
-            <a:off x="7589520" y="2779776"/>
-            <a:ext cx="164592" cy="146304"/>
-          </a:xfrm>
-          <a:prstGeom prst="downArrow">
-            <a:avLst/>
-          </a:prstGeom>
-          <a:solidFill>
-            <a:srgbClr val="4A5A70"/>
-          </a:solidFill>
-          <a:ln>
-            <a:noFill/>
-          </a:ln>
-          <a:effectLst/>
-        </p:spPr>
-        <p:style>
-          <a:lnRef idx="1">
-            <a:schemeClr val="accent1"/>
-          </a:lnRef>
-          <a:fillRef idx="3">
-            <a:schemeClr val="accent1"/>
-          </a:fillRef>
-          <a:effectRef idx="2">
-            <a:schemeClr val="accent1"/>
-          </a:effectRef>
-          <a:fontRef idx="minor">
-            <a:schemeClr val="lt1"/>
-          </a:fontRef>
-        </p:style>
-        <p:txBody>
-          <a:bodyPr rtlCol="0" anchor="ctr"/>
-          <a:lstStyle/>
-          <a:p>
-            <a:pPr algn="ctr"/>
-          </a:p>
-        </p:txBody>
-      </p:sp>
-      <p:sp>
-        <p:nvSpPr>
-          <p:cNvPr id="17429" name="Rounded Rectangle 17428"/>
-          <p:cNvSpPr/>
-          <p:nvPr/>
-        </p:nvSpPr>
-        <p:spPr>
-          <a:xfrm>
-            <a:off x="6327648" y="2962656"/>
-            <a:ext cx="2688336" cy="457200"/>
+            <a:off x="2697480" y="4919472"/>
+            <a:ext cx="2167128" cy="694944"/>
           </a:xfrm>
           <a:prstGeom prst="roundRect">
             <a:avLst/>
@@ -8878,11 +11079,11 @@
             <a:r>
               <a:rPr sz="1050" b="1">
                 <a:solidFill>
-                  <a:srgbClr val="111B2A"/>
-                </a:solidFill>
-                <a:latin typeface="Calibri"/>
-              </a:rPr>
-              <a:t>Score · coverage · priority</a:t>
+                  <a:srgbClr val="0B5FA5"/>
+                </a:solidFill>
+                <a:latin typeface="Calibri"/>
+              </a:rPr>
+              <a:t>APPLICATION</a:t>
             </a:r>
           </a:p>
           <a:p>
@@ -8896,71 +11097,27 @@
               <a:buNone/>
             </a:pPr>
             <a:r>
-              <a:rPr sz="850" b="0">
-                <a:solidFill>
-                  <a:srgbClr val="4A5A70"/>
-                </a:solidFill>
-                <a:latin typeface="Calibri"/>
-              </a:rPr>
-              <a:t>arithmetic shown, not asserted</a:t>
-            </a:r>
-          </a:p>
-        </p:txBody>
-      </p:sp>
-      <p:sp>
-        <p:nvSpPr>
-          <p:cNvPr id="17430" name="Down Arrow 17429"/>
+              <a:rPr sz="900" b="0">
+                <a:solidFill>
+                  <a:srgbClr val="1F2C3F"/>
+                </a:solidFill>
+                <a:latin typeface="Calibri"/>
+              </a:rPr>
+              <a:t>FastAPI · SQLite · React · TypeScript</a:t>
+            </a:r>
+          </a:p>
+        </p:txBody>
+      </p:sp>
+      <p:sp>
+        <p:nvSpPr>
+          <p:cNvPr id="17466" name="Rounded Rectangle 17465"/>
           <p:cNvSpPr/>
           <p:nvPr/>
         </p:nvSpPr>
         <p:spPr>
           <a:xfrm>
-            <a:off x="7589520" y="3438144"/>
-            <a:ext cx="164592" cy="146304"/>
-          </a:xfrm>
-          <a:prstGeom prst="downArrow">
-            <a:avLst/>
-          </a:prstGeom>
-          <a:solidFill>
-            <a:srgbClr val="4A5A70"/>
-          </a:solidFill>
-          <a:ln>
-            <a:noFill/>
-          </a:ln>
-          <a:effectLst/>
-        </p:spPr>
-        <p:style>
-          <a:lnRef idx="1">
-            <a:schemeClr val="accent1"/>
-          </a:lnRef>
-          <a:fillRef idx="3">
-            <a:schemeClr val="accent1"/>
-          </a:fillRef>
-          <a:effectRef idx="2">
-            <a:schemeClr val="accent1"/>
-          </a:effectRef>
-          <a:fontRef idx="minor">
-            <a:schemeClr val="lt1"/>
-          </a:fontRef>
-        </p:style>
-        <p:txBody>
-          <a:bodyPr rtlCol="0" anchor="ctr"/>
-          <a:lstStyle/>
-          <a:p>
-            <a:pPr algn="ctr"/>
-          </a:p>
-        </p:txBody>
-      </p:sp>
-      <p:sp>
-        <p:nvSpPr>
-          <p:cNvPr id="17431" name="Rounded Rectangle 17430"/>
-          <p:cNvSpPr/>
-          <p:nvPr/>
-        </p:nvSpPr>
-        <p:spPr>
-          <a:xfrm>
-            <a:off x="6327648" y="3621024"/>
-            <a:ext cx="2688336" cy="457200"/>
+            <a:off x="5010912" y="4919472"/>
+            <a:ext cx="2167128" cy="694944"/>
           </a:xfrm>
           <a:prstGeom prst="roundRect">
             <a:avLst/>
@@ -9005,11 +11162,11 @@
             <a:r>
               <a:rPr sz="1050" b="1">
                 <a:solidFill>
-                  <a:srgbClr val="111B2A"/>
-                </a:solidFill>
-                <a:latin typeface="Calibri"/>
-              </a:rPr>
-              <a:t>Fingerprint · drift · ML</a:t>
+                  <a:srgbClr val="A83A1E"/>
+                </a:solidFill>
+                <a:latin typeface="Calibri"/>
+              </a:rPr>
+              <a:t>AI / ANALYTICS</a:t>
             </a:r>
           </a:p>
           <a:p>
@@ -9023,27 +11180,27 @@
               <a:buNone/>
             </a:pPr>
             <a:r>
-              <a:rPr sz="850" b="0">
-                <a:solidFill>
-                  <a:srgbClr val="4A5A70"/>
-                </a:solidFill>
-                <a:latin typeface="Calibri"/>
-              </a:rPr>
-              <a:t>ML is advisory only</a:t>
-            </a:r>
-          </a:p>
-        </p:txBody>
-      </p:sp>
-      <p:sp>
-        <p:nvSpPr>
-          <p:cNvPr id="17432" name="Rounded Rectangle 17431"/>
+              <a:rPr sz="900" b="0">
+                <a:solidFill>
+                  <a:srgbClr val="1F2C3F"/>
+                </a:solidFill>
+                <a:latin typeface="Calibri"/>
+              </a:rPr>
+              <a:t>scikit-learn · supervised risk classifier</a:t>
+            </a:r>
+          </a:p>
+        </p:txBody>
+      </p:sp>
+      <p:sp>
+        <p:nvSpPr>
+          <p:cNvPr id="17467" name="Rounded Rectangle 17466"/>
           <p:cNvSpPr/>
           <p:nvPr/>
         </p:nvSpPr>
         <p:spPr>
           <a:xfrm>
-            <a:off x="9509760" y="1645920"/>
-            <a:ext cx="2157984" cy="457200"/>
+            <a:off x="7324344" y="4919472"/>
+            <a:ext cx="2167128" cy="694944"/>
           </a:xfrm>
           <a:prstGeom prst="roundRect">
             <a:avLst/>
@@ -9088,11 +11245,11 @@
             <a:r>
               <a:rPr sz="1050" b="1">
                 <a:solidFill>
-                  <a:srgbClr val="111B2A"/>
-                </a:solidFill>
-                <a:latin typeface="Calibri"/>
-              </a:rPr>
-              <a:t>Canonical report model</a:t>
+                  <a:srgbClr val="0B5FA5"/>
+                </a:solidFill>
+                <a:latin typeface="Calibri"/>
+              </a:rPr>
+              <a:t>VALIDATION</a:t>
             </a:r>
           </a:p>
           <a:p>
@@ -9106,71 +11263,27 @@
               <a:buNone/>
             </a:pPr>
             <a:r>
-              <a:rPr sz="850" b="0">
-                <a:solidFill>
-                  <a:srgbClr val="4A5A70"/>
-                </a:solidFill>
-                <a:latin typeface="Calibri"/>
-              </a:rPr>
-              <a:t>schema 1.4.0</a:t>
-            </a:r>
-          </a:p>
-        </p:txBody>
-      </p:sp>
-      <p:sp>
-        <p:nvSpPr>
-          <p:cNvPr id="17433" name="Down Arrow 17432"/>
+              <a:rPr sz="900" b="0">
+                <a:solidFill>
+                  <a:srgbClr val="1F2C3F"/>
+                </a:solidFill>
+                <a:latin typeface="Calibri"/>
+              </a:rPr>
+              <a:t>pytest · Playwright · TShark</a:t>
+            </a:r>
+          </a:p>
+        </p:txBody>
+      </p:sp>
+      <p:sp>
+        <p:nvSpPr>
+          <p:cNvPr id="17468" name="Rounded Rectangle 17467"/>
           <p:cNvSpPr/>
           <p:nvPr/>
         </p:nvSpPr>
         <p:spPr>
           <a:xfrm>
-            <a:off x="10506456" y="2121408"/>
-            <a:ext cx="164592" cy="146304"/>
-          </a:xfrm>
-          <a:prstGeom prst="downArrow">
-            <a:avLst/>
-          </a:prstGeom>
-          <a:solidFill>
-            <a:srgbClr val="4A5A70"/>
-          </a:solidFill>
-          <a:ln>
-            <a:noFill/>
-          </a:ln>
-          <a:effectLst/>
-        </p:spPr>
-        <p:style>
-          <a:lnRef idx="1">
-            <a:schemeClr val="accent1"/>
-          </a:lnRef>
-          <a:fillRef idx="3">
-            <a:schemeClr val="accent1"/>
-          </a:fillRef>
-          <a:effectRef idx="2">
-            <a:schemeClr val="accent1"/>
-          </a:effectRef>
-          <a:fontRef idx="minor">
-            <a:schemeClr val="lt1"/>
-          </a:fontRef>
-        </p:style>
-        <p:txBody>
-          <a:bodyPr rtlCol="0" anchor="ctr"/>
-          <a:lstStyle/>
-          <a:p>
-            <a:pPr algn="ctr"/>
-          </a:p>
-        </p:txBody>
-      </p:sp>
-      <p:sp>
-        <p:nvSpPr>
-          <p:cNvPr id="17434" name="Rounded Rectangle 17433"/>
-          <p:cNvSpPr/>
-          <p:nvPr/>
-        </p:nvSpPr>
-        <p:spPr>
-          <a:xfrm>
-            <a:off x="9509760" y="2304288"/>
-            <a:ext cx="2157984" cy="457200"/>
+            <a:off x="9637776" y="4919472"/>
+            <a:ext cx="2167128" cy="694944"/>
           </a:xfrm>
           <a:prstGeom prst="roundRect">
             <a:avLst/>
@@ -9215,11 +11328,11 @@
             <a:r>
               <a:rPr sz="1050" b="1">
                 <a:solidFill>
-                  <a:srgbClr val="111B2A"/>
-                </a:solidFill>
-                <a:latin typeface="Calibri"/>
-              </a:rPr>
-              <a:t>FastAPI + SQLite</a:t>
+                  <a:srgbClr val="1B6B3A"/>
+                </a:solidFill>
+                <a:latin typeface="Calibri"/>
+              </a:rPr>
+              <a:t>GUARANTEES</a:t>
             </a:r>
           </a:p>
           <a:p>
@@ -9233,1581 +11346,56 @@
               <a:buNone/>
             </a:pPr>
             <a:r>
-              <a:rPr sz="850" b="0">
-                <a:solidFill>
-                  <a:srgbClr val="4A5A70"/>
-                </a:solidFill>
-                <a:latin typeface="Calibri"/>
-              </a:rPr>
-              <a:t>loopback only, token</a:t>
-            </a:r>
-          </a:p>
-        </p:txBody>
-      </p:sp>
-      <p:sp>
-        <p:nvSpPr>
-          <p:cNvPr id="17435" name="Down Arrow 17434"/>
-          <p:cNvSpPr/>
+              <a:rPr sz="900" b="0">
+                <a:solidFill>
+                  <a:srgbClr val="1F2C3F"/>
+                </a:solidFill>
+                <a:latin typeface="Calibri"/>
+              </a:rPr>
+              <a:t>Passive · Local-first · Evidence-linked</a:t>
+            </a:r>
+          </a:p>
+        </p:txBody>
+      </p:sp>
+      <p:sp>
+        <p:nvSpPr>
+          <p:cNvPr id="17469" name="TextBox 17468"/>
+          <p:cNvSpPr txBox="1"/>
           <p:nvPr/>
         </p:nvSpPr>
         <p:spPr>
           <a:xfrm>
-            <a:off x="10506456" y="2779776"/>
-            <a:ext cx="164592" cy="146304"/>
-          </a:xfrm>
-          <a:prstGeom prst="downArrow">
+            <a:off x="384048" y="5687568"/>
+            <a:ext cx="11420856" cy="310896"/>
+          </a:xfrm>
+          <a:prstGeom prst="rect">
             <a:avLst/>
           </a:prstGeom>
-          <a:solidFill>
-            <a:srgbClr val="4A5A70"/>
-          </a:solidFill>
-          <a:ln>
-            <a:noFill/>
-          </a:ln>
-          <a:effectLst/>
-        </p:spPr>
-        <p:style>
-          <a:lnRef idx="1">
-            <a:schemeClr val="accent1"/>
-          </a:lnRef>
-          <a:fillRef idx="3">
-            <a:schemeClr val="accent1"/>
-          </a:fillRef>
-          <a:effectRef idx="2">
-            <a:schemeClr val="accent1"/>
-          </a:effectRef>
-          <a:fontRef idx="minor">
-            <a:schemeClr val="lt1"/>
-          </a:fontRef>
-        </p:style>
-        <p:txBody>
-          <a:bodyPr rtlCol="0" anchor="ctr"/>
-          <a:lstStyle/>
-          <a:p>
-            <a:pPr algn="ctr"/>
-          </a:p>
-        </p:txBody>
-      </p:sp>
-      <p:sp>
-        <p:nvSpPr>
-          <p:cNvPr id="17436" name="Rounded Rectangle 17435"/>
-          <p:cNvSpPr/>
-          <p:nvPr/>
-        </p:nvSpPr>
-        <p:spPr>
-          <a:xfrm>
-            <a:off x="9509760" y="2962656"/>
-            <a:ext cx="2157984" cy="457200"/>
-          </a:xfrm>
-          <a:prstGeom prst="roundRect">
-            <a:avLst/>
-          </a:prstGeom>
-          <a:solidFill>
-            <a:srgbClr val="EEF3F9"/>
-          </a:solidFill>
-          <a:ln w="9525">
-            <a:solidFill>
-              <a:srgbClr val="C2D4E6"/>
-            </a:solidFill>
-          </a:ln>
-          <a:effectLst/>
-        </p:spPr>
-        <p:style>
-          <a:lnRef idx="1">
-            <a:schemeClr val="accent1"/>
-          </a:lnRef>
-          <a:fillRef idx="3">
-            <a:schemeClr val="accent1"/>
-          </a:fillRef>
-          <a:effectRef idx="2">
-            <a:schemeClr val="accent1"/>
-          </a:effectRef>
-          <a:fontRef idx="minor">
-            <a:schemeClr val="lt1"/>
-          </a:fontRef>
-        </p:style>
-        <p:txBody>
-          <a:bodyPr rtlCol="0" anchor="ctr" wrap="square" tIns="54864" bIns="54864"/>
-          <a:lstStyle/>
-          <a:p>
-            <a:pPr algn="ctr">
-              <a:lnSpc>
-                <a:spcPct val="88000"/>
-              </a:lnSpc>
-              <a:spcAft>
-                <a:spcPts val="100"/>
-              </a:spcAft>
-              <a:buNone/>
-            </a:pPr>
-            <a:r>
-              <a:rPr sz="1050" b="1">
-                <a:solidFill>
-                  <a:srgbClr val="111B2A"/>
-                </a:solidFill>
-                <a:latin typeface="Calibri"/>
-              </a:rPr>
-              <a:t>React workspace</a:t>
-            </a:r>
-          </a:p>
-          <a:p>
-            <a:pPr algn="ctr">
-              <a:lnSpc>
-                <a:spcPct val="88000"/>
-              </a:lnSpc>
-              <a:spcAft>
-                <a:spcPts val="100"/>
-              </a:spcAft>
-              <a:buNone/>
-            </a:pPr>
-            <a:r>
-              <a:rPr sz="850" b="0">
+          <a:noFill/>
+        </p:spPr>
+        <p:txBody>
+          <a:bodyPr wrap="square">
+            <a:spAutoFit/>
+          </a:bodyPr>
+          <a:lstStyle/>
+          <a:p>
+            <a:pPr>
+              <a:lnSpc>
+                <a:spcPct val="100000"/>
+              </a:lnSpc>
+              <a:spcAft>
+                <a:spcPts val="300"/>
+              </a:spcAft>
+              <a:buNone/>
+            </a:pPr>
+            <a:r>
+              <a:rPr sz="950" b="0">
                 <a:solidFill>
                   <a:srgbClr val="4A5A70"/>
                 </a:solidFill>
                 <a:latin typeface="Calibri"/>
               </a:rPr>
-              <a:t>evidence-linked throughout</a:t>
-            </a:r>
-          </a:p>
-        </p:txBody>
-      </p:sp>
-      <p:sp>
-        <p:nvSpPr>
-          <p:cNvPr id="17437" name="Down Arrow 17436"/>
-          <p:cNvSpPr/>
-          <p:nvPr/>
-        </p:nvSpPr>
-        <p:spPr>
-          <a:xfrm>
-            <a:off x="10506456" y="3438144"/>
-            <a:ext cx="164592" cy="146304"/>
-          </a:xfrm>
-          <a:prstGeom prst="downArrow">
-            <a:avLst/>
-          </a:prstGeom>
-          <a:solidFill>
-            <a:srgbClr val="4A5A70"/>
-          </a:solidFill>
-          <a:ln>
-            <a:noFill/>
-          </a:ln>
-          <a:effectLst/>
-        </p:spPr>
-        <p:style>
-          <a:lnRef idx="1">
-            <a:schemeClr val="accent1"/>
-          </a:lnRef>
-          <a:fillRef idx="3">
-            <a:schemeClr val="accent1"/>
-          </a:fillRef>
-          <a:effectRef idx="2">
-            <a:schemeClr val="accent1"/>
-          </a:effectRef>
-          <a:fontRef idx="minor">
-            <a:schemeClr val="lt1"/>
-          </a:fontRef>
-        </p:style>
-        <p:txBody>
-          <a:bodyPr rtlCol="0" anchor="ctr"/>
-          <a:lstStyle/>
-          <a:p>
-            <a:pPr algn="ctr"/>
-          </a:p>
-        </p:txBody>
-      </p:sp>
-      <p:sp>
-        <p:nvSpPr>
-          <p:cNvPr id="17438" name="Rounded Rectangle 17437"/>
-          <p:cNvSpPr/>
-          <p:nvPr/>
-        </p:nvSpPr>
-        <p:spPr>
-          <a:xfrm>
-            <a:off x="9509760" y="3621024"/>
-            <a:ext cx="2157984" cy="457200"/>
-          </a:xfrm>
-          <a:prstGeom prst="roundRect">
-            <a:avLst/>
-          </a:prstGeom>
-          <a:solidFill>
-            <a:srgbClr val="EEF3F9"/>
-          </a:solidFill>
-          <a:ln w="9525">
-            <a:solidFill>
-              <a:srgbClr val="C2D4E6"/>
-            </a:solidFill>
-          </a:ln>
-          <a:effectLst/>
-        </p:spPr>
-        <p:style>
-          <a:lnRef idx="1">
-            <a:schemeClr val="accent1"/>
-          </a:lnRef>
-          <a:fillRef idx="3">
-            <a:schemeClr val="accent1"/>
-          </a:fillRef>
-          <a:effectRef idx="2">
-            <a:schemeClr val="accent1"/>
-          </a:effectRef>
-          <a:fontRef idx="minor">
-            <a:schemeClr val="lt1"/>
-          </a:fontRef>
-        </p:style>
-        <p:txBody>
-          <a:bodyPr rtlCol="0" anchor="ctr" wrap="square" tIns="54864" bIns="54864"/>
-          <a:lstStyle/>
-          <a:p>
-            <a:pPr algn="ctr">
-              <a:lnSpc>
-                <a:spcPct val="88000"/>
-              </a:lnSpc>
-              <a:spcAft>
-                <a:spcPts val="100"/>
-              </a:spcAft>
-              <a:buNone/>
-            </a:pPr>
-            <a:r>
-              <a:rPr sz="1050" b="1">
-                <a:solidFill>
-                  <a:srgbClr val="111B2A"/>
-                </a:solidFill>
-                <a:latin typeface="Calibri"/>
-              </a:rPr>
-              <a:t>JSON · HTML · PDF</a:t>
-            </a:r>
-          </a:p>
-          <a:p>
-            <a:pPr algn="ctr">
-              <a:lnSpc>
-                <a:spcPct val="88000"/>
-              </a:lnSpc>
-              <a:spcAft>
-                <a:spcPts val="100"/>
-              </a:spcAft>
-              <a:buNone/>
-            </a:pPr>
-            <a:r>
-              <a:rPr sz="850" b="0">
-                <a:solidFill>
-                  <a:srgbClr val="4A5A70"/>
-                </a:solidFill>
-                <a:latin typeface="Calibri"/>
-              </a:rPr>
-              <a:t>parity-tested</a:t>
-            </a:r>
-          </a:p>
-        </p:txBody>
-      </p:sp>
-      <p:sp>
-        <p:nvSpPr>
-          <p:cNvPr id="17439" name="Right Arrow 17438"/>
-          <p:cNvSpPr/>
-          <p:nvPr/>
-        </p:nvSpPr>
-        <p:spPr>
-          <a:xfrm>
-            <a:off x="2505456" y="1810512"/>
-            <a:ext cx="201168" cy="164592"/>
-          </a:xfrm>
-          <a:prstGeom prst="rightArrow">
-            <a:avLst/>
-          </a:prstGeom>
-          <a:solidFill>
-            <a:srgbClr val="4A5A70"/>
-          </a:solidFill>
-          <a:ln>
-            <a:noFill/>
-          </a:ln>
-          <a:effectLst/>
-        </p:spPr>
-        <p:style>
-          <a:lnRef idx="1">
-            <a:schemeClr val="accent1"/>
-          </a:lnRef>
-          <a:fillRef idx="3">
-            <a:schemeClr val="accent1"/>
-          </a:fillRef>
-          <a:effectRef idx="2">
-            <a:schemeClr val="accent1"/>
-          </a:effectRef>
-          <a:fontRef idx="minor">
-            <a:schemeClr val="lt1"/>
-          </a:fontRef>
-        </p:style>
-        <p:txBody>
-          <a:bodyPr rtlCol="0" anchor="ctr"/>
-          <a:lstStyle/>
-          <a:p>
-            <a:pPr algn="ctr"/>
-          </a:p>
-        </p:txBody>
-      </p:sp>
-      <p:sp>
-        <p:nvSpPr>
-          <p:cNvPr id="17440" name="Right Arrow 17439"/>
-          <p:cNvSpPr/>
-          <p:nvPr/>
-        </p:nvSpPr>
-        <p:spPr>
-          <a:xfrm>
-            <a:off x="5998464" y="1810512"/>
-            <a:ext cx="201168" cy="164592"/>
-          </a:xfrm>
-          <a:prstGeom prst="rightArrow">
-            <a:avLst/>
-          </a:prstGeom>
-          <a:solidFill>
-            <a:srgbClr val="4A5A70"/>
-          </a:solidFill>
-          <a:ln>
-            <a:noFill/>
-          </a:ln>
-          <a:effectLst/>
-        </p:spPr>
-        <p:style>
-          <a:lnRef idx="1">
-            <a:schemeClr val="accent1"/>
-          </a:lnRef>
-          <a:fillRef idx="3">
-            <a:schemeClr val="accent1"/>
-          </a:fillRef>
-          <a:effectRef idx="2">
-            <a:schemeClr val="accent1"/>
-          </a:effectRef>
-          <a:fontRef idx="minor">
-            <a:schemeClr val="lt1"/>
-          </a:fontRef>
-        </p:style>
-        <p:txBody>
-          <a:bodyPr rtlCol="0" anchor="ctr"/>
-          <a:lstStyle/>
-          <a:p>
-            <a:pPr algn="ctr"/>
-          </a:p>
-        </p:txBody>
-      </p:sp>
-      <p:sp>
-        <p:nvSpPr>
-          <p:cNvPr id="17441" name="Right Arrow 17440"/>
-          <p:cNvSpPr/>
-          <p:nvPr/>
-        </p:nvSpPr>
-        <p:spPr>
-          <a:xfrm>
-            <a:off x="9180576" y="1810512"/>
-            <a:ext cx="201168" cy="164592"/>
-          </a:xfrm>
-          <a:prstGeom prst="rightArrow">
-            <a:avLst/>
-          </a:prstGeom>
-          <a:solidFill>
-            <a:srgbClr val="4A5A70"/>
-          </a:solidFill>
-          <a:ln>
-            <a:noFill/>
-          </a:ln>
-          <a:effectLst/>
-        </p:spPr>
-        <p:style>
-          <a:lnRef idx="1">
-            <a:schemeClr val="accent1"/>
-          </a:lnRef>
-          <a:fillRef idx="3">
-            <a:schemeClr val="accent1"/>
-          </a:fillRef>
-          <a:effectRef idx="2">
-            <a:schemeClr val="accent1"/>
-          </a:effectRef>
-          <a:fontRef idx="minor">
-            <a:schemeClr val="lt1"/>
-          </a:fontRef>
-        </p:style>
-        <p:txBody>
-          <a:bodyPr rtlCol="0" anchor="ctr"/>
-          <a:lstStyle/>
-          <a:p>
-            <a:pPr algn="ctr"/>
-          </a:p>
-        </p:txBody>
-      </p:sp>
-      <p:sp>
-        <p:nvSpPr>
-          <p:cNvPr id="17442" name="Rounded Rectangle 17441"/>
-          <p:cNvSpPr/>
-          <p:nvPr/>
-        </p:nvSpPr>
-        <p:spPr>
-          <a:xfrm>
-            <a:off x="384048" y="4242816"/>
-            <a:ext cx="11430000" cy="786384"/>
-          </a:xfrm>
-          <a:prstGeom prst="roundRect">
-            <a:avLst/>
-          </a:prstGeom>
-          <a:solidFill>
-            <a:srgbClr val="F7FAFD"/>
-          </a:solidFill>
-          <a:ln w="9525">
-            <a:solidFill>
-              <a:srgbClr val="DCE6F2"/>
-            </a:solidFill>
-          </a:ln>
-          <a:effectLst/>
-        </p:spPr>
-        <p:style>
-          <a:lnRef idx="1">
-            <a:schemeClr val="accent1"/>
-          </a:lnRef>
-          <a:fillRef idx="3">
-            <a:schemeClr val="accent1"/>
-          </a:fillRef>
-          <a:effectRef idx="2">
-            <a:schemeClr val="accent1"/>
-          </a:effectRef>
-          <a:fontRef idx="minor">
-            <a:schemeClr val="lt1"/>
-          </a:fontRef>
-        </p:style>
-        <p:txBody>
-          <a:bodyPr rtlCol="0" anchor="t" wrap="square" lIns="73152" tIns="27432"/>
-          <a:lstStyle/>
-          <a:p>
-            <a:pPr algn="ctr">
-              <a:lnSpc>
-                <a:spcPct val="100000"/>
-              </a:lnSpc>
-              <a:spcAft>
-                <a:spcPts val="300"/>
-              </a:spcAft>
-              <a:buNone/>
-            </a:pPr>
-            <a:r>
-              <a:rPr sz="750" b="1">
-                <a:solidFill>
-                  <a:srgbClr val="8A9BB0"/>
-                </a:solidFill>
-                <a:latin typeface="Calibri"/>
-              </a:rPr>
-              <a:t>EVIDENCE RAIL — WHAT EVERY FINDING CARRIES</a:t>
-            </a:r>
-          </a:p>
-        </p:txBody>
-      </p:sp>
-      <p:sp>
-        <p:nvSpPr>
-          <p:cNvPr id="17443" name="Rounded Rectangle 17442"/>
-          <p:cNvSpPr/>
-          <p:nvPr/>
-        </p:nvSpPr>
-        <p:spPr>
-          <a:xfrm>
-            <a:off x="603504" y="4535424"/>
-            <a:ext cx="1645920" cy="384048"/>
-          </a:xfrm>
-          <a:prstGeom prst="roundRect">
-            <a:avLst/>
-          </a:prstGeom>
-          <a:solidFill>
-            <a:srgbClr val="FFFFFF"/>
-          </a:solidFill>
-          <a:ln w="9525">
-            <a:solidFill>
-              <a:srgbClr val="C2D4E6"/>
-            </a:solidFill>
-          </a:ln>
-          <a:effectLst/>
-        </p:spPr>
-        <p:style>
-          <a:lnRef idx="1">
-            <a:schemeClr val="accent1"/>
-          </a:lnRef>
-          <a:fillRef idx="3">
-            <a:schemeClr val="accent1"/>
-          </a:fillRef>
-          <a:effectRef idx="2">
-            <a:schemeClr val="accent1"/>
-          </a:effectRef>
-          <a:fontRef idx="minor">
-            <a:schemeClr val="lt1"/>
-          </a:fontRef>
-        </p:style>
-        <p:txBody>
-          <a:bodyPr rtlCol="0" anchor="ctr" wrap="square" tIns="54864" bIns="54864"/>
-          <a:lstStyle/>
-          <a:p>
-            <a:pPr algn="ctr">
-              <a:lnSpc>
-                <a:spcPct val="88000"/>
-              </a:lnSpc>
-              <a:spcAft>
-                <a:spcPts val="100"/>
-              </a:spcAft>
-              <a:buNone/>
-            </a:pPr>
-            <a:r>
-              <a:rPr sz="1050" b="1">
-                <a:solidFill>
-                  <a:srgbClr val="0B5FA5"/>
-                </a:solidFill>
-                <a:latin typeface="Calibri"/>
-              </a:rPr>
-              <a:t>PACKET</a:t>
-            </a:r>
-          </a:p>
-        </p:txBody>
-      </p:sp>
-      <p:sp>
-        <p:nvSpPr>
-          <p:cNvPr id="17444" name="Right Arrow 17443"/>
-          <p:cNvSpPr/>
-          <p:nvPr/>
-        </p:nvSpPr>
-        <p:spPr>
-          <a:xfrm>
-            <a:off x="2276856" y="4663440"/>
-            <a:ext cx="164592" cy="164592"/>
-          </a:xfrm>
-          <a:prstGeom prst="rightArrow">
-            <a:avLst/>
-          </a:prstGeom>
-          <a:solidFill>
-            <a:srgbClr val="4A5A70"/>
-          </a:solidFill>
-          <a:ln>
-            <a:noFill/>
-          </a:ln>
-          <a:effectLst/>
-        </p:spPr>
-        <p:style>
-          <a:lnRef idx="1">
-            <a:schemeClr val="accent1"/>
-          </a:lnRef>
-          <a:fillRef idx="3">
-            <a:schemeClr val="accent1"/>
-          </a:fillRef>
-          <a:effectRef idx="2">
-            <a:schemeClr val="accent1"/>
-          </a:effectRef>
-          <a:fontRef idx="minor">
-            <a:schemeClr val="lt1"/>
-          </a:fontRef>
-        </p:style>
-        <p:txBody>
-          <a:bodyPr rtlCol="0" anchor="ctr"/>
-          <a:lstStyle/>
-          <a:p>
-            <a:pPr algn="ctr"/>
-          </a:p>
-        </p:txBody>
-      </p:sp>
-      <p:sp>
-        <p:nvSpPr>
-          <p:cNvPr id="17445" name="Rounded Rectangle 17444"/>
-          <p:cNvSpPr/>
-          <p:nvPr/>
-        </p:nvSpPr>
-        <p:spPr>
-          <a:xfrm>
-            <a:off x="2487168" y="4535424"/>
-            <a:ext cx="1645920" cy="384048"/>
-          </a:xfrm>
-          <a:prstGeom prst="roundRect">
-            <a:avLst/>
-          </a:prstGeom>
-          <a:solidFill>
-            <a:srgbClr val="FFFFFF"/>
-          </a:solidFill>
-          <a:ln w="9525">
-            <a:solidFill>
-              <a:srgbClr val="C2D4E6"/>
-            </a:solidFill>
-          </a:ln>
-          <a:effectLst/>
-        </p:spPr>
-        <p:style>
-          <a:lnRef idx="1">
-            <a:schemeClr val="accent1"/>
-          </a:lnRef>
-          <a:fillRef idx="3">
-            <a:schemeClr val="accent1"/>
-          </a:fillRef>
-          <a:effectRef idx="2">
-            <a:schemeClr val="accent1"/>
-          </a:effectRef>
-          <a:fontRef idx="minor">
-            <a:schemeClr val="lt1"/>
-          </a:fontRef>
-        </p:style>
-        <p:txBody>
-          <a:bodyPr rtlCol="0" anchor="ctr" wrap="square" tIns="54864" bIns="54864"/>
-          <a:lstStyle/>
-          <a:p>
-            <a:pPr algn="ctr">
-              <a:lnSpc>
-                <a:spcPct val="88000"/>
-              </a:lnSpc>
-              <a:spcAft>
-                <a:spcPts val="100"/>
-              </a:spcAft>
-              <a:buNone/>
-            </a:pPr>
-            <a:r>
-              <a:rPr sz="1050" b="1">
-                <a:solidFill>
-                  <a:srgbClr val="0B5FA5"/>
-                </a:solidFill>
-                <a:latin typeface="Calibri"/>
-              </a:rPr>
-              <a:t>OBSERVATION</a:t>
-            </a:r>
-          </a:p>
-        </p:txBody>
-      </p:sp>
-      <p:sp>
-        <p:nvSpPr>
-          <p:cNvPr id="17446" name="Right Arrow 17445"/>
-          <p:cNvSpPr/>
-          <p:nvPr/>
-        </p:nvSpPr>
-        <p:spPr>
-          <a:xfrm>
-            <a:off x="4160520" y="4663440"/>
-            <a:ext cx="164592" cy="164592"/>
-          </a:xfrm>
-          <a:prstGeom prst="rightArrow">
-            <a:avLst/>
-          </a:prstGeom>
-          <a:solidFill>
-            <a:srgbClr val="4A5A70"/>
-          </a:solidFill>
-          <a:ln>
-            <a:noFill/>
-          </a:ln>
-          <a:effectLst/>
-        </p:spPr>
-        <p:style>
-          <a:lnRef idx="1">
-            <a:schemeClr val="accent1"/>
-          </a:lnRef>
-          <a:fillRef idx="3">
-            <a:schemeClr val="accent1"/>
-          </a:fillRef>
-          <a:effectRef idx="2">
-            <a:schemeClr val="accent1"/>
-          </a:effectRef>
-          <a:fontRef idx="minor">
-            <a:schemeClr val="lt1"/>
-          </a:fontRef>
-        </p:style>
-        <p:txBody>
-          <a:bodyPr rtlCol="0" anchor="ctr"/>
-          <a:lstStyle/>
-          <a:p>
-            <a:pPr algn="ctr"/>
-          </a:p>
-        </p:txBody>
-      </p:sp>
-      <p:sp>
-        <p:nvSpPr>
-          <p:cNvPr id="17447" name="Rounded Rectangle 17446"/>
-          <p:cNvSpPr/>
-          <p:nvPr/>
-        </p:nvSpPr>
-        <p:spPr>
-          <a:xfrm>
-            <a:off x="4370831" y="4535424"/>
-            <a:ext cx="1645920" cy="384048"/>
-          </a:xfrm>
-          <a:prstGeom prst="roundRect">
-            <a:avLst/>
-          </a:prstGeom>
-          <a:solidFill>
-            <a:srgbClr val="FFFFFF"/>
-          </a:solidFill>
-          <a:ln w="9525">
-            <a:solidFill>
-              <a:srgbClr val="C2D4E6"/>
-            </a:solidFill>
-          </a:ln>
-          <a:effectLst/>
-        </p:spPr>
-        <p:style>
-          <a:lnRef idx="1">
-            <a:schemeClr val="accent1"/>
-          </a:lnRef>
-          <a:fillRef idx="3">
-            <a:schemeClr val="accent1"/>
-          </a:fillRef>
-          <a:effectRef idx="2">
-            <a:schemeClr val="accent1"/>
-          </a:effectRef>
-          <a:fontRef idx="minor">
-            <a:schemeClr val="lt1"/>
-          </a:fontRef>
-        </p:style>
-        <p:txBody>
-          <a:bodyPr rtlCol="0" anchor="ctr" wrap="square" tIns="54864" bIns="54864"/>
-          <a:lstStyle/>
-          <a:p>
-            <a:pPr algn="ctr">
-              <a:lnSpc>
-                <a:spcPct val="88000"/>
-              </a:lnSpc>
-              <a:spcAft>
-                <a:spcPts val="100"/>
-              </a:spcAft>
-              <a:buNone/>
-            </a:pPr>
-            <a:r>
-              <a:rPr sz="1050" b="1">
-                <a:solidFill>
-                  <a:srgbClr val="0B5FA5"/>
-                </a:solidFill>
-                <a:latin typeface="Calibri"/>
-              </a:rPr>
-              <a:t>CRYPTO FACT</a:t>
-            </a:r>
-          </a:p>
-        </p:txBody>
-      </p:sp>
-      <p:sp>
-        <p:nvSpPr>
-          <p:cNvPr id="17448" name="Right Arrow 17447"/>
-          <p:cNvSpPr/>
-          <p:nvPr/>
-        </p:nvSpPr>
-        <p:spPr>
-          <a:xfrm>
-            <a:off x="6044183" y="4663440"/>
-            <a:ext cx="164592" cy="164592"/>
-          </a:xfrm>
-          <a:prstGeom prst="rightArrow">
-            <a:avLst/>
-          </a:prstGeom>
-          <a:solidFill>
-            <a:srgbClr val="4A5A70"/>
-          </a:solidFill>
-          <a:ln>
-            <a:noFill/>
-          </a:ln>
-          <a:effectLst/>
-        </p:spPr>
-        <p:style>
-          <a:lnRef idx="1">
-            <a:schemeClr val="accent1"/>
-          </a:lnRef>
-          <a:fillRef idx="3">
-            <a:schemeClr val="accent1"/>
-          </a:fillRef>
-          <a:effectRef idx="2">
-            <a:schemeClr val="accent1"/>
-          </a:effectRef>
-          <a:fontRef idx="minor">
-            <a:schemeClr val="lt1"/>
-          </a:fontRef>
-        </p:style>
-        <p:txBody>
-          <a:bodyPr rtlCol="0" anchor="ctr"/>
-          <a:lstStyle/>
-          <a:p>
-            <a:pPr algn="ctr"/>
-          </a:p>
-        </p:txBody>
-      </p:sp>
-      <p:sp>
-        <p:nvSpPr>
-          <p:cNvPr id="17449" name="Rounded Rectangle 17448"/>
-          <p:cNvSpPr/>
-          <p:nvPr/>
-        </p:nvSpPr>
-        <p:spPr>
-          <a:xfrm>
-            <a:off x="6254495" y="4535424"/>
-            <a:ext cx="1645920" cy="384048"/>
-          </a:xfrm>
-          <a:prstGeom prst="roundRect">
-            <a:avLst/>
-          </a:prstGeom>
-          <a:solidFill>
-            <a:srgbClr val="FFFFFF"/>
-          </a:solidFill>
-          <a:ln w="9525">
-            <a:solidFill>
-              <a:srgbClr val="C2D4E6"/>
-            </a:solidFill>
-          </a:ln>
-          <a:effectLst/>
-        </p:spPr>
-        <p:style>
-          <a:lnRef idx="1">
-            <a:schemeClr val="accent1"/>
-          </a:lnRef>
-          <a:fillRef idx="3">
-            <a:schemeClr val="accent1"/>
-          </a:fillRef>
-          <a:effectRef idx="2">
-            <a:schemeClr val="accent1"/>
-          </a:effectRef>
-          <a:fontRef idx="minor">
-            <a:schemeClr val="lt1"/>
-          </a:fontRef>
-        </p:style>
-        <p:txBody>
-          <a:bodyPr rtlCol="0" anchor="ctr" wrap="square" tIns="54864" bIns="54864"/>
-          <a:lstStyle/>
-          <a:p>
-            <a:pPr algn="ctr">
-              <a:lnSpc>
-                <a:spcPct val="88000"/>
-              </a:lnSpc>
-              <a:spcAft>
-                <a:spcPts val="100"/>
-              </a:spcAft>
-              <a:buNone/>
-            </a:pPr>
-            <a:r>
-              <a:rPr sz="1050" b="1">
-                <a:solidFill>
-                  <a:srgbClr val="0B5FA5"/>
-                </a:solidFill>
-                <a:latin typeface="Calibri"/>
-              </a:rPr>
-              <a:t>RULE</a:t>
-            </a:r>
-          </a:p>
-        </p:txBody>
-      </p:sp>
-      <p:sp>
-        <p:nvSpPr>
-          <p:cNvPr id="17450" name="Right Arrow 17449"/>
-          <p:cNvSpPr/>
-          <p:nvPr/>
-        </p:nvSpPr>
-        <p:spPr>
-          <a:xfrm>
-            <a:off x="7927847" y="4663440"/>
-            <a:ext cx="164592" cy="164592"/>
-          </a:xfrm>
-          <a:prstGeom prst="rightArrow">
-            <a:avLst/>
-          </a:prstGeom>
-          <a:solidFill>
-            <a:srgbClr val="4A5A70"/>
-          </a:solidFill>
-          <a:ln>
-            <a:noFill/>
-          </a:ln>
-          <a:effectLst/>
-        </p:spPr>
-        <p:style>
-          <a:lnRef idx="1">
-            <a:schemeClr val="accent1"/>
-          </a:lnRef>
-          <a:fillRef idx="3">
-            <a:schemeClr val="accent1"/>
-          </a:fillRef>
-          <a:effectRef idx="2">
-            <a:schemeClr val="accent1"/>
-          </a:effectRef>
-          <a:fontRef idx="minor">
-            <a:schemeClr val="lt1"/>
-          </a:fontRef>
-        </p:style>
-        <p:txBody>
-          <a:bodyPr rtlCol="0" anchor="ctr"/>
-          <a:lstStyle/>
-          <a:p>
-            <a:pPr algn="ctr"/>
-          </a:p>
-        </p:txBody>
-      </p:sp>
-      <p:sp>
-        <p:nvSpPr>
-          <p:cNvPr id="17451" name="Rounded Rectangle 17450"/>
-          <p:cNvSpPr/>
-          <p:nvPr/>
-        </p:nvSpPr>
-        <p:spPr>
-          <a:xfrm>
-            <a:off x="8138159" y="4535424"/>
-            <a:ext cx="1645920" cy="384048"/>
-          </a:xfrm>
-          <a:prstGeom prst="roundRect">
-            <a:avLst/>
-          </a:prstGeom>
-          <a:solidFill>
-            <a:srgbClr val="FFFFFF"/>
-          </a:solidFill>
-          <a:ln w="9525">
-            <a:solidFill>
-              <a:srgbClr val="C2D4E6"/>
-            </a:solidFill>
-          </a:ln>
-          <a:effectLst/>
-        </p:spPr>
-        <p:style>
-          <a:lnRef idx="1">
-            <a:schemeClr val="accent1"/>
-          </a:lnRef>
-          <a:fillRef idx="3">
-            <a:schemeClr val="accent1"/>
-          </a:fillRef>
-          <a:effectRef idx="2">
-            <a:schemeClr val="accent1"/>
-          </a:effectRef>
-          <a:fontRef idx="minor">
-            <a:schemeClr val="lt1"/>
-          </a:fontRef>
-        </p:style>
-        <p:txBody>
-          <a:bodyPr rtlCol="0" anchor="ctr" wrap="square" tIns="54864" bIns="54864"/>
-          <a:lstStyle/>
-          <a:p>
-            <a:pPr algn="ctr">
-              <a:lnSpc>
-                <a:spcPct val="88000"/>
-              </a:lnSpc>
-              <a:spcAft>
-                <a:spcPts val="100"/>
-              </a:spcAft>
-              <a:buNone/>
-            </a:pPr>
-            <a:r>
-              <a:rPr sz="1050" b="1">
-                <a:solidFill>
-                  <a:srgbClr val="0B5FA5"/>
-                </a:solidFill>
-                <a:latin typeface="Calibri"/>
-              </a:rPr>
-              <a:t>FINDING</a:t>
-            </a:r>
-          </a:p>
-        </p:txBody>
-      </p:sp>
-      <p:sp>
-        <p:nvSpPr>
-          <p:cNvPr id="17452" name="Right Arrow 17451"/>
-          <p:cNvSpPr/>
-          <p:nvPr/>
-        </p:nvSpPr>
-        <p:spPr>
-          <a:xfrm>
-            <a:off x="9811511" y="4663440"/>
-            <a:ext cx="164592" cy="164592"/>
-          </a:xfrm>
-          <a:prstGeom prst="rightArrow">
-            <a:avLst/>
-          </a:prstGeom>
-          <a:solidFill>
-            <a:srgbClr val="4A5A70"/>
-          </a:solidFill>
-          <a:ln>
-            <a:noFill/>
-          </a:ln>
-          <a:effectLst/>
-        </p:spPr>
-        <p:style>
-          <a:lnRef idx="1">
-            <a:schemeClr val="accent1"/>
-          </a:lnRef>
-          <a:fillRef idx="3">
-            <a:schemeClr val="accent1"/>
-          </a:fillRef>
-          <a:effectRef idx="2">
-            <a:schemeClr val="accent1"/>
-          </a:effectRef>
-          <a:fontRef idx="minor">
-            <a:schemeClr val="lt1"/>
-          </a:fontRef>
-        </p:style>
-        <p:txBody>
-          <a:bodyPr rtlCol="0" anchor="ctr"/>
-          <a:lstStyle/>
-          <a:p>
-            <a:pPr algn="ctr"/>
-          </a:p>
-        </p:txBody>
-      </p:sp>
-      <p:sp>
-        <p:nvSpPr>
-          <p:cNvPr id="17453" name="Rounded Rectangle 17452"/>
-          <p:cNvSpPr/>
-          <p:nvPr/>
-        </p:nvSpPr>
-        <p:spPr>
-          <a:xfrm>
-            <a:off x="10021824" y="4535424"/>
-            <a:ext cx="1645920" cy="384048"/>
-          </a:xfrm>
-          <a:prstGeom prst="roundRect">
-            <a:avLst/>
-          </a:prstGeom>
-          <a:solidFill>
-            <a:srgbClr val="FFFFFF"/>
-          </a:solidFill>
-          <a:ln w="9525">
-            <a:solidFill>
-              <a:srgbClr val="C2D4E6"/>
-            </a:solidFill>
-          </a:ln>
-          <a:effectLst/>
-        </p:spPr>
-        <p:style>
-          <a:lnRef idx="1">
-            <a:schemeClr val="accent1"/>
-          </a:lnRef>
-          <a:fillRef idx="3">
-            <a:schemeClr val="accent1"/>
-          </a:fillRef>
-          <a:effectRef idx="2">
-            <a:schemeClr val="accent1"/>
-          </a:effectRef>
-          <a:fontRef idx="minor">
-            <a:schemeClr val="lt1"/>
-          </a:fontRef>
-        </p:style>
-        <p:txBody>
-          <a:bodyPr rtlCol="0" anchor="ctr" wrap="square" tIns="54864" bIns="54864"/>
-          <a:lstStyle/>
-          <a:p>
-            <a:pPr algn="ctr">
-              <a:lnSpc>
-                <a:spcPct val="88000"/>
-              </a:lnSpc>
-              <a:spcAft>
-                <a:spcPts val="100"/>
-              </a:spcAft>
-              <a:buNone/>
-            </a:pPr>
-            <a:r>
-              <a:rPr sz="1050" b="1">
-                <a:solidFill>
-                  <a:srgbClr val="0B5FA5"/>
-                </a:solidFill>
-                <a:latin typeface="Calibri"/>
-              </a:rPr>
-              <a:t>REMEDIATION</a:t>
-            </a:r>
-          </a:p>
-        </p:txBody>
-      </p:sp>
-      <p:sp>
-        <p:nvSpPr>
-          <p:cNvPr id="17454" name="Rounded Rectangle 17453"/>
-          <p:cNvSpPr/>
-          <p:nvPr/>
-        </p:nvSpPr>
-        <p:spPr>
-          <a:xfrm>
-            <a:off x="384048" y="5175504"/>
-            <a:ext cx="2103120" cy="676656"/>
-          </a:xfrm>
-          <a:prstGeom prst="roundRect">
-            <a:avLst/>
-          </a:prstGeom>
-          <a:solidFill>
-            <a:srgbClr val="EEF3F9"/>
-          </a:solidFill>
-          <a:ln w="9525">
-            <a:solidFill>
-              <a:srgbClr val="C2D4E6"/>
-            </a:solidFill>
-          </a:ln>
-          <a:effectLst/>
-        </p:spPr>
-        <p:style>
-          <a:lnRef idx="1">
-            <a:schemeClr val="accent1"/>
-          </a:lnRef>
-          <a:fillRef idx="3">
-            <a:schemeClr val="accent1"/>
-          </a:fillRef>
-          <a:effectRef idx="2">
-            <a:schemeClr val="accent1"/>
-          </a:effectRef>
-          <a:fontRef idx="minor">
-            <a:schemeClr val="lt1"/>
-          </a:fontRef>
-        </p:style>
-        <p:txBody>
-          <a:bodyPr rtlCol="0" anchor="t" wrap="square" tIns="54864" bIns="54864"/>
-          <a:lstStyle/>
-          <a:p>
-            <a:pPr algn="ctr">
-              <a:lnSpc>
-                <a:spcPct val="94000"/>
-              </a:lnSpc>
-              <a:spcAft>
-                <a:spcPts val="300"/>
-              </a:spcAft>
-              <a:buNone/>
-            </a:pPr>
-            <a:r>
-              <a:rPr sz="1050" b="1">
-                <a:solidFill>
-                  <a:srgbClr val="0B5FA5"/>
-                </a:solidFill>
-                <a:latin typeface="Calibri"/>
-              </a:rPr>
-              <a:t>ENGINE</a:t>
-            </a:r>
-          </a:p>
-          <a:p>
-            <a:pPr>
-              <a:lnSpc>
-                <a:spcPct val="94000"/>
-              </a:lnSpc>
-              <a:spcAft>
-                <a:spcPts val="300"/>
-              </a:spcAft>
-              <a:buNone/>
-            </a:pPr>
-            <a:r>
-              <a:rPr sz="950" b="0">
-                <a:solidFill>
-                  <a:srgbClr val="1F2C3F"/>
-                </a:solidFill>
-                <a:latin typeface="Calibri"/>
-              </a:rPr>
-              <a:t>Python · Scapy · cryptography</a:t>
-            </a:r>
-          </a:p>
-        </p:txBody>
-      </p:sp>
-      <p:sp>
-        <p:nvSpPr>
-          <p:cNvPr id="17455" name="Rounded Rectangle 17454"/>
-          <p:cNvSpPr/>
-          <p:nvPr/>
-        </p:nvSpPr>
-        <p:spPr>
-          <a:xfrm>
-            <a:off x="2578608" y="5175504"/>
-            <a:ext cx="2103120" cy="676656"/>
-          </a:xfrm>
-          <a:prstGeom prst="roundRect">
-            <a:avLst/>
-          </a:prstGeom>
-          <a:solidFill>
-            <a:srgbClr val="EEF3F9"/>
-          </a:solidFill>
-          <a:ln w="9525">
-            <a:solidFill>
-              <a:srgbClr val="C2D4E6"/>
-            </a:solidFill>
-          </a:ln>
-          <a:effectLst/>
-        </p:spPr>
-        <p:style>
-          <a:lnRef idx="1">
-            <a:schemeClr val="accent1"/>
-          </a:lnRef>
-          <a:fillRef idx="3">
-            <a:schemeClr val="accent1"/>
-          </a:fillRef>
-          <a:effectRef idx="2">
-            <a:schemeClr val="accent1"/>
-          </a:effectRef>
-          <a:fontRef idx="minor">
-            <a:schemeClr val="lt1"/>
-          </a:fontRef>
-        </p:style>
-        <p:txBody>
-          <a:bodyPr rtlCol="0" anchor="t" wrap="square" tIns="54864" bIns="54864"/>
-          <a:lstStyle/>
-          <a:p>
-            <a:pPr algn="ctr">
-              <a:lnSpc>
-                <a:spcPct val="94000"/>
-              </a:lnSpc>
-              <a:spcAft>
-                <a:spcPts val="300"/>
-              </a:spcAft>
-              <a:buNone/>
-            </a:pPr>
-            <a:r>
-              <a:rPr sz="1050" b="1">
-                <a:solidFill>
-                  <a:srgbClr val="0B5FA5"/>
-                </a:solidFill>
-                <a:latin typeface="Calibri"/>
-              </a:rPr>
-              <a:t>APPLICATION</a:t>
-            </a:r>
-          </a:p>
-          <a:p>
-            <a:pPr>
-              <a:lnSpc>
-                <a:spcPct val="94000"/>
-              </a:lnSpc>
-              <a:spcAft>
-                <a:spcPts val="300"/>
-              </a:spcAft>
-              <a:buNone/>
-            </a:pPr>
-            <a:r>
-              <a:rPr sz="950" b="0">
-                <a:solidFill>
-                  <a:srgbClr val="1F2C3F"/>
-                </a:solidFill>
-                <a:latin typeface="Calibri"/>
-              </a:rPr>
-              <a:t>FastAPI · SQLite · React · TypeScript</a:t>
-            </a:r>
-          </a:p>
-        </p:txBody>
-      </p:sp>
-      <p:sp>
-        <p:nvSpPr>
-          <p:cNvPr id="17456" name="Rounded Rectangle 17455"/>
-          <p:cNvSpPr/>
-          <p:nvPr/>
-        </p:nvSpPr>
-        <p:spPr>
-          <a:xfrm>
-            <a:off x="4773168" y="5175504"/>
-            <a:ext cx="2103120" cy="676656"/>
-          </a:xfrm>
-          <a:prstGeom prst="roundRect">
-            <a:avLst/>
-          </a:prstGeom>
-          <a:solidFill>
-            <a:srgbClr val="EEF3F9"/>
-          </a:solidFill>
-          <a:ln w="9525">
-            <a:solidFill>
-              <a:srgbClr val="C2D4E6"/>
-            </a:solidFill>
-          </a:ln>
-          <a:effectLst/>
-        </p:spPr>
-        <p:style>
-          <a:lnRef idx="1">
-            <a:schemeClr val="accent1"/>
-          </a:lnRef>
-          <a:fillRef idx="3">
-            <a:schemeClr val="accent1"/>
-          </a:fillRef>
-          <a:effectRef idx="2">
-            <a:schemeClr val="accent1"/>
-          </a:effectRef>
-          <a:fontRef idx="minor">
-            <a:schemeClr val="lt1"/>
-          </a:fontRef>
-        </p:style>
-        <p:txBody>
-          <a:bodyPr rtlCol="0" anchor="t" wrap="square" tIns="54864" bIns="54864"/>
-          <a:lstStyle/>
-          <a:p>
-            <a:pPr algn="ctr">
-              <a:lnSpc>
-                <a:spcPct val="94000"/>
-              </a:lnSpc>
-              <a:spcAft>
-                <a:spcPts val="300"/>
-              </a:spcAft>
-              <a:buNone/>
-            </a:pPr>
-            <a:r>
-              <a:rPr sz="1050" b="1">
-                <a:solidFill>
-                  <a:srgbClr val="0B5FA5"/>
-                </a:solidFill>
-                <a:latin typeface="Calibri"/>
-              </a:rPr>
-              <a:t>ANALYTICS</a:t>
-            </a:r>
-          </a:p>
-          <a:p>
-            <a:pPr>
-              <a:lnSpc>
-                <a:spcPct val="94000"/>
-              </a:lnSpc>
-              <a:spcAft>
-                <a:spcPts val="300"/>
-              </a:spcAft>
-              <a:buNone/>
-            </a:pPr>
-            <a:r>
-              <a:rPr sz="950" b="0">
-                <a:solidFill>
-                  <a:srgbClr val="1F2C3F"/>
-                </a:solidFill>
-                <a:latin typeface="Calibri"/>
-              </a:rPr>
-              <a:t>scikit-learn</a:t>
-            </a:r>
-          </a:p>
-        </p:txBody>
-      </p:sp>
-      <p:sp>
-        <p:nvSpPr>
-          <p:cNvPr id="17457" name="Rounded Rectangle 17456"/>
-          <p:cNvSpPr/>
-          <p:nvPr/>
-        </p:nvSpPr>
-        <p:spPr>
-          <a:xfrm>
-            <a:off x="6967727" y="5175504"/>
-            <a:ext cx="2103120" cy="676656"/>
-          </a:xfrm>
-          <a:prstGeom prst="roundRect">
-            <a:avLst/>
-          </a:prstGeom>
-          <a:solidFill>
-            <a:srgbClr val="EEF3F9"/>
-          </a:solidFill>
-          <a:ln w="9525">
-            <a:solidFill>
-              <a:srgbClr val="C2D4E6"/>
-            </a:solidFill>
-          </a:ln>
-          <a:effectLst/>
-        </p:spPr>
-        <p:style>
-          <a:lnRef idx="1">
-            <a:schemeClr val="accent1"/>
-          </a:lnRef>
-          <a:fillRef idx="3">
-            <a:schemeClr val="accent1"/>
-          </a:fillRef>
-          <a:effectRef idx="2">
-            <a:schemeClr val="accent1"/>
-          </a:effectRef>
-          <a:fontRef idx="minor">
-            <a:schemeClr val="lt1"/>
-          </a:fontRef>
-        </p:style>
-        <p:txBody>
-          <a:bodyPr rtlCol="0" anchor="t" wrap="square" tIns="54864" bIns="54864"/>
-          <a:lstStyle/>
-          <a:p>
-            <a:pPr algn="ctr">
-              <a:lnSpc>
-                <a:spcPct val="94000"/>
-              </a:lnSpc>
-              <a:spcAft>
-                <a:spcPts val="300"/>
-              </a:spcAft>
-              <a:buNone/>
-            </a:pPr>
-            <a:r>
-              <a:rPr sz="1050" b="1">
-                <a:solidFill>
-                  <a:srgbClr val="0B5FA5"/>
-                </a:solidFill>
-                <a:latin typeface="Calibri"/>
-              </a:rPr>
-              <a:t>VALIDATION</a:t>
-            </a:r>
-          </a:p>
-          <a:p>
-            <a:pPr>
-              <a:lnSpc>
-                <a:spcPct val="94000"/>
-              </a:lnSpc>
-              <a:spcAft>
-                <a:spcPts val="300"/>
-              </a:spcAft>
-              <a:buNone/>
-            </a:pPr>
-            <a:r>
-              <a:rPr sz="950" b="0">
-                <a:solidFill>
-                  <a:srgbClr val="1F2C3F"/>
-                </a:solidFill>
-                <a:latin typeface="Calibri"/>
-              </a:rPr>
-              <a:t>pytest · Playwright · TShark</a:t>
-            </a:r>
-          </a:p>
-        </p:txBody>
-      </p:sp>
-      <p:sp>
-        <p:nvSpPr>
-          <p:cNvPr id="17458" name="Rounded Rectangle 17457"/>
-          <p:cNvSpPr/>
-          <p:nvPr/>
-        </p:nvSpPr>
-        <p:spPr>
-          <a:xfrm>
-            <a:off x="9162288" y="5175504"/>
-            <a:ext cx="932688" cy="676656"/>
-          </a:xfrm>
-          <a:prstGeom prst="roundRect">
-            <a:avLst/>
-          </a:prstGeom>
-          <a:solidFill>
-            <a:srgbClr val="FFFFFF"/>
-          </a:solidFill>
-          <a:ln w="9525">
-            <a:solidFill>
-              <a:srgbClr val="C2D4E6"/>
-            </a:solidFill>
-          </a:ln>
-          <a:effectLst/>
-        </p:spPr>
-        <p:style>
-          <a:lnRef idx="1">
-            <a:schemeClr val="accent1"/>
-          </a:lnRef>
-          <a:fillRef idx="3">
-            <a:schemeClr val="accent1"/>
-          </a:fillRef>
-          <a:effectRef idx="2">
-            <a:schemeClr val="accent1"/>
-          </a:effectRef>
-          <a:fontRef idx="minor">
-            <a:schemeClr val="lt1"/>
-          </a:fontRef>
-        </p:style>
-        <p:txBody>
-          <a:bodyPr rtlCol="0" anchor="ctr" wrap="square" tIns="54864" bIns="54864"/>
-          <a:lstStyle/>
-          <a:p>
-            <a:pPr algn="ctr">
-              <a:lnSpc>
-                <a:spcPct val="88000"/>
-              </a:lnSpc>
-              <a:spcAft>
-                <a:spcPts val="100"/>
-              </a:spcAft>
-              <a:buNone/>
-            </a:pPr>
-            <a:r>
-              <a:rPr sz="900" b="1">
-                <a:solidFill>
-                  <a:srgbClr val="1B6B3A"/>
-                </a:solidFill>
-                <a:latin typeface="Calibri"/>
-              </a:rPr>
-              <a:t>PASSIVE</a:t>
-            </a:r>
-          </a:p>
-        </p:txBody>
-      </p:sp>
-      <p:sp>
-        <p:nvSpPr>
-          <p:cNvPr id="17459" name="Rounded Rectangle 17458"/>
-          <p:cNvSpPr/>
-          <p:nvPr/>
-        </p:nvSpPr>
-        <p:spPr>
-          <a:xfrm>
-            <a:off x="10149840" y="5175504"/>
-            <a:ext cx="932688" cy="676656"/>
-          </a:xfrm>
-          <a:prstGeom prst="roundRect">
-            <a:avLst/>
-          </a:prstGeom>
-          <a:solidFill>
-            <a:srgbClr val="FFFFFF"/>
-          </a:solidFill>
-          <a:ln w="9525">
-            <a:solidFill>
-              <a:srgbClr val="C2D4E6"/>
-            </a:solidFill>
-          </a:ln>
-          <a:effectLst/>
-        </p:spPr>
-        <p:style>
-          <a:lnRef idx="1">
-            <a:schemeClr val="accent1"/>
-          </a:lnRef>
-          <a:fillRef idx="3">
-            <a:schemeClr val="accent1"/>
-          </a:fillRef>
-          <a:effectRef idx="2">
-            <a:schemeClr val="accent1"/>
-          </a:effectRef>
-          <a:fontRef idx="minor">
-            <a:schemeClr val="lt1"/>
-          </a:fontRef>
-        </p:style>
-        <p:txBody>
-          <a:bodyPr rtlCol="0" anchor="ctr" wrap="square" tIns="54864" bIns="54864"/>
-          <a:lstStyle/>
-          <a:p>
-            <a:pPr algn="ctr">
-              <a:lnSpc>
-                <a:spcPct val="88000"/>
-              </a:lnSpc>
-              <a:spcAft>
-                <a:spcPts val="100"/>
-              </a:spcAft>
-              <a:buNone/>
-            </a:pPr>
-            <a:r>
-              <a:rPr sz="900" b="1">
-                <a:solidFill>
-                  <a:srgbClr val="0B5FA5"/>
-                </a:solidFill>
-                <a:latin typeface="Calibri"/>
-              </a:rPr>
-              <a:t>LOCAL-FIRST</a:t>
-            </a:r>
-          </a:p>
-        </p:txBody>
-      </p:sp>
-      <p:sp>
-        <p:nvSpPr>
-          <p:cNvPr id="17460" name="Rounded Rectangle 17459"/>
-          <p:cNvSpPr/>
-          <p:nvPr/>
-        </p:nvSpPr>
-        <p:spPr>
-          <a:xfrm>
-            <a:off x="11137392" y="5175504"/>
-            <a:ext cx="932688" cy="676656"/>
-          </a:xfrm>
-          <a:prstGeom prst="roundRect">
-            <a:avLst/>
-          </a:prstGeom>
-          <a:solidFill>
-            <a:srgbClr val="FFFFFF"/>
-          </a:solidFill>
-          <a:ln w="9525">
-            <a:solidFill>
-              <a:srgbClr val="C2D4E6"/>
-            </a:solidFill>
-          </a:ln>
-          <a:effectLst/>
-        </p:spPr>
-        <p:style>
-          <a:lnRef idx="1">
-            <a:schemeClr val="accent1"/>
-          </a:lnRef>
-          <a:fillRef idx="3">
-            <a:schemeClr val="accent1"/>
-          </a:fillRef>
-          <a:effectRef idx="2">
-            <a:schemeClr val="accent1"/>
-          </a:effectRef>
-          <a:fontRef idx="minor">
-            <a:schemeClr val="lt1"/>
-          </a:fontRef>
-        </p:style>
-        <p:txBody>
-          <a:bodyPr rtlCol="0" anchor="ctr" wrap="square" tIns="54864" bIns="54864"/>
-          <a:lstStyle/>
-          <a:p>
-            <a:pPr algn="ctr">
-              <a:lnSpc>
-                <a:spcPct val="88000"/>
-              </a:lnSpc>
-              <a:spcAft>
-                <a:spcPts val="100"/>
-              </a:spcAft>
-              <a:buNone/>
-            </a:pPr>
-            <a:r>
-              <a:rPr sz="900" b="1">
-                <a:solidFill>
-                  <a:srgbClr val="A83A1E"/>
-                </a:solidFill>
-                <a:latin typeface="Calibri"/>
-              </a:rPr>
-              <a:t>EVIDENCE-LINKED</a:t>
+              <a:t>The classifier is trained on 313 synthetic sessions and is NOT VALIDATED for real-world risk; deterministic packet evidence remains authoritative throughout.</a:t>
             </a:r>
           </a:p>
         </p:txBody>
@@ -10953,8 +11541,8 @@
         </p:nvSpPr>
         <p:spPr bwMode="auto">
           <a:xfrm>
-            <a:off x="384048" y="950976"/>
-            <a:ext cx="11430000" cy="329184"/>
+            <a:off x="384048" y="1042415"/>
+            <a:ext cx="11420856" cy="347472"/>
           </a:xfrm>
           <a:prstGeom prst="rect">
             <a:avLst/>
@@ -10997,7 +11585,7 @@
                 </a:solidFill>
                 <a:latin typeface="Calibri"/>
               </a:rPr>
-              <a:t>Feasible because it is built and measured. Every figure below was re-run on the release commit.</a:t>
+              <a:t>Feasible to build, feasible to operate, feasible to deploy and feasible to maintain — each with its own evidence.</a:t>
             </a:r>
             <a:endParaRPr kumimoji="0" lang="en-US" sz="2800" b="0" i="0" u="none" strike="noStrike" kern="1200" cap="none" spc="0" normalizeH="0" baseline="0" noProof="0" dirty="0">
               <a:ln>
@@ -11259,8 +11847,8 @@
         </p:nvSpPr>
         <p:spPr>
           <a:xfrm>
-            <a:off x="384048" y="1316736"/>
-            <a:ext cx="1847088" cy="969264"/>
+            <a:off x="384048" y="1444752"/>
+            <a:ext cx="1781556" cy="786384"/>
           </a:xfrm>
           <a:prstGeom prst="roundRect">
             <a:avLst/>
@@ -11295,7 +11883,7 @@
           <a:p>
             <a:pPr algn="ctr">
               <a:lnSpc>
-                <a:spcPct val="86000"/>
+                <a:spcPct val="84000"/>
               </a:lnSpc>
               <a:spcAft>
                 <a:spcPts val="0"/>
@@ -11303,7 +11891,7 @@
               <a:buNone/>
             </a:pPr>
             <a:r>
-              <a:rPr sz="3200" b="1">
+              <a:rPr sz="2500" b="1">
                 <a:solidFill>
                   <a:srgbClr val="0B5FA5"/>
                 </a:solidFill>
@@ -11315,7 +11903,7 @@
           <a:p>
             <a:pPr algn="ctr">
               <a:lnSpc>
-                <a:spcPct val="86000"/>
+                <a:spcPct val="84000"/>
               </a:lnSpc>
               <a:spcAft>
                 <a:spcPts val="0"/>
@@ -11323,7 +11911,7 @@
               <a:buNone/>
             </a:pPr>
             <a:r>
-              <a:rPr sz="950" b="0">
+              <a:rPr sz="900" b="0">
                 <a:solidFill>
                   <a:srgbClr val="4A5A70"/>
                 </a:solidFill>
@@ -11342,8 +11930,8 @@
         </p:nvSpPr>
         <p:spPr>
           <a:xfrm>
-            <a:off x="2322576" y="1316736"/>
-            <a:ext cx="1847088" cy="969264"/>
+            <a:off x="2311908" y="1444752"/>
+            <a:ext cx="1781556" cy="786384"/>
           </a:xfrm>
           <a:prstGeom prst="roundRect">
             <a:avLst/>
@@ -11378,7 +11966,7 @@
           <a:p>
             <a:pPr algn="ctr">
               <a:lnSpc>
-                <a:spcPct val="86000"/>
+                <a:spcPct val="84000"/>
               </a:lnSpc>
               <a:spcAft>
                 <a:spcPts val="0"/>
@@ -11386,7 +11974,7 @@
               <a:buNone/>
             </a:pPr>
             <a:r>
-              <a:rPr sz="3200" b="1">
+              <a:rPr sz="2500" b="1">
                 <a:solidFill>
                   <a:srgbClr val="0B5FA5"/>
                 </a:solidFill>
@@ -11398,7 +11986,7 @@
           <a:p>
             <a:pPr algn="ctr">
               <a:lnSpc>
-                <a:spcPct val="86000"/>
+                <a:spcPct val="84000"/>
               </a:lnSpc>
               <a:spcAft>
                 <a:spcPts val="0"/>
@@ -11406,7 +11994,7 @@
               <a:buNone/>
             </a:pPr>
             <a:r>
-              <a:rPr sz="950" b="0">
+              <a:rPr sz="900" b="0">
                 <a:solidFill>
                   <a:srgbClr val="4A5A70"/>
                 </a:solidFill>
@@ -11425,8 +12013,8 @@
         </p:nvSpPr>
         <p:spPr>
           <a:xfrm>
-            <a:off x="4261104" y="1316736"/>
-            <a:ext cx="1847088" cy="969264"/>
+            <a:off x="4239768" y="1444752"/>
+            <a:ext cx="1781556" cy="786384"/>
           </a:xfrm>
           <a:prstGeom prst="roundRect">
             <a:avLst/>
@@ -11461,7 +12049,7 @@
           <a:p>
             <a:pPr algn="ctr">
               <a:lnSpc>
-                <a:spcPct val="86000"/>
+                <a:spcPct val="84000"/>
               </a:lnSpc>
               <a:spcAft>
                 <a:spcPts val="0"/>
@@ -11469,7 +12057,7 @@
               <a:buNone/>
             </a:pPr>
             <a:r>
-              <a:rPr sz="3200" b="1">
+              <a:rPr sz="2500" b="1">
                 <a:solidFill>
                   <a:srgbClr val="0B5FA5"/>
                 </a:solidFill>
@@ -11481,7 +12069,7 @@
           <a:p>
             <a:pPr algn="ctr">
               <a:lnSpc>
-                <a:spcPct val="86000"/>
+                <a:spcPct val="84000"/>
               </a:lnSpc>
               <a:spcAft>
                 <a:spcPts val="0"/>
@@ -11489,7 +12077,7 @@
               <a:buNone/>
             </a:pPr>
             <a:r>
-              <a:rPr sz="950" b="0">
+              <a:rPr sz="900" b="0">
                 <a:solidFill>
                   <a:srgbClr val="4A5A70"/>
                 </a:solidFill>
@@ -11508,8 +12096,8 @@
         </p:nvSpPr>
         <p:spPr>
           <a:xfrm>
-            <a:off x="6199632" y="1316736"/>
-            <a:ext cx="1847088" cy="969264"/>
+            <a:off x="6167628" y="1444752"/>
+            <a:ext cx="1781556" cy="786384"/>
           </a:xfrm>
           <a:prstGeom prst="roundRect">
             <a:avLst/>
@@ -11544,7 +12132,7 @@
           <a:p>
             <a:pPr algn="ctr">
               <a:lnSpc>
-                <a:spcPct val="86000"/>
+                <a:spcPct val="84000"/>
               </a:lnSpc>
               <a:spcAft>
                 <a:spcPts val="0"/>
@@ -11552,7 +12140,7 @@
               <a:buNone/>
             </a:pPr>
             <a:r>
-              <a:rPr sz="3200" b="1">
+              <a:rPr sz="2500" b="1">
                 <a:solidFill>
                   <a:srgbClr val="0B5FA5"/>
                 </a:solidFill>
@@ -11564,7 +12152,7 @@
           <a:p>
             <a:pPr algn="ctr">
               <a:lnSpc>
-                <a:spcPct val="86000"/>
+                <a:spcPct val="84000"/>
               </a:lnSpc>
               <a:spcAft>
                 <a:spcPts val="0"/>
@@ -11572,13 +12160,13 @@
               <a:buNone/>
             </a:pPr>
             <a:r>
-              <a:rPr sz="950" b="0">
+              <a:rPr sz="900" b="0">
                 <a:solidFill>
                   <a:srgbClr val="4A5A70"/>
                 </a:solidFill>
                 <a:latin typeface="Calibri"/>
               </a:rPr>
-              <a:t>real-backend E2E specs</a:t>
+              <a:t>real-backend browser E2E</a:t>
             </a:r>
           </a:p>
         </p:txBody>
@@ -11591,8 +12179,8 @@
         </p:nvSpPr>
         <p:spPr>
           <a:xfrm>
-            <a:off x="8138160" y="1316736"/>
-            <a:ext cx="1847088" cy="969264"/>
+            <a:off x="8095488" y="1444752"/>
+            <a:ext cx="1781556" cy="786384"/>
           </a:xfrm>
           <a:prstGeom prst="roundRect">
             <a:avLst/>
@@ -11627,7 +12215,7 @@
           <a:p>
             <a:pPr algn="ctr">
               <a:lnSpc>
-                <a:spcPct val="86000"/>
+                <a:spcPct val="84000"/>
               </a:lnSpc>
               <a:spcAft>
                 <a:spcPts val="0"/>
@@ -11635,7 +12223,7 @@
               <a:buNone/>
             </a:pPr>
             <a:r>
-              <a:rPr sz="3200" b="1">
+              <a:rPr sz="2500" b="1">
                 <a:solidFill>
                   <a:srgbClr val="0B5FA5"/>
                 </a:solidFill>
@@ -11647,7 +12235,7 @@
           <a:p>
             <a:pPr algn="ctr">
               <a:lnSpc>
-                <a:spcPct val="86000"/>
+                <a:spcPct val="84000"/>
               </a:lnSpc>
               <a:spcAft>
                 <a:spcPts val="0"/>
@@ -11655,7 +12243,7 @@
               <a:buNone/>
             </a:pPr>
             <a:r>
-              <a:rPr sz="950" b="0">
+              <a:rPr sz="900" b="0">
                 <a:solidFill>
                   <a:srgbClr val="4A5A70"/>
                 </a:solidFill>
@@ -11674,8 +12262,8 @@
         </p:nvSpPr>
         <p:spPr>
           <a:xfrm>
-            <a:off x="10076688" y="1316736"/>
-            <a:ext cx="1847088" cy="969264"/>
+            <a:off x="10023348" y="1444752"/>
+            <a:ext cx="1781556" cy="786384"/>
           </a:xfrm>
           <a:prstGeom prst="roundRect">
             <a:avLst/>
@@ -11710,7 +12298,7 @@
           <a:p>
             <a:pPr algn="ctr">
               <a:lnSpc>
-                <a:spcPct val="86000"/>
+                <a:spcPct val="84000"/>
               </a:lnSpc>
               <a:spcAft>
                 <a:spcPts val="0"/>
@@ -11718,7 +12306,7 @@
               <a:buNone/>
             </a:pPr>
             <a:r>
-              <a:rPr sz="3200" b="1">
+              <a:rPr sz="2500" b="1">
                 <a:solidFill>
                   <a:srgbClr val="1B6B3A"/>
                 </a:solidFill>
@@ -11730,7 +12318,7 @@
           <a:p>
             <a:pPr algn="ctr">
               <a:lnSpc>
-                <a:spcPct val="86000"/>
+                <a:spcPct val="84000"/>
               </a:lnSpc>
               <a:spcAft>
                 <a:spcPts val="0"/>
@@ -11738,7 +12326,7 @@
               <a:buNone/>
             </a:pPr>
             <a:r>
-              <a:rPr sz="950" b="0">
+              <a:rPr sz="900" b="0">
                 <a:solidFill>
                   <a:srgbClr val="4A5A70"/>
                 </a:solidFill>
@@ -11749,127 +12337,16 @@
           </a:p>
         </p:txBody>
       </p:sp>
-      <p:pic>
-        <p:nvPicPr>
-          <p:cNvPr id="17417" name="Picture 17416" descr="crop-0.36-0.285-1.0-0.795-06-evidence-provenance.png"/>
-          <p:cNvPicPr>
-            <a:picLocks noChangeAspect="1"/>
-          </p:cNvPicPr>
-          <p:nvPr/>
-        </p:nvPicPr>
-        <p:blipFill>
-          <a:blip r:embed="rId4"/>
-          <a:stretch>
-            <a:fillRect/>
-          </a:stretch>
-        </p:blipFill>
-        <p:spPr>
-          <a:xfrm>
-            <a:off x="384048" y="2432304"/>
-            <a:ext cx="6492240" cy="2910679"/>
-          </a:xfrm>
-          <a:prstGeom prst="rect">
-            <a:avLst/>
-          </a:prstGeom>
-        </p:spPr>
-      </p:pic>
-      <p:sp>
-        <p:nvSpPr>
-          <p:cNvPr id="17418" name="Rectangle 17417"/>
+      <p:sp>
+        <p:nvSpPr>
+          <p:cNvPr id="17417" name="Rounded Rectangle 17416"/>
           <p:cNvSpPr/>
           <p:nvPr/>
         </p:nvSpPr>
         <p:spPr>
           <a:xfrm>
-            <a:off x="384048" y="2432304"/>
-            <a:ext cx="6492240" cy="2910679"/>
-          </a:xfrm>
-          <a:prstGeom prst="rect">
-            <a:avLst/>
-          </a:prstGeom>
-          <a:noFill/>
-          <a:ln w="9525">
-            <a:solidFill>
-              <a:srgbClr val="C2D4E6"/>
-            </a:solidFill>
-          </a:ln>
-          <a:effectLst/>
-        </p:spPr>
-        <p:style>
-          <a:lnRef idx="1">
-            <a:schemeClr val="accent1"/>
-          </a:lnRef>
-          <a:fillRef idx="3">
-            <a:schemeClr val="accent1"/>
-          </a:fillRef>
-          <a:effectRef idx="2">
-            <a:schemeClr val="accent1"/>
-          </a:effectRef>
-          <a:fontRef idx="minor">
-            <a:schemeClr val="lt1"/>
-          </a:fontRef>
-        </p:style>
-        <p:txBody>
-          <a:bodyPr rtlCol="0" anchor="ctr"/>
-          <a:lstStyle/>
-          <a:p>
-            <a:pPr algn="ctr"/>
-          </a:p>
-        </p:txBody>
-      </p:sp>
-      <p:sp>
-        <p:nvSpPr>
-          <p:cNvPr id="17419" name="TextBox 17418"/>
-          <p:cNvSpPr txBox="1"/>
-          <p:nvPr/>
-        </p:nvSpPr>
-        <p:spPr>
-          <a:xfrm>
-            <a:off x="384048" y="5379559"/>
-            <a:ext cx="6492240" cy="256032"/>
-          </a:xfrm>
-          <a:prstGeom prst="rect">
-            <a:avLst/>
-          </a:prstGeom>
-          <a:noFill/>
-        </p:spPr>
-        <p:txBody>
-          <a:bodyPr wrap="square">
-            <a:spAutoFit/>
-          </a:bodyPr>
-          <a:lstStyle/>
-          <a:p>
-            <a:pPr algn="ctr">
-              <a:lnSpc>
-                <a:spcPct val="100000"/>
-              </a:lnSpc>
-              <a:spcAft>
-                <a:spcPts val="300"/>
-              </a:spcAft>
-              <a:buNone/>
-            </a:pPr>
-            <a:r>
-              <a:rPr sz="1100" b="0">
-                <a:solidFill>
-                  <a:srgbClr val="4A5A70"/>
-                </a:solidFill>
-                <a:latin typeface="Calibri"/>
-              </a:rPr>
-              <a:t>TLS-KEX-001, HIGH — and the packets it was evaluated against. Actual product output.</a:t>
-            </a:r>
-          </a:p>
-        </p:txBody>
-      </p:sp>
-      <p:sp>
-        <p:nvSpPr>
-          <p:cNvPr id="17420" name="Rounded Rectangle 17419"/>
-          <p:cNvSpPr/>
-          <p:nvPr/>
-        </p:nvSpPr>
-        <p:spPr>
-          <a:xfrm>
-            <a:off x="7552944" y="2432304"/>
-            <a:ext cx="4261104" cy="658368"/>
+            <a:off x="384048" y="2377440"/>
+            <a:ext cx="5637276" cy="1362456"/>
           </a:xfrm>
           <a:prstGeom prst="roundRect">
             <a:avLst/>
@@ -11904,7 +12381,7 @@
           <a:p>
             <a:pPr algn="ctr">
               <a:lnSpc>
-                <a:spcPct val="96000"/>
+                <a:spcPct val="98000"/>
               </a:lnSpc>
               <a:spcAft>
                 <a:spcPts val="300"/>
@@ -11918,13 +12395,13 @@
                 </a:solidFill>
                 <a:latin typeface="Calibri"/>
               </a:rPr>
-              <a:t>OBSERVE</a:t>
+              <a:t>TECHNICALLY FEASIBLE</a:t>
             </a:r>
           </a:p>
           <a:p>
             <a:pPr>
               <a:lnSpc>
-                <a:spcPct val="96000"/>
+                <a:spcPct val="98000"/>
               </a:lnSpc>
               <a:spcAft>
                 <a:spcPts val="300"/>
@@ -11938,65 +12415,41 @@
                 </a:solidFill>
                 <a:latin typeface="Calibri"/>
               </a:rPr>
-              <a:t>Static RSA key exchange negotiated</a:t>
-            </a:r>
-          </a:p>
-        </p:txBody>
-      </p:sp>
-      <p:sp>
-        <p:nvSpPr>
-          <p:cNvPr id="17421" name="Down Arrow 17420"/>
+              <a:t>The pipeline runs end to end today: PCAP → reconstruction → cryptographic assessment → findings → reports.</a:t>
+            </a:r>
+          </a:p>
+          <a:p>
+            <a:pPr>
+              <a:lnSpc>
+                <a:spcPct val="98000"/>
+              </a:lnSpc>
+              <a:spcAft>
+                <a:spcPts val="300"/>
+              </a:spcAft>
+              <a:buNone/>
+            </a:pPr>
+            <a:r>
+              <a:rPr sz="1100" b="0">
+                <a:solidFill>
+                  <a:srgbClr val="1F2C3F"/>
+                </a:solidFill>
+                <a:latin typeface="Calibri"/>
+              </a:rPr>
+              <a:t>Every figure in the strip above was produced by running the gate, not by asserting it.</a:t>
+            </a:r>
+          </a:p>
+        </p:txBody>
+      </p:sp>
+      <p:sp>
+        <p:nvSpPr>
+          <p:cNvPr id="17418" name="Rounded Rectangle 17417"/>
           <p:cNvSpPr/>
           <p:nvPr/>
         </p:nvSpPr>
         <p:spPr>
           <a:xfrm>
-            <a:off x="9601200" y="3108960"/>
-            <a:ext cx="164592" cy="146304"/>
-          </a:xfrm>
-          <a:prstGeom prst="downArrow">
-            <a:avLst/>
-          </a:prstGeom>
-          <a:solidFill>
-            <a:srgbClr val="4A5A70"/>
-          </a:solidFill>
-          <a:ln>
-            <a:noFill/>
-          </a:ln>
-          <a:effectLst/>
-        </p:spPr>
-        <p:style>
-          <a:lnRef idx="1">
-            <a:schemeClr val="accent1"/>
-          </a:lnRef>
-          <a:fillRef idx="3">
-            <a:schemeClr val="accent1"/>
-          </a:fillRef>
-          <a:effectRef idx="2">
-            <a:schemeClr val="accent1"/>
-          </a:effectRef>
-          <a:fontRef idx="minor">
-            <a:schemeClr val="lt1"/>
-          </a:fontRef>
-        </p:style>
-        <p:txBody>
-          <a:bodyPr rtlCol="0" anchor="ctr"/>
-          <a:lstStyle/>
-          <a:p>
-            <a:pPr algn="ctr"/>
-          </a:p>
-        </p:txBody>
-      </p:sp>
-      <p:sp>
-        <p:nvSpPr>
-          <p:cNvPr id="17422" name="Rounded Rectangle 17421"/>
-          <p:cNvSpPr/>
-          <p:nvPr/>
-        </p:nvSpPr>
-        <p:spPr>
-          <a:xfrm>
-            <a:off x="7552944" y="3273552"/>
-            <a:ext cx="4261104" cy="658368"/>
+            <a:off x="6167628" y="2377440"/>
+            <a:ext cx="5637276" cy="1362456"/>
           </a:xfrm>
           <a:prstGeom prst="roundRect">
             <a:avLst/>
@@ -12031,7 +12484,7 @@
           <a:p>
             <a:pPr algn="ctr">
               <a:lnSpc>
-                <a:spcPct val="96000"/>
+                <a:spcPct val="98000"/>
               </a:lnSpc>
               <a:spcAft>
                 <a:spcPts val="300"/>
@@ -12045,13 +12498,13 @@
                 </a:solidFill>
                 <a:latin typeface="Calibri"/>
               </a:rPr>
-              <a:t>TRACE</a:t>
+              <a:t>OPERATIONALLY FEASIBLE</a:t>
             </a:r>
           </a:p>
           <a:p>
             <a:pPr>
               <a:lnSpc>
-                <a:spcPct val="96000"/>
+                <a:spcPct val="98000"/>
               </a:lnSpc>
               <a:spcAft>
                 <a:spcPts val="300"/>
@@ -12065,65 +12518,41 @@
                 </a:solidFill>
                 <a:latin typeface="Calibri"/>
               </a:rPr>
-              <a:t>Packets #4 and #5, with timestamps</a:t>
-            </a:r>
-          </a:p>
-        </p:txBody>
-      </p:sp>
-      <p:sp>
-        <p:nvSpPr>
-          <p:cNvPr id="17423" name="Down Arrow 17422"/>
+              <a:t>No agent installation · no mail-server modification · no credentials required · no active probing.</a:t>
+            </a:r>
+          </a:p>
+          <a:p>
+            <a:pPr>
+              <a:lnSpc>
+                <a:spcPct val="98000"/>
+              </a:lnSpc>
+              <a:spcAft>
+                <a:spcPts val="300"/>
+              </a:spcAft>
+              <a:buNone/>
+            </a:pPr>
+            <a:r>
+              <a:rPr sz="1100" b="0">
+                <a:solidFill>
+                  <a:srgbClr val="1F2C3F"/>
+                </a:solidFill>
+                <a:latin typeface="Calibri"/>
+              </a:rPr>
+              <a:t>Works from the authorised PCAP / PCAPNG an organisation already collects.</a:t>
+            </a:r>
+          </a:p>
+        </p:txBody>
+      </p:sp>
+      <p:sp>
+        <p:nvSpPr>
+          <p:cNvPr id="17419" name="Rounded Rectangle 17418"/>
           <p:cNvSpPr/>
           <p:nvPr/>
         </p:nvSpPr>
         <p:spPr>
           <a:xfrm>
-            <a:off x="9601200" y="3950207"/>
-            <a:ext cx="164592" cy="146304"/>
-          </a:xfrm>
-          <a:prstGeom prst="downArrow">
-            <a:avLst/>
-          </a:prstGeom>
-          <a:solidFill>
-            <a:srgbClr val="4A5A70"/>
-          </a:solidFill>
-          <a:ln>
-            <a:noFill/>
-          </a:ln>
-          <a:effectLst/>
-        </p:spPr>
-        <p:style>
-          <a:lnRef idx="1">
-            <a:schemeClr val="accent1"/>
-          </a:lnRef>
-          <a:fillRef idx="3">
-            <a:schemeClr val="accent1"/>
-          </a:fillRef>
-          <a:effectRef idx="2">
-            <a:schemeClr val="accent1"/>
-          </a:effectRef>
-          <a:fontRef idx="minor">
-            <a:schemeClr val="lt1"/>
-          </a:fontRef>
-        </p:style>
-        <p:txBody>
-          <a:bodyPr rtlCol="0" anchor="ctr"/>
-          <a:lstStyle/>
-          <a:p>
-            <a:pPr algn="ctr"/>
-          </a:p>
-        </p:txBody>
-      </p:sp>
-      <p:sp>
-        <p:nvSpPr>
-          <p:cNvPr id="17424" name="Rounded Rectangle 17423"/>
-          <p:cNvSpPr/>
-          <p:nvPr/>
-        </p:nvSpPr>
-        <p:spPr>
-          <a:xfrm>
-            <a:off x="7552944" y="4114800"/>
-            <a:ext cx="4261104" cy="658368"/>
+            <a:off x="384048" y="3886200"/>
+            <a:ext cx="5637276" cy="1362456"/>
           </a:xfrm>
           <a:prstGeom prst="roundRect">
             <a:avLst/>
@@ -12158,7 +12587,7 @@
           <a:p>
             <a:pPr algn="ctr">
               <a:lnSpc>
-                <a:spcPct val="96000"/>
+                <a:spcPct val="98000"/>
               </a:lnSpc>
               <a:spcAft>
                 <a:spcPts val="300"/>
@@ -12168,17 +12597,17 @@
             <a:r>
               <a:rPr sz="1250" b="1">
                 <a:solidFill>
-                  <a:srgbClr val="0B5FA5"/>
-                </a:solidFill>
-                <a:latin typeface="Calibri"/>
-              </a:rPr>
-              <a:t>ASSESS</a:t>
+                  <a:srgbClr val="1B6B3A"/>
+                </a:solidFill>
+                <a:latin typeface="Calibri"/>
+              </a:rPr>
+              <a:t>DEPLOYMENT VIABLE</a:t>
             </a:r>
           </a:p>
           <a:p>
             <a:pPr>
               <a:lnSpc>
-                <a:spcPct val="96000"/>
+                <a:spcPct val="98000"/>
               </a:lnSpc>
               <a:spcAft>
                 <a:spcPts val="300"/>
@@ -12192,65 +12621,41 @@
                 </a:solidFill>
                 <a:latin typeface="Calibri"/>
               </a:rPr>
-              <a:t>TLS-KEX-001 · HIGH · no forward secrecy</a:t>
-            </a:r>
-          </a:p>
-        </p:txBody>
-      </p:sp>
-      <p:sp>
-        <p:nvSpPr>
-          <p:cNvPr id="17425" name="Down Arrow 17424"/>
+              <a:t>Local-first: FastAPI + React + SQLite. Core analysis works offline.</a:t>
+            </a:r>
+          </a:p>
+          <a:p>
+            <a:pPr>
+              <a:lnSpc>
+                <a:spcPct val="98000"/>
+              </a:lnSpc>
+              <a:spcAft>
+                <a:spcPts val="300"/>
+              </a:spcAft>
+              <a:buNone/>
+            </a:pPr>
+            <a:r>
+              <a:rPr sz="1100" b="0">
+                <a:solidFill>
+                  <a:srgbClr val="1F2C3F"/>
+                </a:solidFill>
+                <a:latin typeface="Calibri"/>
+              </a:rPr>
+              <a:t>Captured traffic never needs to be uploaded to a cloud service; it runs as a self-contained investigation workstation.</a:t>
+            </a:r>
+          </a:p>
+        </p:txBody>
+      </p:sp>
+      <p:sp>
+        <p:nvSpPr>
+          <p:cNvPr id="17420" name="Rounded Rectangle 17419"/>
           <p:cNvSpPr/>
           <p:nvPr/>
         </p:nvSpPr>
         <p:spPr>
           <a:xfrm>
-            <a:off x="9601200" y="4791455"/>
-            <a:ext cx="164592" cy="146304"/>
-          </a:xfrm>
-          <a:prstGeom prst="downArrow">
-            <a:avLst/>
-          </a:prstGeom>
-          <a:solidFill>
-            <a:srgbClr val="4A5A70"/>
-          </a:solidFill>
-          <a:ln>
-            <a:noFill/>
-          </a:ln>
-          <a:effectLst/>
-        </p:spPr>
-        <p:style>
-          <a:lnRef idx="1">
-            <a:schemeClr val="accent1"/>
-          </a:lnRef>
-          <a:fillRef idx="3">
-            <a:schemeClr val="accent1"/>
-          </a:fillRef>
-          <a:effectRef idx="2">
-            <a:schemeClr val="accent1"/>
-          </a:effectRef>
-          <a:fontRef idx="minor">
-            <a:schemeClr val="lt1"/>
-          </a:fontRef>
-        </p:style>
-        <p:txBody>
-          <a:bodyPr rtlCol="0" anchor="ctr"/>
-          <a:lstStyle/>
-          <a:p>
-            <a:pPr algn="ctr"/>
-          </a:p>
-        </p:txBody>
-      </p:sp>
-      <p:sp>
-        <p:nvSpPr>
-          <p:cNvPr id="17426" name="Rounded Rectangle 17425"/>
-          <p:cNvSpPr/>
-          <p:nvPr/>
-        </p:nvSpPr>
-        <p:spPr>
-          <a:xfrm>
-            <a:off x="7552944" y="4956048"/>
-            <a:ext cx="4261104" cy="658368"/>
+            <a:off x="6167628" y="3886200"/>
+            <a:ext cx="5637276" cy="1362456"/>
           </a:xfrm>
           <a:prstGeom prst="roundRect">
             <a:avLst/>
@@ -12285,7 +12690,7 @@
           <a:p>
             <a:pPr algn="ctr">
               <a:lnSpc>
-                <a:spcPct val="96000"/>
+                <a:spcPct val="98000"/>
               </a:lnSpc>
               <a:spcAft>
                 <a:spcPts val="300"/>
@@ -12299,13 +12704,13 @@
                 </a:solidFill>
                 <a:latin typeface="Calibri"/>
               </a:rPr>
-              <a:t>REMEDIATE</a:t>
+              <a:t>MAINTAINABLE / EXTENSIBLE</a:t>
             </a:r>
           </a:p>
           <a:p>
             <a:pPr>
               <a:lnSpc>
-                <a:spcPct val="96000"/>
+                <a:spcPct val="98000"/>
               </a:lnSpc>
               <a:spcAft>
                 <a:spcPts val="300"/>
@@ -12319,21 +12724,41 @@
                 </a:solidFill>
                 <a:latin typeface="Calibri"/>
               </a:rPr>
-              <a:t>Move to ephemeral key exchange</a:t>
-            </a:r>
-          </a:p>
-        </p:txBody>
-      </p:sp>
-      <p:sp>
-        <p:nvSpPr>
-          <p:cNvPr id="17427" name="Rounded Rectangle 17426"/>
+              <a:t>Versioned policy rules · modular protocol and TLS pipeline · canonical report model · independent TShark cross-check.</a:t>
+            </a:r>
+          </a:p>
+          <a:p>
+            <a:pPr>
+              <a:lnSpc>
+                <a:spcPct val="98000"/>
+              </a:lnSpc>
+              <a:spcAft>
+                <a:spcPts val="300"/>
+              </a:spcAft>
+              <a:buNone/>
+            </a:pPr>
+            <a:r>
+              <a:rPr sz="1100" b="0">
+                <a:solidFill>
+                  <a:srgbClr val="1F2C3F"/>
+                </a:solidFill>
+                <a:latin typeface="Calibri"/>
+              </a:rPr>
+              <a:t>New deterministic rules can be added without redesigning the capture pipeline.</a:t>
+            </a:r>
+          </a:p>
+        </p:txBody>
+      </p:sp>
+      <p:sp>
+        <p:nvSpPr>
+          <p:cNvPr id="17421" name="Rounded Rectangle 17420"/>
           <p:cNvSpPr/>
           <p:nvPr/>
         </p:nvSpPr>
         <p:spPr>
           <a:xfrm>
-            <a:off x="384048" y="5650992"/>
-            <a:ext cx="11430000" cy="694944"/>
+            <a:off x="384048" y="5394960"/>
+            <a:ext cx="11420856" cy="749808"/>
           </a:xfrm>
           <a:prstGeom prst="roundRect">
             <a:avLst/>
@@ -12368,7 +12793,7 @@
           <a:p>
             <a:pPr algn="ctr">
               <a:lnSpc>
-                <a:spcPct val="96000"/>
+                <a:spcPct val="94000"/>
               </a:lnSpc>
               <a:spcAft>
                 <a:spcPts val="300"/>
@@ -12376,7 +12801,7 @@
               <a:buNone/>
             </a:pPr>
             <a:r>
-              <a:rPr sz="1100" b="1">
+              <a:rPr sz="1050" b="1">
                 <a:solidFill>
                   <a:srgbClr val="A83A1E"/>
                 </a:solidFill>
@@ -12388,7 +12813,7 @@
           <a:p>
             <a:pPr>
               <a:lnSpc>
-                <a:spcPct val="96000"/>
+                <a:spcPct val="94000"/>
               </a:lnSpc>
               <a:spcAft>
                 <a:spcPts val="300"/>
@@ -12396,7 +12821,7 @@
               <a:buNone/>
             </a:pPr>
             <a:r>
-              <a:rPr sz="1100" b="0">
+              <a:rPr sz="1050" b="0">
                 <a:solidFill>
                   <a:srgbClr val="1F2C3F"/>
                 </a:solidFill>
@@ -12408,7 +12833,7 @@
           <a:p>
             <a:pPr>
               <a:lnSpc>
-                <a:spcPct val="96000"/>
+                <a:spcPct val="94000"/>
               </a:lnSpc>
               <a:spcAft>
                 <a:spcPts val="300"/>
@@ -12416,13 +12841,13 @@
               <a:buNone/>
             </a:pPr>
             <a:r>
-              <a:rPr sz="1100" b="0">
+              <a:rPr sz="1050" b="0">
                 <a:solidFill>
                   <a:srgbClr val="1F2C3F"/>
                 </a:solidFill>
                 <a:latin typeface="Calibri"/>
               </a:rPr>
-              <a:t>The supervised classifier is experimental and never overrides a deterministic finding.</a:t>
+              <a:t>The AI classifier remains advisory until real-world validation; it never overrides a deterministic finding or the score.</a:t>
             </a:r>
           </a:p>
         </p:txBody>
@@ -12573,8 +12998,8 @@
         </p:nvSpPr>
         <p:spPr bwMode="auto">
           <a:xfrm>
-            <a:off x="384048" y="950976"/>
-            <a:ext cx="11430000" cy="329184"/>
+            <a:off x="384048" y="1042415"/>
+            <a:ext cx="11420856" cy="347472"/>
           </a:xfrm>
           <a:prstGeom prst="rect">
             <a:avLst/>
@@ -12617,7 +13042,7 @@
                 </a:solidFill>
                 <a:latin typeface="Calibri"/>
               </a:rPr>
-              <a:t>For authorised email-security investigation — and every claim below is what the product already outputs.</a:t>
+              <a:t>What changes for the organisation that adopts it — and for the people who have to act on the result.</a:t>
             </a:r>
           </a:p>
         </p:txBody>
@@ -12865,8 +13290,8 @@
         </p:nvSpPr>
         <p:spPr>
           <a:xfrm>
-            <a:off x="384048" y="1316736"/>
-            <a:ext cx="2194560" cy="768096"/>
+            <a:off x="384048" y="1444752"/>
+            <a:ext cx="2167128" cy="1481328"/>
           </a:xfrm>
           <a:prstGeom prst="roundRect">
             <a:avLst/>
@@ -12896,46 +13321,46 @@
           </a:fontRef>
         </p:style>
         <p:txBody>
-          <a:bodyPr rtlCol="0" anchor="ctr" wrap="square" tIns="54864" bIns="54864"/>
+          <a:bodyPr rtlCol="0" anchor="t" wrap="square" tIns="54864" bIns="54864"/>
           <a:lstStyle/>
           <a:p>
             <a:pPr algn="ctr">
               <a:lnSpc>
-                <a:spcPct val="94000"/>
-              </a:lnSpc>
-              <a:spcAft>
-                <a:spcPts val="100"/>
-              </a:spcAft>
-              <a:buNone/>
-            </a:pPr>
-            <a:r>
-              <a:rPr sz="1400" b="1">
+                <a:spcPct val="98000"/>
+              </a:lnSpc>
+              <a:spcAft>
+                <a:spcPts val="300"/>
+              </a:spcAft>
+              <a:buNone/>
+            </a:pPr>
+            <a:r>
+              <a:rPr sz="1150" b="1">
                 <a:solidFill>
                   <a:srgbClr val="0B5FA5"/>
                 </a:solidFill>
                 <a:latin typeface="Calibri"/>
               </a:rPr>
-              <a:t>DISCOVER</a:t>
-            </a:r>
-          </a:p>
-          <a:p>
-            <a:pPr algn="ctr">
-              <a:lnSpc>
-                <a:spcPct val="94000"/>
-              </a:lnSpc>
-              <a:spcAft>
-                <a:spcPts val="100"/>
-              </a:spcAft>
-              <a:buNone/>
-            </a:pPr>
-            <a:r>
-              <a:rPr sz="1050" b="0">
+              <a:t>REDUCES MANUAL ANALYSIS</a:t>
+            </a:r>
+          </a:p>
+          <a:p>
+            <a:pPr>
+              <a:lnSpc>
+                <a:spcPct val="98000"/>
+              </a:lnSpc>
+              <a:spcAft>
+                <a:spcPts val="300"/>
+              </a:spcAft>
+              <a:buNone/>
+            </a:pPr>
+            <a:r>
+              <a:rPr sz="1000" b="0">
                 <a:solidFill>
                   <a:srgbClr val="1F2C3F"/>
                 </a:solidFill>
                 <a:latin typeface="Calibri"/>
               </a:rPr>
-              <a:t>Observable weak cryptography</a:t>
+              <a:t>Turns captures into structured cryptographic findings instead of an analyst reading every TLS negotiation by hand.</a:t>
             </a:r>
           </a:p>
         </p:txBody>
@@ -12948,8 +13373,8 @@
         </p:nvSpPr>
         <p:spPr>
           <a:xfrm>
-            <a:off x="2670048" y="1316736"/>
-            <a:ext cx="2194560" cy="768096"/>
+            <a:off x="2697480" y="1444752"/>
+            <a:ext cx="2167128" cy="1481328"/>
           </a:xfrm>
           <a:prstGeom prst="roundRect">
             <a:avLst/>
@@ -12979,46 +13404,46 @@
           </a:fontRef>
         </p:style>
         <p:txBody>
-          <a:bodyPr rtlCol="0" anchor="ctr" wrap="square" tIns="54864" bIns="54864"/>
+          <a:bodyPr rtlCol="0" anchor="t" wrap="square" tIns="54864" bIns="54864"/>
           <a:lstStyle/>
           <a:p>
             <a:pPr algn="ctr">
               <a:lnSpc>
-                <a:spcPct val="94000"/>
-              </a:lnSpc>
-              <a:spcAft>
-                <a:spcPts val="100"/>
-              </a:spcAft>
-              <a:buNone/>
-            </a:pPr>
-            <a:r>
-              <a:rPr sz="1400" b="1">
+                <a:spcPct val="98000"/>
+              </a:lnSpc>
+              <a:spcAft>
+                <a:spcPts val="300"/>
+              </a:spcAft>
+              <a:buNone/>
+            </a:pPr>
+            <a:r>
+              <a:rPr sz="1150" b="1">
                 <a:solidFill>
                   <a:srgbClr val="0B5FA5"/>
                 </a:solidFill>
                 <a:latin typeface="Calibri"/>
               </a:rPr>
-              <a:t>EXPLAIN</a:t>
-            </a:r>
-          </a:p>
-          <a:p>
-            <a:pPr algn="ctr">
-              <a:lnSpc>
-                <a:spcPct val="94000"/>
-              </a:lnSpc>
-              <a:spcAft>
-                <a:spcPts val="100"/>
-              </a:spcAft>
-              <a:buNone/>
-            </a:pPr>
-            <a:r>
-              <a:rPr sz="1050" b="0">
+              <a:t>NO PRODUCTION EXPOSURE</a:t>
+            </a:r>
+          </a:p>
+          <a:p>
+            <a:pPr>
+              <a:lnSpc>
+                <a:spcPct val="98000"/>
+              </a:lnSpc>
+              <a:spcAft>
+                <a:spcPts val="300"/>
+              </a:spcAft>
+              <a:buNone/>
+            </a:pPr>
+            <a:r>
+              <a:rPr sz="1000" b="0">
                 <a:solidFill>
                   <a:srgbClr val="1F2C3F"/>
                 </a:solidFill>
                 <a:latin typeface="Calibri"/>
               </a:rPr>
-              <a:t>Packet-backed evidence</a:t>
+              <a:t>Assesses posture without modifying the mail server, deploying agents, scanning or using credentials.</a:t>
             </a:r>
           </a:p>
         </p:txBody>
@@ -13031,8 +13456,8 @@
         </p:nvSpPr>
         <p:spPr>
           <a:xfrm>
-            <a:off x="4956048" y="1316736"/>
-            <a:ext cx="2194560" cy="768096"/>
+            <a:off x="5010912" y="1444752"/>
+            <a:ext cx="2167128" cy="1481328"/>
           </a:xfrm>
           <a:prstGeom prst="roundRect">
             <a:avLst/>
@@ -13062,46 +13487,46 @@
           </a:fontRef>
         </p:style>
         <p:txBody>
-          <a:bodyPr rtlCol="0" anchor="ctr" wrap="square" tIns="54864" bIns="54864"/>
+          <a:bodyPr rtlCol="0" anchor="t" wrap="square" tIns="54864" bIns="54864"/>
           <a:lstStyle/>
           <a:p>
             <a:pPr algn="ctr">
               <a:lnSpc>
-                <a:spcPct val="94000"/>
-              </a:lnSpc>
-              <a:spcAft>
-                <a:spcPts val="100"/>
-              </a:spcAft>
-              <a:buNone/>
-            </a:pPr>
-            <a:r>
-              <a:rPr sz="1400" b="1">
+                <a:spcPct val="98000"/>
+              </a:lnSpc>
+              <a:spcAft>
+                <a:spcPts val="300"/>
+              </a:spcAft>
+              <a:buNone/>
+            </a:pPr>
+            <a:r>
+              <a:rPr sz="1150" b="1">
                 <a:solidFill>
                   <a:srgbClr val="0B5FA5"/>
                 </a:solidFill>
                 <a:latin typeface="Calibri"/>
               </a:rPr>
-              <a:t>PRIORITIZE</a:t>
-            </a:r>
-          </a:p>
-          <a:p>
-            <a:pPr algn="ctr">
-              <a:lnSpc>
-                <a:spcPct val="94000"/>
-              </a:lnSpc>
-              <a:spcAft>
-                <a:spcPts val="100"/>
-              </a:spcAft>
-              <a:buNone/>
-            </a:pPr>
-            <a:r>
-              <a:rPr sz="1050" b="0">
+              <a:t>MAKES FINDINGS DEFENSIBLE</a:t>
+            </a:r>
+          </a:p>
+          <a:p>
+            <a:pPr>
+              <a:lnSpc>
+                <a:spcPct val="98000"/>
+              </a:lnSpc>
+              <a:spcAft>
+                <a:spcPts val="300"/>
+              </a:spcAft>
+              <a:buNone/>
+            </a:pPr>
+            <a:r>
+              <a:rPr sz="1000" b="0">
                 <a:solidFill>
                   <a:srgbClr val="1F2C3F"/>
                 </a:solidFill>
                 <a:latin typeface="Calibri"/>
               </a:rPr>
-              <a:t>What to fix first</a:t>
+              <a:t>Each conclusion links to capture, session, packet, timestamp, rule and remediation — independently verifiable.</a:t>
             </a:r>
           </a:p>
         </p:txBody>
@@ -13114,8 +13539,8 @@
         </p:nvSpPr>
         <p:spPr>
           <a:xfrm>
-            <a:off x="7242048" y="1316736"/>
-            <a:ext cx="2194560" cy="768096"/>
+            <a:off x="7324344" y="1444752"/>
+            <a:ext cx="2167128" cy="1481328"/>
           </a:xfrm>
           <a:prstGeom prst="roundRect">
             <a:avLst/>
@@ -13145,46 +13570,46 @@
           </a:fontRef>
         </p:style>
         <p:txBody>
-          <a:bodyPr rtlCol="0" anchor="ctr" wrap="square" tIns="54864" bIns="54864"/>
+          <a:bodyPr rtlCol="0" anchor="t" wrap="square" tIns="54864" bIns="54864"/>
           <a:lstStyle/>
           <a:p>
             <a:pPr algn="ctr">
               <a:lnSpc>
-                <a:spcPct val="94000"/>
-              </a:lnSpc>
-              <a:spcAft>
-                <a:spcPts val="100"/>
-              </a:spcAft>
-              <a:buNone/>
-            </a:pPr>
-            <a:r>
-              <a:rPr sz="1400" b="1">
+                <a:spcPct val="98000"/>
+              </a:lnSpc>
+              <a:spcAft>
+                <a:spcPts val="300"/>
+              </a:spcAft>
+              <a:buNone/>
+            </a:pPr>
+            <a:r>
+              <a:rPr sz="1150" b="1">
                 <a:solidFill>
                   <a:srgbClr val="0B5FA5"/>
                 </a:solidFill>
                 <a:latin typeface="Calibri"/>
               </a:rPr>
-              <a:t>TRACK</a:t>
-            </a:r>
-          </a:p>
-          <a:p>
-            <a:pPr algn="ctr">
-              <a:lnSpc>
-                <a:spcPct val="94000"/>
-              </a:lnSpc>
-              <a:spcAft>
-                <a:spcPts val="100"/>
-              </a:spcAft>
-              <a:buNone/>
-            </a:pPr>
-            <a:r>
-              <a:rPr sz="1050" b="0">
+              <a:t>PRIORITISES REMEDIATION</a:t>
+            </a:r>
+          </a:p>
+          <a:p>
+            <a:pPr>
+              <a:lnSpc>
+                <a:spcPct val="98000"/>
+              </a:lnSpc>
+              <a:spcAft>
+                <a:spcPts val="300"/>
+              </a:spcAft>
+              <a:buNone/>
+            </a:pPr>
+            <a:r>
+              <a:rPr sz="1000" b="0">
                 <a:solidFill>
                   <a:srgbClr val="1F2C3F"/>
                 </a:solidFill>
                 <a:latin typeface="Calibri"/>
               </a:rPr>
-              <a:t>Cryptographic drift</a:t>
+              <a:t>Severity, confidence, priority and a named fix, rather than raw protocol data.</a:t>
             </a:r>
           </a:p>
         </p:txBody>
@@ -13197,8 +13622,8 @@
         </p:nvSpPr>
         <p:spPr>
           <a:xfrm>
-            <a:off x="9528048" y="1316736"/>
-            <a:ext cx="2194560" cy="768096"/>
+            <a:off x="9637776" y="1444752"/>
+            <a:ext cx="2167128" cy="1481328"/>
           </a:xfrm>
           <a:prstGeom prst="roundRect">
             <a:avLst/>
@@ -13228,53 +13653,53 @@
           </a:fontRef>
         </p:style>
         <p:txBody>
-          <a:bodyPr rtlCol="0" anchor="ctr" wrap="square" tIns="54864" bIns="54864"/>
+          <a:bodyPr rtlCol="0" anchor="t" wrap="square" tIns="54864" bIns="54864"/>
           <a:lstStyle/>
           <a:p>
             <a:pPr algn="ctr">
               <a:lnSpc>
-                <a:spcPct val="94000"/>
-              </a:lnSpc>
-              <a:spcAft>
-                <a:spcPts val="100"/>
-              </a:spcAft>
-              <a:buNone/>
-            </a:pPr>
-            <a:r>
-              <a:rPr sz="1400" b="1">
+                <a:spcPct val="98000"/>
+              </a:lnSpc>
+              <a:spcAft>
+                <a:spcPts val="300"/>
+              </a:spcAft>
+              <a:buNone/>
+            </a:pPr>
+            <a:r>
+              <a:rPr sz="1150" b="1">
                 <a:solidFill>
                   <a:srgbClr val="0B5FA5"/>
                 </a:solidFill>
                 <a:latin typeface="Calibri"/>
               </a:rPr>
-              <a:t>REPORT</a:t>
-            </a:r>
-          </a:p>
-          <a:p>
-            <a:pPr algn="ctr">
-              <a:lnSpc>
-                <a:spcPct val="94000"/>
-              </a:lnSpc>
-              <a:spcAft>
-                <a:spcPts val="100"/>
-              </a:spcAft>
-              <a:buNone/>
-            </a:pPr>
-            <a:r>
-              <a:rPr sz="1050" b="0">
+              <a:t>DETECTS REGRESSION</a:t>
+            </a:r>
+          </a:p>
+          <a:p>
+            <a:pPr>
+              <a:lnSpc>
+                <a:spcPct val="98000"/>
+              </a:lnSpc>
+              <a:spcAft>
+                <a:spcPts val="300"/>
+              </a:spcAft>
+              <a:buNone/>
+            </a:pPr>
+            <a:r>
+              <a:rPr sz="1000" b="0">
                 <a:solidFill>
                   <a:srgbClr val="1F2C3F"/>
                 </a:solidFill>
                 <a:latin typeface="Calibri"/>
               </a:rPr>
-              <a:t>Portable forensic output</a:t>
+              <a:t>Cross-capture drift reveals changes in observed cryptographic posture between captures of the same service.</a:t>
             </a:r>
           </a:p>
         </p:txBody>
       </p:sp>
       <p:pic>
         <p:nvPicPr>
-          <p:cNvPr id="17416" name="Picture 17415" descr="crop-0.11-0.15-1.0-0.735-04-finding-evidence.png"/>
+          <p:cNvPr id="17416" name="Picture 17415" descr="crop-0.11-0.15-1.0-0.648-04-finding-evidence.png"/>
           <p:cNvPicPr>
             <a:picLocks noChangeAspect="1"/>
           </p:cNvPicPr>
@@ -13288,8 +13713,8 @@
         </p:blipFill>
         <p:spPr>
           <a:xfrm>
-            <a:off x="384048" y="2231136"/>
-            <a:ext cx="6510528" cy="2647640"/>
+            <a:off x="384048" y="3054096"/>
+            <a:ext cx="4587563" cy="1589138"/>
           </a:xfrm>
           <a:prstGeom prst="rect">
             <a:avLst/>
@@ -13304,8 +13729,8 @@
         </p:nvSpPr>
         <p:spPr>
           <a:xfrm>
-            <a:off x="384048" y="2231136"/>
-            <a:ext cx="6510528" cy="2647640"/>
+            <a:off x="384048" y="3054096"/>
+            <a:ext cx="4587563" cy="1589138"/>
           </a:xfrm>
           <a:prstGeom prst="rect">
             <a:avLst/>
@@ -13348,8 +13773,8 @@
         </p:nvSpPr>
         <p:spPr>
           <a:xfrm>
-            <a:off x="384048" y="4915352"/>
-            <a:ext cx="6510528" cy="256032"/>
+            <a:off x="384048" y="4679810"/>
+            <a:ext cx="4587563" cy="256032"/>
           </a:xfrm>
           <a:prstGeom prst="rect">
             <a:avLst/>
@@ -13378,50 +13803,28 @@
                 </a:solidFill>
                 <a:latin typeface="Calibri"/>
               </a:rPr>
-              <a:t>DISCOVER · EXPLAIN · PRIORITIZE — one finding, its rule, its severity and its remediation.</a:t>
-            </a:r>
-          </a:p>
-        </p:txBody>
-      </p:sp>
-      <p:pic>
-        <p:nvPicPr>
-          <p:cNvPr id="17419" name="Picture 17418" descr="crop-0.155-0.15-0.99-0.262-13-drift-version.png"/>
-          <p:cNvPicPr>
-            <a:picLocks noChangeAspect="1"/>
-          </p:cNvPicPr>
+              <a:t>DEFENSIBLE — the finding, its rule and the packets it was evaluated against.</a:t>
+            </a:r>
+          </a:p>
+        </p:txBody>
+      </p:sp>
+      <p:sp>
+        <p:nvSpPr>
+          <p:cNvPr id="17419" name="Rounded Rectangle 17418"/>
+          <p:cNvSpPr/>
           <p:nvPr/>
-        </p:nvPicPr>
-        <p:blipFill>
-          <a:blip r:embed="rId5"/>
-          <a:stretch>
-            <a:fillRect/>
-          </a:stretch>
-        </p:blipFill>
-        <p:spPr>
-          <a:xfrm>
-            <a:off x="7059168" y="2231136"/>
-            <a:ext cx="4754880" cy="669100"/>
-          </a:xfrm>
-          <a:prstGeom prst="rect">
+        </p:nvSpPr>
+        <p:spPr>
+          <a:xfrm>
+            <a:off x="5117915" y="3054096"/>
+            <a:ext cx="3724556" cy="1881746"/>
+          </a:xfrm>
+          <a:prstGeom prst="roundRect">
             <a:avLst/>
           </a:prstGeom>
-        </p:spPr>
-      </p:pic>
-      <p:sp>
-        <p:nvSpPr>
-          <p:cNvPr id="17420" name="Rectangle 17419"/>
-          <p:cNvSpPr/>
-          <p:nvPr/>
-        </p:nvSpPr>
-        <p:spPr>
-          <a:xfrm>
-            <a:off x="7059168" y="2231136"/>
-            <a:ext cx="4754880" cy="669100"/>
-          </a:xfrm>
-          <a:prstGeom prst="rect">
-            <a:avLst/>
-          </a:prstGeom>
-          <a:noFill/>
+          <a:solidFill>
+            <a:srgbClr val="EEF3F9"/>
+          </a:solidFill>
           <a:ln w="9525">
             <a:solidFill>
               <a:srgbClr val="C2D4E6"/>
@@ -13444,38 +13847,12 @@
           </a:fontRef>
         </p:style>
         <p:txBody>
-          <a:bodyPr rtlCol="0" anchor="ctr"/>
-          <a:lstStyle/>
-          <a:p>
-            <a:pPr algn="ctr"/>
-          </a:p>
-        </p:txBody>
-      </p:sp>
-      <p:sp>
-        <p:nvSpPr>
-          <p:cNvPr id="17421" name="TextBox 17420"/>
-          <p:cNvSpPr txBox="1"/>
-          <p:nvPr/>
-        </p:nvSpPr>
-        <p:spPr>
-          <a:xfrm>
-            <a:off x="7059168" y="2936812"/>
-            <a:ext cx="4754880" cy="256032"/>
-          </a:xfrm>
-          <a:prstGeom prst="rect">
-            <a:avLst/>
-          </a:prstGeom>
-          <a:noFill/>
-        </p:spPr>
-        <p:txBody>
-          <a:bodyPr wrap="square">
-            <a:spAutoFit/>
-          </a:bodyPr>
+          <a:bodyPr rtlCol="0" anchor="t" wrap="square" tIns="54864" bIns="54864"/>
           <a:lstStyle/>
           <a:p>
             <a:pPr algn="ctr">
               <a:lnSpc>
-                <a:spcPct val="100000"/>
+                <a:spcPct val="98000"/>
               </a:lnSpc>
               <a:spcAft>
                 <a:spcPts val="300"/>
@@ -13483,27 +13860,47 @@
               <a:buNone/>
             </a:pPr>
             <a:r>
-              <a:rPr sz="1100" b="0">
-                <a:solidFill>
-                  <a:srgbClr val="4A5A70"/>
-                </a:solidFill>
-                <a:latin typeface="Calibri"/>
-              </a:rPr>
-              <a:t>TRACK — the same observed service, two captures.</a:t>
-            </a:r>
-          </a:p>
-        </p:txBody>
-      </p:sp>
-      <p:sp>
-        <p:nvSpPr>
-          <p:cNvPr id="17422" name="Rounded Rectangle 17421"/>
+              <a:rPr sz="1150" b="1">
+                <a:solidFill>
+                  <a:srgbClr val="0B5FA5"/>
+                </a:solidFill>
+                <a:latin typeface="Calibri"/>
+              </a:rPr>
+              <a:t>REGRESSION OVER TIME</a:t>
+            </a:r>
+          </a:p>
+          <a:p>
+            <a:pPr>
+              <a:lnSpc>
+                <a:spcPct val="98000"/>
+              </a:lnSpc>
+              <a:spcAft>
+                <a:spcPts val="300"/>
+              </a:spcAft>
+              <a:buNone/>
+            </a:pPr>
+            <a:r>
+              <a:rPr sz="1000" b="1">
+                <a:solidFill>
+                  <a:srgbClr val="A83A1E"/>
+                </a:solidFill>
+                <a:latin typeface="Calibri"/>
+              </a:rPr>
+              <a:t>negotiated version · OBSERVED_CHANGE</a:t>
+            </a:r>
+          </a:p>
+        </p:txBody>
+      </p:sp>
+      <p:sp>
+        <p:nvSpPr>
+          <p:cNvPr id="17420" name="Rounded Rectangle 17419"/>
           <p:cNvSpPr/>
           <p:nvPr/>
         </p:nvSpPr>
         <p:spPr>
           <a:xfrm>
-            <a:off x="7059168" y="3675887"/>
-            <a:ext cx="4754880" cy="566928"/>
+            <a:off x="5392235" y="3602736"/>
+            <a:ext cx="1405078" cy="621792"/>
           </a:xfrm>
           <a:prstGeom prst="roundRect">
             <a:avLst/>
@@ -13538,152 +13935,61 @@
           <a:p>
             <a:pPr algn="ctr">
               <a:lnSpc>
-                <a:spcPct val="100000"/>
-              </a:lnSpc>
-              <a:spcAft>
-                <a:spcPts val="300"/>
-              </a:spcAft>
-              <a:buNone/>
-            </a:pPr>
-            <a:r>
-              <a:rPr sz="1300" b="1">
-                <a:solidFill>
-                  <a:srgbClr val="A83A1E"/>
-                </a:solidFill>
-                <a:latin typeface="Calibri"/>
-              </a:rPr>
-              <a:t>EARLIER  TLS 1.2      →  OBSERVED_CHANGE  →      LATER  TLS 1.0</a:t>
-            </a:r>
-          </a:p>
-        </p:txBody>
-      </p:sp>
-      <p:pic>
-        <p:nvPicPr>
-          <p:cNvPr id="17423" name="Picture 17422" descr="crop-0.0-0.0-1.0-0.44-12-pdf.png"/>
-          <p:cNvPicPr>
-            <a:picLocks noChangeAspect="1"/>
-          </p:cNvPicPr>
-          <p:nvPr/>
-        </p:nvPicPr>
-        <p:blipFill>
-          <a:blip r:embed="rId6"/>
-          <a:stretch>
-            <a:fillRect/>
-          </a:stretch>
-        </p:blipFill>
-        <p:spPr>
-          <a:xfrm>
-            <a:off x="7059168" y="4389120"/>
-            <a:ext cx="2139696" cy="1332713"/>
-          </a:xfrm>
-          <a:prstGeom prst="rect">
-            <a:avLst/>
-          </a:prstGeom>
-        </p:spPr>
-      </p:pic>
-      <p:sp>
-        <p:nvSpPr>
-          <p:cNvPr id="17424" name="Rectangle 17423"/>
+                <a:spcPct val="88000"/>
+              </a:lnSpc>
+              <a:spcAft>
+                <a:spcPts val="100"/>
+              </a:spcAft>
+              <a:buNone/>
+            </a:pPr>
+            <a:r>
+              <a:rPr sz="900" b="1">
+                <a:solidFill>
+                  <a:srgbClr val="4A5A70"/>
+                </a:solidFill>
+                <a:latin typeface="Calibri"/>
+              </a:rPr>
+              <a:t>EARLIER</a:t>
+            </a:r>
+          </a:p>
+          <a:p>
+            <a:pPr algn="ctr">
+              <a:lnSpc>
+                <a:spcPct val="88000"/>
+              </a:lnSpc>
+              <a:spcAft>
+                <a:spcPts val="100"/>
+              </a:spcAft>
+              <a:buNone/>
+            </a:pPr>
+            <a:r>
+              <a:rPr sz="1400" b="1">
+                <a:solidFill>
+                  <a:srgbClr val="0B5FA5"/>
+                </a:solidFill>
+                <a:latin typeface="Calibri"/>
+              </a:rPr>
+              <a:t>TLS 1.2</a:t>
+            </a:r>
+          </a:p>
+        </p:txBody>
+      </p:sp>
+      <p:sp>
+        <p:nvSpPr>
+          <p:cNvPr id="17421" name="Rounded Rectangle 17420"/>
           <p:cNvSpPr/>
           <p:nvPr/>
         </p:nvSpPr>
         <p:spPr>
           <a:xfrm>
-            <a:off x="7059168" y="4389120"/>
-            <a:ext cx="2139696" cy="1332713"/>
-          </a:xfrm>
-          <a:prstGeom prst="rect">
-            <a:avLst/>
-          </a:prstGeom>
-          <a:noFill/>
-          <a:ln w="9525">
-            <a:solidFill>
-              <a:srgbClr val="C2D4E6"/>
-            </a:solidFill>
-          </a:ln>
-          <a:effectLst/>
-        </p:spPr>
-        <p:style>
-          <a:lnRef idx="1">
-            <a:schemeClr val="accent1"/>
-          </a:lnRef>
-          <a:fillRef idx="3">
-            <a:schemeClr val="accent1"/>
-          </a:fillRef>
-          <a:effectRef idx="2">
-            <a:schemeClr val="accent1"/>
-          </a:effectRef>
-          <a:fontRef idx="minor">
-            <a:schemeClr val="lt1"/>
-          </a:fontRef>
-        </p:style>
-        <p:txBody>
-          <a:bodyPr rtlCol="0" anchor="ctr"/>
-          <a:lstStyle/>
-          <a:p>
-            <a:pPr algn="ctr"/>
-          </a:p>
-        </p:txBody>
-      </p:sp>
-      <p:sp>
-        <p:nvSpPr>
-          <p:cNvPr id="17425" name="TextBox 17424"/>
-          <p:cNvSpPr txBox="1"/>
-          <p:nvPr/>
-        </p:nvSpPr>
-        <p:spPr>
-          <a:xfrm>
-            <a:off x="7059168" y="5758409"/>
-            <a:ext cx="2139696" cy="256032"/>
-          </a:xfrm>
-          <a:prstGeom prst="rect">
-            <a:avLst/>
-          </a:prstGeom>
-          <a:noFill/>
-        </p:spPr>
-        <p:txBody>
-          <a:bodyPr wrap="square">
-            <a:spAutoFit/>
-          </a:bodyPr>
-          <a:lstStyle/>
-          <a:p>
-            <a:pPr algn="ctr">
-              <a:lnSpc>
-                <a:spcPct val="100000"/>
-              </a:lnSpc>
-              <a:spcAft>
-                <a:spcPts val="300"/>
-              </a:spcAft>
-              <a:buNone/>
-            </a:pPr>
-            <a:r>
-              <a:rPr sz="1100" b="0">
-                <a:solidFill>
-                  <a:srgbClr val="4A5A70"/>
-                </a:solidFill>
-                <a:latin typeface="Calibri"/>
-              </a:rPr>
-              <a:t>REPORT — the exported PDF.</a:t>
-            </a:r>
-          </a:p>
-        </p:txBody>
-      </p:sp>
-      <p:sp>
-        <p:nvSpPr>
-          <p:cNvPr id="17426" name="Rounded Rectangle 17425"/>
-          <p:cNvSpPr/>
-          <p:nvPr/>
-        </p:nvSpPr>
-        <p:spPr>
-          <a:xfrm>
-            <a:off x="9363456" y="4389120"/>
-            <a:ext cx="2450592" cy="1298448"/>
+            <a:off x="7163073" y="3602736"/>
+            <a:ext cx="1405078" cy="621792"/>
           </a:xfrm>
           <a:prstGeom prst="roundRect">
             <a:avLst/>
           </a:prstGeom>
           <a:solidFill>
-            <a:srgbClr val="EEF3F9"/>
+            <a:srgbClr val="FFFFFF"/>
           </a:solidFill>
           <a:ln w="9525">
             <a:solidFill>
@@ -13707,91 +14013,69 @@
           </a:fontRef>
         </p:style>
         <p:txBody>
-          <a:bodyPr rtlCol="0" anchor="t" wrap="square" tIns="54864" bIns="54864"/>
+          <a:bodyPr rtlCol="0" anchor="ctr" wrap="square" tIns="54864" bIns="54864"/>
           <a:lstStyle/>
           <a:p>
             <a:pPr algn="ctr">
               <a:lnSpc>
-                <a:spcPct val="98000"/>
-              </a:lnSpc>
-              <a:spcAft>
-                <a:spcPts val="300"/>
-              </a:spcAft>
-              <a:buNone/>
-            </a:pPr>
-            <a:r>
-              <a:rPr sz="1150" b="1">
-                <a:solidFill>
-                  <a:srgbClr val="0B5FA5"/>
-                </a:solidFill>
-                <a:latin typeface="Calibri"/>
-              </a:rPr>
-              <a:t>The report carries</a:t>
-            </a:r>
-          </a:p>
-          <a:p>
-            <a:pPr>
-              <a:lnSpc>
-                <a:spcPct val="98000"/>
-              </a:lnSpc>
-              <a:spcAft>
-                <a:spcPts val="300"/>
-              </a:spcAft>
-              <a:buNone/>
-            </a:pPr>
-            <a:r>
-              <a:rPr sz="1100" b="0">
-                <a:solidFill>
-                  <a:srgbClr val="1F2C3F"/>
-                </a:solidFill>
-                <a:latin typeface="Calibri"/>
-              </a:rPr>
-              <a:t>findings · packet references · remediation</a:t>
-            </a:r>
-          </a:p>
-          <a:p>
-            <a:pPr>
-              <a:lnSpc>
-                <a:spcPct val="98000"/>
-              </a:lnSpc>
-              <a:spcAft>
-                <a:spcPts val="300"/>
-              </a:spcAft>
-              <a:buNone/>
-            </a:pPr>
-            <a:r>
-              <a:rPr sz="1100" b="0">
-                <a:solidFill>
-                  <a:srgbClr val="1F2C3F"/>
-                </a:solidFill>
-                <a:latin typeface="Calibri"/>
-              </a:rPr>
-              <a:t>JSON · standalone HTML · PDF</a:t>
-            </a:r>
-          </a:p>
-        </p:txBody>
-      </p:sp>
-      <p:sp>
-        <p:nvSpPr>
-          <p:cNvPr id="17427" name="Rounded Rectangle 17426"/>
+                <a:spcPct val="88000"/>
+              </a:lnSpc>
+              <a:spcAft>
+                <a:spcPts val="100"/>
+              </a:spcAft>
+              <a:buNone/>
+            </a:pPr>
+            <a:r>
+              <a:rPr sz="900" b="1">
+                <a:solidFill>
+                  <a:srgbClr val="4A5A70"/>
+                </a:solidFill>
+                <a:latin typeface="Calibri"/>
+              </a:rPr>
+              <a:t>LATER</a:t>
+            </a:r>
+          </a:p>
+          <a:p>
+            <a:pPr algn="ctr">
+              <a:lnSpc>
+                <a:spcPct val="88000"/>
+              </a:lnSpc>
+              <a:spcAft>
+                <a:spcPts val="100"/>
+              </a:spcAft>
+              <a:buNone/>
+            </a:pPr>
+            <a:r>
+              <a:rPr sz="1400" b="1">
+                <a:solidFill>
+                  <a:srgbClr val="A83A1E"/>
+                </a:solidFill>
+                <a:latin typeface="Calibri"/>
+              </a:rPr>
+              <a:t>TLS 1.0</a:t>
+            </a:r>
+          </a:p>
+        </p:txBody>
+      </p:sp>
+      <p:sp>
+        <p:nvSpPr>
+          <p:cNvPr id="17422" name="Right Arrow 17421"/>
           <p:cNvSpPr/>
           <p:nvPr/>
         </p:nvSpPr>
         <p:spPr>
           <a:xfrm>
-            <a:off x="384048" y="5797296"/>
-            <a:ext cx="6510528" cy="384048"/>
-          </a:xfrm>
-          <a:prstGeom prst="roundRect">
+            <a:off x="6852177" y="3831335"/>
+            <a:ext cx="256032" cy="164592"/>
+          </a:xfrm>
+          <a:prstGeom prst="rightArrow">
             <a:avLst/>
           </a:prstGeom>
           <a:solidFill>
-            <a:srgbClr val="E4EEE6"/>
+            <a:srgbClr val="4A5A70"/>
           </a:solidFill>
-          <a:ln w="9525">
-            <a:solidFill>
-              <a:srgbClr val="BED8C6"/>
-            </a:solidFill>
+          <a:ln>
+            <a:noFill/>
           </a:ln>
           <a:effectLst/>
         </p:spPr>
@@ -13810,11 +14094,518 @@
           </a:fontRef>
         </p:style>
         <p:txBody>
+          <a:bodyPr rtlCol="0" anchor="ctr"/>
+          <a:lstStyle/>
+          <a:p>
+            <a:pPr algn="ctr"/>
+          </a:p>
+        </p:txBody>
+      </p:sp>
+      <p:sp>
+        <p:nvSpPr>
+          <p:cNvPr id="17423" name="TextBox 17422"/>
+          <p:cNvSpPr txBox="1"/>
+          <p:nvPr/>
+        </p:nvSpPr>
+        <p:spPr>
+          <a:xfrm>
+            <a:off x="5264219" y="4405490"/>
+            <a:ext cx="3431948" cy="475488"/>
+          </a:xfrm>
+          <a:prstGeom prst="rect">
+            <a:avLst/>
+          </a:prstGeom>
+          <a:noFill/>
+        </p:spPr>
+        <p:txBody>
+          <a:bodyPr wrap="square">
+            <a:spAutoFit/>
+          </a:bodyPr>
+          <a:lstStyle/>
+          <a:p>
+            <a:pPr algn="ctr">
+              <a:lnSpc>
+                <a:spcPct val="96000"/>
+              </a:lnSpc>
+              <a:spcAft>
+                <a:spcPts val="300"/>
+              </a:spcAft>
+              <a:buNone/>
+            </a:pPr>
+            <a:r>
+              <a:rPr sz="950" b="0">
+                <a:solidFill>
+                  <a:srgbClr val="4A5A70"/>
+                </a:solidFill>
+                <a:latin typeface="Calibri"/>
+              </a:rPr>
+              <a:t>The same observed service, two captures. The change is recorded as OBSERVED_CHANGE, never inferred.</a:t>
+            </a:r>
+          </a:p>
+        </p:txBody>
+      </p:sp>
+      <p:sp>
+        <p:nvSpPr>
+          <p:cNvPr id="17424" name="Rounded Rectangle 17423"/>
+          <p:cNvSpPr/>
+          <p:nvPr/>
+        </p:nvSpPr>
+        <p:spPr>
+          <a:xfrm>
+            <a:off x="8988775" y="3054096"/>
+            <a:ext cx="2816128" cy="1881746"/>
+          </a:xfrm>
+          <a:prstGeom prst="roundRect">
+            <a:avLst/>
+          </a:prstGeom>
+          <a:solidFill>
+            <a:srgbClr val="EEF7F0"/>
+          </a:solidFill>
+          <a:ln w="9525">
+            <a:solidFill>
+              <a:srgbClr val="C6E2CE"/>
+            </a:solidFill>
+          </a:ln>
+          <a:effectLst/>
+        </p:spPr>
+        <p:style>
+          <a:lnRef idx="1">
+            <a:schemeClr val="accent1"/>
+          </a:lnRef>
+          <a:fillRef idx="3">
+            <a:schemeClr val="accent1"/>
+          </a:fillRef>
+          <a:effectRef idx="2">
+            <a:schemeClr val="accent1"/>
+          </a:effectRef>
+          <a:fontRef idx="minor">
+            <a:schemeClr val="lt1"/>
+          </a:fontRef>
+        </p:style>
+        <p:txBody>
+          <a:bodyPr rtlCol="0" anchor="t" wrap="square" tIns="54864" bIns="54864"/>
+          <a:lstStyle/>
+          <a:p>
+            <a:pPr algn="ctr">
+              <a:lnSpc>
+                <a:spcPct val="98000"/>
+              </a:lnSpc>
+              <a:spcAft>
+                <a:spcPts val="300"/>
+              </a:spcAft>
+              <a:buNone/>
+            </a:pPr>
+            <a:r>
+              <a:rPr sz="1150" b="1">
+                <a:solidFill>
+                  <a:srgbClr val="1B6B3A"/>
+                </a:solidFill>
+                <a:latin typeface="Calibri"/>
+              </a:rPr>
+              <a:t>KEEPS SENSITIVE TRAFFIC LOCAL</a:t>
+            </a:r>
+          </a:p>
+          <a:p>
+            <a:pPr>
+              <a:lnSpc>
+                <a:spcPct val="98000"/>
+              </a:lnSpc>
+              <a:spcAft>
+                <a:spcPts val="300"/>
+              </a:spcAft>
+              <a:buNone/>
+            </a:pPr>
+            <a:r>
+              <a:rPr sz="1000" b="0">
+                <a:solidFill>
+                  <a:srgbClr val="1F2C3F"/>
+                </a:solidFill>
+                <a:latin typeface="Calibri"/>
+              </a:rPr>
+              <a:t>Captured enterprise and government email metadata does not need to be sent to an external AI or cloud service for core analysis.</a:t>
+            </a:r>
+          </a:p>
+          <a:p>
+            <a:pPr>
+              <a:lnSpc>
+                <a:spcPct val="98000"/>
+              </a:lnSpc>
+              <a:spcAft>
+                <a:spcPts val="300"/>
+              </a:spcAft>
+              <a:buNone/>
+            </a:pPr>
+            <a:r>
+              <a:rPr sz="1000" b="0">
+                <a:solidFill>
+                  <a:srgbClr val="1F2C3F"/>
+                </a:solidFill>
+                <a:latin typeface="Calibri"/>
+              </a:rPr>
+              <a:t>The engine opens no socket. The only traffic is the browser talking to 127.0.0.1.</a:t>
+            </a:r>
+          </a:p>
+        </p:txBody>
+      </p:sp>
+      <p:sp>
+        <p:nvSpPr>
+          <p:cNvPr id="17425" name="Rounded Rectangle 17424"/>
+          <p:cNvSpPr/>
+          <p:nvPr/>
+        </p:nvSpPr>
+        <p:spPr>
+          <a:xfrm>
+            <a:off x="384048" y="5084064"/>
+            <a:ext cx="2167128" cy="438912"/>
+          </a:xfrm>
+          <a:prstGeom prst="roundRect">
+            <a:avLst/>
+          </a:prstGeom>
+          <a:solidFill>
+            <a:srgbClr val="FFFFFF"/>
+          </a:solidFill>
+          <a:ln w="9525">
+            <a:solidFill>
+              <a:srgbClr val="C2D4E6"/>
+            </a:solidFill>
+          </a:ln>
+          <a:effectLst/>
+        </p:spPr>
+        <p:style>
+          <a:lnRef idx="1">
+            <a:schemeClr val="accent1"/>
+          </a:lnRef>
+          <a:fillRef idx="3">
+            <a:schemeClr val="accent1"/>
+          </a:fillRef>
+          <a:effectRef idx="2">
+            <a:schemeClr val="accent1"/>
+          </a:effectRef>
+          <a:fontRef idx="minor">
+            <a:schemeClr val="lt1"/>
+          </a:fontRef>
+        </p:style>
+        <p:txBody>
           <a:bodyPr rtlCol="0" anchor="ctr" wrap="square" tIns="54864" bIns="54864"/>
           <a:lstStyle/>
           <a:p>
             <a:pPr algn="ctr">
               <a:lnSpc>
+                <a:spcPct val="88000"/>
+              </a:lnSpc>
+              <a:spcAft>
+                <a:spcPts val="100"/>
+              </a:spcAft>
+              <a:buNone/>
+            </a:pPr>
+            <a:r>
+              <a:rPr sz="1000" b="1">
+                <a:solidFill>
+                  <a:srgbClr val="0B5FA5"/>
+                </a:solidFill>
+                <a:latin typeface="Calibri"/>
+              </a:rPr>
+              <a:t>SOC / SECURITY ANALYSTS</a:t>
+            </a:r>
+          </a:p>
+        </p:txBody>
+      </p:sp>
+      <p:sp>
+        <p:nvSpPr>
+          <p:cNvPr id="17426" name="Rounded Rectangle 17425"/>
+          <p:cNvSpPr/>
+          <p:nvPr/>
+        </p:nvSpPr>
+        <p:spPr>
+          <a:xfrm>
+            <a:off x="2697480" y="5084064"/>
+            <a:ext cx="2167128" cy="438912"/>
+          </a:xfrm>
+          <a:prstGeom prst="roundRect">
+            <a:avLst/>
+          </a:prstGeom>
+          <a:solidFill>
+            <a:srgbClr val="FFFFFF"/>
+          </a:solidFill>
+          <a:ln w="9525">
+            <a:solidFill>
+              <a:srgbClr val="C2D4E6"/>
+            </a:solidFill>
+          </a:ln>
+          <a:effectLst/>
+        </p:spPr>
+        <p:style>
+          <a:lnRef idx="1">
+            <a:schemeClr val="accent1"/>
+          </a:lnRef>
+          <a:fillRef idx="3">
+            <a:schemeClr val="accent1"/>
+          </a:fillRef>
+          <a:effectRef idx="2">
+            <a:schemeClr val="accent1"/>
+          </a:effectRef>
+          <a:fontRef idx="minor">
+            <a:schemeClr val="lt1"/>
+          </a:fontRef>
+        </p:style>
+        <p:txBody>
+          <a:bodyPr rtlCol="0" anchor="ctr" wrap="square" tIns="54864" bIns="54864"/>
+          <a:lstStyle/>
+          <a:p>
+            <a:pPr algn="ctr">
+              <a:lnSpc>
+                <a:spcPct val="88000"/>
+              </a:lnSpc>
+              <a:spcAft>
+                <a:spcPts val="100"/>
+              </a:spcAft>
+              <a:buNone/>
+            </a:pPr>
+            <a:r>
+              <a:rPr sz="1000" b="1">
+                <a:solidFill>
+                  <a:srgbClr val="0B5FA5"/>
+                </a:solidFill>
+                <a:latin typeface="Calibri"/>
+              </a:rPr>
+              <a:t>INCIDENT RESPONSE</a:t>
+            </a:r>
+          </a:p>
+        </p:txBody>
+      </p:sp>
+      <p:sp>
+        <p:nvSpPr>
+          <p:cNvPr id="17427" name="Rounded Rectangle 17426"/>
+          <p:cNvSpPr/>
+          <p:nvPr/>
+        </p:nvSpPr>
+        <p:spPr>
+          <a:xfrm>
+            <a:off x="5010912" y="5084064"/>
+            <a:ext cx="2167128" cy="438912"/>
+          </a:xfrm>
+          <a:prstGeom prst="roundRect">
+            <a:avLst/>
+          </a:prstGeom>
+          <a:solidFill>
+            <a:srgbClr val="FFFFFF"/>
+          </a:solidFill>
+          <a:ln w="9525">
+            <a:solidFill>
+              <a:srgbClr val="C2D4E6"/>
+            </a:solidFill>
+          </a:ln>
+          <a:effectLst/>
+        </p:spPr>
+        <p:style>
+          <a:lnRef idx="1">
+            <a:schemeClr val="accent1"/>
+          </a:lnRef>
+          <a:fillRef idx="3">
+            <a:schemeClr val="accent1"/>
+          </a:fillRef>
+          <a:effectRef idx="2">
+            <a:schemeClr val="accent1"/>
+          </a:effectRef>
+          <a:fontRef idx="minor">
+            <a:schemeClr val="lt1"/>
+          </a:fontRef>
+        </p:style>
+        <p:txBody>
+          <a:bodyPr rtlCol="0" anchor="ctr" wrap="square" tIns="54864" bIns="54864"/>
+          <a:lstStyle/>
+          <a:p>
+            <a:pPr algn="ctr">
+              <a:lnSpc>
+                <a:spcPct val="88000"/>
+              </a:lnSpc>
+              <a:spcAft>
+                <a:spcPts val="100"/>
+              </a:spcAft>
+              <a:buNone/>
+            </a:pPr>
+            <a:r>
+              <a:rPr sz="1000" b="1">
+                <a:solidFill>
+                  <a:srgbClr val="0B5FA5"/>
+                </a:solidFill>
+                <a:latin typeface="Calibri"/>
+              </a:rPr>
+              <a:t>MAIL ADMINISTRATORS</a:t>
+            </a:r>
+          </a:p>
+        </p:txBody>
+      </p:sp>
+      <p:sp>
+        <p:nvSpPr>
+          <p:cNvPr id="17428" name="Rounded Rectangle 17427"/>
+          <p:cNvSpPr/>
+          <p:nvPr/>
+        </p:nvSpPr>
+        <p:spPr>
+          <a:xfrm>
+            <a:off x="7324344" y="5084064"/>
+            <a:ext cx="2167128" cy="438912"/>
+          </a:xfrm>
+          <a:prstGeom prst="roundRect">
+            <a:avLst/>
+          </a:prstGeom>
+          <a:solidFill>
+            <a:srgbClr val="FFFFFF"/>
+          </a:solidFill>
+          <a:ln w="9525">
+            <a:solidFill>
+              <a:srgbClr val="C2D4E6"/>
+            </a:solidFill>
+          </a:ln>
+          <a:effectLst/>
+        </p:spPr>
+        <p:style>
+          <a:lnRef idx="1">
+            <a:schemeClr val="accent1"/>
+          </a:lnRef>
+          <a:fillRef idx="3">
+            <a:schemeClr val="accent1"/>
+          </a:fillRef>
+          <a:effectRef idx="2">
+            <a:schemeClr val="accent1"/>
+          </a:effectRef>
+          <a:fontRef idx="minor">
+            <a:schemeClr val="lt1"/>
+          </a:fontRef>
+        </p:style>
+        <p:txBody>
+          <a:bodyPr rtlCol="0" anchor="ctr" wrap="square" tIns="54864" bIns="54864"/>
+          <a:lstStyle/>
+          <a:p>
+            <a:pPr algn="ctr">
+              <a:lnSpc>
+                <a:spcPct val="88000"/>
+              </a:lnSpc>
+              <a:spcAft>
+                <a:spcPts val="100"/>
+              </a:spcAft>
+              <a:buNone/>
+            </a:pPr>
+            <a:r>
+              <a:rPr sz="1000" b="1">
+                <a:solidFill>
+                  <a:srgbClr val="0B5FA5"/>
+                </a:solidFill>
+                <a:latin typeface="Calibri"/>
+              </a:rPr>
+              <a:t>AUDIT / ASSURANCE</a:t>
+            </a:r>
+          </a:p>
+        </p:txBody>
+      </p:sp>
+      <p:sp>
+        <p:nvSpPr>
+          <p:cNvPr id="17429" name="Rounded Rectangle 17428"/>
+          <p:cNvSpPr/>
+          <p:nvPr/>
+        </p:nvSpPr>
+        <p:spPr>
+          <a:xfrm>
+            <a:off x="9637776" y="5084064"/>
+            <a:ext cx="2167128" cy="438912"/>
+          </a:xfrm>
+          <a:prstGeom prst="roundRect">
+            <a:avLst/>
+          </a:prstGeom>
+          <a:solidFill>
+            <a:srgbClr val="FFFFFF"/>
+          </a:solidFill>
+          <a:ln w="9525">
+            <a:solidFill>
+              <a:srgbClr val="C2D4E6"/>
+            </a:solidFill>
+          </a:ln>
+          <a:effectLst/>
+        </p:spPr>
+        <p:style>
+          <a:lnRef idx="1">
+            <a:schemeClr val="accent1"/>
+          </a:lnRef>
+          <a:fillRef idx="3">
+            <a:schemeClr val="accent1"/>
+          </a:fillRef>
+          <a:effectRef idx="2">
+            <a:schemeClr val="accent1"/>
+          </a:effectRef>
+          <a:fontRef idx="minor">
+            <a:schemeClr val="lt1"/>
+          </a:fontRef>
+        </p:style>
+        <p:txBody>
+          <a:bodyPr rtlCol="0" anchor="ctr" wrap="square" tIns="54864" bIns="54864"/>
+          <a:lstStyle/>
+          <a:p>
+            <a:pPr algn="ctr">
+              <a:lnSpc>
+                <a:spcPct val="88000"/>
+              </a:lnSpc>
+              <a:spcAft>
+                <a:spcPts val="100"/>
+              </a:spcAft>
+              <a:buNone/>
+            </a:pPr>
+            <a:r>
+              <a:rPr sz="1000" b="1">
+                <a:solidFill>
+                  <a:srgbClr val="0B5FA5"/>
+                </a:solidFill>
+                <a:latin typeface="Calibri"/>
+              </a:rPr>
+              <a:t>GOVERNMENT / ENTERPRISE SECURITY</a:t>
+            </a:r>
+          </a:p>
+        </p:txBody>
+      </p:sp>
+      <p:sp>
+        <p:nvSpPr>
+          <p:cNvPr id="17430" name="Rounded Rectangle 17429"/>
+          <p:cNvSpPr/>
+          <p:nvPr/>
+        </p:nvSpPr>
+        <p:spPr>
+          <a:xfrm>
+            <a:off x="384048" y="5650992"/>
+            <a:ext cx="11420856" cy="420624"/>
+          </a:xfrm>
+          <a:prstGeom prst="roundRect">
+            <a:avLst/>
+          </a:prstGeom>
+          <a:solidFill>
+            <a:srgbClr val="EFF5EF"/>
+          </a:solidFill>
+          <a:ln w="9525">
+            <a:solidFill>
+              <a:srgbClr val="CFE2CF"/>
+            </a:solidFill>
+          </a:ln>
+          <a:effectLst/>
+        </p:spPr>
+        <p:style>
+          <a:lnRef idx="1">
+            <a:schemeClr val="accent1"/>
+          </a:lnRef>
+          <a:fillRef idx="3">
+            <a:schemeClr val="accent1"/>
+          </a:fillRef>
+          <a:effectRef idx="2">
+            <a:schemeClr val="accent1"/>
+          </a:effectRef>
+          <a:fontRef idx="minor">
+            <a:schemeClr val="lt1"/>
+          </a:fontRef>
+        </p:style>
+        <p:txBody>
+          <a:bodyPr rtlCol="0" anchor="ctr" wrap="square" tIns="54864" bIns="54864"/>
+          <a:lstStyle/>
+          <a:p>
+            <a:pPr algn="ctr">
+              <a:lnSpc>
                 <a:spcPct val="100000"/>
               </a:lnSpc>
               <a:spcAft>
@@ -13823,13 +14614,13 @@
               <a:buNone/>
             </a:pPr>
             <a:r>
-              <a:rPr sz="1100" b="1">
-                <a:solidFill>
-                  <a:srgbClr val="1F2C3F"/>
-                </a:solidFill>
-                <a:latin typeface="Calibri"/>
-              </a:rPr>
-              <a:t>Demonstrated on controlled synthetic captures; no production deployment claim.</a:t>
+              <a:rPr sz="1050" b="1">
+                <a:solidFill>
+                  <a:srgbClr val="2D5A3A"/>
+                </a:solidFill>
+                <a:latin typeface="Calibri"/>
+              </a:rPr>
+              <a:t>Benefits demonstrated on controlled synthetic captures; no production deployment and no measured time-saving claim.</a:t>
             </a:r>
           </a:p>
         </p:txBody>
@@ -13980,8 +14771,8 @@
         </p:nvSpPr>
         <p:spPr bwMode="auto">
           <a:xfrm>
-            <a:off x="384048" y="950976"/>
-            <a:ext cx="11430000" cy="329184"/>
+            <a:off x="384048" y="1042415"/>
+            <a:ext cx="11420856" cy="347472"/>
           </a:xfrm>
           <a:prstGeom prst="rect">
             <a:avLst/>
@@ -14286,8 +15077,8 @@
         </p:nvSpPr>
         <p:spPr>
           <a:xfrm>
-            <a:off x="384048" y="1316736"/>
-            <a:ext cx="3749039" cy="1426464"/>
+            <a:off x="384048" y="1444752"/>
+            <a:ext cx="3709416" cy="1335024"/>
           </a:xfrm>
           <a:prstGeom prst="roundRect">
             <a:avLst/>
@@ -14322,7 +15113,7 @@
           <a:p>
             <a:pPr algn="ctr">
               <a:lnSpc>
-                <a:spcPct val="100000"/>
+                <a:spcPct val="98000"/>
               </a:lnSpc>
               <a:spcAft>
                 <a:spcPts val="300"/>
@@ -14330,7 +15121,7 @@
               <a:buNone/>
             </a:pPr>
             <a:r>
-              <a:rPr sz="1250" b="1">
+              <a:rPr sz="1200" b="1">
                 <a:solidFill>
                   <a:srgbClr val="0B5FA5"/>
                 </a:solidFill>
@@ -14342,7 +15133,7 @@
           <a:p>
             <a:pPr>
               <a:lnSpc>
-                <a:spcPct val="100000"/>
+                <a:spcPct val="98000"/>
               </a:lnSpc>
               <a:spcAft>
                 <a:spcPts val="300"/>
@@ -14350,7 +15141,7 @@
               <a:buNone/>
             </a:pPr>
             <a:r>
-              <a:rPr sz="1100" b="0">
+              <a:rPr sz="1050" b="0">
                 <a:solidFill>
                   <a:srgbClr val="1F2C3F"/>
                 </a:solidFill>
@@ -14362,7 +15153,7 @@
           <a:p>
             <a:pPr>
               <a:lnSpc>
-                <a:spcPct val="100000"/>
+                <a:spcPct val="98000"/>
               </a:lnSpc>
               <a:spcAft>
                 <a:spcPts val="300"/>
@@ -14370,7 +15161,7 @@
               <a:buNone/>
             </a:pPr>
             <a:r>
-              <a:rPr sz="1100" b="0">
+              <a:rPr sz="1050" b="0">
                 <a:solidFill>
                   <a:srgbClr val="1F2C3F"/>
                 </a:solidFill>
@@ -14382,7 +15173,7 @@
           <a:p>
             <a:pPr>
               <a:lnSpc>
-                <a:spcPct val="100000"/>
+                <a:spcPct val="98000"/>
               </a:lnSpc>
               <a:spcAft>
                 <a:spcPts val="300"/>
@@ -14390,7 +15181,7 @@
               <a:buNone/>
             </a:pPr>
             <a:r>
-              <a:rPr sz="1100" b="0">
+              <a:rPr sz="1050" b="0">
                 <a:solidFill>
                   <a:srgbClr val="1F2C3F"/>
                 </a:solidFill>
@@ -14402,7 +15193,7 @@
           <a:p>
             <a:pPr>
               <a:lnSpc>
-                <a:spcPct val="100000"/>
+                <a:spcPct val="98000"/>
               </a:lnSpc>
               <a:spcAft>
                 <a:spcPts val="300"/>
@@ -14410,7 +15201,7 @@
               <a:buNone/>
             </a:pPr>
             <a:r>
-              <a:rPr sz="1100" b="0">
+              <a:rPr sz="1050" b="0">
                 <a:solidFill>
                   <a:srgbClr val="1F2C3F"/>
                 </a:solidFill>
@@ -14429,8 +15220,8 @@
         </p:nvSpPr>
         <p:spPr>
           <a:xfrm>
-            <a:off x="4224528" y="1316736"/>
-            <a:ext cx="3749039" cy="1426464"/>
+            <a:off x="4239768" y="1444752"/>
+            <a:ext cx="3709416" cy="1335024"/>
           </a:xfrm>
           <a:prstGeom prst="roundRect">
             <a:avLst/>
@@ -14465,7 +15256,7 @@
           <a:p>
             <a:pPr algn="ctr">
               <a:lnSpc>
-                <a:spcPct val="100000"/>
+                <a:spcPct val="98000"/>
               </a:lnSpc>
               <a:spcAft>
                 <a:spcPts val="300"/>
@@ -14473,7 +15264,7 @@
               <a:buNone/>
             </a:pPr>
             <a:r>
-              <a:rPr sz="1250" b="1">
+              <a:rPr sz="1200" b="1">
                 <a:solidFill>
                   <a:srgbClr val="0B5FA5"/>
                 </a:solidFill>
@@ -14485,7 +15276,7 @@
           <a:p>
             <a:pPr>
               <a:lnSpc>
-                <a:spcPct val="100000"/>
+                <a:spcPct val="98000"/>
               </a:lnSpc>
               <a:spcAft>
                 <a:spcPts val="300"/>
@@ -14493,7 +15284,7 @@
               <a:buNone/>
             </a:pPr>
             <a:r>
-              <a:rPr sz="1100" b="0">
+              <a:rPr sz="1050" b="0">
                 <a:solidFill>
                   <a:srgbClr val="1F2C3F"/>
                 </a:solidFill>
@@ -14505,7 +15296,7 @@
           <a:p>
             <a:pPr>
               <a:lnSpc>
-                <a:spcPct val="100000"/>
+                <a:spcPct val="98000"/>
               </a:lnSpc>
               <a:spcAft>
                 <a:spcPts val="300"/>
@@ -14513,7 +15304,7 @@
               <a:buNone/>
             </a:pPr>
             <a:r>
-              <a:rPr sz="1100" b="0">
+              <a:rPr sz="1050" b="0">
                 <a:solidFill>
                   <a:srgbClr val="1F2C3F"/>
                 </a:solidFill>
@@ -14525,7 +15316,7 @@
           <a:p>
             <a:pPr>
               <a:lnSpc>
-                <a:spcPct val="100000"/>
+                <a:spcPct val="98000"/>
               </a:lnSpc>
               <a:spcAft>
                 <a:spcPts val="300"/>
@@ -14533,7 +15324,7 @@
               <a:buNone/>
             </a:pPr>
             <a:r>
-              <a:rPr sz="1100" b="0">
+              <a:rPr sz="1050" b="0">
                 <a:solidFill>
                   <a:srgbClr val="1F2C3F"/>
                 </a:solidFill>
@@ -14545,7 +15336,7 @@
           <a:p>
             <a:pPr>
               <a:lnSpc>
-                <a:spcPct val="100000"/>
+                <a:spcPct val="98000"/>
               </a:lnSpc>
               <a:spcAft>
                 <a:spcPts val="300"/>
@@ -14553,7 +15344,7 @@
               <a:buNone/>
             </a:pPr>
             <a:r>
-              <a:rPr sz="1100" b="0">
+              <a:rPr sz="1050" b="0">
                 <a:solidFill>
                   <a:srgbClr val="1F2C3F"/>
                 </a:solidFill>
@@ -14572,8 +15363,8 @@
         </p:nvSpPr>
         <p:spPr>
           <a:xfrm>
-            <a:off x="8065008" y="1316736"/>
-            <a:ext cx="3749039" cy="1426464"/>
+            <a:off x="8095488" y="1444752"/>
+            <a:ext cx="3709416" cy="1335024"/>
           </a:xfrm>
           <a:prstGeom prst="roundRect">
             <a:avLst/>
@@ -14608,7 +15399,7 @@
           <a:p>
             <a:pPr algn="ctr">
               <a:lnSpc>
-                <a:spcPct val="100000"/>
+                <a:spcPct val="98000"/>
               </a:lnSpc>
               <a:spcAft>
                 <a:spcPts val="300"/>
@@ -14616,7 +15407,7 @@
               <a:buNone/>
             </a:pPr>
             <a:r>
-              <a:rPr sz="1250" b="1">
+              <a:rPr sz="1200" b="1">
                 <a:solidFill>
                   <a:srgbClr val="0B5FA5"/>
                 </a:solidFill>
@@ -14628,7 +15419,7 @@
           <a:p>
             <a:pPr>
               <a:lnSpc>
-                <a:spcPct val="100000"/>
+                <a:spcPct val="98000"/>
               </a:lnSpc>
               <a:spcAft>
                 <a:spcPts val="300"/>
@@ -14636,7 +15427,7 @@
               <a:buNone/>
             </a:pPr>
             <a:r>
-              <a:rPr sz="1100" b="0">
+              <a:rPr sz="1050" b="0">
                 <a:solidFill>
                   <a:srgbClr val="1F2C3F"/>
                 </a:solidFill>
@@ -14648,7 +15439,7 @@
           <a:p>
             <a:pPr>
               <a:lnSpc>
-                <a:spcPct val="100000"/>
+                <a:spcPct val="98000"/>
               </a:lnSpc>
               <a:spcAft>
                 <a:spcPts val="300"/>
@@ -14656,7 +15447,7 @@
               <a:buNone/>
             </a:pPr>
             <a:r>
-              <a:rPr sz="1100" b="0">
+              <a:rPr sz="1050" b="0">
                 <a:solidFill>
                   <a:srgbClr val="1F2C3F"/>
                 </a:solidFill>
@@ -14668,7 +15459,7 @@
           <a:p>
             <a:pPr>
               <a:lnSpc>
-                <a:spcPct val="100000"/>
+                <a:spcPct val="98000"/>
               </a:lnSpc>
               <a:spcAft>
                 <a:spcPts val="300"/>
@@ -14676,7 +15467,7 @@
               <a:buNone/>
             </a:pPr>
             <a:r>
-              <a:rPr sz="1100" b="0">
+              <a:rPr sz="1050" b="0">
                 <a:solidFill>
                   <a:srgbClr val="1F2C3F"/>
                 </a:solidFill>
@@ -14688,7 +15479,7 @@
           <a:p>
             <a:pPr>
               <a:lnSpc>
-                <a:spcPct val="100000"/>
+                <a:spcPct val="98000"/>
               </a:lnSpc>
               <a:spcAft>
                 <a:spcPts val="300"/>
@@ -14696,7 +15487,7 @@
               <a:buNone/>
             </a:pPr>
             <a:r>
-              <a:rPr sz="1100" b="0">
+              <a:rPr sz="1050" b="0">
                 <a:solidFill>
                   <a:srgbClr val="1F2C3F"/>
                 </a:solidFill>
@@ -14716,7 +15507,7 @@
         <p:spPr>
           <a:xfrm>
             <a:off x="384048" y="2926080"/>
-            <a:ext cx="11430000" cy="1627632"/>
+            <a:ext cx="11420856" cy="1572768"/>
           </a:xfrm>
           <a:prstGeom prst="roundRect">
             <a:avLst/>
@@ -14778,8 +15569,8 @@
         </p:nvSpPr>
         <p:spPr>
           <a:xfrm>
-            <a:off x="548640" y="3273552"/>
-            <a:ext cx="1682496" cy="1115568"/>
+            <a:off x="530352" y="3200400"/>
+            <a:ext cx="1595628" cy="1115568"/>
           </a:xfrm>
           <a:prstGeom prst="roundRect">
             <a:avLst/>
@@ -14855,58 +15646,14 @@
       </p:sp>
       <p:sp>
         <p:nvSpPr>
-          <p:cNvPr id="17416" name="Right Arrow 17415"/>
+          <p:cNvPr id="17416" name="Rounded Rectangle 17415"/>
           <p:cNvSpPr/>
           <p:nvPr/>
         </p:nvSpPr>
         <p:spPr>
           <a:xfrm>
-            <a:off x="2258568" y="3767328"/>
-            <a:ext cx="164592" cy="164592"/>
-          </a:xfrm>
-          <a:prstGeom prst="rightArrow">
-            <a:avLst/>
-          </a:prstGeom>
-          <a:solidFill>
-            <a:srgbClr val="4A5A70"/>
-          </a:solidFill>
-          <a:ln>
-            <a:noFill/>
-          </a:ln>
-          <a:effectLst/>
-        </p:spPr>
-        <p:style>
-          <a:lnRef idx="1">
-            <a:schemeClr val="accent1"/>
-          </a:lnRef>
-          <a:fillRef idx="3">
-            <a:schemeClr val="accent1"/>
-          </a:fillRef>
-          <a:effectRef idx="2">
-            <a:schemeClr val="accent1"/>
-          </a:effectRef>
-          <a:fontRef idx="minor">
-            <a:schemeClr val="lt1"/>
-          </a:fontRef>
-        </p:style>
-        <p:txBody>
-          <a:bodyPr rtlCol="0" anchor="ctr"/>
-          <a:lstStyle/>
-          <a:p>
-            <a:pPr algn="ctr"/>
-          </a:p>
-        </p:txBody>
-      </p:sp>
-      <p:sp>
-        <p:nvSpPr>
-          <p:cNvPr id="17417" name="Rounded Rectangle 17416"/>
-          <p:cNvSpPr/>
-          <p:nvPr/>
-        </p:nvSpPr>
-        <p:spPr>
-          <a:xfrm>
-            <a:off x="2450591" y="3273552"/>
-            <a:ext cx="1682496" cy="1115568"/>
+            <a:off x="2436876" y="3200400"/>
+            <a:ext cx="1595628" cy="1115568"/>
           </a:xfrm>
           <a:prstGeom prst="roundRect">
             <a:avLst/>
@@ -14982,58 +15729,14 @@
       </p:sp>
       <p:sp>
         <p:nvSpPr>
-          <p:cNvPr id="17418" name="Right Arrow 17417"/>
+          <p:cNvPr id="17417" name="Rounded Rectangle 17416"/>
           <p:cNvSpPr/>
           <p:nvPr/>
         </p:nvSpPr>
         <p:spPr>
           <a:xfrm>
-            <a:off x="4160520" y="3767328"/>
-            <a:ext cx="164592" cy="164592"/>
-          </a:xfrm>
-          <a:prstGeom prst="rightArrow">
-            <a:avLst/>
-          </a:prstGeom>
-          <a:solidFill>
-            <a:srgbClr val="4A5A70"/>
-          </a:solidFill>
-          <a:ln>
-            <a:noFill/>
-          </a:ln>
-          <a:effectLst/>
-        </p:spPr>
-        <p:style>
-          <a:lnRef idx="1">
-            <a:schemeClr val="accent1"/>
-          </a:lnRef>
-          <a:fillRef idx="3">
-            <a:schemeClr val="accent1"/>
-          </a:fillRef>
-          <a:effectRef idx="2">
-            <a:schemeClr val="accent1"/>
-          </a:effectRef>
-          <a:fontRef idx="minor">
-            <a:schemeClr val="lt1"/>
-          </a:fontRef>
-        </p:style>
-        <p:txBody>
-          <a:bodyPr rtlCol="0" anchor="ctr"/>
-          <a:lstStyle/>
-          <a:p>
-            <a:pPr algn="ctr"/>
-          </a:p>
-        </p:txBody>
-      </p:sp>
-      <p:sp>
-        <p:nvSpPr>
-          <p:cNvPr id="17419" name="Rounded Rectangle 17418"/>
-          <p:cNvSpPr/>
-          <p:nvPr/>
-        </p:nvSpPr>
-        <p:spPr>
-          <a:xfrm>
-            <a:off x="4352544" y="3273552"/>
-            <a:ext cx="1682496" cy="1115568"/>
+            <a:off x="4343400" y="3200400"/>
+            <a:ext cx="1595628" cy="1115568"/>
           </a:xfrm>
           <a:prstGeom prst="roundRect">
             <a:avLst/>
@@ -15109,58 +15812,14 @@
       </p:sp>
       <p:sp>
         <p:nvSpPr>
-          <p:cNvPr id="17420" name="Right Arrow 17419"/>
+          <p:cNvPr id="17418" name="Rounded Rectangle 17417"/>
           <p:cNvSpPr/>
           <p:nvPr/>
         </p:nvSpPr>
         <p:spPr>
           <a:xfrm>
-            <a:off x="6062472" y="3767328"/>
-            <a:ext cx="164592" cy="164592"/>
-          </a:xfrm>
-          <a:prstGeom prst="rightArrow">
-            <a:avLst/>
-          </a:prstGeom>
-          <a:solidFill>
-            <a:srgbClr val="4A5A70"/>
-          </a:solidFill>
-          <a:ln>
-            <a:noFill/>
-          </a:ln>
-          <a:effectLst/>
-        </p:spPr>
-        <p:style>
-          <a:lnRef idx="1">
-            <a:schemeClr val="accent1"/>
-          </a:lnRef>
-          <a:fillRef idx="3">
-            <a:schemeClr val="accent1"/>
-          </a:fillRef>
-          <a:effectRef idx="2">
-            <a:schemeClr val="accent1"/>
-          </a:effectRef>
-          <a:fontRef idx="minor">
-            <a:schemeClr val="lt1"/>
-          </a:fontRef>
-        </p:style>
-        <p:txBody>
-          <a:bodyPr rtlCol="0" anchor="ctr"/>
-          <a:lstStyle/>
-          <a:p>
-            <a:pPr algn="ctr"/>
-          </a:p>
-        </p:txBody>
-      </p:sp>
-      <p:sp>
-        <p:nvSpPr>
-          <p:cNvPr id="17421" name="Rounded Rectangle 17420"/>
-          <p:cNvSpPr/>
-          <p:nvPr/>
-        </p:nvSpPr>
-        <p:spPr>
-          <a:xfrm>
-            <a:off x="6254496" y="3273552"/>
-            <a:ext cx="1682496" cy="1115568"/>
+            <a:off x="6249924" y="3200400"/>
+            <a:ext cx="1595628" cy="1115568"/>
           </a:xfrm>
           <a:prstGeom prst="roundRect">
             <a:avLst/>
@@ -15229,65 +15888,21 @@
                 </a:solidFill>
                 <a:latin typeface="Calibri"/>
               </a:rPr>
-              <a:t>against Wireshark's own dissector</a:t>
-            </a:r>
-          </a:p>
-        </p:txBody>
-      </p:sp>
-      <p:sp>
-        <p:nvSpPr>
-          <p:cNvPr id="17422" name="Right Arrow 17421"/>
+              <a:t>against Wireshark’s own dissector</a:t>
+            </a:r>
+          </a:p>
+        </p:txBody>
+      </p:sp>
+      <p:sp>
+        <p:nvSpPr>
+          <p:cNvPr id="17419" name="Rounded Rectangle 17418"/>
           <p:cNvSpPr/>
           <p:nvPr/>
         </p:nvSpPr>
         <p:spPr>
           <a:xfrm>
-            <a:off x="7964423" y="3767328"/>
-            <a:ext cx="164592" cy="164592"/>
-          </a:xfrm>
-          <a:prstGeom prst="rightArrow">
-            <a:avLst/>
-          </a:prstGeom>
-          <a:solidFill>
-            <a:srgbClr val="4A5A70"/>
-          </a:solidFill>
-          <a:ln>
-            <a:noFill/>
-          </a:ln>
-          <a:effectLst/>
-        </p:spPr>
-        <p:style>
-          <a:lnRef idx="1">
-            <a:schemeClr val="accent1"/>
-          </a:lnRef>
-          <a:fillRef idx="3">
-            <a:schemeClr val="accent1"/>
-          </a:fillRef>
-          <a:effectRef idx="2">
-            <a:schemeClr val="accent1"/>
-          </a:effectRef>
-          <a:fontRef idx="minor">
-            <a:schemeClr val="lt1"/>
-          </a:fontRef>
-        </p:style>
-        <p:txBody>
-          <a:bodyPr rtlCol="0" anchor="ctr"/>
-          <a:lstStyle/>
-          <a:p>
-            <a:pPr algn="ctr"/>
-          </a:p>
-        </p:txBody>
-      </p:sp>
-      <p:sp>
-        <p:nvSpPr>
-          <p:cNvPr id="17423" name="Rounded Rectangle 17422"/>
-          <p:cNvSpPr/>
-          <p:nvPr/>
-        </p:nvSpPr>
-        <p:spPr>
-          <a:xfrm>
-            <a:off x="8156448" y="3273552"/>
-            <a:ext cx="1682496" cy="1115568"/>
+            <a:off x="8156448" y="3200400"/>
+            <a:ext cx="1595628" cy="1115568"/>
           </a:xfrm>
           <a:prstGeom prst="roundRect">
             <a:avLst/>
@@ -15363,58 +15978,14 @@
       </p:sp>
       <p:sp>
         <p:nvSpPr>
-          <p:cNvPr id="17424" name="Right Arrow 17423"/>
+          <p:cNvPr id="17420" name="Rounded Rectangle 17419"/>
           <p:cNvSpPr/>
           <p:nvPr/>
         </p:nvSpPr>
         <p:spPr>
           <a:xfrm>
-            <a:off x="9866376" y="3767328"/>
-            <a:ext cx="164592" cy="164592"/>
-          </a:xfrm>
-          <a:prstGeom prst="rightArrow">
-            <a:avLst/>
-          </a:prstGeom>
-          <a:solidFill>
-            <a:srgbClr val="4A5A70"/>
-          </a:solidFill>
-          <a:ln>
-            <a:noFill/>
-          </a:ln>
-          <a:effectLst/>
-        </p:spPr>
-        <p:style>
-          <a:lnRef idx="1">
-            <a:schemeClr val="accent1"/>
-          </a:lnRef>
-          <a:fillRef idx="3">
-            <a:schemeClr val="accent1"/>
-          </a:fillRef>
-          <a:effectRef idx="2">
-            <a:schemeClr val="accent1"/>
-          </a:effectRef>
-          <a:fontRef idx="minor">
-            <a:schemeClr val="lt1"/>
-          </a:fontRef>
-        </p:style>
-        <p:txBody>
-          <a:bodyPr rtlCol="0" anchor="ctr"/>
-          <a:lstStyle/>
-          <a:p>
-            <a:pPr algn="ctr"/>
-          </a:p>
-        </p:txBody>
-      </p:sp>
-      <p:sp>
-        <p:nvSpPr>
-          <p:cNvPr id="17425" name="Rounded Rectangle 17424"/>
-          <p:cNvSpPr/>
-          <p:nvPr/>
-        </p:nvSpPr>
-        <p:spPr>
-          <a:xfrm>
-            <a:off x="10058400" y="3273552"/>
-            <a:ext cx="1682496" cy="1115568"/>
+            <a:off x="10062972" y="3200400"/>
+            <a:ext cx="1595628" cy="1115568"/>
           </a:xfrm>
           <a:prstGeom prst="roundRect">
             <a:avLst/>
@@ -15490,14 +16061,234 @@
       </p:sp>
       <p:sp>
         <p:nvSpPr>
+          <p:cNvPr id="17421" name="Right Arrow 17420"/>
+          <p:cNvSpPr/>
+          <p:nvPr/>
+        </p:nvSpPr>
+        <p:spPr>
+          <a:xfrm>
+            <a:off x="2180844" y="3675887"/>
+            <a:ext cx="201168" cy="164592"/>
+          </a:xfrm>
+          <a:prstGeom prst="rightArrow">
+            <a:avLst/>
+          </a:prstGeom>
+          <a:solidFill>
+            <a:srgbClr val="4A5A70"/>
+          </a:solidFill>
+          <a:ln>
+            <a:noFill/>
+          </a:ln>
+          <a:effectLst/>
+        </p:spPr>
+        <p:style>
+          <a:lnRef idx="1">
+            <a:schemeClr val="accent1"/>
+          </a:lnRef>
+          <a:fillRef idx="3">
+            <a:schemeClr val="accent1"/>
+          </a:fillRef>
+          <a:effectRef idx="2">
+            <a:schemeClr val="accent1"/>
+          </a:effectRef>
+          <a:fontRef idx="minor">
+            <a:schemeClr val="lt1"/>
+          </a:fontRef>
+        </p:style>
+        <p:txBody>
+          <a:bodyPr rtlCol="0" anchor="ctr"/>
+          <a:lstStyle/>
+          <a:p>
+            <a:pPr algn="ctr"/>
+          </a:p>
+        </p:txBody>
+      </p:sp>
+      <p:sp>
+        <p:nvSpPr>
+          <p:cNvPr id="17422" name="Right Arrow 17421"/>
+          <p:cNvSpPr/>
+          <p:nvPr/>
+        </p:nvSpPr>
+        <p:spPr>
+          <a:xfrm>
+            <a:off x="4087368" y="3675887"/>
+            <a:ext cx="201168" cy="164592"/>
+          </a:xfrm>
+          <a:prstGeom prst="rightArrow">
+            <a:avLst/>
+          </a:prstGeom>
+          <a:solidFill>
+            <a:srgbClr val="4A5A70"/>
+          </a:solidFill>
+          <a:ln>
+            <a:noFill/>
+          </a:ln>
+          <a:effectLst/>
+        </p:spPr>
+        <p:style>
+          <a:lnRef idx="1">
+            <a:schemeClr val="accent1"/>
+          </a:lnRef>
+          <a:fillRef idx="3">
+            <a:schemeClr val="accent1"/>
+          </a:fillRef>
+          <a:effectRef idx="2">
+            <a:schemeClr val="accent1"/>
+          </a:effectRef>
+          <a:fontRef idx="minor">
+            <a:schemeClr val="lt1"/>
+          </a:fontRef>
+        </p:style>
+        <p:txBody>
+          <a:bodyPr rtlCol="0" anchor="ctr"/>
+          <a:lstStyle/>
+          <a:p>
+            <a:pPr algn="ctr"/>
+          </a:p>
+        </p:txBody>
+      </p:sp>
+      <p:sp>
+        <p:nvSpPr>
+          <p:cNvPr id="17423" name="Right Arrow 17422"/>
+          <p:cNvSpPr/>
+          <p:nvPr/>
+        </p:nvSpPr>
+        <p:spPr>
+          <a:xfrm>
+            <a:off x="5993892" y="3675887"/>
+            <a:ext cx="201168" cy="164592"/>
+          </a:xfrm>
+          <a:prstGeom prst="rightArrow">
+            <a:avLst/>
+          </a:prstGeom>
+          <a:solidFill>
+            <a:srgbClr val="4A5A70"/>
+          </a:solidFill>
+          <a:ln>
+            <a:noFill/>
+          </a:ln>
+          <a:effectLst/>
+        </p:spPr>
+        <p:style>
+          <a:lnRef idx="1">
+            <a:schemeClr val="accent1"/>
+          </a:lnRef>
+          <a:fillRef idx="3">
+            <a:schemeClr val="accent1"/>
+          </a:fillRef>
+          <a:effectRef idx="2">
+            <a:schemeClr val="accent1"/>
+          </a:effectRef>
+          <a:fontRef idx="minor">
+            <a:schemeClr val="lt1"/>
+          </a:fontRef>
+        </p:style>
+        <p:txBody>
+          <a:bodyPr rtlCol="0" anchor="ctr"/>
+          <a:lstStyle/>
+          <a:p>
+            <a:pPr algn="ctr"/>
+          </a:p>
+        </p:txBody>
+      </p:sp>
+      <p:sp>
+        <p:nvSpPr>
+          <p:cNvPr id="17424" name="Right Arrow 17423"/>
+          <p:cNvSpPr/>
+          <p:nvPr/>
+        </p:nvSpPr>
+        <p:spPr>
+          <a:xfrm>
+            <a:off x="7900416" y="3675887"/>
+            <a:ext cx="201168" cy="164592"/>
+          </a:xfrm>
+          <a:prstGeom prst="rightArrow">
+            <a:avLst/>
+          </a:prstGeom>
+          <a:solidFill>
+            <a:srgbClr val="4A5A70"/>
+          </a:solidFill>
+          <a:ln>
+            <a:noFill/>
+          </a:ln>
+          <a:effectLst/>
+        </p:spPr>
+        <p:style>
+          <a:lnRef idx="1">
+            <a:schemeClr val="accent1"/>
+          </a:lnRef>
+          <a:fillRef idx="3">
+            <a:schemeClr val="accent1"/>
+          </a:fillRef>
+          <a:effectRef idx="2">
+            <a:schemeClr val="accent1"/>
+          </a:effectRef>
+          <a:fontRef idx="minor">
+            <a:schemeClr val="lt1"/>
+          </a:fontRef>
+        </p:style>
+        <p:txBody>
+          <a:bodyPr rtlCol="0" anchor="ctr"/>
+          <a:lstStyle/>
+          <a:p>
+            <a:pPr algn="ctr"/>
+          </a:p>
+        </p:txBody>
+      </p:sp>
+      <p:sp>
+        <p:nvSpPr>
+          <p:cNvPr id="17425" name="Right Arrow 17424"/>
+          <p:cNvSpPr/>
+          <p:nvPr/>
+        </p:nvSpPr>
+        <p:spPr>
+          <a:xfrm>
+            <a:off x="9806940" y="3675887"/>
+            <a:ext cx="201168" cy="164592"/>
+          </a:xfrm>
+          <a:prstGeom prst="rightArrow">
+            <a:avLst/>
+          </a:prstGeom>
+          <a:solidFill>
+            <a:srgbClr val="4A5A70"/>
+          </a:solidFill>
+          <a:ln>
+            <a:noFill/>
+          </a:ln>
+          <a:effectLst/>
+        </p:spPr>
+        <p:style>
+          <a:lnRef idx="1">
+            <a:schemeClr val="accent1"/>
+          </a:lnRef>
+          <a:fillRef idx="3">
+            <a:schemeClr val="accent1"/>
+          </a:fillRef>
+          <a:effectRef idx="2">
+            <a:schemeClr val="accent1"/>
+          </a:effectRef>
+          <a:fontRef idx="minor">
+            <a:schemeClr val="lt1"/>
+          </a:fontRef>
+        </p:style>
+        <p:txBody>
+          <a:bodyPr rtlCol="0" anchor="ctr"/>
+          <a:lstStyle/>
+          <a:p>
+            <a:pPr algn="ctr"/>
+          </a:p>
+        </p:txBody>
+      </p:sp>
+      <p:sp>
+        <p:nvSpPr>
           <p:cNvPr id="17426" name="Rounded Rectangle 17425"/>
           <p:cNvSpPr/>
           <p:nvPr/>
         </p:nvSpPr>
         <p:spPr>
           <a:xfrm>
-            <a:off x="384048" y="4736592"/>
-            <a:ext cx="8284464" cy="1024128"/>
+            <a:off x="384048" y="4754880"/>
+            <a:ext cx="6766560" cy="1060704"/>
           </a:xfrm>
           <a:prstGeom prst="roundRect">
             <a:avLst/>
@@ -15540,7 +16331,7 @@
               <a:buNone/>
             </a:pPr>
             <a:r>
-              <a:rPr sz="1250" b="1">
+              <a:rPr sz="1200" b="1">
                 <a:solidFill>
                   <a:srgbClr val="0B5FA5"/>
                 </a:solidFill>
@@ -15557,9 +16348,10 @@
               <a:spcAft>
                 <a:spcPts val="200"/>
               </a:spcAft>
-            </a:pPr>
-            <a:r>
-              <a:rPr sz="1200" b="1">
+              <a:buNone/>
+            </a:pPr>
+            <a:r>
+              <a:rPr sz="1150" b="1">
                 <a:solidFill>
                   <a:srgbClr val="111B2A"/>
                 </a:solidFill>
@@ -15568,7 +16360,7 @@
               <a:t>GitHub repository  </a:t>
             </a:r>
             <a:r>
-              <a:rPr sz="1200" u="sng">
+              <a:rPr sz="1150" u="sng">
                 <a:solidFill>
                   <a:srgbClr val="0B5FA5"/>
                 </a:solidFill>
@@ -15586,24 +16378,16 @@
               <a:spcAft>
                 <a:spcPts val="200"/>
               </a:spcAft>
-            </a:pPr>
-            <a:r>
-              <a:rPr sz="1200" b="1">
+              <a:buNone/>
+            </a:pPr>
+            <a:r>
+              <a:rPr sz="1150" b="1">
                 <a:solidFill>
                   <a:srgbClr val="111B2A"/>
                 </a:solidFill>
                 <a:latin typeface="Calibri"/>
               </a:rPr>
-              <a:t>Demonstration video  </a:t>
-            </a:r>
-            <a:r>
-              <a:rPr sz="1200" i="1">
-                <a:solidFill>
-                  <a:srgbClr val="4A5A70"/>
-                </a:solidFill>
-                <a:latin typeface="Calibri"/>
-              </a:rPr>
-              <a:t>Included in the submission package.</a:t>
+              <a:t>Demo video included in submission package.</a:t>
             </a:r>
           </a:p>
         </p:txBody>
@@ -15616,8 +16400,8 @@
         </p:nvSpPr>
         <p:spPr>
           <a:xfrm>
-            <a:off x="8833104" y="4736592"/>
-            <a:ext cx="2980944" cy="1024128"/>
+            <a:off x="7296912" y="4754880"/>
+            <a:ext cx="4507992" cy="1060704"/>
           </a:xfrm>
           <a:prstGeom prst="roundRect">
             <a:avLst/>
@@ -15650,24 +16434,7 @@
           <a:bodyPr rtlCol="0" anchor="t" wrap="square" tIns="54864" bIns="54864"/>
           <a:lstStyle/>
           <a:p>
-            <a:pPr algn="ctr">
-              <a:lnSpc>
-                <a:spcPct val="100000"/>
-              </a:lnSpc>
-              <a:spcAft>
-                <a:spcPts val="300"/>
-              </a:spcAft>
-              <a:buNone/>
-            </a:pPr>
-            <a:r>
-              <a:rPr sz="400" b="0">
-                <a:solidFill>
-                  <a:srgbClr val="4A5A70"/>
-                </a:solidFill>
-                <a:latin typeface="Calibri"/>
-              </a:rPr>
-              <a:t/>
-            </a:r>
+            <a:pPr algn="ctr"/>
           </a:p>
         </p:txBody>
       </p:sp>
@@ -15687,8 +16454,8 @@
         </p:blipFill>
         <p:spPr>
           <a:xfrm>
-            <a:off x="8961120" y="4846320"/>
-            <a:ext cx="804672" cy="804672"/>
+            <a:off x="7424928" y="4892040"/>
+            <a:ext cx="786384" cy="786384"/>
           </a:xfrm>
           <a:prstGeom prst="rect">
             <a:avLst/>
@@ -15703,8 +16470,8 @@
         </p:nvSpPr>
         <p:spPr>
           <a:xfrm>
-            <a:off x="9875520" y="4882896"/>
-            <a:ext cx="1847088" cy="731520"/>
+            <a:off x="8339328" y="4983480"/>
+            <a:ext cx="3337559" cy="603504"/>
           </a:xfrm>
           <a:prstGeom prst="rect">
             <a:avLst/>
@@ -15712,7 +16479,7 @@
           <a:noFill/>
         </p:spPr>
         <p:txBody>
-          <a:bodyPr wrap="square">
+          <a:bodyPr wrap="square" anchor="ctr">
             <a:spAutoFit/>
           </a:bodyPr>
           <a:lstStyle/>
@@ -15753,7 +16520,7 @@
                 </a:solidFill>
                 <a:latin typeface="Calibri"/>
               </a:rPr>
-              <a:t>Public repository — source, tests and submission package.</a:t>
+              <a:t>Public — source, tests and submission package.</a:t>
             </a:r>
           </a:p>
         </p:txBody>

--- a/submission/final/SecureMailScope-SIH26159-Zero-Day.pptx
+++ b/submission/final/SecureMailScope-SIH26159-Zero-Day.pptx
@@ -7673,7 +7673,7 @@
         <p:spPr>
           <a:xfrm>
             <a:off x="384048" y="1335024"/>
-            <a:ext cx="1793737" cy="2743200"/>
+            <a:ext cx="1793737" cy="2962656"/>
           </a:xfrm>
           <a:prstGeom prst="roundRect">
             <a:avLst/>
@@ -7716,7 +7716,7 @@
               <a:buNone/>
             </a:pPr>
             <a:r>
-              <a:rPr sz="750" b="1">
+              <a:rPr sz="800" b="1">
                 <a:solidFill>
                   <a:srgbClr val="8A9BB0"/>
                 </a:solidFill>
@@ -7735,8 +7735,8 @@
         </p:nvSpPr>
         <p:spPr>
           <a:xfrm>
-            <a:off x="475488" y="2039111"/>
-            <a:ext cx="1610857" cy="676656"/>
+            <a:off x="475488" y="2093976"/>
+            <a:ext cx="1610857" cy="768096"/>
           </a:xfrm>
           <a:prstGeom prst="roundRect">
             <a:avLst/>
@@ -7779,7 +7779,7 @@
               <a:buNone/>
             </a:pPr>
             <a:r>
-              <a:rPr sz="950" b="1">
+              <a:rPr sz="1000" b="1">
                 <a:solidFill>
                   <a:srgbClr val="111B2A"/>
                 </a:solidFill>
@@ -7799,7 +7799,7 @@
               <a:buNone/>
             </a:pPr>
             <a:r>
-              <a:rPr sz="750" b="0">
+              <a:rPr sz="850" b="0">
                 <a:solidFill>
                   <a:srgbClr val="4A5A70"/>
                 </a:solidFill>
@@ -7818,7 +7818,7 @@
         </p:nvSpPr>
         <p:spPr>
           <a:xfrm>
-            <a:off x="1198620" y="2724911"/>
+            <a:off x="1198620" y="2871215"/>
             <a:ext cx="164592" cy="109728"/>
           </a:xfrm>
           <a:prstGeom prst="downArrow">
@@ -7862,8 +7862,8 @@
         </p:nvSpPr>
         <p:spPr>
           <a:xfrm>
-            <a:off x="475488" y="2843784"/>
-            <a:ext cx="1610857" cy="676656"/>
+            <a:off x="475488" y="2990088"/>
+            <a:ext cx="1610857" cy="768096"/>
           </a:xfrm>
           <a:prstGeom prst="roundRect">
             <a:avLst/>
@@ -7906,7 +7906,7 @@
               <a:buNone/>
             </a:pPr>
             <a:r>
-              <a:rPr sz="950" b="1">
+              <a:rPr sz="1000" b="1">
                 <a:solidFill>
                   <a:srgbClr val="111B2A"/>
                 </a:solidFill>
@@ -7926,7 +7926,7 @@
               <a:buNone/>
             </a:pPr>
             <a:r>
-              <a:rPr sz="750" b="0">
+              <a:rPr sz="850" b="0">
                 <a:solidFill>
                   <a:srgbClr val="4A5A70"/>
                 </a:solidFill>
@@ -7946,7 +7946,7 @@
         <p:spPr>
           <a:xfrm>
             <a:off x="2324089" y="1335024"/>
-            <a:ext cx="2196413" cy="2743200"/>
+            <a:ext cx="2196413" cy="2962656"/>
           </a:xfrm>
           <a:prstGeom prst="roundRect">
             <a:avLst/>
@@ -7989,7 +7989,7 @@
               <a:buNone/>
             </a:pPr>
             <a:r>
-              <a:rPr sz="750" b="1">
+              <a:rPr sz="800" b="1">
                 <a:solidFill>
                   <a:srgbClr val="8A9BB0"/>
                 </a:solidFill>
@@ -8008,8 +8008,8 @@
         </p:nvSpPr>
         <p:spPr>
           <a:xfrm>
-            <a:off x="2415529" y="1636775"/>
-            <a:ext cx="2013533" cy="475488"/>
+            <a:off x="2415529" y="1673352"/>
+            <a:ext cx="2013533" cy="530352"/>
           </a:xfrm>
           <a:prstGeom prst="roundRect">
             <a:avLst/>
@@ -8052,7 +8052,7 @@
               <a:buNone/>
             </a:pPr>
             <a:r>
-              <a:rPr sz="950" b="1">
+              <a:rPr sz="1000" b="1">
                 <a:solidFill>
                   <a:srgbClr val="111B2A"/>
                 </a:solidFill>
@@ -8071,7 +8071,7 @@
         </p:nvSpPr>
         <p:spPr>
           <a:xfrm>
-            <a:off x="3340000" y="2121407"/>
+            <a:off x="3340000" y="2212848"/>
             <a:ext cx="164592" cy="109728"/>
           </a:xfrm>
           <a:prstGeom prst="downArrow">
@@ -8115,8 +8115,8 @@
         </p:nvSpPr>
         <p:spPr>
           <a:xfrm>
-            <a:off x="2415529" y="2240279"/>
-            <a:ext cx="2013533" cy="475488"/>
+            <a:off x="2415529" y="2331720"/>
+            <a:ext cx="2013533" cy="530352"/>
           </a:xfrm>
           <a:prstGeom prst="roundRect">
             <a:avLst/>
@@ -8159,7 +8159,7 @@
               <a:buNone/>
             </a:pPr>
             <a:r>
-              <a:rPr sz="950" b="1">
+              <a:rPr sz="1000" b="1">
                 <a:solidFill>
                   <a:srgbClr val="111B2A"/>
                 </a:solidFill>
@@ -8179,7 +8179,7 @@
               <a:buNone/>
             </a:pPr>
             <a:r>
-              <a:rPr sz="750" b="0">
+              <a:rPr sz="850" b="0">
                 <a:solidFill>
                   <a:srgbClr val="4A5A70"/>
                 </a:solidFill>
@@ -8198,7 +8198,7 @@
         </p:nvSpPr>
         <p:spPr>
           <a:xfrm>
-            <a:off x="3340000" y="2724911"/>
+            <a:off x="3340000" y="2871216"/>
             <a:ext cx="164592" cy="109728"/>
           </a:xfrm>
           <a:prstGeom prst="downArrow">
@@ -8242,8 +8242,8 @@
         </p:nvSpPr>
         <p:spPr>
           <a:xfrm>
-            <a:off x="2415529" y="2843784"/>
-            <a:ext cx="2013533" cy="475488"/>
+            <a:off x="2415529" y="2990088"/>
+            <a:ext cx="2013533" cy="530352"/>
           </a:xfrm>
           <a:prstGeom prst="roundRect">
             <a:avLst/>
@@ -8286,7 +8286,7 @@
               <a:buNone/>
             </a:pPr>
             <a:r>
-              <a:rPr sz="950" b="1">
+              <a:rPr sz="1000" b="1">
                 <a:solidFill>
                   <a:srgbClr val="111B2A"/>
                 </a:solidFill>
@@ -8306,7 +8306,7 @@
               <a:buNone/>
             </a:pPr>
             <a:r>
-              <a:rPr sz="750" b="0">
+              <a:rPr sz="850" b="0">
                 <a:solidFill>
                   <a:srgbClr val="4A5A70"/>
                 </a:solidFill>
@@ -8325,7 +8325,7 @@
         </p:nvSpPr>
         <p:spPr>
           <a:xfrm>
-            <a:off x="3340000" y="3328415"/>
+            <a:off x="3340000" y="3529584"/>
             <a:ext cx="164592" cy="109728"/>
           </a:xfrm>
           <a:prstGeom prst="downArrow">
@@ -8369,8 +8369,8 @@
         </p:nvSpPr>
         <p:spPr>
           <a:xfrm>
-            <a:off x="2415529" y="3447288"/>
-            <a:ext cx="2013533" cy="475488"/>
+            <a:off x="2415529" y="3648456"/>
+            <a:ext cx="2013533" cy="530352"/>
           </a:xfrm>
           <a:prstGeom prst="roundRect">
             <a:avLst/>
@@ -8413,7 +8413,7 @@
               <a:buNone/>
             </a:pPr>
             <a:r>
-              <a:rPr sz="950" b="1">
+              <a:rPr sz="1000" b="1">
                 <a:solidFill>
                   <a:srgbClr val="111B2A"/>
                 </a:solidFill>
@@ -8433,7 +8433,7 @@
               <a:buNone/>
             </a:pPr>
             <a:r>
-              <a:rPr sz="750" b="0">
+              <a:rPr sz="850" b="0">
                 <a:solidFill>
                   <a:srgbClr val="4A5A70"/>
                 </a:solidFill>
@@ -8453,7 +8453,7 @@
         <p:spPr>
           <a:xfrm>
             <a:off x="4666807" y="1335024"/>
-            <a:ext cx="2269627" cy="2743200"/>
+            <a:ext cx="2269627" cy="2962656"/>
           </a:xfrm>
           <a:prstGeom prst="roundRect">
             <a:avLst/>
@@ -8496,7 +8496,7 @@
               <a:buNone/>
             </a:pPr>
             <a:r>
-              <a:rPr sz="750" b="1">
+              <a:rPr sz="800" b="1">
                 <a:solidFill>
                   <a:srgbClr val="8A9BB0"/>
                 </a:solidFill>
@@ -8515,8 +8515,8 @@
         </p:nvSpPr>
         <p:spPr>
           <a:xfrm>
-            <a:off x="4758247" y="1636775"/>
-            <a:ext cx="2086747" cy="475488"/>
+            <a:off x="4758247" y="1673352"/>
+            <a:ext cx="2086747" cy="530352"/>
           </a:xfrm>
           <a:prstGeom prst="roundRect">
             <a:avLst/>
@@ -8559,7 +8559,7 @@
               <a:buNone/>
             </a:pPr>
             <a:r>
-              <a:rPr sz="950" b="1">
+              <a:rPr sz="1000" b="1">
                 <a:solidFill>
                   <a:srgbClr val="111B2A"/>
                 </a:solidFill>
@@ -8579,7 +8579,7 @@
               <a:buNone/>
             </a:pPr>
             <a:r>
-              <a:rPr sz="750" b="0">
+              <a:rPr sz="850" b="0">
                 <a:solidFill>
                   <a:srgbClr val="4A5A70"/>
                 </a:solidFill>
@@ -8598,7 +8598,7 @@
         </p:nvSpPr>
         <p:spPr>
           <a:xfrm>
-            <a:off x="5719324" y="2121407"/>
+            <a:off x="5719324" y="2212848"/>
             <a:ext cx="164592" cy="109728"/>
           </a:xfrm>
           <a:prstGeom prst="downArrow">
@@ -8642,8 +8642,8 @@
         </p:nvSpPr>
         <p:spPr>
           <a:xfrm>
-            <a:off x="4758247" y="2240279"/>
-            <a:ext cx="2086747" cy="475488"/>
+            <a:off x="4758247" y="2331720"/>
+            <a:ext cx="2086747" cy="530352"/>
           </a:xfrm>
           <a:prstGeom prst="roundRect">
             <a:avLst/>
@@ -8686,7 +8686,7 @@
               <a:buNone/>
             </a:pPr>
             <a:r>
-              <a:rPr sz="950" b="1">
+              <a:rPr sz="1000" b="1">
                 <a:solidFill>
                   <a:srgbClr val="111B2A"/>
                 </a:solidFill>
@@ -8706,7 +8706,7 @@
               <a:buNone/>
             </a:pPr>
             <a:r>
-              <a:rPr sz="750" b="0">
+              <a:rPr sz="850" b="0">
                 <a:solidFill>
                   <a:srgbClr val="4A5A70"/>
                 </a:solidFill>
@@ -8725,7 +8725,7 @@
         </p:nvSpPr>
         <p:spPr>
           <a:xfrm>
-            <a:off x="5719324" y="2724911"/>
+            <a:off x="5719324" y="2871216"/>
             <a:ext cx="164592" cy="109728"/>
           </a:xfrm>
           <a:prstGeom prst="downArrow">
@@ -8769,8 +8769,8 @@
         </p:nvSpPr>
         <p:spPr>
           <a:xfrm>
-            <a:off x="4758247" y="2843784"/>
-            <a:ext cx="2086747" cy="475488"/>
+            <a:off x="4758247" y="2990088"/>
+            <a:ext cx="2086747" cy="530352"/>
           </a:xfrm>
           <a:prstGeom prst="roundRect">
             <a:avLst/>
@@ -8813,7 +8813,7 @@
               <a:buNone/>
             </a:pPr>
             <a:r>
-              <a:rPr sz="950" b="1">
+              <a:rPr sz="1000" b="1">
                 <a:solidFill>
                   <a:srgbClr val="111B2A"/>
                 </a:solidFill>
@@ -8833,7 +8833,7 @@
               <a:buNone/>
             </a:pPr>
             <a:r>
-              <a:rPr sz="750" b="0">
+              <a:rPr sz="850" b="0">
                 <a:solidFill>
                   <a:srgbClr val="4A5A70"/>
                 </a:solidFill>
@@ -8852,7 +8852,7 @@
         </p:nvSpPr>
         <p:spPr>
           <a:xfrm>
-            <a:off x="5719324" y="3328415"/>
+            <a:off x="5719324" y="3529584"/>
             <a:ext cx="164592" cy="109728"/>
           </a:xfrm>
           <a:prstGeom prst="downArrow">
@@ -8896,8 +8896,8 @@
         </p:nvSpPr>
         <p:spPr>
           <a:xfrm>
-            <a:off x="4758247" y="3447288"/>
-            <a:ext cx="2086747" cy="475488"/>
+            <a:off x="4758247" y="3648456"/>
+            <a:ext cx="2086747" cy="530352"/>
           </a:xfrm>
           <a:prstGeom prst="roundRect">
             <a:avLst/>
@@ -8940,7 +8940,7 @@
               <a:buNone/>
             </a:pPr>
             <a:r>
-              <a:rPr sz="950" b="1">
+              <a:rPr sz="1000" b="1">
                 <a:solidFill>
                   <a:srgbClr val="111B2A"/>
                 </a:solidFill>
@@ -8960,7 +8960,7 @@
               <a:buNone/>
             </a:pPr>
             <a:r>
-              <a:rPr sz="750" b="0">
+              <a:rPr sz="850" b="0">
                 <a:solidFill>
                   <a:srgbClr val="4A5A70"/>
                 </a:solidFill>
@@ -8980,7 +8980,7 @@
         <p:spPr>
           <a:xfrm>
             <a:off x="7082738" y="1335024"/>
-            <a:ext cx="2489268" cy="1115568"/>
+            <a:ext cx="2489268" cy="1152144"/>
           </a:xfrm>
           <a:prstGeom prst="roundRect">
             <a:avLst/>
@@ -9023,7 +9023,7 @@
               <a:buNone/>
             </a:pPr>
             <a:r>
-              <a:rPr sz="750" b="1">
+              <a:rPr sz="800" b="1">
                 <a:solidFill>
                   <a:srgbClr val="8A9BB0"/>
                 </a:solidFill>
@@ -9042,7 +9042,7 @@
         </p:nvSpPr>
         <p:spPr>
           <a:xfrm>
-            <a:off x="7174178" y="1545336"/>
+            <a:off x="7174178" y="1618488"/>
             <a:ext cx="2306388" cy="237744"/>
           </a:xfrm>
           <a:prstGeom prst="roundRect">
@@ -9086,7 +9086,7 @@
               <a:buNone/>
             </a:pPr>
             <a:r>
-              <a:rPr sz="950" b="1">
+              <a:rPr sz="1000" b="1">
                 <a:solidFill>
                   <a:srgbClr val="111B2A"/>
                 </a:solidFill>
@@ -9105,8 +9105,8 @@
         </p:nvSpPr>
         <p:spPr>
           <a:xfrm>
-            <a:off x="8245076" y="1792224"/>
-            <a:ext cx="164592" cy="54864"/>
+            <a:off x="8245076" y="1865376"/>
+            <a:ext cx="164592" cy="45720"/>
           </a:xfrm>
           <a:prstGeom prst="downArrow">
             <a:avLst/>
@@ -9149,7 +9149,7 @@
         </p:nvSpPr>
         <p:spPr>
           <a:xfrm>
-            <a:off x="7174178" y="1856231"/>
+            <a:off x="7174178" y="1920240"/>
             <a:ext cx="2306388" cy="237744"/>
           </a:xfrm>
           <a:prstGeom prst="roundRect">
@@ -9193,7 +9193,7 @@
               <a:buNone/>
             </a:pPr>
             <a:r>
-              <a:rPr sz="950" b="1">
+              <a:rPr sz="1000" b="1">
                 <a:solidFill>
                   <a:srgbClr val="111B2A"/>
                 </a:solidFill>
@@ -9212,8 +9212,8 @@
         </p:nvSpPr>
         <p:spPr>
           <a:xfrm>
-            <a:off x="8245076" y="2103120"/>
-            <a:ext cx="164592" cy="54864"/>
+            <a:off x="8245076" y="2167128"/>
+            <a:ext cx="164592" cy="45720"/>
           </a:xfrm>
           <a:prstGeom prst="downArrow">
             <a:avLst/>
@@ -9256,7 +9256,7 @@
         </p:nvSpPr>
         <p:spPr>
           <a:xfrm>
-            <a:off x="7174178" y="2167128"/>
+            <a:off x="7174178" y="2221992"/>
             <a:ext cx="2306388" cy="237744"/>
           </a:xfrm>
           <a:prstGeom prst="roundRect">
@@ -9300,7 +9300,7 @@
               <a:buNone/>
             </a:pPr>
             <a:r>
-              <a:rPr sz="950" b="1">
+              <a:rPr sz="1000" b="1">
                 <a:solidFill>
                   <a:srgbClr val="111B2A"/>
                 </a:solidFill>
@@ -9319,8 +9319,8 @@
         </p:nvSpPr>
         <p:spPr>
           <a:xfrm>
-            <a:off x="7082738" y="2542032"/>
-            <a:ext cx="2489268" cy="1536192"/>
+            <a:off x="7082738" y="2578608"/>
+            <a:ext cx="2489268" cy="1719072"/>
           </a:xfrm>
           <a:prstGeom prst="roundRect">
             <a:avLst/>
@@ -9363,7 +9363,7 @@
               <a:buNone/>
             </a:pPr>
             <a:r>
-              <a:rPr sz="800" b="1">
+              <a:rPr sz="850" b="1">
                 <a:solidFill>
                   <a:srgbClr val="A83A1E"/>
                 </a:solidFill>
@@ -9382,8 +9382,8 @@
         </p:nvSpPr>
         <p:spPr>
           <a:xfrm>
-            <a:off x="7174178" y="2779775"/>
-            <a:ext cx="2306388" cy="274320"/>
+            <a:off x="7174178" y="2871215"/>
+            <a:ext cx="2306388" cy="347472"/>
           </a:xfrm>
           <a:prstGeom prst="roundRect">
             <a:avLst/>
@@ -9426,7 +9426,7 @@
               <a:buNone/>
             </a:pPr>
             <a:r>
-              <a:rPr sz="950" b="1">
+              <a:rPr sz="1000" b="1">
                 <a:solidFill>
                   <a:srgbClr val="111B2A"/>
                 </a:solidFill>
@@ -9446,7 +9446,7 @@
               <a:buNone/>
             </a:pPr>
             <a:r>
-              <a:rPr sz="750" b="0">
+              <a:rPr sz="850" b="0">
                 <a:solidFill>
                   <a:srgbClr val="4A5A70"/>
                 </a:solidFill>
@@ -9465,8 +9465,8 @@
         </p:nvSpPr>
         <p:spPr>
           <a:xfrm>
-            <a:off x="8245076" y="3063239"/>
-            <a:ext cx="164592" cy="54864"/>
+            <a:off x="8245076" y="3227831"/>
+            <a:ext cx="164592" cy="27432"/>
           </a:xfrm>
           <a:prstGeom prst="downArrow">
             <a:avLst/>
@@ -9509,8 +9509,8 @@
         </p:nvSpPr>
         <p:spPr>
           <a:xfrm>
-            <a:off x="7174178" y="3127247"/>
-            <a:ext cx="2306388" cy="274320"/>
+            <a:off x="7174178" y="3264407"/>
+            <a:ext cx="2306388" cy="347472"/>
           </a:xfrm>
           <a:prstGeom prst="roundRect">
             <a:avLst/>
@@ -9553,7 +9553,7 @@
               <a:buNone/>
             </a:pPr>
             <a:r>
-              <a:rPr sz="950" b="1">
+              <a:rPr sz="1000" b="1">
                 <a:solidFill>
                   <a:srgbClr val="111B2A"/>
                 </a:solidFill>
@@ -9573,7 +9573,7 @@
               <a:buNone/>
             </a:pPr>
             <a:r>
-              <a:rPr sz="750" b="0">
+              <a:rPr sz="850" b="0">
                 <a:solidFill>
                   <a:srgbClr val="4A5A70"/>
                 </a:solidFill>
@@ -9592,8 +9592,8 @@
         </p:nvSpPr>
         <p:spPr>
           <a:xfrm>
-            <a:off x="8245076" y="3410711"/>
-            <a:ext cx="164592" cy="54864"/>
+            <a:off x="8245076" y="3621023"/>
+            <a:ext cx="164592" cy="27432"/>
           </a:xfrm>
           <a:prstGeom prst="downArrow">
             <a:avLst/>
@@ -9636,8 +9636,8 @@
         </p:nvSpPr>
         <p:spPr>
           <a:xfrm>
-            <a:off x="7174178" y="3474719"/>
-            <a:ext cx="2306388" cy="274320"/>
+            <a:off x="7174178" y="3657599"/>
+            <a:ext cx="2306388" cy="347472"/>
           </a:xfrm>
           <a:prstGeom prst="roundRect">
             <a:avLst/>
@@ -9680,7 +9680,7 @@
               <a:buNone/>
             </a:pPr>
             <a:r>
-              <a:rPr sz="950" b="1">
+              <a:rPr sz="1000" b="1">
                 <a:solidFill>
                   <a:srgbClr val="111B2A"/>
                 </a:solidFill>
@@ -9700,7 +9700,7 @@
               <a:buNone/>
             </a:pPr>
             <a:r>
-              <a:rPr sz="750" b="0">
+              <a:rPr sz="850" b="0">
                 <a:solidFill>
                   <a:srgbClr val="4A5A70"/>
                 </a:solidFill>
@@ -9719,7 +9719,7 @@
         </p:nvSpPr>
         <p:spPr>
           <a:xfrm>
-            <a:off x="7174178" y="3803904"/>
+            <a:off x="7174178" y="4023360"/>
             <a:ext cx="2306388" cy="274320"/>
           </a:xfrm>
           <a:prstGeom prst="rect">
@@ -9763,7 +9763,7 @@
         <p:spPr>
           <a:xfrm>
             <a:off x="9718311" y="1335024"/>
-            <a:ext cx="2086592" cy="2743200"/>
+            <a:ext cx="2086592" cy="2962656"/>
           </a:xfrm>
           <a:prstGeom prst="roundRect">
             <a:avLst/>
@@ -9806,7 +9806,7 @@
               <a:buNone/>
             </a:pPr>
             <a:r>
-              <a:rPr sz="750" b="1">
+              <a:rPr sz="800" b="1">
                 <a:solidFill>
                   <a:srgbClr val="8A9BB0"/>
                 </a:solidFill>
@@ -9825,8 +9825,8 @@
         </p:nvSpPr>
         <p:spPr>
           <a:xfrm>
-            <a:off x="9809751" y="1636775"/>
-            <a:ext cx="1903712" cy="475488"/>
+            <a:off x="9809751" y="1673352"/>
+            <a:ext cx="1903712" cy="530352"/>
           </a:xfrm>
           <a:prstGeom prst="roundRect">
             <a:avLst/>
@@ -9869,7 +9869,7 @@
               <a:buNone/>
             </a:pPr>
             <a:r>
-              <a:rPr sz="950" b="1">
+              <a:rPr sz="1000" b="1">
                 <a:solidFill>
                   <a:srgbClr val="111B2A"/>
                 </a:solidFill>
@@ -9889,7 +9889,7 @@
               <a:buNone/>
             </a:pPr>
             <a:r>
-              <a:rPr sz="750" b="0">
+              <a:rPr sz="850" b="0">
                 <a:solidFill>
                   <a:srgbClr val="4A5A70"/>
                 </a:solidFill>
@@ -9908,7 +9908,7 @@
         </p:nvSpPr>
         <p:spPr>
           <a:xfrm>
-            <a:off x="10679311" y="2121407"/>
+            <a:off x="10679311" y="2212848"/>
             <a:ext cx="164592" cy="109728"/>
           </a:xfrm>
           <a:prstGeom prst="downArrow">
@@ -9952,8 +9952,8 @@
         </p:nvSpPr>
         <p:spPr>
           <a:xfrm>
-            <a:off x="9809751" y="2240279"/>
-            <a:ext cx="1903712" cy="475488"/>
+            <a:off x="9809751" y="2331720"/>
+            <a:ext cx="1903712" cy="530352"/>
           </a:xfrm>
           <a:prstGeom prst="roundRect">
             <a:avLst/>
@@ -9996,7 +9996,7 @@
               <a:buNone/>
             </a:pPr>
             <a:r>
-              <a:rPr sz="950" b="1">
+              <a:rPr sz="1000" b="1">
                 <a:solidFill>
                   <a:srgbClr val="111B2A"/>
                 </a:solidFill>
@@ -10016,7 +10016,7 @@
               <a:buNone/>
             </a:pPr>
             <a:r>
-              <a:rPr sz="750" b="0">
+              <a:rPr sz="850" b="0">
                 <a:solidFill>
                   <a:srgbClr val="4A5A70"/>
                 </a:solidFill>
@@ -10035,7 +10035,7 @@
         </p:nvSpPr>
         <p:spPr>
           <a:xfrm>
-            <a:off x="10679311" y="2724911"/>
+            <a:off x="10679311" y="2871216"/>
             <a:ext cx="164592" cy="109728"/>
           </a:xfrm>
           <a:prstGeom prst="downArrow">
@@ -10079,8 +10079,8 @@
         </p:nvSpPr>
         <p:spPr>
           <a:xfrm>
-            <a:off x="9809751" y="2843784"/>
-            <a:ext cx="1903712" cy="475488"/>
+            <a:off x="9809751" y="2990088"/>
+            <a:ext cx="1903712" cy="530352"/>
           </a:xfrm>
           <a:prstGeom prst="roundRect">
             <a:avLst/>
@@ -10123,7 +10123,7 @@
               <a:buNone/>
             </a:pPr>
             <a:r>
-              <a:rPr sz="950" b="1">
+              <a:rPr sz="1000" b="1">
                 <a:solidFill>
                   <a:srgbClr val="111B2A"/>
                 </a:solidFill>
@@ -10143,7 +10143,7 @@
               <a:buNone/>
             </a:pPr>
             <a:r>
-              <a:rPr sz="750" b="0">
+              <a:rPr sz="850" b="0">
                 <a:solidFill>
                   <a:srgbClr val="4A5A70"/>
                 </a:solidFill>
@@ -10162,7 +10162,7 @@
         </p:nvSpPr>
         <p:spPr>
           <a:xfrm>
-            <a:off x="10679311" y="3328415"/>
+            <a:off x="10679311" y="3529584"/>
             <a:ext cx="164592" cy="109728"/>
           </a:xfrm>
           <a:prstGeom prst="downArrow">
@@ -10206,8 +10206,8 @@
         </p:nvSpPr>
         <p:spPr>
           <a:xfrm>
-            <a:off x="9809751" y="3447288"/>
-            <a:ext cx="1903712" cy="475488"/>
+            <a:off x="9809751" y="3648456"/>
+            <a:ext cx="1903712" cy="530352"/>
           </a:xfrm>
           <a:prstGeom prst="roundRect">
             <a:avLst/>
@@ -10250,7 +10250,7 @@
               <a:buNone/>
             </a:pPr>
             <a:r>
-              <a:rPr sz="950" b="1">
+              <a:rPr sz="1000" b="1">
                 <a:solidFill>
                   <a:srgbClr val="111B2A"/>
                 </a:solidFill>
@@ -10270,7 +10270,7 @@
               <a:buNone/>
             </a:pPr>
             <a:r>
-              <a:rPr sz="750" b="0">
+              <a:rPr sz="850" b="0">
                 <a:solidFill>
                   <a:srgbClr val="4A5A70"/>
                 </a:solidFill>
@@ -10289,8 +10289,8 @@
         </p:nvSpPr>
         <p:spPr>
           <a:xfrm>
-            <a:off x="384048" y="4169663"/>
-            <a:ext cx="11420856" cy="658368"/>
+            <a:off x="384048" y="4389120"/>
+            <a:ext cx="11420856" cy="603504"/>
           </a:xfrm>
           <a:prstGeom prst="roundRect">
             <a:avLst/>
@@ -10333,7 +10333,7 @@
               <a:buNone/>
             </a:pPr>
             <a:r>
-              <a:rPr sz="750" b="1">
+              <a:rPr sz="800" b="1">
                 <a:solidFill>
                   <a:srgbClr val="8A9BB0"/>
                 </a:solidFill>
@@ -10352,8 +10352,8 @@
         </p:nvSpPr>
         <p:spPr>
           <a:xfrm>
-            <a:off x="512064" y="4407407"/>
-            <a:ext cx="1601724" cy="347472"/>
+            <a:off x="512064" y="4608576"/>
+            <a:ext cx="1601724" cy="329184"/>
           </a:xfrm>
           <a:prstGeom prst="roundRect">
             <a:avLst/>
@@ -10415,8 +10415,8 @@
         </p:nvSpPr>
         <p:spPr>
           <a:xfrm>
-            <a:off x="2424683" y="4407407"/>
-            <a:ext cx="1601724" cy="347472"/>
+            <a:off x="2424683" y="4608576"/>
+            <a:ext cx="1601724" cy="329184"/>
           </a:xfrm>
           <a:prstGeom prst="roundRect">
             <a:avLst/>
@@ -10478,8 +10478,8 @@
         </p:nvSpPr>
         <p:spPr>
           <a:xfrm>
-            <a:off x="4337304" y="4407407"/>
-            <a:ext cx="1601724" cy="347472"/>
+            <a:off x="4337304" y="4608576"/>
+            <a:ext cx="1601724" cy="329184"/>
           </a:xfrm>
           <a:prstGeom prst="roundRect">
             <a:avLst/>
@@ -10541,8 +10541,8 @@
         </p:nvSpPr>
         <p:spPr>
           <a:xfrm>
-            <a:off x="6249924" y="4407407"/>
-            <a:ext cx="1601724" cy="347472"/>
+            <a:off x="6249924" y="4608576"/>
+            <a:ext cx="1601724" cy="329184"/>
           </a:xfrm>
           <a:prstGeom prst="roundRect">
             <a:avLst/>
@@ -10604,8 +10604,8 @@
         </p:nvSpPr>
         <p:spPr>
           <a:xfrm>
-            <a:off x="8162543" y="4407407"/>
-            <a:ext cx="1601724" cy="347472"/>
+            <a:off x="8162543" y="4608576"/>
+            <a:ext cx="1601724" cy="329184"/>
           </a:xfrm>
           <a:prstGeom prst="roundRect">
             <a:avLst/>
@@ -10667,8 +10667,8 @@
         </p:nvSpPr>
         <p:spPr>
           <a:xfrm>
-            <a:off x="10075164" y="4407407"/>
-            <a:ext cx="1601724" cy="347472"/>
+            <a:off x="10075164" y="4608576"/>
+            <a:ext cx="1601724" cy="329184"/>
           </a:xfrm>
           <a:prstGeom prst="roundRect">
             <a:avLst/>
@@ -10730,7 +10730,7 @@
         </p:nvSpPr>
         <p:spPr>
           <a:xfrm>
-            <a:off x="2168652" y="4498847"/>
+            <a:off x="2168652" y="4690872"/>
             <a:ext cx="201168" cy="164592"/>
           </a:xfrm>
           <a:prstGeom prst="rightArrow">
@@ -10774,7 +10774,7 @@
         </p:nvSpPr>
         <p:spPr>
           <a:xfrm>
-            <a:off x="4081271" y="4498847"/>
+            <a:off x="4081271" y="4690872"/>
             <a:ext cx="201168" cy="164592"/>
           </a:xfrm>
           <a:prstGeom prst="rightArrow">
@@ -10818,7 +10818,7 @@
         </p:nvSpPr>
         <p:spPr>
           <a:xfrm>
-            <a:off x="5993892" y="4498847"/>
+            <a:off x="5993892" y="4690872"/>
             <a:ext cx="201168" cy="164592"/>
           </a:xfrm>
           <a:prstGeom prst="rightArrow">
@@ -10862,7 +10862,7 @@
         </p:nvSpPr>
         <p:spPr>
           <a:xfrm>
-            <a:off x="7906512" y="4498847"/>
+            <a:off x="7906512" y="4690872"/>
             <a:ext cx="201168" cy="164592"/>
           </a:xfrm>
           <a:prstGeom prst="rightArrow">
@@ -10906,7 +10906,7 @@
         </p:nvSpPr>
         <p:spPr>
           <a:xfrm>
-            <a:off x="9819132" y="4498847"/>
+            <a:off x="9819132" y="4690872"/>
             <a:ext cx="201168" cy="164592"/>
           </a:xfrm>
           <a:prstGeom prst="rightArrow">
@@ -10950,8 +10950,8 @@
         </p:nvSpPr>
         <p:spPr>
           <a:xfrm>
-            <a:off x="384048" y="4919472"/>
-            <a:ext cx="2167128" cy="694944"/>
+            <a:off x="384048" y="5084064"/>
+            <a:ext cx="2167128" cy="676656"/>
           </a:xfrm>
           <a:prstGeom prst="roundRect">
             <a:avLst/>
@@ -11033,8 +11033,8 @@
         </p:nvSpPr>
         <p:spPr>
           <a:xfrm>
-            <a:off x="2697480" y="4919472"/>
-            <a:ext cx="2167128" cy="694944"/>
+            <a:off x="2697480" y="5084064"/>
+            <a:ext cx="2167128" cy="676656"/>
           </a:xfrm>
           <a:prstGeom prst="roundRect">
             <a:avLst/>
@@ -11116,8 +11116,8 @@
         </p:nvSpPr>
         <p:spPr>
           <a:xfrm>
-            <a:off x="5010912" y="4919472"/>
-            <a:ext cx="2167128" cy="694944"/>
+            <a:off x="5010912" y="5084064"/>
+            <a:ext cx="2167128" cy="676656"/>
           </a:xfrm>
           <a:prstGeom prst="roundRect">
             <a:avLst/>
@@ -11199,8 +11199,8 @@
         </p:nvSpPr>
         <p:spPr>
           <a:xfrm>
-            <a:off x="7324344" y="4919472"/>
-            <a:ext cx="2167128" cy="694944"/>
+            <a:off x="7324344" y="5084064"/>
+            <a:ext cx="2167128" cy="676656"/>
           </a:xfrm>
           <a:prstGeom prst="roundRect">
             <a:avLst/>
@@ -11282,8 +11282,8 @@
         </p:nvSpPr>
         <p:spPr>
           <a:xfrm>
-            <a:off x="9637776" y="4919472"/>
-            <a:ext cx="2167128" cy="694944"/>
+            <a:off x="9637776" y="5084064"/>
+            <a:ext cx="2167128" cy="676656"/>
           </a:xfrm>
           <a:prstGeom prst="roundRect">
             <a:avLst/>
@@ -11365,7 +11365,7 @@
         </p:nvSpPr>
         <p:spPr>
           <a:xfrm>
-            <a:off x="384048" y="5687568"/>
+            <a:off x="384048" y="5833872"/>
             <a:ext cx="11420856" cy="310896"/>
           </a:xfrm>
           <a:prstGeom prst="rect">
@@ -15550,7 +15550,7 @@
               <a:buNone/>
             </a:pPr>
             <a:r>
-              <a:rPr sz="750" b="1">
+              <a:rPr sz="800" b="1">
                 <a:solidFill>
                   <a:srgbClr val="8A9BB0"/>
                 </a:solidFill>
@@ -15613,7 +15613,7 @@
               <a:buNone/>
             </a:pPr>
             <a:r>
-              <a:rPr sz="950" b="1">
+              <a:rPr sz="1000" b="1">
                 <a:solidFill>
                   <a:srgbClr val="111B2A"/>
                 </a:solidFill>
@@ -15633,7 +15633,7 @@
               <a:buNone/>
             </a:pPr>
             <a:r>
-              <a:rPr sz="850" b="0">
+              <a:rPr sz="900" b="0">
                 <a:solidFill>
                   <a:srgbClr val="4A5A70"/>
                 </a:solidFill>
@@ -15696,7 +15696,7 @@
               <a:buNone/>
             </a:pPr>
             <a:r>
-              <a:rPr sz="950" b="1">
+              <a:rPr sz="1000" b="1">
                 <a:solidFill>
                   <a:srgbClr val="111B2A"/>
                 </a:solidFill>
@@ -15716,7 +15716,7 @@
               <a:buNone/>
             </a:pPr>
             <a:r>
-              <a:rPr sz="850" b="0">
+              <a:rPr sz="900" b="0">
                 <a:solidFill>
                   <a:srgbClr val="4A5A70"/>
                 </a:solidFill>
@@ -15779,7 +15779,7 @@
               <a:buNone/>
             </a:pPr>
             <a:r>
-              <a:rPr sz="950" b="1">
+              <a:rPr sz="1000" b="1">
                 <a:solidFill>
                   <a:srgbClr val="111B2A"/>
                 </a:solidFill>
@@ -15799,7 +15799,7 @@
               <a:buNone/>
             </a:pPr>
             <a:r>
-              <a:rPr sz="850" b="0">
+              <a:rPr sz="900" b="0">
                 <a:solidFill>
                   <a:srgbClr val="4A5A70"/>
                 </a:solidFill>
@@ -15862,7 +15862,7 @@
               <a:buNone/>
             </a:pPr>
             <a:r>
-              <a:rPr sz="950" b="1">
+              <a:rPr sz="1000" b="1">
                 <a:solidFill>
                   <a:srgbClr val="111B2A"/>
                 </a:solidFill>
@@ -15882,7 +15882,7 @@
               <a:buNone/>
             </a:pPr>
             <a:r>
-              <a:rPr sz="850" b="0">
+              <a:rPr sz="900" b="0">
                 <a:solidFill>
                   <a:srgbClr val="4A5A70"/>
                 </a:solidFill>
@@ -15945,7 +15945,7 @@
               <a:buNone/>
             </a:pPr>
             <a:r>
-              <a:rPr sz="950" b="1">
+              <a:rPr sz="1000" b="1">
                 <a:solidFill>
                   <a:srgbClr val="111B2A"/>
                 </a:solidFill>
@@ -15965,7 +15965,7 @@
               <a:buNone/>
             </a:pPr>
             <a:r>
-              <a:rPr sz="850" b="0">
+              <a:rPr sz="900" b="0">
                 <a:solidFill>
                   <a:srgbClr val="4A5A70"/>
                 </a:solidFill>
@@ -16028,7 +16028,7 @@
               <a:buNone/>
             </a:pPr>
             <a:r>
-              <a:rPr sz="950" b="1">
+              <a:rPr sz="1000" b="1">
                 <a:solidFill>
                   <a:srgbClr val="111B2A"/>
                 </a:solidFill>
@@ -16048,7 +16048,7 @@
               <a:buNone/>
             </a:pPr>
             <a:r>
-              <a:rPr sz="850" b="0">
+              <a:rPr sz="900" b="0">
                 <a:solidFill>
                   <a:srgbClr val="4A5A70"/>
                 </a:solidFill>
